--- a/永井芽衣_Rpart3.pptx
+++ b/永井芽衣_Rpart3.pptx
@@ -7,6 +7,9 @@
   <p:sldIdLst>
     <p:sldId id="256" r:id="rId2"/>
     <p:sldId id="257" r:id="rId3"/>
+    <p:sldId id="260" r:id="rId4"/>
+    <p:sldId id="258" r:id="rId5"/>
+    <p:sldId id="259" r:id="rId6"/>
   </p:sldIdLst>
   <p:sldSz cx="12192000" cy="6858000"/>
   <p:notesSz cx="6858000" cy="9144000"/>
@@ -105,6 +108,11 @@
       </a:defRPr>
     </a:lvl9pPr>
   </p:defaultTextStyle>
+  <p:extLst>
+    <p:ext uri="{EFAFB233-063F-42B5-8137-9DF3F51BA10A}">
+      <p15:sldGuideLst xmlns:p15="http://schemas.microsoft.com/office/powerpoint/2012/main"/>
+    </p:ext>
+  </p:extLst>
 </p:presentation>
 </file>
 
@@ -255,7 +263,7 @@
           <a:p>
             <a:fld id="{41BDD009-2AE7-4B3F-8458-2328013CE102}" type="datetimeFigureOut">
               <a:rPr kumimoji="1" lang="ja-JP" altLang="en-US" smtClean="0"/>
-              <a:t>2026/8/3</a:t>
+              <a:t>2026/8/8</a:t>
             </a:fld>
             <a:endParaRPr kumimoji="1" lang="ja-JP" altLang="en-US"/>
           </a:p>
@@ -485,7 +493,7 @@
           <a:p>
             <a:fld id="{41BDD009-2AE7-4B3F-8458-2328013CE102}" type="datetimeFigureOut">
               <a:rPr kumimoji="1" lang="ja-JP" altLang="en-US" smtClean="0"/>
-              <a:t>2026/8/3</a:t>
+              <a:t>2026/8/8</a:t>
             </a:fld>
             <a:endParaRPr kumimoji="1" lang="ja-JP" altLang="en-US"/>
           </a:p>
@@ -725,7 +733,7 @@
           <a:p>
             <a:fld id="{41BDD009-2AE7-4B3F-8458-2328013CE102}" type="datetimeFigureOut">
               <a:rPr kumimoji="1" lang="ja-JP" altLang="en-US" smtClean="0"/>
-              <a:t>2026/8/3</a:t>
+              <a:t>2026/8/8</a:t>
             </a:fld>
             <a:endParaRPr kumimoji="1" lang="ja-JP" altLang="en-US"/>
           </a:p>
@@ -955,7 +963,7 @@
           <a:p>
             <a:fld id="{41BDD009-2AE7-4B3F-8458-2328013CE102}" type="datetimeFigureOut">
               <a:rPr kumimoji="1" lang="ja-JP" altLang="en-US" smtClean="0"/>
-              <a:t>2026/8/3</a:t>
+              <a:t>2026/8/8</a:t>
             </a:fld>
             <a:endParaRPr kumimoji="1" lang="ja-JP" altLang="en-US"/>
           </a:p>
@@ -1230,7 +1238,7 @@
           <a:p>
             <a:fld id="{41BDD009-2AE7-4B3F-8458-2328013CE102}" type="datetimeFigureOut">
               <a:rPr kumimoji="1" lang="ja-JP" altLang="en-US" smtClean="0"/>
-              <a:t>2026/8/3</a:t>
+              <a:t>2026/8/8</a:t>
             </a:fld>
             <a:endParaRPr kumimoji="1" lang="ja-JP" altLang="en-US"/>
           </a:p>
@@ -1559,7 +1567,7 @@
           <a:p>
             <a:fld id="{41BDD009-2AE7-4B3F-8458-2328013CE102}" type="datetimeFigureOut">
               <a:rPr kumimoji="1" lang="ja-JP" altLang="en-US" smtClean="0"/>
-              <a:t>2026/8/3</a:t>
+              <a:t>2026/8/8</a:t>
             </a:fld>
             <a:endParaRPr kumimoji="1" lang="ja-JP" altLang="en-US"/>
           </a:p>
@@ -2035,7 +2043,7 @@
           <a:p>
             <a:fld id="{41BDD009-2AE7-4B3F-8458-2328013CE102}" type="datetimeFigureOut">
               <a:rPr kumimoji="1" lang="ja-JP" altLang="en-US" smtClean="0"/>
-              <a:t>2026/8/3</a:t>
+              <a:t>2026/8/8</a:t>
             </a:fld>
             <a:endParaRPr kumimoji="1" lang="ja-JP" altLang="en-US"/>
           </a:p>
@@ -2176,7 +2184,7 @@
           <a:p>
             <a:fld id="{41BDD009-2AE7-4B3F-8458-2328013CE102}" type="datetimeFigureOut">
               <a:rPr kumimoji="1" lang="ja-JP" altLang="en-US" smtClean="0"/>
-              <a:t>2026/8/3</a:t>
+              <a:t>2026/8/8</a:t>
             </a:fld>
             <a:endParaRPr kumimoji="1" lang="ja-JP" altLang="en-US"/>
           </a:p>
@@ -2289,7 +2297,7 @@
           <a:p>
             <a:fld id="{41BDD009-2AE7-4B3F-8458-2328013CE102}" type="datetimeFigureOut">
               <a:rPr kumimoji="1" lang="ja-JP" altLang="en-US" smtClean="0"/>
-              <a:t>2026/8/3</a:t>
+              <a:t>2026/8/8</a:t>
             </a:fld>
             <a:endParaRPr kumimoji="1" lang="ja-JP" altLang="en-US"/>
           </a:p>
@@ -2632,7 +2640,7 @@
           <a:p>
             <a:fld id="{41BDD009-2AE7-4B3F-8458-2328013CE102}" type="datetimeFigureOut">
               <a:rPr kumimoji="1" lang="ja-JP" altLang="en-US" smtClean="0"/>
-              <a:t>2026/8/3</a:t>
+              <a:t>2026/8/8</a:t>
             </a:fld>
             <a:endParaRPr kumimoji="1" lang="ja-JP" altLang="en-US"/>
           </a:p>
@@ -2920,7 +2928,7 @@
           <a:p>
             <a:fld id="{41BDD009-2AE7-4B3F-8458-2328013CE102}" type="datetimeFigureOut">
               <a:rPr kumimoji="1" lang="ja-JP" altLang="en-US" smtClean="0"/>
-              <a:t>2026/8/3</a:t>
+              <a:t>2026/8/8</a:t>
             </a:fld>
             <a:endParaRPr kumimoji="1" lang="ja-JP" altLang="en-US"/>
           </a:p>
@@ -3193,7 +3201,7 @@
           <a:p>
             <a:fld id="{41BDD009-2AE7-4B3F-8458-2328013CE102}" type="datetimeFigureOut">
               <a:rPr kumimoji="1" lang="ja-JP" altLang="en-US" smtClean="0"/>
-              <a:t>2026/8/3</a:t>
+              <a:t>2026/8/8</a:t>
             </a:fld>
             <a:endParaRPr kumimoji="1" lang="ja-JP" altLang="en-US"/>
           </a:p>
@@ -3639,37 +3647,118 @@
           <a:lstStyle/>
           <a:p>
             <a:r>
-              <a:rPr kumimoji="1" lang="ja-JP" altLang="en-US" b="1" dirty="0"/>
+              <a:rPr kumimoji="1" lang="ja-JP" altLang="en-US" b="1" dirty="0">
+                <a:solidFill>
+                  <a:schemeClr val="tx1">
+                    <a:lumMod val="65000"/>
+                    <a:lumOff val="35000"/>
+                  </a:schemeClr>
+                </a:solidFill>
+                <a:latin typeface="メイリオ" panose="020B0604030504040204" pitchFamily="50" charset="-128"/>
+                <a:ea typeface="メイリオ" panose="020B0604030504040204" pitchFamily="50" charset="-128"/>
+              </a:rPr>
               <a:t>「</a:t>
             </a:r>
             <a:r>
-              <a:rPr kumimoji="1" lang="en-US" altLang="ja-JP" b="1" dirty="0"/>
+              <a:rPr kumimoji="1" lang="en-US" altLang="ja-JP" b="1" dirty="0">
+                <a:solidFill>
+                  <a:schemeClr val="tx1">
+                    <a:lumMod val="65000"/>
+                    <a:lumOff val="35000"/>
+                  </a:schemeClr>
+                </a:solidFill>
+                <a:latin typeface="メイリオ" panose="020B0604030504040204" pitchFamily="50" charset="-128"/>
+                <a:ea typeface="メイリオ" panose="020B0604030504040204" pitchFamily="50" charset="-128"/>
+              </a:rPr>
               <a:t>RStudio</a:t>
             </a:r>
             <a:r>
-              <a:rPr kumimoji="1" lang="ja-JP" altLang="en-US" b="1" dirty="0"/>
+              <a:rPr kumimoji="1" lang="ja-JP" altLang="en-US" b="1" dirty="0">
+                <a:solidFill>
+                  <a:schemeClr val="tx1">
+                    <a:lumMod val="65000"/>
+                    <a:lumOff val="35000"/>
+                  </a:schemeClr>
+                </a:solidFill>
+                <a:latin typeface="メイリオ" panose="020B0604030504040204" pitchFamily="50" charset="-128"/>
+                <a:ea typeface="メイリオ" panose="020B0604030504040204" pitchFamily="50" charset="-128"/>
+              </a:rPr>
               <a:t>ではじめる</a:t>
             </a:r>
             <a:br>
-              <a:rPr kumimoji="1" lang="en-US" altLang="ja-JP" b="1" dirty="0"/>
+              <a:rPr kumimoji="1" lang="en-US" altLang="ja-JP" b="1" dirty="0">
+                <a:solidFill>
+                  <a:schemeClr val="tx1">
+                    <a:lumMod val="65000"/>
+                    <a:lumOff val="35000"/>
+                  </a:schemeClr>
+                </a:solidFill>
+                <a:latin typeface="メイリオ" panose="020B0604030504040204" pitchFamily="50" charset="-128"/>
+                <a:ea typeface="メイリオ" panose="020B0604030504040204" pitchFamily="50" charset="-128"/>
+              </a:rPr>
             </a:br>
             <a:r>
-              <a:rPr kumimoji="1" lang="en-US" altLang="ja-JP" b="1" dirty="0"/>
+              <a:rPr kumimoji="1" lang="en-US" altLang="ja-JP" b="1" dirty="0">
+                <a:solidFill>
+                  <a:schemeClr val="tx1">
+                    <a:lumMod val="65000"/>
+                    <a:lumOff val="35000"/>
+                  </a:schemeClr>
+                </a:solidFill>
+                <a:latin typeface="メイリオ" panose="020B0604030504040204" pitchFamily="50" charset="-128"/>
+                <a:ea typeface="メイリオ" panose="020B0604030504040204" pitchFamily="50" charset="-128"/>
+              </a:rPr>
               <a:t>R</a:t>
             </a:r>
             <a:r>
-              <a:rPr kumimoji="1" lang="ja-JP" altLang="en-US" b="1" dirty="0"/>
+              <a:rPr kumimoji="1" lang="ja-JP" altLang="en-US" b="1" dirty="0">
+                <a:solidFill>
+                  <a:schemeClr val="tx1">
+                    <a:lumMod val="65000"/>
+                    <a:lumOff val="35000"/>
+                  </a:schemeClr>
+                </a:solidFill>
+                <a:latin typeface="メイリオ" panose="020B0604030504040204" pitchFamily="50" charset="-128"/>
+                <a:ea typeface="メイリオ" panose="020B0604030504040204" pitchFamily="50" charset="-128"/>
+              </a:rPr>
               <a:t>プログラミング入門」</a:t>
             </a:r>
             <a:r>
-              <a:rPr lang="en-US" altLang="ja-JP" b="1" dirty="0"/>
+              <a:rPr lang="en-US" altLang="ja-JP" b="1" dirty="0">
+                <a:solidFill>
+                  <a:schemeClr val="tx1">
+                    <a:lumMod val="65000"/>
+                    <a:lumOff val="35000"/>
+                  </a:schemeClr>
+                </a:solidFill>
+                <a:latin typeface="メイリオ" panose="020B0604030504040204" pitchFamily="50" charset="-128"/>
+                <a:ea typeface="メイリオ" panose="020B0604030504040204" pitchFamily="50" charset="-128"/>
+              </a:rPr>
               <a:t>Ⅲ</a:t>
             </a:r>
             <a:r>
-              <a:rPr lang="ja-JP" altLang="en-US" b="1" dirty="0"/>
+              <a:rPr lang="ja-JP" altLang="en-US" b="1" dirty="0">
+                <a:solidFill>
+                  <a:schemeClr val="tx1">
+                    <a:lumMod val="65000"/>
+                    <a:lumOff val="35000"/>
+                  </a:schemeClr>
+                </a:solidFill>
+                <a:latin typeface="メイリオ" panose="020B0604030504040204" pitchFamily="50" charset="-128"/>
+                <a:ea typeface="メイリオ" panose="020B0604030504040204" pitchFamily="50" charset="-128"/>
+              </a:rPr>
               <a:t>演習</a:t>
             </a:r>
-            <a:endParaRPr kumimoji="1" lang="ja-JP" altLang="en-US" b="1" dirty="0"/>
+            <a:endParaRPr kumimoji="1" lang="ja-JP" altLang="en-US" b="1" dirty="0">
+              <a:solidFill>
+                <a:schemeClr val="tx1">
+                  <a:lumMod val="65000"/>
+                  <a:lumOff val="35000"/>
+                </a:schemeClr>
+              </a:solidFill>
+              <a:latin typeface="メイリオ" panose="020B0604030504040204" pitchFamily="50" charset="-128"/>
+              <a:ea typeface="メイリオ" panose="020B0604030504040204" pitchFamily="50" charset="-128"/>
+            </a:endParaRPr>
           </a:p>
         </p:txBody>
       </p:sp>
@@ -3700,14 +3789,41 @@
           <a:lstStyle/>
           <a:p>
             <a:r>
-              <a:rPr lang="en-US" altLang="ja-JP" b="1" dirty="0"/>
+              <a:rPr lang="en-US" altLang="ja-JP" b="1" dirty="0">
+                <a:solidFill>
+                  <a:schemeClr val="tx1">
+                    <a:lumMod val="65000"/>
+                    <a:lumOff val="35000"/>
+                  </a:schemeClr>
+                </a:solidFill>
+                <a:latin typeface="メイリオ" panose="020B0604030504040204" pitchFamily="50" charset="-128"/>
+                <a:ea typeface="メイリオ" panose="020B0604030504040204" pitchFamily="50" charset="-128"/>
+              </a:rPr>
               <a:t>24510171 </a:t>
             </a:r>
             <a:r>
-              <a:rPr lang="ja-JP" altLang="en-US" b="1" dirty="0"/>
+              <a:rPr lang="ja-JP" altLang="en-US" b="1" dirty="0">
+                <a:solidFill>
+                  <a:schemeClr val="tx1">
+                    <a:lumMod val="65000"/>
+                    <a:lumOff val="35000"/>
+                  </a:schemeClr>
+                </a:solidFill>
+                <a:latin typeface="メイリオ" panose="020B0604030504040204" pitchFamily="50" charset="-128"/>
+                <a:ea typeface="メイリオ" panose="020B0604030504040204" pitchFamily="50" charset="-128"/>
+              </a:rPr>
               <a:t>永井芽衣</a:t>
             </a:r>
-            <a:endParaRPr kumimoji="1" lang="ja-JP" altLang="en-US" b="1" dirty="0"/>
+            <a:endParaRPr kumimoji="1" lang="ja-JP" altLang="en-US" b="1" dirty="0">
+              <a:solidFill>
+                <a:schemeClr val="tx1">
+                  <a:lumMod val="65000"/>
+                  <a:lumOff val="35000"/>
+                </a:schemeClr>
+              </a:solidFill>
+              <a:latin typeface="メイリオ" panose="020B0604030504040204" pitchFamily="50" charset="-128"/>
+              <a:ea typeface="メイリオ" panose="020B0604030504040204" pitchFamily="50" charset="-128"/>
+            </a:endParaRPr>
           </a:p>
         </p:txBody>
       </p:sp>
@@ -3765,17 +3881,218 @@
         </p:spPr>
         <p:txBody>
           <a:bodyPr>
+            <a:normAutofit fontScale="90000"/>
+          </a:bodyPr>
+          <a:lstStyle/>
+          <a:p>
+            <a:pPr algn="l"/>
+            <a:r>
+              <a:rPr kumimoji="1" lang="en-US" altLang="ja-JP" sz="3000" b="1" dirty="0">
+                <a:solidFill>
+                  <a:schemeClr val="tx1">
+                    <a:lumMod val="65000"/>
+                    <a:lumOff val="35000"/>
+                  </a:schemeClr>
+                </a:solidFill>
+                <a:latin typeface="メイリオ" panose="020B0604030504040204" pitchFamily="50" charset="-128"/>
+                <a:ea typeface="メイリオ" panose="020B0604030504040204" pitchFamily="50" charset="-128"/>
+              </a:rPr>
+              <a:t>7</a:t>
+            </a:r>
+            <a:r>
+              <a:rPr kumimoji="1" lang="ja-JP" altLang="en-US" sz="3000" b="1" dirty="0">
+                <a:solidFill>
+                  <a:schemeClr val="tx1">
+                    <a:lumMod val="65000"/>
+                    <a:lumOff val="35000"/>
+                  </a:schemeClr>
+                </a:solidFill>
+                <a:latin typeface="メイリオ" panose="020B0604030504040204" pitchFamily="50" charset="-128"/>
+                <a:ea typeface="メイリオ" panose="020B0604030504040204" pitchFamily="50" charset="-128"/>
+              </a:rPr>
+              <a:t>章　プログラム　フローチャート</a:t>
+            </a:r>
+          </a:p>
+        </p:txBody>
+      </p:sp>
+      <p:sp>
+        <p:nvSpPr>
+          <p:cNvPr id="4" name="正方形/長方形 3">
+            <a:extLst>
+              <a:ext uri="{FF2B5EF4-FFF2-40B4-BE49-F238E27FC236}">
+                <a16:creationId xmlns:a16="http://schemas.microsoft.com/office/drawing/2014/main" id="{578782C7-6070-7C3A-DAB7-3101F4C6ED5C}"/>
+              </a:ext>
+            </a:extLst>
+          </p:cNvPr>
+          <p:cNvSpPr/>
+          <p:nvPr/>
+        </p:nvSpPr>
+        <p:spPr>
+          <a:xfrm>
+            <a:off x="884439" y="1109610"/>
+            <a:ext cx="9440262" cy="5528957"/>
+          </a:xfrm>
+          <a:prstGeom prst="rect">
+            <a:avLst/>
+          </a:prstGeom>
+          <a:solidFill>
+            <a:schemeClr val="accent4">
+              <a:lumMod val="40000"/>
+              <a:lumOff val="60000"/>
+            </a:schemeClr>
+          </a:solidFill>
+          <a:ln>
+            <a:noFill/>
+          </a:ln>
+        </p:spPr>
+        <p:style>
+          <a:lnRef idx="2">
+            <a:schemeClr val="accent1">
+              <a:shade val="15000"/>
+            </a:schemeClr>
+          </a:lnRef>
+          <a:fillRef idx="1">
+            <a:schemeClr val="accent1"/>
+          </a:fillRef>
+          <a:effectRef idx="0">
+            <a:schemeClr val="accent1"/>
+          </a:effectRef>
+          <a:fontRef idx="minor">
+            <a:schemeClr val="lt1"/>
+          </a:fontRef>
+        </p:style>
+        <p:txBody>
+          <a:bodyPr rtlCol="0" anchor="t"/>
+          <a:lstStyle/>
+          <a:p>
+            <a:endParaRPr kumimoji="1" lang="ja-JP" altLang="en-US" dirty="0"/>
+          </a:p>
+        </p:txBody>
+      </p:sp>
+      <p:sp>
+        <p:nvSpPr>
+          <p:cNvPr id="3" name="字幕 2">
+            <a:extLst>
+              <a:ext uri="{FF2B5EF4-FFF2-40B4-BE49-F238E27FC236}">
+                <a16:creationId xmlns:a16="http://schemas.microsoft.com/office/drawing/2014/main" id="{EF422FEA-2F34-70ED-56A9-01A65A2AD142}"/>
+              </a:ext>
+            </a:extLst>
+          </p:cNvPr>
+          <p:cNvSpPr>
+            <a:spLocks noGrp="1"/>
+          </p:cNvSpPr>
+          <p:nvPr>
+            <p:ph type="subTitle" idx="1"/>
+          </p:nvPr>
+        </p:nvSpPr>
+        <p:spPr>
+          <a:xfrm>
+            <a:off x="884439" y="1097282"/>
+            <a:ext cx="9391483" cy="5446283"/>
+          </a:xfrm>
+        </p:spPr>
+        <p:txBody>
+          <a:bodyPr>
             <a:normAutofit/>
           </a:bodyPr>
           <a:lstStyle/>
           <a:p>
             <a:pPr algn="l"/>
-            <a:r>
-              <a:rPr kumimoji="1" lang="en-US" altLang="ja-JP" sz="3000" b="1" dirty="0"/>
+            <a:endParaRPr kumimoji="1" lang="ja-JP" altLang="en-US" sz="2000" dirty="0">
+              <a:solidFill>
+                <a:schemeClr val="accent4">
+                  <a:lumMod val="75000"/>
+                </a:schemeClr>
+              </a:solidFill>
+              <a:latin typeface="メイリオ" panose="020B0604030504040204" pitchFamily="50" charset="-128"/>
+              <a:ea typeface="メイリオ" panose="020B0604030504040204" pitchFamily="50" charset="-128"/>
+            </a:endParaRPr>
+          </a:p>
+        </p:txBody>
+      </p:sp>
+    </p:spTree>
+    <p:extLst>
+      <p:ext uri="{BB962C8B-B14F-4D97-AF65-F5344CB8AC3E}">
+        <p14:creationId xmlns:p14="http://schemas.microsoft.com/office/powerpoint/2010/main" val="3431739928"/>
+      </p:ext>
+    </p:extLst>
+  </p:cSld>
+  <p:clrMapOvr>
+    <a:masterClrMapping/>
+  </p:clrMapOvr>
+</p:sld>
+</file>
+
+<file path=ppt/slides/slide3.xml><?xml version="1.0" encoding="utf-8"?>
+<p:sld xmlns:a="http://schemas.openxmlformats.org/drawingml/2006/main" xmlns:r="http://schemas.openxmlformats.org/officeDocument/2006/relationships" xmlns:p="http://schemas.openxmlformats.org/presentationml/2006/main">
+  <p:cSld>
+    <p:spTree>
+      <p:nvGrpSpPr>
+        <p:cNvPr id="1" name=""/>
+        <p:cNvGrpSpPr/>
+        <p:nvPr/>
+      </p:nvGrpSpPr>
+      <p:grpSpPr>
+        <a:xfrm>
+          <a:off x="0" y="0"/>
+          <a:ext cx="0" cy="0"/>
+          <a:chOff x="0" y="0"/>
+          <a:chExt cx="0" cy="0"/>
+        </a:xfrm>
+      </p:grpSpPr>
+      <p:sp>
+        <p:nvSpPr>
+          <p:cNvPr id="2" name="タイトル 1">
+            <a:extLst>
+              <a:ext uri="{FF2B5EF4-FFF2-40B4-BE49-F238E27FC236}">
+                <a16:creationId xmlns:a16="http://schemas.microsoft.com/office/drawing/2014/main" id="{8F92D15D-6ED6-F1E2-415D-C5D0D0CAAC83}"/>
+              </a:ext>
+            </a:extLst>
+          </p:cNvPr>
+          <p:cNvSpPr>
+            <a:spLocks noGrp="1"/>
+          </p:cNvSpPr>
+          <p:nvPr>
+            <p:ph type="ctrTitle"/>
+          </p:nvPr>
+        </p:nvSpPr>
+        <p:spPr>
+          <a:xfrm>
+            <a:off x="528181" y="314435"/>
+            <a:ext cx="5891408" cy="700173"/>
+          </a:xfrm>
+        </p:spPr>
+        <p:txBody>
+          <a:bodyPr>
+            <a:normAutofit/>
+          </a:bodyPr>
+          <a:lstStyle/>
+          <a:p>
+            <a:pPr algn="l"/>
+            <a:r>
+              <a:rPr kumimoji="1" lang="en-US" altLang="ja-JP" sz="3000" b="1" dirty="0">
+                <a:solidFill>
+                  <a:schemeClr val="tx1">
+                    <a:lumMod val="65000"/>
+                    <a:lumOff val="35000"/>
+                  </a:schemeClr>
+                </a:solidFill>
+                <a:latin typeface="メイリオ" panose="020B0604030504040204" pitchFamily="50" charset="-128"/>
+                <a:ea typeface="メイリオ" panose="020B0604030504040204" pitchFamily="50" charset="-128"/>
+              </a:rPr>
               <a:t>7</a:t>
             </a:r>
             <a:r>
-              <a:rPr kumimoji="1" lang="ja-JP" altLang="en-US" sz="3000" b="1" dirty="0"/>
+              <a:rPr kumimoji="1" lang="ja-JP" altLang="en-US" sz="3000" b="1" dirty="0">
+                <a:solidFill>
+                  <a:schemeClr val="tx1">
+                    <a:lumMod val="65000"/>
+                    <a:lumOff val="35000"/>
+                  </a:schemeClr>
+                </a:solidFill>
+                <a:latin typeface="メイリオ" panose="020B0604030504040204" pitchFamily="50" charset="-128"/>
+                <a:ea typeface="メイリオ" panose="020B0604030504040204" pitchFamily="50" charset="-128"/>
+              </a:rPr>
               <a:t>章　プログラム</a:t>
             </a:r>
           </a:p>
@@ -3795,8 +4112,8 @@
         </p:nvSpPr>
         <p:spPr>
           <a:xfrm>
-            <a:off x="1121078" y="1315232"/>
-            <a:ext cx="9018740" cy="5047989"/>
+            <a:off x="860050" y="1014608"/>
+            <a:ext cx="9440262" cy="5528957"/>
           </a:xfrm>
           <a:prstGeom prst="rect">
             <a:avLst/>
@@ -3837,10 +4154,473 @@
       </p:sp>
       <p:sp>
         <p:nvSpPr>
-          <p:cNvPr id="5" name="正方形/長方形 4">
-            <a:extLst>
-              <a:ext uri="{FF2B5EF4-FFF2-40B4-BE49-F238E27FC236}">
-                <a16:creationId xmlns:a16="http://schemas.microsoft.com/office/drawing/2014/main" id="{CF0C4CB1-F083-E867-F352-7E25984AC542}"/>
+          <p:cNvPr id="3" name="字幕 2">
+            <a:extLst>
+              <a:ext uri="{FF2B5EF4-FFF2-40B4-BE49-F238E27FC236}">
+                <a16:creationId xmlns:a16="http://schemas.microsoft.com/office/drawing/2014/main" id="{EF422FEA-2F34-70ED-56A9-01A65A2AD142}"/>
+              </a:ext>
+            </a:extLst>
+          </p:cNvPr>
+          <p:cNvSpPr>
+            <a:spLocks noGrp="1"/>
+          </p:cNvSpPr>
+          <p:nvPr>
+            <p:ph type="subTitle" idx="1"/>
+          </p:nvPr>
+        </p:nvSpPr>
+        <p:spPr>
+          <a:xfrm>
+            <a:off x="884440" y="1059656"/>
+            <a:ext cx="9391483" cy="5446283"/>
+          </a:xfrm>
+        </p:spPr>
+        <p:txBody>
+          <a:bodyPr>
+            <a:normAutofit/>
+          </a:bodyPr>
+          <a:lstStyle/>
+          <a:p>
+            <a:pPr algn="l"/>
+            <a:r>
+              <a:rPr kumimoji="1" lang="ja-JP" altLang="en-US" sz="2000" dirty="0">
+                <a:solidFill>
+                  <a:schemeClr val="accent4">
+                    <a:lumMod val="75000"/>
+                  </a:schemeClr>
+                </a:solidFill>
+                <a:latin typeface="メイリオ" panose="020B0604030504040204" pitchFamily="50" charset="-128"/>
+                <a:ea typeface="メイリオ" panose="020B0604030504040204" pitchFamily="50" charset="-128"/>
+              </a:rPr>
+              <a:t>＃＃スロットを回す</a:t>
+            </a:r>
+            <a:endParaRPr kumimoji="1" lang="en-US" altLang="ja-JP" sz="2000" dirty="0">
+              <a:solidFill>
+                <a:schemeClr val="accent4">
+                  <a:lumMod val="75000"/>
+                </a:schemeClr>
+              </a:solidFill>
+              <a:latin typeface="メイリオ" panose="020B0604030504040204" pitchFamily="50" charset="-128"/>
+              <a:ea typeface="メイリオ" panose="020B0604030504040204" pitchFamily="50" charset="-128"/>
+            </a:endParaRPr>
+          </a:p>
+          <a:p>
+            <a:pPr algn="l"/>
+            <a:r>
+              <a:rPr lang="ja-JP" altLang="en-US" sz="1200" dirty="0">
+                <a:latin typeface="メイリオ" panose="020B0604030504040204" pitchFamily="50" charset="-128"/>
+                <a:ea typeface="メイリオ" panose="020B0604030504040204" pitchFamily="50" charset="-128"/>
+              </a:rPr>
+              <a:t>関数名：</a:t>
+            </a:r>
+            <a:r>
+              <a:rPr lang="en-US" altLang="ja-JP" sz="1200" dirty="0">
+                <a:latin typeface="メイリオ" panose="020B0604030504040204" pitchFamily="50" charset="-128"/>
+                <a:ea typeface="メイリオ" panose="020B0604030504040204" pitchFamily="50" charset="-128"/>
+              </a:rPr>
+              <a:t>symbols</a:t>
+            </a:r>
+          </a:p>
+          <a:p>
+            <a:pPr algn="l"/>
+            <a:r>
+              <a:rPr lang="ja-JP" altLang="en-US" sz="1200" dirty="0">
+                <a:latin typeface="メイリオ" panose="020B0604030504040204" pitchFamily="50" charset="-128"/>
+                <a:ea typeface="メイリオ" panose="020B0604030504040204" pitchFamily="50" charset="-128"/>
+              </a:rPr>
+              <a:t>実行内容１：文字列のベクトル</a:t>
+            </a:r>
+            <a:r>
+              <a:rPr lang="en-US" altLang="ja-JP" sz="1200" dirty="0">
+                <a:latin typeface="メイリオ" panose="020B0604030504040204" pitchFamily="50" charset="-128"/>
+                <a:ea typeface="メイリオ" panose="020B0604030504040204" pitchFamily="50" charset="-128"/>
+              </a:rPr>
+              <a:t>(DD,7,BBB,BB,B,C,0)</a:t>
+            </a:r>
+            <a:r>
+              <a:rPr lang="ja-JP" altLang="en-US" sz="1200" dirty="0">
+                <a:latin typeface="メイリオ" panose="020B0604030504040204" pitchFamily="50" charset="-128"/>
+                <a:ea typeface="メイリオ" panose="020B0604030504040204" pitchFamily="50" charset="-128"/>
+              </a:rPr>
+              <a:t>を、変数</a:t>
+            </a:r>
+            <a:r>
+              <a:rPr lang="en-US" altLang="ja-JP" sz="1200" dirty="0">
+                <a:latin typeface="メイリオ" panose="020B0604030504040204" pitchFamily="50" charset="-128"/>
+                <a:ea typeface="メイリオ" panose="020B0604030504040204" pitchFamily="50" charset="-128"/>
+              </a:rPr>
+              <a:t>wheel</a:t>
+            </a:r>
+            <a:r>
+              <a:rPr lang="ja-JP" altLang="en-US" sz="1200" dirty="0">
+                <a:latin typeface="メイリオ" panose="020B0604030504040204" pitchFamily="50" charset="-128"/>
+                <a:ea typeface="メイリオ" panose="020B0604030504040204" pitchFamily="50" charset="-128"/>
+              </a:rPr>
+              <a:t>に代入する</a:t>
+            </a:r>
+            <a:endParaRPr lang="en-US" altLang="ja-JP" sz="1200" dirty="0">
+              <a:latin typeface="メイリオ" panose="020B0604030504040204" pitchFamily="50" charset="-128"/>
+              <a:ea typeface="メイリオ" panose="020B0604030504040204" pitchFamily="50" charset="-128"/>
+            </a:endParaRPr>
+          </a:p>
+          <a:p>
+            <a:pPr algn="l"/>
+            <a:r>
+              <a:rPr kumimoji="1" lang="ja-JP" altLang="en-US" sz="1200" dirty="0">
+                <a:latin typeface="メイリオ" panose="020B0604030504040204" pitchFamily="50" charset="-128"/>
+                <a:ea typeface="メイリオ" panose="020B0604030504040204" pitchFamily="50" charset="-128"/>
+              </a:rPr>
+              <a:t>実行内容２：</a:t>
+            </a:r>
+            <a:r>
+              <a:rPr kumimoji="1" lang="en-US" altLang="ja-JP" sz="1200" dirty="0">
+                <a:latin typeface="メイリオ" panose="020B0604030504040204" pitchFamily="50" charset="-128"/>
+                <a:ea typeface="メイリオ" panose="020B0604030504040204" pitchFamily="50" charset="-128"/>
+              </a:rPr>
+              <a:t>sample</a:t>
+            </a:r>
+            <a:r>
+              <a:rPr lang="ja-JP" altLang="en-US" sz="1200" dirty="0">
+                <a:latin typeface="メイリオ" panose="020B0604030504040204" pitchFamily="50" charset="-128"/>
+                <a:ea typeface="メイリオ" panose="020B0604030504040204" pitchFamily="50" charset="-128"/>
+              </a:rPr>
+              <a:t>で</a:t>
+            </a:r>
+            <a:r>
+              <a:rPr lang="en-US" altLang="ja-JP" sz="1200" dirty="0">
+                <a:latin typeface="メイリオ" panose="020B0604030504040204" pitchFamily="50" charset="-128"/>
+                <a:ea typeface="メイリオ" panose="020B0604030504040204" pitchFamily="50" charset="-128"/>
+              </a:rPr>
+              <a:t>wheel</a:t>
+            </a:r>
+            <a:r>
+              <a:rPr lang="ja-JP" altLang="en-US" sz="1200" dirty="0">
+                <a:latin typeface="メイリオ" panose="020B0604030504040204" pitchFamily="50" charset="-128"/>
+                <a:ea typeface="メイリオ" panose="020B0604030504040204" pitchFamily="50" charset="-128"/>
+              </a:rPr>
+              <a:t>から３つの値を抽出する</a:t>
+            </a:r>
+            <a:endParaRPr lang="en-US" altLang="ja-JP" sz="1200" dirty="0">
+              <a:latin typeface="メイリオ" panose="020B0604030504040204" pitchFamily="50" charset="-128"/>
+              <a:ea typeface="メイリオ" panose="020B0604030504040204" pitchFamily="50" charset="-128"/>
+            </a:endParaRPr>
+          </a:p>
+          <a:p>
+            <a:pPr algn="l"/>
+            <a:endParaRPr kumimoji="1" lang="en-US" altLang="ja-JP" sz="1200" dirty="0">
+              <a:latin typeface="メイリオ" panose="020B0604030504040204" pitchFamily="50" charset="-128"/>
+              <a:ea typeface="メイリオ" panose="020B0604030504040204" pitchFamily="50" charset="-128"/>
+            </a:endParaRPr>
+          </a:p>
+          <a:p>
+            <a:pPr algn="l"/>
+            <a:endParaRPr lang="en-US" altLang="ja-JP" sz="1200" dirty="0">
+              <a:latin typeface="メイリオ" panose="020B0604030504040204" pitchFamily="50" charset="-128"/>
+              <a:ea typeface="メイリオ" panose="020B0604030504040204" pitchFamily="50" charset="-128"/>
+            </a:endParaRPr>
+          </a:p>
+          <a:p>
+            <a:pPr algn="l"/>
+            <a:endParaRPr kumimoji="1" lang="en-US" altLang="ja-JP" sz="1200" dirty="0">
+              <a:latin typeface="メイリオ" panose="020B0604030504040204" pitchFamily="50" charset="-128"/>
+              <a:ea typeface="メイリオ" panose="020B0604030504040204" pitchFamily="50" charset="-128"/>
+            </a:endParaRPr>
+          </a:p>
+          <a:p>
+            <a:pPr algn="l"/>
+            <a:endParaRPr lang="en-US" altLang="ja-JP" sz="1200" dirty="0">
+              <a:latin typeface="メイリオ" panose="020B0604030504040204" pitchFamily="50" charset="-128"/>
+              <a:ea typeface="メイリオ" panose="020B0604030504040204" pitchFamily="50" charset="-128"/>
+            </a:endParaRPr>
+          </a:p>
+          <a:p>
+            <a:pPr algn="l"/>
+            <a:endParaRPr kumimoji="1" lang="en-US" altLang="ja-JP" sz="1200" dirty="0">
+              <a:latin typeface="メイリオ" panose="020B0604030504040204" pitchFamily="50" charset="-128"/>
+              <a:ea typeface="メイリオ" panose="020B0604030504040204" pitchFamily="50" charset="-128"/>
+            </a:endParaRPr>
+          </a:p>
+          <a:p>
+            <a:pPr algn="l"/>
+            <a:r>
+              <a:rPr kumimoji="1" lang="ja-JP" altLang="en-US" sz="2000" dirty="0">
+                <a:solidFill>
+                  <a:schemeClr val="accent4">
+                    <a:lumMod val="75000"/>
+                  </a:schemeClr>
+                </a:solidFill>
+                <a:latin typeface="メイリオ" panose="020B0604030504040204" pitchFamily="50" charset="-128"/>
+                <a:ea typeface="メイリオ" panose="020B0604030504040204" pitchFamily="50" charset="-128"/>
+              </a:rPr>
+              <a:t>＃＃ゲームを実行する</a:t>
+            </a:r>
+            <a:endParaRPr kumimoji="1" lang="en-US" altLang="ja-JP" sz="2000" dirty="0">
+              <a:solidFill>
+                <a:schemeClr val="accent4">
+                  <a:lumMod val="75000"/>
+                </a:schemeClr>
+              </a:solidFill>
+              <a:latin typeface="メイリオ" panose="020B0604030504040204" pitchFamily="50" charset="-128"/>
+              <a:ea typeface="メイリオ" panose="020B0604030504040204" pitchFamily="50" charset="-128"/>
+            </a:endParaRPr>
+          </a:p>
+          <a:p>
+            <a:pPr algn="l"/>
+            <a:r>
+              <a:rPr kumimoji="1" lang="ja-JP" altLang="en-US" sz="1200" dirty="0">
+                <a:latin typeface="メイリオ" panose="020B0604030504040204" pitchFamily="50" charset="-128"/>
+                <a:ea typeface="メイリオ" panose="020B0604030504040204" pitchFamily="50" charset="-128"/>
+              </a:rPr>
+              <a:t>関数名：</a:t>
+            </a:r>
+            <a:r>
+              <a:rPr kumimoji="1" lang="en-US" altLang="ja-JP" sz="1200" dirty="0">
+                <a:latin typeface="メイリオ" panose="020B0604030504040204" pitchFamily="50" charset="-128"/>
+                <a:ea typeface="メイリオ" panose="020B0604030504040204" pitchFamily="50" charset="-128"/>
+              </a:rPr>
+              <a:t>play</a:t>
+            </a:r>
+          </a:p>
+          <a:p>
+            <a:pPr algn="l"/>
+            <a:r>
+              <a:rPr kumimoji="1" lang="ja-JP" altLang="en-US" sz="1200" dirty="0">
+                <a:latin typeface="メイリオ" panose="020B0604030504040204" pitchFamily="50" charset="-128"/>
+                <a:ea typeface="メイリオ" panose="020B0604030504040204" pitchFamily="50" charset="-128"/>
+              </a:rPr>
+              <a:t>実行内容１：</a:t>
+            </a:r>
+            <a:r>
+              <a:rPr kumimoji="1" lang="en-US" altLang="ja-JP" sz="1200" dirty="0">
+                <a:latin typeface="メイリオ" panose="020B0604030504040204" pitchFamily="50" charset="-128"/>
+                <a:ea typeface="メイリオ" panose="020B0604030504040204" pitchFamily="50" charset="-128"/>
+              </a:rPr>
+              <a:t>symbols</a:t>
+            </a:r>
+            <a:r>
+              <a:rPr kumimoji="1" lang="ja-JP" altLang="en-US" sz="1200" dirty="0">
+                <a:latin typeface="メイリオ" panose="020B0604030504040204" pitchFamily="50" charset="-128"/>
+                <a:ea typeface="メイリオ" panose="020B0604030504040204" pitchFamily="50" charset="-128"/>
+              </a:rPr>
+              <a:t>でスロットを回す</a:t>
+            </a:r>
+            <a:endParaRPr kumimoji="1" lang="en-US" altLang="ja-JP" sz="1200" dirty="0">
+              <a:latin typeface="メイリオ" panose="020B0604030504040204" pitchFamily="50" charset="-128"/>
+              <a:ea typeface="メイリオ" panose="020B0604030504040204" pitchFamily="50" charset="-128"/>
+            </a:endParaRPr>
+          </a:p>
+          <a:p>
+            <a:pPr algn="l"/>
+            <a:r>
+              <a:rPr kumimoji="1" lang="ja-JP" altLang="en-US" sz="1200" dirty="0">
+                <a:latin typeface="メイリオ" panose="020B0604030504040204" pitchFamily="50" charset="-128"/>
+                <a:ea typeface="メイリオ" panose="020B0604030504040204" pitchFamily="50" charset="-128"/>
+              </a:rPr>
+              <a:t>実行内容２：</a:t>
+            </a:r>
+            <a:r>
+              <a:rPr lang="en-US" altLang="ja-JP" sz="1200" dirty="0">
+                <a:latin typeface="メイリオ" panose="020B0604030504040204" pitchFamily="50" charset="-128"/>
+                <a:ea typeface="メイリオ" panose="020B0604030504040204" pitchFamily="50" charset="-128"/>
+              </a:rPr>
+              <a:t>print</a:t>
+            </a:r>
+            <a:r>
+              <a:rPr lang="ja-JP" altLang="en-US" sz="1200" dirty="0">
+                <a:latin typeface="メイリオ" panose="020B0604030504040204" pitchFamily="50" charset="-128"/>
+                <a:ea typeface="メイリオ" panose="020B0604030504040204" pitchFamily="50" charset="-128"/>
+              </a:rPr>
+              <a:t>でスロットの結果を表示する</a:t>
+            </a:r>
+            <a:endParaRPr lang="en-US" altLang="ja-JP" sz="1200" dirty="0">
+              <a:latin typeface="メイリオ" panose="020B0604030504040204" pitchFamily="50" charset="-128"/>
+              <a:ea typeface="メイリオ" panose="020B0604030504040204" pitchFamily="50" charset="-128"/>
+            </a:endParaRPr>
+          </a:p>
+          <a:p>
+            <a:pPr algn="l"/>
+            <a:r>
+              <a:rPr kumimoji="1" lang="ja-JP" altLang="en-US" sz="1200" dirty="0">
+                <a:latin typeface="メイリオ" panose="020B0604030504040204" pitchFamily="50" charset="-128"/>
+                <a:ea typeface="メイリオ" panose="020B0604030504040204" pitchFamily="50" charset="-128"/>
+              </a:rPr>
+              <a:t>実行内容３：</a:t>
+            </a:r>
+            <a:r>
+              <a:rPr kumimoji="1" lang="en-US" altLang="ja-JP" sz="1200" dirty="0">
+                <a:latin typeface="メイリオ" panose="020B0604030504040204" pitchFamily="50" charset="-128"/>
+                <a:ea typeface="メイリオ" panose="020B0604030504040204" pitchFamily="50" charset="-128"/>
+              </a:rPr>
+              <a:t>score(</a:t>
+            </a:r>
+            <a:r>
+              <a:rPr lang="ja-JP" altLang="en-US" sz="1200" dirty="0">
+                <a:latin typeface="メイリオ" panose="020B0604030504040204" pitchFamily="50" charset="-128"/>
+                <a:ea typeface="メイリオ" panose="020B0604030504040204" pitchFamily="50" charset="-128"/>
+              </a:rPr>
+              <a:t>後に定義</a:t>
+            </a:r>
+            <a:r>
+              <a:rPr kumimoji="1" lang="en-US" altLang="ja-JP" sz="1200" dirty="0">
+                <a:latin typeface="メイリオ" panose="020B0604030504040204" pitchFamily="50" charset="-128"/>
+                <a:ea typeface="メイリオ" panose="020B0604030504040204" pitchFamily="50" charset="-128"/>
+              </a:rPr>
+              <a:t>)</a:t>
+            </a:r>
+            <a:r>
+              <a:rPr kumimoji="1" lang="ja-JP" altLang="en-US" sz="1200" dirty="0">
+                <a:latin typeface="メイリオ" panose="020B0604030504040204" pitchFamily="50" charset="-128"/>
+                <a:ea typeface="メイリオ" panose="020B0604030504040204" pitchFamily="50" charset="-128"/>
+              </a:rPr>
+              <a:t>で点数を計算・表示する</a:t>
+            </a:r>
+            <a:endParaRPr kumimoji="1" lang="en-US" altLang="ja-JP" sz="1200" dirty="0">
+              <a:latin typeface="メイリオ" panose="020B0604030504040204" pitchFamily="50" charset="-128"/>
+              <a:ea typeface="メイリオ" panose="020B0604030504040204" pitchFamily="50" charset="-128"/>
+            </a:endParaRPr>
+          </a:p>
+          <a:p>
+            <a:pPr algn="l"/>
+            <a:endParaRPr lang="en-US" altLang="ja-JP" sz="2000" dirty="0">
+              <a:solidFill>
+                <a:schemeClr val="accent4">
+                  <a:lumMod val="75000"/>
+                </a:schemeClr>
+              </a:solidFill>
+              <a:latin typeface="メイリオ" panose="020B0604030504040204" pitchFamily="50" charset="-128"/>
+              <a:ea typeface="メイリオ" panose="020B0604030504040204" pitchFamily="50" charset="-128"/>
+            </a:endParaRPr>
+          </a:p>
+          <a:p>
+            <a:pPr algn="l"/>
+            <a:endParaRPr kumimoji="1" lang="ja-JP" altLang="en-US" sz="2000" dirty="0">
+              <a:solidFill>
+                <a:schemeClr val="accent4">
+                  <a:lumMod val="75000"/>
+                </a:schemeClr>
+              </a:solidFill>
+              <a:latin typeface="メイリオ" panose="020B0604030504040204" pitchFamily="50" charset="-128"/>
+              <a:ea typeface="メイリオ" panose="020B0604030504040204" pitchFamily="50" charset="-128"/>
+            </a:endParaRPr>
+          </a:p>
+        </p:txBody>
+      </p:sp>
+      <p:pic>
+        <p:nvPicPr>
+          <p:cNvPr id="8" name="図 7">
+            <a:extLst>
+              <a:ext uri="{FF2B5EF4-FFF2-40B4-BE49-F238E27FC236}">
+                <a16:creationId xmlns:a16="http://schemas.microsoft.com/office/drawing/2014/main" id="{634991FC-5CF5-51A5-D820-EF02CFE3F6DA}"/>
+              </a:ext>
+            </a:extLst>
+          </p:cNvPr>
+          <p:cNvPicPr>
+            <a:picLocks noChangeAspect="1"/>
+          </p:cNvPicPr>
+          <p:nvPr/>
+        </p:nvPicPr>
+        <p:blipFill>
+          <a:blip r:embed="rId2"/>
+          <a:stretch>
+            <a:fillRect/>
+          </a:stretch>
+        </p:blipFill>
+        <p:spPr>
+          <a:xfrm>
+            <a:off x="1056126" y="2367670"/>
+            <a:ext cx="6311305" cy="1125411"/>
+          </a:xfrm>
+          <a:prstGeom prst="rect">
+            <a:avLst/>
+          </a:prstGeom>
+          <a:ln>
+            <a:solidFill>
+              <a:schemeClr val="bg2">
+                <a:lumMod val="90000"/>
+              </a:schemeClr>
+            </a:solidFill>
+          </a:ln>
+        </p:spPr>
+      </p:pic>
+      <p:pic>
+        <p:nvPicPr>
+          <p:cNvPr id="12" name="図 11">
+            <a:extLst>
+              <a:ext uri="{FF2B5EF4-FFF2-40B4-BE49-F238E27FC236}">
+                <a16:creationId xmlns:a16="http://schemas.microsoft.com/office/drawing/2014/main" id="{913E5101-FF0C-F996-E1F8-8B0950C5BFFA}"/>
+              </a:ext>
+            </a:extLst>
+          </p:cNvPr>
+          <p:cNvPicPr>
+            <a:picLocks noChangeAspect="1"/>
+          </p:cNvPicPr>
+          <p:nvPr/>
+        </p:nvPicPr>
+        <p:blipFill>
+          <a:blip r:embed="rId3"/>
+          <a:stretch>
+            <a:fillRect/>
+          </a:stretch>
+        </p:blipFill>
+        <p:spPr>
+          <a:xfrm>
+            <a:off x="1056126" y="5434534"/>
+            <a:ext cx="2067213" cy="943107"/>
+          </a:xfrm>
+          <a:prstGeom prst="rect">
+            <a:avLst/>
+          </a:prstGeom>
+          <a:ln>
+            <a:solidFill>
+              <a:schemeClr val="bg2">
+                <a:lumMod val="90000"/>
+              </a:schemeClr>
+            </a:solidFill>
+          </a:ln>
+        </p:spPr>
+      </p:pic>
+      <p:pic>
+        <p:nvPicPr>
+          <p:cNvPr id="18" name="図 17">
+            <a:extLst>
+              <a:ext uri="{FF2B5EF4-FFF2-40B4-BE49-F238E27FC236}">
+                <a16:creationId xmlns:a16="http://schemas.microsoft.com/office/drawing/2014/main" id="{F37C7821-C3D3-2351-EAE1-C2D443BF59E3}"/>
+              </a:ext>
+            </a:extLst>
+          </p:cNvPr>
+          <p:cNvPicPr>
+            <a:picLocks noChangeAspect="1"/>
+          </p:cNvPicPr>
+          <p:nvPr/>
+        </p:nvPicPr>
+        <p:blipFill>
+          <a:blip r:embed="rId4"/>
+          <a:stretch>
+            <a:fillRect/>
+          </a:stretch>
+        </p:blipFill>
+        <p:spPr>
+          <a:xfrm>
+            <a:off x="8099526" y="2360132"/>
+            <a:ext cx="1676634" cy="924054"/>
+          </a:xfrm>
+          <a:prstGeom prst="rect">
+            <a:avLst/>
+          </a:prstGeom>
+          <a:ln>
+            <a:solidFill>
+              <a:schemeClr val="bg2">
+                <a:lumMod val="90000"/>
+              </a:schemeClr>
+            </a:solidFill>
+          </a:ln>
+        </p:spPr>
+      </p:pic>
+      <p:sp>
+        <p:nvSpPr>
+          <p:cNvPr id="19" name="正方形/長方形 18">
+            <a:extLst>
+              <a:ext uri="{FF2B5EF4-FFF2-40B4-BE49-F238E27FC236}">
+                <a16:creationId xmlns:a16="http://schemas.microsoft.com/office/drawing/2014/main" id="{27F719EA-26FB-EFB4-546B-B3AEF40BE8E1}"/>
               </a:ext>
             </a:extLst>
           </p:cNvPr>
@@ -3849,7 +4629,443 @@
         </p:nvSpPr>
         <p:spPr>
           <a:xfrm>
-            <a:off x="7901837" y="5242143"/>
+            <a:off x="5580181" y="3801408"/>
+            <a:ext cx="4352793" cy="1125410"/>
+          </a:xfrm>
+          <a:prstGeom prst="rect">
+            <a:avLst/>
+          </a:prstGeom>
+          <a:solidFill>
+            <a:schemeClr val="accent2">
+              <a:lumMod val="40000"/>
+              <a:lumOff val="60000"/>
+            </a:schemeClr>
+          </a:solidFill>
+          <a:ln>
+            <a:noFill/>
+          </a:ln>
+        </p:spPr>
+        <p:style>
+          <a:lnRef idx="2">
+            <a:schemeClr val="accent1">
+              <a:shade val="15000"/>
+            </a:schemeClr>
+          </a:lnRef>
+          <a:fillRef idx="1">
+            <a:schemeClr val="accent1"/>
+          </a:fillRef>
+          <a:effectRef idx="0">
+            <a:schemeClr val="accent1"/>
+          </a:effectRef>
+          <a:fontRef idx="minor">
+            <a:schemeClr val="lt1"/>
+          </a:fontRef>
+        </p:style>
+        <p:txBody>
+          <a:bodyPr rtlCol="0" anchor="t"/>
+          <a:lstStyle/>
+          <a:p>
+            <a:r>
+              <a:rPr lang="en-US" altLang="ja-JP" sz="1000" dirty="0">
+                <a:solidFill>
+                  <a:schemeClr val="tx1"/>
+                </a:solidFill>
+              </a:rPr>
+              <a:t>s</a:t>
+            </a:r>
+            <a:r>
+              <a:rPr kumimoji="1" lang="en-US" altLang="ja-JP" sz="1000" dirty="0">
+                <a:solidFill>
+                  <a:schemeClr val="tx1"/>
+                </a:solidFill>
+              </a:rPr>
+              <a:t>ample(</a:t>
+            </a:r>
+            <a:r>
+              <a:rPr kumimoji="1" lang="en-US" altLang="ja-JP" sz="1000" dirty="0" err="1">
+                <a:solidFill>
+                  <a:schemeClr val="tx1"/>
+                </a:solidFill>
+              </a:rPr>
+              <a:t>x</a:t>
+            </a:r>
+            <a:r>
+              <a:rPr lang="en-US" altLang="ja-JP" sz="1000" dirty="0" err="1">
+                <a:solidFill>
+                  <a:schemeClr val="tx1"/>
+                </a:solidFill>
+              </a:rPr>
+              <a:t>,</a:t>
+            </a:r>
+            <a:r>
+              <a:rPr kumimoji="1" lang="en-US" altLang="ja-JP" sz="1000" dirty="0" err="1">
+                <a:solidFill>
+                  <a:schemeClr val="tx1"/>
+                </a:solidFill>
+              </a:rPr>
+              <a:t>size,replace</a:t>
+            </a:r>
+            <a:r>
+              <a:rPr kumimoji="1" lang="en-US" altLang="ja-JP" sz="1000" dirty="0">
+                <a:solidFill>
+                  <a:schemeClr val="tx1"/>
+                </a:solidFill>
+              </a:rPr>
+              <a:t>=</a:t>
+            </a:r>
+            <a:r>
+              <a:rPr kumimoji="1" lang="en-US" altLang="ja-JP" sz="1000" dirty="0" err="1">
+                <a:solidFill>
+                  <a:schemeClr val="tx1"/>
+                </a:solidFill>
+              </a:rPr>
+              <a:t>TRUE,prob</a:t>
+            </a:r>
+            <a:r>
+              <a:rPr kumimoji="1" lang="en-US" altLang="ja-JP" sz="1000" dirty="0">
+                <a:solidFill>
+                  <a:schemeClr val="tx1"/>
+                </a:solidFill>
+              </a:rPr>
+              <a:t>=NULL)</a:t>
+            </a:r>
+          </a:p>
+          <a:p>
+            <a:endParaRPr kumimoji="1" lang="en-US" altLang="ja-JP" sz="1000" dirty="0">
+              <a:solidFill>
+                <a:schemeClr val="tx1"/>
+              </a:solidFill>
+            </a:endParaRPr>
+          </a:p>
+          <a:p>
+            <a:r>
+              <a:rPr lang="en-US" altLang="ja-JP" sz="1000" dirty="0">
+                <a:solidFill>
+                  <a:schemeClr val="tx1"/>
+                </a:solidFill>
+              </a:rPr>
+              <a:t> x:</a:t>
+            </a:r>
+            <a:r>
+              <a:rPr lang="ja-JP" altLang="en-US" sz="1000" dirty="0">
+                <a:solidFill>
+                  <a:schemeClr val="tx1"/>
+                </a:solidFill>
+              </a:rPr>
+              <a:t>サンプリング元のデータ</a:t>
+            </a:r>
+            <a:endParaRPr lang="en-US" altLang="ja-JP" sz="1000" dirty="0">
+              <a:solidFill>
+                <a:schemeClr val="tx1"/>
+              </a:solidFill>
+            </a:endParaRPr>
+          </a:p>
+          <a:p>
+            <a:r>
+              <a:rPr lang="ja-JP" altLang="en-US" sz="1000" dirty="0">
+                <a:solidFill>
+                  <a:schemeClr val="tx1"/>
+                </a:solidFill>
+              </a:rPr>
+              <a:t> </a:t>
+            </a:r>
+            <a:r>
+              <a:rPr lang="en-US" altLang="ja-JP" sz="1000" dirty="0">
+                <a:solidFill>
+                  <a:schemeClr val="tx1"/>
+                </a:solidFill>
+              </a:rPr>
+              <a:t>size:</a:t>
+            </a:r>
+            <a:r>
+              <a:rPr lang="ja-JP" altLang="en-US" sz="1000" dirty="0">
+                <a:solidFill>
+                  <a:schemeClr val="tx1"/>
+                </a:solidFill>
+              </a:rPr>
+              <a:t>サンプリング回数。指定しないと、</a:t>
+            </a:r>
+            <a:r>
+              <a:rPr lang="en-US" altLang="ja-JP" sz="1000" dirty="0">
+                <a:solidFill>
+                  <a:schemeClr val="tx1"/>
+                </a:solidFill>
+              </a:rPr>
+              <a:t>length(x)</a:t>
+            </a:r>
+            <a:r>
+              <a:rPr lang="ja-JP" altLang="en-US" sz="1000" dirty="0">
+                <a:solidFill>
+                  <a:schemeClr val="tx1"/>
+                </a:solidFill>
+              </a:rPr>
+              <a:t>回サンプリングする。</a:t>
+            </a:r>
+            <a:endParaRPr lang="en-US" altLang="ja-JP" sz="1000" dirty="0">
+              <a:solidFill>
+                <a:schemeClr val="tx1"/>
+              </a:solidFill>
+            </a:endParaRPr>
+          </a:p>
+          <a:p>
+            <a:r>
+              <a:rPr kumimoji="1" lang="en-US" altLang="ja-JP" sz="1000" dirty="0">
+                <a:solidFill>
+                  <a:schemeClr val="tx1"/>
+                </a:solidFill>
+              </a:rPr>
+              <a:t> </a:t>
+            </a:r>
+            <a:r>
+              <a:rPr lang="en-US" altLang="ja-JP" sz="1000" dirty="0">
+                <a:solidFill>
+                  <a:schemeClr val="tx1"/>
+                </a:solidFill>
+              </a:rPr>
+              <a:t>replace:</a:t>
+            </a:r>
+            <a:r>
+              <a:rPr lang="ja-JP" altLang="en-US" sz="1000" dirty="0">
+                <a:solidFill>
+                  <a:schemeClr val="tx1"/>
+                </a:solidFill>
+              </a:rPr>
+              <a:t>同一の要素を繰り返しサンプリングするのを許容するかどうか。</a:t>
+            </a:r>
+            <a:endParaRPr lang="en-US" altLang="ja-JP" sz="1000" dirty="0">
+              <a:solidFill>
+                <a:schemeClr val="tx1"/>
+              </a:solidFill>
+            </a:endParaRPr>
+          </a:p>
+          <a:p>
+            <a:r>
+              <a:rPr kumimoji="1" lang="en-US" altLang="ja-JP" sz="1000" dirty="0">
+                <a:solidFill>
+                  <a:schemeClr val="tx1"/>
+                </a:solidFill>
+              </a:rPr>
+              <a:t> prob:</a:t>
+            </a:r>
+            <a:r>
+              <a:rPr kumimoji="1" lang="ja-JP" altLang="en-US" sz="1000" dirty="0">
+                <a:solidFill>
+                  <a:schemeClr val="tx1"/>
+                </a:solidFill>
+              </a:rPr>
+              <a:t>サンプリングする際の重みづけを確立のベクトルで指定。合計が１でなくても可。</a:t>
+            </a:r>
+            <a:endParaRPr kumimoji="1" lang="en-US" altLang="ja-JP" sz="1000" dirty="0">
+              <a:solidFill>
+                <a:schemeClr val="tx1"/>
+              </a:solidFill>
+            </a:endParaRPr>
+          </a:p>
+        </p:txBody>
+      </p:sp>
+      <p:cxnSp>
+        <p:nvCxnSpPr>
+          <p:cNvPr id="22" name="直線矢印コネクタ 21">
+            <a:extLst>
+              <a:ext uri="{FF2B5EF4-FFF2-40B4-BE49-F238E27FC236}">
+                <a16:creationId xmlns:a16="http://schemas.microsoft.com/office/drawing/2014/main" id="{93362CA4-F5A4-B2D5-6526-CE571E035549}"/>
+              </a:ext>
+            </a:extLst>
+          </p:cNvPr>
+          <p:cNvCxnSpPr>
+            <a:cxnSpLocks/>
+          </p:cNvCxnSpPr>
+          <p:nvPr/>
+        </p:nvCxnSpPr>
+        <p:spPr>
+          <a:xfrm>
+            <a:off x="7505205" y="2897579"/>
+            <a:ext cx="463138" cy="0"/>
+          </a:xfrm>
+          <a:prstGeom prst="straightConnector1">
+            <a:avLst/>
+          </a:prstGeom>
+          <a:ln w="57150">
+            <a:solidFill>
+              <a:schemeClr val="accent4">
+                <a:lumMod val="75000"/>
+              </a:schemeClr>
+            </a:solidFill>
+            <a:tailEnd type="triangle"/>
+          </a:ln>
+        </p:spPr>
+        <p:style>
+          <a:lnRef idx="1">
+            <a:schemeClr val="accent1"/>
+          </a:lnRef>
+          <a:fillRef idx="0">
+            <a:schemeClr val="accent1"/>
+          </a:fillRef>
+          <a:effectRef idx="0">
+            <a:schemeClr val="accent1"/>
+          </a:effectRef>
+          <a:fontRef idx="minor">
+            <a:schemeClr val="tx1"/>
+          </a:fontRef>
+        </p:style>
+      </p:cxnSp>
+    </p:spTree>
+    <p:extLst>
+      <p:ext uri="{BB962C8B-B14F-4D97-AF65-F5344CB8AC3E}">
+        <p14:creationId xmlns:p14="http://schemas.microsoft.com/office/powerpoint/2010/main" val="1219145274"/>
+      </p:ext>
+    </p:extLst>
+  </p:cSld>
+  <p:clrMapOvr>
+    <a:masterClrMapping/>
+  </p:clrMapOvr>
+</p:sld>
+</file>
+
+<file path=ppt/slides/slide4.xml><?xml version="1.0" encoding="utf-8"?>
+<p:sld xmlns:a="http://schemas.openxmlformats.org/drawingml/2006/main" xmlns:r="http://schemas.openxmlformats.org/officeDocument/2006/relationships" xmlns:p="http://schemas.openxmlformats.org/presentationml/2006/main">
+  <p:cSld>
+    <p:spTree>
+      <p:nvGrpSpPr>
+        <p:cNvPr id="1" name=""/>
+        <p:cNvGrpSpPr/>
+        <p:nvPr/>
+      </p:nvGrpSpPr>
+      <p:grpSpPr>
+        <a:xfrm>
+          <a:off x="0" y="0"/>
+          <a:ext cx="0" cy="0"/>
+          <a:chOff x="0" y="0"/>
+          <a:chExt cx="0" cy="0"/>
+        </a:xfrm>
+      </p:grpSpPr>
+      <p:sp>
+        <p:nvSpPr>
+          <p:cNvPr id="2" name="タイトル 1">
+            <a:extLst>
+              <a:ext uri="{FF2B5EF4-FFF2-40B4-BE49-F238E27FC236}">
+                <a16:creationId xmlns:a16="http://schemas.microsoft.com/office/drawing/2014/main" id="{8F92D15D-6ED6-F1E2-415D-C5D0D0CAAC83}"/>
+              </a:ext>
+            </a:extLst>
+          </p:cNvPr>
+          <p:cNvSpPr>
+            <a:spLocks noGrp="1"/>
+          </p:cNvSpPr>
+          <p:nvPr>
+            <p:ph type="ctrTitle"/>
+          </p:nvPr>
+        </p:nvSpPr>
+        <p:spPr>
+          <a:xfrm>
+            <a:off x="528181" y="314435"/>
+            <a:ext cx="5891408" cy="700173"/>
+          </a:xfrm>
+        </p:spPr>
+        <p:txBody>
+          <a:bodyPr>
+            <a:normAutofit/>
+          </a:bodyPr>
+          <a:lstStyle/>
+          <a:p>
+            <a:pPr algn="l"/>
+            <a:r>
+              <a:rPr kumimoji="1" lang="en-US" altLang="ja-JP" sz="3000" b="1" dirty="0">
+                <a:solidFill>
+                  <a:schemeClr val="tx1">
+                    <a:lumMod val="65000"/>
+                    <a:lumOff val="35000"/>
+                  </a:schemeClr>
+                </a:solidFill>
+                <a:latin typeface="メイリオ" panose="020B0604030504040204" pitchFamily="50" charset="-128"/>
+                <a:ea typeface="メイリオ" panose="020B0604030504040204" pitchFamily="50" charset="-128"/>
+              </a:rPr>
+              <a:t>7</a:t>
+            </a:r>
+            <a:r>
+              <a:rPr kumimoji="1" lang="ja-JP" altLang="en-US" sz="3000" b="1" dirty="0">
+                <a:solidFill>
+                  <a:schemeClr val="tx1">
+                    <a:lumMod val="65000"/>
+                    <a:lumOff val="35000"/>
+                  </a:schemeClr>
+                </a:solidFill>
+                <a:latin typeface="メイリオ" panose="020B0604030504040204" pitchFamily="50" charset="-128"/>
+                <a:ea typeface="メイリオ" panose="020B0604030504040204" pitchFamily="50" charset="-128"/>
+              </a:rPr>
+              <a:t>章　プログラム</a:t>
+            </a:r>
+          </a:p>
+        </p:txBody>
+      </p:sp>
+      <p:sp>
+        <p:nvSpPr>
+          <p:cNvPr id="4" name="正方形/長方形 3">
+            <a:extLst>
+              <a:ext uri="{FF2B5EF4-FFF2-40B4-BE49-F238E27FC236}">
+                <a16:creationId xmlns:a16="http://schemas.microsoft.com/office/drawing/2014/main" id="{578782C7-6070-7C3A-DAB7-3101F4C6ED5C}"/>
+              </a:ext>
+            </a:extLst>
+          </p:cNvPr>
+          <p:cNvSpPr/>
+          <p:nvPr/>
+        </p:nvSpPr>
+        <p:spPr>
+          <a:xfrm>
+            <a:off x="658169" y="1098587"/>
+            <a:ext cx="10540261" cy="5528957"/>
+          </a:xfrm>
+          <a:prstGeom prst="rect">
+            <a:avLst/>
+          </a:prstGeom>
+          <a:solidFill>
+            <a:schemeClr val="accent4">
+              <a:lumMod val="20000"/>
+              <a:lumOff val="80000"/>
+            </a:schemeClr>
+          </a:solidFill>
+          <a:ln>
+            <a:noFill/>
+          </a:ln>
+        </p:spPr>
+        <p:style>
+          <a:lnRef idx="2">
+            <a:schemeClr val="accent1">
+              <a:shade val="15000"/>
+            </a:schemeClr>
+          </a:lnRef>
+          <a:fillRef idx="1">
+            <a:schemeClr val="accent1"/>
+          </a:fillRef>
+          <a:effectRef idx="0">
+            <a:schemeClr val="accent1"/>
+          </a:effectRef>
+          <a:fontRef idx="minor">
+            <a:schemeClr val="lt1"/>
+          </a:fontRef>
+        </p:style>
+        <p:txBody>
+          <a:bodyPr rtlCol="0" anchor="t"/>
+          <a:lstStyle/>
+          <a:p>
+            <a:endParaRPr kumimoji="1" lang="ja-JP" altLang="en-US" dirty="0"/>
+          </a:p>
+        </p:txBody>
+      </p:sp>
+      <p:sp>
+        <p:nvSpPr>
+          <p:cNvPr id="5" name="正方形/長方形 4">
+            <a:extLst>
+              <a:ext uri="{FF2B5EF4-FFF2-40B4-BE49-F238E27FC236}">
+                <a16:creationId xmlns:a16="http://schemas.microsoft.com/office/drawing/2014/main" id="{CF0C4CB1-F083-E867-F352-7E25984AC542}"/>
+              </a:ext>
+            </a:extLst>
+          </p:cNvPr>
+          <p:cNvSpPr/>
+          <p:nvPr/>
+        </p:nvSpPr>
+        <p:spPr>
+          <a:xfrm>
+            <a:off x="5598882" y="5832520"/>
             <a:ext cx="4352793" cy="651353"/>
           </a:xfrm>
           <a:prstGeom prst="rect">
@@ -4039,7 +5255,1020 @@
         </p:nvSpPr>
         <p:spPr>
           <a:xfrm>
-            <a:off x="7901837" y="4384110"/>
+            <a:off x="5598881" y="5333505"/>
+            <a:ext cx="4352793" cy="405996"/>
+          </a:xfrm>
+          <a:prstGeom prst="rect">
+            <a:avLst/>
+          </a:prstGeom>
+          <a:solidFill>
+            <a:schemeClr val="accent2">
+              <a:lumMod val="40000"/>
+              <a:lumOff val="60000"/>
+            </a:schemeClr>
+          </a:solidFill>
+          <a:ln>
+            <a:noFill/>
+          </a:ln>
+        </p:spPr>
+        <p:style>
+          <a:lnRef idx="2">
+            <a:schemeClr val="accent1">
+              <a:shade val="15000"/>
+            </a:schemeClr>
+          </a:lnRef>
+          <a:fillRef idx="1">
+            <a:schemeClr val="accent1"/>
+          </a:fillRef>
+          <a:effectRef idx="0">
+            <a:schemeClr val="accent1"/>
+          </a:effectRef>
+          <a:fontRef idx="minor">
+            <a:schemeClr val="lt1"/>
+          </a:fontRef>
+        </p:style>
+        <p:txBody>
+          <a:bodyPr rtlCol="0" anchor="t"/>
+          <a:lstStyle/>
+          <a:p>
+            <a:r>
+              <a:rPr lang="en-US" altLang="ja-JP" sz="1000" dirty="0">
+                <a:solidFill>
+                  <a:schemeClr val="tx1"/>
+                </a:solidFill>
+              </a:rPr>
+              <a:t>u</a:t>
+            </a:r>
+            <a:r>
+              <a:rPr kumimoji="1" lang="en-US" altLang="ja-JP" sz="1000" dirty="0">
+                <a:solidFill>
+                  <a:schemeClr val="tx1"/>
+                </a:solidFill>
+              </a:rPr>
+              <a:t>nique</a:t>
+            </a:r>
+            <a:r>
+              <a:rPr kumimoji="1" lang="ja-JP" altLang="en-US" sz="1000" dirty="0">
+                <a:solidFill>
+                  <a:schemeClr val="tx1"/>
+                </a:solidFill>
+              </a:rPr>
+              <a:t>関数</a:t>
+            </a:r>
+            <a:endParaRPr kumimoji="1" lang="en-US" altLang="ja-JP" sz="1000" dirty="0">
+              <a:solidFill>
+                <a:schemeClr val="tx1"/>
+              </a:solidFill>
+            </a:endParaRPr>
+          </a:p>
+          <a:p>
+            <a:r>
+              <a:rPr lang="en-US" altLang="ja-JP" sz="1000" dirty="0">
+                <a:solidFill>
+                  <a:schemeClr val="tx1"/>
+                </a:solidFill>
+              </a:rPr>
+              <a:t>Vector</a:t>
+            </a:r>
+            <a:r>
+              <a:rPr lang="ja-JP" altLang="en-US" sz="1000" dirty="0">
+                <a:solidFill>
+                  <a:schemeClr val="tx1"/>
+                </a:solidFill>
+              </a:rPr>
+              <a:t>に含まれる異なる項をまとめたベクトル</a:t>
+            </a:r>
+            <a:endParaRPr lang="en-US" altLang="ja-JP" sz="1000" dirty="0">
+              <a:solidFill>
+                <a:schemeClr val="tx1"/>
+              </a:solidFill>
+            </a:endParaRPr>
+          </a:p>
+        </p:txBody>
+      </p:sp>
+      <p:sp>
+        <p:nvSpPr>
+          <p:cNvPr id="3" name="字幕 2">
+            <a:extLst>
+              <a:ext uri="{FF2B5EF4-FFF2-40B4-BE49-F238E27FC236}">
+                <a16:creationId xmlns:a16="http://schemas.microsoft.com/office/drawing/2014/main" id="{EF422FEA-2F34-70ED-56A9-01A65A2AD142}"/>
+              </a:ext>
+            </a:extLst>
+          </p:cNvPr>
+          <p:cNvSpPr>
+            <a:spLocks noGrp="1"/>
+          </p:cNvSpPr>
+          <p:nvPr>
+            <p:ph type="subTitle" idx="1"/>
+          </p:nvPr>
+        </p:nvSpPr>
+        <p:spPr>
+          <a:xfrm>
+            <a:off x="682560" y="1143635"/>
+            <a:ext cx="9391483" cy="5446283"/>
+          </a:xfrm>
+        </p:spPr>
+        <p:txBody>
+          <a:bodyPr>
+            <a:normAutofit/>
+          </a:bodyPr>
+          <a:lstStyle/>
+          <a:p>
+            <a:pPr algn="l"/>
+            <a:r>
+              <a:rPr kumimoji="1" lang="ja-JP" altLang="en-US" sz="2000" dirty="0">
+                <a:solidFill>
+                  <a:schemeClr val="accent4">
+                    <a:lumMod val="75000"/>
+                  </a:schemeClr>
+                </a:solidFill>
+                <a:latin typeface="メイリオ" panose="020B0604030504040204" pitchFamily="50" charset="-128"/>
+                <a:ea typeface="メイリオ" panose="020B0604030504040204" pitchFamily="50" charset="-128"/>
+              </a:rPr>
+              <a:t>＃＃点数を計算する（下書き）</a:t>
+            </a:r>
+            <a:endParaRPr kumimoji="1" lang="en-US" altLang="ja-JP" sz="2000" dirty="0">
+              <a:solidFill>
+                <a:schemeClr val="accent4">
+                  <a:lumMod val="75000"/>
+                </a:schemeClr>
+              </a:solidFill>
+              <a:latin typeface="メイリオ" panose="020B0604030504040204" pitchFamily="50" charset="-128"/>
+              <a:ea typeface="メイリオ" panose="020B0604030504040204" pitchFamily="50" charset="-128"/>
+            </a:endParaRPr>
+          </a:p>
+          <a:p>
+            <a:pPr algn="l"/>
+            <a:r>
+              <a:rPr lang="ja-JP" altLang="en-US" sz="1200" dirty="0">
+                <a:latin typeface="メイリオ" panose="020B0604030504040204" pitchFamily="50" charset="-128"/>
+                <a:ea typeface="メイリオ" panose="020B0604030504040204" pitchFamily="50" charset="-128"/>
+              </a:rPr>
+              <a:t>実行内容：条件文で点数計算方法を場合分けする</a:t>
+            </a:r>
+            <a:endParaRPr lang="en-US" altLang="ja-JP" sz="1200" dirty="0">
+              <a:latin typeface="メイリオ" panose="020B0604030504040204" pitchFamily="50" charset="-128"/>
+              <a:ea typeface="メイリオ" panose="020B0604030504040204" pitchFamily="50" charset="-128"/>
+            </a:endParaRPr>
+          </a:p>
+          <a:p>
+            <a:pPr algn="l"/>
+            <a:endParaRPr kumimoji="1" lang="en-US" altLang="ja-JP" sz="1200" dirty="0">
+              <a:latin typeface="メイリオ" panose="020B0604030504040204" pitchFamily="50" charset="-128"/>
+              <a:ea typeface="メイリオ" panose="020B0604030504040204" pitchFamily="50" charset="-128"/>
+            </a:endParaRPr>
+          </a:p>
+          <a:p>
+            <a:pPr algn="l"/>
+            <a:endParaRPr lang="en-US" altLang="ja-JP" sz="1200" dirty="0">
+              <a:latin typeface="メイリオ" panose="020B0604030504040204" pitchFamily="50" charset="-128"/>
+              <a:ea typeface="メイリオ" panose="020B0604030504040204" pitchFamily="50" charset="-128"/>
+            </a:endParaRPr>
+          </a:p>
+          <a:p>
+            <a:pPr algn="l"/>
+            <a:endParaRPr lang="en-US" altLang="ja-JP" sz="1200" dirty="0">
+              <a:latin typeface="メイリオ" panose="020B0604030504040204" pitchFamily="50" charset="-128"/>
+              <a:ea typeface="メイリオ" panose="020B0604030504040204" pitchFamily="50" charset="-128"/>
+            </a:endParaRPr>
+          </a:p>
+          <a:p>
+            <a:pPr algn="l"/>
+            <a:endParaRPr lang="en-US" altLang="ja-JP" sz="1200" dirty="0">
+              <a:latin typeface="メイリオ" panose="020B0604030504040204" pitchFamily="50" charset="-128"/>
+              <a:ea typeface="メイリオ" panose="020B0604030504040204" pitchFamily="50" charset="-128"/>
+            </a:endParaRPr>
+          </a:p>
+          <a:p>
+            <a:pPr algn="l"/>
+            <a:endParaRPr lang="en-US" altLang="ja-JP" sz="1200" dirty="0">
+              <a:latin typeface="メイリオ" panose="020B0604030504040204" pitchFamily="50" charset="-128"/>
+              <a:ea typeface="メイリオ" panose="020B0604030504040204" pitchFamily="50" charset="-128"/>
+            </a:endParaRPr>
+          </a:p>
+          <a:p>
+            <a:pPr algn="l"/>
+            <a:endParaRPr kumimoji="1" lang="en-US" altLang="ja-JP" sz="1200" dirty="0">
+              <a:latin typeface="メイリオ" panose="020B0604030504040204" pitchFamily="50" charset="-128"/>
+              <a:ea typeface="メイリオ" panose="020B0604030504040204" pitchFamily="50" charset="-128"/>
+            </a:endParaRPr>
+          </a:p>
+          <a:p>
+            <a:pPr algn="l"/>
+            <a:endParaRPr lang="en-US" altLang="ja-JP" sz="1200" dirty="0">
+              <a:latin typeface="メイリオ" panose="020B0604030504040204" pitchFamily="50" charset="-128"/>
+              <a:ea typeface="メイリオ" panose="020B0604030504040204" pitchFamily="50" charset="-128"/>
+            </a:endParaRPr>
+          </a:p>
+          <a:p>
+            <a:pPr algn="l"/>
+            <a:endParaRPr kumimoji="1" lang="en-US" altLang="ja-JP" sz="1200" dirty="0">
+              <a:latin typeface="メイリオ" panose="020B0604030504040204" pitchFamily="50" charset="-128"/>
+              <a:ea typeface="メイリオ" panose="020B0604030504040204" pitchFamily="50" charset="-128"/>
+            </a:endParaRPr>
+          </a:p>
+          <a:p>
+            <a:pPr algn="l"/>
+            <a:r>
+              <a:rPr kumimoji="1" lang="ja-JP" altLang="en-US" sz="2000" dirty="0">
+                <a:solidFill>
+                  <a:schemeClr val="accent4">
+                    <a:lumMod val="75000"/>
+                  </a:schemeClr>
+                </a:solidFill>
+                <a:latin typeface="メイリオ" panose="020B0604030504040204" pitchFamily="50" charset="-128"/>
+                <a:ea typeface="メイリオ" panose="020B0604030504040204" pitchFamily="50" charset="-128"/>
+              </a:rPr>
+              <a:t>＃＃</a:t>
+            </a:r>
+            <a:r>
+              <a:rPr lang="ja-JP" altLang="en-US" sz="2000" dirty="0">
+                <a:solidFill>
+                  <a:schemeClr val="accent4">
+                    <a:lumMod val="75000"/>
+                  </a:schemeClr>
+                </a:solidFill>
+                <a:latin typeface="メイリオ" panose="020B0604030504040204" pitchFamily="50" charset="-128"/>
+                <a:ea typeface="メイリオ" panose="020B0604030504040204" pitchFamily="50" charset="-128"/>
+              </a:rPr>
+              <a:t>場合分けの条件１</a:t>
+            </a:r>
+            <a:endParaRPr kumimoji="1" lang="en-US" altLang="ja-JP" sz="2000" dirty="0">
+              <a:solidFill>
+                <a:schemeClr val="accent4">
+                  <a:lumMod val="75000"/>
+                </a:schemeClr>
+              </a:solidFill>
+              <a:latin typeface="メイリオ" panose="020B0604030504040204" pitchFamily="50" charset="-128"/>
+              <a:ea typeface="メイリオ" panose="020B0604030504040204" pitchFamily="50" charset="-128"/>
+            </a:endParaRPr>
+          </a:p>
+          <a:p>
+            <a:pPr algn="l"/>
+            <a:r>
+              <a:rPr lang="ja-JP" altLang="en-US" sz="1200" dirty="0">
+                <a:latin typeface="メイリオ" panose="020B0604030504040204" pitchFamily="50" charset="-128"/>
+                <a:ea typeface="メイリオ" panose="020B0604030504040204" pitchFamily="50" charset="-128"/>
+              </a:rPr>
+              <a:t>変数名：</a:t>
+            </a:r>
+            <a:r>
+              <a:rPr lang="en-US" altLang="ja-JP" sz="1200" dirty="0">
+                <a:latin typeface="メイリオ" panose="020B0604030504040204" pitchFamily="50" charset="-128"/>
+                <a:ea typeface="メイリオ" panose="020B0604030504040204" pitchFamily="50" charset="-128"/>
+              </a:rPr>
+              <a:t>same</a:t>
+            </a:r>
+            <a:r>
+              <a:rPr lang="ja-JP" altLang="en-US" sz="1200" dirty="0">
+                <a:latin typeface="メイリオ" panose="020B0604030504040204" pitchFamily="50" charset="-128"/>
+                <a:ea typeface="メイリオ" panose="020B0604030504040204" pitchFamily="50" charset="-128"/>
+              </a:rPr>
+              <a:t>　型</a:t>
+            </a:r>
+            <a:r>
+              <a:rPr lang="en-US" altLang="ja-JP" sz="1200" dirty="0">
+                <a:latin typeface="メイリオ" panose="020B0604030504040204" pitchFamily="50" charset="-128"/>
+                <a:ea typeface="メイリオ" panose="020B0604030504040204" pitchFamily="50" charset="-128"/>
+              </a:rPr>
+              <a:t>:</a:t>
+            </a:r>
+            <a:r>
+              <a:rPr lang="en-US" altLang="ja-JP" sz="1200" dirty="0" err="1">
+                <a:latin typeface="メイリオ" panose="020B0604030504040204" pitchFamily="50" charset="-128"/>
+                <a:ea typeface="メイリオ" panose="020B0604030504040204" pitchFamily="50" charset="-128"/>
+              </a:rPr>
+              <a:t>boolean</a:t>
+            </a:r>
+            <a:r>
+              <a:rPr lang="en-US" altLang="ja-JP" sz="1200" dirty="0">
+                <a:latin typeface="メイリオ" panose="020B0604030504040204" pitchFamily="50" charset="-128"/>
+                <a:ea typeface="メイリオ" panose="020B0604030504040204" pitchFamily="50" charset="-128"/>
+              </a:rPr>
+              <a:t> </a:t>
+            </a:r>
+          </a:p>
+          <a:p>
+            <a:pPr algn="l"/>
+            <a:r>
+              <a:rPr lang="ja-JP" altLang="en-US" sz="1200" dirty="0">
+                <a:latin typeface="メイリオ" panose="020B0604030504040204" pitchFamily="50" charset="-128"/>
+                <a:ea typeface="メイリオ" panose="020B0604030504040204" pitchFamily="50" charset="-128"/>
+              </a:rPr>
+              <a:t>条件内容：</a:t>
+            </a:r>
+            <a:r>
+              <a:rPr lang="en-US" altLang="ja-JP" sz="1200" dirty="0">
+                <a:latin typeface="メイリオ" panose="020B0604030504040204" pitchFamily="50" charset="-128"/>
+                <a:ea typeface="メイリオ" panose="020B0604030504040204" pitchFamily="50" charset="-128"/>
+              </a:rPr>
+              <a:t>symbols</a:t>
+            </a:r>
+            <a:r>
+              <a:rPr lang="ja-JP" altLang="en-US" sz="1200" dirty="0">
+                <a:latin typeface="メイリオ" panose="020B0604030504040204" pitchFamily="50" charset="-128"/>
+                <a:ea typeface="メイリオ" panose="020B0604030504040204" pitchFamily="50" charset="-128"/>
+              </a:rPr>
+              <a:t>の中身がすべて同じである</a:t>
+            </a:r>
+            <a:endParaRPr kumimoji="1" lang="en-US" altLang="ja-JP" sz="1200" dirty="0">
+              <a:latin typeface="メイリオ" panose="020B0604030504040204" pitchFamily="50" charset="-128"/>
+              <a:ea typeface="メイリオ" panose="020B0604030504040204" pitchFamily="50" charset="-128"/>
+            </a:endParaRPr>
+          </a:p>
+          <a:p>
+            <a:pPr algn="l"/>
+            <a:endParaRPr lang="en-US" altLang="ja-JP" sz="2000" dirty="0">
+              <a:solidFill>
+                <a:schemeClr val="accent4">
+                  <a:lumMod val="75000"/>
+                </a:schemeClr>
+              </a:solidFill>
+              <a:latin typeface="メイリオ" panose="020B0604030504040204" pitchFamily="50" charset="-128"/>
+              <a:ea typeface="メイリオ" panose="020B0604030504040204" pitchFamily="50" charset="-128"/>
+            </a:endParaRPr>
+          </a:p>
+          <a:p>
+            <a:pPr algn="l"/>
+            <a:endParaRPr kumimoji="1" lang="ja-JP" altLang="en-US" sz="2000" dirty="0">
+              <a:solidFill>
+                <a:schemeClr val="accent4">
+                  <a:lumMod val="75000"/>
+                </a:schemeClr>
+              </a:solidFill>
+              <a:latin typeface="メイリオ" panose="020B0604030504040204" pitchFamily="50" charset="-128"/>
+              <a:ea typeface="メイリオ" panose="020B0604030504040204" pitchFamily="50" charset="-128"/>
+            </a:endParaRPr>
+          </a:p>
+        </p:txBody>
+      </p:sp>
+      <p:pic>
+        <p:nvPicPr>
+          <p:cNvPr id="14" name="図 13">
+            <a:extLst>
+              <a:ext uri="{FF2B5EF4-FFF2-40B4-BE49-F238E27FC236}">
+                <a16:creationId xmlns:a16="http://schemas.microsoft.com/office/drawing/2014/main" id="{548069AB-69A2-19D5-CEF3-05EF75ED7AA8}"/>
+              </a:ext>
+            </a:extLst>
+          </p:cNvPr>
+          <p:cNvPicPr>
+            <a:picLocks noChangeAspect="1"/>
+          </p:cNvPicPr>
+          <p:nvPr/>
+        </p:nvPicPr>
+        <p:blipFill>
+          <a:blip r:embed="rId2"/>
+          <a:stretch>
+            <a:fillRect/>
+          </a:stretch>
+        </p:blipFill>
+        <p:spPr>
+          <a:xfrm>
+            <a:off x="854246" y="5098993"/>
+            <a:ext cx="3991532" cy="1467055"/>
+          </a:xfrm>
+          <a:prstGeom prst="rect">
+            <a:avLst/>
+          </a:prstGeom>
+        </p:spPr>
+      </p:pic>
+      <p:pic>
+        <p:nvPicPr>
+          <p:cNvPr id="16" name="図 15">
+            <a:extLst>
+              <a:ext uri="{FF2B5EF4-FFF2-40B4-BE49-F238E27FC236}">
+                <a16:creationId xmlns:a16="http://schemas.microsoft.com/office/drawing/2014/main" id="{655046BF-6659-3E35-9CB2-048FE3BB5D64}"/>
+              </a:ext>
+            </a:extLst>
+          </p:cNvPr>
+          <p:cNvPicPr>
+            <a:picLocks noChangeAspect="1"/>
+          </p:cNvPicPr>
+          <p:nvPr/>
+        </p:nvPicPr>
+        <p:blipFill>
+          <a:blip r:embed="rId3"/>
+          <a:stretch>
+            <a:fillRect/>
+          </a:stretch>
+        </p:blipFill>
+        <p:spPr>
+          <a:xfrm>
+            <a:off x="5630117" y="3830731"/>
+            <a:ext cx="3019846" cy="1343212"/>
+          </a:xfrm>
+          <a:prstGeom prst="rect">
+            <a:avLst/>
+          </a:prstGeom>
+        </p:spPr>
+      </p:pic>
+      <p:pic>
+        <p:nvPicPr>
+          <p:cNvPr id="9" name="図 8">
+            <a:extLst>
+              <a:ext uri="{FF2B5EF4-FFF2-40B4-BE49-F238E27FC236}">
+                <a16:creationId xmlns:a16="http://schemas.microsoft.com/office/drawing/2014/main" id="{92AB8497-24E1-1242-00CD-AA34D5F7D80E}"/>
+              </a:ext>
+            </a:extLst>
+          </p:cNvPr>
+          <p:cNvPicPr>
+            <a:picLocks noChangeAspect="1"/>
+          </p:cNvPicPr>
+          <p:nvPr/>
+        </p:nvPicPr>
+        <p:blipFill>
+          <a:blip r:embed="rId4"/>
+          <a:stretch>
+            <a:fillRect/>
+          </a:stretch>
+        </p:blipFill>
+        <p:spPr>
+          <a:xfrm>
+            <a:off x="854246" y="1836878"/>
+            <a:ext cx="2753109" cy="2038635"/>
+          </a:xfrm>
+          <a:prstGeom prst="rect">
+            <a:avLst/>
+          </a:prstGeom>
+        </p:spPr>
+      </p:pic>
+      <p:sp>
+        <p:nvSpPr>
+          <p:cNvPr id="11" name="正方形/長方形 10">
+            <a:extLst>
+              <a:ext uri="{FF2B5EF4-FFF2-40B4-BE49-F238E27FC236}">
+                <a16:creationId xmlns:a16="http://schemas.microsoft.com/office/drawing/2014/main" id="{DDA33241-75A9-C7A7-5FC3-7DABF8112A82}"/>
+              </a:ext>
+            </a:extLst>
+          </p:cNvPr>
+          <p:cNvSpPr/>
+          <p:nvPr/>
+        </p:nvSpPr>
+        <p:spPr>
+          <a:xfrm>
+            <a:off x="5630117" y="1760651"/>
+            <a:ext cx="3215922" cy="1894845"/>
+          </a:xfrm>
+          <a:prstGeom prst="rect">
+            <a:avLst/>
+          </a:prstGeom>
+          <a:solidFill>
+            <a:schemeClr val="accent2">
+              <a:lumMod val="40000"/>
+              <a:lumOff val="60000"/>
+            </a:schemeClr>
+          </a:solidFill>
+          <a:ln>
+            <a:noFill/>
+          </a:ln>
+        </p:spPr>
+        <p:style>
+          <a:lnRef idx="2">
+            <a:schemeClr val="accent1">
+              <a:shade val="15000"/>
+            </a:schemeClr>
+          </a:lnRef>
+          <a:fillRef idx="1">
+            <a:schemeClr val="accent1"/>
+          </a:fillRef>
+          <a:effectRef idx="0">
+            <a:schemeClr val="accent1"/>
+          </a:effectRef>
+          <a:fontRef idx="minor">
+            <a:schemeClr val="lt1"/>
+          </a:fontRef>
+        </p:style>
+        <p:txBody>
+          <a:bodyPr rtlCol="0" anchor="t"/>
+          <a:lstStyle/>
+          <a:p>
+            <a:r>
+              <a:rPr lang="en-US" altLang="ja-JP" sz="1000" dirty="0">
+                <a:solidFill>
+                  <a:schemeClr val="tx1"/>
+                </a:solidFill>
+              </a:rPr>
+              <a:t>else</a:t>
+            </a:r>
+            <a:r>
+              <a:rPr lang="ja-JP" altLang="en-US" sz="1000" dirty="0">
+                <a:solidFill>
+                  <a:schemeClr val="tx1"/>
+                </a:solidFill>
+              </a:rPr>
+              <a:t>文について</a:t>
+            </a:r>
+            <a:endParaRPr lang="en-US" altLang="ja-JP" sz="1000" dirty="0">
+              <a:solidFill>
+                <a:schemeClr val="tx1"/>
+              </a:solidFill>
+            </a:endParaRPr>
+          </a:p>
+          <a:p>
+            <a:endParaRPr lang="en-US" altLang="ja-JP" sz="1000" dirty="0">
+              <a:solidFill>
+                <a:schemeClr val="tx1"/>
+              </a:solidFill>
+            </a:endParaRPr>
+          </a:p>
+          <a:p>
+            <a:r>
+              <a:rPr lang="en-US" altLang="ja-JP" sz="1000" dirty="0">
+                <a:solidFill>
+                  <a:schemeClr val="tx1"/>
+                </a:solidFill>
+              </a:rPr>
+              <a:t>else</a:t>
+            </a:r>
+            <a:r>
+              <a:rPr lang="ja-JP" altLang="en-US" sz="1000" dirty="0">
+                <a:solidFill>
+                  <a:schemeClr val="tx1"/>
+                </a:solidFill>
+              </a:rPr>
+              <a:t>なし</a:t>
+            </a:r>
+            <a:r>
+              <a:rPr lang="en-US" altLang="ja-JP" sz="1000" dirty="0">
+                <a:solidFill>
+                  <a:schemeClr val="tx1"/>
+                </a:solidFill>
+              </a:rPr>
+              <a:t>		</a:t>
+            </a:r>
+          </a:p>
+          <a:p>
+            <a:r>
+              <a:rPr kumimoji="1" lang="en-US" altLang="ja-JP" sz="1000" dirty="0">
+                <a:solidFill>
+                  <a:schemeClr val="tx1"/>
+                </a:solidFill>
+              </a:rPr>
+              <a:t>If(x=3) A()	</a:t>
+            </a:r>
+            <a:r>
+              <a:rPr kumimoji="1" lang="ja-JP" altLang="en-US" sz="1000" dirty="0">
+                <a:solidFill>
+                  <a:schemeClr val="tx1"/>
+                </a:solidFill>
+              </a:rPr>
+              <a:t>　　　</a:t>
+            </a:r>
+            <a:r>
+              <a:rPr lang="en-US" altLang="ja-JP" sz="1000" dirty="0">
+                <a:solidFill>
+                  <a:schemeClr val="tx1"/>
+                </a:solidFill>
+              </a:rPr>
+              <a:t>x=3</a:t>
+            </a:r>
+            <a:r>
+              <a:rPr lang="ja-JP" altLang="en-US" sz="1000" dirty="0">
+                <a:solidFill>
+                  <a:schemeClr val="tx1"/>
+                </a:solidFill>
+              </a:rPr>
+              <a:t>のとき、</a:t>
+            </a:r>
+            <a:endParaRPr kumimoji="1" lang="en-US" altLang="ja-JP" sz="1000" dirty="0">
+              <a:solidFill>
+                <a:schemeClr val="tx1"/>
+              </a:solidFill>
+            </a:endParaRPr>
+          </a:p>
+          <a:p>
+            <a:r>
+              <a:rPr lang="en-US" altLang="ja-JP" sz="1000" dirty="0">
+                <a:solidFill>
+                  <a:schemeClr val="tx1"/>
+                </a:solidFill>
+              </a:rPr>
+              <a:t>If(x=5) B()	</a:t>
+            </a:r>
+            <a:r>
+              <a:rPr lang="ja-JP" altLang="en-US" sz="1000" dirty="0">
+                <a:solidFill>
+                  <a:schemeClr val="tx1"/>
+                </a:solidFill>
+              </a:rPr>
+              <a:t>　　　</a:t>
+            </a:r>
+            <a:r>
+              <a:rPr kumimoji="1" lang="en-US" altLang="ja-JP" sz="1000" dirty="0">
+                <a:solidFill>
+                  <a:schemeClr val="tx1"/>
+                </a:solidFill>
+              </a:rPr>
+              <a:t>2</a:t>
+            </a:r>
+            <a:r>
+              <a:rPr kumimoji="1" lang="ja-JP" altLang="en-US" sz="1000" dirty="0">
+                <a:solidFill>
+                  <a:schemeClr val="tx1"/>
+                </a:solidFill>
+              </a:rPr>
+              <a:t>行目の</a:t>
+            </a:r>
+            <a:r>
+              <a:rPr kumimoji="1" lang="en-US" altLang="ja-JP" sz="1000" dirty="0">
+                <a:solidFill>
+                  <a:schemeClr val="tx1"/>
+                </a:solidFill>
+              </a:rPr>
+              <a:t>if</a:t>
+            </a:r>
+            <a:r>
+              <a:rPr kumimoji="1" lang="ja-JP" altLang="en-US" sz="1000" dirty="0">
+                <a:solidFill>
+                  <a:schemeClr val="tx1"/>
+                </a:solidFill>
+              </a:rPr>
+              <a:t>文もチェックする</a:t>
+            </a:r>
+            <a:endParaRPr lang="en-US" altLang="ja-JP" sz="1000" dirty="0">
+              <a:solidFill>
+                <a:schemeClr val="tx1"/>
+              </a:solidFill>
+            </a:endParaRPr>
+          </a:p>
+          <a:p>
+            <a:endParaRPr kumimoji="1" lang="en-US" altLang="ja-JP" sz="1000" dirty="0">
+              <a:solidFill>
+                <a:schemeClr val="tx1"/>
+              </a:solidFill>
+            </a:endParaRPr>
+          </a:p>
+          <a:p>
+            <a:r>
+              <a:rPr lang="en-US" altLang="ja-JP" sz="1000" dirty="0">
+                <a:solidFill>
+                  <a:schemeClr val="tx1"/>
+                </a:solidFill>
+              </a:rPr>
+              <a:t>else</a:t>
+            </a:r>
+            <a:r>
+              <a:rPr lang="ja-JP" altLang="en-US" sz="1000" dirty="0">
+                <a:solidFill>
+                  <a:schemeClr val="tx1"/>
+                </a:solidFill>
+              </a:rPr>
+              <a:t>あり</a:t>
+            </a:r>
+            <a:r>
+              <a:rPr lang="en-US" altLang="ja-JP" sz="1000" dirty="0">
+                <a:solidFill>
+                  <a:schemeClr val="tx1"/>
+                </a:solidFill>
+              </a:rPr>
+              <a:t>		</a:t>
+            </a:r>
+          </a:p>
+          <a:p>
+            <a:r>
+              <a:rPr kumimoji="1" lang="en-US" altLang="ja-JP" sz="1000" dirty="0">
+                <a:solidFill>
+                  <a:schemeClr val="tx1"/>
+                </a:solidFill>
+              </a:rPr>
+              <a:t>If(x=3){	</a:t>
+            </a:r>
+            <a:r>
+              <a:rPr kumimoji="1" lang="ja-JP" altLang="en-US" sz="1000" dirty="0">
+                <a:solidFill>
+                  <a:schemeClr val="tx1"/>
+                </a:solidFill>
+              </a:rPr>
+              <a:t>　　　</a:t>
+            </a:r>
+            <a:r>
+              <a:rPr lang="en-US" altLang="ja-JP" sz="1000" dirty="0">
+                <a:solidFill>
+                  <a:schemeClr val="tx1"/>
+                </a:solidFill>
+              </a:rPr>
+              <a:t>x=3</a:t>
+            </a:r>
+            <a:r>
+              <a:rPr lang="ja-JP" altLang="en-US" sz="1000" dirty="0">
+                <a:solidFill>
+                  <a:schemeClr val="tx1"/>
+                </a:solidFill>
+              </a:rPr>
+              <a:t>のとき、</a:t>
+            </a:r>
+            <a:endParaRPr kumimoji="1" lang="en-US" altLang="ja-JP" sz="1000" dirty="0">
+              <a:solidFill>
+                <a:schemeClr val="tx1"/>
+              </a:solidFill>
+            </a:endParaRPr>
+          </a:p>
+          <a:p>
+            <a:r>
+              <a:rPr lang="ja-JP" altLang="en-US" sz="1000" dirty="0">
+                <a:solidFill>
+                  <a:schemeClr val="tx1"/>
+                </a:solidFill>
+              </a:rPr>
+              <a:t>　</a:t>
+            </a:r>
+            <a:r>
+              <a:rPr lang="en-US" altLang="ja-JP" sz="1000" dirty="0">
+                <a:solidFill>
+                  <a:schemeClr val="tx1"/>
+                </a:solidFill>
+              </a:rPr>
+              <a:t>A()	</a:t>
+            </a:r>
+            <a:r>
+              <a:rPr lang="ja-JP" altLang="en-US" sz="1000" dirty="0">
+                <a:solidFill>
+                  <a:schemeClr val="tx1"/>
+                </a:solidFill>
+              </a:rPr>
+              <a:t>　　　</a:t>
+            </a:r>
+            <a:r>
+              <a:rPr lang="en-US" altLang="ja-JP" sz="1000" dirty="0">
+                <a:solidFill>
+                  <a:schemeClr val="tx1"/>
+                </a:solidFill>
+              </a:rPr>
+              <a:t> 3</a:t>
+            </a:r>
+            <a:r>
+              <a:rPr lang="ja-JP" altLang="en-US" sz="1000" dirty="0">
+                <a:solidFill>
+                  <a:schemeClr val="tx1"/>
+                </a:solidFill>
+              </a:rPr>
+              <a:t>行目の</a:t>
+            </a:r>
+            <a:r>
+              <a:rPr lang="en-US" altLang="ja-JP" sz="1000" dirty="0">
+                <a:solidFill>
+                  <a:schemeClr val="tx1"/>
+                </a:solidFill>
+              </a:rPr>
+              <a:t>if</a:t>
+            </a:r>
+            <a:r>
+              <a:rPr lang="ja-JP" altLang="en-US" sz="1000" dirty="0">
+                <a:solidFill>
+                  <a:schemeClr val="tx1"/>
+                </a:solidFill>
+              </a:rPr>
+              <a:t>文はスキップする</a:t>
+            </a:r>
+            <a:endParaRPr lang="en-US" altLang="ja-JP" sz="1000" dirty="0">
+              <a:solidFill>
+                <a:schemeClr val="tx1"/>
+              </a:solidFill>
+            </a:endParaRPr>
+          </a:p>
+          <a:p>
+            <a:r>
+              <a:rPr lang="en-US" altLang="ja-JP" sz="1000" dirty="0">
+                <a:solidFill>
+                  <a:schemeClr val="tx1"/>
+                </a:solidFill>
+              </a:rPr>
+              <a:t>}else if(x=5){</a:t>
+            </a:r>
+          </a:p>
+          <a:p>
+            <a:r>
+              <a:rPr lang="ja-JP" altLang="en-US" sz="1000" dirty="0">
+                <a:solidFill>
+                  <a:schemeClr val="tx1"/>
+                </a:solidFill>
+              </a:rPr>
+              <a:t>　</a:t>
+            </a:r>
+            <a:r>
+              <a:rPr lang="en-US" altLang="ja-JP" sz="1000" dirty="0">
+                <a:solidFill>
+                  <a:schemeClr val="tx1"/>
+                </a:solidFill>
+              </a:rPr>
+              <a:t>B()</a:t>
+            </a:r>
+          </a:p>
+          <a:p>
+            <a:r>
+              <a:rPr kumimoji="1" lang="en-US" altLang="ja-JP" sz="1000" dirty="0">
+                <a:solidFill>
+                  <a:schemeClr val="tx1"/>
+                </a:solidFill>
+              </a:rPr>
+              <a:t>}</a:t>
+            </a:r>
+          </a:p>
+        </p:txBody>
+      </p:sp>
+      <p:cxnSp>
+        <p:nvCxnSpPr>
+          <p:cNvPr id="13" name="直線矢印コネクタ 12">
+            <a:extLst>
+              <a:ext uri="{FF2B5EF4-FFF2-40B4-BE49-F238E27FC236}">
+                <a16:creationId xmlns:a16="http://schemas.microsoft.com/office/drawing/2014/main" id="{74FF8975-518B-E7D8-023D-CCCCAEBC6F95}"/>
+              </a:ext>
+            </a:extLst>
+          </p:cNvPr>
+          <p:cNvCxnSpPr>
+            <a:cxnSpLocks/>
+          </p:cNvCxnSpPr>
+          <p:nvPr/>
+        </p:nvCxnSpPr>
+        <p:spPr>
+          <a:xfrm flipV="1">
+            <a:off x="4925769" y="4885237"/>
+            <a:ext cx="593121" cy="213756"/>
+          </a:xfrm>
+          <a:prstGeom prst="straightConnector1">
+            <a:avLst/>
+          </a:prstGeom>
+          <a:ln w="57150">
+            <a:solidFill>
+              <a:schemeClr val="accent4">
+                <a:lumMod val="75000"/>
+              </a:schemeClr>
+            </a:solidFill>
+            <a:tailEnd type="triangle"/>
+          </a:ln>
+        </p:spPr>
+        <p:style>
+          <a:lnRef idx="1">
+            <a:schemeClr val="accent1"/>
+          </a:lnRef>
+          <a:fillRef idx="0">
+            <a:schemeClr val="accent1"/>
+          </a:fillRef>
+          <a:effectRef idx="0">
+            <a:schemeClr val="accent1"/>
+          </a:effectRef>
+          <a:fontRef idx="minor">
+            <a:schemeClr val="tx1"/>
+          </a:fontRef>
+        </p:style>
+      </p:cxnSp>
+    </p:spTree>
+    <p:extLst>
+      <p:ext uri="{BB962C8B-B14F-4D97-AF65-F5344CB8AC3E}">
+        <p14:creationId xmlns:p14="http://schemas.microsoft.com/office/powerpoint/2010/main" val="1945501328"/>
+      </p:ext>
+    </p:extLst>
+  </p:cSld>
+  <p:clrMapOvr>
+    <a:masterClrMapping/>
+  </p:clrMapOvr>
+</p:sld>
+</file>
+
+<file path=ppt/slides/slide5.xml><?xml version="1.0" encoding="utf-8"?>
+<p:sld xmlns:a="http://schemas.openxmlformats.org/drawingml/2006/main" xmlns:r="http://schemas.openxmlformats.org/officeDocument/2006/relationships" xmlns:p="http://schemas.openxmlformats.org/presentationml/2006/main">
+  <p:cSld>
+    <p:spTree>
+      <p:nvGrpSpPr>
+        <p:cNvPr id="1" name=""/>
+        <p:cNvGrpSpPr/>
+        <p:nvPr/>
+      </p:nvGrpSpPr>
+      <p:grpSpPr>
+        <a:xfrm>
+          <a:off x="0" y="0"/>
+          <a:ext cx="0" cy="0"/>
+          <a:chOff x="0" y="0"/>
+          <a:chExt cx="0" cy="0"/>
+        </a:xfrm>
+      </p:grpSpPr>
+      <p:sp>
+        <p:nvSpPr>
+          <p:cNvPr id="2" name="タイトル 1">
+            <a:extLst>
+              <a:ext uri="{FF2B5EF4-FFF2-40B4-BE49-F238E27FC236}">
+                <a16:creationId xmlns:a16="http://schemas.microsoft.com/office/drawing/2014/main" id="{8F92D15D-6ED6-F1E2-415D-C5D0D0CAAC83}"/>
+              </a:ext>
+            </a:extLst>
+          </p:cNvPr>
+          <p:cNvSpPr>
+            <a:spLocks noGrp="1"/>
+          </p:cNvSpPr>
+          <p:nvPr>
+            <p:ph type="ctrTitle"/>
+          </p:nvPr>
+        </p:nvSpPr>
+        <p:spPr>
+          <a:xfrm>
+            <a:off x="528181" y="314435"/>
+            <a:ext cx="5891408" cy="700173"/>
+          </a:xfrm>
+        </p:spPr>
+        <p:txBody>
+          <a:bodyPr>
+            <a:normAutofit/>
+          </a:bodyPr>
+          <a:lstStyle/>
+          <a:p>
+            <a:pPr algn="l"/>
+            <a:r>
+              <a:rPr kumimoji="1" lang="en-US" altLang="ja-JP" sz="3000" b="1" dirty="0">
+                <a:solidFill>
+                  <a:schemeClr val="tx1">
+                    <a:lumMod val="65000"/>
+                    <a:lumOff val="35000"/>
+                  </a:schemeClr>
+                </a:solidFill>
+                <a:latin typeface="メイリオ" panose="020B0604030504040204" pitchFamily="50" charset="-128"/>
+                <a:ea typeface="メイリオ" panose="020B0604030504040204" pitchFamily="50" charset="-128"/>
+              </a:rPr>
+              <a:t>7</a:t>
+            </a:r>
+            <a:r>
+              <a:rPr kumimoji="1" lang="ja-JP" altLang="en-US" sz="3000" b="1" dirty="0">
+                <a:solidFill>
+                  <a:schemeClr val="tx1">
+                    <a:lumMod val="65000"/>
+                    <a:lumOff val="35000"/>
+                  </a:schemeClr>
+                </a:solidFill>
+                <a:latin typeface="メイリオ" panose="020B0604030504040204" pitchFamily="50" charset="-128"/>
+                <a:ea typeface="メイリオ" panose="020B0604030504040204" pitchFamily="50" charset="-128"/>
+              </a:rPr>
+              <a:t>章　プログラム</a:t>
+            </a:r>
+          </a:p>
+        </p:txBody>
+      </p:sp>
+      <p:sp>
+        <p:nvSpPr>
+          <p:cNvPr id="4" name="正方形/長方形 3">
+            <a:extLst>
+              <a:ext uri="{FF2B5EF4-FFF2-40B4-BE49-F238E27FC236}">
+                <a16:creationId xmlns:a16="http://schemas.microsoft.com/office/drawing/2014/main" id="{578782C7-6070-7C3A-DAB7-3101F4C6ED5C}"/>
+              </a:ext>
+            </a:extLst>
+          </p:cNvPr>
+          <p:cNvSpPr/>
+          <p:nvPr/>
+        </p:nvSpPr>
+        <p:spPr>
+          <a:xfrm>
+            <a:off x="658169" y="1098587"/>
+            <a:ext cx="10540261" cy="5528957"/>
+          </a:xfrm>
+          <a:prstGeom prst="rect">
+            <a:avLst/>
+          </a:prstGeom>
+          <a:solidFill>
+            <a:schemeClr val="accent4">
+              <a:lumMod val="20000"/>
+              <a:lumOff val="80000"/>
+            </a:schemeClr>
+          </a:solidFill>
+          <a:ln>
+            <a:noFill/>
+          </a:ln>
+        </p:spPr>
+        <p:style>
+          <a:lnRef idx="2">
+            <a:schemeClr val="accent1">
+              <a:shade val="15000"/>
+            </a:schemeClr>
+          </a:lnRef>
+          <a:fillRef idx="1">
+            <a:schemeClr val="accent1"/>
+          </a:fillRef>
+          <a:effectRef idx="0">
+            <a:schemeClr val="accent1"/>
+          </a:effectRef>
+          <a:fontRef idx="minor">
+            <a:schemeClr val="lt1"/>
+          </a:fontRef>
+        </p:style>
+        <p:txBody>
+          <a:bodyPr rtlCol="0" anchor="t"/>
+          <a:lstStyle/>
+          <a:p>
+            <a:endParaRPr kumimoji="1" lang="ja-JP" altLang="en-US" dirty="0"/>
+          </a:p>
+        </p:txBody>
+      </p:sp>
+      <p:sp>
+        <p:nvSpPr>
+          <p:cNvPr id="5" name="正方形/長方形 4">
+            <a:extLst>
+              <a:ext uri="{FF2B5EF4-FFF2-40B4-BE49-F238E27FC236}">
+                <a16:creationId xmlns:a16="http://schemas.microsoft.com/office/drawing/2014/main" id="{CF0C4CB1-F083-E867-F352-7E25984AC542}"/>
+              </a:ext>
+            </a:extLst>
+          </p:cNvPr>
+          <p:cNvSpPr/>
+          <p:nvPr/>
+        </p:nvSpPr>
+        <p:spPr>
+          <a:xfrm>
+            <a:off x="5843615" y="5086682"/>
             <a:ext cx="4352793" cy="651353"/>
           </a:xfrm>
           <a:prstGeom prst="rect">
@@ -4076,20 +6305,85 @@
           <a:lstStyle/>
           <a:p>
             <a:r>
-              <a:rPr lang="en-US" altLang="ja-JP" sz="1000" dirty="0">
-                <a:solidFill>
-                  <a:schemeClr val="tx1"/>
-                </a:solidFill>
-              </a:rPr>
-              <a:t>u</a:t>
-            </a:r>
+              <a:rPr lang="ja-JP" altLang="en-US" sz="1000" dirty="0">
+                <a:solidFill>
+                  <a:schemeClr val="tx1"/>
+                </a:solidFill>
+              </a:rPr>
+              <a:t>添字操作</a:t>
+            </a:r>
+            <a:endParaRPr lang="en-US" altLang="ja-JP" sz="1000" dirty="0">
+              <a:solidFill>
+                <a:schemeClr val="tx1"/>
+              </a:solidFill>
+            </a:endParaRPr>
+          </a:p>
+          <a:p>
+            <a:endParaRPr lang="en-US" altLang="ja-JP" sz="1000" dirty="0">
+              <a:solidFill>
+                <a:schemeClr val="tx1"/>
+              </a:solidFill>
+            </a:endParaRPr>
+          </a:p>
+        </p:txBody>
+      </p:sp>
+      <p:sp>
+        <p:nvSpPr>
+          <p:cNvPr id="6" name="正方形/長方形 5">
+            <a:extLst>
+              <a:ext uri="{FF2B5EF4-FFF2-40B4-BE49-F238E27FC236}">
+                <a16:creationId xmlns:a16="http://schemas.microsoft.com/office/drawing/2014/main" id="{75CE81D2-C5EE-4E63-DA6F-4D50A6E33162}"/>
+              </a:ext>
+            </a:extLst>
+          </p:cNvPr>
+          <p:cNvSpPr/>
+          <p:nvPr/>
+        </p:nvSpPr>
+        <p:spPr>
+          <a:xfrm>
+            <a:off x="8561647" y="1263081"/>
+            <a:ext cx="2391170" cy="1183629"/>
+          </a:xfrm>
+          <a:prstGeom prst="rect">
+            <a:avLst/>
+          </a:prstGeom>
+          <a:solidFill>
+            <a:schemeClr val="accent2">
+              <a:lumMod val="40000"/>
+              <a:lumOff val="60000"/>
+            </a:schemeClr>
+          </a:solidFill>
+          <a:ln>
+            <a:noFill/>
+          </a:ln>
+        </p:spPr>
+        <p:style>
+          <a:lnRef idx="2">
+            <a:schemeClr val="accent1">
+              <a:shade val="15000"/>
+            </a:schemeClr>
+          </a:lnRef>
+          <a:fillRef idx="1">
+            <a:schemeClr val="accent1"/>
+          </a:fillRef>
+          <a:effectRef idx="0">
+            <a:schemeClr val="accent1"/>
+          </a:effectRef>
+          <a:fontRef idx="minor">
+            <a:schemeClr val="lt1"/>
+          </a:fontRef>
+        </p:style>
+        <p:txBody>
+          <a:bodyPr rtlCol="0" anchor="t"/>
+          <a:lstStyle/>
+          <a:p>
             <a:r>
               <a:rPr kumimoji="1" lang="en-US" altLang="ja-JP" sz="1000" dirty="0">
                 <a:solidFill>
                   <a:schemeClr val="tx1"/>
                 </a:solidFill>
               </a:rPr>
-              <a:t>nique</a:t>
+              <a:t>%in% </a:t>
             </a:r>
             <a:r>
               <a:rPr kumimoji="1" lang="ja-JP" altLang="en-US" sz="1000" dirty="0">
@@ -4097,7 +6391,7 @@
                   <a:schemeClr val="tx1"/>
                 </a:solidFill>
               </a:rPr>
-              <a:t>関数</a:t>
+              <a:t>左辺が右辺を含むか判断する</a:t>
             </a:r>
             <a:endParaRPr kumimoji="1" lang="en-US" altLang="ja-JP" sz="1000" dirty="0">
               <a:solidFill>
@@ -4106,27 +6400,90 @@
             </a:endParaRPr>
           </a:p>
           <a:p>
+            <a:endParaRPr kumimoji="1" lang="en-US" altLang="ja-JP" sz="1000" dirty="0">
+              <a:solidFill>
+                <a:schemeClr val="tx1"/>
+              </a:solidFill>
+            </a:endParaRPr>
+          </a:p>
+          <a:p>
             <a:r>
               <a:rPr lang="en-US" altLang="ja-JP" sz="1000" dirty="0">
                 <a:solidFill>
                   <a:schemeClr val="tx1"/>
                 </a:solidFill>
               </a:rPr>
-              <a:t>Vector</a:t>
-            </a:r>
-            <a:r>
-              <a:rPr lang="ja-JP" altLang="en-US" sz="1000" dirty="0">
-                <a:solidFill>
-                  <a:schemeClr val="tx1"/>
-                </a:solidFill>
-              </a:rPr>
-              <a:t>に含まれる異なる項をまとめたベクトル</a:t>
-            </a:r>
+              <a:t>List1 &lt;- c(A,B,C,D)</a:t>
+            </a:r>
+          </a:p>
+          <a:p>
+            <a:r>
+              <a:rPr kumimoji="1" lang="en-US" altLang="ja-JP" sz="1000" dirty="0">
+                <a:solidFill>
+                  <a:schemeClr val="tx1"/>
+                </a:solidFill>
+              </a:rPr>
+              <a:t>List2 &lt;-c(C,E,B)</a:t>
+            </a:r>
+          </a:p>
+          <a:p>
             <a:endParaRPr lang="en-US" altLang="ja-JP" sz="1000" dirty="0">
               <a:solidFill>
                 <a:schemeClr val="tx1"/>
               </a:solidFill>
             </a:endParaRPr>
+          </a:p>
+          <a:p>
+            <a:r>
+              <a:rPr kumimoji="1" lang="en-US" altLang="ja-JP" sz="1000" dirty="0">
+                <a:solidFill>
+                  <a:schemeClr val="tx1"/>
+                </a:solidFill>
+              </a:rPr>
+              <a:t>List1 %in% List2</a:t>
+            </a:r>
+          </a:p>
+          <a:p>
+            <a:r>
+              <a:rPr lang="en-US" altLang="ja-JP" sz="1000" dirty="0">
+                <a:solidFill>
+                  <a:schemeClr val="tx1"/>
+                </a:solidFill>
+              </a:rPr>
+              <a:t>#FALSE</a:t>
+            </a:r>
+            <a:r>
+              <a:rPr lang="ja-JP" altLang="en-US" sz="1000" dirty="0">
+                <a:solidFill>
+                  <a:schemeClr val="tx1"/>
+                </a:solidFill>
+              </a:rPr>
+              <a:t> </a:t>
+            </a:r>
+            <a:r>
+              <a:rPr lang="en-US" altLang="ja-JP" sz="1000" dirty="0">
+                <a:solidFill>
+                  <a:schemeClr val="tx1"/>
+                </a:solidFill>
+              </a:rPr>
+              <a:t>TRUE</a:t>
+            </a:r>
+            <a:r>
+              <a:rPr lang="ja-JP" altLang="en-US" sz="1000" dirty="0">
+                <a:solidFill>
+                  <a:schemeClr val="tx1"/>
+                </a:solidFill>
+              </a:rPr>
+              <a:t> </a:t>
+            </a:r>
+            <a:r>
+              <a:rPr lang="en-US" altLang="ja-JP" sz="1000" dirty="0">
+                <a:solidFill>
+                  <a:schemeClr val="tx1"/>
+                </a:solidFill>
+              </a:rPr>
+              <a:t>TRUE FALSE</a:t>
+            </a:r>
           </a:p>
         </p:txBody>
       </p:sp>
@@ -4148,22 +6505,611 @@
         </p:nvSpPr>
         <p:spPr>
           <a:xfrm>
-            <a:off x="1233814" y="1421704"/>
-            <a:ext cx="8473857" cy="4471792"/>
+            <a:off x="682560" y="1143635"/>
+            <a:ext cx="9391483" cy="5446283"/>
           </a:xfrm>
         </p:spPr>
         <p:txBody>
-          <a:bodyPr/>
+          <a:bodyPr>
+            <a:normAutofit/>
+          </a:bodyPr>
           <a:lstStyle/>
           <a:p>
-            <a:endParaRPr kumimoji="1" lang="ja-JP" altLang="en-US" dirty="0"/>
-          </a:p>
-        </p:txBody>
-      </p:sp>
+            <a:pPr algn="l"/>
+            <a:r>
+              <a:rPr kumimoji="1" lang="ja-JP" altLang="en-US" sz="2000" dirty="0">
+                <a:solidFill>
+                  <a:schemeClr val="accent4">
+                    <a:lumMod val="75000"/>
+                  </a:schemeClr>
+                </a:solidFill>
+                <a:latin typeface="メイリオ" panose="020B0604030504040204" pitchFamily="50" charset="-128"/>
+                <a:ea typeface="メイリオ" panose="020B0604030504040204" pitchFamily="50" charset="-128"/>
+              </a:rPr>
+              <a:t>＃</a:t>
+            </a:r>
+            <a:r>
+              <a:rPr lang="en-US" altLang="ja-JP" sz="2000" dirty="0">
+                <a:solidFill>
+                  <a:schemeClr val="accent4">
+                    <a:lumMod val="75000"/>
+                  </a:schemeClr>
+                </a:solidFill>
+                <a:latin typeface="メイリオ" panose="020B0604030504040204" pitchFamily="50" charset="-128"/>
+                <a:ea typeface="メイリオ" panose="020B0604030504040204" pitchFamily="50" charset="-128"/>
+              </a:rPr>
+              <a:t>#</a:t>
+            </a:r>
+            <a:r>
+              <a:rPr lang="ja-JP" altLang="en-US" sz="2000" dirty="0">
+                <a:solidFill>
+                  <a:schemeClr val="accent4">
+                    <a:lumMod val="75000"/>
+                  </a:schemeClr>
+                </a:solidFill>
+                <a:latin typeface="メイリオ" panose="020B0604030504040204" pitchFamily="50" charset="-128"/>
+                <a:ea typeface="メイリオ" panose="020B0604030504040204" pitchFamily="50" charset="-128"/>
+              </a:rPr>
+              <a:t>場合分けの条件２</a:t>
+            </a:r>
+            <a:endParaRPr kumimoji="1" lang="en-US" altLang="ja-JP" sz="2000" dirty="0">
+              <a:solidFill>
+                <a:schemeClr val="accent4">
+                  <a:lumMod val="75000"/>
+                </a:schemeClr>
+              </a:solidFill>
+              <a:latin typeface="メイリオ" panose="020B0604030504040204" pitchFamily="50" charset="-128"/>
+              <a:ea typeface="メイリオ" panose="020B0604030504040204" pitchFamily="50" charset="-128"/>
+            </a:endParaRPr>
+          </a:p>
+          <a:p>
+            <a:pPr algn="l"/>
+            <a:r>
+              <a:rPr lang="ja-JP" altLang="en-US" sz="1200" dirty="0">
+                <a:latin typeface="メイリオ" panose="020B0604030504040204" pitchFamily="50" charset="-128"/>
+                <a:ea typeface="メイリオ" panose="020B0604030504040204" pitchFamily="50" charset="-128"/>
+              </a:rPr>
+              <a:t>変数名：</a:t>
+            </a:r>
+            <a:r>
+              <a:rPr lang="en-US" altLang="ja-JP" sz="1200" dirty="0">
+                <a:latin typeface="メイリオ" panose="020B0604030504040204" pitchFamily="50" charset="-128"/>
+                <a:ea typeface="メイリオ" panose="020B0604030504040204" pitchFamily="50" charset="-128"/>
+              </a:rPr>
+              <a:t>bars</a:t>
+            </a:r>
+            <a:r>
+              <a:rPr lang="ja-JP" altLang="en-US" sz="1200" dirty="0">
+                <a:latin typeface="メイリオ" panose="020B0604030504040204" pitchFamily="50" charset="-128"/>
+                <a:ea typeface="メイリオ" panose="020B0604030504040204" pitchFamily="50" charset="-128"/>
+              </a:rPr>
+              <a:t>　型：</a:t>
+            </a:r>
+            <a:r>
+              <a:rPr lang="en-US" altLang="ja-JP" sz="1200" dirty="0" err="1">
+                <a:latin typeface="メイリオ" panose="020B0604030504040204" pitchFamily="50" charset="-128"/>
+                <a:ea typeface="メイリオ" panose="020B0604030504040204" pitchFamily="50" charset="-128"/>
+              </a:rPr>
+              <a:t>boolean</a:t>
+            </a:r>
+            <a:endParaRPr lang="en-US" altLang="ja-JP" sz="1200" dirty="0">
+              <a:latin typeface="メイリオ" panose="020B0604030504040204" pitchFamily="50" charset="-128"/>
+              <a:ea typeface="メイリオ" panose="020B0604030504040204" pitchFamily="50" charset="-128"/>
+            </a:endParaRPr>
+          </a:p>
+          <a:p>
+            <a:pPr algn="l"/>
+            <a:r>
+              <a:rPr lang="ja-JP" altLang="en-US" sz="1200" dirty="0">
+                <a:latin typeface="メイリオ" panose="020B0604030504040204" pitchFamily="50" charset="-128"/>
+                <a:ea typeface="メイリオ" panose="020B0604030504040204" pitchFamily="50" charset="-128"/>
+              </a:rPr>
+              <a:t>条件内容：</a:t>
+            </a:r>
+            <a:r>
+              <a:rPr lang="en-US" altLang="ja-JP" sz="1200" dirty="0">
+                <a:latin typeface="メイリオ" panose="020B0604030504040204" pitchFamily="50" charset="-128"/>
+                <a:ea typeface="メイリオ" panose="020B0604030504040204" pitchFamily="50" charset="-128"/>
+              </a:rPr>
+              <a:t>symbols</a:t>
+            </a:r>
+            <a:r>
+              <a:rPr lang="ja-JP" altLang="en-US" sz="1200" dirty="0">
+                <a:latin typeface="メイリオ" panose="020B0604030504040204" pitchFamily="50" charset="-128"/>
+                <a:ea typeface="メイリオ" panose="020B0604030504040204" pitchFamily="50" charset="-128"/>
+              </a:rPr>
+              <a:t>がバーを含む</a:t>
+            </a:r>
+            <a:endParaRPr lang="en-US" altLang="ja-JP" sz="1200" dirty="0">
+              <a:latin typeface="メイリオ" panose="020B0604030504040204" pitchFamily="50" charset="-128"/>
+              <a:ea typeface="メイリオ" panose="020B0604030504040204" pitchFamily="50" charset="-128"/>
+            </a:endParaRPr>
+          </a:p>
+          <a:p>
+            <a:pPr algn="l"/>
+            <a:endParaRPr kumimoji="1" lang="en-US" altLang="ja-JP" sz="1200" dirty="0">
+              <a:latin typeface="メイリオ" panose="020B0604030504040204" pitchFamily="50" charset="-128"/>
+              <a:ea typeface="メイリオ" panose="020B0604030504040204" pitchFamily="50" charset="-128"/>
+            </a:endParaRPr>
+          </a:p>
+          <a:p>
+            <a:pPr algn="l"/>
+            <a:endParaRPr lang="en-US" altLang="ja-JP" sz="1200" dirty="0">
+              <a:latin typeface="メイリオ" panose="020B0604030504040204" pitchFamily="50" charset="-128"/>
+              <a:ea typeface="メイリオ" panose="020B0604030504040204" pitchFamily="50" charset="-128"/>
+            </a:endParaRPr>
+          </a:p>
+          <a:p>
+            <a:pPr algn="l"/>
+            <a:r>
+              <a:rPr kumimoji="1" lang="en-US" altLang="ja-JP" sz="1200" dirty="0">
+                <a:latin typeface="メイリオ" panose="020B0604030504040204" pitchFamily="50" charset="-128"/>
+                <a:ea typeface="メイリオ" panose="020B0604030504040204" pitchFamily="50" charset="-128"/>
+              </a:rPr>
+              <a:t>※symbols</a:t>
+            </a:r>
+            <a:r>
+              <a:rPr kumimoji="1" lang="ja-JP" altLang="en-US" sz="1200" dirty="0">
+                <a:latin typeface="メイリオ" panose="020B0604030504040204" pitchFamily="50" charset="-128"/>
+                <a:ea typeface="メイリオ" panose="020B0604030504040204" pitchFamily="50" charset="-128"/>
+              </a:rPr>
+              <a:t>すべてがバーであってほしいので、実行時は</a:t>
+            </a:r>
+            <a:r>
+              <a:rPr kumimoji="1" lang="en-US" altLang="ja-JP" sz="1200" dirty="0">
+                <a:latin typeface="メイリオ" panose="020B0604030504040204" pitchFamily="50" charset="-128"/>
+                <a:ea typeface="メイリオ" panose="020B0604030504040204" pitchFamily="50" charset="-128"/>
+              </a:rPr>
+              <a:t>all</a:t>
+            </a:r>
+            <a:r>
+              <a:rPr kumimoji="1" lang="ja-JP" altLang="en-US" sz="1200" dirty="0">
+                <a:latin typeface="メイリオ" panose="020B0604030504040204" pitchFamily="50" charset="-128"/>
+                <a:ea typeface="メイリオ" panose="020B0604030504040204" pitchFamily="50" charset="-128"/>
+              </a:rPr>
+              <a:t>をつける</a:t>
+            </a:r>
+            <a:r>
+              <a:rPr lang="ja-JP" altLang="en-US" sz="1200" dirty="0">
+                <a:latin typeface="メイリオ" panose="020B0604030504040204" pitchFamily="50" charset="-128"/>
+                <a:ea typeface="メイリオ" panose="020B0604030504040204" pitchFamily="50" charset="-128"/>
+              </a:rPr>
+              <a:t>。</a:t>
+            </a:r>
+            <a:endParaRPr kumimoji="1" lang="en-US" altLang="ja-JP" sz="1200" dirty="0">
+              <a:latin typeface="メイリオ" panose="020B0604030504040204" pitchFamily="50" charset="-128"/>
+              <a:ea typeface="メイリオ" panose="020B0604030504040204" pitchFamily="50" charset="-128"/>
+            </a:endParaRPr>
+          </a:p>
+          <a:p>
+            <a:pPr algn="l"/>
+            <a:endParaRPr kumimoji="1" lang="en-US" altLang="ja-JP" sz="1200" dirty="0">
+              <a:latin typeface="メイリオ" panose="020B0604030504040204" pitchFamily="50" charset="-128"/>
+              <a:ea typeface="メイリオ" panose="020B0604030504040204" pitchFamily="50" charset="-128"/>
+            </a:endParaRPr>
+          </a:p>
+          <a:p>
+            <a:pPr algn="l"/>
+            <a:r>
+              <a:rPr kumimoji="1" lang="ja-JP" altLang="en-US" sz="2000" dirty="0">
+                <a:solidFill>
+                  <a:schemeClr val="accent4">
+                    <a:lumMod val="75000"/>
+                  </a:schemeClr>
+                </a:solidFill>
+                <a:latin typeface="メイリオ" panose="020B0604030504040204" pitchFamily="50" charset="-128"/>
+                <a:ea typeface="メイリオ" panose="020B0604030504040204" pitchFamily="50" charset="-128"/>
+              </a:rPr>
+              <a:t>＃＃</a:t>
+            </a:r>
+            <a:r>
+              <a:rPr lang="ja-JP" altLang="en-US" sz="2000" dirty="0">
+                <a:solidFill>
+                  <a:schemeClr val="accent4">
+                    <a:lumMod val="75000"/>
+                  </a:schemeClr>
+                </a:solidFill>
+                <a:latin typeface="メイリオ" panose="020B0604030504040204" pitchFamily="50" charset="-128"/>
+                <a:ea typeface="メイリオ" panose="020B0604030504040204" pitchFamily="50" charset="-128"/>
+              </a:rPr>
+              <a:t>場合分けの条件１</a:t>
+            </a:r>
+            <a:endParaRPr kumimoji="1" lang="en-US" altLang="ja-JP" sz="2000" dirty="0">
+              <a:solidFill>
+                <a:schemeClr val="accent4">
+                  <a:lumMod val="75000"/>
+                </a:schemeClr>
+              </a:solidFill>
+              <a:latin typeface="メイリオ" panose="020B0604030504040204" pitchFamily="50" charset="-128"/>
+              <a:ea typeface="メイリオ" panose="020B0604030504040204" pitchFamily="50" charset="-128"/>
+            </a:endParaRPr>
+          </a:p>
+          <a:p>
+            <a:pPr algn="l"/>
+            <a:r>
+              <a:rPr lang="ja-JP" altLang="en-US" sz="1200" dirty="0">
+                <a:latin typeface="メイリオ" panose="020B0604030504040204" pitchFamily="50" charset="-128"/>
+                <a:ea typeface="メイリオ" panose="020B0604030504040204" pitchFamily="50" charset="-128"/>
+              </a:rPr>
+              <a:t>変数名：</a:t>
+            </a:r>
+            <a:r>
+              <a:rPr lang="en-US" altLang="ja-JP" sz="1200" dirty="0">
+                <a:latin typeface="メイリオ" panose="020B0604030504040204" pitchFamily="50" charset="-128"/>
+                <a:ea typeface="メイリオ" panose="020B0604030504040204" pitchFamily="50" charset="-128"/>
+              </a:rPr>
+              <a:t>same</a:t>
+            </a:r>
+            <a:r>
+              <a:rPr lang="ja-JP" altLang="en-US" sz="1200" dirty="0">
+                <a:latin typeface="メイリオ" panose="020B0604030504040204" pitchFamily="50" charset="-128"/>
+                <a:ea typeface="メイリオ" panose="020B0604030504040204" pitchFamily="50" charset="-128"/>
+              </a:rPr>
+              <a:t>　型</a:t>
+            </a:r>
+            <a:r>
+              <a:rPr lang="en-US" altLang="ja-JP" sz="1200" dirty="0">
+                <a:latin typeface="メイリオ" panose="020B0604030504040204" pitchFamily="50" charset="-128"/>
+                <a:ea typeface="メイリオ" panose="020B0604030504040204" pitchFamily="50" charset="-128"/>
+              </a:rPr>
+              <a:t>:</a:t>
+            </a:r>
+            <a:r>
+              <a:rPr lang="en-US" altLang="ja-JP" sz="1200" dirty="0" err="1">
+                <a:latin typeface="メイリオ" panose="020B0604030504040204" pitchFamily="50" charset="-128"/>
+                <a:ea typeface="メイリオ" panose="020B0604030504040204" pitchFamily="50" charset="-128"/>
+              </a:rPr>
+              <a:t>boolean</a:t>
+            </a:r>
+            <a:r>
+              <a:rPr lang="en-US" altLang="ja-JP" sz="1200" dirty="0">
+                <a:latin typeface="メイリオ" panose="020B0604030504040204" pitchFamily="50" charset="-128"/>
+                <a:ea typeface="メイリオ" panose="020B0604030504040204" pitchFamily="50" charset="-128"/>
+              </a:rPr>
+              <a:t> </a:t>
+            </a:r>
+          </a:p>
+          <a:p>
+            <a:pPr algn="l"/>
+            <a:r>
+              <a:rPr lang="ja-JP" altLang="en-US" sz="1200" dirty="0">
+                <a:latin typeface="メイリオ" panose="020B0604030504040204" pitchFamily="50" charset="-128"/>
+                <a:ea typeface="メイリオ" panose="020B0604030504040204" pitchFamily="50" charset="-128"/>
+              </a:rPr>
+              <a:t>条件内容：</a:t>
+            </a:r>
+            <a:r>
+              <a:rPr lang="en-US" altLang="ja-JP" sz="1200" dirty="0">
+                <a:latin typeface="メイリオ" panose="020B0604030504040204" pitchFamily="50" charset="-128"/>
+                <a:ea typeface="メイリオ" panose="020B0604030504040204" pitchFamily="50" charset="-128"/>
+              </a:rPr>
+              <a:t>symbols</a:t>
+            </a:r>
+            <a:r>
+              <a:rPr lang="ja-JP" altLang="en-US" sz="1200" dirty="0">
+                <a:latin typeface="メイリオ" panose="020B0604030504040204" pitchFamily="50" charset="-128"/>
+                <a:ea typeface="メイリオ" panose="020B0604030504040204" pitchFamily="50" charset="-128"/>
+              </a:rPr>
+              <a:t>の中身がすべて同じである</a:t>
+            </a:r>
+            <a:endParaRPr kumimoji="1" lang="en-US" altLang="ja-JP" sz="1200" dirty="0">
+              <a:latin typeface="メイリオ" panose="020B0604030504040204" pitchFamily="50" charset="-128"/>
+              <a:ea typeface="メイリオ" panose="020B0604030504040204" pitchFamily="50" charset="-128"/>
+            </a:endParaRPr>
+          </a:p>
+          <a:p>
+            <a:pPr algn="l"/>
+            <a:endParaRPr lang="en-US" altLang="ja-JP" sz="2000" dirty="0">
+              <a:solidFill>
+                <a:schemeClr val="accent4">
+                  <a:lumMod val="75000"/>
+                </a:schemeClr>
+              </a:solidFill>
+              <a:latin typeface="メイリオ" panose="020B0604030504040204" pitchFamily="50" charset="-128"/>
+              <a:ea typeface="メイリオ" panose="020B0604030504040204" pitchFamily="50" charset="-128"/>
+            </a:endParaRPr>
+          </a:p>
+          <a:p>
+            <a:pPr algn="l"/>
+            <a:endParaRPr kumimoji="1" lang="ja-JP" altLang="en-US" sz="2000" dirty="0">
+              <a:solidFill>
+                <a:schemeClr val="accent4">
+                  <a:lumMod val="75000"/>
+                </a:schemeClr>
+              </a:solidFill>
+              <a:latin typeface="メイリオ" panose="020B0604030504040204" pitchFamily="50" charset="-128"/>
+              <a:ea typeface="メイリオ" panose="020B0604030504040204" pitchFamily="50" charset="-128"/>
+            </a:endParaRPr>
+          </a:p>
+        </p:txBody>
+      </p:sp>
+      <p:cxnSp>
+        <p:nvCxnSpPr>
+          <p:cNvPr id="13" name="直線矢印コネクタ 12">
+            <a:extLst>
+              <a:ext uri="{FF2B5EF4-FFF2-40B4-BE49-F238E27FC236}">
+                <a16:creationId xmlns:a16="http://schemas.microsoft.com/office/drawing/2014/main" id="{74FF8975-518B-E7D8-023D-CCCCAEBC6F95}"/>
+              </a:ext>
+            </a:extLst>
+          </p:cNvPr>
+          <p:cNvCxnSpPr>
+            <a:cxnSpLocks/>
+          </p:cNvCxnSpPr>
+          <p:nvPr/>
+        </p:nvCxnSpPr>
+        <p:spPr>
+          <a:xfrm>
+            <a:off x="4001984" y="2298172"/>
+            <a:ext cx="581891" cy="0"/>
+          </a:xfrm>
+          <a:prstGeom prst="straightConnector1">
+            <a:avLst/>
+          </a:prstGeom>
+          <a:ln w="57150">
+            <a:solidFill>
+              <a:schemeClr val="accent4">
+                <a:lumMod val="75000"/>
+              </a:schemeClr>
+            </a:solidFill>
+            <a:tailEnd type="triangle"/>
+          </a:ln>
+        </p:spPr>
+        <p:style>
+          <a:lnRef idx="1">
+            <a:schemeClr val="accent1"/>
+          </a:lnRef>
+          <a:fillRef idx="0">
+            <a:schemeClr val="accent1"/>
+          </a:fillRef>
+          <a:effectRef idx="0">
+            <a:schemeClr val="accent1"/>
+          </a:effectRef>
+          <a:fontRef idx="minor">
+            <a:schemeClr val="tx1"/>
+          </a:fontRef>
+        </p:style>
+      </p:cxnSp>
+      <p:pic>
+        <p:nvPicPr>
+          <p:cNvPr id="8" name="図 7">
+            <a:extLst>
+              <a:ext uri="{FF2B5EF4-FFF2-40B4-BE49-F238E27FC236}">
+                <a16:creationId xmlns:a16="http://schemas.microsoft.com/office/drawing/2014/main" id="{43D9BC6F-D9A1-1207-8593-653B03AECDC6}"/>
+              </a:ext>
+            </a:extLst>
+          </p:cNvPr>
+          <p:cNvPicPr>
+            <a:picLocks noChangeAspect="1"/>
+          </p:cNvPicPr>
+          <p:nvPr/>
+        </p:nvPicPr>
+        <p:blipFill>
+          <a:blip r:embed="rId2"/>
+          <a:stretch>
+            <a:fillRect/>
+          </a:stretch>
+        </p:blipFill>
+        <p:spPr>
+          <a:xfrm>
+            <a:off x="4819165" y="1263081"/>
+            <a:ext cx="3200847" cy="1371791"/>
+          </a:xfrm>
+          <a:prstGeom prst="rect">
+            <a:avLst/>
+          </a:prstGeom>
+          <a:ln>
+            <a:solidFill>
+              <a:schemeClr val="bg2">
+                <a:lumMod val="90000"/>
+              </a:schemeClr>
+            </a:solidFill>
+          </a:ln>
+        </p:spPr>
+      </p:pic>
+      <p:pic>
+        <p:nvPicPr>
+          <p:cNvPr id="12" name="図 11">
+            <a:extLst>
+              <a:ext uri="{FF2B5EF4-FFF2-40B4-BE49-F238E27FC236}">
+                <a16:creationId xmlns:a16="http://schemas.microsoft.com/office/drawing/2014/main" id="{9D575F3D-CCE5-CF73-C3DA-6790169349D9}"/>
+              </a:ext>
+            </a:extLst>
+          </p:cNvPr>
+          <p:cNvPicPr>
+            <a:picLocks noChangeAspect="1"/>
+          </p:cNvPicPr>
+          <p:nvPr/>
+        </p:nvPicPr>
+        <p:blipFill>
+          <a:blip r:embed="rId3"/>
+          <a:stretch>
+            <a:fillRect/>
+          </a:stretch>
+        </p:blipFill>
+        <p:spPr>
+          <a:xfrm>
+            <a:off x="827651" y="2098119"/>
+            <a:ext cx="2981741" cy="400106"/>
+          </a:xfrm>
+          <a:prstGeom prst="rect">
+            <a:avLst/>
+          </a:prstGeom>
+          <a:ln>
+            <a:solidFill>
+              <a:schemeClr val="bg2">
+                <a:lumMod val="90000"/>
+              </a:schemeClr>
+            </a:solidFill>
+          </a:ln>
+        </p:spPr>
+      </p:pic>
+      <p:pic>
+        <p:nvPicPr>
+          <p:cNvPr id="20" name="図 19">
+            <a:extLst>
+              <a:ext uri="{FF2B5EF4-FFF2-40B4-BE49-F238E27FC236}">
+                <a16:creationId xmlns:a16="http://schemas.microsoft.com/office/drawing/2014/main" id="{E63407BA-FA48-FBB5-D05D-069BFB18CA0C}"/>
+              </a:ext>
+            </a:extLst>
+          </p:cNvPr>
+          <p:cNvPicPr>
+            <a:picLocks noChangeAspect="1"/>
+          </p:cNvPicPr>
+          <p:nvPr/>
+        </p:nvPicPr>
+        <p:blipFill>
+          <a:blip r:embed="rId4"/>
+          <a:stretch>
+            <a:fillRect/>
+          </a:stretch>
+        </p:blipFill>
+        <p:spPr>
+          <a:xfrm>
+            <a:off x="7599466" y="3247511"/>
+            <a:ext cx="2172003" cy="1038370"/>
+          </a:xfrm>
+          <a:prstGeom prst="rect">
+            <a:avLst/>
+          </a:prstGeom>
+        </p:spPr>
+      </p:pic>
+      <p:pic>
+        <p:nvPicPr>
+          <p:cNvPr id="22" name="図 21">
+            <a:extLst>
+              <a:ext uri="{FF2B5EF4-FFF2-40B4-BE49-F238E27FC236}">
+                <a16:creationId xmlns:a16="http://schemas.microsoft.com/office/drawing/2014/main" id="{4256DFFB-E235-2610-3205-F45EEFE75BAA}"/>
+              </a:ext>
+            </a:extLst>
+          </p:cNvPr>
+          <p:cNvPicPr>
+            <a:picLocks noChangeAspect="1"/>
+          </p:cNvPicPr>
+          <p:nvPr/>
+        </p:nvPicPr>
+        <p:blipFill>
+          <a:blip r:embed="rId5"/>
+          <a:stretch>
+            <a:fillRect/>
+          </a:stretch>
+        </p:blipFill>
+        <p:spPr>
+          <a:xfrm>
+            <a:off x="827651" y="4310789"/>
+            <a:ext cx="6192114" cy="390580"/>
+          </a:xfrm>
+          <a:prstGeom prst="rect">
+            <a:avLst/>
+          </a:prstGeom>
+        </p:spPr>
+      </p:pic>
+      <p:sp>
+        <p:nvSpPr>
+          <p:cNvPr id="23" name="正方形/長方形 22">
+            <a:extLst>
+              <a:ext uri="{FF2B5EF4-FFF2-40B4-BE49-F238E27FC236}">
+                <a16:creationId xmlns:a16="http://schemas.microsoft.com/office/drawing/2014/main" id="{19CFE1A9-41FC-F4FC-C2A4-EE7DF09753E7}"/>
+              </a:ext>
+            </a:extLst>
+          </p:cNvPr>
+          <p:cNvSpPr/>
+          <p:nvPr/>
+        </p:nvSpPr>
+        <p:spPr>
+          <a:xfrm>
+            <a:off x="5843615" y="5843171"/>
+            <a:ext cx="4352793" cy="651353"/>
+          </a:xfrm>
+          <a:prstGeom prst="rect">
+            <a:avLst/>
+          </a:prstGeom>
+          <a:solidFill>
+            <a:schemeClr val="accent2">
+              <a:lumMod val="40000"/>
+              <a:lumOff val="60000"/>
+            </a:schemeClr>
+          </a:solidFill>
+          <a:ln>
+            <a:noFill/>
+          </a:ln>
+        </p:spPr>
+        <p:style>
+          <a:lnRef idx="2">
+            <a:schemeClr val="accent1">
+              <a:shade val="15000"/>
+            </a:schemeClr>
+          </a:lnRef>
+          <a:fillRef idx="1">
+            <a:schemeClr val="accent1"/>
+          </a:fillRef>
+          <a:effectRef idx="0">
+            <a:schemeClr val="accent1"/>
+          </a:effectRef>
+          <a:fontRef idx="minor">
+            <a:schemeClr val="lt1"/>
+          </a:fontRef>
+        </p:style>
+        <p:txBody>
+          <a:bodyPr rtlCol="0" anchor="t"/>
+          <a:lstStyle/>
+          <a:p>
+            <a:r>
+              <a:rPr lang="en-US" altLang="ja-JP" sz="1000" dirty="0" err="1">
+                <a:solidFill>
+                  <a:schemeClr val="tx1"/>
+                </a:solidFill>
+              </a:rPr>
+              <a:t>unname</a:t>
+            </a:r>
+            <a:endParaRPr lang="en-US" altLang="ja-JP" sz="1000" dirty="0">
+              <a:solidFill>
+                <a:schemeClr val="tx1"/>
+              </a:solidFill>
+            </a:endParaRPr>
+          </a:p>
+          <a:p>
+            <a:endParaRPr lang="en-US" altLang="ja-JP" sz="1000" dirty="0">
+              <a:solidFill>
+                <a:schemeClr val="tx1"/>
+              </a:solidFill>
+            </a:endParaRPr>
+          </a:p>
+        </p:txBody>
+      </p:sp>
+      <p:pic>
+        <p:nvPicPr>
+          <p:cNvPr id="25" name="図 24">
+            <a:extLst>
+              <a:ext uri="{FF2B5EF4-FFF2-40B4-BE49-F238E27FC236}">
+                <a16:creationId xmlns:a16="http://schemas.microsoft.com/office/drawing/2014/main" id="{5B05BFEA-621C-484A-6420-DD234BEB340B}"/>
+              </a:ext>
+            </a:extLst>
+          </p:cNvPr>
+          <p:cNvPicPr>
+            <a:picLocks noChangeAspect="1"/>
+          </p:cNvPicPr>
+          <p:nvPr/>
+        </p:nvPicPr>
+        <p:blipFill>
+          <a:blip r:embed="rId6"/>
+          <a:stretch>
+            <a:fillRect/>
+          </a:stretch>
+        </p:blipFill>
+        <p:spPr>
+          <a:xfrm>
+            <a:off x="7637139" y="4422472"/>
+            <a:ext cx="1819529" cy="314369"/>
+          </a:xfrm>
+          <a:prstGeom prst="rect">
+            <a:avLst/>
+          </a:prstGeom>
+        </p:spPr>
+      </p:pic>
     </p:spTree>
     <p:extLst>
       <p:ext uri="{BB962C8B-B14F-4D97-AF65-F5344CB8AC3E}">
-        <p14:creationId xmlns:p14="http://schemas.microsoft.com/office/powerpoint/2010/main" val="3431739928"/>
+        <p14:creationId xmlns:p14="http://schemas.microsoft.com/office/powerpoint/2010/main" val="3694851649"/>
       </p:ext>
     </p:extLst>
   </p:cSld>

--- a/永井芽衣_Rpart3.pptx
+++ b/永井芽衣_Rpart3.pptx
@@ -17,13 +17,16 @@
     <p:sldId id="267" r:id="rId11"/>
     <p:sldId id="269" r:id="rId12"/>
     <p:sldId id="270" r:id="rId13"/>
-    <p:sldId id="271" r:id="rId14"/>
-    <p:sldId id="272" r:id="rId15"/>
-    <p:sldId id="273" r:id="rId16"/>
-    <p:sldId id="274" r:id="rId17"/>
-    <p:sldId id="261" r:id="rId18"/>
-    <p:sldId id="264" r:id="rId19"/>
-    <p:sldId id="262" r:id="rId20"/>
+    <p:sldId id="275" r:id="rId14"/>
+    <p:sldId id="277" r:id="rId15"/>
+    <p:sldId id="276" r:id="rId16"/>
+    <p:sldId id="271" r:id="rId17"/>
+    <p:sldId id="272" r:id="rId18"/>
+    <p:sldId id="273" r:id="rId19"/>
+    <p:sldId id="274" r:id="rId20"/>
+    <p:sldId id="261" r:id="rId21"/>
+    <p:sldId id="264" r:id="rId22"/>
+    <p:sldId id="262" r:id="rId23"/>
   </p:sldIdLst>
   <p:sldSz cx="12192000" cy="6858000"/>
   <p:notesSz cx="6858000" cy="9144000"/>
@@ -151,6 +154,9 @@
           <p14:sldIdLst>
             <p14:sldId id="269"/>
             <p14:sldId id="270"/>
+            <p14:sldId id="275"/>
+            <p14:sldId id="277"/>
+            <p14:sldId id="276"/>
             <p14:sldId id="271"/>
           </p14:sldIdLst>
         </p14:section>
@@ -324,7 +330,7 @@
           <a:p>
             <a:fld id="{41BDD009-2AE7-4B3F-8458-2328013CE102}" type="datetimeFigureOut">
               <a:rPr kumimoji="1" lang="ja-JP" altLang="en-US" smtClean="0"/>
-              <a:t>2026/8/10</a:t>
+              <a:t>2026/8/12</a:t>
             </a:fld>
             <a:endParaRPr kumimoji="1" lang="ja-JP" altLang="en-US"/>
           </a:p>
@@ -554,7 +560,7 @@
           <a:p>
             <a:fld id="{41BDD009-2AE7-4B3F-8458-2328013CE102}" type="datetimeFigureOut">
               <a:rPr kumimoji="1" lang="ja-JP" altLang="en-US" smtClean="0"/>
-              <a:t>2026/8/10</a:t>
+              <a:t>2026/8/12</a:t>
             </a:fld>
             <a:endParaRPr kumimoji="1" lang="ja-JP" altLang="en-US"/>
           </a:p>
@@ -794,7 +800,7 @@
           <a:p>
             <a:fld id="{41BDD009-2AE7-4B3F-8458-2328013CE102}" type="datetimeFigureOut">
               <a:rPr kumimoji="1" lang="ja-JP" altLang="en-US" smtClean="0"/>
-              <a:t>2026/8/10</a:t>
+              <a:t>2026/8/12</a:t>
             </a:fld>
             <a:endParaRPr kumimoji="1" lang="ja-JP" altLang="en-US"/>
           </a:p>
@@ -1024,7 +1030,7 @@
           <a:p>
             <a:fld id="{41BDD009-2AE7-4B3F-8458-2328013CE102}" type="datetimeFigureOut">
               <a:rPr kumimoji="1" lang="ja-JP" altLang="en-US" smtClean="0"/>
-              <a:t>2026/8/10</a:t>
+              <a:t>2026/8/12</a:t>
             </a:fld>
             <a:endParaRPr kumimoji="1" lang="ja-JP" altLang="en-US"/>
           </a:p>
@@ -1299,7 +1305,7 @@
           <a:p>
             <a:fld id="{41BDD009-2AE7-4B3F-8458-2328013CE102}" type="datetimeFigureOut">
               <a:rPr kumimoji="1" lang="ja-JP" altLang="en-US" smtClean="0"/>
-              <a:t>2026/8/10</a:t>
+              <a:t>2026/8/12</a:t>
             </a:fld>
             <a:endParaRPr kumimoji="1" lang="ja-JP" altLang="en-US"/>
           </a:p>
@@ -1628,7 +1634,7 @@
           <a:p>
             <a:fld id="{41BDD009-2AE7-4B3F-8458-2328013CE102}" type="datetimeFigureOut">
               <a:rPr kumimoji="1" lang="ja-JP" altLang="en-US" smtClean="0"/>
-              <a:t>2026/8/10</a:t>
+              <a:t>2026/8/12</a:t>
             </a:fld>
             <a:endParaRPr kumimoji="1" lang="ja-JP" altLang="en-US"/>
           </a:p>
@@ -2104,7 +2110,7 @@
           <a:p>
             <a:fld id="{41BDD009-2AE7-4B3F-8458-2328013CE102}" type="datetimeFigureOut">
               <a:rPr kumimoji="1" lang="ja-JP" altLang="en-US" smtClean="0"/>
-              <a:t>2026/8/10</a:t>
+              <a:t>2026/8/12</a:t>
             </a:fld>
             <a:endParaRPr kumimoji="1" lang="ja-JP" altLang="en-US"/>
           </a:p>
@@ -2245,7 +2251,7 @@
           <a:p>
             <a:fld id="{41BDD009-2AE7-4B3F-8458-2328013CE102}" type="datetimeFigureOut">
               <a:rPr kumimoji="1" lang="ja-JP" altLang="en-US" smtClean="0"/>
-              <a:t>2026/8/10</a:t>
+              <a:t>2026/8/12</a:t>
             </a:fld>
             <a:endParaRPr kumimoji="1" lang="ja-JP" altLang="en-US"/>
           </a:p>
@@ -2358,7 +2364,7 @@
           <a:p>
             <a:fld id="{41BDD009-2AE7-4B3F-8458-2328013CE102}" type="datetimeFigureOut">
               <a:rPr kumimoji="1" lang="ja-JP" altLang="en-US" smtClean="0"/>
-              <a:t>2026/8/10</a:t>
+              <a:t>2026/8/12</a:t>
             </a:fld>
             <a:endParaRPr kumimoji="1" lang="ja-JP" altLang="en-US"/>
           </a:p>
@@ -2701,7 +2707,7 @@
           <a:p>
             <a:fld id="{41BDD009-2AE7-4B3F-8458-2328013CE102}" type="datetimeFigureOut">
               <a:rPr kumimoji="1" lang="ja-JP" altLang="en-US" smtClean="0"/>
-              <a:t>2026/8/10</a:t>
+              <a:t>2026/8/12</a:t>
             </a:fld>
             <a:endParaRPr kumimoji="1" lang="ja-JP" altLang="en-US"/>
           </a:p>
@@ -2989,7 +2995,7 @@
           <a:p>
             <a:fld id="{41BDD009-2AE7-4B3F-8458-2328013CE102}" type="datetimeFigureOut">
               <a:rPr kumimoji="1" lang="ja-JP" altLang="en-US" smtClean="0"/>
-              <a:t>2026/8/10</a:t>
+              <a:t>2026/8/12</a:t>
             </a:fld>
             <a:endParaRPr kumimoji="1" lang="ja-JP" altLang="en-US"/>
           </a:p>
@@ -3262,7 +3268,7 @@
           <a:p>
             <a:fld id="{41BDD009-2AE7-4B3F-8458-2328013CE102}" type="datetimeFigureOut">
               <a:rPr kumimoji="1" lang="ja-JP" altLang="en-US" smtClean="0"/>
-              <a:t>2026/8/10</a:t>
+              <a:t>2026/8/12</a:t>
             </a:fld>
             <a:endParaRPr kumimoji="1" lang="ja-JP" altLang="en-US"/>
           </a:p>
@@ -4191,7 +4197,7 @@
         </p:nvSpPr>
         <p:spPr>
           <a:xfrm>
-            <a:off x="884439" y="1097282"/>
+            <a:off x="789276" y="1014608"/>
             <a:ext cx="10613447" cy="5528957"/>
           </a:xfrm>
           <a:prstGeom prst="rect">
@@ -4237,11 +4243,1275 @@
                 <a:latin typeface="メイリオ" panose="020B0604030504040204" pitchFamily="50" charset="-128"/>
                 <a:ea typeface="メイリオ" panose="020B0604030504040204" pitchFamily="50" charset="-128"/>
               </a:rPr>
-              <a:t>＃＃スロットマシンの払戻率を計算する</a:t>
-            </a:r>
+              <a:t>＃＃スロットマシンの払戻率</a:t>
+            </a:r>
+            <a:r>
+              <a:rPr kumimoji="1" lang="en-US" altLang="ja-JP" b="1" dirty="0">
+                <a:solidFill>
+                  <a:schemeClr val="accent4">
+                    <a:lumMod val="75000"/>
+                  </a:schemeClr>
+                </a:solidFill>
+                <a:latin typeface="メイリオ" panose="020B0604030504040204" pitchFamily="50" charset="-128"/>
+                <a:ea typeface="メイリオ" panose="020B0604030504040204" pitchFamily="50" charset="-128"/>
+              </a:rPr>
+              <a:t>(</a:t>
+            </a:r>
+            <a:r>
+              <a:rPr kumimoji="1" lang="ja-JP" altLang="en-US" b="1" dirty="0">
+                <a:solidFill>
+                  <a:schemeClr val="accent4">
+                    <a:lumMod val="75000"/>
+                  </a:schemeClr>
+                </a:solidFill>
+                <a:latin typeface="メイリオ" panose="020B0604030504040204" pitchFamily="50" charset="-128"/>
+                <a:ea typeface="メイリオ" panose="020B0604030504040204" pitchFamily="50" charset="-128"/>
+              </a:rPr>
+              <a:t>期待値</a:t>
+            </a:r>
+            <a:r>
+              <a:rPr kumimoji="1" lang="en-US" altLang="ja-JP" b="1" dirty="0">
+                <a:solidFill>
+                  <a:schemeClr val="accent4">
+                    <a:lumMod val="75000"/>
+                  </a:schemeClr>
+                </a:solidFill>
+                <a:latin typeface="メイリオ" panose="020B0604030504040204" pitchFamily="50" charset="-128"/>
+                <a:ea typeface="メイリオ" panose="020B0604030504040204" pitchFamily="50" charset="-128"/>
+              </a:rPr>
+              <a:t>)</a:t>
+            </a:r>
+            <a:r>
+              <a:rPr kumimoji="1" lang="ja-JP" altLang="en-US" b="1" dirty="0">
+                <a:solidFill>
+                  <a:schemeClr val="accent4">
+                    <a:lumMod val="75000"/>
+                  </a:schemeClr>
+                </a:solidFill>
+                <a:latin typeface="メイリオ" panose="020B0604030504040204" pitchFamily="50" charset="-128"/>
+                <a:ea typeface="メイリオ" panose="020B0604030504040204" pitchFamily="50" charset="-128"/>
+              </a:rPr>
+              <a:t>を計算する</a:t>
+            </a:r>
+            <a:endParaRPr kumimoji="1" lang="en-US" altLang="ja-JP" b="1" dirty="0">
+              <a:solidFill>
+                <a:schemeClr val="accent4">
+                  <a:lumMod val="75000"/>
+                </a:schemeClr>
+              </a:solidFill>
+              <a:latin typeface="メイリオ" panose="020B0604030504040204" pitchFamily="50" charset="-128"/>
+              <a:ea typeface="メイリオ" panose="020B0604030504040204" pitchFamily="50" charset="-128"/>
+            </a:endParaRPr>
           </a:p>
         </p:txBody>
       </p:sp>
+      <p:grpSp>
+        <p:nvGrpSpPr>
+          <p:cNvPr id="15" name="グループ化 14">
+            <a:extLst>
+              <a:ext uri="{FF2B5EF4-FFF2-40B4-BE49-F238E27FC236}">
+                <a16:creationId xmlns:a16="http://schemas.microsoft.com/office/drawing/2014/main" id="{81F87E62-FE98-AD0F-8513-D49DDA134022}"/>
+              </a:ext>
+            </a:extLst>
+          </p:cNvPr>
+          <p:cNvGrpSpPr/>
+          <p:nvPr/>
+        </p:nvGrpSpPr>
+        <p:grpSpPr>
+          <a:xfrm>
+            <a:off x="1413496" y="1690477"/>
+            <a:ext cx="3917578" cy="2481371"/>
+            <a:chOff x="1413496" y="1690477"/>
+            <a:chExt cx="3917578" cy="2481371"/>
+          </a:xfrm>
+        </p:grpSpPr>
+        <mc:AlternateContent xmlns:mc="http://schemas.openxmlformats.org/markup-compatibility/2006">
+          <mc:Choice xmlns:a14="http://schemas.microsoft.com/office/drawing/2010/main" Requires="a14">
+            <p:sp>
+              <p:nvSpPr>
+                <p:cNvPr id="3" name="正方形/長方形 2">
+                  <a:extLst>
+                    <a:ext uri="{FF2B5EF4-FFF2-40B4-BE49-F238E27FC236}">
+                      <a16:creationId xmlns:a16="http://schemas.microsoft.com/office/drawing/2014/main" id="{4A70EA27-BE83-22C7-C007-EDDA72064008}"/>
+                    </a:ext>
+                  </a:extLst>
+                </p:cNvPr>
+                <p:cNvSpPr/>
+                <p:nvPr/>
+              </p:nvSpPr>
+              <p:spPr>
+                <a:xfrm>
+                  <a:off x="1413496" y="1690477"/>
+                  <a:ext cx="3917578" cy="2481371"/>
+                </a:xfrm>
+                <a:prstGeom prst="rect">
+                  <a:avLst/>
+                </a:prstGeom>
+                <a:solidFill>
+                  <a:srgbClr val="FFFFFF"/>
+                </a:solidFill>
+                <a:ln>
+                  <a:solidFill>
+                    <a:schemeClr val="bg2">
+                      <a:lumMod val="90000"/>
+                    </a:schemeClr>
+                  </a:solidFill>
+                </a:ln>
+              </p:spPr>
+              <p:style>
+                <a:lnRef idx="2">
+                  <a:schemeClr val="accent1">
+                    <a:shade val="15000"/>
+                  </a:schemeClr>
+                </a:lnRef>
+                <a:fillRef idx="1">
+                  <a:schemeClr val="accent1"/>
+                </a:fillRef>
+                <a:effectRef idx="0">
+                  <a:schemeClr val="accent1"/>
+                </a:effectRef>
+                <a:fontRef idx="minor">
+                  <a:schemeClr val="lt1"/>
+                </a:fontRef>
+              </p:style>
+              <p:txBody>
+                <a:bodyPr rtlCol="0" anchor="t"/>
+                <a:lstStyle/>
+                <a:p>
+                  <a:r>
+                    <a:rPr kumimoji="1" lang="ja-JP" altLang="en-US" sz="1500" dirty="0">
+                      <a:solidFill>
+                        <a:schemeClr val="tx1"/>
+                      </a:solidFill>
+                      <a:latin typeface="メイリオ" panose="020B0604030504040204" pitchFamily="50" charset="-128"/>
+                      <a:ea typeface="メイリオ" panose="020B0604030504040204" pitchFamily="50" charset="-128"/>
+                    </a:rPr>
+                    <a:t>期待値を求める手順</a:t>
+                  </a:r>
+                  <a:endParaRPr kumimoji="1" lang="en-US" altLang="ja-JP" sz="1500" dirty="0">
+                    <a:solidFill>
+                      <a:schemeClr val="tx1"/>
+                    </a:solidFill>
+                    <a:latin typeface="メイリオ" panose="020B0604030504040204" pitchFamily="50" charset="-128"/>
+                    <a:ea typeface="メイリオ" panose="020B0604030504040204" pitchFamily="50" charset="-128"/>
+                  </a:endParaRPr>
+                </a:p>
+                <a:p>
+                  <a:endParaRPr kumimoji="1" lang="en-US" altLang="ja-JP" sz="1500" dirty="0">
+                    <a:solidFill>
+                      <a:schemeClr val="tx1"/>
+                    </a:solidFill>
+                    <a:latin typeface="メイリオ" panose="020B0604030504040204" pitchFamily="50" charset="-128"/>
+                    <a:ea typeface="メイリオ" panose="020B0604030504040204" pitchFamily="50" charset="-128"/>
+                  </a:endParaRPr>
+                </a:p>
+                <a:p>
+                  <a:r>
+                    <a:rPr lang="ja-JP" altLang="en-US" sz="1500" dirty="0">
+                      <a:solidFill>
+                        <a:schemeClr val="tx1"/>
+                      </a:solidFill>
+                      <a:latin typeface="メイリオ" panose="020B0604030504040204" pitchFamily="50" charset="-128"/>
+                      <a:ea typeface="メイリオ" panose="020B0604030504040204" pitchFamily="50" charset="-128"/>
+                    </a:rPr>
+                    <a:t>　　組み合わせをリストにする</a:t>
+                  </a:r>
+                  <a:endParaRPr lang="en-US" altLang="ja-JP" sz="1500" dirty="0">
+                    <a:solidFill>
+                      <a:schemeClr val="tx1"/>
+                    </a:solidFill>
+                    <a:latin typeface="メイリオ" panose="020B0604030504040204" pitchFamily="50" charset="-128"/>
+                    <a:ea typeface="メイリオ" panose="020B0604030504040204" pitchFamily="50" charset="-128"/>
+                  </a:endParaRPr>
+                </a:p>
+                <a:p>
+                  <a:endParaRPr lang="en-US" altLang="ja-JP" sz="1500" dirty="0">
+                    <a:solidFill>
+                      <a:schemeClr val="tx1"/>
+                    </a:solidFill>
+                    <a:latin typeface="メイリオ" panose="020B0604030504040204" pitchFamily="50" charset="-128"/>
+                    <a:ea typeface="メイリオ" panose="020B0604030504040204" pitchFamily="50" charset="-128"/>
+                  </a:endParaRPr>
+                </a:p>
+                <a:p>
+                  <a:r>
+                    <a:rPr lang="ja-JP" altLang="en-US" sz="1500" dirty="0">
+                      <a:solidFill>
+                        <a:schemeClr val="tx1"/>
+                      </a:solidFill>
+                      <a:latin typeface="メイリオ" panose="020B0604030504040204" pitchFamily="50" charset="-128"/>
+                      <a:ea typeface="メイリオ" panose="020B0604030504040204" pitchFamily="50" charset="-128"/>
+                    </a:rPr>
+                    <a:t>　　</a:t>
+                  </a:r>
+                  <a:r>
+                    <a:rPr lang="en-US" altLang="ja-JP" sz="1500" dirty="0">
+                      <a:solidFill>
+                        <a:schemeClr val="tx1"/>
+                      </a:solidFill>
+                      <a:latin typeface="メイリオ" panose="020B0604030504040204" pitchFamily="50" charset="-128"/>
+                      <a:ea typeface="メイリオ" panose="020B0604030504040204" pitchFamily="50" charset="-128"/>
+                    </a:rPr>
+                    <a:t>P(</a:t>
+                  </a:r>
+                  <a14:m>
+                    <m:oMath xmlns:m="http://schemas.openxmlformats.org/officeDocument/2006/math">
+                      <m:sSub>
+                        <m:sSubPr>
+                          <m:ctrlPr>
+                            <a:rPr lang="en-US" altLang="ja-JP" sz="1500" i="1" smtClean="0">
+                              <a:solidFill>
+                                <a:schemeClr val="tx1"/>
+                              </a:solidFill>
+                              <a:latin typeface="Cambria Math" panose="02040503050406030204" pitchFamily="18" charset="0"/>
+                              <a:ea typeface="メイリオ" panose="020B0604030504040204" pitchFamily="50" charset="-128"/>
+                            </a:rPr>
+                          </m:ctrlPr>
+                        </m:sSubPr>
+                        <m:e>
+                          <m:r>
+                            <a:rPr lang="en-US" altLang="ja-JP" sz="1500" b="0" i="1" smtClean="0">
+                              <a:solidFill>
+                                <a:schemeClr val="tx1"/>
+                              </a:solidFill>
+                              <a:latin typeface="Cambria Math" panose="02040503050406030204" pitchFamily="18" charset="0"/>
+                              <a:ea typeface="メイリオ" panose="020B0604030504040204" pitchFamily="50" charset="-128"/>
+                            </a:rPr>
+                            <m:t>𝑥</m:t>
+                          </m:r>
+                        </m:e>
+                        <m:sub>
+                          <m:r>
+                            <a:rPr lang="en-US" altLang="ja-JP" sz="1500" b="0" i="1" smtClean="0">
+                              <a:solidFill>
+                                <a:schemeClr val="tx1"/>
+                              </a:solidFill>
+                              <a:latin typeface="Cambria Math" panose="02040503050406030204" pitchFamily="18" charset="0"/>
+                              <a:ea typeface="メイリオ" panose="020B0604030504040204" pitchFamily="50" charset="-128"/>
+                            </a:rPr>
+                            <m:t>𝑖</m:t>
+                          </m:r>
+                        </m:sub>
+                      </m:sSub>
+                    </m:oMath>
+                  </a14:m>
+                  <a:r>
+                    <a:rPr lang="en-US" altLang="ja-JP" sz="1500" dirty="0">
+                      <a:solidFill>
+                        <a:schemeClr val="tx1"/>
+                      </a:solidFill>
+                      <a:latin typeface="メイリオ" panose="020B0604030504040204" pitchFamily="50" charset="-128"/>
+                      <a:ea typeface="メイリオ" panose="020B0604030504040204" pitchFamily="50" charset="-128"/>
+                    </a:rPr>
+                    <a:t>) </a:t>
+                  </a:r>
+                  <a:r>
+                    <a:rPr lang="ja-JP" altLang="en-US" sz="1500" dirty="0">
+                      <a:solidFill>
+                        <a:schemeClr val="tx1"/>
+                      </a:solidFill>
+                      <a:latin typeface="メイリオ" panose="020B0604030504040204" pitchFamily="50" charset="-128"/>
+                      <a:ea typeface="メイリオ" panose="020B0604030504040204" pitchFamily="50" charset="-128"/>
+                    </a:rPr>
+                    <a:t>「個々の確率」を追加</a:t>
+                  </a:r>
+                  <a:r>
+                    <a:rPr lang="en-US" altLang="ja-JP" sz="1500" dirty="0">
+                      <a:solidFill>
+                        <a:schemeClr val="tx1"/>
+                      </a:solidFill>
+                      <a:latin typeface="メイリオ" panose="020B0604030504040204" pitchFamily="50" charset="-128"/>
+                      <a:ea typeface="メイリオ" panose="020B0604030504040204" pitchFamily="50" charset="-128"/>
+                    </a:rPr>
+                    <a:t> (prob)</a:t>
+                  </a:r>
+                </a:p>
+                <a:p>
+                  <a:endParaRPr lang="en-US" altLang="ja-JP" sz="1500" dirty="0">
+                    <a:solidFill>
+                      <a:schemeClr val="tx1"/>
+                    </a:solidFill>
+                    <a:latin typeface="メイリオ" panose="020B0604030504040204" pitchFamily="50" charset="-128"/>
+                    <a:ea typeface="メイリオ" panose="020B0604030504040204" pitchFamily="50" charset="-128"/>
+                  </a:endParaRPr>
+                </a:p>
+                <a:p>
+                  <a:r>
+                    <a:rPr lang="ja-JP" altLang="en-US" sz="1500" dirty="0">
+                      <a:solidFill>
+                        <a:schemeClr val="tx1"/>
+                      </a:solidFill>
+                      <a:ea typeface="メイリオ" panose="020B0604030504040204" pitchFamily="50" charset="-128"/>
+                    </a:rPr>
+                    <a:t>　　</a:t>
+                  </a:r>
+                  <a14:m>
+                    <m:oMath xmlns:m="http://schemas.openxmlformats.org/officeDocument/2006/math">
+                      <m:sSub>
+                        <m:sSubPr>
+                          <m:ctrlPr>
+                            <a:rPr lang="en-US" altLang="ja-JP" sz="1500" i="1" smtClean="0">
+                              <a:solidFill>
+                                <a:schemeClr val="tx1"/>
+                              </a:solidFill>
+                              <a:latin typeface="Cambria Math" panose="02040503050406030204" pitchFamily="18" charset="0"/>
+                              <a:ea typeface="メイリオ" panose="020B0604030504040204" pitchFamily="50" charset="-128"/>
+                            </a:rPr>
+                          </m:ctrlPr>
+                        </m:sSubPr>
+                        <m:e>
+                          <m:r>
+                            <a:rPr lang="en-US" altLang="ja-JP" sz="1500" b="0" i="1" smtClean="0">
+                              <a:solidFill>
+                                <a:schemeClr val="tx1"/>
+                              </a:solidFill>
+                              <a:latin typeface="Cambria Math" panose="02040503050406030204" pitchFamily="18" charset="0"/>
+                              <a:ea typeface="メイリオ" panose="020B0604030504040204" pitchFamily="50" charset="-128"/>
+                            </a:rPr>
+                            <m:t>𝑥</m:t>
+                          </m:r>
+                        </m:e>
+                        <m:sub>
+                          <m:r>
+                            <a:rPr lang="en-US" altLang="ja-JP" sz="1500" b="0" i="1" smtClean="0">
+                              <a:solidFill>
+                                <a:schemeClr val="tx1"/>
+                              </a:solidFill>
+                              <a:latin typeface="Cambria Math" panose="02040503050406030204" pitchFamily="18" charset="0"/>
+                              <a:ea typeface="メイリオ" panose="020B0604030504040204" pitchFamily="50" charset="-128"/>
+                            </a:rPr>
+                            <m:t>𝑖</m:t>
+                          </m:r>
+                        </m:sub>
+                      </m:sSub>
+                      <m:r>
+                        <a:rPr lang="en-US" altLang="ja-JP" sz="1500" b="0" i="1" smtClean="0">
+                          <a:solidFill>
+                            <a:schemeClr val="tx1"/>
+                          </a:solidFill>
+                          <a:latin typeface="Cambria Math" panose="02040503050406030204" pitchFamily="18" charset="0"/>
+                          <a:ea typeface="メイリオ" panose="020B0604030504040204" pitchFamily="50" charset="-128"/>
+                        </a:rPr>
+                        <m:t>      </m:t>
+                      </m:r>
+                      <m:r>
+                        <a:rPr lang="ja-JP" altLang="en-US" sz="1500" i="1">
+                          <a:solidFill>
+                            <a:schemeClr val="tx1"/>
+                          </a:solidFill>
+                          <a:latin typeface="Cambria Math" panose="02040503050406030204" pitchFamily="18" charset="0"/>
+                          <a:ea typeface="メイリオ" panose="020B0604030504040204" pitchFamily="50" charset="-128"/>
+                        </a:rPr>
+                        <m:t>「</m:t>
+                      </m:r>
+                    </m:oMath>
+                  </a14:m>
+                  <a:r>
+                    <a:rPr lang="ja-JP" altLang="en-US" sz="1500" dirty="0">
+                      <a:solidFill>
+                        <a:schemeClr val="tx1"/>
+                      </a:solidFill>
+                      <a:latin typeface="メイリオ" panose="020B0604030504040204" pitchFamily="50" charset="-128"/>
+                      <a:ea typeface="メイリオ" panose="020B0604030504040204" pitchFamily="50" charset="-128"/>
+                    </a:rPr>
+                    <a:t>個々の賞金」を追加 </a:t>
+                  </a:r>
+                  <a:r>
+                    <a:rPr lang="en-US" altLang="ja-JP" sz="1500" dirty="0">
+                      <a:solidFill>
+                        <a:schemeClr val="tx1"/>
+                      </a:solidFill>
+                      <a:latin typeface="メイリオ" panose="020B0604030504040204" pitchFamily="50" charset="-128"/>
+                      <a:ea typeface="メイリオ" panose="020B0604030504040204" pitchFamily="50" charset="-128"/>
+                    </a:rPr>
+                    <a:t>(prize)</a:t>
+                  </a:r>
+                </a:p>
+                <a:p>
+                  <a:pPr marL="342900" indent="-342900">
+                    <a:buAutoNum type="arabicPeriod" startAt="3"/>
+                  </a:pPr>
+                  <a:endParaRPr lang="en-US" altLang="ja-JP" sz="1500" dirty="0">
+                    <a:solidFill>
+                      <a:schemeClr val="tx1"/>
+                    </a:solidFill>
+                    <a:latin typeface="メイリオ" panose="020B0604030504040204" pitchFamily="50" charset="-128"/>
+                    <a:ea typeface="メイリオ" panose="020B0604030504040204" pitchFamily="50" charset="-128"/>
+                  </a:endParaRPr>
+                </a:p>
+                <a:p>
+                  <a:r>
+                    <a:rPr lang="ja-JP" altLang="en-US" sz="1500" dirty="0">
+                      <a:solidFill>
+                        <a:schemeClr val="tx1"/>
+                      </a:solidFill>
+                      <a:latin typeface="メイリオ" panose="020B0604030504040204" pitchFamily="50" charset="-128"/>
+                      <a:ea typeface="メイリオ" panose="020B0604030504040204" pitchFamily="50" charset="-128"/>
+                    </a:rPr>
+                    <a:t>　　</a:t>
+                  </a:r>
+                  <a:r>
+                    <a:rPr lang="en-US" altLang="ja-JP" sz="1500" dirty="0">
+                      <a:solidFill>
+                        <a:schemeClr val="tx1"/>
+                      </a:solidFill>
+                      <a:latin typeface="メイリオ" panose="020B0604030504040204" pitchFamily="50" charset="-128"/>
+                      <a:ea typeface="メイリオ" panose="020B0604030504040204" pitchFamily="50" charset="-128"/>
+                    </a:rPr>
+                    <a:t>E(x)  </a:t>
+                  </a:r>
+                  <a:r>
+                    <a:rPr lang="ja-JP" altLang="en-US" sz="1500" dirty="0">
+                      <a:solidFill>
+                        <a:schemeClr val="tx1"/>
+                      </a:solidFill>
+                      <a:latin typeface="メイリオ" panose="020B0604030504040204" pitchFamily="50" charset="-128"/>
+                      <a:ea typeface="メイリオ" panose="020B0604030504040204" pitchFamily="50" charset="-128"/>
+                    </a:rPr>
+                    <a:t>「期待値」</a:t>
+                  </a:r>
+                  <a:endParaRPr lang="en-US" altLang="ja-JP" sz="1500" dirty="0">
+                    <a:solidFill>
+                      <a:schemeClr val="tx1"/>
+                    </a:solidFill>
+                    <a:latin typeface="メイリオ" panose="020B0604030504040204" pitchFamily="50" charset="-128"/>
+                    <a:ea typeface="メイリオ" panose="020B0604030504040204" pitchFamily="50" charset="-128"/>
+                  </a:endParaRPr>
+                </a:p>
+              </p:txBody>
+            </p:sp>
+          </mc:Choice>
+          <mc:Fallback>
+            <p:sp>
+              <p:nvSpPr>
+                <p:cNvPr id="3" name="正方形/長方形 2">
+                  <a:extLst>
+                    <a:ext uri="{FF2B5EF4-FFF2-40B4-BE49-F238E27FC236}">
+                      <a16:creationId xmlns:a16="http://schemas.microsoft.com/office/drawing/2014/main" id="{4A70EA27-BE83-22C7-C007-EDDA72064008}"/>
+                    </a:ext>
+                  </a:extLst>
+                </p:cNvPr>
+                <p:cNvSpPr>
+                  <a:spLocks noRot="1" noChangeAspect="1" noMove="1" noResize="1" noEditPoints="1" noAdjustHandles="1" noChangeArrowheads="1" noChangeShapeType="1" noTextEdit="1"/>
+                </p:cNvSpPr>
+                <p:nvPr/>
+              </p:nvSpPr>
+              <p:spPr>
+                <a:xfrm>
+                  <a:off x="1413496" y="1690477"/>
+                  <a:ext cx="3917578" cy="2481371"/>
+                </a:xfrm>
+                <a:prstGeom prst="rect">
+                  <a:avLst/>
+                </a:prstGeom>
+                <a:blipFill>
+                  <a:blip r:embed="rId2"/>
+                  <a:stretch>
+                    <a:fillRect l="-465"/>
+                  </a:stretch>
+                </a:blipFill>
+                <a:ln>
+                  <a:solidFill>
+                    <a:schemeClr val="bg2">
+                      <a:lumMod val="90000"/>
+                    </a:schemeClr>
+                  </a:solidFill>
+                </a:ln>
+              </p:spPr>
+              <p:txBody>
+                <a:bodyPr/>
+                <a:lstStyle/>
+                <a:p>
+                  <a:r>
+                    <a:rPr lang="ja-JP" altLang="en-US">
+                      <a:noFill/>
+                    </a:rPr>
+                    <a:t> </a:t>
+                  </a:r>
+                </a:p>
+              </p:txBody>
+            </p:sp>
+          </mc:Fallback>
+        </mc:AlternateContent>
+        <p:sp>
+          <p:nvSpPr>
+            <p:cNvPr id="7" name="楕円 6">
+              <a:extLst>
+                <a:ext uri="{FF2B5EF4-FFF2-40B4-BE49-F238E27FC236}">
+                  <a16:creationId xmlns:a16="http://schemas.microsoft.com/office/drawing/2014/main" id="{28BB8CD2-4C1D-A6B0-3CFE-5DFAC41ED353}"/>
+                </a:ext>
+              </a:extLst>
+            </p:cNvPr>
+            <p:cNvSpPr/>
+            <p:nvPr/>
+          </p:nvSpPr>
+          <p:spPr>
+            <a:xfrm>
+              <a:off x="1562701" y="2190297"/>
+              <a:ext cx="206220" cy="232109"/>
+            </a:xfrm>
+            <a:prstGeom prst="ellipse">
+              <a:avLst/>
+            </a:prstGeom>
+            <a:solidFill>
+              <a:schemeClr val="accent4">
+                <a:lumMod val="75000"/>
+              </a:schemeClr>
+            </a:solidFill>
+            <a:ln>
+              <a:noFill/>
+            </a:ln>
+          </p:spPr>
+          <p:style>
+            <a:lnRef idx="2">
+              <a:schemeClr val="accent1">
+                <a:shade val="15000"/>
+              </a:schemeClr>
+            </a:lnRef>
+            <a:fillRef idx="1">
+              <a:schemeClr val="accent1"/>
+            </a:fillRef>
+            <a:effectRef idx="0">
+              <a:schemeClr val="accent1"/>
+            </a:effectRef>
+            <a:fontRef idx="minor">
+              <a:schemeClr val="lt1"/>
+            </a:fontRef>
+          </p:style>
+          <p:txBody>
+            <a:bodyPr tIns="90000" rtlCol="0" anchor="ctr"/>
+            <a:lstStyle/>
+            <a:p>
+              <a:pPr algn="ctr"/>
+              <a:r>
+                <a:rPr kumimoji="1" lang="ja-JP" altLang="en-US" dirty="0">
+                  <a:latin typeface="メイリオ" panose="020B0604030504040204" pitchFamily="50" charset="-128"/>
+                  <a:ea typeface="メイリオ" panose="020B0604030504040204" pitchFamily="50" charset="-128"/>
+                </a:rPr>
+                <a:t>１</a:t>
+              </a:r>
+            </a:p>
+          </p:txBody>
+        </p:sp>
+        <p:sp>
+          <p:nvSpPr>
+            <p:cNvPr id="8" name="楕円 7">
+              <a:extLst>
+                <a:ext uri="{FF2B5EF4-FFF2-40B4-BE49-F238E27FC236}">
+                  <a16:creationId xmlns:a16="http://schemas.microsoft.com/office/drawing/2014/main" id="{9F574DB6-9FAE-E3D0-25B7-830B8F8E4152}"/>
+                </a:ext>
+              </a:extLst>
+            </p:cNvPr>
+            <p:cNvSpPr/>
+            <p:nvPr/>
+          </p:nvSpPr>
+          <p:spPr>
+            <a:xfrm>
+              <a:off x="1562701" y="2676579"/>
+              <a:ext cx="206220" cy="232109"/>
+            </a:xfrm>
+            <a:prstGeom prst="ellipse">
+              <a:avLst/>
+            </a:prstGeom>
+            <a:solidFill>
+              <a:schemeClr val="accent4">
+                <a:lumMod val="75000"/>
+              </a:schemeClr>
+            </a:solidFill>
+            <a:ln>
+              <a:noFill/>
+            </a:ln>
+          </p:spPr>
+          <p:style>
+            <a:lnRef idx="2">
+              <a:schemeClr val="accent1">
+                <a:shade val="15000"/>
+              </a:schemeClr>
+            </a:lnRef>
+            <a:fillRef idx="1">
+              <a:schemeClr val="accent1"/>
+            </a:fillRef>
+            <a:effectRef idx="0">
+              <a:schemeClr val="accent1"/>
+            </a:effectRef>
+            <a:fontRef idx="minor">
+              <a:schemeClr val="lt1"/>
+            </a:fontRef>
+          </p:style>
+          <p:txBody>
+            <a:bodyPr tIns="90000" rtlCol="0" anchor="ctr"/>
+            <a:lstStyle/>
+            <a:p>
+              <a:pPr algn="ctr"/>
+              <a:r>
+                <a:rPr lang="en-US" altLang="ja-JP" dirty="0">
+                  <a:latin typeface="メイリオ" panose="020B0604030504040204" pitchFamily="50" charset="-128"/>
+                  <a:ea typeface="メイリオ" panose="020B0604030504040204" pitchFamily="50" charset="-128"/>
+                </a:rPr>
+                <a:t>2</a:t>
+              </a:r>
+              <a:endParaRPr kumimoji="1" lang="ja-JP" altLang="en-US" dirty="0">
+                <a:latin typeface="メイリオ" panose="020B0604030504040204" pitchFamily="50" charset="-128"/>
+                <a:ea typeface="メイリオ" panose="020B0604030504040204" pitchFamily="50" charset="-128"/>
+              </a:endParaRPr>
+            </a:p>
+          </p:txBody>
+        </p:sp>
+        <p:sp>
+          <p:nvSpPr>
+            <p:cNvPr id="9" name="楕円 8">
+              <a:extLst>
+                <a:ext uri="{FF2B5EF4-FFF2-40B4-BE49-F238E27FC236}">
+                  <a16:creationId xmlns:a16="http://schemas.microsoft.com/office/drawing/2014/main" id="{EE91F29C-A4B0-8094-5318-C969088D25D7}"/>
+                </a:ext>
+              </a:extLst>
+            </p:cNvPr>
+            <p:cNvSpPr/>
+            <p:nvPr/>
+          </p:nvSpPr>
+          <p:spPr>
+            <a:xfrm>
+              <a:off x="1562701" y="3122579"/>
+              <a:ext cx="206220" cy="232109"/>
+            </a:xfrm>
+            <a:prstGeom prst="ellipse">
+              <a:avLst/>
+            </a:prstGeom>
+            <a:solidFill>
+              <a:schemeClr val="accent4">
+                <a:lumMod val="75000"/>
+              </a:schemeClr>
+            </a:solidFill>
+            <a:ln>
+              <a:noFill/>
+            </a:ln>
+          </p:spPr>
+          <p:style>
+            <a:lnRef idx="2">
+              <a:schemeClr val="accent1">
+                <a:shade val="15000"/>
+              </a:schemeClr>
+            </a:lnRef>
+            <a:fillRef idx="1">
+              <a:schemeClr val="accent1"/>
+            </a:fillRef>
+            <a:effectRef idx="0">
+              <a:schemeClr val="accent1"/>
+            </a:effectRef>
+            <a:fontRef idx="minor">
+              <a:schemeClr val="lt1"/>
+            </a:fontRef>
+          </p:style>
+          <p:txBody>
+            <a:bodyPr tIns="90000" rtlCol="0" anchor="ctr"/>
+            <a:lstStyle/>
+            <a:p>
+              <a:pPr algn="ctr"/>
+              <a:r>
+                <a:rPr kumimoji="1" lang="en-US" altLang="ja-JP" dirty="0">
+                  <a:latin typeface="メイリオ" panose="020B0604030504040204" pitchFamily="50" charset="-128"/>
+                  <a:ea typeface="メイリオ" panose="020B0604030504040204" pitchFamily="50" charset="-128"/>
+                </a:rPr>
+                <a:t>3</a:t>
+              </a:r>
+            </a:p>
+          </p:txBody>
+        </p:sp>
+        <p:sp>
+          <p:nvSpPr>
+            <p:cNvPr id="10" name="楕円 9">
+              <a:extLst>
+                <a:ext uri="{FF2B5EF4-FFF2-40B4-BE49-F238E27FC236}">
+                  <a16:creationId xmlns:a16="http://schemas.microsoft.com/office/drawing/2014/main" id="{C0980DBD-9550-9C9A-38FD-3C778DFE5707}"/>
+                </a:ext>
+              </a:extLst>
+            </p:cNvPr>
+            <p:cNvSpPr/>
+            <p:nvPr/>
+          </p:nvSpPr>
+          <p:spPr>
+            <a:xfrm>
+              <a:off x="1562701" y="3555041"/>
+              <a:ext cx="206220" cy="232109"/>
+            </a:xfrm>
+            <a:prstGeom prst="ellipse">
+              <a:avLst/>
+            </a:prstGeom>
+            <a:solidFill>
+              <a:schemeClr val="accent4">
+                <a:lumMod val="75000"/>
+              </a:schemeClr>
+            </a:solidFill>
+            <a:ln>
+              <a:noFill/>
+            </a:ln>
+          </p:spPr>
+          <p:style>
+            <a:lnRef idx="2">
+              <a:schemeClr val="accent1">
+                <a:shade val="15000"/>
+              </a:schemeClr>
+            </a:lnRef>
+            <a:fillRef idx="1">
+              <a:schemeClr val="accent1"/>
+            </a:fillRef>
+            <a:effectRef idx="0">
+              <a:schemeClr val="accent1"/>
+            </a:effectRef>
+            <a:fontRef idx="minor">
+              <a:schemeClr val="lt1"/>
+            </a:fontRef>
+          </p:style>
+          <p:txBody>
+            <a:bodyPr tIns="90000" rtlCol="0" anchor="ctr"/>
+            <a:lstStyle/>
+            <a:p>
+              <a:pPr algn="ctr"/>
+              <a:r>
+                <a:rPr kumimoji="1" lang="en-US" altLang="ja-JP" dirty="0">
+                  <a:latin typeface="メイリオ" panose="020B0604030504040204" pitchFamily="50" charset="-128"/>
+                  <a:ea typeface="メイリオ" panose="020B0604030504040204" pitchFamily="50" charset="-128"/>
+                </a:rPr>
+                <a:t>4</a:t>
+              </a:r>
+            </a:p>
+          </p:txBody>
+        </p:sp>
+      </p:grpSp>
+      <p:grpSp>
+        <p:nvGrpSpPr>
+          <p:cNvPr id="16" name="グループ化 15">
+            <a:extLst>
+              <a:ext uri="{FF2B5EF4-FFF2-40B4-BE49-F238E27FC236}">
+                <a16:creationId xmlns:a16="http://schemas.microsoft.com/office/drawing/2014/main" id="{845ABC1E-FFA8-E070-A92B-61C3A98A097E}"/>
+              </a:ext>
+            </a:extLst>
+          </p:cNvPr>
+          <p:cNvGrpSpPr/>
+          <p:nvPr/>
+        </p:nvGrpSpPr>
+        <p:grpSpPr>
+          <a:xfrm>
+            <a:off x="5639977" y="1714781"/>
+            <a:ext cx="2441901" cy="1238703"/>
+            <a:chOff x="5955294" y="2422406"/>
+            <a:chExt cx="2441901" cy="1238703"/>
+          </a:xfrm>
+        </p:grpSpPr>
+        <p:grpSp>
+          <p:nvGrpSpPr>
+            <p:cNvPr id="19" name="グループ化 18">
+              <a:extLst>
+                <a:ext uri="{FF2B5EF4-FFF2-40B4-BE49-F238E27FC236}">
+                  <a16:creationId xmlns:a16="http://schemas.microsoft.com/office/drawing/2014/main" id="{C6851C2C-4387-1630-E98C-F3095ED2077A}"/>
+                </a:ext>
+              </a:extLst>
+            </p:cNvPr>
+            <p:cNvGrpSpPr/>
+            <p:nvPr/>
+          </p:nvGrpSpPr>
+          <p:grpSpPr>
+            <a:xfrm>
+              <a:off x="5955294" y="2422406"/>
+              <a:ext cx="2441901" cy="1226867"/>
+              <a:chOff x="8536877" y="1219843"/>
+              <a:chExt cx="2441901" cy="1226867"/>
+            </a:xfrm>
+          </p:grpSpPr>
+          <p:sp>
+            <p:nvSpPr>
+              <p:cNvPr id="6" name="正方形/長方形 5">
+                <a:extLst>
+                  <a:ext uri="{FF2B5EF4-FFF2-40B4-BE49-F238E27FC236}">
+                    <a16:creationId xmlns:a16="http://schemas.microsoft.com/office/drawing/2014/main" id="{75CE81D2-C5EE-4E63-DA6F-4D50A6E33162}"/>
+                  </a:ext>
+                </a:extLst>
+              </p:cNvPr>
+              <p:cNvSpPr/>
+              <p:nvPr/>
+            </p:nvSpPr>
+            <p:spPr>
+              <a:xfrm>
+                <a:off x="8536877" y="1219843"/>
+                <a:ext cx="2391170" cy="1183629"/>
+              </a:xfrm>
+              <a:prstGeom prst="rect">
+                <a:avLst/>
+              </a:prstGeom>
+              <a:solidFill>
+                <a:schemeClr val="accent2">
+                  <a:lumMod val="40000"/>
+                  <a:lumOff val="60000"/>
+                </a:schemeClr>
+              </a:solidFill>
+              <a:ln>
+                <a:noFill/>
+              </a:ln>
+            </p:spPr>
+            <p:style>
+              <a:lnRef idx="2">
+                <a:schemeClr val="accent1">
+                  <a:shade val="15000"/>
+                </a:schemeClr>
+              </a:lnRef>
+              <a:fillRef idx="1">
+                <a:schemeClr val="accent1"/>
+              </a:fillRef>
+              <a:effectRef idx="0">
+                <a:schemeClr val="accent1"/>
+              </a:effectRef>
+              <a:fontRef idx="minor">
+                <a:schemeClr val="lt1"/>
+              </a:fontRef>
+            </p:style>
+            <p:txBody>
+              <a:bodyPr rtlCol="0" anchor="t"/>
+              <a:lstStyle/>
+              <a:p>
+                <a:r>
+                  <a:rPr lang="ja-JP" altLang="en-US" sz="2000" dirty="0">
+                    <a:solidFill>
+                      <a:schemeClr val="tx1"/>
+                    </a:solidFill>
+                    <a:latin typeface="メイリオ" panose="020B0604030504040204" pitchFamily="50" charset="-128"/>
+                    <a:ea typeface="メイリオ" panose="020B0604030504040204" pitchFamily="50" charset="-128"/>
+                  </a:rPr>
+                  <a:t>期待値</a:t>
+                </a:r>
+                <a:endParaRPr lang="en-US" altLang="ja-JP" sz="2000" dirty="0">
+                  <a:solidFill>
+                    <a:schemeClr val="tx1"/>
+                  </a:solidFill>
+                  <a:latin typeface="メイリオ" panose="020B0604030504040204" pitchFamily="50" charset="-128"/>
+                  <a:ea typeface="メイリオ" panose="020B0604030504040204" pitchFamily="50" charset="-128"/>
+                </a:endParaRPr>
+              </a:p>
+              <a:p>
+                <a:endParaRPr lang="en-US" altLang="ja-JP" sz="1000" dirty="0">
+                  <a:solidFill>
+                    <a:schemeClr val="tx1"/>
+                  </a:solidFill>
+                </a:endParaRPr>
+              </a:p>
+              <a:p>
+                <a:endParaRPr lang="en-US" altLang="ja-JP" sz="1050" dirty="0">
+                  <a:solidFill>
+                    <a:schemeClr val="tx1"/>
+                  </a:solidFill>
+                </a:endParaRPr>
+              </a:p>
+              <a:p>
+                <a:r>
+                  <a:rPr lang="en-US" altLang="ja-JP" sz="2000" dirty="0">
+                    <a:solidFill>
+                      <a:schemeClr val="tx1"/>
+                    </a:solidFill>
+                  </a:rPr>
+                  <a:t>E(x) =</a:t>
+                </a:r>
+                <a:r>
+                  <a:rPr lang="en-US" altLang="ja-JP" sz="1000" dirty="0">
+                    <a:solidFill>
+                      <a:schemeClr val="tx1"/>
+                    </a:solidFill>
+                  </a:rPr>
+                  <a:t> </a:t>
+                </a:r>
+              </a:p>
+            </p:txBody>
+          </p:sp>
+          <mc:AlternateContent xmlns:mc="http://schemas.openxmlformats.org/markup-compatibility/2006">
+            <mc:Choice xmlns:a14="http://schemas.microsoft.com/office/drawing/2010/main" Requires="a14">
+              <p:sp>
+                <p:nvSpPr>
+                  <p:cNvPr id="5" name="テキスト ボックス 4">
+                    <a:extLst>
+                      <a:ext uri="{FF2B5EF4-FFF2-40B4-BE49-F238E27FC236}">
+                        <a16:creationId xmlns:a16="http://schemas.microsoft.com/office/drawing/2014/main" id="{EFD6AF95-37D7-5BF7-F732-2732C17EE5DF}"/>
+                      </a:ext>
+                    </a:extLst>
+                  </p:cNvPr>
+                  <p:cNvSpPr txBox="1"/>
+                  <p:nvPr/>
+                </p:nvSpPr>
+                <p:spPr>
+                  <a:xfrm>
+                    <a:off x="9451565" y="1690477"/>
+                    <a:ext cx="1527213" cy="756233"/>
+                  </a:xfrm>
+                  <a:prstGeom prst="rect">
+                    <a:avLst/>
+                  </a:prstGeom>
+                  <a:noFill/>
+                </p:spPr>
+                <p:txBody>
+                  <a:bodyPr wrap="none" lIns="0" tIns="0" rIns="0" bIns="0" rtlCol="0">
+                    <a:spAutoFit/>
+                  </a:bodyPr>
+                  <a:lstStyle/>
+                  <a:p>
+                    <a:pPr/>
+                    <a14:m>
+                      <m:oMathPara xmlns:m="http://schemas.openxmlformats.org/officeDocument/2006/math">
+                        <m:oMathParaPr>
+                          <m:jc m:val="centerGroup"/>
+                        </m:oMathParaPr>
+                        <m:oMath xmlns:m="http://schemas.openxmlformats.org/officeDocument/2006/math">
+                          <m:nary>
+                            <m:naryPr>
+                              <m:chr m:val="∑"/>
+                              <m:limLoc m:val="undOvr"/>
+                              <m:grow m:val="on"/>
+                              <m:ctrlPr>
+                                <a:rPr kumimoji="1" lang="ja-JP" altLang="en-US" i="1" smtClean="0">
+                                  <a:latin typeface="Cambria Math" panose="02040503050406030204" pitchFamily="18" charset="0"/>
+                                </a:rPr>
+                              </m:ctrlPr>
+                            </m:naryPr>
+                            <m:sub>
+                              <m:r>
+                                <a:rPr kumimoji="1" lang="ja-JP" altLang="en-US" i="1">
+                                  <a:latin typeface="Cambria Math" panose="02040503050406030204" pitchFamily="18" charset="0"/>
+                                </a:rPr>
+                                <m:t>𝑖</m:t>
+                              </m:r>
+                              <m:r>
+                                <a:rPr kumimoji="1" lang="ja-JP" altLang="en-US" i="0">
+                                  <a:latin typeface="Cambria Math" panose="02040503050406030204" pitchFamily="18" charset="0"/>
+                                </a:rPr>
+                                <m:t>=1</m:t>
+                              </m:r>
+                            </m:sub>
+                            <m:sup>
+                              <m:r>
+                                <a:rPr kumimoji="1" lang="ja-JP" altLang="en-US" i="1">
+                                  <a:latin typeface="Cambria Math" panose="02040503050406030204" pitchFamily="18" charset="0"/>
+                                </a:rPr>
+                                <m:t>𝑛</m:t>
+                              </m:r>
+                            </m:sup>
+                            <m:e>
+                              <m:sSub>
+                                <m:sSubPr>
+                                  <m:ctrlPr>
+                                    <a:rPr kumimoji="1" lang="en-US" altLang="ja-JP" i="1" smtClean="0">
+                                      <a:latin typeface="Cambria Math" panose="02040503050406030204" pitchFamily="18" charset="0"/>
+                                    </a:rPr>
+                                  </m:ctrlPr>
+                                </m:sSubPr>
+                                <m:e>
+                                  <m:r>
+                                    <a:rPr kumimoji="1" lang="en-US" altLang="ja-JP" b="0" i="1" smtClean="0">
+                                      <a:latin typeface="Cambria Math" panose="02040503050406030204" pitchFamily="18" charset="0"/>
+                                    </a:rPr>
+                                    <m:t>(</m:t>
+                                  </m:r>
+                                  <m:r>
+                                    <a:rPr kumimoji="1" lang="en-US" altLang="ja-JP" b="0" i="1" smtClean="0">
+                                      <a:latin typeface="Cambria Math" panose="02040503050406030204" pitchFamily="18" charset="0"/>
+                                    </a:rPr>
+                                    <m:t>𝑥</m:t>
+                                  </m:r>
+                                </m:e>
+                                <m:sub>
+                                  <m:r>
+                                    <a:rPr kumimoji="1" lang="en-US" altLang="ja-JP" b="0" i="1" smtClean="0">
+                                      <a:latin typeface="Cambria Math" panose="02040503050406030204" pitchFamily="18" charset="0"/>
+                                    </a:rPr>
+                                    <m:t>𝑖</m:t>
+                                  </m:r>
+                                </m:sub>
+                              </m:sSub>
+                              <m:r>
+                                <a:rPr lang="ja-JP" altLang="en-US" i="1">
+                                  <a:latin typeface="Cambria Math" panose="02040503050406030204" pitchFamily="18" charset="0"/>
+                                </a:rPr>
+                                <m:t>・</m:t>
+                              </m:r>
+                              <m:r>
+                                <a:rPr lang="en-US" altLang="ja-JP" b="0" i="1" smtClean="0">
+                                  <a:latin typeface="Cambria Math" panose="02040503050406030204" pitchFamily="18" charset="0"/>
+                                </a:rPr>
+                                <m:t>𝑃</m:t>
+                              </m:r>
+                              <m:r>
+                                <a:rPr lang="en-US" altLang="ja-JP" b="0" i="1" smtClean="0">
+                                  <a:latin typeface="Cambria Math" panose="02040503050406030204" pitchFamily="18" charset="0"/>
+                                </a:rPr>
+                                <m:t>(</m:t>
+                              </m:r>
+                              <m:sSub>
+                                <m:sSubPr>
+                                  <m:ctrlPr>
+                                    <a:rPr lang="en-US" altLang="ja-JP" b="0" i="1" smtClean="0">
+                                      <a:latin typeface="Cambria Math" panose="02040503050406030204" pitchFamily="18" charset="0"/>
+                                    </a:rPr>
+                                  </m:ctrlPr>
+                                </m:sSubPr>
+                                <m:e>
+                                  <m:r>
+                                    <a:rPr lang="en-US" altLang="ja-JP" b="0" i="1" smtClean="0">
+                                      <a:latin typeface="Cambria Math" panose="02040503050406030204" pitchFamily="18" charset="0"/>
+                                    </a:rPr>
+                                    <m:t>𝑥</m:t>
+                                  </m:r>
+                                </m:e>
+                                <m:sub>
+                                  <m:r>
+                                    <a:rPr lang="en-US" altLang="ja-JP" b="0" i="1" smtClean="0">
+                                      <a:latin typeface="Cambria Math" panose="02040503050406030204" pitchFamily="18" charset="0"/>
+                                    </a:rPr>
+                                    <m:t>𝑖</m:t>
+                                  </m:r>
+                                </m:sub>
+                              </m:sSub>
+                              <m:r>
+                                <a:rPr lang="en-US" altLang="ja-JP" b="0" i="1" smtClean="0">
+                                  <a:latin typeface="Cambria Math" panose="02040503050406030204" pitchFamily="18" charset="0"/>
+                                </a:rPr>
+                                <m:t>))</m:t>
+                              </m:r>
+                            </m:e>
+                          </m:nary>
+                        </m:oMath>
+                      </m:oMathPara>
+                    </a14:m>
+                    <a:endParaRPr kumimoji="1" lang="ja-JP" altLang="en-US" dirty="0"/>
+                  </a:p>
+                </p:txBody>
+              </p:sp>
+            </mc:Choice>
+            <mc:Fallback>
+              <p:sp>
+                <p:nvSpPr>
+                  <p:cNvPr id="5" name="テキスト ボックス 4">
+                    <a:extLst>
+                      <a:ext uri="{FF2B5EF4-FFF2-40B4-BE49-F238E27FC236}">
+                        <a16:creationId xmlns:a16="http://schemas.microsoft.com/office/drawing/2014/main" id="{EFD6AF95-37D7-5BF7-F732-2732C17EE5DF}"/>
+                      </a:ext>
+                    </a:extLst>
+                  </p:cNvPr>
+                  <p:cNvSpPr txBox="1">
+                    <a:spLocks noRot="1" noChangeAspect="1" noMove="1" noResize="1" noEditPoints="1" noAdjustHandles="1" noChangeArrowheads="1" noChangeShapeType="1" noTextEdit="1"/>
+                  </p:cNvSpPr>
+                  <p:nvPr/>
+                </p:nvSpPr>
+                <p:spPr>
+                  <a:xfrm>
+                    <a:off x="9451565" y="1690477"/>
+                    <a:ext cx="1527213" cy="756233"/>
+                  </a:xfrm>
+                  <a:prstGeom prst="rect">
+                    <a:avLst/>
+                  </a:prstGeom>
+                  <a:blipFill>
+                    <a:blip r:embed="rId3"/>
+                    <a:stretch>
+                      <a:fillRect/>
+                    </a:stretch>
+                  </a:blipFill>
+                </p:spPr>
+                <p:txBody>
+                  <a:bodyPr/>
+                  <a:lstStyle/>
+                  <a:p>
+                    <a:r>
+                      <a:rPr lang="ja-JP" altLang="en-US">
+                        <a:noFill/>
+                      </a:rPr>
+                      <a:t> </a:t>
+                    </a:r>
+                  </a:p>
+                </p:txBody>
+              </p:sp>
+            </mc:Fallback>
+          </mc:AlternateContent>
+        </p:grpSp>
+        <p:sp>
+          <p:nvSpPr>
+            <p:cNvPr id="12" name="楕円 11">
+              <a:extLst>
+                <a:ext uri="{FF2B5EF4-FFF2-40B4-BE49-F238E27FC236}">
+                  <a16:creationId xmlns:a16="http://schemas.microsoft.com/office/drawing/2014/main" id="{9FB3D0C6-6659-7664-B270-AA193A0A303A}"/>
+                </a:ext>
+              </a:extLst>
+            </p:cNvPr>
+            <p:cNvSpPr/>
+            <p:nvPr/>
+          </p:nvSpPr>
+          <p:spPr>
+            <a:xfrm>
+              <a:off x="7912701" y="3395545"/>
+              <a:ext cx="206220" cy="232109"/>
+            </a:xfrm>
+            <a:prstGeom prst="ellipse">
+              <a:avLst/>
+            </a:prstGeom>
+            <a:solidFill>
+              <a:schemeClr val="accent4">
+                <a:lumMod val="75000"/>
+              </a:schemeClr>
+            </a:solidFill>
+            <a:ln>
+              <a:noFill/>
+            </a:ln>
+          </p:spPr>
+          <p:style>
+            <a:lnRef idx="2">
+              <a:schemeClr val="accent1">
+                <a:shade val="15000"/>
+              </a:schemeClr>
+            </a:lnRef>
+            <a:fillRef idx="1">
+              <a:schemeClr val="accent1"/>
+            </a:fillRef>
+            <a:effectRef idx="0">
+              <a:schemeClr val="accent1"/>
+            </a:effectRef>
+            <a:fontRef idx="minor">
+              <a:schemeClr val="lt1"/>
+            </a:fontRef>
+          </p:style>
+          <p:txBody>
+            <a:bodyPr tIns="90000" rtlCol="0" anchor="ctr"/>
+            <a:lstStyle/>
+            <a:p>
+              <a:pPr algn="ctr"/>
+              <a:r>
+                <a:rPr lang="en-US" altLang="ja-JP" dirty="0">
+                  <a:latin typeface="メイリオ" panose="020B0604030504040204" pitchFamily="50" charset="-128"/>
+                  <a:ea typeface="メイリオ" panose="020B0604030504040204" pitchFamily="50" charset="-128"/>
+                </a:rPr>
+                <a:t>2</a:t>
+              </a:r>
+              <a:endParaRPr kumimoji="1" lang="ja-JP" altLang="en-US" dirty="0">
+                <a:latin typeface="メイリオ" panose="020B0604030504040204" pitchFamily="50" charset="-128"/>
+                <a:ea typeface="メイリオ" panose="020B0604030504040204" pitchFamily="50" charset="-128"/>
+              </a:endParaRPr>
+            </a:p>
+          </p:txBody>
+        </p:sp>
+        <p:sp>
+          <p:nvSpPr>
+            <p:cNvPr id="13" name="楕円 12">
+              <a:extLst>
+                <a:ext uri="{FF2B5EF4-FFF2-40B4-BE49-F238E27FC236}">
+                  <a16:creationId xmlns:a16="http://schemas.microsoft.com/office/drawing/2014/main" id="{2966C088-F302-B3FF-A349-002F880B9943}"/>
+                </a:ext>
+              </a:extLst>
+            </p:cNvPr>
+            <p:cNvSpPr/>
+            <p:nvPr/>
+          </p:nvSpPr>
+          <p:spPr>
+            <a:xfrm>
+              <a:off x="7288232" y="3429000"/>
+              <a:ext cx="206220" cy="232109"/>
+            </a:xfrm>
+            <a:prstGeom prst="ellipse">
+              <a:avLst/>
+            </a:prstGeom>
+            <a:solidFill>
+              <a:schemeClr val="accent4">
+                <a:lumMod val="75000"/>
+              </a:schemeClr>
+            </a:solidFill>
+            <a:ln>
+              <a:noFill/>
+            </a:ln>
+          </p:spPr>
+          <p:style>
+            <a:lnRef idx="2">
+              <a:schemeClr val="accent1">
+                <a:shade val="15000"/>
+              </a:schemeClr>
+            </a:lnRef>
+            <a:fillRef idx="1">
+              <a:schemeClr val="accent1"/>
+            </a:fillRef>
+            <a:effectRef idx="0">
+              <a:schemeClr val="accent1"/>
+            </a:effectRef>
+            <a:fontRef idx="minor">
+              <a:schemeClr val="lt1"/>
+            </a:fontRef>
+          </p:style>
+          <p:txBody>
+            <a:bodyPr tIns="90000" rtlCol="0" anchor="ctr"/>
+            <a:lstStyle/>
+            <a:p>
+              <a:pPr algn="ctr"/>
+              <a:r>
+                <a:rPr kumimoji="1" lang="en-US" altLang="ja-JP" dirty="0">
+                  <a:latin typeface="メイリオ" panose="020B0604030504040204" pitchFamily="50" charset="-128"/>
+                  <a:ea typeface="メイリオ" panose="020B0604030504040204" pitchFamily="50" charset="-128"/>
+                </a:rPr>
+                <a:t>3</a:t>
+              </a:r>
+            </a:p>
+          </p:txBody>
+        </p:sp>
+        <p:sp>
+          <p:nvSpPr>
+            <p:cNvPr id="14" name="楕円 13">
+              <a:extLst>
+                <a:ext uri="{FF2B5EF4-FFF2-40B4-BE49-F238E27FC236}">
+                  <a16:creationId xmlns:a16="http://schemas.microsoft.com/office/drawing/2014/main" id="{956A384D-F90E-7A51-543D-33E1A82470AB}"/>
+                </a:ext>
+              </a:extLst>
+            </p:cNvPr>
+            <p:cNvSpPr/>
+            <p:nvPr/>
+          </p:nvSpPr>
+          <p:spPr>
+            <a:xfrm>
+              <a:off x="6142403" y="3428999"/>
+              <a:ext cx="206220" cy="232109"/>
+            </a:xfrm>
+            <a:prstGeom prst="ellipse">
+              <a:avLst/>
+            </a:prstGeom>
+            <a:solidFill>
+              <a:schemeClr val="accent4">
+                <a:lumMod val="75000"/>
+              </a:schemeClr>
+            </a:solidFill>
+            <a:ln>
+              <a:noFill/>
+            </a:ln>
+          </p:spPr>
+          <p:style>
+            <a:lnRef idx="2">
+              <a:schemeClr val="accent1">
+                <a:shade val="15000"/>
+              </a:schemeClr>
+            </a:lnRef>
+            <a:fillRef idx="1">
+              <a:schemeClr val="accent1"/>
+            </a:fillRef>
+            <a:effectRef idx="0">
+              <a:schemeClr val="accent1"/>
+            </a:effectRef>
+            <a:fontRef idx="minor">
+              <a:schemeClr val="lt1"/>
+            </a:fontRef>
+          </p:style>
+          <p:txBody>
+            <a:bodyPr tIns="90000" rtlCol="0" anchor="ctr"/>
+            <a:lstStyle/>
+            <a:p>
+              <a:pPr algn="ctr"/>
+              <a:r>
+                <a:rPr kumimoji="1" lang="en-US" altLang="ja-JP" dirty="0">
+                  <a:latin typeface="メイリオ" panose="020B0604030504040204" pitchFamily="50" charset="-128"/>
+                  <a:ea typeface="メイリオ" panose="020B0604030504040204" pitchFamily="50" charset="-128"/>
+                </a:rPr>
+                <a:t>4</a:t>
+              </a:r>
+            </a:p>
+          </p:txBody>
+        </p:sp>
+      </p:grpSp>
     </p:spTree>
     <p:extLst>
       <p:ext uri="{BB962C8B-B14F-4D97-AF65-F5344CB8AC3E}">
@@ -4331,7 +5601,794 @@
         </p:nvSpPr>
         <p:spPr>
           <a:xfrm>
-            <a:off x="658169" y="1098587"/>
+            <a:off x="682560" y="1066273"/>
+            <a:ext cx="10540261" cy="5528957"/>
+          </a:xfrm>
+          <a:prstGeom prst="rect">
+            <a:avLst/>
+          </a:prstGeom>
+          <a:solidFill>
+            <a:schemeClr val="bg1"/>
+          </a:solidFill>
+          <a:ln w="57150">
+            <a:solidFill>
+              <a:schemeClr val="accent4">
+                <a:lumMod val="20000"/>
+                <a:lumOff val="80000"/>
+              </a:schemeClr>
+            </a:solidFill>
+          </a:ln>
+        </p:spPr>
+        <p:style>
+          <a:lnRef idx="2">
+            <a:schemeClr val="accent1">
+              <a:shade val="15000"/>
+            </a:schemeClr>
+          </a:lnRef>
+          <a:fillRef idx="1">
+            <a:schemeClr val="accent1"/>
+          </a:fillRef>
+          <a:effectRef idx="0">
+            <a:schemeClr val="accent1"/>
+          </a:effectRef>
+          <a:fontRef idx="minor">
+            <a:schemeClr val="lt1"/>
+          </a:fontRef>
+        </p:style>
+        <p:txBody>
+          <a:bodyPr rtlCol="0" anchor="t"/>
+          <a:lstStyle/>
+          <a:p>
+            <a:endParaRPr kumimoji="1" lang="ja-JP" altLang="en-US" dirty="0"/>
+          </a:p>
+        </p:txBody>
+      </p:sp>
+      <p:sp>
+        <p:nvSpPr>
+          <p:cNvPr id="3" name="字幕 2">
+            <a:extLst>
+              <a:ext uri="{FF2B5EF4-FFF2-40B4-BE49-F238E27FC236}">
+                <a16:creationId xmlns:a16="http://schemas.microsoft.com/office/drawing/2014/main" id="{EF422FEA-2F34-70ED-56A9-01A65A2AD142}"/>
+              </a:ext>
+            </a:extLst>
+          </p:cNvPr>
+          <p:cNvSpPr>
+            <a:spLocks noGrp="1"/>
+          </p:cNvSpPr>
+          <p:nvPr>
+            <p:ph type="subTitle" idx="1"/>
+          </p:nvPr>
+        </p:nvSpPr>
+        <p:spPr>
+          <a:xfrm>
+            <a:off x="682560" y="1143635"/>
+            <a:ext cx="9391483" cy="5446283"/>
+          </a:xfrm>
+        </p:spPr>
+        <p:txBody>
+          <a:bodyPr>
+            <a:normAutofit/>
+          </a:bodyPr>
+          <a:lstStyle/>
+          <a:p>
+            <a:pPr algn="l"/>
+            <a:r>
+              <a:rPr lang="en-US" altLang="ja-JP" sz="2000" dirty="0">
+                <a:solidFill>
+                  <a:schemeClr val="accent4">
+                    <a:lumMod val="75000"/>
+                  </a:schemeClr>
+                </a:solidFill>
+                <a:latin typeface="メイリオ" panose="020B0604030504040204" pitchFamily="50" charset="-128"/>
+                <a:ea typeface="メイリオ" panose="020B0604030504040204" pitchFamily="50" charset="-128"/>
+              </a:rPr>
+              <a:t>##</a:t>
+            </a:r>
+            <a:r>
+              <a:rPr lang="ja-JP" altLang="en-US" sz="2000" dirty="0">
+                <a:solidFill>
+                  <a:schemeClr val="accent4">
+                    <a:lumMod val="75000"/>
+                  </a:schemeClr>
+                </a:solidFill>
+                <a:latin typeface="メイリオ" panose="020B0604030504040204" pitchFamily="50" charset="-128"/>
+                <a:ea typeface="メイリオ" panose="020B0604030504040204" pitchFamily="50" charset="-128"/>
+              </a:rPr>
+              <a:t>練習</a:t>
+            </a:r>
+            <a:endParaRPr lang="en-US" altLang="ja-JP" sz="2000" dirty="0">
+              <a:solidFill>
+                <a:schemeClr val="accent4">
+                  <a:lumMod val="75000"/>
+                </a:schemeClr>
+              </a:solidFill>
+              <a:latin typeface="メイリオ" panose="020B0604030504040204" pitchFamily="50" charset="-128"/>
+              <a:ea typeface="メイリオ" panose="020B0604030504040204" pitchFamily="50" charset="-128"/>
+            </a:endParaRPr>
+          </a:p>
+          <a:p>
+            <a:pPr algn="l"/>
+            <a:r>
+              <a:rPr lang="ja-JP" altLang="en-US" sz="2000" dirty="0">
+                <a:solidFill>
+                  <a:schemeClr val="accent4">
+                    <a:lumMod val="75000"/>
+                  </a:schemeClr>
+                </a:solidFill>
+                <a:latin typeface="メイリオ" panose="020B0604030504040204" pitchFamily="50" charset="-128"/>
+                <a:ea typeface="メイリオ" panose="020B0604030504040204" pitchFamily="50" charset="-128"/>
+              </a:rPr>
+              <a:t>＃</a:t>
+            </a:r>
+            <a:r>
+              <a:rPr lang="en-US" altLang="ja-JP" sz="2000" dirty="0">
+                <a:solidFill>
+                  <a:schemeClr val="accent4">
+                    <a:lumMod val="75000"/>
+                  </a:schemeClr>
+                </a:solidFill>
+                <a:latin typeface="メイリオ" panose="020B0604030504040204" pitchFamily="50" charset="-128"/>
+                <a:ea typeface="メイリオ" panose="020B0604030504040204" pitchFamily="50" charset="-128"/>
+              </a:rPr>
+              <a:t>#</a:t>
+            </a:r>
+            <a:r>
+              <a:rPr lang="ja-JP" altLang="en-US" sz="2000" dirty="0">
+                <a:solidFill>
+                  <a:schemeClr val="accent4">
+                    <a:lumMod val="75000"/>
+                  </a:schemeClr>
+                </a:solidFill>
+                <a:latin typeface="メイリオ" panose="020B0604030504040204" pitchFamily="50" charset="-128"/>
+                <a:ea typeface="メイリオ" panose="020B0604030504040204" pitchFamily="50" charset="-128"/>
+              </a:rPr>
+              <a:t>ウェイトのかかったさいころの期待値を計算する</a:t>
+            </a:r>
+            <a:endParaRPr lang="en-US" altLang="ja-JP" sz="2000" dirty="0">
+              <a:solidFill>
+                <a:schemeClr val="accent4">
+                  <a:lumMod val="75000"/>
+                </a:schemeClr>
+              </a:solidFill>
+              <a:latin typeface="メイリオ" panose="020B0604030504040204" pitchFamily="50" charset="-128"/>
+              <a:ea typeface="メイリオ" panose="020B0604030504040204" pitchFamily="50" charset="-128"/>
+            </a:endParaRPr>
+          </a:p>
+          <a:p>
+            <a:pPr algn="l"/>
+            <a:endParaRPr lang="en-US" altLang="ja-JP" sz="1200" dirty="0">
+              <a:latin typeface="メイリオ" panose="020B0604030504040204" pitchFamily="50" charset="-128"/>
+              <a:ea typeface="メイリオ" panose="020B0604030504040204" pitchFamily="50" charset="-128"/>
+            </a:endParaRPr>
+          </a:p>
+          <a:p>
+            <a:pPr algn="l"/>
+            <a:endParaRPr lang="en-US" altLang="ja-JP" sz="1200" dirty="0">
+              <a:latin typeface="メイリオ" panose="020B0604030504040204" pitchFamily="50" charset="-128"/>
+              <a:ea typeface="メイリオ" panose="020B0604030504040204" pitchFamily="50" charset="-128"/>
+            </a:endParaRPr>
+          </a:p>
+        </p:txBody>
+      </p:sp>
+      <p:pic>
+        <p:nvPicPr>
+          <p:cNvPr id="15" name="図 14">
+            <a:extLst>
+              <a:ext uri="{FF2B5EF4-FFF2-40B4-BE49-F238E27FC236}">
+                <a16:creationId xmlns:a16="http://schemas.microsoft.com/office/drawing/2014/main" id="{2756502C-8C1E-B65D-2253-EC4888CCCE0F}"/>
+              </a:ext>
+            </a:extLst>
+          </p:cNvPr>
+          <p:cNvPicPr>
+            <a:picLocks noChangeAspect="1"/>
+          </p:cNvPicPr>
+          <p:nvPr/>
+        </p:nvPicPr>
+        <p:blipFill>
+          <a:blip r:embed="rId2"/>
+          <a:stretch>
+            <a:fillRect/>
+          </a:stretch>
+        </p:blipFill>
+        <p:spPr>
+          <a:xfrm>
+            <a:off x="1659850" y="2037498"/>
+            <a:ext cx="5735714" cy="3992057"/>
+          </a:xfrm>
+          <a:prstGeom prst="rect">
+            <a:avLst/>
+          </a:prstGeom>
+          <a:ln>
+            <a:solidFill>
+              <a:schemeClr val="bg2">
+                <a:lumMod val="90000"/>
+              </a:schemeClr>
+            </a:solidFill>
+          </a:ln>
+        </p:spPr>
+      </p:pic>
+      <p:pic>
+        <p:nvPicPr>
+          <p:cNvPr id="17" name="図 16">
+            <a:extLst>
+              <a:ext uri="{FF2B5EF4-FFF2-40B4-BE49-F238E27FC236}">
+                <a16:creationId xmlns:a16="http://schemas.microsoft.com/office/drawing/2014/main" id="{037E4005-37C7-F190-4FE3-D78BB0567FCD}"/>
+              </a:ext>
+            </a:extLst>
+          </p:cNvPr>
+          <p:cNvPicPr>
+            <a:picLocks noChangeAspect="1"/>
+          </p:cNvPicPr>
+          <p:nvPr/>
+        </p:nvPicPr>
+        <p:blipFill rotWithShape="1">
+          <a:blip r:embed="rId3"/>
+          <a:srcRect t="95820" r="76118"/>
+          <a:stretch/>
+        </p:blipFill>
+        <p:spPr>
+          <a:xfrm>
+            <a:off x="4697220" y="6148830"/>
+            <a:ext cx="2238944" cy="254442"/>
+          </a:xfrm>
+          <a:prstGeom prst="rect">
+            <a:avLst/>
+          </a:prstGeom>
+          <a:ln>
+            <a:solidFill>
+              <a:schemeClr val="bg2">
+                <a:lumMod val="90000"/>
+              </a:schemeClr>
+            </a:solidFill>
+          </a:ln>
+        </p:spPr>
+      </p:pic>
+      <p:cxnSp>
+        <p:nvCxnSpPr>
+          <p:cNvPr id="13" name="直線矢印コネクタ 12">
+            <a:extLst>
+              <a:ext uri="{FF2B5EF4-FFF2-40B4-BE49-F238E27FC236}">
+                <a16:creationId xmlns:a16="http://schemas.microsoft.com/office/drawing/2014/main" id="{74FF8975-518B-E7D8-023D-CCCCAEBC6F95}"/>
+              </a:ext>
+            </a:extLst>
+          </p:cNvPr>
+          <p:cNvCxnSpPr>
+            <a:cxnSpLocks/>
+          </p:cNvCxnSpPr>
+          <p:nvPr/>
+        </p:nvCxnSpPr>
+        <p:spPr>
+          <a:xfrm>
+            <a:off x="3093558" y="3029030"/>
+            <a:ext cx="4457700" cy="0"/>
+          </a:xfrm>
+          <a:prstGeom prst="straightConnector1">
+            <a:avLst/>
+          </a:prstGeom>
+          <a:ln w="57150">
+            <a:solidFill>
+              <a:schemeClr val="accent4">
+                <a:lumMod val="75000"/>
+              </a:schemeClr>
+            </a:solidFill>
+            <a:tailEnd type="triangle"/>
+          </a:ln>
+        </p:spPr>
+        <p:style>
+          <a:lnRef idx="1">
+            <a:schemeClr val="accent1"/>
+          </a:lnRef>
+          <a:fillRef idx="0">
+            <a:schemeClr val="accent1"/>
+          </a:fillRef>
+          <a:effectRef idx="0">
+            <a:schemeClr val="accent1"/>
+          </a:effectRef>
+          <a:fontRef idx="minor">
+            <a:schemeClr val="tx1"/>
+          </a:fontRef>
+        </p:style>
+      </p:cxnSp>
+      <p:pic>
+        <p:nvPicPr>
+          <p:cNvPr id="20" name="図 19">
+            <a:extLst>
+              <a:ext uri="{FF2B5EF4-FFF2-40B4-BE49-F238E27FC236}">
+                <a16:creationId xmlns:a16="http://schemas.microsoft.com/office/drawing/2014/main" id="{7DF4726D-09AD-20A1-84D0-1F7051028D94}"/>
+              </a:ext>
+            </a:extLst>
+          </p:cNvPr>
+          <p:cNvPicPr>
+            <a:picLocks noChangeAspect="1"/>
+          </p:cNvPicPr>
+          <p:nvPr/>
+        </p:nvPicPr>
+        <p:blipFill rotWithShape="1">
+          <a:blip r:embed="rId3"/>
+          <a:srcRect t="10520" r="86549" b="78424"/>
+          <a:stretch/>
+        </p:blipFill>
+        <p:spPr>
+          <a:xfrm>
+            <a:off x="7744625" y="2692561"/>
+            <a:ext cx="1261044" cy="672939"/>
+          </a:xfrm>
+          <a:prstGeom prst="rect">
+            <a:avLst/>
+          </a:prstGeom>
+          <a:ln>
+            <a:solidFill>
+              <a:schemeClr val="bg2">
+                <a:lumMod val="90000"/>
+              </a:schemeClr>
+            </a:solidFill>
+          </a:ln>
+        </p:spPr>
+      </p:pic>
+      <p:pic>
+        <p:nvPicPr>
+          <p:cNvPr id="21" name="図 20">
+            <a:extLst>
+              <a:ext uri="{FF2B5EF4-FFF2-40B4-BE49-F238E27FC236}">
+                <a16:creationId xmlns:a16="http://schemas.microsoft.com/office/drawing/2014/main" id="{99A74E32-60BC-5E0A-5150-F7D9C90CFAA0}"/>
+              </a:ext>
+            </a:extLst>
+          </p:cNvPr>
+          <p:cNvPicPr>
+            <a:picLocks noChangeAspect="1"/>
+          </p:cNvPicPr>
+          <p:nvPr/>
+        </p:nvPicPr>
+        <p:blipFill rotWithShape="1">
+          <a:blip r:embed="rId3"/>
+          <a:srcRect t="26375" r="73545" b="66729"/>
+          <a:stretch/>
+        </p:blipFill>
+        <p:spPr>
+          <a:xfrm>
+            <a:off x="7736403" y="3379946"/>
+            <a:ext cx="2480244" cy="419735"/>
+          </a:xfrm>
+          <a:prstGeom prst="rect">
+            <a:avLst/>
+          </a:prstGeom>
+          <a:ln>
+            <a:solidFill>
+              <a:schemeClr val="bg2">
+                <a:lumMod val="90000"/>
+              </a:schemeClr>
+            </a:solidFill>
+          </a:ln>
+        </p:spPr>
+      </p:pic>
+      <p:cxnSp>
+        <p:nvCxnSpPr>
+          <p:cNvPr id="23" name="直線矢印コネクタ 22">
+            <a:extLst>
+              <a:ext uri="{FF2B5EF4-FFF2-40B4-BE49-F238E27FC236}">
+                <a16:creationId xmlns:a16="http://schemas.microsoft.com/office/drawing/2014/main" id="{C9ECE7B1-66E5-FF30-6682-D63E9631F145}"/>
+              </a:ext>
+            </a:extLst>
+          </p:cNvPr>
+          <p:cNvCxnSpPr>
+            <a:cxnSpLocks/>
+          </p:cNvCxnSpPr>
+          <p:nvPr/>
+        </p:nvCxnSpPr>
+        <p:spPr>
+          <a:xfrm>
+            <a:off x="2179158" y="3589813"/>
+            <a:ext cx="5372100" cy="0"/>
+          </a:xfrm>
+          <a:prstGeom prst="straightConnector1">
+            <a:avLst/>
+          </a:prstGeom>
+          <a:ln w="57150">
+            <a:solidFill>
+              <a:schemeClr val="accent4">
+                <a:lumMod val="75000"/>
+              </a:schemeClr>
+            </a:solidFill>
+            <a:tailEnd type="triangle"/>
+          </a:ln>
+        </p:spPr>
+        <p:style>
+          <a:lnRef idx="1">
+            <a:schemeClr val="accent1"/>
+          </a:lnRef>
+          <a:fillRef idx="0">
+            <a:schemeClr val="accent1"/>
+          </a:fillRef>
+          <a:effectRef idx="0">
+            <a:schemeClr val="accent1"/>
+          </a:effectRef>
+          <a:fontRef idx="minor">
+            <a:schemeClr val="tx1"/>
+          </a:fontRef>
+        </p:style>
+      </p:cxnSp>
+      <p:pic>
+        <p:nvPicPr>
+          <p:cNvPr id="25" name="図 24">
+            <a:extLst>
+              <a:ext uri="{FF2B5EF4-FFF2-40B4-BE49-F238E27FC236}">
+                <a16:creationId xmlns:a16="http://schemas.microsoft.com/office/drawing/2014/main" id="{7EC5E597-8A41-FF1C-481F-0F6923510EB7}"/>
+              </a:ext>
+            </a:extLst>
+          </p:cNvPr>
+          <p:cNvPicPr>
+            <a:picLocks noChangeAspect="1"/>
+          </p:cNvPicPr>
+          <p:nvPr/>
+        </p:nvPicPr>
+        <p:blipFill rotWithShape="1">
+          <a:blip r:embed="rId3"/>
+          <a:srcRect t="50580" r="82214" b="38760"/>
+          <a:stretch/>
+        </p:blipFill>
+        <p:spPr>
+          <a:xfrm>
+            <a:off x="7736403" y="3923138"/>
+            <a:ext cx="1667444" cy="648920"/>
+          </a:xfrm>
+          <a:prstGeom prst="rect">
+            <a:avLst/>
+          </a:prstGeom>
+          <a:ln>
+            <a:solidFill>
+              <a:schemeClr val="bg2">
+                <a:lumMod val="90000"/>
+              </a:schemeClr>
+            </a:solidFill>
+          </a:ln>
+        </p:spPr>
+      </p:pic>
+      <p:cxnSp>
+        <p:nvCxnSpPr>
+          <p:cNvPr id="26" name="直線矢印コネクタ 25">
+            <a:extLst>
+              <a:ext uri="{FF2B5EF4-FFF2-40B4-BE49-F238E27FC236}">
+                <a16:creationId xmlns:a16="http://schemas.microsoft.com/office/drawing/2014/main" id="{C457D67A-4C59-DDCE-374F-6A06D71FF0A8}"/>
+              </a:ext>
+            </a:extLst>
+          </p:cNvPr>
+          <p:cNvCxnSpPr>
+            <a:cxnSpLocks/>
+          </p:cNvCxnSpPr>
+          <p:nvPr/>
+        </p:nvCxnSpPr>
+        <p:spPr>
+          <a:xfrm>
+            <a:off x="3003047" y="4529671"/>
+            <a:ext cx="4548211" cy="0"/>
+          </a:xfrm>
+          <a:prstGeom prst="straightConnector1">
+            <a:avLst/>
+          </a:prstGeom>
+          <a:ln w="57150">
+            <a:solidFill>
+              <a:schemeClr val="accent4">
+                <a:lumMod val="75000"/>
+              </a:schemeClr>
+            </a:solidFill>
+            <a:tailEnd type="triangle"/>
+          </a:ln>
+        </p:spPr>
+        <p:style>
+          <a:lnRef idx="1">
+            <a:schemeClr val="accent1"/>
+          </a:lnRef>
+          <a:fillRef idx="0">
+            <a:schemeClr val="accent1"/>
+          </a:fillRef>
+          <a:effectRef idx="0">
+            <a:schemeClr val="accent1"/>
+          </a:effectRef>
+          <a:fontRef idx="minor">
+            <a:schemeClr val="tx1"/>
+          </a:fontRef>
+        </p:style>
+      </p:cxnSp>
+      <p:pic>
+        <p:nvPicPr>
+          <p:cNvPr id="28" name="図 27">
+            <a:extLst>
+              <a:ext uri="{FF2B5EF4-FFF2-40B4-BE49-F238E27FC236}">
+                <a16:creationId xmlns:a16="http://schemas.microsoft.com/office/drawing/2014/main" id="{A914C37A-323E-A073-0ED3-6E8505B52953}"/>
+              </a:ext>
+            </a:extLst>
+          </p:cNvPr>
+          <p:cNvPicPr>
+            <a:picLocks noChangeAspect="1"/>
+          </p:cNvPicPr>
+          <p:nvPr/>
+        </p:nvPicPr>
+        <p:blipFill rotWithShape="1">
+          <a:blip r:embed="rId3"/>
+          <a:srcRect t="66797" r="78286" b="22541"/>
+          <a:stretch/>
+        </p:blipFill>
+        <p:spPr>
+          <a:xfrm>
+            <a:off x="7736403" y="4730181"/>
+            <a:ext cx="2035744" cy="648921"/>
+          </a:xfrm>
+          <a:prstGeom prst="rect">
+            <a:avLst/>
+          </a:prstGeom>
+          <a:ln>
+            <a:solidFill>
+              <a:schemeClr val="bg2">
+                <a:lumMod val="90000"/>
+              </a:schemeClr>
+            </a:solidFill>
+          </a:ln>
+        </p:spPr>
+      </p:pic>
+      <p:cxnSp>
+        <p:nvCxnSpPr>
+          <p:cNvPr id="29" name="直線矢印コネクタ 28">
+            <a:extLst>
+              <a:ext uri="{FF2B5EF4-FFF2-40B4-BE49-F238E27FC236}">
+                <a16:creationId xmlns:a16="http://schemas.microsoft.com/office/drawing/2014/main" id="{0E38F840-0398-BB90-C4CE-27B499FA4F44}"/>
+              </a:ext>
+            </a:extLst>
+          </p:cNvPr>
+          <p:cNvCxnSpPr>
+            <a:cxnSpLocks/>
+          </p:cNvCxnSpPr>
+          <p:nvPr/>
+        </p:nvCxnSpPr>
+        <p:spPr>
+          <a:xfrm>
+            <a:off x="3003046" y="5054641"/>
+            <a:ext cx="4548211" cy="0"/>
+          </a:xfrm>
+          <a:prstGeom prst="straightConnector1">
+            <a:avLst/>
+          </a:prstGeom>
+          <a:ln w="57150">
+            <a:solidFill>
+              <a:schemeClr val="accent4">
+                <a:lumMod val="75000"/>
+              </a:schemeClr>
+            </a:solidFill>
+            <a:tailEnd type="triangle"/>
+          </a:ln>
+        </p:spPr>
+        <p:style>
+          <a:lnRef idx="1">
+            <a:schemeClr val="accent1"/>
+          </a:lnRef>
+          <a:fillRef idx="0">
+            <a:schemeClr val="accent1"/>
+          </a:fillRef>
+          <a:effectRef idx="0">
+            <a:schemeClr val="accent1"/>
+          </a:effectRef>
+          <a:fontRef idx="minor">
+            <a:schemeClr val="tx1"/>
+          </a:fontRef>
+        </p:style>
+      </p:cxnSp>
+      <p:pic>
+        <p:nvPicPr>
+          <p:cNvPr id="30" name="図 29">
+            <a:extLst>
+              <a:ext uri="{FF2B5EF4-FFF2-40B4-BE49-F238E27FC236}">
+                <a16:creationId xmlns:a16="http://schemas.microsoft.com/office/drawing/2014/main" id="{42C00B05-61D0-4A2F-7B10-4EA961A126C5}"/>
+              </a:ext>
+            </a:extLst>
+          </p:cNvPr>
+          <p:cNvPicPr>
+            <a:picLocks noChangeAspect="1"/>
+          </p:cNvPicPr>
+          <p:nvPr/>
+        </p:nvPicPr>
+        <p:blipFill rotWithShape="1">
+          <a:blip r:embed="rId3"/>
+          <a:srcRect t="82493" r="71783" b="6684"/>
+          <a:stretch/>
+        </p:blipFill>
+        <p:spPr>
+          <a:xfrm>
+            <a:off x="7744625" y="5463081"/>
+            <a:ext cx="2645344" cy="658737"/>
+          </a:xfrm>
+          <a:prstGeom prst="rect">
+            <a:avLst/>
+          </a:prstGeom>
+          <a:ln>
+            <a:solidFill>
+              <a:schemeClr val="bg2">
+                <a:lumMod val="90000"/>
+              </a:schemeClr>
+            </a:solidFill>
+          </a:ln>
+        </p:spPr>
+      </p:pic>
+      <p:cxnSp>
+        <p:nvCxnSpPr>
+          <p:cNvPr id="31" name="直線矢印コネクタ 30">
+            <a:extLst>
+              <a:ext uri="{FF2B5EF4-FFF2-40B4-BE49-F238E27FC236}">
+                <a16:creationId xmlns:a16="http://schemas.microsoft.com/office/drawing/2014/main" id="{566A23AA-F880-FACC-3334-376B9079DE5B}"/>
+              </a:ext>
+            </a:extLst>
+          </p:cNvPr>
+          <p:cNvCxnSpPr>
+            <a:cxnSpLocks/>
+          </p:cNvCxnSpPr>
+          <p:nvPr/>
+        </p:nvCxnSpPr>
+        <p:spPr>
+          <a:xfrm>
+            <a:off x="3003046" y="5588041"/>
+            <a:ext cx="4548211" cy="0"/>
+          </a:xfrm>
+          <a:prstGeom prst="straightConnector1">
+            <a:avLst/>
+          </a:prstGeom>
+          <a:ln w="57150">
+            <a:solidFill>
+              <a:schemeClr val="accent4">
+                <a:lumMod val="75000"/>
+              </a:schemeClr>
+            </a:solidFill>
+            <a:tailEnd type="triangle"/>
+          </a:ln>
+        </p:spPr>
+        <p:style>
+          <a:lnRef idx="1">
+            <a:schemeClr val="accent1"/>
+          </a:lnRef>
+          <a:fillRef idx="0">
+            <a:schemeClr val="accent1"/>
+          </a:fillRef>
+          <a:effectRef idx="0">
+            <a:schemeClr val="accent1"/>
+          </a:effectRef>
+          <a:fontRef idx="minor">
+            <a:schemeClr val="tx1"/>
+          </a:fontRef>
+        </p:style>
+      </p:cxnSp>
+      <p:cxnSp>
+        <p:nvCxnSpPr>
+          <p:cNvPr id="33" name="直線矢印コネクタ 32">
+            <a:extLst>
+              <a:ext uri="{FF2B5EF4-FFF2-40B4-BE49-F238E27FC236}">
+                <a16:creationId xmlns:a16="http://schemas.microsoft.com/office/drawing/2014/main" id="{C1BBC8DC-6FEB-734C-3E44-02FCEC8545C6}"/>
+              </a:ext>
+            </a:extLst>
+          </p:cNvPr>
+          <p:cNvCxnSpPr>
+            <a:cxnSpLocks/>
+          </p:cNvCxnSpPr>
+          <p:nvPr/>
+        </p:nvCxnSpPr>
+        <p:spPr>
+          <a:xfrm>
+            <a:off x="4382095" y="6148830"/>
+            <a:ext cx="255612" cy="115682"/>
+          </a:xfrm>
+          <a:prstGeom prst="straightConnector1">
+            <a:avLst/>
+          </a:prstGeom>
+          <a:ln w="57150">
+            <a:solidFill>
+              <a:schemeClr val="accent4">
+                <a:lumMod val="75000"/>
+              </a:schemeClr>
+            </a:solidFill>
+            <a:tailEnd type="triangle"/>
+          </a:ln>
+        </p:spPr>
+        <p:style>
+          <a:lnRef idx="1">
+            <a:schemeClr val="accent1"/>
+          </a:lnRef>
+          <a:fillRef idx="0">
+            <a:schemeClr val="accent1"/>
+          </a:fillRef>
+          <a:effectRef idx="0">
+            <a:schemeClr val="accent1"/>
+          </a:effectRef>
+          <a:fontRef idx="minor">
+            <a:schemeClr val="tx1"/>
+          </a:fontRef>
+        </p:style>
+      </p:cxnSp>
+    </p:spTree>
+    <p:extLst>
+      <p:ext uri="{BB962C8B-B14F-4D97-AF65-F5344CB8AC3E}">
+        <p14:creationId xmlns:p14="http://schemas.microsoft.com/office/powerpoint/2010/main" val="4132078421"/>
+      </p:ext>
+    </p:extLst>
+  </p:cSld>
+  <p:clrMapOvr>
+    <a:masterClrMapping/>
+  </p:clrMapOvr>
+</p:sld>
+</file>
+
+<file path=ppt/slides/slide13.xml><?xml version="1.0" encoding="utf-8"?>
+<p:sld xmlns:a="http://schemas.openxmlformats.org/drawingml/2006/main" xmlns:r="http://schemas.openxmlformats.org/officeDocument/2006/relationships" xmlns:p="http://schemas.openxmlformats.org/presentationml/2006/main">
+  <p:cSld>
+    <p:spTree>
+      <p:nvGrpSpPr>
+        <p:cNvPr id="1" name=""/>
+        <p:cNvGrpSpPr/>
+        <p:nvPr/>
+      </p:nvGrpSpPr>
+      <p:grpSpPr>
+        <a:xfrm>
+          <a:off x="0" y="0"/>
+          <a:ext cx="0" cy="0"/>
+          <a:chOff x="0" y="0"/>
+          <a:chExt cx="0" cy="0"/>
+        </a:xfrm>
+      </p:grpSpPr>
+      <p:sp>
+        <p:nvSpPr>
+          <p:cNvPr id="2" name="タイトル 1">
+            <a:extLst>
+              <a:ext uri="{FF2B5EF4-FFF2-40B4-BE49-F238E27FC236}">
+                <a16:creationId xmlns:a16="http://schemas.microsoft.com/office/drawing/2014/main" id="{8F92D15D-6ED6-F1E2-415D-C5D0D0CAAC83}"/>
+              </a:ext>
+            </a:extLst>
+          </p:cNvPr>
+          <p:cNvSpPr>
+            <a:spLocks noGrp="1"/>
+          </p:cNvSpPr>
+          <p:nvPr>
+            <p:ph type="ctrTitle"/>
+          </p:nvPr>
+        </p:nvSpPr>
+        <p:spPr>
+          <a:xfrm>
+            <a:off x="528181" y="314435"/>
+            <a:ext cx="5891408" cy="700173"/>
+          </a:xfrm>
+        </p:spPr>
+        <p:txBody>
+          <a:bodyPr>
+            <a:normAutofit/>
+          </a:bodyPr>
+          <a:lstStyle/>
+          <a:p>
+            <a:pPr algn="l"/>
+            <a:r>
+              <a:rPr kumimoji="1" lang="ja-JP" altLang="en-US" sz="3000" b="1" dirty="0">
+                <a:solidFill>
+                  <a:schemeClr val="tx1">
+                    <a:lumMod val="65000"/>
+                    <a:lumOff val="35000"/>
+                  </a:schemeClr>
+                </a:solidFill>
+                <a:latin typeface="メイリオ" panose="020B0604030504040204" pitchFamily="50" charset="-128"/>
+                <a:ea typeface="メイリオ" panose="020B0604030504040204" pitchFamily="50" charset="-128"/>
+              </a:rPr>
+              <a:t>９章　ループ</a:t>
+            </a:r>
+          </a:p>
+        </p:txBody>
+      </p:sp>
+      <p:sp>
+        <p:nvSpPr>
+          <p:cNvPr id="4" name="正方形/長方形 3">
+            <a:extLst>
+              <a:ext uri="{FF2B5EF4-FFF2-40B4-BE49-F238E27FC236}">
+                <a16:creationId xmlns:a16="http://schemas.microsoft.com/office/drawing/2014/main" id="{578782C7-6070-7C3A-DAB7-3101F4C6ED5C}"/>
+              </a:ext>
+            </a:extLst>
+          </p:cNvPr>
+          <p:cNvSpPr/>
+          <p:nvPr/>
+        </p:nvSpPr>
+        <p:spPr>
+          <a:xfrm>
+            <a:off x="528181" y="1102297"/>
             <a:ext cx="10540261" cy="5528957"/>
           </a:xfrm>
           <a:prstGeom prst="rect">
@@ -4373,10 +6430,330 @@
       </p:sp>
       <p:sp>
         <p:nvSpPr>
-          <p:cNvPr id="6" name="正方形/長方形 5">
-            <a:extLst>
-              <a:ext uri="{FF2B5EF4-FFF2-40B4-BE49-F238E27FC236}">
-                <a16:creationId xmlns:a16="http://schemas.microsoft.com/office/drawing/2014/main" id="{75CE81D2-C5EE-4E63-DA6F-4D50A6E33162}"/>
+          <p:cNvPr id="3" name="字幕 2">
+            <a:extLst>
+              <a:ext uri="{FF2B5EF4-FFF2-40B4-BE49-F238E27FC236}">
+                <a16:creationId xmlns:a16="http://schemas.microsoft.com/office/drawing/2014/main" id="{EF422FEA-2F34-70ED-56A9-01A65A2AD142}"/>
+              </a:ext>
+            </a:extLst>
+          </p:cNvPr>
+          <p:cNvSpPr>
+            <a:spLocks noGrp="1"/>
+          </p:cNvSpPr>
+          <p:nvPr>
+            <p:ph type="subTitle" idx="1"/>
+          </p:nvPr>
+        </p:nvSpPr>
+        <p:spPr>
+          <a:xfrm>
+            <a:off x="682560" y="1143635"/>
+            <a:ext cx="9391483" cy="5446283"/>
+          </a:xfrm>
+        </p:spPr>
+        <p:txBody>
+          <a:bodyPr>
+            <a:normAutofit/>
+          </a:bodyPr>
+          <a:lstStyle/>
+          <a:p>
+            <a:pPr algn="l"/>
+            <a:r>
+              <a:rPr kumimoji="1" lang="ja-JP" altLang="en-US" sz="2000" dirty="0">
+                <a:solidFill>
+                  <a:schemeClr val="accent4">
+                    <a:lumMod val="75000"/>
+                  </a:schemeClr>
+                </a:solidFill>
+                <a:latin typeface="メイリオ" panose="020B0604030504040204" pitchFamily="50" charset="-128"/>
+                <a:ea typeface="メイリオ" panose="020B0604030504040204" pitchFamily="50" charset="-128"/>
+              </a:rPr>
+              <a:t>＃</a:t>
+            </a:r>
+            <a:r>
+              <a:rPr lang="en-US" altLang="ja-JP" sz="2000" dirty="0">
+                <a:solidFill>
+                  <a:schemeClr val="accent4">
+                    <a:lumMod val="75000"/>
+                  </a:schemeClr>
+                </a:solidFill>
+                <a:latin typeface="メイリオ" panose="020B0604030504040204" pitchFamily="50" charset="-128"/>
+                <a:ea typeface="メイリオ" panose="020B0604030504040204" pitchFamily="50" charset="-128"/>
+              </a:rPr>
+              <a:t>#</a:t>
+            </a:r>
+            <a:r>
+              <a:rPr lang="ja-JP" altLang="en-US" sz="2000" dirty="0">
+                <a:solidFill>
+                  <a:schemeClr val="accent4">
+                    <a:lumMod val="75000"/>
+                  </a:schemeClr>
+                </a:solidFill>
+                <a:latin typeface="メイリオ" panose="020B0604030504040204" pitchFamily="50" charset="-128"/>
+                <a:ea typeface="メイリオ" panose="020B0604030504040204" pitchFamily="50" charset="-128"/>
+              </a:rPr>
+              <a:t>スロットマシンの</a:t>
+            </a:r>
+            <a:r>
+              <a:rPr kumimoji="1" lang="ja-JP" altLang="en-US" sz="2000" dirty="0">
+                <a:solidFill>
+                  <a:schemeClr val="accent4">
+                    <a:lumMod val="75000"/>
+                  </a:schemeClr>
+                </a:solidFill>
+                <a:latin typeface="メイリオ" panose="020B0604030504040204" pitchFamily="50" charset="-128"/>
+                <a:ea typeface="メイリオ" panose="020B0604030504040204" pitchFamily="50" charset="-128"/>
+              </a:rPr>
+              <a:t>期待値を求める</a:t>
+            </a:r>
+            <a:endParaRPr kumimoji="1" lang="en-US" altLang="ja-JP" sz="2000" dirty="0">
+              <a:solidFill>
+                <a:schemeClr val="accent4">
+                  <a:lumMod val="75000"/>
+                </a:schemeClr>
+              </a:solidFill>
+              <a:latin typeface="メイリオ" panose="020B0604030504040204" pitchFamily="50" charset="-128"/>
+              <a:ea typeface="メイリオ" panose="020B0604030504040204" pitchFamily="50" charset="-128"/>
+            </a:endParaRPr>
+          </a:p>
+          <a:p>
+            <a:pPr algn="l"/>
+            <a:r>
+              <a:rPr lang="en-US" altLang="ja-JP" sz="2000" dirty="0">
+                <a:solidFill>
+                  <a:schemeClr val="accent4">
+                    <a:lumMod val="75000"/>
+                  </a:schemeClr>
+                </a:solidFill>
+                <a:latin typeface="メイリオ" panose="020B0604030504040204" pitchFamily="50" charset="-128"/>
+                <a:ea typeface="メイリオ" panose="020B0604030504040204" pitchFamily="50" charset="-128"/>
+              </a:rPr>
+              <a:t>##</a:t>
+            </a:r>
+            <a:r>
+              <a:rPr lang="ja-JP" altLang="en-US" sz="2000" dirty="0">
+                <a:solidFill>
+                  <a:schemeClr val="accent4">
+                    <a:lumMod val="75000"/>
+                  </a:schemeClr>
+                </a:solidFill>
+                <a:latin typeface="メイリオ" panose="020B0604030504040204" pitchFamily="50" charset="-128"/>
+                <a:ea typeface="メイリオ" panose="020B0604030504040204" pitchFamily="50" charset="-128"/>
+              </a:rPr>
+              <a:t>スロットマシンのリストを作る</a:t>
+            </a:r>
+            <a:endParaRPr lang="en-US" altLang="ja-JP" sz="2000" dirty="0">
+              <a:solidFill>
+                <a:schemeClr val="accent4">
+                  <a:lumMod val="75000"/>
+                </a:schemeClr>
+              </a:solidFill>
+              <a:latin typeface="メイリオ" panose="020B0604030504040204" pitchFamily="50" charset="-128"/>
+              <a:ea typeface="メイリオ" panose="020B0604030504040204" pitchFamily="50" charset="-128"/>
+            </a:endParaRPr>
+          </a:p>
+          <a:p>
+            <a:pPr algn="l"/>
+            <a:r>
+              <a:rPr lang="ja-JP" altLang="en-US" sz="1200" dirty="0">
+                <a:latin typeface="メイリオ" panose="020B0604030504040204" pitchFamily="50" charset="-128"/>
+                <a:ea typeface="メイリオ" panose="020B0604030504040204" pitchFamily="50" charset="-128"/>
+              </a:rPr>
+              <a:t>実行内容：</a:t>
+            </a:r>
+            <a:r>
+              <a:rPr lang="en-US" altLang="ja-JP" sz="1200" dirty="0" err="1">
+                <a:latin typeface="メイリオ" panose="020B0604030504040204" pitchFamily="50" charset="-128"/>
+                <a:ea typeface="メイリオ" panose="020B0604030504040204" pitchFamily="50" charset="-128"/>
+              </a:rPr>
+              <a:t>expand.grid</a:t>
+            </a:r>
+            <a:r>
+              <a:rPr lang="ja-JP" altLang="en-US" sz="1200" dirty="0">
+                <a:latin typeface="メイリオ" panose="020B0604030504040204" pitchFamily="50" charset="-128"/>
+                <a:ea typeface="メイリオ" panose="020B0604030504040204" pitchFamily="50" charset="-128"/>
+              </a:rPr>
+              <a:t>を使って３つの組み合わせのリストを作る</a:t>
+            </a:r>
+            <a:endParaRPr lang="en-US" altLang="ja-JP" sz="1200" dirty="0">
+              <a:latin typeface="メイリオ" panose="020B0604030504040204" pitchFamily="50" charset="-128"/>
+              <a:ea typeface="メイリオ" panose="020B0604030504040204" pitchFamily="50" charset="-128"/>
+            </a:endParaRPr>
+          </a:p>
+          <a:p>
+            <a:pPr algn="l"/>
+            <a:endParaRPr lang="en-US" altLang="ja-JP" sz="1200" dirty="0">
+              <a:latin typeface="メイリオ" panose="020B0604030504040204" pitchFamily="50" charset="-128"/>
+              <a:ea typeface="メイリオ" panose="020B0604030504040204" pitchFamily="50" charset="-128"/>
+            </a:endParaRPr>
+          </a:p>
+          <a:p>
+            <a:pPr algn="l"/>
+            <a:endParaRPr lang="en-US" altLang="ja-JP" sz="1200" dirty="0">
+              <a:latin typeface="メイリオ" panose="020B0604030504040204" pitchFamily="50" charset="-128"/>
+              <a:ea typeface="メイリオ" panose="020B0604030504040204" pitchFamily="50" charset="-128"/>
+            </a:endParaRPr>
+          </a:p>
+          <a:p>
+            <a:pPr algn="l"/>
+            <a:endParaRPr lang="en-US" altLang="ja-JP" sz="1200" dirty="0">
+              <a:latin typeface="メイリオ" panose="020B0604030504040204" pitchFamily="50" charset="-128"/>
+              <a:ea typeface="メイリオ" panose="020B0604030504040204" pitchFamily="50" charset="-128"/>
+            </a:endParaRPr>
+          </a:p>
+          <a:p>
+            <a:pPr algn="l"/>
+            <a:endParaRPr lang="en-US" altLang="ja-JP" sz="1200" dirty="0">
+              <a:latin typeface="メイリオ" panose="020B0604030504040204" pitchFamily="50" charset="-128"/>
+              <a:ea typeface="メイリオ" panose="020B0604030504040204" pitchFamily="50" charset="-128"/>
+            </a:endParaRPr>
+          </a:p>
+          <a:p>
+            <a:pPr algn="l"/>
+            <a:r>
+              <a:rPr lang="en-US" altLang="ja-JP" sz="2000" dirty="0">
+                <a:solidFill>
+                  <a:schemeClr val="accent4">
+                    <a:lumMod val="75000"/>
+                  </a:schemeClr>
+                </a:solidFill>
+                <a:latin typeface="メイリオ" panose="020B0604030504040204" pitchFamily="50" charset="-128"/>
+                <a:ea typeface="メイリオ" panose="020B0604030504040204" pitchFamily="50" charset="-128"/>
+              </a:rPr>
+              <a:t>##</a:t>
+            </a:r>
+            <a:r>
+              <a:rPr lang="ja-JP" altLang="en-US" sz="2000" dirty="0">
+                <a:solidFill>
+                  <a:schemeClr val="accent4">
+                    <a:lumMod val="75000"/>
+                  </a:schemeClr>
+                </a:solidFill>
+                <a:latin typeface="メイリオ" panose="020B0604030504040204" pitchFamily="50" charset="-128"/>
+                <a:ea typeface="メイリオ" panose="020B0604030504040204" pitchFamily="50" charset="-128"/>
+              </a:rPr>
+              <a:t>確率のルックアップテーブルを作る</a:t>
+            </a:r>
+            <a:endParaRPr lang="en-US" altLang="ja-JP" sz="2000" dirty="0">
+              <a:solidFill>
+                <a:schemeClr val="accent4">
+                  <a:lumMod val="75000"/>
+                </a:schemeClr>
+              </a:solidFill>
+              <a:latin typeface="メイリオ" panose="020B0604030504040204" pitchFamily="50" charset="-128"/>
+              <a:ea typeface="メイリオ" panose="020B0604030504040204" pitchFamily="50" charset="-128"/>
+            </a:endParaRPr>
+          </a:p>
+          <a:p>
+            <a:pPr algn="l"/>
+            <a:endParaRPr lang="en-US" altLang="ja-JP" sz="1200" dirty="0">
+              <a:latin typeface="メイリオ" panose="020B0604030504040204" pitchFamily="50" charset="-128"/>
+              <a:ea typeface="メイリオ" panose="020B0604030504040204" pitchFamily="50" charset="-128"/>
+            </a:endParaRPr>
+          </a:p>
+          <a:p>
+            <a:pPr algn="l"/>
+            <a:endParaRPr lang="en-US" altLang="ja-JP" sz="1200" dirty="0">
+              <a:latin typeface="メイリオ" panose="020B0604030504040204" pitchFamily="50" charset="-128"/>
+              <a:ea typeface="メイリオ" panose="020B0604030504040204" pitchFamily="50" charset="-128"/>
+            </a:endParaRPr>
+          </a:p>
+          <a:p>
+            <a:pPr algn="l"/>
+            <a:r>
+              <a:rPr lang="en-US" altLang="ja-JP" sz="2000" dirty="0">
+                <a:solidFill>
+                  <a:schemeClr val="accent4">
+                    <a:lumMod val="75000"/>
+                  </a:schemeClr>
+                </a:solidFill>
+                <a:latin typeface="メイリオ" panose="020B0604030504040204" pitchFamily="50" charset="-128"/>
+                <a:ea typeface="メイリオ" panose="020B0604030504040204" pitchFamily="50" charset="-128"/>
+              </a:rPr>
+              <a:t>##</a:t>
+            </a:r>
+            <a:r>
+              <a:rPr lang="ja-JP" altLang="en-US" sz="2000" dirty="0">
+                <a:solidFill>
+                  <a:schemeClr val="accent4">
+                    <a:lumMod val="75000"/>
+                  </a:schemeClr>
+                </a:solidFill>
+                <a:latin typeface="メイリオ" panose="020B0604030504040204" pitchFamily="50" charset="-128"/>
+                <a:ea typeface="メイリオ" panose="020B0604030504040204" pitchFamily="50" charset="-128"/>
+              </a:rPr>
+              <a:t>それぞれの確率を追加する</a:t>
+            </a:r>
+            <a:endParaRPr lang="en-US" altLang="ja-JP" sz="2000" dirty="0">
+              <a:solidFill>
+                <a:schemeClr val="accent4">
+                  <a:lumMod val="75000"/>
+                </a:schemeClr>
+              </a:solidFill>
+              <a:latin typeface="メイリオ" panose="020B0604030504040204" pitchFamily="50" charset="-128"/>
+              <a:ea typeface="メイリオ" panose="020B0604030504040204" pitchFamily="50" charset="-128"/>
+            </a:endParaRPr>
+          </a:p>
+          <a:p>
+            <a:pPr algn="l"/>
+            <a:endParaRPr lang="en-US" altLang="ja-JP" sz="1200" dirty="0">
+              <a:latin typeface="メイリオ" panose="020B0604030504040204" pitchFamily="50" charset="-128"/>
+              <a:ea typeface="メイリオ" panose="020B0604030504040204" pitchFamily="50" charset="-128"/>
+            </a:endParaRPr>
+          </a:p>
+        </p:txBody>
+      </p:sp>
+      <p:cxnSp>
+        <p:nvCxnSpPr>
+          <p:cNvPr id="13" name="直線矢印コネクタ 12">
+            <a:extLst>
+              <a:ext uri="{FF2B5EF4-FFF2-40B4-BE49-F238E27FC236}">
+                <a16:creationId xmlns:a16="http://schemas.microsoft.com/office/drawing/2014/main" id="{74FF8975-518B-E7D8-023D-CCCCAEBC6F95}"/>
+              </a:ext>
+            </a:extLst>
+          </p:cNvPr>
+          <p:cNvCxnSpPr>
+            <a:cxnSpLocks/>
+          </p:cNvCxnSpPr>
+          <p:nvPr/>
+        </p:nvCxnSpPr>
+        <p:spPr>
+          <a:xfrm>
+            <a:off x="4522993" y="677003"/>
+            <a:ext cx="581891" cy="0"/>
+          </a:xfrm>
+          <a:prstGeom prst="straightConnector1">
+            <a:avLst/>
+          </a:prstGeom>
+          <a:ln w="57150">
+            <a:solidFill>
+              <a:schemeClr val="accent4">
+                <a:lumMod val="75000"/>
+              </a:schemeClr>
+            </a:solidFill>
+            <a:tailEnd type="triangle"/>
+          </a:ln>
+        </p:spPr>
+        <p:style>
+          <a:lnRef idx="1">
+            <a:schemeClr val="accent1"/>
+          </a:lnRef>
+          <a:fillRef idx="0">
+            <a:schemeClr val="accent1"/>
+          </a:fillRef>
+          <a:effectRef idx="0">
+            <a:schemeClr val="accent1"/>
+          </a:effectRef>
+          <a:fontRef idx="minor">
+            <a:schemeClr val="tx1"/>
+          </a:fontRef>
+        </p:style>
+      </p:cxnSp>
+      <p:sp>
+        <p:nvSpPr>
+          <p:cNvPr id="7" name="正方形/長方形 6">
+            <a:extLst>
+              <a:ext uri="{FF2B5EF4-FFF2-40B4-BE49-F238E27FC236}">
+                <a16:creationId xmlns:a16="http://schemas.microsoft.com/office/drawing/2014/main" id="{E325EE49-CC21-FA2A-9628-F197D866B664}"/>
               </a:ext>
             </a:extLst>
           </p:cNvPr>
@@ -4385,7 +6762,1244 @@
         </p:nvSpPr>
         <p:spPr>
           <a:xfrm>
-            <a:off x="8561647" y="1263081"/>
+            <a:off x="8210455" y="1014608"/>
+            <a:ext cx="2391170" cy="3951092"/>
+          </a:xfrm>
+          <a:prstGeom prst="rect">
+            <a:avLst/>
+          </a:prstGeom>
+          <a:solidFill>
+            <a:schemeClr val="accent2">
+              <a:lumMod val="40000"/>
+              <a:lumOff val="60000"/>
+            </a:schemeClr>
+          </a:solidFill>
+          <a:ln>
+            <a:noFill/>
+          </a:ln>
+        </p:spPr>
+        <p:style>
+          <a:lnRef idx="2">
+            <a:schemeClr val="accent1">
+              <a:shade val="15000"/>
+            </a:schemeClr>
+          </a:lnRef>
+          <a:fillRef idx="1">
+            <a:schemeClr val="accent1"/>
+          </a:fillRef>
+          <a:effectRef idx="0">
+            <a:schemeClr val="accent1"/>
+          </a:effectRef>
+          <a:fontRef idx="minor">
+            <a:schemeClr val="lt1"/>
+          </a:fontRef>
+        </p:style>
+        <p:txBody>
+          <a:bodyPr rtlCol="0" anchor="t"/>
+          <a:lstStyle/>
+          <a:p>
+            <a:r>
+              <a:rPr lang="en-US" altLang="ja-JP" sz="1200" dirty="0" err="1">
+                <a:solidFill>
+                  <a:schemeClr val="tx1"/>
+                </a:solidFill>
+              </a:rPr>
+              <a:t>stringsAsFactors</a:t>
+            </a:r>
+            <a:r>
+              <a:rPr lang="en-US" altLang="ja-JP" sz="1200" dirty="0">
+                <a:solidFill>
+                  <a:schemeClr val="tx1"/>
+                </a:solidFill>
+              </a:rPr>
+              <a:t> = FALSE</a:t>
+            </a:r>
+          </a:p>
+          <a:p>
+            <a:endParaRPr lang="en-US" altLang="ja-JP" sz="1200" dirty="0">
+              <a:solidFill>
+                <a:schemeClr val="tx1"/>
+              </a:solidFill>
+            </a:endParaRPr>
+          </a:p>
+          <a:p>
+            <a:r>
+              <a:rPr lang="en-US" altLang="ja-JP" sz="1200" dirty="0">
+                <a:solidFill>
+                  <a:schemeClr val="tx1"/>
+                </a:solidFill>
+              </a:rPr>
+              <a:t>https://nakazakimasahito.wordpress.com/2020/06/01/r-stringsasfactors-false%E3%81%AB%E3%81%A4%E3%81%84%E3%81%A6%E3%80%80/</a:t>
+            </a:r>
+            <a:endParaRPr lang="en-US" altLang="ja-JP" sz="1050" dirty="0">
+              <a:solidFill>
+                <a:schemeClr val="tx1"/>
+              </a:solidFill>
+            </a:endParaRPr>
+          </a:p>
+        </p:txBody>
+      </p:sp>
+      <p:pic>
+        <p:nvPicPr>
+          <p:cNvPr id="17" name="図 16">
+            <a:extLst>
+              <a:ext uri="{FF2B5EF4-FFF2-40B4-BE49-F238E27FC236}">
+                <a16:creationId xmlns:a16="http://schemas.microsoft.com/office/drawing/2014/main" id="{E54533DD-62F6-CB97-1E4D-863931614F59}"/>
+              </a:ext>
+            </a:extLst>
+          </p:cNvPr>
+          <p:cNvPicPr>
+            <a:picLocks noChangeAspect="1"/>
+          </p:cNvPicPr>
+          <p:nvPr/>
+        </p:nvPicPr>
+        <p:blipFill>
+          <a:blip r:embed="rId2"/>
+          <a:stretch>
+            <a:fillRect/>
+          </a:stretch>
+        </p:blipFill>
+        <p:spPr>
+          <a:xfrm>
+            <a:off x="969179" y="3790553"/>
+            <a:ext cx="7421011" cy="314369"/>
+          </a:xfrm>
+          <a:prstGeom prst="rect">
+            <a:avLst/>
+          </a:prstGeom>
+        </p:spPr>
+      </p:pic>
+      <p:pic>
+        <p:nvPicPr>
+          <p:cNvPr id="19" name="図 18">
+            <a:extLst>
+              <a:ext uri="{FF2B5EF4-FFF2-40B4-BE49-F238E27FC236}">
+                <a16:creationId xmlns:a16="http://schemas.microsoft.com/office/drawing/2014/main" id="{52B92D81-993D-8414-49B8-57B484E9FA5E}"/>
+              </a:ext>
+            </a:extLst>
+          </p:cNvPr>
+          <p:cNvPicPr>
+            <a:picLocks noChangeAspect="1"/>
+          </p:cNvPicPr>
+          <p:nvPr/>
+        </p:nvPicPr>
+        <p:blipFill>
+          <a:blip r:embed="rId3"/>
+          <a:stretch>
+            <a:fillRect/>
+          </a:stretch>
+        </p:blipFill>
+        <p:spPr>
+          <a:xfrm>
+            <a:off x="969179" y="4725370"/>
+            <a:ext cx="3200847" cy="743054"/>
+          </a:xfrm>
+          <a:prstGeom prst="rect">
+            <a:avLst/>
+          </a:prstGeom>
+        </p:spPr>
+      </p:pic>
+      <p:pic>
+        <p:nvPicPr>
+          <p:cNvPr id="23" name="図 22">
+            <a:extLst>
+              <a:ext uri="{FF2B5EF4-FFF2-40B4-BE49-F238E27FC236}">
+                <a16:creationId xmlns:a16="http://schemas.microsoft.com/office/drawing/2014/main" id="{04C06689-A0F7-4E54-4F6F-1E8E8DAC27BE}"/>
+              </a:ext>
+            </a:extLst>
+          </p:cNvPr>
+          <p:cNvPicPr>
+            <a:picLocks noChangeAspect="1"/>
+          </p:cNvPicPr>
+          <p:nvPr/>
+        </p:nvPicPr>
+        <p:blipFill>
+          <a:blip r:embed="rId4"/>
+          <a:stretch>
+            <a:fillRect/>
+          </a:stretch>
+        </p:blipFill>
+        <p:spPr>
+          <a:xfrm>
+            <a:off x="954171" y="2306583"/>
+            <a:ext cx="5039428" cy="838317"/>
+          </a:xfrm>
+          <a:prstGeom prst="rect">
+            <a:avLst/>
+          </a:prstGeom>
+        </p:spPr>
+      </p:pic>
+      <p:pic>
+        <p:nvPicPr>
+          <p:cNvPr id="27" name="図 26">
+            <a:extLst>
+              <a:ext uri="{FF2B5EF4-FFF2-40B4-BE49-F238E27FC236}">
+                <a16:creationId xmlns:a16="http://schemas.microsoft.com/office/drawing/2014/main" id="{27A4ED25-3A06-AD1A-6CE7-6F0BE3404FA6}"/>
+              </a:ext>
+            </a:extLst>
+          </p:cNvPr>
+          <p:cNvPicPr>
+            <a:picLocks noChangeAspect="1"/>
+          </p:cNvPicPr>
+          <p:nvPr/>
+        </p:nvPicPr>
+        <p:blipFill>
+          <a:blip r:embed="rId5"/>
+          <a:stretch>
+            <a:fillRect/>
+          </a:stretch>
+        </p:blipFill>
+        <p:spPr>
+          <a:xfrm>
+            <a:off x="5167583" y="4750575"/>
+            <a:ext cx="2695951" cy="762106"/>
+          </a:xfrm>
+          <a:prstGeom prst="rect">
+            <a:avLst/>
+          </a:prstGeom>
+        </p:spPr>
+      </p:pic>
+      <p:pic>
+        <p:nvPicPr>
+          <p:cNvPr id="29" name="図 28">
+            <a:extLst>
+              <a:ext uri="{FF2B5EF4-FFF2-40B4-BE49-F238E27FC236}">
+                <a16:creationId xmlns:a16="http://schemas.microsoft.com/office/drawing/2014/main" id="{F4E1C010-FA1E-8AD6-1807-55C5A1C3F3BA}"/>
+              </a:ext>
+            </a:extLst>
+          </p:cNvPr>
+          <p:cNvPicPr>
+            <a:picLocks noChangeAspect="1"/>
+          </p:cNvPicPr>
+          <p:nvPr/>
+        </p:nvPicPr>
+        <p:blipFill>
+          <a:blip r:embed="rId6"/>
+          <a:stretch>
+            <a:fillRect/>
+          </a:stretch>
+        </p:blipFill>
+        <p:spPr>
+          <a:xfrm>
+            <a:off x="6719187" y="2294157"/>
+            <a:ext cx="1314633" cy="838317"/>
+          </a:xfrm>
+          <a:prstGeom prst="rect">
+            <a:avLst/>
+          </a:prstGeom>
+        </p:spPr>
+      </p:pic>
+      <p:sp>
+        <p:nvSpPr>
+          <p:cNvPr id="30" name="楕円 29">
+            <a:extLst>
+              <a:ext uri="{FF2B5EF4-FFF2-40B4-BE49-F238E27FC236}">
+                <a16:creationId xmlns:a16="http://schemas.microsoft.com/office/drawing/2014/main" id="{2E718A86-7618-47AE-D950-428871DB5AE2}"/>
+              </a:ext>
+            </a:extLst>
+          </p:cNvPr>
+          <p:cNvSpPr/>
+          <p:nvPr/>
+        </p:nvSpPr>
+        <p:spPr>
+          <a:xfrm>
+            <a:off x="4813938" y="1606422"/>
+            <a:ext cx="206220" cy="232109"/>
+          </a:xfrm>
+          <a:prstGeom prst="ellipse">
+            <a:avLst/>
+          </a:prstGeom>
+          <a:solidFill>
+            <a:schemeClr val="accent4">
+              <a:lumMod val="75000"/>
+            </a:schemeClr>
+          </a:solidFill>
+          <a:ln>
+            <a:noFill/>
+          </a:ln>
+        </p:spPr>
+        <p:style>
+          <a:lnRef idx="2">
+            <a:schemeClr val="accent1">
+              <a:shade val="15000"/>
+            </a:schemeClr>
+          </a:lnRef>
+          <a:fillRef idx="1">
+            <a:schemeClr val="accent1"/>
+          </a:fillRef>
+          <a:effectRef idx="0">
+            <a:schemeClr val="accent1"/>
+          </a:effectRef>
+          <a:fontRef idx="minor">
+            <a:schemeClr val="lt1"/>
+          </a:fontRef>
+        </p:style>
+        <p:txBody>
+          <a:bodyPr tIns="90000" rtlCol="0" anchor="ctr"/>
+          <a:lstStyle/>
+          <a:p>
+            <a:pPr algn="ctr"/>
+            <a:r>
+              <a:rPr kumimoji="1" lang="ja-JP" altLang="en-US" dirty="0">
+                <a:latin typeface="メイリオ" panose="020B0604030504040204" pitchFamily="50" charset="-128"/>
+                <a:ea typeface="メイリオ" panose="020B0604030504040204" pitchFamily="50" charset="-128"/>
+              </a:rPr>
+              <a:t>１</a:t>
+            </a:r>
+          </a:p>
+        </p:txBody>
+      </p:sp>
+      <p:sp>
+        <p:nvSpPr>
+          <p:cNvPr id="31" name="楕円 30">
+            <a:extLst>
+              <a:ext uri="{FF2B5EF4-FFF2-40B4-BE49-F238E27FC236}">
+                <a16:creationId xmlns:a16="http://schemas.microsoft.com/office/drawing/2014/main" id="{6B6C97F1-BE62-D3FE-5FE8-D0778B7FF8C0}"/>
+              </a:ext>
+            </a:extLst>
+          </p:cNvPr>
+          <p:cNvSpPr/>
+          <p:nvPr/>
+        </p:nvSpPr>
+        <p:spPr>
+          <a:xfrm>
+            <a:off x="5275191" y="3404792"/>
+            <a:ext cx="206220" cy="232109"/>
+          </a:xfrm>
+          <a:prstGeom prst="ellipse">
+            <a:avLst/>
+          </a:prstGeom>
+          <a:solidFill>
+            <a:schemeClr val="accent4">
+              <a:lumMod val="75000"/>
+            </a:schemeClr>
+          </a:solidFill>
+          <a:ln>
+            <a:noFill/>
+          </a:ln>
+        </p:spPr>
+        <p:style>
+          <a:lnRef idx="2">
+            <a:schemeClr val="accent1">
+              <a:shade val="15000"/>
+            </a:schemeClr>
+          </a:lnRef>
+          <a:fillRef idx="1">
+            <a:schemeClr val="accent1"/>
+          </a:fillRef>
+          <a:effectRef idx="0">
+            <a:schemeClr val="accent1"/>
+          </a:effectRef>
+          <a:fontRef idx="minor">
+            <a:schemeClr val="lt1"/>
+          </a:fontRef>
+        </p:style>
+        <p:txBody>
+          <a:bodyPr tIns="90000" rtlCol="0" anchor="ctr"/>
+          <a:lstStyle/>
+          <a:p>
+            <a:pPr algn="ctr"/>
+            <a:r>
+              <a:rPr lang="en-US" altLang="ja-JP" dirty="0">
+                <a:latin typeface="メイリオ" panose="020B0604030504040204" pitchFamily="50" charset="-128"/>
+                <a:ea typeface="メイリオ" panose="020B0604030504040204" pitchFamily="50" charset="-128"/>
+              </a:rPr>
+              <a:t>2</a:t>
+            </a:r>
+            <a:endParaRPr kumimoji="1" lang="ja-JP" altLang="en-US" dirty="0">
+              <a:latin typeface="メイリオ" panose="020B0604030504040204" pitchFamily="50" charset="-128"/>
+              <a:ea typeface="メイリオ" panose="020B0604030504040204" pitchFamily="50" charset="-128"/>
+            </a:endParaRPr>
+          </a:p>
+        </p:txBody>
+      </p:sp>
+      <p:sp>
+        <p:nvSpPr>
+          <p:cNvPr id="32" name="楕円 31">
+            <a:extLst>
+              <a:ext uri="{FF2B5EF4-FFF2-40B4-BE49-F238E27FC236}">
+                <a16:creationId xmlns:a16="http://schemas.microsoft.com/office/drawing/2014/main" id="{248E5353-0E3F-A56E-D541-FA0B63C2717E}"/>
+              </a:ext>
+            </a:extLst>
+          </p:cNvPr>
+          <p:cNvSpPr/>
+          <p:nvPr/>
+        </p:nvSpPr>
+        <p:spPr>
+          <a:xfrm>
+            <a:off x="4419883" y="4479336"/>
+            <a:ext cx="206220" cy="232109"/>
+          </a:xfrm>
+          <a:prstGeom prst="ellipse">
+            <a:avLst/>
+          </a:prstGeom>
+          <a:solidFill>
+            <a:schemeClr val="accent4">
+              <a:lumMod val="75000"/>
+            </a:schemeClr>
+          </a:solidFill>
+          <a:ln>
+            <a:noFill/>
+          </a:ln>
+        </p:spPr>
+        <p:style>
+          <a:lnRef idx="2">
+            <a:schemeClr val="accent1">
+              <a:shade val="15000"/>
+            </a:schemeClr>
+          </a:lnRef>
+          <a:fillRef idx="1">
+            <a:schemeClr val="accent1"/>
+          </a:fillRef>
+          <a:effectRef idx="0">
+            <a:schemeClr val="accent1"/>
+          </a:effectRef>
+          <a:fontRef idx="minor">
+            <a:schemeClr val="lt1"/>
+          </a:fontRef>
+        </p:style>
+        <p:txBody>
+          <a:bodyPr tIns="90000" rtlCol="0" anchor="ctr"/>
+          <a:lstStyle/>
+          <a:p>
+            <a:pPr algn="ctr"/>
+            <a:r>
+              <a:rPr lang="en-US" altLang="ja-JP" dirty="0">
+                <a:latin typeface="メイリオ" panose="020B0604030504040204" pitchFamily="50" charset="-128"/>
+                <a:ea typeface="メイリオ" panose="020B0604030504040204" pitchFamily="50" charset="-128"/>
+              </a:rPr>
+              <a:t>2</a:t>
+            </a:r>
+            <a:endParaRPr kumimoji="1" lang="ja-JP" altLang="en-US" dirty="0">
+              <a:latin typeface="メイリオ" panose="020B0604030504040204" pitchFamily="50" charset="-128"/>
+              <a:ea typeface="メイリオ" panose="020B0604030504040204" pitchFamily="50" charset="-128"/>
+            </a:endParaRPr>
+          </a:p>
+        </p:txBody>
+      </p:sp>
+    </p:spTree>
+    <p:extLst>
+      <p:ext uri="{BB962C8B-B14F-4D97-AF65-F5344CB8AC3E}">
+        <p14:creationId xmlns:p14="http://schemas.microsoft.com/office/powerpoint/2010/main" val="3352556298"/>
+      </p:ext>
+    </p:extLst>
+  </p:cSld>
+  <p:clrMapOvr>
+    <a:masterClrMapping/>
+  </p:clrMapOvr>
+</p:sld>
+</file>
+
+<file path=ppt/slides/slide14.xml><?xml version="1.0" encoding="utf-8"?>
+<p:sld xmlns:a="http://schemas.openxmlformats.org/drawingml/2006/main" xmlns:r="http://schemas.openxmlformats.org/officeDocument/2006/relationships" xmlns:p="http://schemas.openxmlformats.org/presentationml/2006/main">
+  <p:cSld>
+    <p:spTree>
+      <p:nvGrpSpPr>
+        <p:cNvPr id="1" name=""/>
+        <p:cNvGrpSpPr/>
+        <p:nvPr/>
+      </p:nvGrpSpPr>
+      <p:grpSpPr>
+        <a:xfrm>
+          <a:off x="0" y="0"/>
+          <a:ext cx="0" cy="0"/>
+          <a:chOff x="0" y="0"/>
+          <a:chExt cx="0" cy="0"/>
+        </a:xfrm>
+      </p:grpSpPr>
+      <p:sp>
+        <p:nvSpPr>
+          <p:cNvPr id="2" name="タイトル 1">
+            <a:extLst>
+              <a:ext uri="{FF2B5EF4-FFF2-40B4-BE49-F238E27FC236}">
+                <a16:creationId xmlns:a16="http://schemas.microsoft.com/office/drawing/2014/main" id="{8F92D15D-6ED6-F1E2-415D-C5D0D0CAAC83}"/>
+              </a:ext>
+            </a:extLst>
+          </p:cNvPr>
+          <p:cNvSpPr>
+            <a:spLocks noGrp="1"/>
+          </p:cNvSpPr>
+          <p:nvPr>
+            <p:ph type="ctrTitle"/>
+          </p:nvPr>
+        </p:nvSpPr>
+        <p:spPr>
+          <a:xfrm>
+            <a:off x="528181" y="314435"/>
+            <a:ext cx="5891408" cy="700173"/>
+          </a:xfrm>
+        </p:spPr>
+        <p:txBody>
+          <a:bodyPr>
+            <a:normAutofit/>
+          </a:bodyPr>
+          <a:lstStyle/>
+          <a:p>
+            <a:pPr algn="l"/>
+            <a:r>
+              <a:rPr kumimoji="1" lang="ja-JP" altLang="en-US" sz="3000" b="1" dirty="0">
+                <a:solidFill>
+                  <a:schemeClr val="tx1">
+                    <a:lumMod val="65000"/>
+                    <a:lumOff val="35000"/>
+                  </a:schemeClr>
+                </a:solidFill>
+                <a:latin typeface="メイリオ" panose="020B0604030504040204" pitchFamily="50" charset="-128"/>
+                <a:ea typeface="メイリオ" panose="020B0604030504040204" pitchFamily="50" charset="-128"/>
+              </a:rPr>
+              <a:t>９章　ループ</a:t>
+            </a:r>
+          </a:p>
+        </p:txBody>
+      </p:sp>
+      <p:sp>
+        <p:nvSpPr>
+          <p:cNvPr id="4" name="正方形/長方形 3">
+            <a:extLst>
+              <a:ext uri="{FF2B5EF4-FFF2-40B4-BE49-F238E27FC236}">
+                <a16:creationId xmlns:a16="http://schemas.microsoft.com/office/drawing/2014/main" id="{578782C7-6070-7C3A-DAB7-3101F4C6ED5C}"/>
+              </a:ext>
+            </a:extLst>
+          </p:cNvPr>
+          <p:cNvSpPr/>
+          <p:nvPr/>
+        </p:nvSpPr>
+        <p:spPr>
+          <a:xfrm>
+            <a:off x="388481" y="1060961"/>
+            <a:ext cx="10540261" cy="5528957"/>
+          </a:xfrm>
+          <a:prstGeom prst="rect">
+            <a:avLst/>
+          </a:prstGeom>
+          <a:solidFill>
+            <a:schemeClr val="accent4">
+              <a:lumMod val="20000"/>
+              <a:lumOff val="80000"/>
+            </a:schemeClr>
+          </a:solidFill>
+          <a:ln>
+            <a:noFill/>
+          </a:ln>
+        </p:spPr>
+        <p:style>
+          <a:lnRef idx="2">
+            <a:schemeClr val="accent1">
+              <a:shade val="15000"/>
+            </a:schemeClr>
+          </a:lnRef>
+          <a:fillRef idx="1">
+            <a:schemeClr val="accent1"/>
+          </a:fillRef>
+          <a:effectRef idx="0">
+            <a:schemeClr val="accent1"/>
+          </a:effectRef>
+          <a:fontRef idx="minor">
+            <a:schemeClr val="lt1"/>
+          </a:fontRef>
+        </p:style>
+        <p:txBody>
+          <a:bodyPr rtlCol="0" anchor="t"/>
+          <a:lstStyle/>
+          <a:p>
+            <a:endParaRPr kumimoji="1" lang="ja-JP" altLang="en-US" dirty="0"/>
+          </a:p>
+        </p:txBody>
+      </p:sp>
+      <p:sp>
+        <p:nvSpPr>
+          <p:cNvPr id="3" name="字幕 2">
+            <a:extLst>
+              <a:ext uri="{FF2B5EF4-FFF2-40B4-BE49-F238E27FC236}">
+                <a16:creationId xmlns:a16="http://schemas.microsoft.com/office/drawing/2014/main" id="{EF422FEA-2F34-70ED-56A9-01A65A2AD142}"/>
+              </a:ext>
+            </a:extLst>
+          </p:cNvPr>
+          <p:cNvSpPr>
+            <a:spLocks noGrp="1"/>
+          </p:cNvSpPr>
+          <p:nvPr>
+            <p:ph type="subTitle" idx="1"/>
+          </p:nvPr>
+        </p:nvSpPr>
+        <p:spPr>
+          <a:xfrm>
+            <a:off x="682560" y="1143635"/>
+            <a:ext cx="9391483" cy="5446283"/>
+          </a:xfrm>
+        </p:spPr>
+        <p:txBody>
+          <a:bodyPr>
+            <a:normAutofit/>
+          </a:bodyPr>
+          <a:lstStyle/>
+          <a:p>
+            <a:pPr algn="l"/>
+            <a:endParaRPr lang="en-US" altLang="ja-JP" sz="1200" dirty="0">
+              <a:latin typeface="メイリオ" panose="020B0604030504040204" pitchFamily="50" charset="-128"/>
+              <a:ea typeface="メイリオ" panose="020B0604030504040204" pitchFamily="50" charset="-128"/>
+            </a:endParaRPr>
+          </a:p>
+        </p:txBody>
+      </p:sp>
+      <p:cxnSp>
+        <p:nvCxnSpPr>
+          <p:cNvPr id="13" name="直線矢印コネクタ 12">
+            <a:extLst>
+              <a:ext uri="{FF2B5EF4-FFF2-40B4-BE49-F238E27FC236}">
+                <a16:creationId xmlns:a16="http://schemas.microsoft.com/office/drawing/2014/main" id="{74FF8975-518B-E7D8-023D-CCCCAEBC6F95}"/>
+              </a:ext>
+            </a:extLst>
+          </p:cNvPr>
+          <p:cNvCxnSpPr>
+            <a:cxnSpLocks/>
+          </p:cNvCxnSpPr>
+          <p:nvPr/>
+        </p:nvCxnSpPr>
+        <p:spPr>
+          <a:xfrm>
+            <a:off x="4522993" y="677003"/>
+            <a:ext cx="581891" cy="0"/>
+          </a:xfrm>
+          <a:prstGeom prst="straightConnector1">
+            <a:avLst/>
+          </a:prstGeom>
+          <a:ln w="57150">
+            <a:solidFill>
+              <a:schemeClr val="accent4">
+                <a:lumMod val="75000"/>
+              </a:schemeClr>
+            </a:solidFill>
+            <a:tailEnd type="triangle"/>
+          </a:ln>
+        </p:spPr>
+        <p:style>
+          <a:lnRef idx="1">
+            <a:schemeClr val="accent1"/>
+          </a:lnRef>
+          <a:fillRef idx="0">
+            <a:schemeClr val="accent1"/>
+          </a:fillRef>
+          <a:effectRef idx="0">
+            <a:schemeClr val="accent1"/>
+          </a:effectRef>
+          <a:fontRef idx="minor">
+            <a:schemeClr val="tx1"/>
+          </a:fontRef>
+        </p:style>
+      </p:cxnSp>
+      <p:sp>
+        <p:nvSpPr>
+          <p:cNvPr id="7" name="正方形/長方形 6">
+            <a:extLst>
+              <a:ext uri="{FF2B5EF4-FFF2-40B4-BE49-F238E27FC236}">
+                <a16:creationId xmlns:a16="http://schemas.microsoft.com/office/drawing/2014/main" id="{E325EE49-CC21-FA2A-9628-F197D866B664}"/>
+              </a:ext>
+            </a:extLst>
+          </p:cNvPr>
+          <p:cNvSpPr/>
+          <p:nvPr/>
+        </p:nvSpPr>
+        <p:spPr>
+          <a:xfrm>
+            <a:off x="682560" y="1097282"/>
+            <a:ext cx="10246182" cy="5231765"/>
+          </a:xfrm>
+          <a:prstGeom prst="rect">
+            <a:avLst/>
+          </a:prstGeom>
+          <a:solidFill>
+            <a:schemeClr val="accent2">
+              <a:lumMod val="40000"/>
+              <a:lumOff val="60000"/>
+            </a:schemeClr>
+          </a:solidFill>
+          <a:ln>
+            <a:noFill/>
+          </a:ln>
+        </p:spPr>
+        <p:style>
+          <a:lnRef idx="2">
+            <a:schemeClr val="accent1">
+              <a:shade val="15000"/>
+            </a:schemeClr>
+          </a:lnRef>
+          <a:fillRef idx="1">
+            <a:schemeClr val="accent1"/>
+          </a:fillRef>
+          <a:effectRef idx="0">
+            <a:schemeClr val="accent1"/>
+          </a:effectRef>
+          <a:fontRef idx="minor">
+            <a:schemeClr val="lt1"/>
+          </a:fontRef>
+        </p:style>
+        <p:txBody>
+          <a:bodyPr rtlCol="0" anchor="t"/>
+          <a:lstStyle/>
+          <a:p>
+            <a:r>
+              <a:rPr lang="en-US" altLang="ja-JP" sz="1200" dirty="0" err="1">
+                <a:solidFill>
+                  <a:schemeClr val="tx1"/>
+                </a:solidFill>
+              </a:rPr>
+              <a:t>stringsAsFactors</a:t>
+            </a:r>
+            <a:r>
+              <a:rPr lang="en-US" altLang="ja-JP" sz="1200" dirty="0">
+                <a:solidFill>
+                  <a:schemeClr val="tx1"/>
+                </a:solidFill>
+              </a:rPr>
+              <a:t> = FALSE</a:t>
+            </a:r>
+            <a:r>
+              <a:rPr lang="ja-JP" altLang="en-US" sz="1200" dirty="0">
+                <a:solidFill>
+                  <a:schemeClr val="tx1"/>
+                </a:solidFill>
+              </a:rPr>
+              <a:t>　について</a:t>
+            </a:r>
+            <a:endParaRPr lang="en-US" altLang="ja-JP" sz="1200" dirty="0">
+              <a:solidFill>
+                <a:schemeClr val="tx1"/>
+              </a:solidFill>
+            </a:endParaRPr>
+          </a:p>
+          <a:p>
+            <a:endParaRPr lang="en-US" altLang="ja-JP" sz="1200" dirty="0">
+              <a:solidFill>
+                <a:schemeClr val="tx1"/>
+              </a:solidFill>
+            </a:endParaRPr>
+          </a:p>
+          <a:p>
+            <a:r>
+              <a:rPr lang="en-US" altLang="ja-JP" sz="1200" dirty="0">
+                <a:solidFill>
+                  <a:schemeClr val="tx1"/>
+                </a:solidFill>
+              </a:rPr>
+              <a:t>https://nakazakimasahito.wordpress.com/2020/06/01/r-stringsasfactors-false%E3%81%AB%E3%81%A4%E3%81%84%E3%81%A6%E3%80%80/</a:t>
+            </a:r>
+            <a:endParaRPr lang="en-US" altLang="ja-JP" sz="1050" dirty="0">
+              <a:solidFill>
+                <a:schemeClr val="tx1"/>
+              </a:solidFill>
+            </a:endParaRPr>
+          </a:p>
+        </p:txBody>
+      </p:sp>
+    </p:spTree>
+    <p:extLst>
+      <p:ext uri="{BB962C8B-B14F-4D97-AF65-F5344CB8AC3E}">
+        <p14:creationId xmlns:p14="http://schemas.microsoft.com/office/powerpoint/2010/main" val="2156869842"/>
+      </p:ext>
+    </p:extLst>
+  </p:cSld>
+  <p:clrMapOvr>
+    <a:masterClrMapping/>
+  </p:clrMapOvr>
+</p:sld>
+</file>
+
+<file path=ppt/slides/slide15.xml><?xml version="1.0" encoding="utf-8"?>
+<p:sld xmlns:a="http://schemas.openxmlformats.org/drawingml/2006/main" xmlns:r="http://schemas.openxmlformats.org/officeDocument/2006/relationships" xmlns:p="http://schemas.openxmlformats.org/presentationml/2006/main">
+  <p:cSld>
+    <p:spTree>
+      <p:nvGrpSpPr>
+        <p:cNvPr id="1" name=""/>
+        <p:cNvGrpSpPr/>
+        <p:nvPr/>
+      </p:nvGrpSpPr>
+      <p:grpSpPr>
+        <a:xfrm>
+          <a:off x="0" y="0"/>
+          <a:ext cx="0" cy="0"/>
+          <a:chOff x="0" y="0"/>
+          <a:chExt cx="0" cy="0"/>
+        </a:xfrm>
+      </p:grpSpPr>
+      <p:sp>
+        <p:nvSpPr>
+          <p:cNvPr id="2" name="タイトル 1">
+            <a:extLst>
+              <a:ext uri="{FF2B5EF4-FFF2-40B4-BE49-F238E27FC236}">
+                <a16:creationId xmlns:a16="http://schemas.microsoft.com/office/drawing/2014/main" id="{8F92D15D-6ED6-F1E2-415D-C5D0D0CAAC83}"/>
+              </a:ext>
+            </a:extLst>
+          </p:cNvPr>
+          <p:cNvSpPr>
+            <a:spLocks noGrp="1"/>
+          </p:cNvSpPr>
+          <p:nvPr>
+            <p:ph type="ctrTitle"/>
+          </p:nvPr>
+        </p:nvSpPr>
+        <p:spPr>
+          <a:xfrm>
+            <a:off x="528181" y="314435"/>
+            <a:ext cx="5891408" cy="700173"/>
+          </a:xfrm>
+        </p:spPr>
+        <p:txBody>
+          <a:bodyPr>
+            <a:normAutofit/>
+          </a:bodyPr>
+          <a:lstStyle/>
+          <a:p>
+            <a:pPr algn="l"/>
+            <a:r>
+              <a:rPr kumimoji="1" lang="ja-JP" altLang="en-US" sz="3000" b="1" dirty="0">
+                <a:solidFill>
+                  <a:schemeClr val="tx1">
+                    <a:lumMod val="65000"/>
+                    <a:lumOff val="35000"/>
+                  </a:schemeClr>
+                </a:solidFill>
+                <a:latin typeface="メイリオ" panose="020B0604030504040204" pitchFamily="50" charset="-128"/>
+                <a:ea typeface="メイリオ" panose="020B0604030504040204" pitchFamily="50" charset="-128"/>
+              </a:rPr>
+              <a:t>９章　ループ</a:t>
+            </a:r>
+          </a:p>
+        </p:txBody>
+      </p:sp>
+      <p:sp>
+        <p:nvSpPr>
+          <p:cNvPr id="4" name="正方形/長方形 3">
+            <a:extLst>
+              <a:ext uri="{FF2B5EF4-FFF2-40B4-BE49-F238E27FC236}">
+                <a16:creationId xmlns:a16="http://schemas.microsoft.com/office/drawing/2014/main" id="{578782C7-6070-7C3A-DAB7-3101F4C6ED5C}"/>
+              </a:ext>
+            </a:extLst>
+          </p:cNvPr>
+          <p:cNvSpPr/>
+          <p:nvPr/>
+        </p:nvSpPr>
+        <p:spPr>
+          <a:xfrm>
+            <a:off x="682560" y="1060961"/>
+            <a:ext cx="10540261" cy="5528957"/>
+          </a:xfrm>
+          <a:prstGeom prst="rect">
+            <a:avLst/>
+          </a:prstGeom>
+          <a:solidFill>
+            <a:schemeClr val="accent4">
+              <a:lumMod val="20000"/>
+              <a:lumOff val="80000"/>
+            </a:schemeClr>
+          </a:solidFill>
+          <a:ln>
+            <a:noFill/>
+          </a:ln>
+        </p:spPr>
+        <p:style>
+          <a:lnRef idx="2">
+            <a:schemeClr val="accent1">
+              <a:shade val="15000"/>
+            </a:schemeClr>
+          </a:lnRef>
+          <a:fillRef idx="1">
+            <a:schemeClr val="accent1"/>
+          </a:fillRef>
+          <a:effectRef idx="0">
+            <a:schemeClr val="accent1"/>
+          </a:effectRef>
+          <a:fontRef idx="minor">
+            <a:schemeClr val="lt1"/>
+          </a:fontRef>
+        </p:style>
+        <p:txBody>
+          <a:bodyPr rtlCol="0" anchor="t"/>
+          <a:lstStyle/>
+          <a:p>
+            <a:endParaRPr kumimoji="1" lang="ja-JP" altLang="en-US" dirty="0"/>
+          </a:p>
+        </p:txBody>
+      </p:sp>
+      <p:sp>
+        <p:nvSpPr>
+          <p:cNvPr id="3" name="字幕 2">
+            <a:extLst>
+              <a:ext uri="{FF2B5EF4-FFF2-40B4-BE49-F238E27FC236}">
+                <a16:creationId xmlns:a16="http://schemas.microsoft.com/office/drawing/2014/main" id="{EF422FEA-2F34-70ED-56A9-01A65A2AD142}"/>
+              </a:ext>
+            </a:extLst>
+          </p:cNvPr>
+          <p:cNvSpPr>
+            <a:spLocks noGrp="1"/>
+          </p:cNvSpPr>
+          <p:nvPr>
+            <p:ph type="subTitle" idx="1"/>
+          </p:nvPr>
+        </p:nvSpPr>
+        <p:spPr>
+          <a:xfrm>
+            <a:off x="682560" y="1143635"/>
+            <a:ext cx="9391483" cy="5446283"/>
+          </a:xfrm>
+        </p:spPr>
+        <p:txBody>
+          <a:bodyPr>
+            <a:normAutofit/>
+          </a:bodyPr>
+          <a:lstStyle/>
+          <a:p>
+            <a:pPr algn="l"/>
+            <a:r>
+              <a:rPr lang="en-US" altLang="ja-JP" sz="2000" dirty="0">
+                <a:solidFill>
+                  <a:schemeClr val="accent4">
+                    <a:lumMod val="75000"/>
+                  </a:schemeClr>
+                </a:solidFill>
+                <a:latin typeface="メイリオ" panose="020B0604030504040204" pitchFamily="50" charset="-128"/>
+                <a:ea typeface="メイリオ" panose="020B0604030504040204" pitchFamily="50" charset="-128"/>
+              </a:rPr>
+              <a:t>##</a:t>
+            </a:r>
+            <a:r>
+              <a:rPr lang="ja-JP" altLang="en-US" sz="2000" dirty="0">
+                <a:solidFill>
+                  <a:schemeClr val="accent4">
+                    <a:lumMod val="75000"/>
+                  </a:schemeClr>
+                </a:solidFill>
+                <a:latin typeface="メイリオ" panose="020B0604030504040204" pitchFamily="50" charset="-128"/>
+                <a:ea typeface="メイリオ" panose="020B0604030504040204" pitchFamily="50" charset="-128"/>
+              </a:rPr>
+              <a:t>各組の確率を追加する</a:t>
+            </a:r>
+            <a:endParaRPr lang="en-US" altLang="ja-JP" sz="2000" dirty="0">
+              <a:solidFill>
+                <a:schemeClr val="accent4">
+                  <a:lumMod val="75000"/>
+                </a:schemeClr>
+              </a:solidFill>
+              <a:latin typeface="メイリオ" panose="020B0604030504040204" pitchFamily="50" charset="-128"/>
+              <a:ea typeface="メイリオ" panose="020B0604030504040204" pitchFamily="50" charset="-128"/>
+            </a:endParaRPr>
+          </a:p>
+          <a:p>
+            <a:pPr algn="l"/>
+            <a:r>
+              <a:rPr lang="ja-JP" altLang="en-US" sz="1200" dirty="0">
+                <a:latin typeface="メイリオ" panose="020B0604030504040204" pitchFamily="50" charset="-128"/>
+                <a:ea typeface="メイリオ" panose="020B0604030504040204" pitchFamily="50" charset="-128"/>
+              </a:rPr>
+              <a:t>実行内容：</a:t>
+            </a:r>
+            <a:r>
+              <a:rPr lang="en-US" altLang="ja-JP" sz="1200" dirty="0" err="1">
+                <a:latin typeface="メイリオ" panose="020B0604030504040204" pitchFamily="50" charset="-128"/>
+                <a:ea typeface="メイリオ" panose="020B0604030504040204" pitchFamily="50" charset="-128"/>
+              </a:rPr>
+              <a:t>expand.grid</a:t>
+            </a:r>
+            <a:r>
+              <a:rPr lang="ja-JP" altLang="en-US" sz="1200" dirty="0">
+                <a:latin typeface="メイリオ" panose="020B0604030504040204" pitchFamily="50" charset="-128"/>
+                <a:ea typeface="メイリオ" panose="020B0604030504040204" pitchFamily="50" charset="-128"/>
+              </a:rPr>
+              <a:t>を使って３つの組み合わせのリストを作る</a:t>
+            </a:r>
+            <a:endParaRPr lang="en-US" altLang="ja-JP" sz="1200" dirty="0">
+              <a:latin typeface="メイリオ" panose="020B0604030504040204" pitchFamily="50" charset="-128"/>
+              <a:ea typeface="メイリオ" panose="020B0604030504040204" pitchFamily="50" charset="-128"/>
+            </a:endParaRPr>
+          </a:p>
+          <a:p>
+            <a:pPr algn="l"/>
+            <a:endParaRPr lang="en-US" altLang="ja-JP" sz="1200" dirty="0">
+              <a:latin typeface="メイリオ" panose="020B0604030504040204" pitchFamily="50" charset="-128"/>
+              <a:ea typeface="メイリオ" panose="020B0604030504040204" pitchFamily="50" charset="-128"/>
+            </a:endParaRPr>
+          </a:p>
+          <a:p>
+            <a:pPr algn="l"/>
+            <a:endParaRPr lang="en-US" altLang="ja-JP" sz="1200" dirty="0">
+              <a:latin typeface="メイリオ" panose="020B0604030504040204" pitchFamily="50" charset="-128"/>
+              <a:ea typeface="メイリオ" panose="020B0604030504040204" pitchFamily="50" charset="-128"/>
+            </a:endParaRPr>
+          </a:p>
+          <a:p>
+            <a:pPr algn="l"/>
+            <a:endParaRPr lang="en-US" altLang="ja-JP" sz="1200" dirty="0">
+              <a:latin typeface="メイリオ" panose="020B0604030504040204" pitchFamily="50" charset="-128"/>
+              <a:ea typeface="メイリオ" panose="020B0604030504040204" pitchFamily="50" charset="-128"/>
+            </a:endParaRPr>
+          </a:p>
+          <a:p>
+            <a:pPr algn="l"/>
+            <a:r>
+              <a:rPr lang="en-US" altLang="ja-JP" sz="2000" dirty="0">
+                <a:solidFill>
+                  <a:schemeClr val="accent4">
+                    <a:lumMod val="75000"/>
+                  </a:schemeClr>
+                </a:solidFill>
+                <a:latin typeface="メイリオ" panose="020B0604030504040204" pitchFamily="50" charset="-128"/>
+                <a:ea typeface="メイリオ" panose="020B0604030504040204" pitchFamily="50" charset="-128"/>
+              </a:rPr>
+              <a:t>##</a:t>
+            </a:r>
+            <a:r>
+              <a:rPr lang="ja-JP" altLang="en-US" sz="2000" dirty="0">
+                <a:solidFill>
+                  <a:schemeClr val="accent4">
+                    <a:lumMod val="75000"/>
+                  </a:schemeClr>
+                </a:solidFill>
+                <a:latin typeface="メイリオ" panose="020B0604030504040204" pitchFamily="50" charset="-128"/>
+                <a:ea typeface="メイリオ" panose="020B0604030504040204" pitchFamily="50" charset="-128"/>
+              </a:rPr>
+              <a:t>確率の検算</a:t>
+            </a:r>
+            <a:endParaRPr lang="en-US" altLang="ja-JP" sz="1200" dirty="0">
+              <a:latin typeface="メイリオ" panose="020B0604030504040204" pitchFamily="50" charset="-128"/>
+              <a:ea typeface="メイリオ" panose="020B0604030504040204" pitchFamily="50" charset="-128"/>
+            </a:endParaRPr>
+          </a:p>
+          <a:p>
+            <a:pPr algn="l"/>
+            <a:endParaRPr lang="en-US" altLang="ja-JP" sz="1200" dirty="0">
+              <a:latin typeface="メイリオ" panose="020B0604030504040204" pitchFamily="50" charset="-128"/>
+              <a:ea typeface="メイリオ" panose="020B0604030504040204" pitchFamily="50" charset="-128"/>
+            </a:endParaRPr>
+          </a:p>
+          <a:p>
+            <a:pPr algn="l"/>
+            <a:endParaRPr lang="en-US" altLang="ja-JP" sz="1200" dirty="0">
+              <a:latin typeface="メイリオ" panose="020B0604030504040204" pitchFamily="50" charset="-128"/>
+              <a:ea typeface="メイリオ" panose="020B0604030504040204" pitchFamily="50" charset="-128"/>
+            </a:endParaRPr>
+          </a:p>
+          <a:p>
+            <a:pPr algn="l"/>
+            <a:r>
+              <a:rPr lang="en-US" altLang="ja-JP" sz="2000" dirty="0">
+                <a:solidFill>
+                  <a:schemeClr val="accent4">
+                    <a:lumMod val="75000"/>
+                  </a:schemeClr>
+                </a:solidFill>
+                <a:latin typeface="メイリオ" panose="020B0604030504040204" pitchFamily="50" charset="-128"/>
+                <a:ea typeface="メイリオ" panose="020B0604030504040204" pitchFamily="50" charset="-128"/>
+              </a:rPr>
+              <a:t>##</a:t>
+            </a:r>
+            <a:r>
+              <a:rPr lang="ja-JP" altLang="en-US" sz="2000" dirty="0">
+                <a:solidFill>
+                  <a:schemeClr val="accent4">
+                    <a:lumMod val="75000"/>
+                  </a:schemeClr>
+                </a:solidFill>
+                <a:latin typeface="メイリオ" panose="020B0604030504040204" pitchFamily="50" charset="-128"/>
+                <a:ea typeface="メイリオ" panose="020B0604030504040204" pitchFamily="50" charset="-128"/>
+              </a:rPr>
+              <a:t>賞金を代入する</a:t>
+            </a:r>
+            <a:endParaRPr lang="en-US" altLang="ja-JP" sz="2000" dirty="0">
+              <a:solidFill>
+                <a:schemeClr val="accent4">
+                  <a:lumMod val="75000"/>
+                </a:schemeClr>
+              </a:solidFill>
+              <a:latin typeface="メイリオ" panose="020B0604030504040204" pitchFamily="50" charset="-128"/>
+              <a:ea typeface="メイリオ" panose="020B0604030504040204" pitchFamily="50" charset="-128"/>
+            </a:endParaRPr>
+          </a:p>
+          <a:p>
+            <a:pPr algn="l"/>
+            <a:endParaRPr lang="en-US" altLang="ja-JP" sz="2000" dirty="0">
+              <a:solidFill>
+                <a:schemeClr val="accent4">
+                  <a:lumMod val="75000"/>
+                </a:schemeClr>
+              </a:solidFill>
+              <a:latin typeface="メイリオ" panose="020B0604030504040204" pitchFamily="50" charset="-128"/>
+              <a:ea typeface="メイリオ" panose="020B0604030504040204" pitchFamily="50" charset="-128"/>
+            </a:endParaRPr>
+          </a:p>
+          <a:p>
+            <a:pPr algn="l"/>
+            <a:r>
+              <a:rPr lang="ja-JP" altLang="en-US" sz="1200" dirty="0">
+                <a:latin typeface="メイリオ" panose="020B0604030504040204" pitchFamily="50" charset="-128"/>
+                <a:ea typeface="メイリオ" panose="020B0604030504040204" pitchFamily="50" charset="-128"/>
+              </a:rPr>
+              <a:t>実行内容：</a:t>
+            </a:r>
+            <a:r>
+              <a:rPr lang="en-US" altLang="ja-JP" sz="1200" dirty="0">
+                <a:latin typeface="メイリオ" panose="020B0604030504040204" pitchFamily="50" charset="-128"/>
+                <a:ea typeface="メイリオ" panose="020B0604030504040204" pitchFamily="50" charset="-128"/>
+              </a:rPr>
+              <a:t>for</a:t>
+            </a:r>
+            <a:r>
+              <a:rPr lang="ja-JP" altLang="en-US" sz="1200" dirty="0">
+                <a:latin typeface="メイリオ" panose="020B0604030504040204" pitchFamily="50" charset="-128"/>
+                <a:ea typeface="メイリオ" panose="020B0604030504040204" pitchFamily="50" charset="-128"/>
+              </a:rPr>
+              <a:t>文を使って各行の賞金を</a:t>
+            </a:r>
+            <a:r>
+              <a:rPr lang="en-US" altLang="ja-JP" sz="1200" dirty="0">
+                <a:latin typeface="メイリオ" panose="020B0604030504040204" pitchFamily="50" charset="-128"/>
+                <a:ea typeface="メイリオ" panose="020B0604030504040204" pitchFamily="50" charset="-128"/>
+              </a:rPr>
+              <a:t>prize</a:t>
+            </a:r>
+            <a:r>
+              <a:rPr lang="ja-JP" altLang="en-US" sz="1200" dirty="0">
+                <a:latin typeface="メイリオ" panose="020B0604030504040204" pitchFamily="50" charset="-128"/>
+                <a:ea typeface="メイリオ" panose="020B0604030504040204" pitchFamily="50" charset="-128"/>
+              </a:rPr>
+              <a:t>に代入する</a:t>
+            </a:r>
+            <a:endParaRPr lang="en-US" altLang="ja-JP" sz="1200" dirty="0">
+              <a:latin typeface="メイリオ" panose="020B0604030504040204" pitchFamily="50" charset="-128"/>
+              <a:ea typeface="メイリオ" panose="020B0604030504040204" pitchFamily="50" charset="-128"/>
+            </a:endParaRPr>
+          </a:p>
+          <a:p>
+            <a:pPr algn="l"/>
+            <a:endParaRPr lang="en-US" altLang="ja-JP" sz="1200" dirty="0">
+              <a:latin typeface="メイリオ" panose="020B0604030504040204" pitchFamily="50" charset="-128"/>
+              <a:ea typeface="メイリオ" panose="020B0604030504040204" pitchFamily="50" charset="-128"/>
+            </a:endParaRPr>
+          </a:p>
+          <a:p>
+            <a:pPr algn="l"/>
+            <a:endParaRPr lang="en-US" altLang="ja-JP" sz="2000" dirty="0">
+              <a:solidFill>
+                <a:schemeClr val="accent4">
+                  <a:lumMod val="75000"/>
+                </a:schemeClr>
+              </a:solidFill>
+              <a:latin typeface="メイリオ" panose="020B0604030504040204" pitchFamily="50" charset="-128"/>
+              <a:ea typeface="メイリオ" panose="020B0604030504040204" pitchFamily="50" charset="-128"/>
+            </a:endParaRPr>
+          </a:p>
+          <a:p>
+            <a:pPr algn="l"/>
+            <a:endParaRPr lang="en-US" altLang="ja-JP" sz="2000" dirty="0">
+              <a:solidFill>
+                <a:schemeClr val="accent4">
+                  <a:lumMod val="75000"/>
+                </a:schemeClr>
+              </a:solidFill>
+              <a:latin typeface="メイリオ" panose="020B0604030504040204" pitchFamily="50" charset="-128"/>
+              <a:ea typeface="メイリオ" panose="020B0604030504040204" pitchFamily="50" charset="-128"/>
+            </a:endParaRPr>
+          </a:p>
+          <a:p>
+            <a:pPr algn="l"/>
+            <a:r>
+              <a:rPr lang="en-US" altLang="ja-JP" sz="2000" dirty="0">
+                <a:solidFill>
+                  <a:schemeClr val="accent4">
+                    <a:lumMod val="75000"/>
+                  </a:schemeClr>
+                </a:solidFill>
+                <a:latin typeface="メイリオ" panose="020B0604030504040204" pitchFamily="50" charset="-128"/>
+                <a:ea typeface="メイリオ" panose="020B0604030504040204" pitchFamily="50" charset="-128"/>
+              </a:rPr>
+              <a:t>##</a:t>
+            </a:r>
+            <a:r>
+              <a:rPr lang="ja-JP" altLang="en-US" sz="2000" dirty="0">
+                <a:solidFill>
+                  <a:schemeClr val="accent4">
+                    <a:lumMod val="75000"/>
+                  </a:schemeClr>
+                </a:solidFill>
+                <a:latin typeface="メイリオ" panose="020B0604030504040204" pitchFamily="50" charset="-128"/>
+                <a:ea typeface="メイリオ" panose="020B0604030504040204" pitchFamily="50" charset="-128"/>
+              </a:rPr>
+              <a:t>期待値を出す</a:t>
+            </a:r>
+            <a:endParaRPr lang="en-US" altLang="ja-JP" sz="2000" dirty="0">
+              <a:latin typeface="メイリオ" panose="020B0604030504040204" pitchFamily="50" charset="-128"/>
+              <a:ea typeface="メイリオ" panose="020B0604030504040204" pitchFamily="50" charset="-128"/>
+            </a:endParaRPr>
+          </a:p>
+          <a:p>
+            <a:pPr algn="l"/>
+            <a:endParaRPr lang="en-US" altLang="ja-JP" sz="1200" dirty="0">
+              <a:latin typeface="メイリオ" panose="020B0604030504040204" pitchFamily="50" charset="-128"/>
+              <a:ea typeface="メイリオ" panose="020B0604030504040204" pitchFamily="50" charset="-128"/>
+            </a:endParaRPr>
+          </a:p>
+        </p:txBody>
+      </p:sp>
+      <p:cxnSp>
+        <p:nvCxnSpPr>
+          <p:cNvPr id="13" name="直線矢印コネクタ 12">
+            <a:extLst>
+              <a:ext uri="{FF2B5EF4-FFF2-40B4-BE49-F238E27FC236}">
+                <a16:creationId xmlns:a16="http://schemas.microsoft.com/office/drawing/2014/main" id="{74FF8975-518B-E7D8-023D-CCCCAEBC6F95}"/>
+              </a:ext>
+            </a:extLst>
+          </p:cNvPr>
+          <p:cNvCxnSpPr>
+            <a:cxnSpLocks/>
+          </p:cNvCxnSpPr>
+          <p:nvPr/>
+        </p:nvCxnSpPr>
+        <p:spPr>
+          <a:xfrm>
+            <a:off x="4522993" y="677003"/>
+            <a:ext cx="581891" cy="0"/>
+          </a:xfrm>
+          <a:prstGeom prst="straightConnector1">
+            <a:avLst/>
+          </a:prstGeom>
+          <a:ln w="57150">
+            <a:solidFill>
+              <a:schemeClr val="accent4">
+                <a:lumMod val="75000"/>
+              </a:schemeClr>
+            </a:solidFill>
+            <a:tailEnd type="triangle"/>
+          </a:ln>
+        </p:spPr>
+        <p:style>
+          <a:lnRef idx="1">
+            <a:schemeClr val="accent1"/>
+          </a:lnRef>
+          <a:fillRef idx="0">
+            <a:schemeClr val="accent1"/>
+          </a:fillRef>
+          <a:effectRef idx="0">
+            <a:schemeClr val="accent1"/>
+          </a:effectRef>
+          <a:fontRef idx="minor">
+            <a:schemeClr val="tx1"/>
+          </a:fontRef>
+        </p:style>
+      </p:cxnSp>
+      <p:sp>
+        <p:nvSpPr>
+          <p:cNvPr id="7" name="正方形/長方形 6">
+            <a:extLst>
+              <a:ext uri="{FF2B5EF4-FFF2-40B4-BE49-F238E27FC236}">
+                <a16:creationId xmlns:a16="http://schemas.microsoft.com/office/drawing/2014/main" id="{E325EE49-CC21-FA2A-9628-F197D866B664}"/>
+              </a:ext>
+            </a:extLst>
+          </p:cNvPr>
+          <p:cNvSpPr/>
+          <p:nvPr/>
+        </p:nvSpPr>
+        <p:spPr>
+          <a:xfrm>
+            <a:off x="8730051" y="580650"/>
             <a:ext cx="2391170" cy="1183629"/>
           </a:xfrm>
           <a:prstGeom prst="rect">
@@ -4422,451 +8036,486 @@
           <a:lstStyle/>
           <a:p>
             <a:r>
-              <a:rPr lang="ja-JP" altLang="en-US" sz="2000" dirty="0">
+              <a:rPr lang="en-US" altLang="ja-JP" sz="1050" dirty="0">
                 <a:solidFill>
                   <a:schemeClr val="tx1"/>
                 </a:solidFill>
-                <a:latin typeface="メイリオ" panose="020B0604030504040204" pitchFamily="50" charset="-128"/>
-                <a:ea typeface="メイリオ" panose="020B0604030504040204" pitchFamily="50" charset="-128"/>
-              </a:rPr>
-              <a:t>期待値</a:t>
-            </a:r>
-            <a:endParaRPr lang="en-US" altLang="ja-JP" sz="2000" dirty="0">
-              <a:solidFill>
-                <a:schemeClr val="tx1"/>
-              </a:solidFill>
-              <a:latin typeface="メイリオ" panose="020B0604030504040204" pitchFamily="50" charset="-128"/>
-              <a:ea typeface="メイリオ" panose="020B0604030504040204" pitchFamily="50" charset="-128"/>
-            </a:endParaRPr>
-          </a:p>
-          <a:p>
-            <a:endParaRPr lang="en-US" altLang="ja-JP" sz="1000" dirty="0">
-              <a:solidFill>
-                <a:schemeClr val="tx1"/>
-              </a:solidFill>
-            </a:endParaRPr>
-          </a:p>
-          <a:p>
+              </a:rPr>
+              <a:t>for</a:t>
+            </a:r>
+            <a:r>
+              <a:rPr lang="ja-JP" altLang="en-US" sz="1050" dirty="0">
+                <a:solidFill>
+                  <a:schemeClr val="tx1"/>
+                </a:solidFill>
+              </a:rPr>
+              <a:t>文</a:t>
+            </a:r>
             <a:endParaRPr lang="en-US" altLang="ja-JP" sz="1050" dirty="0">
               <a:solidFill>
                 <a:schemeClr val="tx1"/>
               </a:solidFill>
             </a:endParaRPr>
           </a:p>
-          <a:p>
-            <a:r>
-              <a:rPr lang="en-US" altLang="ja-JP" sz="2000" dirty="0">
-                <a:solidFill>
-                  <a:schemeClr val="tx1"/>
-                </a:solidFill>
-              </a:rPr>
-              <a:t>E(x) =</a:t>
-            </a:r>
-            <a:r>
-              <a:rPr lang="en-US" altLang="ja-JP" sz="1000" dirty="0">
-                <a:solidFill>
-                  <a:schemeClr val="tx1"/>
-                </a:solidFill>
-              </a:rPr>
-              <a:t> </a:t>
-            </a:r>
-          </a:p>
         </p:txBody>
       </p:sp>
+      <p:pic>
+        <p:nvPicPr>
+          <p:cNvPr id="6" name="図 5">
+            <a:extLst>
+              <a:ext uri="{FF2B5EF4-FFF2-40B4-BE49-F238E27FC236}">
+                <a16:creationId xmlns:a16="http://schemas.microsoft.com/office/drawing/2014/main" id="{809D787F-CA4F-19FA-04BC-3C3E047A3540}"/>
+              </a:ext>
+            </a:extLst>
+          </p:cNvPr>
+          <p:cNvPicPr>
+            <a:picLocks noChangeAspect="1"/>
+          </p:cNvPicPr>
+          <p:nvPr/>
+        </p:nvPicPr>
+        <p:blipFill>
+          <a:blip r:embed="rId2"/>
+          <a:stretch>
+            <a:fillRect/>
+          </a:stretch>
+        </p:blipFill>
+        <p:spPr>
+          <a:xfrm>
+            <a:off x="1244724" y="1945789"/>
+            <a:ext cx="4458322" cy="504895"/>
+          </a:xfrm>
+          <a:prstGeom prst="rect">
+            <a:avLst/>
+          </a:prstGeom>
+        </p:spPr>
+      </p:pic>
+      <p:pic>
+        <p:nvPicPr>
+          <p:cNvPr id="11" name="図 10">
+            <a:extLst>
+              <a:ext uri="{FF2B5EF4-FFF2-40B4-BE49-F238E27FC236}">
+                <a16:creationId xmlns:a16="http://schemas.microsoft.com/office/drawing/2014/main" id="{641E52A4-9998-E71B-3932-5B896B6C4EDF}"/>
+              </a:ext>
+            </a:extLst>
+          </p:cNvPr>
+          <p:cNvPicPr>
+            <a:picLocks noChangeAspect="1"/>
+          </p:cNvPicPr>
+          <p:nvPr/>
+        </p:nvPicPr>
+        <p:blipFill>
+          <a:blip r:embed="rId3"/>
+          <a:stretch>
+            <a:fillRect/>
+          </a:stretch>
+        </p:blipFill>
+        <p:spPr>
+          <a:xfrm>
+            <a:off x="1244724" y="3119426"/>
+            <a:ext cx="2657846" cy="390580"/>
+          </a:xfrm>
+          <a:prstGeom prst="rect">
+            <a:avLst/>
+          </a:prstGeom>
+        </p:spPr>
+      </p:pic>
+      <p:pic>
+        <p:nvPicPr>
+          <p:cNvPr id="16" name="図 15">
+            <a:extLst>
+              <a:ext uri="{FF2B5EF4-FFF2-40B4-BE49-F238E27FC236}">
+                <a16:creationId xmlns:a16="http://schemas.microsoft.com/office/drawing/2014/main" id="{C189FA43-7CC0-8CC1-7B5F-D95ACB865343}"/>
+              </a:ext>
+            </a:extLst>
+          </p:cNvPr>
+          <p:cNvPicPr>
+            <a:picLocks noChangeAspect="1"/>
+          </p:cNvPicPr>
+          <p:nvPr/>
+        </p:nvPicPr>
+        <p:blipFill>
+          <a:blip r:embed="rId4"/>
+          <a:stretch>
+            <a:fillRect/>
+          </a:stretch>
+        </p:blipFill>
+        <p:spPr>
+          <a:xfrm>
+            <a:off x="6232704" y="3157531"/>
+            <a:ext cx="1428949" cy="314369"/>
+          </a:xfrm>
+          <a:prstGeom prst="rect">
+            <a:avLst/>
+          </a:prstGeom>
+        </p:spPr>
+      </p:pic>
+      <p:pic>
+        <p:nvPicPr>
+          <p:cNvPr id="20" name="図 19">
+            <a:extLst>
+              <a:ext uri="{FF2B5EF4-FFF2-40B4-BE49-F238E27FC236}">
+                <a16:creationId xmlns:a16="http://schemas.microsoft.com/office/drawing/2014/main" id="{86820E7E-A84E-BEA5-F223-070846854A3D}"/>
+              </a:ext>
+            </a:extLst>
+          </p:cNvPr>
+          <p:cNvPicPr>
+            <a:picLocks noChangeAspect="1"/>
+          </p:cNvPicPr>
+          <p:nvPr/>
+        </p:nvPicPr>
+        <p:blipFill>
+          <a:blip r:embed="rId5"/>
+          <a:stretch>
+            <a:fillRect/>
+          </a:stretch>
+        </p:blipFill>
+        <p:spPr>
+          <a:xfrm>
+            <a:off x="1244724" y="4054888"/>
+            <a:ext cx="2419688" cy="323895"/>
+          </a:xfrm>
+          <a:prstGeom prst="rect">
+            <a:avLst/>
+          </a:prstGeom>
+        </p:spPr>
+      </p:pic>
+      <p:pic>
+        <p:nvPicPr>
+          <p:cNvPr id="22" name="図 21">
+            <a:extLst>
+              <a:ext uri="{FF2B5EF4-FFF2-40B4-BE49-F238E27FC236}">
+                <a16:creationId xmlns:a16="http://schemas.microsoft.com/office/drawing/2014/main" id="{7BE6346A-62B0-A051-0E3E-EDDC90BF55E9}"/>
+              </a:ext>
+            </a:extLst>
+          </p:cNvPr>
+          <p:cNvPicPr>
+            <a:picLocks noChangeAspect="1"/>
+          </p:cNvPicPr>
+          <p:nvPr/>
+        </p:nvPicPr>
+        <p:blipFill>
+          <a:blip r:embed="rId6"/>
+          <a:stretch>
+            <a:fillRect/>
+          </a:stretch>
+        </p:blipFill>
+        <p:spPr>
+          <a:xfrm>
+            <a:off x="1244724" y="4754198"/>
+            <a:ext cx="3962953" cy="905001"/>
+          </a:xfrm>
+          <a:prstGeom prst="rect">
+            <a:avLst/>
+          </a:prstGeom>
+        </p:spPr>
+      </p:pic>
+      <p:pic>
+        <p:nvPicPr>
+          <p:cNvPr id="28" name="図 27">
+            <a:extLst>
+              <a:ext uri="{FF2B5EF4-FFF2-40B4-BE49-F238E27FC236}">
+                <a16:creationId xmlns:a16="http://schemas.microsoft.com/office/drawing/2014/main" id="{2C1D8B83-00F3-9BB2-5763-21958A71E8F4}"/>
+              </a:ext>
+            </a:extLst>
+          </p:cNvPr>
+          <p:cNvPicPr>
+            <a:picLocks noChangeAspect="1"/>
+          </p:cNvPicPr>
+          <p:nvPr/>
+        </p:nvPicPr>
+        <p:blipFill rotWithShape="1">
+          <a:blip r:embed="rId7"/>
+          <a:srcRect t="2299" b="-1"/>
+          <a:stretch/>
+        </p:blipFill>
+        <p:spPr>
+          <a:xfrm>
+            <a:off x="6229430" y="1650342"/>
+            <a:ext cx="3362794" cy="809738"/>
+          </a:xfrm>
+          <a:prstGeom prst="rect">
+            <a:avLst/>
+          </a:prstGeom>
+        </p:spPr>
+      </p:pic>
+      <p:pic>
+        <p:nvPicPr>
+          <p:cNvPr id="30" name="図 29">
+            <a:extLst>
+              <a:ext uri="{FF2B5EF4-FFF2-40B4-BE49-F238E27FC236}">
+                <a16:creationId xmlns:a16="http://schemas.microsoft.com/office/drawing/2014/main" id="{FFCE45BA-D329-2260-F5F5-F38305B02722}"/>
+              </a:ext>
+            </a:extLst>
+          </p:cNvPr>
+          <p:cNvPicPr>
+            <a:picLocks noChangeAspect="1"/>
+          </p:cNvPicPr>
+          <p:nvPr/>
+        </p:nvPicPr>
+        <p:blipFill>
+          <a:blip r:embed="rId8"/>
+          <a:stretch>
+            <a:fillRect/>
+          </a:stretch>
+        </p:blipFill>
+        <p:spPr>
+          <a:xfrm>
+            <a:off x="6229430" y="4650107"/>
+            <a:ext cx="3829584" cy="809738"/>
+          </a:xfrm>
+          <a:prstGeom prst="rect">
+            <a:avLst/>
+          </a:prstGeom>
+        </p:spPr>
+      </p:pic>
+      <p:pic>
+        <p:nvPicPr>
+          <p:cNvPr id="32" name="図 31">
+            <a:extLst>
+              <a:ext uri="{FF2B5EF4-FFF2-40B4-BE49-F238E27FC236}">
+                <a16:creationId xmlns:a16="http://schemas.microsoft.com/office/drawing/2014/main" id="{2DB46570-E869-15E2-D7E9-58134A8377A9}"/>
+              </a:ext>
+            </a:extLst>
+          </p:cNvPr>
+          <p:cNvPicPr>
+            <a:picLocks noChangeAspect="1"/>
+          </p:cNvPicPr>
+          <p:nvPr/>
+        </p:nvPicPr>
+        <p:blipFill>
+          <a:blip r:embed="rId9"/>
+          <a:stretch>
+            <a:fillRect/>
+          </a:stretch>
+        </p:blipFill>
+        <p:spPr>
+          <a:xfrm>
+            <a:off x="6229430" y="6000459"/>
+            <a:ext cx="2629267" cy="314369"/>
+          </a:xfrm>
+          <a:prstGeom prst="rect">
+            <a:avLst/>
+          </a:prstGeom>
+        </p:spPr>
+      </p:pic>
+      <p:pic>
+        <p:nvPicPr>
+          <p:cNvPr id="34" name="図 33">
+            <a:extLst>
+              <a:ext uri="{FF2B5EF4-FFF2-40B4-BE49-F238E27FC236}">
+                <a16:creationId xmlns:a16="http://schemas.microsoft.com/office/drawing/2014/main" id="{4434E629-8BDE-B460-72BE-95CBE364C0AA}"/>
+              </a:ext>
+            </a:extLst>
+          </p:cNvPr>
+          <p:cNvPicPr>
+            <a:picLocks noChangeAspect="1"/>
+          </p:cNvPicPr>
+          <p:nvPr/>
+        </p:nvPicPr>
+        <p:blipFill>
+          <a:blip r:embed="rId10"/>
+          <a:stretch>
+            <a:fillRect/>
+          </a:stretch>
+        </p:blipFill>
+        <p:spPr>
+          <a:xfrm>
+            <a:off x="1244724" y="6207341"/>
+            <a:ext cx="2457793" cy="352474"/>
+          </a:xfrm>
+          <a:prstGeom prst="rect">
+            <a:avLst/>
+          </a:prstGeom>
+        </p:spPr>
+      </p:pic>
       <p:sp>
         <p:nvSpPr>
-          <p:cNvPr id="3" name="字幕 2">
-            <a:extLst>
-              <a:ext uri="{FF2B5EF4-FFF2-40B4-BE49-F238E27FC236}">
-                <a16:creationId xmlns:a16="http://schemas.microsoft.com/office/drawing/2014/main" id="{EF422FEA-2F34-70ED-56A9-01A65A2AD142}"/>
-              </a:ext>
-            </a:extLst>
-          </p:cNvPr>
-          <p:cNvSpPr>
-            <a:spLocks noGrp="1"/>
-          </p:cNvSpPr>
-          <p:nvPr>
-            <p:ph type="subTitle" idx="1"/>
-          </p:nvPr>
+          <p:cNvPr id="35" name="楕円 34">
+            <a:extLst>
+              <a:ext uri="{FF2B5EF4-FFF2-40B4-BE49-F238E27FC236}">
+                <a16:creationId xmlns:a16="http://schemas.microsoft.com/office/drawing/2014/main" id="{7FFF4DFE-08AA-6C7B-0EB3-1A5CDBA024E2}"/>
+              </a:ext>
+            </a:extLst>
+          </p:cNvPr>
+          <p:cNvSpPr/>
+          <p:nvPr/>
         </p:nvSpPr>
         <p:spPr>
           <a:xfrm>
-            <a:off x="682560" y="1143635"/>
-            <a:ext cx="9391483" cy="5446283"/>
+            <a:off x="3902570" y="1160992"/>
+            <a:ext cx="206220" cy="232109"/>
           </a:xfrm>
-        </p:spPr>
-        <p:txBody>
-          <a:bodyPr>
-            <a:normAutofit/>
-          </a:bodyPr>
-          <a:lstStyle/>
-          <a:p>
-            <a:pPr algn="l"/>
-            <a:r>
-              <a:rPr kumimoji="1" lang="ja-JP" altLang="en-US" sz="2000" dirty="0">
-                <a:solidFill>
-                  <a:schemeClr val="accent4">
-                    <a:lumMod val="75000"/>
-                  </a:schemeClr>
-                </a:solidFill>
-                <a:latin typeface="メイリオ" panose="020B0604030504040204" pitchFamily="50" charset="-128"/>
-                <a:ea typeface="メイリオ" panose="020B0604030504040204" pitchFamily="50" charset="-128"/>
-              </a:rPr>
-              <a:t>＃</a:t>
-            </a:r>
-            <a:r>
-              <a:rPr lang="en-US" altLang="ja-JP" sz="2000" dirty="0">
-                <a:solidFill>
-                  <a:schemeClr val="accent4">
-                    <a:lumMod val="75000"/>
-                  </a:schemeClr>
-                </a:solidFill>
-                <a:latin typeface="メイリオ" panose="020B0604030504040204" pitchFamily="50" charset="-128"/>
-                <a:ea typeface="メイリオ" panose="020B0604030504040204" pitchFamily="50" charset="-128"/>
-              </a:rPr>
-              <a:t>#</a:t>
-            </a:r>
-            <a:r>
-              <a:rPr lang="ja-JP" altLang="en-US" sz="2000" dirty="0">
-                <a:solidFill>
-                  <a:schemeClr val="accent4">
-                    <a:lumMod val="75000"/>
-                  </a:schemeClr>
-                </a:solidFill>
-                <a:latin typeface="メイリオ" panose="020B0604030504040204" pitchFamily="50" charset="-128"/>
-                <a:ea typeface="メイリオ" panose="020B0604030504040204" pitchFamily="50" charset="-128"/>
-              </a:rPr>
-              <a:t>期待値</a:t>
-            </a:r>
-            <a:endParaRPr kumimoji="1" lang="en-US" altLang="ja-JP" sz="2000" dirty="0">
-              <a:solidFill>
-                <a:schemeClr val="accent4">
-                  <a:lumMod val="75000"/>
-                </a:schemeClr>
-              </a:solidFill>
-              <a:latin typeface="メイリオ" panose="020B0604030504040204" pitchFamily="50" charset="-128"/>
-              <a:ea typeface="メイリオ" panose="020B0604030504040204" pitchFamily="50" charset="-128"/>
-            </a:endParaRPr>
-          </a:p>
-          <a:p>
-            <a:pPr algn="l"/>
-            <a:r>
-              <a:rPr lang="ja-JP" altLang="en-US" sz="1200" dirty="0">
-                <a:latin typeface="メイリオ" panose="020B0604030504040204" pitchFamily="50" charset="-128"/>
-                <a:ea typeface="メイリオ" panose="020B0604030504040204" pitchFamily="50" charset="-128"/>
-              </a:rPr>
-              <a:t>変数名：</a:t>
-            </a:r>
-            <a:endParaRPr lang="en-US" altLang="ja-JP" sz="1200" dirty="0">
-              <a:latin typeface="メイリオ" panose="020B0604030504040204" pitchFamily="50" charset="-128"/>
-              <a:ea typeface="メイリオ" panose="020B0604030504040204" pitchFamily="50" charset="-128"/>
-            </a:endParaRPr>
-          </a:p>
-          <a:p>
-            <a:pPr algn="l"/>
-            <a:endParaRPr lang="en-US" altLang="ja-JP" sz="1200" dirty="0">
-              <a:latin typeface="メイリオ" panose="020B0604030504040204" pitchFamily="50" charset="-128"/>
-              <a:ea typeface="メイリオ" panose="020B0604030504040204" pitchFamily="50" charset="-128"/>
-            </a:endParaRPr>
-          </a:p>
-          <a:p>
-            <a:pPr algn="l"/>
-            <a:r>
-              <a:rPr lang="ja-JP" altLang="en-US" sz="2000" dirty="0">
-                <a:solidFill>
-                  <a:schemeClr val="accent4">
-                    <a:lumMod val="75000"/>
-                  </a:schemeClr>
-                </a:solidFill>
-                <a:latin typeface="メイリオ" panose="020B0604030504040204" pitchFamily="50" charset="-128"/>
-                <a:ea typeface="メイリオ" panose="020B0604030504040204" pitchFamily="50" charset="-128"/>
-              </a:rPr>
-              <a:t>＃</a:t>
-            </a:r>
-            <a:r>
-              <a:rPr lang="en-US" altLang="ja-JP" sz="2000" dirty="0">
-                <a:solidFill>
-                  <a:schemeClr val="accent4">
-                    <a:lumMod val="75000"/>
-                  </a:schemeClr>
-                </a:solidFill>
-                <a:latin typeface="メイリオ" panose="020B0604030504040204" pitchFamily="50" charset="-128"/>
-                <a:ea typeface="メイリオ" panose="020B0604030504040204" pitchFamily="50" charset="-128"/>
-              </a:rPr>
-              <a:t>#expand.grid</a:t>
-            </a:r>
-          </a:p>
-          <a:p>
-            <a:pPr algn="l"/>
-            <a:endParaRPr lang="en-US" altLang="ja-JP" sz="1200" dirty="0">
-              <a:latin typeface="メイリオ" panose="020B0604030504040204" pitchFamily="50" charset="-128"/>
-              <a:ea typeface="メイリオ" panose="020B0604030504040204" pitchFamily="50" charset="-128"/>
-            </a:endParaRPr>
-          </a:p>
-          <a:p>
-            <a:pPr algn="l"/>
-            <a:endParaRPr lang="en-US" altLang="ja-JP" sz="1200" dirty="0">
-              <a:latin typeface="メイリオ" panose="020B0604030504040204" pitchFamily="50" charset="-128"/>
-              <a:ea typeface="メイリオ" panose="020B0604030504040204" pitchFamily="50" charset="-128"/>
-            </a:endParaRPr>
-          </a:p>
-        </p:txBody>
-      </p:sp>
-      <p:cxnSp>
-        <p:nvCxnSpPr>
-          <p:cNvPr id="13" name="直線矢印コネクタ 12">
-            <a:extLst>
-              <a:ext uri="{FF2B5EF4-FFF2-40B4-BE49-F238E27FC236}">
-                <a16:creationId xmlns:a16="http://schemas.microsoft.com/office/drawing/2014/main" id="{74FF8975-518B-E7D8-023D-CCCCAEBC6F95}"/>
-              </a:ext>
-            </a:extLst>
-          </p:cNvPr>
-          <p:cNvCxnSpPr>
-            <a:cxnSpLocks/>
-          </p:cNvCxnSpPr>
-          <p:nvPr/>
-        </p:nvCxnSpPr>
-        <p:spPr>
-          <a:xfrm>
-            <a:off x="4548393" y="1472982"/>
-            <a:ext cx="581891" cy="0"/>
-          </a:xfrm>
-          <a:prstGeom prst="straightConnector1">
+          <a:prstGeom prst="ellipse">
             <a:avLst/>
           </a:prstGeom>
-          <a:ln w="57150">
-            <a:solidFill>
-              <a:schemeClr val="accent4">
-                <a:lumMod val="75000"/>
-              </a:schemeClr>
-            </a:solidFill>
-            <a:tailEnd type="triangle"/>
+          <a:solidFill>
+            <a:schemeClr val="accent4">
+              <a:lumMod val="75000"/>
+            </a:schemeClr>
+          </a:solidFill>
+          <a:ln>
+            <a:noFill/>
           </a:ln>
         </p:spPr>
         <p:style>
-          <a:lnRef idx="1">
-            <a:schemeClr val="accent1"/>
+          <a:lnRef idx="2">
+            <a:schemeClr val="accent1">
+              <a:shade val="15000"/>
+            </a:schemeClr>
           </a:lnRef>
-          <a:fillRef idx="0">
+          <a:fillRef idx="1">
             <a:schemeClr val="accent1"/>
           </a:fillRef>
           <a:effectRef idx="0">
             <a:schemeClr val="accent1"/>
           </a:effectRef>
           <a:fontRef idx="minor">
-            <a:schemeClr val="tx1"/>
+            <a:schemeClr val="lt1"/>
           </a:fontRef>
         </p:style>
-      </p:cxnSp>
-      <mc:AlternateContent xmlns:mc="http://schemas.openxmlformats.org/markup-compatibility/2006">
-        <mc:Choice xmlns:a14="http://schemas.microsoft.com/office/drawing/2010/main" Requires="a14">
-          <p:sp>
-            <p:nvSpPr>
-              <p:cNvPr id="5" name="テキスト ボックス 4">
-                <a:extLst>
-                  <a:ext uri="{FF2B5EF4-FFF2-40B4-BE49-F238E27FC236}">
-                    <a16:creationId xmlns:a16="http://schemas.microsoft.com/office/drawing/2014/main" id="{EFD6AF95-37D7-5BF7-F732-2732C17EE5DF}"/>
-                  </a:ext>
-                </a:extLst>
-              </p:cNvPr>
-              <p:cNvSpPr txBox="1"/>
-              <p:nvPr/>
-            </p:nvSpPr>
-            <p:spPr>
-              <a:xfrm>
-                <a:off x="9451565" y="1690477"/>
-                <a:ext cx="1527213" cy="756233"/>
-              </a:xfrm>
-              <a:prstGeom prst="rect">
-                <a:avLst/>
-              </a:prstGeom>
-              <a:noFill/>
-            </p:spPr>
-            <p:txBody>
-              <a:bodyPr wrap="none" lIns="0" tIns="0" rIns="0" bIns="0" rtlCol="0">
-                <a:spAutoFit/>
-              </a:bodyPr>
-              <a:lstStyle/>
-              <a:p>
-                <a14:m>
-                  <m:oMathPara xmlns:m="http://schemas.openxmlformats.org/officeDocument/2006/math">
-                    <m:oMathParaPr>
-                      <m:jc m:val="centerGroup"/>
-                    </m:oMathParaPr>
-                    <m:oMath xmlns:m="http://schemas.openxmlformats.org/officeDocument/2006/math">
-                      <m:nary>
-                        <m:naryPr>
-                          <m:chr m:val="∑"/>
-                          <m:limLoc m:val="undOvr"/>
-                          <m:grow m:val="on"/>
-                          <m:ctrlPr>
-                            <a:rPr kumimoji="1" lang="ja-JP" altLang="en-US" smtClean="0">
-                              <a:latin typeface="Cambria Math" panose="02040503050406030204" pitchFamily="18" charset="0"/>
-                            </a:rPr>
-                          </m:ctrlPr>
-                        </m:naryPr>
-                        <m:sub>
-                          <m:r>
-                            <a:rPr kumimoji="1" lang="ja-JP" altLang="en-US" i="1">
-                              <a:latin typeface="Cambria Math" panose="02040503050406030204" pitchFamily="18" charset="0"/>
-                            </a:rPr>
-                            <m:t>𝑖</m:t>
-                          </m:r>
-                          <m:r>
-                            <a:rPr kumimoji="1" lang="ja-JP" altLang="en-US" i="0">
-                              <a:latin typeface="Cambria Math" panose="02040503050406030204" pitchFamily="18" charset="0"/>
-                            </a:rPr>
-                            <m:t>=1</m:t>
-                          </m:r>
-                        </m:sub>
-                        <m:sup>
-                          <m:r>
-                            <a:rPr kumimoji="1" lang="ja-JP" altLang="en-US" i="1">
-                              <a:latin typeface="Cambria Math" panose="02040503050406030204" pitchFamily="18" charset="0"/>
-                            </a:rPr>
-                            <m:t>𝑛</m:t>
-                          </m:r>
-                        </m:sup>
-                        <m:e>
-                          <m:sSub>
-                            <m:sSubPr>
-                              <m:ctrlPr>
-                                <a:rPr kumimoji="1" lang="en-US" altLang="ja-JP" i="1" smtClean="0">
-                                  <a:latin typeface="Cambria Math" panose="02040503050406030204" pitchFamily="18" charset="0"/>
-                                </a:rPr>
-                              </m:ctrlPr>
-                            </m:sSubPr>
-                            <m:e>
-                              <m:r>
-                                <a:rPr kumimoji="1" lang="en-US" altLang="ja-JP" b="0" i="1" smtClean="0">
-                                  <a:latin typeface="Cambria Math" panose="02040503050406030204" pitchFamily="18" charset="0"/>
-                                </a:rPr>
-                                <m:t>(</m:t>
-                              </m:r>
-                              <m:r>
-                                <a:rPr kumimoji="1" lang="en-US" altLang="ja-JP" b="0" i="1" smtClean="0">
-                                  <a:latin typeface="Cambria Math" panose="02040503050406030204" pitchFamily="18" charset="0"/>
-                                </a:rPr>
-                                <m:t>𝑥</m:t>
-                              </m:r>
-                            </m:e>
-                            <m:sub>
-                              <m:r>
-                                <a:rPr kumimoji="1" lang="en-US" altLang="ja-JP" b="0" i="1" smtClean="0">
-                                  <a:latin typeface="Cambria Math" panose="02040503050406030204" pitchFamily="18" charset="0"/>
-                                </a:rPr>
-                                <m:t>𝑖</m:t>
-                              </m:r>
-                            </m:sub>
-                          </m:sSub>
-                          <m:r>
-                            <a:rPr lang="ja-JP" altLang="en-US" i="1">
-                              <a:latin typeface="Cambria Math" panose="02040503050406030204" pitchFamily="18" charset="0"/>
-                            </a:rPr>
-                            <m:t>・</m:t>
-                          </m:r>
-                          <m:r>
-                            <a:rPr lang="en-US" altLang="ja-JP" b="0" i="1" smtClean="0">
-                              <a:latin typeface="Cambria Math" panose="02040503050406030204" pitchFamily="18" charset="0"/>
-                            </a:rPr>
-                            <m:t>𝑃</m:t>
-                          </m:r>
-                          <m:r>
-                            <a:rPr lang="en-US" altLang="ja-JP" b="0" i="1" smtClean="0">
-                              <a:latin typeface="Cambria Math" panose="02040503050406030204" pitchFamily="18" charset="0"/>
-                            </a:rPr>
-                            <m:t>(</m:t>
-                          </m:r>
-                          <m:sSub>
-                            <m:sSubPr>
-                              <m:ctrlPr>
-                                <a:rPr lang="en-US" altLang="ja-JP" b="0" i="1" smtClean="0">
-                                  <a:latin typeface="Cambria Math" panose="02040503050406030204" pitchFamily="18" charset="0"/>
-                                </a:rPr>
-                              </m:ctrlPr>
-                            </m:sSubPr>
-                            <m:e>
-                              <m:r>
-                                <a:rPr lang="en-US" altLang="ja-JP" b="0" i="1" smtClean="0">
-                                  <a:latin typeface="Cambria Math" panose="02040503050406030204" pitchFamily="18" charset="0"/>
-                                </a:rPr>
-                                <m:t>𝑥</m:t>
-                              </m:r>
-                            </m:e>
-                            <m:sub>
-                              <m:r>
-                                <a:rPr lang="en-US" altLang="ja-JP" b="0" i="1" smtClean="0">
-                                  <a:latin typeface="Cambria Math" panose="02040503050406030204" pitchFamily="18" charset="0"/>
-                                </a:rPr>
-                                <m:t>𝑖</m:t>
-                              </m:r>
-                            </m:sub>
-                          </m:sSub>
-                          <m:r>
-                            <a:rPr lang="en-US" altLang="ja-JP" b="0" i="1" smtClean="0">
-                              <a:latin typeface="Cambria Math" panose="02040503050406030204" pitchFamily="18" charset="0"/>
-                            </a:rPr>
-                            <m:t>))</m:t>
-                          </m:r>
-                        </m:e>
-                      </m:nary>
-                    </m:oMath>
-                  </m:oMathPara>
-                </a14:m>
-                <a:endParaRPr kumimoji="1" lang="ja-JP" altLang="en-US" dirty="0"/>
-              </a:p>
-            </p:txBody>
-          </p:sp>
-        </mc:Choice>
-        <mc:Fallback>
-          <p:sp>
-            <p:nvSpPr>
-              <p:cNvPr id="5" name="テキスト ボックス 4">
-                <a:extLst>
-                  <a:ext uri="{FF2B5EF4-FFF2-40B4-BE49-F238E27FC236}">
-                    <a16:creationId xmlns:a16="http://schemas.microsoft.com/office/drawing/2014/main" id="{EFD6AF95-37D7-5BF7-F732-2732C17EE5DF}"/>
-                  </a:ext>
-                </a:extLst>
-              </p:cNvPr>
-              <p:cNvSpPr txBox="1">
-                <a:spLocks noRot="1" noChangeAspect="1" noMove="1" noResize="1" noEditPoints="1" noAdjustHandles="1" noChangeArrowheads="1" noChangeShapeType="1" noTextEdit="1"/>
-              </p:cNvSpPr>
-              <p:nvPr/>
-            </p:nvSpPr>
-            <p:spPr>
-              <a:xfrm>
-                <a:off x="9451565" y="1690477"/>
-                <a:ext cx="1527213" cy="756233"/>
-              </a:xfrm>
-              <a:prstGeom prst="rect">
-                <a:avLst/>
-              </a:prstGeom>
-              <a:blipFill>
-                <a:blip r:embed="rId2"/>
-                <a:stretch>
-                  <a:fillRect/>
-                </a:stretch>
-              </a:blipFill>
-            </p:spPr>
-            <p:txBody>
-              <a:bodyPr/>
-              <a:lstStyle/>
-              <a:p>
-                <a:r>
-                  <a:rPr lang="ja-JP" altLang="en-US">
-                    <a:noFill/>
-                  </a:rPr>
-                  <a:t> </a:t>
-                </a:r>
-              </a:p>
-            </p:txBody>
-          </p:sp>
-        </mc:Fallback>
-      </mc:AlternateContent>
+        <p:txBody>
+          <a:bodyPr tIns="90000" rtlCol="0" anchor="ctr"/>
+          <a:lstStyle/>
+          <a:p>
+            <a:pPr algn="ctr"/>
+            <a:r>
+              <a:rPr lang="en-US" altLang="ja-JP" dirty="0">
+                <a:latin typeface="メイリオ" panose="020B0604030504040204" pitchFamily="50" charset="-128"/>
+                <a:ea typeface="メイリオ" panose="020B0604030504040204" pitchFamily="50" charset="-128"/>
+              </a:rPr>
+              <a:t>2</a:t>
+            </a:r>
+            <a:endParaRPr kumimoji="1" lang="ja-JP" altLang="en-US" dirty="0">
+              <a:latin typeface="メイリオ" panose="020B0604030504040204" pitchFamily="50" charset="-128"/>
+              <a:ea typeface="メイリオ" panose="020B0604030504040204" pitchFamily="50" charset="-128"/>
+            </a:endParaRPr>
+          </a:p>
+        </p:txBody>
+      </p:sp>
+      <p:sp>
+        <p:nvSpPr>
+          <p:cNvPr id="36" name="楕円 35">
+            <a:extLst>
+              <a:ext uri="{FF2B5EF4-FFF2-40B4-BE49-F238E27FC236}">
+                <a16:creationId xmlns:a16="http://schemas.microsoft.com/office/drawing/2014/main" id="{1DEB8852-D701-E552-27B0-9ACA2888A3D1}"/>
+              </a:ext>
+            </a:extLst>
+          </p:cNvPr>
+          <p:cNvSpPr/>
+          <p:nvPr/>
+        </p:nvSpPr>
+        <p:spPr>
+          <a:xfrm>
+            <a:off x="3019980" y="3709384"/>
+            <a:ext cx="206220" cy="232109"/>
+          </a:xfrm>
+          <a:prstGeom prst="ellipse">
+            <a:avLst/>
+          </a:prstGeom>
+          <a:solidFill>
+            <a:schemeClr val="accent4">
+              <a:lumMod val="75000"/>
+            </a:schemeClr>
+          </a:solidFill>
+          <a:ln>
+            <a:noFill/>
+          </a:ln>
+        </p:spPr>
+        <p:style>
+          <a:lnRef idx="2">
+            <a:schemeClr val="accent1">
+              <a:shade val="15000"/>
+            </a:schemeClr>
+          </a:lnRef>
+          <a:fillRef idx="1">
+            <a:schemeClr val="accent1"/>
+          </a:fillRef>
+          <a:effectRef idx="0">
+            <a:schemeClr val="accent1"/>
+          </a:effectRef>
+          <a:fontRef idx="minor">
+            <a:schemeClr val="lt1"/>
+          </a:fontRef>
+        </p:style>
+        <p:txBody>
+          <a:bodyPr tIns="90000" rtlCol="0" anchor="ctr"/>
+          <a:lstStyle/>
+          <a:p>
+            <a:pPr algn="ctr"/>
+            <a:r>
+              <a:rPr kumimoji="1" lang="en-US" altLang="ja-JP" dirty="0">
+                <a:latin typeface="メイリオ" panose="020B0604030504040204" pitchFamily="50" charset="-128"/>
+                <a:ea typeface="メイリオ" panose="020B0604030504040204" pitchFamily="50" charset="-128"/>
+              </a:rPr>
+              <a:t>3</a:t>
+            </a:r>
+          </a:p>
+        </p:txBody>
+      </p:sp>
+      <p:sp>
+        <p:nvSpPr>
+          <p:cNvPr id="37" name="楕円 36">
+            <a:extLst>
+              <a:ext uri="{FF2B5EF4-FFF2-40B4-BE49-F238E27FC236}">
+                <a16:creationId xmlns:a16="http://schemas.microsoft.com/office/drawing/2014/main" id="{D3BC0CAF-6DCD-5A11-1050-71180B3D58F9}"/>
+              </a:ext>
+            </a:extLst>
+          </p:cNvPr>
+          <p:cNvSpPr/>
+          <p:nvPr/>
+        </p:nvSpPr>
+        <p:spPr>
+          <a:xfrm>
+            <a:off x="2813760" y="5892449"/>
+            <a:ext cx="206220" cy="232109"/>
+          </a:xfrm>
+          <a:prstGeom prst="ellipse">
+            <a:avLst/>
+          </a:prstGeom>
+          <a:solidFill>
+            <a:schemeClr val="accent4">
+              <a:lumMod val="75000"/>
+            </a:schemeClr>
+          </a:solidFill>
+          <a:ln>
+            <a:noFill/>
+          </a:ln>
+        </p:spPr>
+        <p:style>
+          <a:lnRef idx="2">
+            <a:schemeClr val="accent1">
+              <a:shade val="15000"/>
+            </a:schemeClr>
+          </a:lnRef>
+          <a:fillRef idx="1">
+            <a:schemeClr val="accent1"/>
+          </a:fillRef>
+          <a:effectRef idx="0">
+            <a:schemeClr val="accent1"/>
+          </a:effectRef>
+          <a:fontRef idx="minor">
+            <a:schemeClr val="lt1"/>
+          </a:fontRef>
+        </p:style>
+        <p:txBody>
+          <a:bodyPr tIns="90000" rtlCol="0" anchor="ctr"/>
+          <a:lstStyle/>
+          <a:p>
+            <a:pPr algn="ctr"/>
+            <a:r>
+              <a:rPr kumimoji="1" lang="en-US" altLang="ja-JP" dirty="0">
+                <a:latin typeface="メイリオ" panose="020B0604030504040204" pitchFamily="50" charset="-128"/>
+                <a:ea typeface="メイリオ" panose="020B0604030504040204" pitchFamily="50" charset="-128"/>
+              </a:rPr>
+              <a:t>4</a:t>
+            </a:r>
+          </a:p>
+        </p:txBody>
+      </p:sp>
     </p:spTree>
     <p:extLst>
       <p:ext uri="{BB962C8B-B14F-4D97-AF65-F5344CB8AC3E}">
-        <p14:creationId xmlns:p14="http://schemas.microsoft.com/office/powerpoint/2010/main" val="4132078421"/>
+        <p14:creationId xmlns:p14="http://schemas.microsoft.com/office/powerpoint/2010/main" val="1562352978"/>
       </p:ext>
     </p:extLst>
   </p:cSld>
@@ -4876,7 +8525,7 @@
 </p:sld>
 </file>
 
-<file path=ppt/slides/slide13.xml><?xml version="1.0" encoding="utf-8"?>
+<file path=ppt/slides/slide16.xml><?xml version="1.0" encoding="utf-8"?>
 <p:sld xmlns:a="http://schemas.openxmlformats.org/drawingml/2006/main" xmlns:r="http://schemas.openxmlformats.org/officeDocument/2006/relationships" xmlns:p="http://schemas.openxmlformats.org/presentationml/2006/main">
   <p:cSld>
     <p:spTree>
@@ -5005,7 +8654,7 @@
 </p:sld>
 </file>
 
-<file path=ppt/slides/slide14.xml><?xml version="1.0" encoding="utf-8"?>
+<file path=ppt/slides/slide17.xml><?xml version="1.0" encoding="utf-8"?>
 <p:sld xmlns:a="http://schemas.openxmlformats.org/drawingml/2006/main" xmlns:r="http://schemas.openxmlformats.org/officeDocument/2006/relationships" xmlns:p="http://schemas.openxmlformats.org/presentationml/2006/main">
   <p:cSld>
     <p:spTree>
@@ -5176,7 +8825,7 @@
 </p:sld>
 </file>
 
-<file path=ppt/slides/slide15.xml><?xml version="1.0" encoding="utf-8"?>
+<file path=ppt/slides/slide18.xml><?xml version="1.0" encoding="utf-8"?>
 <p:sld xmlns:a="http://schemas.openxmlformats.org/drawingml/2006/main" xmlns:r="http://schemas.openxmlformats.org/officeDocument/2006/relationships" xmlns:p="http://schemas.openxmlformats.org/presentationml/2006/main">
   <p:cSld>
     <p:spTree>
@@ -5524,7 +9173,7 @@
 </p:sld>
 </file>
 
-<file path=ppt/slides/slide16.xml><?xml version="1.0" encoding="utf-8"?>
+<file path=ppt/slides/slide19.xml><?xml version="1.0" encoding="utf-8"?>
 <p:sld xmlns:a="http://schemas.openxmlformats.org/drawingml/2006/main" xmlns:r="http://schemas.openxmlformats.org/officeDocument/2006/relationships" xmlns:p="http://schemas.openxmlformats.org/presentationml/2006/main">
   <p:cSld>
     <p:spTree>
@@ -5657,672 +9306,6 @@
     <p:extLst>
       <p:ext uri="{BB962C8B-B14F-4D97-AF65-F5344CB8AC3E}">
         <p14:creationId xmlns:p14="http://schemas.microsoft.com/office/powerpoint/2010/main" val="1134685979"/>
-      </p:ext>
-    </p:extLst>
-  </p:cSld>
-  <p:clrMapOvr>
-    <a:masterClrMapping/>
-  </p:clrMapOvr>
-</p:sld>
-</file>
-
-<file path=ppt/slides/slide17.xml><?xml version="1.0" encoding="utf-8"?>
-<p:sld xmlns:a="http://schemas.openxmlformats.org/drawingml/2006/main" xmlns:r="http://schemas.openxmlformats.org/officeDocument/2006/relationships" xmlns:p="http://schemas.openxmlformats.org/presentationml/2006/main">
-  <p:cSld>
-    <p:spTree>
-      <p:nvGrpSpPr>
-        <p:cNvPr id="1" name=""/>
-        <p:cNvGrpSpPr/>
-        <p:nvPr/>
-      </p:nvGrpSpPr>
-      <p:grpSpPr>
-        <a:xfrm>
-          <a:off x="0" y="0"/>
-          <a:ext cx="0" cy="0"/>
-          <a:chOff x="0" y="0"/>
-          <a:chExt cx="0" cy="0"/>
-        </a:xfrm>
-      </p:grpSpPr>
-      <p:sp>
-        <p:nvSpPr>
-          <p:cNvPr id="2" name="タイトル 1">
-            <a:extLst>
-              <a:ext uri="{FF2B5EF4-FFF2-40B4-BE49-F238E27FC236}">
-                <a16:creationId xmlns:a16="http://schemas.microsoft.com/office/drawing/2014/main" id="{8F92D15D-6ED6-F1E2-415D-C5D0D0CAAC83}"/>
-              </a:ext>
-            </a:extLst>
-          </p:cNvPr>
-          <p:cNvSpPr>
-            <a:spLocks noGrp="1"/>
-          </p:cNvSpPr>
-          <p:nvPr>
-            <p:ph type="ctrTitle"/>
-          </p:nvPr>
-        </p:nvSpPr>
-        <p:spPr>
-          <a:xfrm>
-            <a:off x="528181" y="314435"/>
-            <a:ext cx="5891408" cy="700173"/>
-          </a:xfrm>
-        </p:spPr>
-        <p:txBody>
-          <a:bodyPr>
-            <a:normAutofit/>
-          </a:bodyPr>
-          <a:lstStyle/>
-          <a:p>
-            <a:pPr algn="l"/>
-            <a:r>
-              <a:rPr kumimoji="1" lang="ja-JP" altLang="en-US" sz="3000" b="1" dirty="0">
-                <a:solidFill>
-                  <a:schemeClr val="tx1">
-                    <a:lumMod val="65000"/>
-                    <a:lumOff val="35000"/>
-                  </a:schemeClr>
-                </a:solidFill>
-                <a:latin typeface="メイリオ" panose="020B0604030504040204" pitchFamily="50" charset="-128"/>
-                <a:ea typeface="メイリオ" panose="020B0604030504040204" pitchFamily="50" charset="-128"/>
-              </a:rPr>
-              <a:t>疑問点</a:t>
-            </a:r>
-          </a:p>
-        </p:txBody>
-      </p:sp>
-      <p:sp>
-        <p:nvSpPr>
-          <p:cNvPr id="4" name="正方形/長方形 3">
-            <a:extLst>
-              <a:ext uri="{FF2B5EF4-FFF2-40B4-BE49-F238E27FC236}">
-                <a16:creationId xmlns:a16="http://schemas.microsoft.com/office/drawing/2014/main" id="{578782C7-6070-7C3A-DAB7-3101F4C6ED5C}"/>
-              </a:ext>
-            </a:extLst>
-          </p:cNvPr>
-          <p:cNvSpPr/>
-          <p:nvPr/>
-        </p:nvSpPr>
-        <p:spPr>
-          <a:xfrm>
-            <a:off x="884439" y="1109610"/>
-            <a:ext cx="9440262" cy="5528957"/>
-          </a:xfrm>
-          <a:prstGeom prst="rect">
-            <a:avLst/>
-          </a:prstGeom>
-          <a:solidFill>
-            <a:schemeClr val="accent4">
-              <a:lumMod val="40000"/>
-              <a:lumOff val="60000"/>
-            </a:schemeClr>
-          </a:solidFill>
-          <a:ln>
-            <a:noFill/>
-          </a:ln>
-        </p:spPr>
-        <p:style>
-          <a:lnRef idx="2">
-            <a:schemeClr val="accent1">
-              <a:shade val="15000"/>
-            </a:schemeClr>
-          </a:lnRef>
-          <a:fillRef idx="1">
-            <a:schemeClr val="accent1"/>
-          </a:fillRef>
-          <a:effectRef idx="0">
-            <a:schemeClr val="accent1"/>
-          </a:effectRef>
-          <a:fontRef idx="minor">
-            <a:schemeClr val="lt1"/>
-          </a:fontRef>
-        </p:style>
-        <p:txBody>
-          <a:bodyPr rtlCol="0" anchor="t"/>
-          <a:lstStyle/>
-          <a:p>
-            <a:endParaRPr kumimoji="1" lang="ja-JP" altLang="en-US" dirty="0"/>
-          </a:p>
-        </p:txBody>
-      </p:sp>
-      <p:sp>
-        <p:nvSpPr>
-          <p:cNvPr id="3" name="字幕 2">
-            <a:extLst>
-              <a:ext uri="{FF2B5EF4-FFF2-40B4-BE49-F238E27FC236}">
-                <a16:creationId xmlns:a16="http://schemas.microsoft.com/office/drawing/2014/main" id="{EF422FEA-2F34-70ED-56A9-01A65A2AD142}"/>
-              </a:ext>
-            </a:extLst>
-          </p:cNvPr>
-          <p:cNvSpPr>
-            <a:spLocks noGrp="1"/>
-          </p:cNvSpPr>
-          <p:nvPr>
-            <p:ph type="subTitle" idx="1"/>
-          </p:nvPr>
-        </p:nvSpPr>
-        <p:spPr>
-          <a:xfrm>
-            <a:off x="884439" y="1097282"/>
-            <a:ext cx="9391483" cy="5446283"/>
-          </a:xfrm>
-        </p:spPr>
-        <p:txBody>
-          <a:bodyPr>
-            <a:normAutofit/>
-          </a:bodyPr>
-          <a:lstStyle/>
-          <a:p>
-            <a:pPr algn="l"/>
-            <a:r>
-              <a:rPr kumimoji="1" lang="ja-JP" altLang="en-US" sz="2000" dirty="0">
-                <a:solidFill>
-                  <a:schemeClr val="accent4">
-                    <a:lumMod val="75000"/>
-                  </a:schemeClr>
-                </a:solidFill>
-                <a:latin typeface="メイリオ" panose="020B0604030504040204" pitchFamily="50" charset="-128"/>
-                <a:ea typeface="メイリオ" panose="020B0604030504040204" pitchFamily="50" charset="-128"/>
-              </a:rPr>
-              <a:t>配列の順番が０からではない理由</a:t>
-            </a:r>
-            <a:endParaRPr kumimoji="1" lang="en-US" altLang="ja-JP" sz="2000" dirty="0">
-              <a:solidFill>
-                <a:schemeClr val="accent4">
-                  <a:lumMod val="75000"/>
-                </a:schemeClr>
-              </a:solidFill>
-              <a:latin typeface="メイリオ" panose="020B0604030504040204" pitchFamily="50" charset="-128"/>
-              <a:ea typeface="メイリオ" panose="020B0604030504040204" pitchFamily="50" charset="-128"/>
-            </a:endParaRPr>
-          </a:p>
-          <a:p>
-            <a:pPr algn="l"/>
-            <a:endParaRPr lang="en-US" altLang="ja-JP" sz="2000" dirty="0">
-              <a:solidFill>
-                <a:schemeClr val="accent4">
-                  <a:lumMod val="75000"/>
-                </a:schemeClr>
-              </a:solidFill>
-              <a:latin typeface="メイリオ" panose="020B0604030504040204" pitchFamily="50" charset="-128"/>
-              <a:ea typeface="メイリオ" panose="020B0604030504040204" pitchFamily="50" charset="-128"/>
-            </a:endParaRPr>
-          </a:p>
-          <a:p>
-            <a:pPr algn="l"/>
-            <a:r>
-              <a:rPr kumimoji="1" lang="en-US" altLang="ja-JP" sz="2000" dirty="0" err="1">
-                <a:solidFill>
-                  <a:schemeClr val="accent4">
-                    <a:lumMod val="75000"/>
-                  </a:schemeClr>
-                </a:solidFill>
-                <a:latin typeface="メイリオ" panose="020B0604030504040204" pitchFamily="50" charset="-128"/>
-                <a:ea typeface="メイリオ" panose="020B0604030504040204" pitchFamily="50" charset="-128"/>
-              </a:rPr>
-              <a:t>R,Python</a:t>
-            </a:r>
-            <a:r>
-              <a:rPr kumimoji="1" lang="ja-JP" altLang="en-US" sz="2000" dirty="0">
-                <a:solidFill>
-                  <a:schemeClr val="accent4">
-                    <a:lumMod val="75000"/>
-                  </a:schemeClr>
-                </a:solidFill>
-                <a:latin typeface="メイリオ" panose="020B0604030504040204" pitchFamily="50" charset="-128"/>
-                <a:ea typeface="メイリオ" panose="020B0604030504040204" pitchFamily="50" charset="-128"/>
-              </a:rPr>
-              <a:t>が肩を宣言する必要がない共通点に関して</a:t>
-            </a:r>
-            <a:endParaRPr kumimoji="1" lang="en-US" altLang="ja-JP" sz="2000" dirty="0">
-              <a:solidFill>
-                <a:schemeClr val="accent4">
-                  <a:lumMod val="75000"/>
-                </a:schemeClr>
-              </a:solidFill>
-              <a:latin typeface="メイリオ" panose="020B0604030504040204" pitchFamily="50" charset="-128"/>
-              <a:ea typeface="メイリオ" panose="020B0604030504040204" pitchFamily="50" charset="-128"/>
-            </a:endParaRPr>
-          </a:p>
-          <a:p>
-            <a:pPr algn="l"/>
-            <a:endParaRPr lang="en-US" altLang="ja-JP" sz="2000" dirty="0">
-              <a:solidFill>
-                <a:schemeClr val="accent4">
-                  <a:lumMod val="75000"/>
-                </a:schemeClr>
-              </a:solidFill>
-              <a:latin typeface="メイリオ" panose="020B0604030504040204" pitchFamily="50" charset="-128"/>
-              <a:ea typeface="メイリオ" panose="020B0604030504040204" pitchFamily="50" charset="-128"/>
-            </a:endParaRPr>
-          </a:p>
-          <a:p>
-            <a:pPr algn="l"/>
-            <a:endParaRPr kumimoji="1" lang="ja-JP" altLang="en-US" sz="2000" dirty="0">
-              <a:solidFill>
-                <a:schemeClr val="accent4">
-                  <a:lumMod val="75000"/>
-                </a:schemeClr>
-              </a:solidFill>
-              <a:latin typeface="メイリオ" panose="020B0604030504040204" pitchFamily="50" charset="-128"/>
-              <a:ea typeface="メイリオ" panose="020B0604030504040204" pitchFamily="50" charset="-128"/>
-            </a:endParaRPr>
-          </a:p>
-        </p:txBody>
-      </p:sp>
-    </p:spTree>
-    <p:extLst>
-      <p:ext uri="{BB962C8B-B14F-4D97-AF65-F5344CB8AC3E}">
-        <p14:creationId xmlns:p14="http://schemas.microsoft.com/office/powerpoint/2010/main" val="2135243812"/>
-      </p:ext>
-    </p:extLst>
-  </p:cSld>
-  <p:clrMapOvr>
-    <a:masterClrMapping/>
-  </p:clrMapOvr>
-</p:sld>
-</file>
-
-<file path=ppt/slides/slide18.xml><?xml version="1.0" encoding="utf-8"?>
-<p:sld xmlns:a="http://schemas.openxmlformats.org/drawingml/2006/main" xmlns:r="http://schemas.openxmlformats.org/officeDocument/2006/relationships" xmlns:p="http://schemas.openxmlformats.org/presentationml/2006/main">
-  <p:cSld>
-    <p:spTree>
-      <p:nvGrpSpPr>
-        <p:cNvPr id="1" name=""/>
-        <p:cNvGrpSpPr/>
-        <p:nvPr/>
-      </p:nvGrpSpPr>
-      <p:grpSpPr>
-        <a:xfrm>
-          <a:off x="0" y="0"/>
-          <a:ext cx="0" cy="0"/>
-          <a:chOff x="0" y="0"/>
-          <a:chExt cx="0" cy="0"/>
-        </a:xfrm>
-      </p:grpSpPr>
-      <p:sp>
-        <p:nvSpPr>
-          <p:cNvPr id="2" name="タイトル 1">
-            <a:extLst>
-              <a:ext uri="{FF2B5EF4-FFF2-40B4-BE49-F238E27FC236}">
-                <a16:creationId xmlns:a16="http://schemas.microsoft.com/office/drawing/2014/main" id="{8F92D15D-6ED6-F1E2-415D-C5D0D0CAAC83}"/>
-              </a:ext>
-            </a:extLst>
-          </p:cNvPr>
-          <p:cNvSpPr>
-            <a:spLocks noGrp="1"/>
-          </p:cNvSpPr>
-          <p:nvPr>
-            <p:ph type="ctrTitle"/>
-          </p:nvPr>
-        </p:nvSpPr>
-        <p:spPr>
-          <a:xfrm>
-            <a:off x="528181" y="314435"/>
-            <a:ext cx="5891408" cy="700173"/>
-          </a:xfrm>
-        </p:spPr>
-        <p:txBody>
-          <a:bodyPr>
-            <a:normAutofit/>
-          </a:bodyPr>
-          <a:lstStyle/>
-          <a:p>
-            <a:pPr algn="l"/>
-            <a:r>
-              <a:rPr kumimoji="1" lang="ja-JP" altLang="en-US" sz="3000" b="1" dirty="0">
-                <a:solidFill>
-                  <a:schemeClr val="tx1">
-                    <a:lumMod val="65000"/>
-                    <a:lumOff val="35000"/>
-                  </a:schemeClr>
-                </a:solidFill>
-                <a:latin typeface="メイリオ" panose="020B0604030504040204" pitchFamily="50" charset="-128"/>
-                <a:ea typeface="メイリオ" panose="020B0604030504040204" pitchFamily="50" charset="-128"/>
-              </a:rPr>
-              <a:t>感想</a:t>
-            </a:r>
-          </a:p>
-        </p:txBody>
-      </p:sp>
-      <p:sp>
-        <p:nvSpPr>
-          <p:cNvPr id="4" name="正方形/長方形 3">
-            <a:extLst>
-              <a:ext uri="{FF2B5EF4-FFF2-40B4-BE49-F238E27FC236}">
-                <a16:creationId xmlns:a16="http://schemas.microsoft.com/office/drawing/2014/main" id="{578782C7-6070-7C3A-DAB7-3101F4C6ED5C}"/>
-              </a:ext>
-            </a:extLst>
-          </p:cNvPr>
-          <p:cNvSpPr/>
-          <p:nvPr/>
-        </p:nvSpPr>
-        <p:spPr>
-          <a:xfrm>
-            <a:off x="884439" y="1109610"/>
-            <a:ext cx="9440262" cy="5528957"/>
-          </a:xfrm>
-          <a:prstGeom prst="rect">
-            <a:avLst/>
-          </a:prstGeom>
-          <a:solidFill>
-            <a:schemeClr val="accent4">
-              <a:lumMod val="40000"/>
-              <a:lumOff val="60000"/>
-            </a:schemeClr>
-          </a:solidFill>
-          <a:ln>
-            <a:noFill/>
-          </a:ln>
-        </p:spPr>
-        <p:style>
-          <a:lnRef idx="2">
-            <a:schemeClr val="accent1">
-              <a:shade val="15000"/>
-            </a:schemeClr>
-          </a:lnRef>
-          <a:fillRef idx="1">
-            <a:schemeClr val="accent1"/>
-          </a:fillRef>
-          <a:effectRef idx="0">
-            <a:schemeClr val="accent1"/>
-          </a:effectRef>
-          <a:fontRef idx="minor">
-            <a:schemeClr val="lt1"/>
-          </a:fontRef>
-        </p:style>
-        <p:txBody>
-          <a:bodyPr rtlCol="0" anchor="t"/>
-          <a:lstStyle/>
-          <a:p>
-            <a:endParaRPr kumimoji="1" lang="ja-JP" altLang="en-US" dirty="0"/>
-          </a:p>
-        </p:txBody>
-      </p:sp>
-      <p:sp>
-        <p:nvSpPr>
-          <p:cNvPr id="3" name="字幕 2">
-            <a:extLst>
-              <a:ext uri="{FF2B5EF4-FFF2-40B4-BE49-F238E27FC236}">
-                <a16:creationId xmlns:a16="http://schemas.microsoft.com/office/drawing/2014/main" id="{EF422FEA-2F34-70ED-56A9-01A65A2AD142}"/>
-              </a:ext>
-            </a:extLst>
-          </p:cNvPr>
-          <p:cNvSpPr>
-            <a:spLocks noGrp="1"/>
-          </p:cNvSpPr>
-          <p:nvPr>
-            <p:ph type="subTitle" idx="1"/>
-          </p:nvPr>
-        </p:nvSpPr>
-        <p:spPr>
-          <a:xfrm>
-            <a:off x="884439" y="1097282"/>
-            <a:ext cx="9391483" cy="5446283"/>
-          </a:xfrm>
-        </p:spPr>
-        <p:txBody>
-          <a:bodyPr>
-            <a:normAutofit/>
-          </a:bodyPr>
-          <a:lstStyle/>
-          <a:p>
-            <a:pPr algn="l"/>
-            <a:r>
-              <a:rPr kumimoji="1" lang="en-US" altLang="ja-JP" sz="2000" dirty="0">
-                <a:solidFill>
-                  <a:schemeClr val="accent4">
-                    <a:lumMod val="75000"/>
-                  </a:schemeClr>
-                </a:solidFill>
-                <a:latin typeface="メイリオ" panose="020B0604030504040204" pitchFamily="50" charset="-128"/>
-                <a:ea typeface="メイリオ" panose="020B0604030504040204" pitchFamily="50" charset="-128"/>
-              </a:rPr>
-              <a:t>Cherries</a:t>
-            </a:r>
-            <a:r>
-              <a:rPr kumimoji="1" lang="ja-JP" altLang="en-US" sz="2000" dirty="0">
-                <a:solidFill>
-                  <a:schemeClr val="accent4">
-                    <a:lumMod val="75000"/>
-                  </a:schemeClr>
-                </a:solidFill>
-                <a:latin typeface="メイリオ" panose="020B0604030504040204" pitchFamily="50" charset="-128"/>
-                <a:ea typeface="メイリオ" panose="020B0604030504040204" pitchFamily="50" charset="-128"/>
-              </a:rPr>
-              <a:t>の点数を場合分けする際、</a:t>
-            </a:r>
-            <a:r>
-              <a:rPr lang="ja-JP" altLang="en-US" sz="2000" dirty="0">
-                <a:solidFill>
-                  <a:schemeClr val="accent4">
-                    <a:lumMod val="75000"/>
-                  </a:schemeClr>
-                </a:solidFill>
-                <a:latin typeface="メイリオ" panose="020B0604030504040204" pitchFamily="50" charset="-128"/>
-                <a:ea typeface="メイリオ" panose="020B0604030504040204" pitchFamily="50" charset="-128"/>
-              </a:rPr>
-              <a:t>添字操作を利用して、７行の</a:t>
-            </a:r>
-            <a:r>
-              <a:rPr lang="en-US" altLang="ja-JP" sz="2000" dirty="0">
-                <a:solidFill>
-                  <a:schemeClr val="accent4">
-                    <a:lumMod val="75000"/>
-                  </a:schemeClr>
-                </a:solidFill>
-                <a:latin typeface="メイリオ" panose="020B0604030504040204" pitchFamily="50" charset="-128"/>
-                <a:ea typeface="メイリオ" panose="020B0604030504040204" pitchFamily="50" charset="-128"/>
-              </a:rPr>
-              <a:t>if</a:t>
-            </a:r>
-            <a:r>
-              <a:rPr lang="ja-JP" altLang="en-US" sz="2000" dirty="0">
-                <a:solidFill>
-                  <a:schemeClr val="accent4">
-                    <a:lumMod val="75000"/>
-                  </a:schemeClr>
-                </a:solidFill>
-                <a:latin typeface="メイリオ" panose="020B0604030504040204" pitchFamily="50" charset="-128"/>
-                <a:ea typeface="メイリオ" panose="020B0604030504040204" pitchFamily="50" charset="-128"/>
-              </a:rPr>
-              <a:t>文を１行に短縮できたことに感動した。</a:t>
-            </a:r>
-            <a:endParaRPr lang="en-US" altLang="ja-JP" sz="2000" dirty="0">
-              <a:solidFill>
-                <a:schemeClr val="accent4">
-                  <a:lumMod val="75000"/>
-                </a:schemeClr>
-              </a:solidFill>
-              <a:latin typeface="メイリオ" panose="020B0604030504040204" pitchFamily="50" charset="-128"/>
-              <a:ea typeface="メイリオ" panose="020B0604030504040204" pitchFamily="50" charset="-128"/>
-            </a:endParaRPr>
-          </a:p>
-          <a:p>
-            <a:pPr algn="l"/>
-            <a:endParaRPr kumimoji="1" lang="ja-JP" altLang="en-US" sz="2000" dirty="0">
-              <a:solidFill>
-                <a:schemeClr val="accent4">
-                  <a:lumMod val="75000"/>
-                </a:schemeClr>
-              </a:solidFill>
-              <a:latin typeface="メイリオ" panose="020B0604030504040204" pitchFamily="50" charset="-128"/>
-              <a:ea typeface="メイリオ" panose="020B0604030504040204" pitchFamily="50" charset="-128"/>
-            </a:endParaRPr>
-          </a:p>
-        </p:txBody>
-      </p:sp>
-    </p:spTree>
-    <p:extLst>
-      <p:ext uri="{BB962C8B-B14F-4D97-AF65-F5344CB8AC3E}">
-        <p14:creationId xmlns:p14="http://schemas.microsoft.com/office/powerpoint/2010/main" val="878594590"/>
-      </p:ext>
-    </p:extLst>
-  </p:cSld>
-  <p:clrMapOvr>
-    <a:masterClrMapping/>
-  </p:clrMapOvr>
-</p:sld>
-</file>
-
-<file path=ppt/slides/slide19.xml><?xml version="1.0" encoding="utf-8"?>
-<p:sld xmlns:a="http://schemas.openxmlformats.org/drawingml/2006/main" xmlns:r="http://schemas.openxmlformats.org/officeDocument/2006/relationships" xmlns:p="http://schemas.openxmlformats.org/presentationml/2006/main">
-  <p:cSld>
-    <p:spTree>
-      <p:nvGrpSpPr>
-        <p:cNvPr id="1" name=""/>
-        <p:cNvGrpSpPr/>
-        <p:nvPr/>
-      </p:nvGrpSpPr>
-      <p:grpSpPr>
-        <a:xfrm>
-          <a:off x="0" y="0"/>
-          <a:ext cx="0" cy="0"/>
-          <a:chOff x="0" y="0"/>
-          <a:chExt cx="0" cy="0"/>
-        </a:xfrm>
-      </p:grpSpPr>
-      <p:sp>
-        <p:nvSpPr>
-          <p:cNvPr id="2" name="タイトル 1">
-            <a:extLst>
-              <a:ext uri="{FF2B5EF4-FFF2-40B4-BE49-F238E27FC236}">
-                <a16:creationId xmlns:a16="http://schemas.microsoft.com/office/drawing/2014/main" id="{8F92D15D-6ED6-F1E2-415D-C5D0D0CAAC83}"/>
-              </a:ext>
-            </a:extLst>
-          </p:cNvPr>
-          <p:cNvSpPr>
-            <a:spLocks noGrp="1"/>
-          </p:cNvSpPr>
-          <p:nvPr>
-            <p:ph type="ctrTitle"/>
-          </p:nvPr>
-        </p:nvSpPr>
-        <p:spPr>
-          <a:xfrm>
-            <a:off x="528181" y="314435"/>
-            <a:ext cx="5891408" cy="700173"/>
-          </a:xfrm>
-        </p:spPr>
-        <p:txBody>
-          <a:bodyPr>
-            <a:normAutofit/>
-          </a:bodyPr>
-          <a:lstStyle/>
-          <a:p>
-            <a:pPr algn="l"/>
-            <a:r>
-              <a:rPr kumimoji="1" lang="ja-JP" altLang="en-US" sz="3000" b="1" dirty="0">
-                <a:solidFill>
-                  <a:schemeClr val="tx1">
-                    <a:lumMod val="65000"/>
-                    <a:lumOff val="35000"/>
-                  </a:schemeClr>
-                </a:solidFill>
-                <a:latin typeface="メイリオ" panose="020B0604030504040204" pitchFamily="50" charset="-128"/>
-                <a:ea typeface="メイリオ" panose="020B0604030504040204" pitchFamily="50" charset="-128"/>
-              </a:rPr>
-              <a:t>参考文献</a:t>
-            </a:r>
-          </a:p>
-        </p:txBody>
-      </p:sp>
-      <p:sp>
-        <p:nvSpPr>
-          <p:cNvPr id="4" name="正方形/長方形 3">
-            <a:extLst>
-              <a:ext uri="{FF2B5EF4-FFF2-40B4-BE49-F238E27FC236}">
-                <a16:creationId xmlns:a16="http://schemas.microsoft.com/office/drawing/2014/main" id="{578782C7-6070-7C3A-DAB7-3101F4C6ED5C}"/>
-              </a:ext>
-            </a:extLst>
-          </p:cNvPr>
-          <p:cNvSpPr/>
-          <p:nvPr/>
-        </p:nvSpPr>
-        <p:spPr>
-          <a:xfrm>
-            <a:off x="884439" y="1109610"/>
-            <a:ext cx="9440262" cy="5528957"/>
-          </a:xfrm>
-          <a:prstGeom prst="rect">
-            <a:avLst/>
-          </a:prstGeom>
-          <a:solidFill>
-            <a:schemeClr val="accent4">
-              <a:lumMod val="40000"/>
-              <a:lumOff val="60000"/>
-            </a:schemeClr>
-          </a:solidFill>
-          <a:ln>
-            <a:noFill/>
-          </a:ln>
-        </p:spPr>
-        <p:style>
-          <a:lnRef idx="2">
-            <a:schemeClr val="accent1">
-              <a:shade val="15000"/>
-            </a:schemeClr>
-          </a:lnRef>
-          <a:fillRef idx="1">
-            <a:schemeClr val="accent1"/>
-          </a:fillRef>
-          <a:effectRef idx="0">
-            <a:schemeClr val="accent1"/>
-          </a:effectRef>
-          <a:fontRef idx="minor">
-            <a:schemeClr val="lt1"/>
-          </a:fontRef>
-        </p:style>
-        <p:txBody>
-          <a:bodyPr rtlCol="0" anchor="t"/>
-          <a:lstStyle/>
-          <a:p>
-            <a:endParaRPr kumimoji="1" lang="ja-JP" altLang="en-US" dirty="0"/>
-          </a:p>
-        </p:txBody>
-      </p:sp>
-      <p:sp>
-        <p:nvSpPr>
-          <p:cNvPr id="3" name="字幕 2">
-            <a:extLst>
-              <a:ext uri="{FF2B5EF4-FFF2-40B4-BE49-F238E27FC236}">
-                <a16:creationId xmlns:a16="http://schemas.microsoft.com/office/drawing/2014/main" id="{EF422FEA-2F34-70ED-56A9-01A65A2AD142}"/>
-              </a:ext>
-            </a:extLst>
-          </p:cNvPr>
-          <p:cNvSpPr>
-            <a:spLocks noGrp="1"/>
-          </p:cNvSpPr>
-          <p:nvPr>
-            <p:ph type="subTitle" idx="1"/>
-          </p:nvPr>
-        </p:nvSpPr>
-        <p:spPr>
-          <a:xfrm>
-            <a:off x="884439" y="1097282"/>
-            <a:ext cx="9391483" cy="5446283"/>
-          </a:xfrm>
-        </p:spPr>
-        <p:txBody>
-          <a:bodyPr>
-            <a:normAutofit/>
-          </a:bodyPr>
-          <a:lstStyle/>
-          <a:p>
-            <a:pPr algn="l"/>
-            <a:endParaRPr kumimoji="1" lang="ja-JP" altLang="en-US" sz="2000" dirty="0">
-              <a:solidFill>
-                <a:schemeClr val="accent4">
-                  <a:lumMod val="75000"/>
-                </a:schemeClr>
-              </a:solidFill>
-              <a:latin typeface="メイリオ" panose="020B0604030504040204" pitchFamily="50" charset="-128"/>
-              <a:ea typeface="メイリオ" panose="020B0604030504040204" pitchFamily="50" charset="-128"/>
-            </a:endParaRPr>
-          </a:p>
-        </p:txBody>
-      </p:sp>
-    </p:spTree>
-    <p:extLst>
-      <p:ext uri="{BB962C8B-B14F-4D97-AF65-F5344CB8AC3E}">
-        <p14:creationId xmlns:p14="http://schemas.microsoft.com/office/powerpoint/2010/main" val="1234966581"/>
       </p:ext>
     </p:extLst>
   </p:cSld>
@@ -10856,6 +13839,984 @@
 </p:sld>
 </file>
 
+<file path=ppt/slides/slide20.xml><?xml version="1.0" encoding="utf-8"?>
+<p:sld xmlns:a="http://schemas.openxmlformats.org/drawingml/2006/main" xmlns:r="http://schemas.openxmlformats.org/officeDocument/2006/relationships" xmlns:p="http://schemas.openxmlformats.org/presentationml/2006/main">
+  <p:cSld>
+    <p:spTree>
+      <p:nvGrpSpPr>
+        <p:cNvPr id="1" name=""/>
+        <p:cNvGrpSpPr/>
+        <p:nvPr/>
+      </p:nvGrpSpPr>
+      <p:grpSpPr>
+        <a:xfrm>
+          <a:off x="0" y="0"/>
+          <a:ext cx="0" cy="0"/>
+          <a:chOff x="0" y="0"/>
+          <a:chExt cx="0" cy="0"/>
+        </a:xfrm>
+      </p:grpSpPr>
+      <p:sp>
+        <p:nvSpPr>
+          <p:cNvPr id="2" name="タイトル 1">
+            <a:extLst>
+              <a:ext uri="{FF2B5EF4-FFF2-40B4-BE49-F238E27FC236}">
+                <a16:creationId xmlns:a16="http://schemas.microsoft.com/office/drawing/2014/main" id="{8F92D15D-6ED6-F1E2-415D-C5D0D0CAAC83}"/>
+              </a:ext>
+            </a:extLst>
+          </p:cNvPr>
+          <p:cNvSpPr>
+            <a:spLocks noGrp="1"/>
+          </p:cNvSpPr>
+          <p:nvPr>
+            <p:ph type="ctrTitle"/>
+          </p:nvPr>
+        </p:nvSpPr>
+        <p:spPr>
+          <a:xfrm>
+            <a:off x="528181" y="314435"/>
+            <a:ext cx="5891408" cy="700173"/>
+          </a:xfrm>
+        </p:spPr>
+        <p:txBody>
+          <a:bodyPr>
+            <a:normAutofit/>
+          </a:bodyPr>
+          <a:lstStyle/>
+          <a:p>
+            <a:pPr algn="l"/>
+            <a:r>
+              <a:rPr kumimoji="1" lang="ja-JP" altLang="en-US" sz="3000" b="1" dirty="0">
+                <a:solidFill>
+                  <a:schemeClr val="tx1">
+                    <a:lumMod val="65000"/>
+                    <a:lumOff val="35000"/>
+                  </a:schemeClr>
+                </a:solidFill>
+                <a:latin typeface="メイリオ" panose="020B0604030504040204" pitchFamily="50" charset="-128"/>
+                <a:ea typeface="メイリオ" panose="020B0604030504040204" pitchFamily="50" charset="-128"/>
+              </a:rPr>
+              <a:t>疑問点</a:t>
+            </a:r>
+          </a:p>
+        </p:txBody>
+      </p:sp>
+      <p:sp>
+        <p:nvSpPr>
+          <p:cNvPr id="4" name="正方形/長方形 3">
+            <a:extLst>
+              <a:ext uri="{FF2B5EF4-FFF2-40B4-BE49-F238E27FC236}">
+                <a16:creationId xmlns:a16="http://schemas.microsoft.com/office/drawing/2014/main" id="{578782C7-6070-7C3A-DAB7-3101F4C6ED5C}"/>
+              </a:ext>
+            </a:extLst>
+          </p:cNvPr>
+          <p:cNvSpPr/>
+          <p:nvPr/>
+        </p:nvSpPr>
+        <p:spPr>
+          <a:xfrm>
+            <a:off x="884439" y="1109610"/>
+            <a:ext cx="9440262" cy="5528957"/>
+          </a:xfrm>
+          <a:prstGeom prst="rect">
+            <a:avLst/>
+          </a:prstGeom>
+          <a:solidFill>
+            <a:schemeClr val="accent4">
+              <a:lumMod val="40000"/>
+              <a:lumOff val="60000"/>
+            </a:schemeClr>
+          </a:solidFill>
+          <a:ln>
+            <a:noFill/>
+          </a:ln>
+        </p:spPr>
+        <p:style>
+          <a:lnRef idx="2">
+            <a:schemeClr val="accent1">
+              <a:shade val="15000"/>
+            </a:schemeClr>
+          </a:lnRef>
+          <a:fillRef idx="1">
+            <a:schemeClr val="accent1"/>
+          </a:fillRef>
+          <a:effectRef idx="0">
+            <a:schemeClr val="accent1"/>
+          </a:effectRef>
+          <a:fontRef idx="minor">
+            <a:schemeClr val="lt1"/>
+          </a:fontRef>
+        </p:style>
+        <p:txBody>
+          <a:bodyPr rtlCol="0" anchor="t"/>
+          <a:lstStyle/>
+          <a:p>
+            <a:endParaRPr kumimoji="1" lang="ja-JP" altLang="en-US" dirty="0"/>
+          </a:p>
+        </p:txBody>
+      </p:sp>
+      <p:sp>
+        <p:nvSpPr>
+          <p:cNvPr id="3" name="字幕 2">
+            <a:extLst>
+              <a:ext uri="{FF2B5EF4-FFF2-40B4-BE49-F238E27FC236}">
+                <a16:creationId xmlns:a16="http://schemas.microsoft.com/office/drawing/2014/main" id="{EF422FEA-2F34-70ED-56A9-01A65A2AD142}"/>
+              </a:ext>
+            </a:extLst>
+          </p:cNvPr>
+          <p:cNvSpPr>
+            <a:spLocks noGrp="1"/>
+          </p:cNvSpPr>
+          <p:nvPr>
+            <p:ph type="subTitle" idx="1"/>
+          </p:nvPr>
+        </p:nvSpPr>
+        <p:spPr>
+          <a:xfrm>
+            <a:off x="884439" y="1097282"/>
+            <a:ext cx="9391483" cy="5446283"/>
+          </a:xfrm>
+        </p:spPr>
+        <p:txBody>
+          <a:bodyPr>
+            <a:normAutofit/>
+          </a:bodyPr>
+          <a:lstStyle/>
+          <a:p>
+            <a:pPr algn="l"/>
+            <a:r>
+              <a:rPr kumimoji="1" lang="ja-JP" altLang="en-US" sz="2000" dirty="0">
+                <a:solidFill>
+                  <a:schemeClr val="accent4">
+                    <a:lumMod val="75000"/>
+                  </a:schemeClr>
+                </a:solidFill>
+                <a:latin typeface="メイリオ" panose="020B0604030504040204" pitchFamily="50" charset="-128"/>
+                <a:ea typeface="メイリオ" panose="020B0604030504040204" pitchFamily="50" charset="-128"/>
+              </a:rPr>
+              <a:t>配列の順番が０からではない理由</a:t>
+            </a:r>
+            <a:endParaRPr kumimoji="1" lang="en-US" altLang="ja-JP" sz="2000" dirty="0">
+              <a:solidFill>
+                <a:schemeClr val="accent4">
+                  <a:lumMod val="75000"/>
+                </a:schemeClr>
+              </a:solidFill>
+              <a:latin typeface="メイリオ" panose="020B0604030504040204" pitchFamily="50" charset="-128"/>
+              <a:ea typeface="メイリオ" panose="020B0604030504040204" pitchFamily="50" charset="-128"/>
+            </a:endParaRPr>
+          </a:p>
+          <a:p>
+            <a:pPr algn="l"/>
+            <a:endParaRPr lang="en-US" altLang="ja-JP" sz="2000" dirty="0">
+              <a:solidFill>
+                <a:schemeClr val="accent4">
+                  <a:lumMod val="75000"/>
+                </a:schemeClr>
+              </a:solidFill>
+              <a:latin typeface="メイリオ" panose="020B0604030504040204" pitchFamily="50" charset="-128"/>
+              <a:ea typeface="メイリオ" panose="020B0604030504040204" pitchFamily="50" charset="-128"/>
+            </a:endParaRPr>
+          </a:p>
+          <a:p>
+            <a:pPr algn="l"/>
+            <a:r>
+              <a:rPr kumimoji="1" lang="en-US" altLang="ja-JP" sz="2000" dirty="0" err="1">
+                <a:solidFill>
+                  <a:schemeClr val="accent4">
+                    <a:lumMod val="75000"/>
+                  </a:schemeClr>
+                </a:solidFill>
+                <a:latin typeface="メイリオ" panose="020B0604030504040204" pitchFamily="50" charset="-128"/>
+                <a:ea typeface="メイリオ" panose="020B0604030504040204" pitchFamily="50" charset="-128"/>
+              </a:rPr>
+              <a:t>R,Python</a:t>
+            </a:r>
+            <a:r>
+              <a:rPr kumimoji="1" lang="ja-JP" altLang="en-US" sz="2000" dirty="0">
+                <a:solidFill>
+                  <a:schemeClr val="accent4">
+                    <a:lumMod val="75000"/>
+                  </a:schemeClr>
+                </a:solidFill>
+                <a:latin typeface="メイリオ" panose="020B0604030504040204" pitchFamily="50" charset="-128"/>
+                <a:ea typeface="メイリオ" panose="020B0604030504040204" pitchFamily="50" charset="-128"/>
+              </a:rPr>
+              <a:t>が肩を宣言する必要がない共通点に関して</a:t>
+            </a:r>
+            <a:endParaRPr kumimoji="1" lang="en-US" altLang="ja-JP" sz="2000" dirty="0">
+              <a:solidFill>
+                <a:schemeClr val="accent4">
+                  <a:lumMod val="75000"/>
+                </a:schemeClr>
+              </a:solidFill>
+              <a:latin typeface="メイリオ" panose="020B0604030504040204" pitchFamily="50" charset="-128"/>
+              <a:ea typeface="メイリオ" panose="020B0604030504040204" pitchFamily="50" charset="-128"/>
+            </a:endParaRPr>
+          </a:p>
+          <a:p>
+            <a:pPr algn="l"/>
+            <a:endParaRPr lang="en-US" altLang="ja-JP" sz="2000" dirty="0">
+              <a:solidFill>
+                <a:schemeClr val="accent4">
+                  <a:lumMod val="75000"/>
+                </a:schemeClr>
+              </a:solidFill>
+              <a:latin typeface="メイリオ" panose="020B0604030504040204" pitchFamily="50" charset="-128"/>
+              <a:ea typeface="メイリオ" panose="020B0604030504040204" pitchFamily="50" charset="-128"/>
+            </a:endParaRPr>
+          </a:p>
+          <a:p>
+            <a:pPr algn="l"/>
+            <a:r>
+              <a:rPr kumimoji="1" lang="en-US" altLang="ja-JP" sz="2000" dirty="0">
+                <a:solidFill>
+                  <a:schemeClr val="accent4">
+                    <a:lumMod val="75000"/>
+                  </a:schemeClr>
+                </a:solidFill>
+                <a:latin typeface="メイリオ" panose="020B0604030504040204" pitchFamily="50" charset="-128"/>
+                <a:ea typeface="メイリオ" panose="020B0604030504040204" pitchFamily="50" charset="-128"/>
+              </a:rPr>
+              <a:t>A,B,C </a:t>
+            </a:r>
+            <a:r>
+              <a:rPr kumimoji="1" lang="ja-JP" altLang="en-US" sz="2000" dirty="0">
+                <a:solidFill>
+                  <a:schemeClr val="accent4">
+                    <a:lumMod val="75000"/>
+                  </a:schemeClr>
+                </a:solidFill>
+                <a:latin typeface="メイリオ" panose="020B0604030504040204" pitchFamily="50" charset="-128"/>
+                <a:ea typeface="メイリオ" panose="020B0604030504040204" pitchFamily="50" charset="-128"/>
+              </a:rPr>
+              <a:t>と</a:t>
+            </a:r>
+            <a:r>
+              <a:rPr kumimoji="1" lang="en-US" altLang="ja-JP" sz="2000" dirty="0">
+                <a:solidFill>
+                  <a:schemeClr val="accent4">
+                    <a:lumMod val="75000"/>
+                  </a:schemeClr>
+                </a:solidFill>
+                <a:latin typeface="メイリオ" panose="020B0604030504040204" pitchFamily="50" charset="-128"/>
+                <a:ea typeface="メイリオ" panose="020B0604030504040204" pitchFamily="50" charset="-128"/>
+              </a:rPr>
+              <a:t>B,A</a:t>
+            </a:r>
+            <a:r>
+              <a:rPr lang="en-US" altLang="ja-JP" sz="2000" dirty="0">
+                <a:solidFill>
+                  <a:schemeClr val="accent4">
+                    <a:lumMod val="75000"/>
+                  </a:schemeClr>
+                </a:solidFill>
+                <a:latin typeface="メイリオ" panose="020B0604030504040204" pitchFamily="50" charset="-128"/>
+                <a:ea typeface="メイリオ" panose="020B0604030504040204" pitchFamily="50" charset="-128"/>
+              </a:rPr>
+              <a:t>,C</a:t>
+            </a:r>
+            <a:r>
+              <a:rPr lang="ja-JP" altLang="en-US" sz="2000" dirty="0">
+                <a:solidFill>
+                  <a:schemeClr val="accent4">
+                    <a:lumMod val="75000"/>
+                  </a:schemeClr>
+                </a:solidFill>
+                <a:latin typeface="メイリオ" panose="020B0604030504040204" pitchFamily="50" charset="-128"/>
+                <a:ea typeface="メイリオ" panose="020B0604030504040204" pitchFamily="50" charset="-128"/>
+              </a:rPr>
+              <a:t>が出てくるが、これを一つにまとめる方法はないのか。（後で考える）</a:t>
+            </a:r>
+            <a:endParaRPr lang="en-US" altLang="ja-JP" sz="2000" dirty="0">
+              <a:solidFill>
+                <a:schemeClr val="accent4">
+                  <a:lumMod val="75000"/>
+                </a:schemeClr>
+              </a:solidFill>
+              <a:latin typeface="メイリオ" panose="020B0604030504040204" pitchFamily="50" charset="-128"/>
+              <a:ea typeface="メイリオ" panose="020B0604030504040204" pitchFamily="50" charset="-128"/>
+            </a:endParaRPr>
+          </a:p>
+          <a:p>
+            <a:pPr algn="l"/>
+            <a:endParaRPr kumimoji="1" lang="en-US" altLang="ja-JP" sz="2000" dirty="0">
+              <a:solidFill>
+                <a:schemeClr val="accent4">
+                  <a:lumMod val="75000"/>
+                </a:schemeClr>
+              </a:solidFill>
+              <a:latin typeface="メイリオ" panose="020B0604030504040204" pitchFamily="50" charset="-128"/>
+              <a:ea typeface="メイリオ" panose="020B0604030504040204" pitchFamily="50" charset="-128"/>
+            </a:endParaRPr>
+          </a:p>
+          <a:p>
+            <a:pPr algn="l"/>
+            <a:endParaRPr lang="en-US" altLang="ja-JP" sz="2000" dirty="0">
+              <a:solidFill>
+                <a:schemeClr val="accent4">
+                  <a:lumMod val="75000"/>
+                </a:schemeClr>
+              </a:solidFill>
+              <a:latin typeface="メイリオ" panose="020B0604030504040204" pitchFamily="50" charset="-128"/>
+              <a:ea typeface="メイリオ" panose="020B0604030504040204" pitchFamily="50" charset="-128"/>
+            </a:endParaRPr>
+          </a:p>
+          <a:p>
+            <a:pPr algn="l"/>
+            <a:r>
+              <a:rPr kumimoji="1" lang="ja-JP" altLang="en-US" sz="2000" dirty="0">
+                <a:solidFill>
+                  <a:srgbClr val="C00000"/>
+                </a:solidFill>
+                <a:latin typeface="メイリオ" panose="020B0604030504040204" pitchFamily="50" charset="-128"/>
+                <a:ea typeface="メイリオ" panose="020B0604030504040204" pitchFamily="50" charset="-128"/>
+              </a:rPr>
+              <a:t>あとで！！！</a:t>
+            </a:r>
+            <a:r>
+              <a:rPr kumimoji="1" lang="en-US" altLang="ja-JP" sz="2000" dirty="0">
+                <a:solidFill>
+                  <a:srgbClr val="C00000"/>
+                </a:solidFill>
+                <a:latin typeface="メイリオ" panose="020B0604030504040204" pitchFamily="50" charset="-128"/>
+                <a:ea typeface="メイリオ" panose="020B0604030504040204" pitchFamily="50" charset="-128"/>
+              </a:rPr>
+              <a:t>Factor</a:t>
+            </a:r>
+            <a:r>
+              <a:rPr kumimoji="1" lang="ja-JP" altLang="en-US" sz="2000" dirty="0">
+                <a:solidFill>
+                  <a:srgbClr val="C00000"/>
+                </a:solidFill>
+                <a:latin typeface="メイリオ" panose="020B0604030504040204" pitchFamily="50" charset="-128"/>
+                <a:ea typeface="メイリオ" panose="020B0604030504040204" pitchFamily="50" charset="-128"/>
+              </a:rPr>
+              <a:t>！！！絶対調べる！！！！</a:t>
+            </a:r>
+            <a:endParaRPr kumimoji="1" lang="en-US" altLang="ja-JP" sz="2000" dirty="0">
+              <a:solidFill>
+                <a:srgbClr val="C00000"/>
+              </a:solidFill>
+              <a:latin typeface="メイリオ" panose="020B0604030504040204" pitchFamily="50" charset="-128"/>
+              <a:ea typeface="メイリオ" panose="020B0604030504040204" pitchFamily="50" charset="-128"/>
+            </a:endParaRPr>
+          </a:p>
+        </p:txBody>
+      </p:sp>
+    </p:spTree>
+    <p:extLst>
+      <p:ext uri="{BB962C8B-B14F-4D97-AF65-F5344CB8AC3E}">
+        <p14:creationId xmlns:p14="http://schemas.microsoft.com/office/powerpoint/2010/main" val="2135243812"/>
+      </p:ext>
+    </p:extLst>
+  </p:cSld>
+  <p:clrMapOvr>
+    <a:masterClrMapping/>
+  </p:clrMapOvr>
+</p:sld>
+</file>
+
+<file path=ppt/slides/slide21.xml><?xml version="1.0" encoding="utf-8"?>
+<p:sld xmlns:a="http://schemas.openxmlformats.org/drawingml/2006/main" xmlns:r="http://schemas.openxmlformats.org/officeDocument/2006/relationships" xmlns:p="http://schemas.openxmlformats.org/presentationml/2006/main">
+  <p:cSld>
+    <p:spTree>
+      <p:nvGrpSpPr>
+        <p:cNvPr id="1" name=""/>
+        <p:cNvGrpSpPr/>
+        <p:nvPr/>
+      </p:nvGrpSpPr>
+      <p:grpSpPr>
+        <a:xfrm>
+          <a:off x="0" y="0"/>
+          <a:ext cx="0" cy="0"/>
+          <a:chOff x="0" y="0"/>
+          <a:chExt cx="0" cy="0"/>
+        </a:xfrm>
+      </p:grpSpPr>
+      <p:sp>
+        <p:nvSpPr>
+          <p:cNvPr id="2" name="タイトル 1">
+            <a:extLst>
+              <a:ext uri="{FF2B5EF4-FFF2-40B4-BE49-F238E27FC236}">
+                <a16:creationId xmlns:a16="http://schemas.microsoft.com/office/drawing/2014/main" id="{8F92D15D-6ED6-F1E2-415D-C5D0D0CAAC83}"/>
+              </a:ext>
+            </a:extLst>
+          </p:cNvPr>
+          <p:cNvSpPr>
+            <a:spLocks noGrp="1"/>
+          </p:cNvSpPr>
+          <p:nvPr>
+            <p:ph type="ctrTitle"/>
+          </p:nvPr>
+        </p:nvSpPr>
+        <p:spPr>
+          <a:xfrm>
+            <a:off x="528181" y="314435"/>
+            <a:ext cx="5891408" cy="700173"/>
+          </a:xfrm>
+        </p:spPr>
+        <p:txBody>
+          <a:bodyPr>
+            <a:normAutofit/>
+          </a:bodyPr>
+          <a:lstStyle/>
+          <a:p>
+            <a:pPr algn="l"/>
+            <a:r>
+              <a:rPr kumimoji="1" lang="ja-JP" altLang="en-US" sz="3000" b="1" dirty="0">
+                <a:solidFill>
+                  <a:schemeClr val="tx1">
+                    <a:lumMod val="65000"/>
+                    <a:lumOff val="35000"/>
+                  </a:schemeClr>
+                </a:solidFill>
+                <a:latin typeface="メイリオ" panose="020B0604030504040204" pitchFamily="50" charset="-128"/>
+                <a:ea typeface="メイリオ" panose="020B0604030504040204" pitchFamily="50" charset="-128"/>
+              </a:rPr>
+              <a:t>感想</a:t>
+            </a:r>
+          </a:p>
+        </p:txBody>
+      </p:sp>
+      <p:sp>
+        <p:nvSpPr>
+          <p:cNvPr id="4" name="正方形/長方形 3">
+            <a:extLst>
+              <a:ext uri="{FF2B5EF4-FFF2-40B4-BE49-F238E27FC236}">
+                <a16:creationId xmlns:a16="http://schemas.microsoft.com/office/drawing/2014/main" id="{578782C7-6070-7C3A-DAB7-3101F4C6ED5C}"/>
+              </a:ext>
+            </a:extLst>
+          </p:cNvPr>
+          <p:cNvSpPr/>
+          <p:nvPr/>
+        </p:nvSpPr>
+        <p:spPr>
+          <a:xfrm>
+            <a:off x="884439" y="1109610"/>
+            <a:ext cx="9440262" cy="5528957"/>
+          </a:xfrm>
+          <a:prstGeom prst="rect">
+            <a:avLst/>
+          </a:prstGeom>
+          <a:solidFill>
+            <a:schemeClr val="accent4">
+              <a:lumMod val="40000"/>
+              <a:lumOff val="60000"/>
+            </a:schemeClr>
+          </a:solidFill>
+          <a:ln>
+            <a:noFill/>
+          </a:ln>
+        </p:spPr>
+        <p:style>
+          <a:lnRef idx="2">
+            <a:schemeClr val="accent1">
+              <a:shade val="15000"/>
+            </a:schemeClr>
+          </a:lnRef>
+          <a:fillRef idx="1">
+            <a:schemeClr val="accent1"/>
+          </a:fillRef>
+          <a:effectRef idx="0">
+            <a:schemeClr val="accent1"/>
+          </a:effectRef>
+          <a:fontRef idx="minor">
+            <a:schemeClr val="lt1"/>
+          </a:fontRef>
+        </p:style>
+        <p:txBody>
+          <a:bodyPr rtlCol="0" anchor="t"/>
+          <a:lstStyle/>
+          <a:p>
+            <a:endParaRPr kumimoji="1" lang="ja-JP" altLang="en-US" dirty="0"/>
+          </a:p>
+        </p:txBody>
+      </p:sp>
+      <p:sp>
+        <p:nvSpPr>
+          <p:cNvPr id="3" name="字幕 2">
+            <a:extLst>
+              <a:ext uri="{FF2B5EF4-FFF2-40B4-BE49-F238E27FC236}">
+                <a16:creationId xmlns:a16="http://schemas.microsoft.com/office/drawing/2014/main" id="{EF422FEA-2F34-70ED-56A9-01A65A2AD142}"/>
+              </a:ext>
+            </a:extLst>
+          </p:cNvPr>
+          <p:cNvSpPr>
+            <a:spLocks noGrp="1"/>
+          </p:cNvSpPr>
+          <p:nvPr>
+            <p:ph type="subTitle" idx="1"/>
+          </p:nvPr>
+        </p:nvSpPr>
+        <p:spPr>
+          <a:xfrm>
+            <a:off x="884439" y="1097282"/>
+            <a:ext cx="9391483" cy="5446283"/>
+          </a:xfrm>
+        </p:spPr>
+        <p:txBody>
+          <a:bodyPr>
+            <a:normAutofit/>
+          </a:bodyPr>
+          <a:lstStyle/>
+          <a:p>
+            <a:pPr algn="l"/>
+            <a:r>
+              <a:rPr kumimoji="1" lang="en-US" altLang="ja-JP" sz="2000" dirty="0">
+                <a:solidFill>
+                  <a:schemeClr val="accent4">
+                    <a:lumMod val="75000"/>
+                  </a:schemeClr>
+                </a:solidFill>
+                <a:latin typeface="メイリオ" panose="020B0604030504040204" pitchFamily="50" charset="-128"/>
+                <a:ea typeface="メイリオ" panose="020B0604030504040204" pitchFamily="50" charset="-128"/>
+              </a:rPr>
+              <a:t>Cherries</a:t>
+            </a:r>
+            <a:r>
+              <a:rPr kumimoji="1" lang="ja-JP" altLang="en-US" sz="2000" dirty="0">
+                <a:solidFill>
+                  <a:schemeClr val="accent4">
+                    <a:lumMod val="75000"/>
+                  </a:schemeClr>
+                </a:solidFill>
+                <a:latin typeface="メイリオ" panose="020B0604030504040204" pitchFamily="50" charset="-128"/>
+                <a:ea typeface="メイリオ" panose="020B0604030504040204" pitchFamily="50" charset="-128"/>
+              </a:rPr>
+              <a:t>の点数を場合分けする際、</a:t>
+            </a:r>
+            <a:r>
+              <a:rPr lang="ja-JP" altLang="en-US" sz="2000" dirty="0">
+                <a:solidFill>
+                  <a:schemeClr val="accent4">
+                    <a:lumMod val="75000"/>
+                  </a:schemeClr>
+                </a:solidFill>
+                <a:latin typeface="メイリオ" panose="020B0604030504040204" pitchFamily="50" charset="-128"/>
+                <a:ea typeface="メイリオ" panose="020B0604030504040204" pitchFamily="50" charset="-128"/>
+              </a:rPr>
+              <a:t>添字操作を利用して、７行の</a:t>
+            </a:r>
+            <a:r>
+              <a:rPr lang="en-US" altLang="ja-JP" sz="2000" dirty="0">
+                <a:solidFill>
+                  <a:schemeClr val="accent4">
+                    <a:lumMod val="75000"/>
+                  </a:schemeClr>
+                </a:solidFill>
+                <a:latin typeface="メイリオ" panose="020B0604030504040204" pitchFamily="50" charset="-128"/>
+                <a:ea typeface="メイリオ" panose="020B0604030504040204" pitchFamily="50" charset="-128"/>
+              </a:rPr>
+              <a:t>if</a:t>
+            </a:r>
+            <a:r>
+              <a:rPr lang="ja-JP" altLang="en-US" sz="2000" dirty="0">
+                <a:solidFill>
+                  <a:schemeClr val="accent4">
+                    <a:lumMod val="75000"/>
+                  </a:schemeClr>
+                </a:solidFill>
+                <a:latin typeface="メイリオ" panose="020B0604030504040204" pitchFamily="50" charset="-128"/>
+                <a:ea typeface="メイリオ" panose="020B0604030504040204" pitchFamily="50" charset="-128"/>
+              </a:rPr>
+              <a:t>文を１行に短縮できたことに感動した。</a:t>
+            </a:r>
+            <a:endParaRPr lang="en-US" altLang="ja-JP" sz="2000" dirty="0">
+              <a:solidFill>
+                <a:schemeClr val="accent4">
+                  <a:lumMod val="75000"/>
+                </a:schemeClr>
+              </a:solidFill>
+              <a:latin typeface="メイリオ" panose="020B0604030504040204" pitchFamily="50" charset="-128"/>
+              <a:ea typeface="メイリオ" panose="020B0604030504040204" pitchFamily="50" charset="-128"/>
+            </a:endParaRPr>
+          </a:p>
+          <a:p>
+            <a:pPr algn="l"/>
+            <a:endParaRPr lang="en-US" altLang="ja-JP" sz="2000" dirty="0">
+              <a:solidFill>
+                <a:schemeClr val="accent4">
+                  <a:lumMod val="75000"/>
+                </a:schemeClr>
+              </a:solidFill>
+              <a:latin typeface="メイリオ" panose="020B0604030504040204" pitchFamily="50" charset="-128"/>
+              <a:ea typeface="メイリオ" panose="020B0604030504040204" pitchFamily="50" charset="-128"/>
+            </a:endParaRPr>
+          </a:p>
+          <a:p>
+            <a:pPr algn="l"/>
+            <a:r>
+              <a:rPr lang="en-US" altLang="ja-JP" sz="2000" dirty="0">
+                <a:solidFill>
+                  <a:schemeClr val="accent4">
+                    <a:lumMod val="75000"/>
+                  </a:schemeClr>
+                </a:solidFill>
+                <a:latin typeface="メイリオ" panose="020B0604030504040204" pitchFamily="50" charset="-128"/>
+                <a:ea typeface="メイリオ" panose="020B0604030504040204" pitchFamily="50" charset="-128"/>
+              </a:rPr>
+              <a:t>218</a:t>
+            </a:r>
+            <a:r>
+              <a:rPr lang="ja-JP" altLang="en-US" sz="2000" dirty="0">
+                <a:solidFill>
+                  <a:schemeClr val="accent4">
+                    <a:lumMod val="75000"/>
+                  </a:schemeClr>
+                </a:solidFill>
+                <a:latin typeface="メイリオ" panose="020B0604030504040204" pitchFamily="50" charset="-128"/>
+                <a:ea typeface="メイリオ" panose="020B0604030504040204" pitchFamily="50" charset="-128"/>
+              </a:rPr>
+              <a:t>行目 確率が起こるときの項目</a:t>
+            </a:r>
+            <a:r>
+              <a:rPr lang="en-US" altLang="ja-JP" sz="2000" dirty="0">
+                <a:solidFill>
+                  <a:schemeClr val="accent4">
+                    <a:lumMod val="75000"/>
+                  </a:schemeClr>
+                </a:solidFill>
+                <a:latin typeface="メイリオ" panose="020B0604030504040204" pitchFamily="50" charset="-128"/>
+                <a:ea typeface="メイリオ" panose="020B0604030504040204" pitchFamily="50" charset="-128"/>
+              </a:rPr>
+              <a:t>DD,BB</a:t>
+            </a:r>
+            <a:r>
+              <a:rPr lang="ja-JP" altLang="en-US" sz="2000" dirty="0">
+                <a:solidFill>
+                  <a:schemeClr val="accent4">
+                    <a:lumMod val="75000"/>
+                  </a:schemeClr>
+                </a:solidFill>
+                <a:latin typeface="メイリオ" panose="020B0604030504040204" pitchFamily="50" charset="-128"/>
+                <a:ea typeface="メイリオ" panose="020B0604030504040204" pitchFamily="50" charset="-128"/>
+              </a:rPr>
+              <a:t>などを指定しておくと、あとから</a:t>
+            </a:r>
+            <a:r>
+              <a:rPr lang="en-US" altLang="ja-JP" sz="2000" dirty="0">
+                <a:solidFill>
+                  <a:schemeClr val="accent4">
+                    <a:lumMod val="75000"/>
+                  </a:schemeClr>
+                </a:solidFill>
+                <a:latin typeface="メイリオ" panose="020B0604030504040204" pitchFamily="50" charset="-128"/>
+                <a:ea typeface="メイリオ" panose="020B0604030504040204" pitchFamily="50" charset="-128"/>
+              </a:rPr>
+              <a:t>combos$prob1</a:t>
+            </a:r>
+            <a:r>
+              <a:rPr lang="ja-JP" altLang="en-US" sz="2000" dirty="0">
+                <a:solidFill>
+                  <a:schemeClr val="accent4">
+                    <a:lumMod val="75000"/>
+                  </a:schemeClr>
+                </a:solidFill>
+                <a:latin typeface="メイリオ" panose="020B0604030504040204" pitchFamily="50" charset="-128"/>
+                <a:ea typeface="メイリオ" panose="020B0604030504040204" pitchFamily="50" charset="-128"/>
+              </a:rPr>
+              <a:t>に代入するときに、</a:t>
+            </a:r>
+            <a:r>
+              <a:rPr lang="en-US" altLang="ja-JP" sz="2000" dirty="0">
+                <a:solidFill>
+                  <a:schemeClr val="accent4">
+                    <a:lumMod val="75000"/>
+                  </a:schemeClr>
+                </a:solidFill>
+                <a:latin typeface="メイリオ" panose="020B0604030504040204" pitchFamily="50" charset="-128"/>
+                <a:ea typeface="メイリオ" panose="020B0604030504040204" pitchFamily="50" charset="-128"/>
+              </a:rPr>
+              <a:t>prob[combos$Var1]</a:t>
+            </a:r>
+            <a:r>
+              <a:rPr lang="ja-JP" altLang="en-US" sz="2000" dirty="0">
+                <a:solidFill>
+                  <a:schemeClr val="accent4">
+                    <a:lumMod val="75000"/>
+                  </a:schemeClr>
+                </a:solidFill>
+                <a:latin typeface="メイリオ" panose="020B0604030504040204" pitchFamily="50" charset="-128"/>
+                <a:ea typeface="メイリオ" panose="020B0604030504040204" pitchFamily="50" charset="-128"/>
+              </a:rPr>
+              <a:t>のように取り出せるのはすごいと思った。配列の</a:t>
+            </a:r>
+            <a:r>
+              <a:rPr lang="en-US" altLang="ja-JP" sz="2000" dirty="0">
+                <a:solidFill>
+                  <a:schemeClr val="accent4">
+                    <a:lumMod val="75000"/>
+                  </a:schemeClr>
+                </a:solidFill>
+                <a:latin typeface="メイリオ" panose="020B0604030504040204" pitchFamily="50" charset="-128"/>
+                <a:ea typeface="メイリオ" panose="020B0604030504040204" pitchFamily="50" charset="-128"/>
+              </a:rPr>
+              <a:t>0,1,2,…</a:t>
+            </a:r>
+            <a:r>
+              <a:rPr lang="ja-JP" altLang="en-US" sz="2000" dirty="0">
+                <a:solidFill>
+                  <a:schemeClr val="accent4">
+                    <a:lumMod val="75000"/>
+                  </a:schemeClr>
+                </a:solidFill>
+                <a:latin typeface="メイリオ" panose="020B0604030504040204" pitchFamily="50" charset="-128"/>
+                <a:ea typeface="メイリオ" panose="020B0604030504040204" pitchFamily="50" charset="-128"/>
+              </a:rPr>
+              <a:t>が</a:t>
+            </a:r>
+            <a:r>
+              <a:rPr lang="en-US" altLang="ja-JP" sz="2000" dirty="0">
+                <a:solidFill>
+                  <a:schemeClr val="accent4">
+                    <a:lumMod val="75000"/>
+                  </a:schemeClr>
+                </a:solidFill>
+                <a:latin typeface="メイリオ" panose="020B0604030504040204" pitchFamily="50" charset="-128"/>
+                <a:ea typeface="メイリオ" panose="020B0604030504040204" pitchFamily="50" charset="-128"/>
+              </a:rPr>
+              <a:t>DD,7,BBB</a:t>
+            </a:r>
+          </a:p>
+          <a:p>
+            <a:pPr algn="l"/>
+            <a:endParaRPr kumimoji="1" lang="ja-JP" altLang="en-US" sz="2000" dirty="0">
+              <a:solidFill>
+                <a:schemeClr val="accent4">
+                  <a:lumMod val="75000"/>
+                </a:schemeClr>
+              </a:solidFill>
+              <a:latin typeface="メイリオ" panose="020B0604030504040204" pitchFamily="50" charset="-128"/>
+              <a:ea typeface="メイリオ" panose="020B0604030504040204" pitchFamily="50" charset="-128"/>
+            </a:endParaRPr>
+          </a:p>
+        </p:txBody>
+      </p:sp>
+    </p:spTree>
+    <p:extLst>
+      <p:ext uri="{BB962C8B-B14F-4D97-AF65-F5344CB8AC3E}">
+        <p14:creationId xmlns:p14="http://schemas.microsoft.com/office/powerpoint/2010/main" val="878594590"/>
+      </p:ext>
+    </p:extLst>
+  </p:cSld>
+  <p:clrMapOvr>
+    <a:masterClrMapping/>
+  </p:clrMapOvr>
+</p:sld>
+</file>
+
+<file path=ppt/slides/slide22.xml><?xml version="1.0" encoding="utf-8"?>
+<p:sld xmlns:a="http://schemas.openxmlformats.org/drawingml/2006/main" xmlns:r="http://schemas.openxmlformats.org/officeDocument/2006/relationships" xmlns:p="http://schemas.openxmlformats.org/presentationml/2006/main">
+  <p:cSld>
+    <p:spTree>
+      <p:nvGrpSpPr>
+        <p:cNvPr id="1" name=""/>
+        <p:cNvGrpSpPr/>
+        <p:nvPr/>
+      </p:nvGrpSpPr>
+      <p:grpSpPr>
+        <a:xfrm>
+          <a:off x="0" y="0"/>
+          <a:ext cx="0" cy="0"/>
+          <a:chOff x="0" y="0"/>
+          <a:chExt cx="0" cy="0"/>
+        </a:xfrm>
+      </p:grpSpPr>
+      <p:sp>
+        <p:nvSpPr>
+          <p:cNvPr id="2" name="タイトル 1">
+            <a:extLst>
+              <a:ext uri="{FF2B5EF4-FFF2-40B4-BE49-F238E27FC236}">
+                <a16:creationId xmlns:a16="http://schemas.microsoft.com/office/drawing/2014/main" id="{8F92D15D-6ED6-F1E2-415D-C5D0D0CAAC83}"/>
+              </a:ext>
+            </a:extLst>
+          </p:cNvPr>
+          <p:cNvSpPr>
+            <a:spLocks noGrp="1"/>
+          </p:cNvSpPr>
+          <p:nvPr>
+            <p:ph type="ctrTitle"/>
+          </p:nvPr>
+        </p:nvSpPr>
+        <p:spPr>
+          <a:xfrm>
+            <a:off x="528181" y="314435"/>
+            <a:ext cx="5891408" cy="700173"/>
+          </a:xfrm>
+        </p:spPr>
+        <p:txBody>
+          <a:bodyPr>
+            <a:normAutofit/>
+          </a:bodyPr>
+          <a:lstStyle/>
+          <a:p>
+            <a:pPr algn="l"/>
+            <a:r>
+              <a:rPr kumimoji="1" lang="ja-JP" altLang="en-US" sz="3000" b="1" dirty="0">
+                <a:solidFill>
+                  <a:schemeClr val="tx1">
+                    <a:lumMod val="65000"/>
+                    <a:lumOff val="35000"/>
+                  </a:schemeClr>
+                </a:solidFill>
+                <a:latin typeface="メイリオ" panose="020B0604030504040204" pitchFamily="50" charset="-128"/>
+                <a:ea typeface="メイリオ" panose="020B0604030504040204" pitchFamily="50" charset="-128"/>
+              </a:rPr>
+              <a:t>参考文献</a:t>
+            </a:r>
+          </a:p>
+        </p:txBody>
+      </p:sp>
+      <p:sp>
+        <p:nvSpPr>
+          <p:cNvPr id="4" name="正方形/長方形 3">
+            <a:extLst>
+              <a:ext uri="{FF2B5EF4-FFF2-40B4-BE49-F238E27FC236}">
+                <a16:creationId xmlns:a16="http://schemas.microsoft.com/office/drawing/2014/main" id="{578782C7-6070-7C3A-DAB7-3101F4C6ED5C}"/>
+              </a:ext>
+            </a:extLst>
+          </p:cNvPr>
+          <p:cNvSpPr/>
+          <p:nvPr/>
+        </p:nvSpPr>
+        <p:spPr>
+          <a:xfrm>
+            <a:off x="884439" y="1109610"/>
+            <a:ext cx="9440262" cy="5528957"/>
+          </a:xfrm>
+          <a:prstGeom prst="rect">
+            <a:avLst/>
+          </a:prstGeom>
+          <a:solidFill>
+            <a:schemeClr val="accent4">
+              <a:lumMod val="40000"/>
+              <a:lumOff val="60000"/>
+            </a:schemeClr>
+          </a:solidFill>
+          <a:ln>
+            <a:noFill/>
+          </a:ln>
+        </p:spPr>
+        <p:style>
+          <a:lnRef idx="2">
+            <a:schemeClr val="accent1">
+              <a:shade val="15000"/>
+            </a:schemeClr>
+          </a:lnRef>
+          <a:fillRef idx="1">
+            <a:schemeClr val="accent1"/>
+          </a:fillRef>
+          <a:effectRef idx="0">
+            <a:schemeClr val="accent1"/>
+          </a:effectRef>
+          <a:fontRef idx="minor">
+            <a:schemeClr val="lt1"/>
+          </a:fontRef>
+        </p:style>
+        <p:txBody>
+          <a:bodyPr rtlCol="0" anchor="t"/>
+          <a:lstStyle/>
+          <a:p>
+            <a:endParaRPr kumimoji="1" lang="ja-JP" altLang="en-US" dirty="0"/>
+          </a:p>
+        </p:txBody>
+      </p:sp>
+      <p:sp>
+        <p:nvSpPr>
+          <p:cNvPr id="3" name="字幕 2">
+            <a:extLst>
+              <a:ext uri="{FF2B5EF4-FFF2-40B4-BE49-F238E27FC236}">
+                <a16:creationId xmlns:a16="http://schemas.microsoft.com/office/drawing/2014/main" id="{EF422FEA-2F34-70ED-56A9-01A65A2AD142}"/>
+              </a:ext>
+            </a:extLst>
+          </p:cNvPr>
+          <p:cNvSpPr>
+            <a:spLocks noGrp="1"/>
+          </p:cNvSpPr>
+          <p:nvPr>
+            <p:ph type="subTitle" idx="1"/>
+          </p:nvPr>
+        </p:nvSpPr>
+        <p:spPr>
+          <a:xfrm>
+            <a:off x="884439" y="1097282"/>
+            <a:ext cx="9391483" cy="5446283"/>
+          </a:xfrm>
+        </p:spPr>
+        <p:txBody>
+          <a:bodyPr>
+            <a:normAutofit/>
+          </a:bodyPr>
+          <a:lstStyle/>
+          <a:p>
+            <a:pPr algn="l"/>
+            <a:endParaRPr kumimoji="1" lang="ja-JP" altLang="en-US" sz="2000" dirty="0">
+              <a:solidFill>
+                <a:schemeClr val="accent4">
+                  <a:lumMod val="75000"/>
+                </a:schemeClr>
+              </a:solidFill>
+              <a:latin typeface="メイリオ" panose="020B0604030504040204" pitchFamily="50" charset="-128"/>
+              <a:ea typeface="メイリオ" panose="020B0604030504040204" pitchFamily="50" charset="-128"/>
+            </a:endParaRPr>
+          </a:p>
+        </p:txBody>
+      </p:sp>
+      <p:sp>
+        <p:nvSpPr>
+          <p:cNvPr id="6" name="テキスト ボックス 5">
+            <a:extLst>
+              <a:ext uri="{FF2B5EF4-FFF2-40B4-BE49-F238E27FC236}">
+                <a16:creationId xmlns:a16="http://schemas.microsoft.com/office/drawing/2014/main" id="{56A009C1-7937-731F-2798-87A92781A584}"/>
+              </a:ext>
+            </a:extLst>
+          </p:cNvPr>
+          <p:cNvSpPr txBox="1"/>
+          <p:nvPr/>
+        </p:nvSpPr>
+        <p:spPr>
+          <a:xfrm>
+            <a:off x="3048000" y="2828836"/>
+            <a:ext cx="6096000" cy="1477328"/>
+          </a:xfrm>
+          <a:prstGeom prst="rect">
+            <a:avLst/>
+          </a:prstGeom>
+          <a:noFill/>
+        </p:spPr>
+        <p:txBody>
+          <a:bodyPr wrap="square">
+            <a:spAutoFit/>
+          </a:bodyPr>
+          <a:lstStyle/>
+          <a:p>
+            <a:r>
+              <a:rPr lang="en-US" altLang="ja-JP" dirty="0">
+                <a:hlinkClick r:id="rId2"/>
+              </a:rPr>
+              <a:t>https://nakazakimasahito.wordpress.com/2020/06/01/r-stringsasfactors-false%E3%81%AB%E3%81%A4%E3%81%84%E3%81%A6%E3%80%80/</a:t>
+            </a:r>
+            <a:endParaRPr lang="en-US" altLang="ja-JP" dirty="0"/>
+          </a:p>
+          <a:p>
+            <a:endParaRPr lang="ja-JP" altLang="en-US" dirty="0"/>
+          </a:p>
+        </p:txBody>
+      </p:sp>
+    </p:spTree>
+    <p:extLst>
+      <p:ext uri="{BB962C8B-B14F-4D97-AF65-F5344CB8AC3E}">
+        <p14:creationId xmlns:p14="http://schemas.microsoft.com/office/powerpoint/2010/main" val="1234966581"/>
+      </p:ext>
+    </p:extLst>
+  </p:cSld>
+  <p:clrMapOvr>
+    <a:masterClrMapping/>
+  </p:clrMapOvr>
+</p:sld>
+</file>
+
 <file path=ppt/slides/slide3.xml><?xml version="1.0" encoding="utf-8"?>
 <p:sld xmlns:a="http://schemas.openxmlformats.org/drawingml/2006/main" xmlns:r="http://schemas.openxmlformats.org/officeDocument/2006/relationships" xmlns:p="http://schemas.openxmlformats.org/presentationml/2006/main">
   <p:cSld>

--- a/永井芽衣_Rpart3.pptx
+++ b/永井芽衣_Rpart3.pptx
@@ -4,6 +4,9 @@
   <p:sldMasterIdLst>
     <p:sldMasterId id="2147483648" r:id="rId1"/>
   </p:sldMasterIdLst>
+  <p:notesMasterIdLst>
+    <p:notesMasterId r:id="rId25"/>
+  </p:notesMasterIdLst>
   <p:sldIdLst>
     <p:sldId id="256" r:id="rId2"/>
     <p:sldId id="257" r:id="rId3"/>
@@ -16,17 +19,18 @@
     <p:sldId id="268" r:id="rId10"/>
     <p:sldId id="267" r:id="rId11"/>
     <p:sldId id="269" r:id="rId12"/>
-    <p:sldId id="270" r:id="rId13"/>
-    <p:sldId id="275" r:id="rId14"/>
-    <p:sldId id="277" r:id="rId15"/>
-    <p:sldId id="276" r:id="rId16"/>
-    <p:sldId id="271" r:id="rId17"/>
-    <p:sldId id="272" r:id="rId18"/>
-    <p:sldId id="273" r:id="rId19"/>
-    <p:sldId id="274" r:id="rId20"/>
-    <p:sldId id="261" r:id="rId21"/>
-    <p:sldId id="264" r:id="rId22"/>
-    <p:sldId id="262" r:id="rId23"/>
+    <p:sldId id="278" r:id="rId13"/>
+    <p:sldId id="270" r:id="rId14"/>
+    <p:sldId id="275" r:id="rId15"/>
+    <p:sldId id="277" r:id="rId16"/>
+    <p:sldId id="276" r:id="rId17"/>
+    <p:sldId id="271" r:id="rId18"/>
+    <p:sldId id="272" r:id="rId19"/>
+    <p:sldId id="273" r:id="rId20"/>
+    <p:sldId id="274" r:id="rId21"/>
+    <p:sldId id="261" r:id="rId22"/>
+    <p:sldId id="264" r:id="rId23"/>
+    <p:sldId id="262" r:id="rId24"/>
   </p:sldIdLst>
   <p:sldSz cx="12192000" cy="6858000"/>
   <p:notesSz cx="6858000" cy="9144000"/>
@@ -153,6 +157,7 @@
         <p14:section name="９章　ループ" id="{6DA1671D-0978-45D5-BADC-53BD7A010EA2}">
           <p14:sldIdLst>
             <p14:sldId id="269"/>
+            <p14:sldId id="278"/>
             <p14:sldId id="270"/>
             <p14:sldId id="275"/>
             <p14:sldId id="277"/>
@@ -181,6 +186,471 @@
     </p:ext>
   </p:extLst>
 </p:presentation>
+</file>
+
+<file path=ppt/notesMasters/notesMaster1.xml><?xml version="1.0" encoding="utf-8"?>
+<p:notesMaster xmlns:a="http://schemas.openxmlformats.org/drawingml/2006/main" xmlns:r="http://schemas.openxmlformats.org/officeDocument/2006/relationships" xmlns:p="http://schemas.openxmlformats.org/presentationml/2006/main">
+  <p:cSld>
+    <p:bg>
+      <p:bgRef idx="1001">
+        <a:schemeClr val="bg1"/>
+      </p:bgRef>
+    </p:bg>
+    <p:spTree>
+      <p:nvGrpSpPr>
+        <p:cNvPr id="1" name=""/>
+        <p:cNvGrpSpPr/>
+        <p:nvPr/>
+      </p:nvGrpSpPr>
+      <p:grpSpPr>
+        <a:xfrm>
+          <a:off x="0" y="0"/>
+          <a:ext cx="0" cy="0"/>
+          <a:chOff x="0" y="0"/>
+          <a:chExt cx="0" cy="0"/>
+        </a:xfrm>
+      </p:grpSpPr>
+      <p:sp>
+        <p:nvSpPr>
+          <p:cNvPr id="2" name="ヘッダー プレースホルダー 1"/>
+          <p:cNvSpPr>
+            <a:spLocks noGrp="1"/>
+          </p:cNvSpPr>
+          <p:nvPr>
+            <p:ph type="hdr" sz="quarter"/>
+          </p:nvPr>
+        </p:nvSpPr>
+        <p:spPr>
+          <a:xfrm>
+            <a:off x="0" y="0"/>
+            <a:ext cx="2971800" cy="458788"/>
+          </a:xfrm>
+          <a:prstGeom prst="rect">
+            <a:avLst/>
+          </a:prstGeom>
+        </p:spPr>
+        <p:txBody>
+          <a:bodyPr vert="horz" lIns="91440" tIns="45720" rIns="91440" bIns="45720" rtlCol="0"/>
+          <a:lstStyle>
+            <a:lvl1pPr algn="l">
+              <a:defRPr sz="1200"/>
+            </a:lvl1pPr>
+          </a:lstStyle>
+          <a:p>
+            <a:endParaRPr kumimoji="1" lang="ja-JP" altLang="en-US"/>
+          </a:p>
+        </p:txBody>
+      </p:sp>
+      <p:sp>
+        <p:nvSpPr>
+          <p:cNvPr id="3" name="日付プレースホルダー 2"/>
+          <p:cNvSpPr>
+            <a:spLocks noGrp="1"/>
+          </p:cNvSpPr>
+          <p:nvPr>
+            <p:ph type="dt" idx="1"/>
+          </p:nvPr>
+        </p:nvSpPr>
+        <p:spPr>
+          <a:xfrm>
+            <a:off x="3884613" y="0"/>
+            <a:ext cx="2971800" cy="458788"/>
+          </a:xfrm>
+          <a:prstGeom prst="rect">
+            <a:avLst/>
+          </a:prstGeom>
+        </p:spPr>
+        <p:txBody>
+          <a:bodyPr vert="horz" lIns="91440" tIns="45720" rIns="91440" bIns="45720" rtlCol="0"/>
+          <a:lstStyle>
+            <a:lvl1pPr algn="r">
+              <a:defRPr sz="1200"/>
+            </a:lvl1pPr>
+          </a:lstStyle>
+          <a:p>
+            <a:fld id="{A4812308-7085-464E-BFE5-814F883FC684}" type="datetimeFigureOut">
+              <a:rPr kumimoji="1" lang="ja-JP" altLang="en-US" smtClean="0"/>
+              <a:t>2026/8/13</a:t>
+            </a:fld>
+            <a:endParaRPr kumimoji="1" lang="ja-JP" altLang="en-US"/>
+          </a:p>
+        </p:txBody>
+      </p:sp>
+      <p:sp>
+        <p:nvSpPr>
+          <p:cNvPr id="4" name="スライド イメージ プレースホルダー 3"/>
+          <p:cNvSpPr>
+            <a:spLocks noGrp="1" noRot="1" noChangeAspect="1"/>
+          </p:cNvSpPr>
+          <p:nvPr>
+            <p:ph type="sldImg" idx="2"/>
+          </p:nvPr>
+        </p:nvSpPr>
+        <p:spPr>
+          <a:xfrm>
+            <a:off x="685800" y="1143000"/>
+            <a:ext cx="5486400" cy="3086100"/>
+          </a:xfrm>
+          <a:prstGeom prst="rect">
+            <a:avLst/>
+          </a:prstGeom>
+          <a:noFill/>
+          <a:ln w="12700">
+            <a:solidFill>
+              <a:prstClr val="black"/>
+            </a:solidFill>
+          </a:ln>
+        </p:spPr>
+        <p:txBody>
+          <a:bodyPr vert="horz" lIns="91440" tIns="45720" rIns="91440" bIns="45720" rtlCol="0" anchor="ctr"/>
+          <a:lstStyle/>
+          <a:p>
+            <a:endParaRPr lang="ja-JP" altLang="en-US"/>
+          </a:p>
+        </p:txBody>
+      </p:sp>
+      <p:sp>
+        <p:nvSpPr>
+          <p:cNvPr id="5" name="ノート プレースホルダー 4"/>
+          <p:cNvSpPr>
+            <a:spLocks noGrp="1"/>
+          </p:cNvSpPr>
+          <p:nvPr>
+            <p:ph type="body" sz="quarter" idx="3"/>
+          </p:nvPr>
+        </p:nvSpPr>
+        <p:spPr>
+          <a:xfrm>
+            <a:off x="685800" y="4400550"/>
+            <a:ext cx="5486400" cy="3600450"/>
+          </a:xfrm>
+          <a:prstGeom prst="rect">
+            <a:avLst/>
+          </a:prstGeom>
+        </p:spPr>
+        <p:txBody>
+          <a:bodyPr vert="horz" lIns="91440" tIns="45720" rIns="91440" bIns="45720" rtlCol="0"/>
+          <a:lstStyle/>
+          <a:p>
+            <a:pPr lvl="0"/>
+            <a:r>
+              <a:rPr kumimoji="1" lang="ja-JP" altLang="en-US"/>
+              <a:t>マスター テキストの書式設定</a:t>
+            </a:r>
+          </a:p>
+          <a:p>
+            <a:pPr lvl="1"/>
+            <a:r>
+              <a:rPr kumimoji="1" lang="ja-JP" altLang="en-US"/>
+              <a:t>第 </a:t>
+            </a:r>
+            <a:r>
+              <a:rPr kumimoji="1" lang="en-US" altLang="ja-JP"/>
+              <a:t>2 </a:t>
+            </a:r>
+            <a:r>
+              <a:rPr kumimoji="1" lang="ja-JP" altLang="en-US"/>
+              <a:t>レベル</a:t>
+            </a:r>
+          </a:p>
+          <a:p>
+            <a:pPr lvl="2"/>
+            <a:r>
+              <a:rPr kumimoji="1" lang="ja-JP" altLang="en-US"/>
+              <a:t>第 </a:t>
+            </a:r>
+            <a:r>
+              <a:rPr kumimoji="1" lang="en-US" altLang="ja-JP"/>
+              <a:t>3 </a:t>
+            </a:r>
+            <a:r>
+              <a:rPr kumimoji="1" lang="ja-JP" altLang="en-US"/>
+              <a:t>レベル</a:t>
+            </a:r>
+          </a:p>
+          <a:p>
+            <a:pPr lvl="3"/>
+            <a:r>
+              <a:rPr kumimoji="1" lang="ja-JP" altLang="en-US"/>
+              <a:t>第 </a:t>
+            </a:r>
+            <a:r>
+              <a:rPr kumimoji="1" lang="en-US" altLang="ja-JP"/>
+              <a:t>4 </a:t>
+            </a:r>
+            <a:r>
+              <a:rPr kumimoji="1" lang="ja-JP" altLang="en-US"/>
+              <a:t>レベル</a:t>
+            </a:r>
+          </a:p>
+          <a:p>
+            <a:pPr lvl="4"/>
+            <a:r>
+              <a:rPr kumimoji="1" lang="ja-JP" altLang="en-US"/>
+              <a:t>第 </a:t>
+            </a:r>
+            <a:r>
+              <a:rPr kumimoji="1" lang="en-US" altLang="ja-JP"/>
+              <a:t>5 </a:t>
+            </a:r>
+            <a:r>
+              <a:rPr kumimoji="1" lang="ja-JP" altLang="en-US"/>
+              <a:t>レベル</a:t>
+            </a:r>
+          </a:p>
+        </p:txBody>
+      </p:sp>
+      <p:sp>
+        <p:nvSpPr>
+          <p:cNvPr id="6" name="フッター プレースホルダー 5"/>
+          <p:cNvSpPr>
+            <a:spLocks noGrp="1"/>
+          </p:cNvSpPr>
+          <p:nvPr>
+            <p:ph type="ftr" sz="quarter" idx="4"/>
+          </p:nvPr>
+        </p:nvSpPr>
+        <p:spPr>
+          <a:xfrm>
+            <a:off x="0" y="8685213"/>
+            <a:ext cx="2971800" cy="458787"/>
+          </a:xfrm>
+          <a:prstGeom prst="rect">
+            <a:avLst/>
+          </a:prstGeom>
+        </p:spPr>
+        <p:txBody>
+          <a:bodyPr vert="horz" lIns="91440" tIns="45720" rIns="91440" bIns="45720" rtlCol="0" anchor="b"/>
+          <a:lstStyle>
+            <a:lvl1pPr algn="l">
+              <a:defRPr sz="1200"/>
+            </a:lvl1pPr>
+          </a:lstStyle>
+          <a:p>
+            <a:endParaRPr kumimoji="1" lang="ja-JP" altLang="en-US"/>
+          </a:p>
+        </p:txBody>
+      </p:sp>
+      <p:sp>
+        <p:nvSpPr>
+          <p:cNvPr id="7" name="スライド番号プレースホルダー 6"/>
+          <p:cNvSpPr>
+            <a:spLocks noGrp="1"/>
+          </p:cNvSpPr>
+          <p:nvPr>
+            <p:ph type="sldNum" sz="quarter" idx="5"/>
+          </p:nvPr>
+        </p:nvSpPr>
+        <p:spPr>
+          <a:xfrm>
+            <a:off x="3884613" y="8685213"/>
+            <a:ext cx="2971800" cy="458787"/>
+          </a:xfrm>
+          <a:prstGeom prst="rect">
+            <a:avLst/>
+          </a:prstGeom>
+        </p:spPr>
+        <p:txBody>
+          <a:bodyPr vert="horz" lIns="91440" tIns="45720" rIns="91440" bIns="45720" rtlCol="0" anchor="b"/>
+          <a:lstStyle>
+            <a:lvl1pPr algn="r">
+              <a:defRPr sz="1200"/>
+            </a:lvl1pPr>
+          </a:lstStyle>
+          <a:p>
+            <a:fld id="{C6FFF96F-E18D-48CF-A9C6-76063F48C151}" type="slidenum">
+              <a:rPr kumimoji="1" lang="ja-JP" altLang="en-US" smtClean="0"/>
+              <a:t>‹#›</a:t>
+            </a:fld>
+            <a:endParaRPr kumimoji="1" lang="ja-JP" altLang="en-US"/>
+          </a:p>
+        </p:txBody>
+      </p:sp>
+    </p:spTree>
+    <p:extLst>
+      <p:ext uri="{BB962C8B-B14F-4D97-AF65-F5344CB8AC3E}">
+        <p14:creationId xmlns:p14="http://schemas.microsoft.com/office/powerpoint/2010/main" val="2203510421"/>
+      </p:ext>
+    </p:extLst>
+  </p:cSld>
+  <p:clrMap bg1="lt1" tx1="dk1" bg2="lt2" tx2="dk2" accent1="accent1" accent2="accent2" accent3="accent3" accent4="accent4" accent5="accent5" accent6="accent6" hlink="hlink" folHlink="folHlink"/>
+  <p:notesStyle>
+    <a:lvl1pPr marL="0" algn="l" defTabSz="914400" rtl="0" eaLnBrk="1" latinLnBrk="0" hangingPunct="1">
+      <a:defRPr kumimoji="1" sz="1200" kern="1200">
+        <a:solidFill>
+          <a:schemeClr val="tx1"/>
+        </a:solidFill>
+        <a:latin typeface="+mn-lt"/>
+        <a:ea typeface="+mn-ea"/>
+        <a:cs typeface="+mn-cs"/>
+      </a:defRPr>
+    </a:lvl1pPr>
+    <a:lvl2pPr marL="457200" algn="l" defTabSz="914400" rtl="0" eaLnBrk="1" latinLnBrk="0" hangingPunct="1">
+      <a:defRPr kumimoji="1" sz="1200" kern="1200">
+        <a:solidFill>
+          <a:schemeClr val="tx1"/>
+        </a:solidFill>
+        <a:latin typeface="+mn-lt"/>
+        <a:ea typeface="+mn-ea"/>
+        <a:cs typeface="+mn-cs"/>
+      </a:defRPr>
+    </a:lvl2pPr>
+    <a:lvl3pPr marL="914400" algn="l" defTabSz="914400" rtl="0" eaLnBrk="1" latinLnBrk="0" hangingPunct="1">
+      <a:defRPr kumimoji="1" sz="1200" kern="1200">
+        <a:solidFill>
+          <a:schemeClr val="tx1"/>
+        </a:solidFill>
+        <a:latin typeface="+mn-lt"/>
+        <a:ea typeface="+mn-ea"/>
+        <a:cs typeface="+mn-cs"/>
+      </a:defRPr>
+    </a:lvl3pPr>
+    <a:lvl4pPr marL="1371600" algn="l" defTabSz="914400" rtl="0" eaLnBrk="1" latinLnBrk="0" hangingPunct="1">
+      <a:defRPr kumimoji="1" sz="1200" kern="1200">
+        <a:solidFill>
+          <a:schemeClr val="tx1"/>
+        </a:solidFill>
+        <a:latin typeface="+mn-lt"/>
+        <a:ea typeface="+mn-ea"/>
+        <a:cs typeface="+mn-cs"/>
+      </a:defRPr>
+    </a:lvl4pPr>
+    <a:lvl5pPr marL="1828800" algn="l" defTabSz="914400" rtl="0" eaLnBrk="1" latinLnBrk="0" hangingPunct="1">
+      <a:defRPr kumimoji="1" sz="1200" kern="1200">
+        <a:solidFill>
+          <a:schemeClr val="tx1"/>
+        </a:solidFill>
+        <a:latin typeface="+mn-lt"/>
+        <a:ea typeface="+mn-ea"/>
+        <a:cs typeface="+mn-cs"/>
+      </a:defRPr>
+    </a:lvl5pPr>
+    <a:lvl6pPr marL="2286000" algn="l" defTabSz="914400" rtl="0" eaLnBrk="1" latinLnBrk="0" hangingPunct="1">
+      <a:defRPr kumimoji="1" sz="1200" kern="1200">
+        <a:solidFill>
+          <a:schemeClr val="tx1"/>
+        </a:solidFill>
+        <a:latin typeface="+mn-lt"/>
+        <a:ea typeface="+mn-ea"/>
+        <a:cs typeface="+mn-cs"/>
+      </a:defRPr>
+    </a:lvl6pPr>
+    <a:lvl7pPr marL="2743200" algn="l" defTabSz="914400" rtl="0" eaLnBrk="1" latinLnBrk="0" hangingPunct="1">
+      <a:defRPr kumimoji="1" sz="1200" kern="1200">
+        <a:solidFill>
+          <a:schemeClr val="tx1"/>
+        </a:solidFill>
+        <a:latin typeface="+mn-lt"/>
+        <a:ea typeface="+mn-ea"/>
+        <a:cs typeface="+mn-cs"/>
+      </a:defRPr>
+    </a:lvl7pPr>
+    <a:lvl8pPr marL="3200400" algn="l" defTabSz="914400" rtl="0" eaLnBrk="1" latinLnBrk="0" hangingPunct="1">
+      <a:defRPr kumimoji="1" sz="1200" kern="1200">
+        <a:solidFill>
+          <a:schemeClr val="tx1"/>
+        </a:solidFill>
+        <a:latin typeface="+mn-lt"/>
+        <a:ea typeface="+mn-ea"/>
+        <a:cs typeface="+mn-cs"/>
+      </a:defRPr>
+    </a:lvl8pPr>
+    <a:lvl9pPr marL="3657600" algn="l" defTabSz="914400" rtl="0" eaLnBrk="1" latinLnBrk="0" hangingPunct="1">
+      <a:defRPr kumimoji="1" sz="1200" kern="1200">
+        <a:solidFill>
+          <a:schemeClr val="tx1"/>
+        </a:solidFill>
+        <a:latin typeface="+mn-lt"/>
+        <a:ea typeface="+mn-ea"/>
+        <a:cs typeface="+mn-cs"/>
+      </a:defRPr>
+    </a:lvl9pPr>
+  </p:notesStyle>
+</p:notesMaster>
+</file>
+
+<file path=ppt/notesSlides/notesSlide1.xml><?xml version="1.0" encoding="utf-8"?>
+<p:notes xmlns:a="http://schemas.openxmlformats.org/drawingml/2006/main" xmlns:r="http://schemas.openxmlformats.org/officeDocument/2006/relationships" xmlns:p="http://schemas.openxmlformats.org/presentationml/2006/main">
+  <p:cSld>
+    <p:spTree>
+      <p:nvGrpSpPr>
+        <p:cNvPr id="1" name=""/>
+        <p:cNvGrpSpPr/>
+        <p:nvPr/>
+      </p:nvGrpSpPr>
+      <p:grpSpPr>
+        <a:xfrm>
+          <a:off x="0" y="0"/>
+          <a:ext cx="0" cy="0"/>
+          <a:chOff x="0" y="0"/>
+          <a:chExt cx="0" cy="0"/>
+        </a:xfrm>
+      </p:grpSpPr>
+      <p:sp>
+        <p:nvSpPr>
+          <p:cNvPr id="2" name="スライド イメージ プレースホルダー 1"/>
+          <p:cNvSpPr>
+            <a:spLocks noGrp="1" noRot="1" noChangeAspect="1"/>
+          </p:cNvSpPr>
+          <p:nvPr>
+            <p:ph type="sldImg"/>
+          </p:nvPr>
+        </p:nvSpPr>
+        <p:spPr/>
+      </p:sp>
+      <p:sp>
+        <p:nvSpPr>
+          <p:cNvPr id="3" name="ノート プレースホルダー 2"/>
+          <p:cNvSpPr>
+            <a:spLocks noGrp="1"/>
+          </p:cNvSpPr>
+          <p:nvPr>
+            <p:ph type="body" idx="1"/>
+          </p:nvPr>
+        </p:nvSpPr>
+        <p:spPr/>
+        <p:txBody>
+          <a:bodyPr/>
+          <a:lstStyle/>
+          <a:p>
+            <a:endParaRPr kumimoji="1" lang="ja-JP" altLang="en-US" dirty="0"/>
+          </a:p>
+        </p:txBody>
+      </p:sp>
+      <p:sp>
+        <p:nvSpPr>
+          <p:cNvPr id="4" name="スライド番号プレースホルダー 3"/>
+          <p:cNvSpPr>
+            <a:spLocks noGrp="1"/>
+          </p:cNvSpPr>
+          <p:nvPr>
+            <p:ph type="sldNum" sz="quarter" idx="5"/>
+          </p:nvPr>
+        </p:nvSpPr>
+        <p:spPr/>
+        <p:txBody>
+          <a:bodyPr/>
+          <a:lstStyle/>
+          <a:p>
+            <a:fld id="{C6FFF96F-E18D-48CF-A9C6-76063F48C151}" type="slidenum">
+              <a:rPr kumimoji="1" lang="ja-JP" altLang="en-US" smtClean="0"/>
+              <a:t>2</a:t>
+            </a:fld>
+            <a:endParaRPr kumimoji="1" lang="ja-JP" altLang="en-US"/>
+          </a:p>
+        </p:txBody>
+      </p:sp>
+    </p:spTree>
+    <p:extLst>
+      <p:ext uri="{BB962C8B-B14F-4D97-AF65-F5344CB8AC3E}">
+        <p14:creationId xmlns:p14="http://schemas.microsoft.com/office/powerpoint/2010/main" val="3319601450"/>
+      </p:ext>
+    </p:extLst>
+  </p:cSld>
+  <p:clrMapOvr>
+    <a:masterClrMapping/>
+  </p:clrMapOvr>
+</p:notes>
 </file>
 
 <file path=ppt/slideLayouts/slideLayout1.xml><?xml version="1.0" encoding="utf-8"?>
@@ -330,7 +800,7 @@
           <a:p>
             <a:fld id="{41BDD009-2AE7-4B3F-8458-2328013CE102}" type="datetimeFigureOut">
               <a:rPr kumimoji="1" lang="ja-JP" altLang="en-US" smtClean="0"/>
-              <a:t>2026/8/12</a:t>
+              <a:t>2026/8/13</a:t>
             </a:fld>
             <a:endParaRPr kumimoji="1" lang="ja-JP" altLang="en-US"/>
           </a:p>
@@ -560,7 +1030,7 @@
           <a:p>
             <a:fld id="{41BDD009-2AE7-4B3F-8458-2328013CE102}" type="datetimeFigureOut">
               <a:rPr kumimoji="1" lang="ja-JP" altLang="en-US" smtClean="0"/>
-              <a:t>2026/8/12</a:t>
+              <a:t>2026/8/13</a:t>
             </a:fld>
             <a:endParaRPr kumimoji="1" lang="ja-JP" altLang="en-US"/>
           </a:p>
@@ -800,7 +1270,7 @@
           <a:p>
             <a:fld id="{41BDD009-2AE7-4B3F-8458-2328013CE102}" type="datetimeFigureOut">
               <a:rPr kumimoji="1" lang="ja-JP" altLang="en-US" smtClean="0"/>
-              <a:t>2026/8/12</a:t>
+              <a:t>2026/8/13</a:t>
             </a:fld>
             <a:endParaRPr kumimoji="1" lang="ja-JP" altLang="en-US"/>
           </a:p>
@@ -1030,7 +1500,7 @@
           <a:p>
             <a:fld id="{41BDD009-2AE7-4B3F-8458-2328013CE102}" type="datetimeFigureOut">
               <a:rPr kumimoji="1" lang="ja-JP" altLang="en-US" smtClean="0"/>
-              <a:t>2026/8/12</a:t>
+              <a:t>2026/8/13</a:t>
             </a:fld>
             <a:endParaRPr kumimoji="1" lang="ja-JP" altLang="en-US"/>
           </a:p>
@@ -1305,7 +1775,7 @@
           <a:p>
             <a:fld id="{41BDD009-2AE7-4B3F-8458-2328013CE102}" type="datetimeFigureOut">
               <a:rPr kumimoji="1" lang="ja-JP" altLang="en-US" smtClean="0"/>
-              <a:t>2026/8/12</a:t>
+              <a:t>2026/8/13</a:t>
             </a:fld>
             <a:endParaRPr kumimoji="1" lang="ja-JP" altLang="en-US"/>
           </a:p>
@@ -1634,7 +2104,7 @@
           <a:p>
             <a:fld id="{41BDD009-2AE7-4B3F-8458-2328013CE102}" type="datetimeFigureOut">
               <a:rPr kumimoji="1" lang="ja-JP" altLang="en-US" smtClean="0"/>
-              <a:t>2026/8/12</a:t>
+              <a:t>2026/8/13</a:t>
             </a:fld>
             <a:endParaRPr kumimoji="1" lang="ja-JP" altLang="en-US"/>
           </a:p>
@@ -2110,7 +2580,7 @@
           <a:p>
             <a:fld id="{41BDD009-2AE7-4B3F-8458-2328013CE102}" type="datetimeFigureOut">
               <a:rPr kumimoji="1" lang="ja-JP" altLang="en-US" smtClean="0"/>
-              <a:t>2026/8/12</a:t>
+              <a:t>2026/8/13</a:t>
             </a:fld>
             <a:endParaRPr kumimoji="1" lang="ja-JP" altLang="en-US"/>
           </a:p>
@@ -2251,7 +2721,7 @@
           <a:p>
             <a:fld id="{41BDD009-2AE7-4B3F-8458-2328013CE102}" type="datetimeFigureOut">
               <a:rPr kumimoji="1" lang="ja-JP" altLang="en-US" smtClean="0"/>
-              <a:t>2026/8/12</a:t>
+              <a:t>2026/8/13</a:t>
             </a:fld>
             <a:endParaRPr kumimoji="1" lang="ja-JP" altLang="en-US"/>
           </a:p>
@@ -2364,7 +2834,7 @@
           <a:p>
             <a:fld id="{41BDD009-2AE7-4B3F-8458-2328013CE102}" type="datetimeFigureOut">
               <a:rPr kumimoji="1" lang="ja-JP" altLang="en-US" smtClean="0"/>
-              <a:t>2026/8/12</a:t>
+              <a:t>2026/8/13</a:t>
             </a:fld>
             <a:endParaRPr kumimoji="1" lang="ja-JP" altLang="en-US"/>
           </a:p>
@@ -2707,7 +3177,7 @@
           <a:p>
             <a:fld id="{41BDD009-2AE7-4B3F-8458-2328013CE102}" type="datetimeFigureOut">
               <a:rPr kumimoji="1" lang="ja-JP" altLang="en-US" smtClean="0"/>
-              <a:t>2026/8/12</a:t>
+              <a:t>2026/8/13</a:t>
             </a:fld>
             <a:endParaRPr kumimoji="1" lang="ja-JP" altLang="en-US"/>
           </a:p>
@@ -2995,7 +3465,7 @@
           <a:p>
             <a:fld id="{41BDD009-2AE7-4B3F-8458-2328013CE102}" type="datetimeFigureOut">
               <a:rPr kumimoji="1" lang="ja-JP" altLang="en-US" smtClean="0"/>
-              <a:t>2026/8/12</a:t>
+              <a:t>2026/8/13</a:t>
             </a:fld>
             <a:endParaRPr kumimoji="1" lang="ja-JP" altLang="en-US"/>
           </a:p>
@@ -3268,7 +3738,7 @@
           <a:p>
             <a:fld id="{41BDD009-2AE7-4B3F-8458-2328013CE102}" type="datetimeFigureOut">
               <a:rPr kumimoji="1" lang="ja-JP" altLang="en-US" smtClean="0"/>
-              <a:t>2026/8/12</a:t>
+              <a:t>2026/8/13</a:t>
             </a:fld>
             <a:endParaRPr kumimoji="1" lang="ja-JP" altLang="en-US"/>
           </a:p>
@@ -4198,7 +4668,7 @@
         <p:spPr>
           <a:xfrm>
             <a:off x="789276" y="1014608"/>
-            <a:ext cx="10613447" cy="5528957"/>
+            <a:ext cx="5191577" cy="5528957"/>
           </a:xfrm>
           <a:prstGeom prst="rect">
             <a:avLst/>
@@ -4319,9 +4789,9 @@
         </p:nvGrpSpPr>
         <p:grpSpPr>
           <a:xfrm>
-            <a:off x="1413496" y="1690477"/>
+            <a:off x="1396317" y="3608861"/>
             <a:ext cx="3917578" cy="2481371"/>
-            <a:chOff x="1413496" y="1690477"/>
+            <a:chOff x="1396317" y="3608861"/>
             <a:chExt cx="3917578" cy="2481371"/>
           </a:xfrm>
         </p:grpSpPr>
@@ -4341,7 +4811,7 @@
               </p:nvSpPr>
               <p:spPr>
                 <a:xfrm>
-                  <a:off x="1413496" y="1690477"/>
+                  <a:off x="1396317" y="3608861"/>
                   <a:ext cx="3917578" cy="2481371"/>
                 </a:xfrm>
                 <a:prstGeom prst="rect">
@@ -4459,7 +4929,7 @@
                       <m:sSub>
                         <m:sSubPr>
                           <m:ctrlPr>
-                            <a:rPr lang="en-US" altLang="ja-JP" sz="1500" i="1" smtClean="0">
+                            <a:rPr lang="en-US" altLang="ja-JP" sz="1500" b="0" i="1" smtClean="0">
                               <a:solidFill>
                                 <a:schemeClr val="tx1"/>
                               </a:solidFill>
@@ -4550,7 +5020,7 @@
                       <m:sSub>
                         <m:sSubPr>
                           <m:ctrlPr>
-                            <a:rPr lang="en-US" altLang="ja-JP" sz="1500" i="1" smtClean="0">
+                            <a:rPr lang="en-US" altLang="ja-JP" sz="1500" b="0" i="1" smtClean="0">
                               <a:solidFill>
                                 <a:schemeClr val="tx1"/>
                               </a:solidFill>
@@ -4698,7 +5168,7 @@
               </p:nvSpPr>
               <p:spPr>
                 <a:xfrm>
-                  <a:off x="1413496" y="1690477"/>
+                  <a:off x="1396317" y="3608861"/>
                   <a:ext cx="3917578" cy="2481371"/>
                 </a:xfrm>
                 <a:prstGeom prst="rect">
@@ -4747,7 +5217,7 @@
           </p:nvSpPr>
           <p:spPr>
             <a:xfrm>
-              <a:off x="1562701" y="2190297"/>
+              <a:off x="1562701" y="4068678"/>
               <a:ext cx="206220" cy="232109"/>
             </a:xfrm>
             <a:prstGeom prst="ellipse">
@@ -4807,7 +5277,7 @@
           </p:nvSpPr>
           <p:spPr>
             <a:xfrm>
-              <a:off x="1562701" y="2676579"/>
+              <a:off x="1562701" y="4560632"/>
               <a:ext cx="206220" cy="232109"/>
             </a:xfrm>
             <a:prstGeom prst="ellipse">
@@ -4871,7 +5341,7 @@
           </p:nvSpPr>
           <p:spPr>
             <a:xfrm>
-              <a:off x="1562701" y="3122579"/>
+              <a:off x="1562701" y="4973759"/>
               <a:ext cx="206220" cy="232109"/>
             </a:xfrm>
             <a:prstGeom prst="ellipse">
@@ -4931,7 +5401,7 @@
           </p:nvSpPr>
           <p:spPr>
             <a:xfrm>
-              <a:off x="1562701" y="3555041"/>
+              <a:off x="1562701" y="5386886"/>
               <a:ext cx="206220" cy="232109"/>
             </a:xfrm>
             <a:prstGeom prst="ellipse">
@@ -4992,7 +5462,7 @@
         </p:nvGrpSpPr>
         <p:grpSpPr>
           <a:xfrm>
-            <a:off x="5639977" y="1714781"/>
+            <a:off x="1463708" y="1652132"/>
             <a:ext cx="2441901" cy="1238703"/>
             <a:chOff x="5955294" y="2422406"/>
             <a:chExt cx="2441901" cy="1238703"/>
@@ -5120,8 +5590,8 @@
               </a:p>
             </p:txBody>
           </p:sp>
-          <mc:AlternateContent xmlns:mc="http://schemas.openxmlformats.org/markup-compatibility/2006">
-            <mc:Choice xmlns:a14="http://schemas.microsoft.com/office/drawing/2010/main" Requires="a14">
+          <mc:AlternateContent xmlns:mc="http://schemas.openxmlformats.org/markup-compatibility/2006" xmlns:a14="http://schemas.microsoft.com/office/drawing/2010/main">
+            <mc:Choice Requires="a14">
               <p:sp>
                 <p:nvSpPr>
                   <p:cNvPr id="5" name="テキスト ボックス 4">
@@ -5153,17 +5623,14 @@
                     <a:pPr/>
                     <a14:m>
                       <m:oMathPara xmlns:m="http://schemas.openxmlformats.org/officeDocument/2006/math">
-                        <m:oMathParaPr>
-                          <m:jc m:val="centerGroup"/>
-                        </m:oMathParaPr>
-                        <m:oMath xmlns:m="http://schemas.openxmlformats.org/officeDocument/2006/math">
+                        <m:oMath>
                           <m:nary>
                             <m:naryPr>
                               <m:chr m:val="∑"/>
                               <m:limLoc m:val="undOvr"/>
                               <m:grow m:val="on"/>
                               <m:ctrlPr>
-                                <a:rPr kumimoji="1" lang="ja-JP" altLang="en-US" i="1" smtClean="0">
+                                <a:rPr kumimoji="1" lang="ja-JP" altLang="en-US" i="1">
                                   <a:latin typeface="Cambria Math" panose="02040503050406030204" pitchFamily="18" charset="0"/>
                                 </a:rPr>
                               </m:ctrlPr>
@@ -5194,7 +5661,7 @@
                               <m:sSub>
                                 <m:sSubPr>
                                   <m:ctrlPr>
-                                    <a:rPr kumimoji="1" lang="en-US" altLang="ja-JP" i="1" smtClean="0">
+                                    <a:rPr kumimoji="1" lang="en-US" altLang="ja-JP" b="0" i="1" smtClean="0">
                                       <a:latin typeface="Cambria Math" panose="02040503050406030204" pitchFamily="18" charset="0"/>
                                     </a:rPr>
                                   </m:ctrlPr>
@@ -5281,7 +5748,7 @@
                 </p:txBody>
               </p:sp>
             </mc:Choice>
-            <mc:Fallback>
+            <mc:Fallback xmlns="">
               <p:sp>
                 <p:nvSpPr>
                   <p:cNvPr id="5" name="テキスト ボックス 4">
@@ -5512,6 +5979,4429 @@
           </p:txBody>
         </p:sp>
       </p:grpSp>
+      <p:sp>
+        <p:nvSpPr>
+          <p:cNvPr id="18" name="正方形/長方形 17">
+            <a:extLst>
+              <a:ext uri="{FF2B5EF4-FFF2-40B4-BE49-F238E27FC236}">
+                <a16:creationId xmlns:a16="http://schemas.microsoft.com/office/drawing/2014/main" id="{2092E9AE-6310-845F-8212-CB87CAD7047C}"/>
+              </a:ext>
+            </a:extLst>
+          </p:cNvPr>
+          <p:cNvSpPr/>
+          <p:nvPr/>
+        </p:nvSpPr>
+        <p:spPr>
+          <a:xfrm>
+            <a:off x="6211147" y="145177"/>
+            <a:ext cx="5728519" cy="6398388"/>
+          </a:xfrm>
+          <a:prstGeom prst="rect">
+            <a:avLst/>
+          </a:prstGeom>
+          <a:solidFill>
+            <a:schemeClr val="accent4">
+              <a:lumMod val="40000"/>
+              <a:lumOff val="60000"/>
+            </a:schemeClr>
+          </a:solidFill>
+          <a:ln>
+            <a:noFill/>
+          </a:ln>
+        </p:spPr>
+        <p:style>
+          <a:lnRef idx="2">
+            <a:schemeClr val="accent1">
+              <a:shade val="15000"/>
+            </a:schemeClr>
+          </a:lnRef>
+          <a:fillRef idx="1">
+            <a:schemeClr val="accent1"/>
+          </a:fillRef>
+          <a:effectRef idx="0">
+            <a:schemeClr val="accent1"/>
+          </a:effectRef>
+          <a:fontRef idx="minor">
+            <a:schemeClr val="lt1"/>
+          </a:fontRef>
+        </p:style>
+        <p:txBody>
+          <a:bodyPr rtlCol="0" anchor="t"/>
+          <a:lstStyle/>
+          <a:p>
+            <a:r>
+              <a:rPr kumimoji="1" lang="ja-JP" altLang="en-US" b="1" dirty="0">
+                <a:solidFill>
+                  <a:schemeClr val="accent4">
+                    <a:lumMod val="75000"/>
+                  </a:schemeClr>
+                </a:solidFill>
+                <a:latin typeface="メイリオ" panose="020B0604030504040204" pitchFamily="50" charset="-128"/>
+                <a:ea typeface="メイリオ" panose="020B0604030504040204" pitchFamily="50" charset="-128"/>
+              </a:rPr>
+              <a:t>＃＃</a:t>
+            </a:r>
+            <a:r>
+              <a:rPr kumimoji="1" lang="en-US" altLang="ja-JP" b="1" dirty="0">
+                <a:solidFill>
+                  <a:schemeClr val="accent4">
+                    <a:lumMod val="75000"/>
+                  </a:schemeClr>
+                </a:solidFill>
+                <a:latin typeface="メイリオ" panose="020B0604030504040204" pitchFamily="50" charset="-128"/>
+                <a:ea typeface="メイリオ" panose="020B0604030504040204" pitchFamily="50" charset="-128"/>
+              </a:rPr>
+              <a:t>score</a:t>
+            </a:r>
+            <a:r>
+              <a:rPr lang="ja-JP" altLang="en-US" b="1" dirty="0">
+                <a:solidFill>
+                  <a:schemeClr val="accent4">
+                    <a:lumMod val="75000"/>
+                  </a:schemeClr>
+                </a:solidFill>
+                <a:latin typeface="メイリオ" panose="020B0604030504040204" pitchFamily="50" charset="-128"/>
+                <a:ea typeface="メイリオ" panose="020B0604030504040204" pitchFamily="50" charset="-128"/>
+              </a:rPr>
+              <a:t> の中身を訂正する</a:t>
+            </a:r>
+            <a:endParaRPr kumimoji="1" lang="en-US" altLang="ja-JP" sz="1500" dirty="0">
+              <a:solidFill>
+                <a:schemeClr val="tx1"/>
+              </a:solidFill>
+              <a:latin typeface="メイリオ" panose="020B0604030504040204" pitchFamily="50" charset="-128"/>
+              <a:ea typeface="メイリオ" panose="020B0604030504040204" pitchFamily="50" charset="-128"/>
+            </a:endParaRPr>
+          </a:p>
+          <a:p>
+            <a:r>
+              <a:rPr lang="ja-JP" altLang="en-US" sz="1200" dirty="0">
+                <a:solidFill>
+                  <a:schemeClr val="tx1"/>
+                </a:solidFill>
+                <a:latin typeface="メイリオ" panose="020B0604030504040204" pitchFamily="50" charset="-128"/>
+                <a:ea typeface="メイリオ" panose="020B0604030504040204" pitchFamily="50" charset="-128"/>
+              </a:rPr>
+              <a:t>・</a:t>
+            </a:r>
+            <a:r>
+              <a:rPr lang="en-US" altLang="ja-JP" sz="1200" dirty="0">
+                <a:solidFill>
+                  <a:schemeClr val="tx1"/>
+                </a:solidFill>
+                <a:latin typeface="メイリオ" panose="020B0604030504040204" pitchFamily="50" charset="-128"/>
+                <a:ea typeface="メイリオ" panose="020B0604030504040204" pitchFamily="50" charset="-128"/>
+              </a:rPr>
+              <a:t>DD</a:t>
+            </a:r>
+            <a:r>
+              <a:rPr lang="ja-JP" altLang="en-US" sz="1200" dirty="0">
+                <a:solidFill>
+                  <a:schemeClr val="tx1"/>
+                </a:solidFill>
+                <a:latin typeface="メイリオ" panose="020B0604030504040204" pitchFamily="50" charset="-128"/>
+                <a:ea typeface="メイリオ" panose="020B0604030504040204" pitchFamily="50" charset="-128"/>
+              </a:rPr>
+              <a:t>は賞金を挙げるためにほかのシンボルとして扱うことができる</a:t>
+            </a:r>
+            <a:endParaRPr lang="en-US" altLang="ja-JP" sz="1200" dirty="0">
+              <a:solidFill>
+                <a:schemeClr val="tx1"/>
+              </a:solidFill>
+              <a:latin typeface="メイリオ" panose="020B0604030504040204" pitchFamily="50" charset="-128"/>
+              <a:ea typeface="メイリオ" panose="020B0604030504040204" pitchFamily="50" charset="-128"/>
+            </a:endParaRPr>
+          </a:p>
+          <a:p>
+            <a:r>
+              <a:rPr lang="ja-JP" altLang="en-US" sz="1200" dirty="0">
+                <a:solidFill>
+                  <a:schemeClr val="tx1"/>
+                </a:solidFill>
+                <a:latin typeface="メイリオ" panose="020B0604030504040204" pitchFamily="50" charset="-128"/>
+                <a:ea typeface="メイリオ" panose="020B0604030504040204" pitchFamily="50" charset="-128"/>
+              </a:rPr>
+              <a:t>・ダイヤを</a:t>
+            </a:r>
+            <a:r>
+              <a:rPr lang="en-US" altLang="ja-JP" sz="1200" dirty="0">
+                <a:solidFill>
+                  <a:schemeClr val="tx1"/>
+                </a:solidFill>
+                <a:latin typeface="メイリオ" panose="020B0604030504040204" pitchFamily="50" charset="-128"/>
+                <a:ea typeface="メイリオ" panose="020B0604030504040204" pitchFamily="50" charset="-128"/>
+              </a:rPr>
+              <a:t>C</a:t>
+            </a:r>
+            <a:r>
+              <a:rPr lang="ja-JP" altLang="en-US" sz="1200" dirty="0">
+                <a:solidFill>
+                  <a:schemeClr val="tx1"/>
+                </a:solidFill>
+                <a:latin typeface="メイリオ" panose="020B0604030504040204" pitchFamily="50" charset="-128"/>
+                <a:ea typeface="メイリオ" panose="020B0604030504040204" pitchFamily="50" charset="-128"/>
+              </a:rPr>
+              <a:t>として扱えるのは、すでにシンボルが</a:t>
+            </a:r>
+            <a:r>
+              <a:rPr lang="en-US" altLang="ja-JP" sz="1200" dirty="0">
+                <a:solidFill>
+                  <a:schemeClr val="tx1"/>
+                </a:solidFill>
+                <a:latin typeface="メイリオ" panose="020B0604030504040204" pitchFamily="50" charset="-128"/>
+                <a:ea typeface="メイリオ" panose="020B0604030504040204" pitchFamily="50" charset="-128"/>
+              </a:rPr>
+              <a:t>C</a:t>
+            </a:r>
+            <a:r>
+              <a:rPr lang="ja-JP" altLang="en-US" sz="1200" dirty="0">
+                <a:solidFill>
+                  <a:schemeClr val="tx1"/>
+                </a:solidFill>
+                <a:latin typeface="メイリオ" panose="020B0604030504040204" pitchFamily="50" charset="-128"/>
+                <a:ea typeface="メイリオ" panose="020B0604030504040204" pitchFamily="50" charset="-128"/>
+              </a:rPr>
+              <a:t>を含むときのみ</a:t>
+            </a:r>
+            <a:endParaRPr lang="en-US" altLang="ja-JP" sz="1200" dirty="0">
+              <a:solidFill>
+                <a:schemeClr val="tx1"/>
+              </a:solidFill>
+              <a:latin typeface="メイリオ" panose="020B0604030504040204" pitchFamily="50" charset="-128"/>
+              <a:ea typeface="メイリオ" panose="020B0604030504040204" pitchFamily="50" charset="-128"/>
+            </a:endParaRPr>
+          </a:p>
+          <a:p>
+            <a:endParaRPr kumimoji="1" lang="en-US" altLang="ja-JP" dirty="0">
+              <a:solidFill>
+                <a:schemeClr val="tx1"/>
+              </a:solidFill>
+              <a:latin typeface="メイリオ" panose="020B0604030504040204" pitchFamily="50" charset="-128"/>
+              <a:ea typeface="メイリオ" panose="020B0604030504040204" pitchFamily="50" charset="-128"/>
+            </a:endParaRPr>
+          </a:p>
+          <a:p>
+            <a:endParaRPr kumimoji="1" lang="en-US" altLang="ja-JP" dirty="0">
+              <a:solidFill>
+                <a:schemeClr val="tx1"/>
+              </a:solidFill>
+              <a:latin typeface="メイリオ" panose="020B0604030504040204" pitchFamily="50" charset="-128"/>
+              <a:ea typeface="メイリオ" panose="020B0604030504040204" pitchFamily="50" charset="-128"/>
+            </a:endParaRPr>
+          </a:p>
+        </p:txBody>
+      </p:sp>
+      <p:sp>
+        <p:nvSpPr>
+          <p:cNvPr id="27" name="正方形/長方形 26">
+            <a:extLst>
+              <a:ext uri="{FF2B5EF4-FFF2-40B4-BE49-F238E27FC236}">
+                <a16:creationId xmlns:a16="http://schemas.microsoft.com/office/drawing/2014/main" id="{18AB7309-A0CB-092D-032B-7A87D5CF9887}"/>
+              </a:ext>
+            </a:extLst>
+          </p:cNvPr>
+          <p:cNvSpPr/>
+          <p:nvPr/>
+        </p:nvSpPr>
+        <p:spPr>
+          <a:xfrm>
+            <a:off x="6137329" y="858597"/>
+            <a:ext cx="5636217" cy="312022"/>
+          </a:xfrm>
+          <a:prstGeom prst="rect">
+            <a:avLst/>
+          </a:prstGeom>
+          <a:solidFill>
+            <a:srgbClr val="FFFFFF"/>
+          </a:solidFill>
+          <a:ln>
+            <a:solidFill>
+              <a:schemeClr val="bg2">
+                <a:lumMod val="90000"/>
+              </a:schemeClr>
+            </a:solidFill>
+          </a:ln>
+        </p:spPr>
+        <p:style>
+          <a:lnRef idx="2">
+            <a:schemeClr val="accent1">
+              <a:shade val="15000"/>
+            </a:schemeClr>
+          </a:lnRef>
+          <a:fillRef idx="1">
+            <a:schemeClr val="accent1"/>
+          </a:fillRef>
+          <a:effectRef idx="0">
+            <a:schemeClr val="accent1"/>
+          </a:effectRef>
+          <a:fontRef idx="minor">
+            <a:schemeClr val="lt1"/>
+          </a:fontRef>
+        </p:style>
+        <p:txBody>
+          <a:bodyPr rtlCol="0" anchor="t"/>
+          <a:lstStyle/>
+          <a:p>
+            <a:r>
+              <a:rPr lang="ja-JP" altLang="en-US" sz="1500" dirty="0">
+                <a:solidFill>
+                  <a:schemeClr val="tx1"/>
+                </a:solidFill>
+                <a:latin typeface="メイリオ" panose="020B0604030504040204" pitchFamily="50" charset="-128"/>
+                <a:ea typeface="メイリオ" panose="020B0604030504040204" pitchFamily="50" charset="-128"/>
+              </a:rPr>
+              <a:t>新しい変数 </a:t>
+            </a:r>
+            <a:r>
+              <a:rPr lang="en-US" altLang="ja-JP" sz="1500" dirty="0">
+                <a:solidFill>
+                  <a:schemeClr val="tx1"/>
+                </a:solidFill>
+                <a:latin typeface="メイリオ" panose="020B0604030504040204" pitchFamily="50" charset="-128"/>
+                <a:ea typeface="メイリオ" panose="020B0604030504040204" pitchFamily="50" charset="-128"/>
+              </a:rPr>
+              <a:t>slots : DD</a:t>
+            </a:r>
+            <a:r>
+              <a:rPr lang="ja-JP" altLang="en-US" sz="1500" dirty="0">
+                <a:solidFill>
+                  <a:schemeClr val="tx1"/>
+                </a:solidFill>
+                <a:latin typeface="メイリオ" panose="020B0604030504040204" pitchFamily="50" charset="-128"/>
+                <a:ea typeface="メイリオ" panose="020B0604030504040204" pitchFamily="50" charset="-128"/>
+              </a:rPr>
+              <a:t>以外の要素の種類の数　を用意する</a:t>
+            </a:r>
+            <a:endParaRPr lang="en-US" altLang="ja-JP" sz="1500" dirty="0">
+              <a:solidFill>
+                <a:schemeClr val="tx1"/>
+              </a:solidFill>
+              <a:latin typeface="メイリオ" panose="020B0604030504040204" pitchFamily="50" charset="-128"/>
+              <a:ea typeface="メイリオ" panose="020B0604030504040204" pitchFamily="50" charset="-128"/>
+            </a:endParaRPr>
+          </a:p>
+        </p:txBody>
+      </p:sp>
+      <p:grpSp>
+        <p:nvGrpSpPr>
+          <p:cNvPr id="293" name="グループ化 292">
+            <a:extLst>
+              <a:ext uri="{FF2B5EF4-FFF2-40B4-BE49-F238E27FC236}">
+                <a16:creationId xmlns:a16="http://schemas.microsoft.com/office/drawing/2014/main" id="{90A1A100-DEA4-E9B0-6A5D-E8A7998381B2}"/>
+              </a:ext>
+            </a:extLst>
+          </p:cNvPr>
+          <p:cNvGrpSpPr/>
+          <p:nvPr/>
+        </p:nvGrpSpPr>
+        <p:grpSpPr>
+          <a:xfrm>
+            <a:off x="6326294" y="1183866"/>
+            <a:ext cx="5306724" cy="5276538"/>
+            <a:chOff x="6507678" y="1244900"/>
+            <a:chExt cx="5306724" cy="5276538"/>
+          </a:xfrm>
+        </p:grpSpPr>
+        <p:sp>
+          <p:nvSpPr>
+            <p:cNvPr id="216" name="正方形/長方形 215">
+              <a:extLst>
+                <a:ext uri="{FF2B5EF4-FFF2-40B4-BE49-F238E27FC236}">
+                  <a16:creationId xmlns:a16="http://schemas.microsoft.com/office/drawing/2014/main" id="{8275863C-A2D1-1FB6-5B3B-6CE0BFA08DBA}"/>
+                </a:ext>
+              </a:extLst>
+            </p:cNvPr>
+            <p:cNvSpPr/>
+            <p:nvPr/>
+          </p:nvSpPr>
+          <p:spPr>
+            <a:xfrm>
+              <a:off x="6507678" y="1244900"/>
+              <a:ext cx="5306724" cy="5276538"/>
+            </a:xfrm>
+            <a:prstGeom prst="rect">
+              <a:avLst/>
+            </a:prstGeom>
+            <a:solidFill>
+              <a:schemeClr val="accent4">
+                <a:lumMod val="20000"/>
+                <a:lumOff val="80000"/>
+              </a:schemeClr>
+            </a:solidFill>
+            <a:ln>
+              <a:noFill/>
+            </a:ln>
+          </p:spPr>
+          <p:style>
+            <a:lnRef idx="2">
+              <a:schemeClr val="accent1">
+                <a:shade val="15000"/>
+              </a:schemeClr>
+            </a:lnRef>
+            <a:fillRef idx="1">
+              <a:schemeClr val="accent1"/>
+            </a:fillRef>
+            <a:effectRef idx="0">
+              <a:schemeClr val="accent1"/>
+            </a:effectRef>
+            <a:fontRef idx="minor">
+              <a:schemeClr val="lt1"/>
+            </a:fontRef>
+          </p:style>
+          <p:txBody>
+            <a:bodyPr rtlCol="0" anchor="t"/>
+            <a:lstStyle/>
+            <a:p>
+              <a:endParaRPr kumimoji="1" lang="en-US" altLang="ja-JP" sz="1000" dirty="0">
+                <a:solidFill>
+                  <a:schemeClr val="tx1"/>
+                </a:solidFill>
+              </a:endParaRPr>
+            </a:p>
+          </p:txBody>
+        </p:sp>
+        <p:sp>
+          <p:nvSpPr>
+            <p:cNvPr id="217" name="四角形: 1 つの角を切り取る 216">
+              <a:extLst>
+                <a:ext uri="{FF2B5EF4-FFF2-40B4-BE49-F238E27FC236}">
+                  <a16:creationId xmlns:a16="http://schemas.microsoft.com/office/drawing/2014/main" id="{AC70E57F-7C4E-D58E-0296-32C847577D4D}"/>
+                </a:ext>
+              </a:extLst>
+            </p:cNvPr>
+            <p:cNvSpPr/>
+            <p:nvPr/>
+          </p:nvSpPr>
+          <p:spPr>
+            <a:xfrm>
+              <a:off x="10485138" y="2336901"/>
+              <a:ext cx="564291" cy="195839"/>
+            </a:xfrm>
+            <a:prstGeom prst="snip1Rect">
+              <a:avLst>
+                <a:gd name="adj" fmla="val 50000"/>
+              </a:avLst>
+            </a:prstGeom>
+            <a:solidFill>
+              <a:srgbClr val="FFFFFF"/>
+            </a:solidFill>
+            <a:ln>
+              <a:solidFill>
+                <a:schemeClr val="bg2">
+                  <a:lumMod val="75000"/>
+                </a:schemeClr>
+              </a:solidFill>
+            </a:ln>
+          </p:spPr>
+          <p:style>
+            <a:lnRef idx="2">
+              <a:schemeClr val="accent1">
+                <a:shade val="15000"/>
+              </a:schemeClr>
+            </a:lnRef>
+            <a:fillRef idx="1">
+              <a:schemeClr val="accent1"/>
+            </a:fillRef>
+            <a:effectRef idx="0">
+              <a:schemeClr val="accent1"/>
+            </a:effectRef>
+            <a:fontRef idx="minor">
+              <a:schemeClr val="lt1"/>
+            </a:fontRef>
+          </p:style>
+          <p:txBody>
+            <a:bodyPr rtlCol="0" anchor="ctr"/>
+            <a:lstStyle/>
+            <a:p>
+              <a:pPr algn="ctr"/>
+              <a:r>
+                <a:rPr kumimoji="1" lang="en-US" altLang="ja-JP" sz="1200" dirty="0">
+                  <a:solidFill>
+                    <a:schemeClr val="tx1"/>
+                  </a:solidFill>
+                  <a:latin typeface="メイリオ" panose="020B0604030504040204" pitchFamily="50" charset="-128"/>
+                  <a:ea typeface="メイリオ" panose="020B0604030504040204" pitchFamily="50" charset="-128"/>
+                </a:rPr>
+                <a:t>7</a:t>
+              </a:r>
+              <a:endParaRPr kumimoji="1" lang="ja-JP" altLang="en-US" sz="1200" dirty="0">
+                <a:solidFill>
+                  <a:schemeClr val="tx1"/>
+                </a:solidFill>
+                <a:latin typeface="メイリオ" panose="020B0604030504040204" pitchFamily="50" charset="-128"/>
+                <a:ea typeface="メイリオ" panose="020B0604030504040204" pitchFamily="50" charset="-128"/>
+              </a:endParaRPr>
+            </a:p>
+          </p:txBody>
+        </p:sp>
+        <p:sp>
+          <p:nvSpPr>
+            <p:cNvPr id="218" name="四角形: 1 つの角を切り取る 217">
+              <a:extLst>
+                <a:ext uri="{FF2B5EF4-FFF2-40B4-BE49-F238E27FC236}">
+                  <a16:creationId xmlns:a16="http://schemas.microsoft.com/office/drawing/2014/main" id="{63BDB58E-E6DE-F7D1-4883-9A2A57C9C364}"/>
+                </a:ext>
+              </a:extLst>
+            </p:cNvPr>
+            <p:cNvSpPr/>
+            <p:nvPr/>
+          </p:nvSpPr>
+          <p:spPr>
+            <a:xfrm>
+              <a:off x="10485137" y="2518692"/>
+              <a:ext cx="564291" cy="195839"/>
+            </a:xfrm>
+            <a:prstGeom prst="snip1Rect">
+              <a:avLst>
+                <a:gd name="adj" fmla="val 50000"/>
+              </a:avLst>
+            </a:prstGeom>
+            <a:solidFill>
+              <a:srgbClr val="FFFFFF"/>
+            </a:solidFill>
+            <a:ln>
+              <a:solidFill>
+                <a:schemeClr val="bg2">
+                  <a:lumMod val="75000"/>
+                </a:schemeClr>
+              </a:solidFill>
+            </a:ln>
+          </p:spPr>
+          <p:style>
+            <a:lnRef idx="2">
+              <a:schemeClr val="accent1">
+                <a:shade val="15000"/>
+              </a:schemeClr>
+            </a:lnRef>
+            <a:fillRef idx="1">
+              <a:schemeClr val="accent1"/>
+            </a:fillRef>
+            <a:effectRef idx="0">
+              <a:schemeClr val="accent1"/>
+            </a:effectRef>
+            <a:fontRef idx="minor">
+              <a:schemeClr val="lt1"/>
+            </a:fontRef>
+          </p:style>
+          <p:txBody>
+            <a:bodyPr rtlCol="0" anchor="ctr"/>
+            <a:lstStyle/>
+            <a:p>
+              <a:pPr algn="ctr"/>
+              <a:r>
+                <a:rPr kumimoji="1" lang="en-US" altLang="ja-JP" sz="1200" dirty="0">
+                  <a:solidFill>
+                    <a:schemeClr val="tx1"/>
+                  </a:solidFill>
+                  <a:latin typeface="メイリオ" panose="020B0604030504040204" pitchFamily="50" charset="-128"/>
+                  <a:ea typeface="メイリオ" panose="020B0604030504040204" pitchFamily="50" charset="-128"/>
+                </a:rPr>
+                <a:t>BBB</a:t>
+              </a:r>
+              <a:endParaRPr kumimoji="1" lang="ja-JP" altLang="en-US" sz="1200" dirty="0">
+                <a:solidFill>
+                  <a:schemeClr val="tx1"/>
+                </a:solidFill>
+                <a:latin typeface="メイリオ" panose="020B0604030504040204" pitchFamily="50" charset="-128"/>
+                <a:ea typeface="メイリオ" panose="020B0604030504040204" pitchFamily="50" charset="-128"/>
+              </a:endParaRPr>
+            </a:p>
+          </p:txBody>
+        </p:sp>
+        <p:sp>
+          <p:nvSpPr>
+            <p:cNvPr id="219" name="四角形: 1 つの角を切り取る 218">
+              <a:extLst>
+                <a:ext uri="{FF2B5EF4-FFF2-40B4-BE49-F238E27FC236}">
+                  <a16:creationId xmlns:a16="http://schemas.microsoft.com/office/drawing/2014/main" id="{BC098D27-A088-ECE6-1D13-ED79392D80E3}"/>
+                </a:ext>
+              </a:extLst>
+            </p:cNvPr>
+            <p:cNvSpPr/>
+            <p:nvPr/>
+          </p:nvSpPr>
+          <p:spPr>
+            <a:xfrm>
+              <a:off x="10485137" y="2717241"/>
+              <a:ext cx="564291" cy="195839"/>
+            </a:xfrm>
+            <a:prstGeom prst="snip1Rect">
+              <a:avLst>
+                <a:gd name="adj" fmla="val 50000"/>
+              </a:avLst>
+            </a:prstGeom>
+            <a:solidFill>
+              <a:srgbClr val="FFFFFF"/>
+            </a:solidFill>
+            <a:ln>
+              <a:solidFill>
+                <a:schemeClr val="bg2">
+                  <a:lumMod val="75000"/>
+                </a:schemeClr>
+              </a:solidFill>
+            </a:ln>
+          </p:spPr>
+          <p:style>
+            <a:lnRef idx="2">
+              <a:schemeClr val="accent1">
+                <a:shade val="15000"/>
+              </a:schemeClr>
+            </a:lnRef>
+            <a:fillRef idx="1">
+              <a:schemeClr val="accent1"/>
+            </a:fillRef>
+            <a:effectRef idx="0">
+              <a:schemeClr val="accent1"/>
+            </a:effectRef>
+            <a:fontRef idx="minor">
+              <a:schemeClr val="lt1"/>
+            </a:fontRef>
+          </p:style>
+          <p:txBody>
+            <a:bodyPr rtlCol="0" anchor="ctr"/>
+            <a:lstStyle/>
+            <a:p>
+              <a:pPr algn="ctr"/>
+              <a:r>
+                <a:rPr kumimoji="1" lang="en-US" altLang="ja-JP" sz="1200" dirty="0">
+                  <a:solidFill>
+                    <a:schemeClr val="tx1"/>
+                  </a:solidFill>
+                  <a:latin typeface="メイリオ" panose="020B0604030504040204" pitchFamily="50" charset="-128"/>
+                  <a:ea typeface="メイリオ" panose="020B0604030504040204" pitchFamily="50" charset="-128"/>
+                </a:rPr>
+                <a:t>BB</a:t>
+              </a:r>
+              <a:endParaRPr kumimoji="1" lang="ja-JP" altLang="en-US" sz="1200" dirty="0">
+                <a:solidFill>
+                  <a:schemeClr val="tx1"/>
+                </a:solidFill>
+                <a:latin typeface="メイリオ" panose="020B0604030504040204" pitchFamily="50" charset="-128"/>
+                <a:ea typeface="メイリオ" panose="020B0604030504040204" pitchFamily="50" charset="-128"/>
+              </a:endParaRPr>
+            </a:p>
+          </p:txBody>
+        </p:sp>
+        <p:sp>
+          <p:nvSpPr>
+            <p:cNvPr id="220" name="四角形: 1 つの角を切り取る 219">
+              <a:extLst>
+                <a:ext uri="{FF2B5EF4-FFF2-40B4-BE49-F238E27FC236}">
+                  <a16:creationId xmlns:a16="http://schemas.microsoft.com/office/drawing/2014/main" id="{1929D7E6-1843-AB8B-C111-1EC7131292FA}"/>
+                </a:ext>
+              </a:extLst>
+            </p:cNvPr>
+            <p:cNvSpPr/>
+            <p:nvPr/>
+          </p:nvSpPr>
+          <p:spPr>
+            <a:xfrm>
+              <a:off x="10485136" y="2921589"/>
+              <a:ext cx="564291" cy="195839"/>
+            </a:xfrm>
+            <a:prstGeom prst="snip1Rect">
+              <a:avLst>
+                <a:gd name="adj" fmla="val 50000"/>
+              </a:avLst>
+            </a:prstGeom>
+            <a:solidFill>
+              <a:srgbClr val="FFFFFF"/>
+            </a:solidFill>
+            <a:ln>
+              <a:solidFill>
+                <a:schemeClr val="bg2">
+                  <a:lumMod val="75000"/>
+                </a:schemeClr>
+              </a:solidFill>
+            </a:ln>
+          </p:spPr>
+          <p:style>
+            <a:lnRef idx="2">
+              <a:schemeClr val="accent1">
+                <a:shade val="15000"/>
+              </a:schemeClr>
+            </a:lnRef>
+            <a:fillRef idx="1">
+              <a:schemeClr val="accent1"/>
+            </a:fillRef>
+            <a:effectRef idx="0">
+              <a:schemeClr val="accent1"/>
+            </a:effectRef>
+            <a:fontRef idx="minor">
+              <a:schemeClr val="lt1"/>
+            </a:fontRef>
+          </p:style>
+          <p:txBody>
+            <a:bodyPr rtlCol="0" anchor="ctr"/>
+            <a:lstStyle/>
+            <a:p>
+              <a:pPr algn="ctr"/>
+              <a:r>
+                <a:rPr kumimoji="1" lang="en-US" altLang="ja-JP" sz="1200" dirty="0">
+                  <a:solidFill>
+                    <a:schemeClr val="tx1"/>
+                  </a:solidFill>
+                  <a:latin typeface="メイリオ" panose="020B0604030504040204" pitchFamily="50" charset="-128"/>
+                  <a:ea typeface="メイリオ" panose="020B0604030504040204" pitchFamily="50" charset="-128"/>
+                </a:rPr>
+                <a:t>B</a:t>
+              </a:r>
+              <a:endParaRPr kumimoji="1" lang="ja-JP" altLang="en-US" sz="1200" dirty="0">
+                <a:solidFill>
+                  <a:schemeClr val="tx1"/>
+                </a:solidFill>
+                <a:latin typeface="メイリオ" panose="020B0604030504040204" pitchFamily="50" charset="-128"/>
+                <a:ea typeface="メイリオ" panose="020B0604030504040204" pitchFamily="50" charset="-128"/>
+              </a:endParaRPr>
+            </a:p>
+          </p:txBody>
+        </p:sp>
+        <p:sp>
+          <p:nvSpPr>
+            <p:cNvPr id="221" name="四角形: 1 つの角を切り取る 220">
+              <a:extLst>
+                <a:ext uri="{FF2B5EF4-FFF2-40B4-BE49-F238E27FC236}">
+                  <a16:creationId xmlns:a16="http://schemas.microsoft.com/office/drawing/2014/main" id="{E45A9BFA-860B-8D50-F419-C2FD5E81584A}"/>
+                </a:ext>
+              </a:extLst>
+            </p:cNvPr>
+            <p:cNvSpPr/>
+            <p:nvPr/>
+          </p:nvSpPr>
+          <p:spPr>
+            <a:xfrm>
+              <a:off x="10485136" y="3305362"/>
+              <a:ext cx="564291" cy="195839"/>
+            </a:xfrm>
+            <a:prstGeom prst="snip1Rect">
+              <a:avLst>
+                <a:gd name="adj" fmla="val 50000"/>
+              </a:avLst>
+            </a:prstGeom>
+            <a:solidFill>
+              <a:srgbClr val="FFFFFF"/>
+            </a:solidFill>
+            <a:ln>
+              <a:solidFill>
+                <a:schemeClr val="bg2">
+                  <a:lumMod val="75000"/>
+                </a:schemeClr>
+              </a:solidFill>
+            </a:ln>
+          </p:spPr>
+          <p:style>
+            <a:lnRef idx="2">
+              <a:schemeClr val="accent1">
+                <a:shade val="15000"/>
+              </a:schemeClr>
+            </a:lnRef>
+            <a:fillRef idx="1">
+              <a:schemeClr val="accent1"/>
+            </a:fillRef>
+            <a:effectRef idx="0">
+              <a:schemeClr val="accent1"/>
+            </a:effectRef>
+            <a:fontRef idx="minor">
+              <a:schemeClr val="lt1"/>
+            </a:fontRef>
+          </p:style>
+          <p:txBody>
+            <a:bodyPr rtlCol="0" anchor="ctr"/>
+            <a:lstStyle/>
+            <a:p>
+              <a:pPr algn="ctr"/>
+              <a:r>
+                <a:rPr kumimoji="1" lang="en-US" altLang="ja-JP" sz="1200" dirty="0">
+                  <a:solidFill>
+                    <a:schemeClr val="tx1"/>
+                  </a:solidFill>
+                  <a:latin typeface="メイリオ" panose="020B0604030504040204" pitchFamily="50" charset="-128"/>
+                  <a:ea typeface="メイリオ" panose="020B0604030504040204" pitchFamily="50" charset="-128"/>
+                </a:rPr>
+                <a:t>0</a:t>
+              </a:r>
+              <a:endParaRPr kumimoji="1" lang="ja-JP" altLang="en-US" sz="1200" dirty="0">
+                <a:solidFill>
+                  <a:schemeClr val="tx1"/>
+                </a:solidFill>
+                <a:latin typeface="メイリオ" panose="020B0604030504040204" pitchFamily="50" charset="-128"/>
+                <a:ea typeface="メイリオ" panose="020B0604030504040204" pitchFamily="50" charset="-128"/>
+              </a:endParaRPr>
+            </a:p>
+          </p:txBody>
+        </p:sp>
+        <p:sp>
+          <p:nvSpPr>
+            <p:cNvPr id="222" name="四角形: 1 つの角を切り取る 221">
+              <a:extLst>
+                <a:ext uri="{FF2B5EF4-FFF2-40B4-BE49-F238E27FC236}">
+                  <a16:creationId xmlns:a16="http://schemas.microsoft.com/office/drawing/2014/main" id="{0FBBBB70-895D-8984-1480-01A9C7FF3A07}"/>
+                </a:ext>
+              </a:extLst>
+            </p:cNvPr>
+            <p:cNvSpPr/>
+            <p:nvPr/>
+          </p:nvSpPr>
+          <p:spPr>
+            <a:xfrm>
+              <a:off x="10485136" y="3111628"/>
+              <a:ext cx="564291" cy="195839"/>
+            </a:xfrm>
+            <a:prstGeom prst="snip1Rect">
+              <a:avLst>
+                <a:gd name="adj" fmla="val 50000"/>
+              </a:avLst>
+            </a:prstGeom>
+            <a:solidFill>
+              <a:srgbClr val="FFFFFF"/>
+            </a:solidFill>
+            <a:ln>
+              <a:solidFill>
+                <a:schemeClr val="bg2">
+                  <a:lumMod val="75000"/>
+                </a:schemeClr>
+              </a:solidFill>
+            </a:ln>
+          </p:spPr>
+          <p:style>
+            <a:lnRef idx="2">
+              <a:schemeClr val="accent1">
+                <a:shade val="15000"/>
+              </a:schemeClr>
+            </a:lnRef>
+            <a:fillRef idx="1">
+              <a:schemeClr val="accent1"/>
+            </a:fillRef>
+            <a:effectRef idx="0">
+              <a:schemeClr val="accent1"/>
+            </a:effectRef>
+            <a:fontRef idx="minor">
+              <a:schemeClr val="lt1"/>
+            </a:fontRef>
+          </p:style>
+          <p:txBody>
+            <a:bodyPr rtlCol="0" anchor="ctr"/>
+            <a:lstStyle/>
+            <a:p>
+              <a:pPr algn="ctr"/>
+              <a:r>
+                <a:rPr kumimoji="1" lang="en-US" altLang="ja-JP" sz="1200" dirty="0">
+                  <a:solidFill>
+                    <a:schemeClr val="tx1"/>
+                  </a:solidFill>
+                  <a:latin typeface="メイリオ" panose="020B0604030504040204" pitchFamily="50" charset="-128"/>
+                  <a:ea typeface="メイリオ" panose="020B0604030504040204" pitchFamily="50" charset="-128"/>
+                </a:rPr>
+                <a:t>C</a:t>
+              </a:r>
+              <a:endParaRPr kumimoji="1" lang="ja-JP" altLang="en-US" sz="1200" dirty="0">
+                <a:solidFill>
+                  <a:schemeClr val="tx1"/>
+                </a:solidFill>
+                <a:latin typeface="メイリオ" panose="020B0604030504040204" pitchFamily="50" charset="-128"/>
+                <a:ea typeface="メイリオ" panose="020B0604030504040204" pitchFamily="50" charset="-128"/>
+              </a:endParaRPr>
+            </a:p>
+          </p:txBody>
+        </p:sp>
+        <p:sp>
+          <p:nvSpPr>
+            <p:cNvPr id="223" name="楕円 222">
+              <a:extLst>
+                <a:ext uri="{FF2B5EF4-FFF2-40B4-BE49-F238E27FC236}">
+                  <a16:creationId xmlns:a16="http://schemas.microsoft.com/office/drawing/2014/main" id="{452A2519-D833-6B46-E2F4-7BE79B4C167B}"/>
+                </a:ext>
+              </a:extLst>
+            </p:cNvPr>
+            <p:cNvSpPr/>
+            <p:nvPr/>
+          </p:nvSpPr>
+          <p:spPr>
+            <a:xfrm>
+              <a:off x="10578140" y="1452159"/>
+              <a:ext cx="377279" cy="374687"/>
+            </a:xfrm>
+            <a:prstGeom prst="ellipse">
+              <a:avLst/>
+            </a:prstGeom>
+            <a:solidFill>
+              <a:schemeClr val="bg1"/>
+            </a:solidFill>
+            <a:ln>
+              <a:solidFill>
+                <a:schemeClr val="bg2">
+                  <a:lumMod val="75000"/>
+                </a:schemeClr>
+              </a:solidFill>
+            </a:ln>
+          </p:spPr>
+          <p:style>
+            <a:lnRef idx="2">
+              <a:schemeClr val="accent1">
+                <a:shade val="15000"/>
+              </a:schemeClr>
+            </a:lnRef>
+            <a:fillRef idx="1">
+              <a:schemeClr val="accent1"/>
+            </a:fillRef>
+            <a:effectRef idx="0">
+              <a:schemeClr val="accent1"/>
+            </a:effectRef>
+            <a:fontRef idx="minor">
+              <a:schemeClr val="lt1"/>
+            </a:fontRef>
+          </p:style>
+          <p:txBody>
+            <a:bodyPr rtlCol="0" anchor="ctr"/>
+            <a:lstStyle/>
+            <a:p>
+              <a:pPr algn="ctr"/>
+              <a:endParaRPr kumimoji="1" lang="ja-JP" altLang="en-US" sz="500" dirty="0">
+                <a:solidFill>
+                  <a:schemeClr val="tx1"/>
+                </a:solidFill>
+              </a:endParaRPr>
+            </a:p>
+          </p:txBody>
+        </p:sp>
+        <p:sp>
+          <p:nvSpPr>
+            <p:cNvPr id="224" name="楕円 223">
+              <a:extLst>
+                <a:ext uri="{FF2B5EF4-FFF2-40B4-BE49-F238E27FC236}">
+                  <a16:creationId xmlns:a16="http://schemas.microsoft.com/office/drawing/2014/main" id="{FA3ECBC9-784A-D20B-7633-0031A99739B3}"/>
+                </a:ext>
+              </a:extLst>
+            </p:cNvPr>
+            <p:cNvSpPr/>
+            <p:nvPr/>
+          </p:nvSpPr>
+          <p:spPr>
+            <a:xfrm>
+              <a:off x="11320171" y="2306604"/>
+              <a:ext cx="247110" cy="258915"/>
+            </a:xfrm>
+            <a:prstGeom prst="ellipse">
+              <a:avLst/>
+            </a:prstGeom>
+            <a:solidFill>
+              <a:schemeClr val="bg1"/>
+            </a:solidFill>
+            <a:ln>
+              <a:solidFill>
+                <a:schemeClr val="bg2">
+                  <a:lumMod val="75000"/>
+                </a:schemeClr>
+              </a:solidFill>
+            </a:ln>
+          </p:spPr>
+          <p:style>
+            <a:lnRef idx="2">
+              <a:schemeClr val="accent1">
+                <a:shade val="15000"/>
+              </a:schemeClr>
+            </a:lnRef>
+            <a:fillRef idx="1">
+              <a:schemeClr val="accent1"/>
+            </a:fillRef>
+            <a:effectRef idx="0">
+              <a:schemeClr val="accent1"/>
+            </a:effectRef>
+            <a:fontRef idx="minor">
+              <a:schemeClr val="lt1"/>
+            </a:fontRef>
+          </p:style>
+          <p:txBody>
+            <a:bodyPr rtlCol="0" anchor="ctr"/>
+            <a:lstStyle/>
+            <a:p>
+              <a:pPr algn="ctr"/>
+              <a:endParaRPr kumimoji="1" lang="ja-JP" altLang="en-US" sz="500" dirty="0">
+                <a:solidFill>
+                  <a:schemeClr val="tx1"/>
+                </a:solidFill>
+              </a:endParaRPr>
+            </a:p>
+          </p:txBody>
+        </p:sp>
+        <p:sp>
+          <p:nvSpPr>
+            <p:cNvPr id="225" name="楕円 224">
+              <a:extLst>
+                <a:ext uri="{FF2B5EF4-FFF2-40B4-BE49-F238E27FC236}">
+                  <a16:creationId xmlns:a16="http://schemas.microsoft.com/office/drawing/2014/main" id="{740460B0-A3DA-AAFF-40B1-DD06C04C0205}"/>
+                </a:ext>
+              </a:extLst>
+            </p:cNvPr>
+            <p:cNvSpPr/>
+            <p:nvPr/>
+          </p:nvSpPr>
+          <p:spPr>
+            <a:xfrm>
+              <a:off x="11320169" y="2512869"/>
+              <a:ext cx="247110" cy="258915"/>
+            </a:xfrm>
+            <a:prstGeom prst="ellipse">
+              <a:avLst/>
+            </a:prstGeom>
+            <a:solidFill>
+              <a:schemeClr val="bg1"/>
+            </a:solidFill>
+            <a:ln>
+              <a:solidFill>
+                <a:schemeClr val="bg2">
+                  <a:lumMod val="75000"/>
+                </a:schemeClr>
+              </a:solidFill>
+            </a:ln>
+          </p:spPr>
+          <p:style>
+            <a:lnRef idx="2">
+              <a:schemeClr val="accent1">
+                <a:shade val="15000"/>
+              </a:schemeClr>
+            </a:lnRef>
+            <a:fillRef idx="1">
+              <a:schemeClr val="accent1"/>
+            </a:fillRef>
+            <a:effectRef idx="0">
+              <a:schemeClr val="accent1"/>
+            </a:effectRef>
+            <a:fontRef idx="minor">
+              <a:schemeClr val="lt1"/>
+            </a:fontRef>
+          </p:style>
+          <p:txBody>
+            <a:bodyPr rtlCol="0" anchor="ctr"/>
+            <a:lstStyle/>
+            <a:p>
+              <a:pPr algn="ctr"/>
+              <a:endParaRPr kumimoji="1" lang="ja-JP" altLang="en-US" sz="500" dirty="0">
+                <a:solidFill>
+                  <a:schemeClr val="tx1"/>
+                </a:solidFill>
+              </a:endParaRPr>
+            </a:p>
+          </p:txBody>
+        </p:sp>
+        <p:sp>
+          <p:nvSpPr>
+            <p:cNvPr id="226" name="楕円 225">
+              <a:extLst>
+                <a:ext uri="{FF2B5EF4-FFF2-40B4-BE49-F238E27FC236}">
+                  <a16:creationId xmlns:a16="http://schemas.microsoft.com/office/drawing/2014/main" id="{15A9B4FF-20C6-1C10-4F90-F68A5AA0C5F5}"/>
+                </a:ext>
+              </a:extLst>
+            </p:cNvPr>
+            <p:cNvSpPr/>
+            <p:nvPr/>
+          </p:nvSpPr>
+          <p:spPr>
+            <a:xfrm>
+              <a:off x="11320167" y="2708176"/>
+              <a:ext cx="247110" cy="258915"/>
+            </a:xfrm>
+            <a:prstGeom prst="ellipse">
+              <a:avLst/>
+            </a:prstGeom>
+            <a:solidFill>
+              <a:schemeClr val="bg1"/>
+            </a:solidFill>
+            <a:ln>
+              <a:solidFill>
+                <a:schemeClr val="bg2">
+                  <a:lumMod val="75000"/>
+                </a:schemeClr>
+              </a:solidFill>
+            </a:ln>
+          </p:spPr>
+          <p:style>
+            <a:lnRef idx="2">
+              <a:schemeClr val="accent1">
+                <a:shade val="15000"/>
+              </a:schemeClr>
+            </a:lnRef>
+            <a:fillRef idx="1">
+              <a:schemeClr val="accent1"/>
+            </a:fillRef>
+            <a:effectRef idx="0">
+              <a:schemeClr val="accent1"/>
+            </a:effectRef>
+            <a:fontRef idx="minor">
+              <a:schemeClr val="lt1"/>
+            </a:fontRef>
+          </p:style>
+          <p:txBody>
+            <a:bodyPr rtlCol="0" anchor="ctr"/>
+            <a:lstStyle/>
+            <a:p>
+              <a:pPr algn="ctr"/>
+              <a:endParaRPr kumimoji="1" lang="ja-JP" altLang="en-US" sz="500" dirty="0">
+                <a:solidFill>
+                  <a:schemeClr val="tx1"/>
+                </a:solidFill>
+              </a:endParaRPr>
+            </a:p>
+          </p:txBody>
+        </p:sp>
+        <p:sp>
+          <p:nvSpPr>
+            <p:cNvPr id="227" name="楕円 226">
+              <a:extLst>
+                <a:ext uri="{FF2B5EF4-FFF2-40B4-BE49-F238E27FC236}">
+                  <a16:creationId xmlns:a16="http://schemas.microsoft.com/office/drawing/2014/main" id="{94D10B90-8653-820D-9199-01F000F50775}"/>
+                </a:ext>
+              </a:extLst>
+            </p:cNvPr>
+            <p:cNvSpPr/>
+            <p:nvPr/>
+          </p:nvSpPr>
+          <p:spPr>
+            <a:xfrm>
+              <a:off x="11320165" y="2903483"/>
+              <a:ext cx="247110" cy="258915"/>
+            </a:xfrm>
+            <a:prstGeom prst="ellipse">
+              <a:avLst/>
+            </a:prstGeom>
+            <a:solidFill>
+              <a:schemeClr val="bg1"/>
+            </a:solidFill>
+            <a:ln>
+              <a:solidFill>
+                <a:schemeClr val="bg2">
+                  <a:lumMod val="75000"/>
+                </a:schemeClr>
+              </a:solidFill>
+            </a:ln>
+          </p:spPr>
+          <p:style>
+            <a:lnRef idx="2">
+              <a:schemeClr val="accent1">
+                <a:shade val="15000"/>
+              </a:schemeClr>
+            </a:lnRef>
+            <a:fillRef idx="1">
+              <a:schemeClr val="accent1"/>
+            </a:fillRef>
+            <a:effectRef idx="0">
+              <a:schemeClr val="accent1"/>
+            </a:effectRef>
+            <a:fontRef idx="minor">
+              <a:schemeClr val="lt1"/>
+            </a:fontRef>
+          </p:style>
+          <p:txBody>
+            <a:bodyPr rtlCol="0" anchor="ctr"/>
+            <a:lstStyle/>
+            <a:p>
+              <a:pPr algn="ctr"/>
+              <a:endParaRPr kumimoji="1" lang="ja-JP" altLang="en-US" sz="500" dirty="0">
+                <a:solidFill>
+                  <a:schemeClr val="tx1"/>
+                </a:solidFill>
+              </a:endParaRPr>
+            </a:p>
+          </p:txBody>
+        </p:sp>
+        <p:sp>
+          <p:nvSpPr>
+            <p:cNvPr id="228" name="楕円 227">
+              <a:extLst>
+                <a:ext uri="{FF2B5EF4-FFF2-40B4-BE49-F238E27FC236}">
+                  <a16:creationId xmlns:a16="http://schemas.microsoft.com/office/drawing/2014/main" id="{57B1D4DC-963C-8DC7-B2CA-60CA33652010}"/>
+                </a:ext>
+              </a:extLst>
+            </p:cNvPr>
+            <p:cNvSpPr/>
+            <p:nvPr/>
+          </p:nvSpPr>
+          <p:spPr>
+            <a:xfrm>
+              <a:off x="11320163" y="3098790"/>
+              <a:ext cx="247110" cy="258915"/>
+            </a:xfrm>
+            <a:prstGeom prst="ellipse">
+              <a:avLst/>
+            </a:prstGeom>
+            <a:solidFill>
+              <a:schemeClr val="bg1"/>
+            </a:solidFill>
+            <a:ln>
+              <a:solidFill>
+                <a:schemeClr val="bg2">
+                  <a:lumMod val="75000"/>
+                </a:schemeClr>
+              </a:solidFill>
+            </a:ln>
+          </p:spPr>
+          <p:style>
+            <a:lnRef idx="2">
+              <a:schemeClr val="accent1">
+                <a:shade val="15000"/>
+              </a:schemeClr>
+            </a:lnRef>
+            <a:fillRef idx="1">
+              <a:schemeClr val="accent1"/>
+            </a:fillRef>
+            <a:effectRef idx="0">
+              <a:schemeClr val="accent1"/>
+            </a:effectRef>
+            <a:fontRef idx="minor">
+              <a:schemeClr val="lt1"/>
+            </a:fontRef>
+          </p:style>
+          <p:txBody>
+            <a:bodyPr rtlCol="0" anchor="ctr"/>
+            <a:lstStyle/>
+            <a:p>
+              <a:pPr algn="ctr"/>
+              <a:endParaRPr kumimoji="1" lang="ja-JP" altLang="en-US" sz="500" dirty="0">
+                <a:solidFill>
+                  <a:schemeClr val="tx1"/>
+                </a:solidFill>
+              </a:endParaRPr>
+            </a:p>
+          </p:txBody>
+        </p:sp>
+        <p:sp>
+          <p:nvSpPr>
+            <p:cNvPr id="229" name="楕円 228">
+              <a:extLst>
+                <a:ext uri="{FF2B5EF4-FFF2-40B4-BE49-F238E27FC236}">
+                  <a16:creationId xmlns:a16="http://schemas.microsoft.com/office/drawing/2014/main" id="{14A9C296-6923-7541-4414-47CCA0F86B47}"/>
+                </a:ext>
+              </a:extLst>
+            </p:cNvPr>
+            <p:cNvSpPr/>
+            <p:nvPr/>
+          </p:nvSpPr>
+          <p:spPr>
+            <a:xfrm>
+              <a:off x="11320161" y="3294098"/>
+              <a:ext cx="247110" cy="258915"/>
+            </a:xfrm>
+            <a:prstGeom prst="ellipse">
+              <a:avLst/>
+            </a:prstGeom>
+            <a:solidFill>
+              <a:schemeClr val="bg1"/>
+            </a:solidFill>
+            <a:ln>
+              <a:solidFill>
+                <a:schemeClr val="bg2">
+                  <a:lumMod val="75000"/>
+                </a:schemeClr>
+              </a:solidFill>
+            </a:ln>
+          </p:spPr>
+          <p:style>
+            <a:lnRef idx="2">
+              <a:schemeClr val="accent1">
+                <a:shade val="15000"/>
+              </a:schemeClr>
+            </a:lnRef>
+            <a:fillRef idx="1">
+              <a:schemeClr val="accent1"/>
+            </a:fillRef>
+            <a:effectRef idx="0">
+              <a:schemeClr val="accent1"/>
+            </a:effectRef>
+            <a:fontRef idx="minor">
+              <a:schemeClr val="lt1"/>
+            </a:fontRef>
+          </p:style>
+          <p:txBody>
+            <a:bodyPr rtlCol="0" anchor="ctr"/>
+            <a:lstStyle/>
+            <a:p>
+              <a:pPr algn="ctr"/>
+              <a:endParaRPr kumimoji="1" lang="ja-JP" altLang="en-US" sz="500" dirty="0">
+                <a:solidFill>
+                  <a:schemeClr val="tx1"/>
+                </a:solidFill>
+              </a:endParaRPr>
+            </a:p>
+          </p:txBody>
+        </p:sp>
+        <p:sp>
+          <p:nvSpPr>
+            <p:cNvPr id="230" name="テキスト ボックス 229">
+              <a:extLst>
+                <a:ext uri="{FF2B5EF4-FFF2-40B4-BE49-F238E27FC236}">
+                  <a16:creationId xmlns:a16="http://schemas.microsoft.com/office/drawing/2014/main" id="{FDD37E07-66D0-6517-CBC7-460F03A69E90}"/>
+                </a:ext>
+              </a:extLst>
+            </p:cNvPr>
+            <p:cNvSpPr txBox="1"/>
+            <p:nvPr/>
+          </p:nvSpPr>
+          <p:spPr>
+            <a:xfrm>
+              <a:off x="10529895" y="1484020"/>
+              <a:ext cx="698422" cy="296624"/>
+            </a:xfrm>
+            <a:prstGeom prst="rect">
+              <a:avLst/>
+            </a:prstGeom>
+            <a:noFill/>
+          </p:spPr>
+          <p:txBody>
+            <a:bodyPr wrap="square" rtlCol="0">
+              <a:spAutoFit/>
+            </a:bodyPr>
+            <a:lstStyle/>
+            <a:p>
+              <a:r>
+                <a:rPr kumimoji="1" lang="en-US" altLang="ja-JP" sz="1300" dirty="0"/>
+                <a:t>100</a:t>
+              </a:r>
+              <a:endParaRPr kumimoji="1" lang="ja-JP" altLang="en-US" sz="1300" dirty="0"/>
+            </a:p>
+          </p:txBody>
+        </p:sp>
+        <p:sp>
+          <p:nvSpPr>
+            <p:cNvPr id="231" name="テキスト ボックス 230">
+              <a:extLst>
+                <a:ext uri="{FF2B5EF4-FFF2-40B4-BE49-F238E27FC236}">
+                  <a16:creationId xmlns:a16="http://schemas.microsoft.com/office/drawing/2014/main" id="{F6E8923D-7BF1-0AAF-E913-3D8EF44B930E}"/>
+                </a:ext>
+              </a:extLst>
+            </p:cNvPr>
+            <p:cNvSpPr txBox="1"/>
+            <p:nvPr/>
+          </p:nvSpPr>
+          <p:spPr>
+            <a:xfrm>
+              <a:off x="11211909" y="2326215"/>
+              <a:ext cx="457449" cy="249788"/>
+            </a:xfrm>
+            <a:prstGeom prst="rect">
+              <a:avLst/>
+            </a:prstGeom>
+            <a:noFill/>
+          </p:spPr>
+          <p:txBody>
+            <a:bodyPr wrap="square" rtlCol="0">
+              <a:spAutoFit/>
+            </a:bodyPr>
+            <a:lstStyle/>
+            <a:p>
+              <a:pPr algn="ctr"/>
+              <a:r>
+                <a:rPr kumimoji="1" lang="en-US" altLang="ja-JP" sz="1000" dirty="0"/>
+                <a:t>80</a:t>
+              </a:r>
+            </a:p>
+          </p:txBody>
+        </p:sp>
+        <p:sp>
+          <p:nvSpPr>
+            <p:cNvPr id="232" name="テキスト ボックス 231">
+              <a:extLst>
+                <a:ext uri="{FF2B5EF4-FFF2-40B4-BE49-F238E27FC236}">
+                  <a16:creationId xmlns:a16="http://schemas.microsoft.com/office/drawing/2014/main" id="{23D3C299-4C72-4DC2-5A6A-35B13B31DB3F}"/>
+                </a:ext>
+              </a:extLst>
+            </p:cNvPr>
+            <p:cNvSpPr txBox="1"/>
+            <p:nvPr/>
+          </p:nvSpPr>
+          <p:spPr>
+            <a:xfrm>
+              <a:off x="11216788" y="2513581"/>
+              <a:ext cx="457449" cy="249788"/>
+            </a:xfrm>
+            <a:prstGeom prst="rect">
+              <a:avLst/>
+            </a:prstGeom>
+            <a:noFill/>
+          </p:spPr>
+          <p:txBody>
+            <a:bodyPr wrap="square" rtlCol="0">
+              <a:spAutoFit/>
+            </a:bodyPr>
+            <a:lstStyle/>
+            <a:p>
+              <a:pPr algn="ctr"/>
+              <a:r>
+                <a:rPr kumimoji="1" lang="en-US" altLang="ja-JP" sz="1000" dirty="0"/>
+                <a:t>40</a:t>
+              </a:r>
+              <a:endParaRPr kumimoji="1" lang="ja-JP" altLang="en-US" sz="1000" dirty="0"/>
+            </a:p>
+          </p:txBody>
+        </p:sp>
+        <p:sp>
+          <p:nvSpPr>
+            <p:cNvPr id="233" name="テキスト ボックス 232">
+              <a:extLst>
+                <a:ext uri="{FF2B5EF4-FFF2-40B4-BE49-F238E27FC236}">
+                  <a16:creationId xmlns:a16="http://schemas.microsoft.com/office/drawing/2014/main" id="{15EF319C-2677-5776-BB83-FC550F855563}"/>
+                </a:ext>
+              </a:extLst>
+            </p:cNvPr>
+            <p:cNvSpPr txBox="1"/>
+            <p:nvPr/>
+          </p:nvSpPr>
+          <p:spPr>
+            <a:xfrm>
+              <a:off x="11211909" y="2722347"/>
+              <a:ext cx="457449" cy="249788"/>
+            </a:xfrm>
+            <a:prstGeom prst="rect">
+              <a:avLst/>
+            </a:prstGeom>
+            <a:noFill/>
+          </p:spPr>
+          <p:txBody>
+            <a:bodyPr wrap="square" rtlCol="0">
+              <a:spAutoFit/>
+            </a:bodyPr>
+            <a:lstStyle/>
+            <a:p>
+              <a:pPr algn="ctr"/>
+              <a:r>
+                <a:rPr kumimoji="1" lang="en-US" altLang="ja-JP" sz="1000" dirty="0"/>
+                <a:t>25</a:t>
+              </a:r>
+              <a:endParaRPr kumimoji="1" lang="ja-JP" altLang="en-US" sz="1000" dirty="0"/>
+            </a:p>
+          </p:txBody>
+        </p:sp>
+        <p:sp>
+          <p:nvSpPr>
+            <p:cNvPr id="234" name="テキスト ボックス 233">
+              <a:extLst>
+                <a:ext uri="{FF2B5EF4-FFF2-40B4-BE49-F238E27FC236}">
+                  <a16:creationId xmlns:a16="http://schemas.microsoft.com/office/drawing/2014/main" id="{54D8FDA9-3546-A103-9231-B1D46074EF6E}"/>
+                </a:ext>
+              </a:extLst>
+            </p:cNvPr>
+            <p:cNvSpPr txBox="1"/>
+            <p:nvPr/>
+          </p:nvSpPr>
+          <p:spPr>
+            <a:xfrm>
+              <a:off x="11285140" y="2923949"/>
+              <a:ext cx="457449" cy="249788"/>
+            </a:xfrm>
+            <a:prstGeom prst="rect">
+              <a:avLst/>
+            </a:prstGeom>
+            <a:noFill/>
+          </p:spPr>
+          <p:txBody>
+            <a:bodyPr wrap="square" rtlCol="0">
+              <a:spAutoFit/>
+            </a:bodyPr>
+            <a:lstStyle/>
+            <a:p>
+              <a:r>
+                <a:rPr kumimoji="1" lang="en-US" altLang="ja-JP" sz="1000" dirty="0"/>
+                <a:t>10</a:t>
+              </a:r>
+              <a:endParaRPr kumimoji="1" lang="ja-JP" altLang="en-US" sz="1000" dirty="0"/>
+            </a:p>
+          </p:txBody>
+        </p:sp>
+        <p:sp>
+          <p:nvSpPr>
+            <p:cNvPr id="235" name="テキスト ボックス 234">
+              <a:extLst>
+                <a:ext uri="{FF2B5EF4-FFF2-40B4-BE49-F238E27FC236}">
+                  <a16:creationId xmlns:a16="http://schemas.microsoft.com/office/drawing/2014/main" id="{A6C7650A-5A35-E0E0-CD5D-59F1A3AC161A}"/>
+                </a:ext>
+              </a:extLst>
+            </p:cNvPr>
+            <p:cNvSpPr txBox="1"/>
+            <p:nvPr/>
+          </p:nvSpPr>
+          <p:spPr>
+            <a:xfrm>
+              <a:off x="11285140" y="3111851"/>
+              <a:ext cx="457449" cy="249788"/>
+            </a:xfrm>
+            <a:prstGeom prst="rect">
+              <a:avLst/>
+            </a:prstGeom>
+            <a:noFill/>
+          </p:spPr>
+          <p:txBody>
+            <a:bodyPr wrap="square" rtlCol="0">
+              <a:spAutoFit/>
+            </a:bodyPr>
+            <a:lstStyle/>
+            <a:p>
+              <a:r>
+                <a:rPr kumimoji="1" lang="en-US" altLang="ja-JP" sz="1000" dirty="0"/>
+                <a:t>10</a:t>
+              </a:r>
+              <a:endParaRPr kumimoji="1" lang="ja-JP" altLang="en-US" sz="1000" dirty="0"/>
+            </a:p>
+          </p:txBody>
+        </p:sp>
+        <p:sp>
+          <p:nvSpPr>
+            <p:cNvPr id="236" name="テキスト ボックス 235">
+              <a:extLst>
+                <a:ext uri="{FF2B5EF4-FFF2-40B4-BE49-F238E27FC236}">
+                  <a16:creationId xmlns:a16="http://schemas.microsoft.com/office/drawing/2014/main" id="{500F7FA8-9DA7-3F51-2E6B-D164397A3A63}"/>
+                </a:ext>
+              </a:extLst>
+            </p:cNvPr>
+            <p:cNvSpPr txBox="1"/>
+            <p:nvPr/>
+          </p:nvSpPr>
+          <p:spPr>
+            <a:xfrm>
+              <a:off x="11320161" y="3321762"/>
+              <a:ext cx="457449" cy="249788"/>
+            </a:xfrm>
+            <a:prstGeom prst="rect">
+              <a:avLst/>
+            </a:prstGeom>
+            <a:noFill/>
+          </p:spPr>
+          <p:txBody>
+            <a:bodyPr wrap="square" rtlCol="0">
+              <a:spAutoFit/>
+            </a:bodyPr>
+            <a:lstStyle/>
+            <a:p>
+              <a:r>
+                <a:rPr kumimoji="1" lang="en-US" altLang="ja-JP" sz="1000" dirty="0"/>
+                <a:t>0</a:t>
+              </a:r>
+              <a:endParaRPr kumimoji="1" lang="ja-JP" altLang="en-US" sz="1000" dirty="0"/>
+            </a:p>
+          </p:txBody>
+        </p:sp>
+        <p:grpSp>
+          <p:nvGrpSpPr>
+            <p:cNvPr id="237" name="グループ化 236">
+              <a:extLst>
+                <a:ext uri="{FF2B5EF4-FFF2-40B4-BE49-F238E27FC236}">
+                  <a16:creationId xmlns:a16="http://schemas.microsoft.com/office/drawing/2014/main" id="{2D71C9B3-1E12-E4A9-DF75-5763165BD6A0}"/>
+                </a:ext>
+              </a:extLst>
+            </p:cNvPr>
+            <p:cNvGrpSpPr/>
+            <p:nvPr/>
+          </p:nvGrpSpPr>
+          <p:grpSpPr>
+            <a:xfrm>
+              <a:off x="10456364" y="3751788"/>
+              <a:ext cx="292344" cy="264104"/>
+              <a:chOff x="5697017" y="3490152"/>
+              <a:chExt cx="283017" cy="260332"/>
+            </a:xfrm>
+          </p:grpSpPr>
+          <p:sp>
+            <p:nvSpPr>
+              <p:cNvPr id="289" name="楕円 288">
+                <a:extLst>
+                  <a:ext uri="{FF2B5EF4-FFF2-40B4-BE49-F238E27FC236}">
+                    <a16:creationId xmlns:a16="http://schemas.microsoft.com/office/drawing/2014/main" id="{827BD9B4-2C7B-CBFE-F83C-5CF0EBEEB778}"/>
+                  </a:ext>
+                </a:extLst>
+              </p:cNvPr>
+              <p:cNvSpPr/>
+              <p:nvPr/>
+            </p:nvSpPr>
+            <p:spPr>
+              <a:xfrm>
+                <a:off x="5748245" y="3490152"/>
+                <a:ext cx="231789" cy="241249"/>
+              </a:xfrm>
+              <a:prstGeom prst="ellipse">
+                <a:avLst/>
+              </a:prstGeom>
+              <a:solidFill>
+                <a:schemeClr val="bg1"/>
+              </a:solidFill>
+              <a:ln>
+                <a:solidFill>
+                  <a:schemeClr val="bg2">
+                    <a:lumMod val="75000"/>
+                  </a:schemeClr>
+                </a:solidFill>
+              </a:ln>
+            </p:spPr>
+            <p:style>
+              <a:lnRef idx="2">
+                <a:schemeClr val="accent1">
+                  <a:shade val="15000"/>
+                </a:schemeClr>
+              </a:lnRef>
+              <a:fillRef idx="1">
+                <a:schemeClr val="accent1"/>
+              </a:fillRef>
+              <a:effectRef idx="0">
+                <a:schemeClr val="accent1"/>
+              </a:effectRef>
+              <a:fontRef idx="minor">
+                <a:schemeClr val="lt1"/>
+              </a:fontRef>
+            </p:style>
+            <p:txBody>
+              <a:bodyPr rtlCol="0" anchor="ctr"/>
+              <a:lstStyle/>
+              <a:p>
+                <a:pPr algn="ctr"/>
+                <a:endParaRPr kumimoji="1" lang="en-US" altLang="ja-JP" dirty="0">
+                  <a:solidFill>
+                    <a:schemeClr val="tx1"/>
+                  </a:solidFill>
+                </a:endParaRPr>
+              </a:p>
+            </p:txBody>
+          </p:sp>
+          <p:sp>
+            <p:nvSpPr>
+              <p:cNvPr id="290" name="テキスト ボックス 289">
+                <a:extLst>
+                  <a:ext uri="{FF2B5EF4-FFF2-40B4-BE49-F238E27FC236}">
+                    <a16:creationId xmlns:a16="http://schemas.microsoft.com/office/drawing/2014/main" id="{56126F16-8D4A-24CB-9267-2AEB408962EE}"/>
+                  </a:ext>
+                </a:extLst>
+              </p:cNvPr>
+              <p:cNvSpPr txBox="1"/>
+              <p:nvPr/>
+            </p:nvSpPr>
+            <p:spPr>
+              <a:xfrm>
+                <a:off x="5697017" y="3504263"/>
+                <a:ext cx="256065" cy="246221"/>
+              </a:xfrm>
+              <a:prstGeom prst="rect">
+                <a:avLst/>
+              </a:prstGeom>
+              <a:noFill/>
+            </p:spPr>
+            <p:txBody>
+              <a:bodyPr wrap="square" rtlCol="0">
+                <a:spAutoFit/>
+              </a:bodyPr>
+              <a:lstStyle/>
+              <a:p>
+                <a:r>
+                  <a:rPr kumimoji="1" lang="ja-JP" altLang="en-US" sz="1000" dirty="0">
+                    <a:latin typeface="メイリオ" panose="020B0604030504040204" pitchFamily="50" charset="-128"/>
+                    <a:ea typeface="メイリオ" panose="020B0604030504040204" pitchFamily="50" charset="-128"/>
+                  </a:rPr>
+                  <a:t>５</a:t>
+                </a:r>
+              </a:p>
+            </p:txBody>
+          </p:sp>
+        </p:grpSp>
+        <p:sp>
+          <p:nvSpPr>
+            <p:cNvPr id="238" name="四角形: 1 つの角を切り取る 237">
+              <a:extLst>
+                <a:ext uri="{FF2B5EF4-FFF2-40B4-BE49-F238E27FC236}">
+                  <a16:creationId xmlns:a16="http://schemas.microsoft.com/office/drawing/2014/main" id="{6DA5D551-7960-23F3-04CD-85BD41648BBA}"/>
+                </a:ext>
+              </a:extLst>
+            </p:cNvPr>
+            <p:cNvSpPr/>
+            <p:nvPr/>
+          </p:nvSpPr>
+          <p:spPr>
+            <a:xfrm>
+              <a:off x="10412578" y="5017216"/>
+              <a:ext cx="564291" cy="195839"/>
+            </a:xfrm>
+            <a:prstGeom prst="snip1Rect">
+              <a:avLst>
+                <a:gd name="adj" fmla="val 50000"/>
+              </a:avLst>
+            </a:prstGeom>
+            <a:solidFill>
+              <a:srgbClr val="FFFFFF"/>
+            </a:solidFill>
+            <a:ln>
+              <a:solidFill>
+                <a:schemeClr val="bg2">
+                  <a:lumMod val="75000"/>
+                </a:schemeClr>
+              </a:solidFill>
+            </a:ln>
+          </p:spPr>
+          <p:style>
+            <a:lnRef idx="2">
+              <a:schemeClr val="accent1">
+                <a:shade val="15000"/>
+              </a:schemeClr>
+            </a:lnRef>
+            <a:fillRef idx="1">
+              <a:schemeClr val="accent1"/>
+            </a:fillRef>
+            <a:effectRef idx="0">
+              <a:schemeClr val="accent1"/>
+            </a:effectRef>
+            <a:fontRef idx="minor">
+              <a:schemeClr val="lt1"/>
+            </a:fontRef>
+          </p:style>
+          <p:txBody>
+            <a:bodyPr rtlCol="0" anchor="ctr"/>
+            <a:lstStyle/>
+            <a:p>
+              <a:pPr algn="ctr"/>
+              <a:r>
+                <a:rPr kumimoji="1" lang="ja-JP" altLang="en-US" sz="1200" dirty="0">
+                  <a:solidFill>
+                    <a:schemeClr val="tx1"/>
+                  </a:solidFill>
+                  <a:latin typeface="メイリオ" panose="020B0604030504040204" pitchFamily="50" charset="-128"/>
+                  <a:ea typeface="メイリオ" panose="020B0604030504040204" pitchFamily="50" charset="-128"/>
+                </a:rPr>
+                <a:t>０個</a:t>
+              </a:r>
+            </a:p>
+          </p:txBody>
+        </p:sp>
+        <p:sp>
+          <p:nvSpPr>
+            <p:cNvPr id="239" name="四角形: 1 つの角を切り取る 238">
+              <a:extLst>
+                <a:ext uri="{FF2B5EF4-FFF2-40B4-BE49-F238E27FC236}">
+                  <a16:creationId xmlns:a16="http://schemas.microsoft.com/office/drawing/2014/main" id="{284E8201-062D-5D18-FBCF-8F3D913F157A}"/>
+                </a:ext>
+              </a:extLst>
+            </p:cNvPr>
+            <p:cNvSpPr/>
+            <p:nvPr/>
+          </p:nvSpPr>
+          <p:spPr>
+            <a:xfrm>
+              <a:off x="10406848" y="5195957"/>
+              <a:ext cx="564291" cy="195839"/>
+            </a:xfrm>
+            <a:prstGeom prst="snip1Rect">
+              <a:avLst>
+                <a:gd name="adj" fmla="val 50000"/>
+              </a:avLst>
+            </a:prstGeom>
+            <a:solidFill>
+              <a:srgbClr val="FFFFFF"/>
+            </a:solidFill>
+            <a:ln>
+              <a:solidFill>
+                <a:schemeClr val="bg2">
+                  <a:lumMod val="75000"/>
+                </a:schemeClr>
+              </a:solidFill>
+            </a:ln>
+          </p:spPr>
+          <p:style>
+            <a:lnRef idx="2">
+              <a:schemeClr val="accent1">
+                <a:shade val="15000"/>
+              </a:schemeClr>
+            </a:lnRef>
+            <a:fillRef idx="1">
+              <a:schemeClr val="accent1"/>
+            </a:fillRef>
+            <a:effectRef idx="0">
+              <a:schemeClr val="accent1"/>
+            </a:effectRef>
+            <a:fontRef idx="minor">
+              <a:schemeClr val="lt1"/>
+            </a:fontRef>
+          </p:style>
+          <p:txBody>
+            <a:bodyPr rtlCol="0" anchor="ctr"/>
+            <a:lstStyle/>
+            <a:p>
+              <a:pPr algn="ctr"/>
+              <a:r>
+                <a:rPr kumimoji="1" lang="ja-JP" altLang="en-US" sz="1200" dirty="0">
+                  <a:solidFill>
+                    <a:schemeClr val="tx1"/>
+                  </a:solidFill>
+                  <a:latin typeface="メイリオ" panose="020B0604030504040204" pitchFamily="50" charset="-128"/>
+                  <a:ea typeface="メイリオ" panose="020B0604030504040204" pitchFamily="50" charset="-128"/>
+                </a:rPr>
+                <a:t>１個</a:t>
+              </a:r>
+            </a:p>
+          </p:txBody>
+        </p:sp>
+        <p:sp>
+          <p:nvSpPr>
+            <p:cNvPr id="240" name="四角形: 1 つの角を切り取る 239">
+              <a:extLst>
+                <a:ext uri="{FF2B5EF4-FFF2-40B4-BE49-F238E27FC236}">
+                  <a16:creationId xmlns:a16="http://schemas.microsoft.com/office/drawing/2014/main" id="{4E0045CC-C046-8557-97F9-94BD365338D4}"/>
+                </a:ext>
+              </a:extLst>
+            </p:cNvPr>
+            <p:cNvSpPr/>
+            <p:nvPr/>
+          </p:nvSpPr>
+          <p:spPr>
+            <a:xfrm>
+              <a:off x="10412936" y="5394505"/>
+              <a:ext cx="564291" cy="195839"/>
+            </a:xfrm>
+            <a:prstGeom prst="snip1Rect">
+              <a:avLst>
+                <a:gd name="adj" fmla="val 50000"/>
+              </a:avLst>
+            </a:prstGeom>
+            <a:solidFill>
+              <a:srgbClr val="FFFFFF"/>
+            </a:solidFill>
+            <a:ln>
+              <a:solidFill>
+                <a:schemeClr val="bg2">
+                  <a:lumMod val="75000"/>
+                </a:schemeClr>
+              </a:solidFill>
+            </a:ln>
+          </p:spPr>
+          <p:style>
+            <a:lnRef idx="2">
+              <a:schemeClr val="accent1">
+                <a:shade val="15000"/>
+              </a:schemeClr>
+            </a:lnRef>
+            <a:fillRef idx="1">
+              <a:schemeClr val="accent1"/>
+            </a:fillRef>
+            <a:effectRef idx="0">
+              <a:schemeClr val="accent1"/>
+            </a:effectRef>
+            <a:fontRef idx="minor">
+              <a:schemeClr val="lt1"/>
+            </a:fontRef>
+          </p:style>
+          <p:txBody>
+            <a:bodyPr rtlCol="0" anchor="ctr"/>
+            <a:lstStyle/>
+            <a:p>
+              <a:pPr algn="ctr"/>
+              <a:r>
+                <a:rPr kumimoji="1" lang="ja-JP" altLang="en-US" sz="1200" dirty="0">
+                  <a:solidFill>
+                    <a:schemeClr val="tx1"/>
+                  </a:solidFill>
+                  <a:latin typeface="メイリオ" panose="020B0604030504040204" pitchFamily="50" charset="-128"/>
+                  <a:ea typeface="メイリオ" panose="020B0604030504040204" pitchFamily="50" charset="-128"/>
+                </a:rPr>
+                <a:t>２個</a:t>
+              </a:r>
+            </a:p>
+          </p:txBody>
+        </p:sp>
+        <p:sp>
+          <p:nvSpPr>
+            <p:cNvPr id="241" name="楕円 240">
+              <a:extLst>
+                <a:ext uri="{FF2B5EF4-FFF2-40B4-BE49-F238E27FC236}">
+                  <a16:creationId xmlns:a16="http://schemas.microsoft.com/office/drawing/2014/main" id="{35BAF776-3D37-1D5A-A2F4-CE40776E8E85}"/>
+                </a:ext>
+              </a:extLst>
+            </p:cNvPr>
+            <p:cNvSpPr/>
+            <p:nvPr/>
+          </p:nvSpPr>
+          <p:spPr>
+            <a:xfrm>
+              <a:off x="11343361" y="5405614"/>
+              <a:ext cx="239428" cy="244744"/>
+            </a:xfrm>
+            <a:prstGeom prst="ellipse">
+              <a:avLst/>
+            </a:prstGeom>
+            <a:solidFill>
+              <a:schemeClr val="bg1"/>
+            </a:solidFill>
+            <a:ln>
+              <a:solidFill>
+                <a:schemeClr val="bg2">
+                  <a:lumMod val="75000"/>
+                </a:schemeClr>
+              </a:solidFill>
+            </a:ln>
+          </p:spPr>
+          <p:style>
+            <a:lnRef idx="2">
+              <a:schemeClr val="accent1">
+                <a:shade val="15000"/>
+              </a:schemeClr>
+            </a:lnRef>
+            <a:fillRef idx="1">
+              <a:schemeClr val="accent1"/>
+            </a:fillRef>
+            <a:effectRef idx="0">
+              <a:schemeClr val="accent1"/>
+            </a:effectRef>
+            <a:fontRef idx="minor">
+              <a:schemeClr val="lt1"/>
+            </a:fontRef>
+          </p:style>
+          <p:txBody>
+            <a:bodyPr rtlCol="0" anchor="ctr"/>
+            <a:lstStyle/>
+            <a:p>
+              <a:pPr algn="ctr"/>
+              <a:endParaRPr kumimoji="1" lang="en-US" altLang="ja-JP" dirty="0">
+                <a:solidFill>
+                  <a:schemeClr val="tx1"/>
+                </a:solidFill>
+              </a:endParaRPr>
+            </a:p>
+          </p:txBody>
+        </p:sp>
+        <p:sp>
+          <p:nvSpPr>
+            <p:cNvPr id="242" name="楕円 241">
+              <a:extLst>
+                <a:ext uri="{FF2B5EF4-FFF2-40B4-BE49-F238E27FC236}">
+                  <a16:creationId xmlns:a16="http://schemas.microsoft.com/office/drawing/2014/main" id="{09A00BD7-0B91-CBE9-0FFD-36CC339A6BA6}"/>
+                </a:ext>
+              </a:extLst>
+            </p:cNvPr>
+            <p:cNvSpPr/>
+            <p:nvPr/>
+          </p:nvSpPr>
+          <p:spPr>
+            <a:xfrm>
+              <a:off x="11343361" y="5191756"/>
+              <a:ext cx="239428" cy="244744"/>
+            </a:xfrm>
+            <a:prstGeom prst="ellipse">
+              <a:avLst/>
+            </a:prstGeom>
+            <a:solidFill>
+              <a:schemeClr val="bg1"/>
+            </a:solidFill>
+            <a:ln>
+              <a:solidFill>
+                <a:schemeClr val="bg2">
+                  <a:lumMod val="75000"/>
+                </a:schemeClr>
+              </a:solidFill>
+            </a:ln>
+          </p:spPr>
+          <p:style>
+            <a:lnRef idx="2">
+              <a:schemeClr val="accent1">
+                <a:shade val="15000"/>
+              </a:schemeClr>
+            </a:lnRef>
+            <a:fillRef idx="1">
+              <a:schemeClr val="accent1"/>
+            </a:fillRef>
+            <a:effectRef idx="0">
+              <a:schemeClr val="accent1"/>
+            </a:effectRef>
+            <a:fontRef idx="minor">
+              <a:schemeClr val="lt1"/>
+            </a:fontRef>
+          </p:style>
+          <p:txBody>
+            <a:bodyPr rtlCol="0" anchor="ctr"/>
+            <a:lstStyle/>
+            <a:p>
+              <a:pPr algn="ctr"/>
+              <a:endParaRPr kumimoji="1" lang="en-US" altLang="ja-JP" dirty="0">
+                <a:solidFill>
+                  <a:schemeClr val="tx1"/>
+                </a:solidFill>
+              </a:endParaRPr>
+            </a:p>
+          </p:txBody>
+        </p:sp>
+        <p:sp>
+          <p:nvSpPr>
+            <p:cNvPr id="243" name="楕円 242">
+              <a:extLst>
+                <a:ext uri="{FF2B5EF4-FFF2-40B4-BE49-F238E27FC236}">
+                  <a16:creationId xmlns:a16="http://schemas.microsoft.com/office/drawing/2014/main" id="{05EF656B-DD0C-0895-A837-EEF912337C6D}"/>
+                </a:ext>
+              </a:extLst>
+            </p:cNvPr>
+            <p:cNvSpPr/>
+            <p:nvPr/>
+          </p:nvSpPr>
+          <p:spPr>
+            <a:xfrm>
+              <a:off x="11353805" y="4971464"/>
+              <a:ext cx="239428" cy="244744"/>
+            </a:xfrm>
+            <a:prstGeom prst="ellipse">
+              <a:avLst/>
+            </a:prstGeom>
+            <a:solidFill>
+              <a:schemeClr val="bg1"/>
+            </a:solidFill>
+            <a:ln>
+              <a:solidFill>
+                <a:schemeClr val="bg2">
+                  <a:lumMod val="75000"/>
+                </a:schemeClr>
+              </a:solidFill>
+            </a:ln>
+          </p:spPr>
+          <p:style>
+            <a:lnRef idx="2">
+              <a:schemeClr val="accent1">
+                <a:shade val="15000"/>
+              </a:schemeClr>
+            </a:lnRef>
+            <a:fillRef idx="1">
+              <a:schemeClr val="accent1"/>
+            </a:fillRef>
+            <a:effectRef idx="0">
+              <a:schemeClr val="accent1"/>
+            </a:effectRef>
+            <a:fontRef idx="minor">
+              <a:schemeClr val="lt1"/>
+            </a:fontRef>
+          </p:style>
+          <p:txBody>
+            <a:bodyPr rtlCol="0" anchor="ctr"/>
+            <a:lstStyle/>
+            <a:p>
+              <a:pPr algn="ctr"/>
+              <a:endParaRPr kumimoji="1" lang="en-US" altLang="ja-JP" dirty="0">
+                <a:solidFill>
+                  <a:schemeClr val="tx1"/>
+                </a:solidFill>
+              </a:endParaRPr>
+            </a:p>
+          </p:txBody>
+        </p:sp>
+        <p:sp>
+          <p:nvSpPr>
+            <p:cNvPr id="244" name="テキスト ボックス 243">
+              <a:extLst>
+                <a:ext uri="{FF2B5EF4-FFF2-40B4-BE49-F238E27FC236}">
+                  <a16:creationId xmlns:a16="http://schemas.microsoft.com/office/drawing/2014/main" id="{CBBE271E-3879-94CE-66C6-2275B03EB952}"/>
+                </a:ext>
+              </a:extLst>
+            </p:cNvPr>
+            <p:cNvSpPr txBox="1"/>
+            <p:nvPr/>
+          </p:nvSpPr>
+          <p:spPr>
+            <a:xfrm>
+              <a:off x="11326604" y="4988138"/>
+              <a:ext cx="264504" cy="249788"/>
+            </a:xfrm>
+            <a:prstGeom prst="rect">
+              <a:avLst/>
+            </a:prstGeom>
+            <a:noFill/>
+          </p:spPr>
+          <p:txBody>
+            <a:bodyPr wrap="square" rtlCol="0">
+              <a:spAutoFit/>
+            </a:bodyPr>
+            <a:lstStyle/>
+            <a:p>
+              <a:r>
+                <a:rPr lang="ja-JP" altLang="en-US" sz="1000" dirty="0">
+                  <a:latin typeface="メイリオ" panose="020B0604030504040204" pitchFamily="50" charset="-128"/>
+                  <a:ea typeface="メイリオ" panose="020B0604030504040204" pitchFamily="50" charset="-128"/>
+                </a:rPr>
+                <a:t>０</a:t>
+              </a:r>
+              <a:endParaRPr kumimoji="1" lang="ja-JP" altLang="en-US" sz="1000" dirty="0">
+                <a:latin typeface="メイリオ" panose="020B0604030504040204" pitchFamily="50" charset="-128"/>
+                <a:ea typeface="メイリオ" panose="020B0604030504040204" pitchFamily="50" charset="-128"/>
+              </a:endParaRPr>
+            </a:p>
+          </p:txBody>
+        </p:sp>
+        <p:sp>
+          <p:nvSpPr>
+            <p:cNvPr id="245" name="テキスト ボックス 244">
+              <a:extLst>
+                <a:ext uri="{FF2B5EF4-FFF2-40B4-BE49-F238E27FC236}">
+                  <a16:creationId xmlns:a16="http://schemas.microsoft.com/office/drawing/2014/main" id="{990A9C28-CA9E-9C36-7750-EE908FC482DD}"/>
+                </a:ext>
+              </a:extLst>
+            </p:cNvPr>
+            <p:cNvSpPr txBox="1"/>
+            <p:nvPr/>
+          </p:nvSpPr>
+          <p:spPr>
+            <a:xfrm>
+              <a:off x="11312414" y="5213474"/>
+              <a:ext cx="264504" cy="249788"/>
+            </a:xfrm>
+            <a:prstGeom prst="rect">
+              <a:avLst/>
+            </a:prstGeom>
+            <a:noFill/>
+          </p:spPr>
+          <p:txBody>
+            <a:bodyPr wrap="square" rtlCol="0">
+              <a:spAutoFit/>
+            </a:bodyPr>
+            <a:lstStyle/>
+            <a:p>
+              <a:r>
+                <a:rPr lang="ja-JP" altLang="en-US" sz="1000" dirty="0">
+                  <a:latin typeface="メイリオ" panose="020B0604030504040204" pitchFamily="50" charset="-128"/>
+                  <a:ea typeface="メイリオ" panose="020B0604030504040204" pitchFamily="50" charset="-128"/>
+                </a:rPr>
+                <a:t>２</a:t>
+              </a:r>
+              <a:endParaRPr kumimoji="1" lang="ja-JP" altLang="en-US" sz="1000" dirty="0">
+                <a:latin typeface="メイリオ" panose="020B0604030504040204" pitchFamily="50" charset="-128"/>
+                <a:ea typeface="メイリオ" panose="020B0604030504040204" pitchFamily="50" charset="-128"/>
+              </a:endParaRPr>
+            </a:p>
+          </p:txBody>
+        </p:sp>
+        <p:sp>
+          <p:nvSpPr>
+            <p:cNvPr id="246" name="テキスト ボックス 245">
+              <a:extLst>
+                <a:ext uri="{FF2B5EF4-FFF2-40B4-BE49-F238E27FC236}">
+                  <a16:creationId xmlns:a16="http://schemas.microsoft.com/office/drawing/2014/main" id="{DB42B7EC-BACA-32B9-ADE4-522EBB05A11B}"/>
+                </a:ext>
+              </a:extLst>
+            </p:cNvPr>
+            <p:cNvSpPr txBox="1"/>
+            <p:nvPr/>
+          </p:nvSpPr>
+          <p:spPr>
+            <a:xfrm>
+              <a:off x="11320161" y="5432900"/>
+              <a:ext cx="264504" cy="249788"/>
+            </a:xfrm>
+            <a:prstGeom prst="rect">
+              <a:avLst/>
+            </a:prstGeom>
+            <a:noFill/>
+          </p:spPr>
+          <p:txBody>
+            <a:bodyPr wrap="square" rtlCol="0">
+              <a:spAutoFit/>
+            </a:bodyPr>
+            <a:lstStyle/>
+            <a:p>
+              <a:r>
+                <a:rPr lang="ja-JP" altLang="en-US" sz="1000" dirty="0">
+                  <a:latin typeface="メイリオ" panose="020B0604030504040204" pitchFamily="50" charset="-128"/>
+                  <a:ea typeface="メイリオ" panose="020B0604030504040204" pitchFamily="50" charset="-128"/>
+                </a:rPr>
+                <a:t>５</a:t>
+              </a:r>
+              <a:endParaRPr kumimoji="1" lang="ja-JP" altLang="en-US" sz="1000" dirty="0">
+                <a:latin typeface="メイリオ" panose="020B0604030504040204" pitchFamily="50" charset="-128"/>
+                <a:ea typeface="メイリオ" panose="020B0604030504040204" pitchFamily="50" charset="-128"/>
+              </a:endParaRPr>
+            </a:p>
+          </p:txBody>
+        </p:sp>
+        <p:sp>
+          <p:nvSpPr>
+            <p:cNvPr id="247" name="四角形: 1 つの角を切り取る 246">
+              <a:extLst>
+                <a:ext uri="{FF2B5EF4-FFF2-40B4-BE49-F238E27FC236}">
+                  <a16:creationId xmlns:a16="http://schemas.microsoft.com/office/drawing/2014/main" id="{097B2245-B21E-F74B-9089-E06CB5696B0A}"/>
+                </a:ext>
+              </a:extLst>
+            </p:cNvPr>
+            <p:cNvSpPr/>
+            <p:nvPr/>
+          </p:nvSpPr>
+          <p:spPr>
+            <a:xfrm>
+              <a:off x="7085238" y="2285209"/>
+              <a:ext cx="2425761" cy="264781"/>
+            </a:xfrm>
+            <a:prstGeom prst="snip1Rect">
+              <a:avLst>
+                <a:gd name="adj" fmla="val 50000"/>
+              </a:avLst>
+            </a:prstGeom>
+            <a:solidFill>
+              <a:srgbClr val="FFFFFF"/>
+            </a:solidFill>
+            <a:ln>
+              <a:solidFill>
+                <a:schemeClr val="bg2">
+                  <a:lumMod val="75000"/>
+                </a:schemeClr>
+              </a:solidFill>
+            </a:ln>
+          </p:spPr>
+          <p:style>
+            <a:lnRef idx="2">
+              <a:schemeClr val="accent1">
+                <a:shade val="15000"/>
+              </a:schemeClr>
+            </a:lnRef>
+            <a:fillRef idx="1">
+              <a:schemeClr val="accent1"/>
+            </a:fillRef>
+            <a:effectRef idx="0">
+              <a:schemeClr val="accent1"/>
+            </a:effectRef>
+            <a:fontRef idx="minor">
+              <a:schemeClr val="lt1"/>
+            </a:fontRef>
+          </p:style>
+          <p:txBody>
+            <a:bodyPr rtlCol="0" anchor="ctr"/>
+            <a:lstStyle/>
+            <a:p>
+              <a:pPr algn="ctr"/>
+              <a:r>
+                <a:rPr kumimoji="1" lang="en-US" altLang="ja-JP" sz="1400" dirty="0">
+                  <a:solidFill>
+                    <a:schemeClr val="tx1"/>
+                  </a:solidFill>
+                  <a:latin typeface="メイリオ" panose="020B0604030504040204" pitchFamily="50" charset="-128"/>
+                  <a:ea typeface="メイリオ" panose="020B0604030504040204" pitchFamily="50" charset="-128"/>
+                </a:rPr>
+                <a:t>slots</a:t>
+              </a:r>
+              <a:r>
+                <a:rPr kumimoji="1" lang="ja-JP" altLang="en-US" sz="1400" dirty="0">
+                  <a:solidFill>
+                    <a:schemeClr val="tx1"/>
+                  </a:solidFill>
+                  <a:latin typeface="メイリオ" panose="020B0604030504040204" pitchFamily="50" charset="-128"/>
+                  <a:ea typeface="メイリオ" panose="020B0604030504040204" pitchFamily="50" charset="-128"/>
+                </a:rPr>
+                <a:t>が１種類</a:t>
+              </a:r>
+            </a:p>
+          </p:txBody>
+        </p:sp>
+        <p:sp>
+          <p:nvSpPr>
+            <p:cNvPr id="248" name="四角形: 1 つの角を切り取る 247">
+              <a:extLst>
+                <a:ext uri="{FF2B5EF4-FFF2-40B4-BE49-F238E27FC236}">
+                  <a16:creationId xmlns:a16="http://schemas.microsoft.com/office/drawing/2014/main" id="{C927AFBD-4070-52F8-BA36-569A13C63CA8}"/>
+                </a:ext>
+              </a:extLst>
+            </p:cNvPr>
+            <p:cNvSpPr/>
+            <p:nvPr/>
+          </p:nvSpPr>
+          <p:spPr>
+            <a:xfrm>
+              <a:off x="7088070" y="4600163"/>
+              <a:ext cx="1425725" cy="264781"/>
+            </a:xfrm>
+            <a:prstGeom prst="snip1Rect">
+              <a:avLst>
+                <a:gd name="adj" fmla="val 50000"/>
+              </a:avLst>
+            </a:prstGeom>
+            <a:solidFill>
+              <a:srgbClr val="FFFFFF"/>
+            </a:solidFill>
+            <a:ln>
+              <a:solidFill>
+                <a:schemeClr val="bg2">
+                  <a:lumMod val="75000"/>
+                </a:schemeClr>
+              </a:solidFill>
+            </a:ln>
+          </p:spPr>
+          <p:style>
+            <a:lnRef idx="2">
+              <a:schemeClr val="accent1">
+                <a:shade val="15000"/>
+              </a:schemeClr>
+            </a:lnRef>
+            <a:fillRef idx="1">
+              <a:schemeClr val="accent1"/>
+            </a:fillRef>
+            <a:effectRef idx="0">
+              <a:schemeClr val="accent1"/>
+            </a:effectRef>
+            <a:fontRef idx="minor">
+              <a:schemeClr val="lt1"/>
+            </a:fontRef>
+          </p:style>
+          <p:txBody>
+            <a:bodyPr rtlCol="0" anchor="ctr"/>
+            <a:lstStyle/>
+            <a:p>
+              <a:pPr algn="ctr"/>
+              <a:r>
+                <a:rPr kumimoji="1" lang="en-US" altLang="ja-JP" sz="1400" dirty="0">
+                  <a:solidFill>
+                    <a:schemeClr val="tx1"/>
+                  </a:solidFill>
+                  <a:latin typeface="メイリオ" panose="020B0604030504040204" pitchFamily="50" charset="-128"/>
+                  <a:ea typeface="メイリオ" panose="020B0604030504040204" pitchFamily="50" charset="-128"/>
+                </a:rPr>
+                <a:t>C</a:t>
+              </a:r>
+              <a:r>
+                <a:rPr kumimoji="1" lang="ja-JP" altLang="en-US" sz="1400" dirty="0">
+                  <a:solidFill>
+                    <a:schemeClr val="tx1"/>
+                  </a:solidFill>
+                  <a:latin typeface="メイリオ" panose="020B0604030504040204" pitchFamily="50" charset="-128"/>
+                  <a:ea typeface="メイリオ" panose="020B0604030504040204" pitchFamily="50" charset="-128"/>
+                </a:rPr>
+                <a:t>が１つ以上</a:t>
+              </a:r>
+            </a:p>
+          </p:txBody>
+        </p:sp>
+        <p:sp>
+          <p:nvSpPr>
+            <p:cNvPr id="249" name="四角形: 1 つの角を切り取る 248">
+              <a:extLst>
+                <a:ext uri="{FF2B5EF4-FFF2-40B4-BE49-F238E27FC236}">
+                  <a16:creationId xmlns:a16="http://schemas.microsoft.com/office/drawing/2014/main" id="{1BDD83FB-6DC0-4237-BFC2-6259912BFFA1}"/>
+                </a:ext>
+              </a:extLst>
+            </p:cNvPr>
+            <p:cNvSpPr/>
+            <p:nvPr/>
+          </p:nvSpPr>
+          <p:spPr>
+            <a:xfrm>
+              <a:off x="9299513" y="4633801"/>
+              <a:ext cx="2135505" cy="252780"/>
+            </a:xfrm>
+            <a:prstGeom prst="snip1Rect">
+              <a:avLst>
+                <a:gd name="adj" fmla="val 0"/>
+              </a:avLst>
+            </a:prstGeom>
+            <a:solidFill>
+              <a:srgbClr val="FFFFFF"/>
+            </a:solidFill>
+            <a:ln>
+              <a:solidFill>
+                <a:schemeClr val="bg2">
+                  <a:lumMod val="75000"/>
+                </a:schemeClr>
+              </a:solidFill>
+            </a:ln>
+          </p:spPr>
+          <p:style>
+            <a:lnRef idx="2">
+              <a:schemeClr val="accent1">
+                <a:shade val="15000"/>
+              </a:schemeClr>
+            </a:lnRef>
+            <a:fillRef idx="1">
+              <a:schemeClr val="accent1"/>
+            </a:fillRef>
+            <a:effectRef idx="0">
+              <a:schemeClr val="accent1"/>
+            </a:effectRef>
+            <a:fontRef idx="minor">
+              <a:schemeClr val="lt1"/>
+            </a:fontRef>
+          </p:style>
+          <p:txBody>
+            <a:bodyPr rtlCol="0" anchor="ctr"/>
+            <a:lstStyle/>
+            <a:p>
+              <a:pPr algn="ctr"/>
+              <a:r>
+                <a:rPr kumimoji="1" lang="en-US" altLang="ja-JP" sz="1400" dirty="0">
+                  <a:solidFill>
+                    <a:schemeClr val="tx1"/>
+                  </a:solidFill>
+                  <a:latin typeface="メイリオ" panose="020B0604030504040204" pitchFamily="50" charset="-128"/>
+                  <a:ea typeface="メイリオ" panose="020B0604030504040204" pitchFamily="50" charset="-128"/>
+                </a:rPr>
+                <a:t>C</a:t>
+              </a:r>
+              <a:r>
+                <a:rPr kumimoji="1" lang="ja-JP" altLang="en-US" sz="1400" dirty="0">
+                  <a:solidFill>
+                    <a:schemeClr val="tx1"/>
+                  </a:solidFill>
+                  <a:latin typeface="メイリオ" panose="020B0604030504040204" pitchFamily="50" charset="-128"/>
+                  <a:ea typeface="メイリオ" panose="020B0604030504040204" pitchFamily="50" charset="-128"/>
+                </a:rPr>
+                <a:t>と</a:t>
+              </a:r>
+              <a:r>
+                <a:rPr lang="en-US" altLang="ja-JP" sz="1400" dirty="0">
+                  <a:solidFill>
+                    <a:schemeClr val="tx1"/>
+                  </a:solidFill>
+                  <a:latin typeface="メイリオ" panose="020B0604030504040204" pitchFamily="50" charset="-128"/>
+                  <a:ea typeface="メイリオ" panose="020B0604030504040204" pitchFamily="50" charset="-128"/>
+                </a:rPr>
+                <a:t>DD</a:t>
+              </a:r>
+              <a:r>
+                <a:rPr kumimoji="1" lang="ja-JP" altLang="en-US" sz="1400" dirty="0">
+                  <a:solidFill>
+                    <a:schemeClr val="tx1"/>
+                  </a:solidFill>
+                  <a:latin typeface="メイリオ" panose="020B0604030504040204" pitchFamily="50" charset="-128"/>
+                  <a:ea typeface="メイリオ" panose="020B0604030504040204" pitchFamily="50" charset="-128"/>
+                </a:rPr>
+                <a:t>の合計</a:t>
+              </a:r>
+              <a:r>
+                <a:rPr lang="ja-JP" altLang="en-US" sz="1400" dirty="0">
+                  <a:solidFill>
+                    <a:schemeClr val="tx1"/>
+                  </a:solidFill>
+                  <a:latin typeface="メイリオ" panose="020B0604030504040204" pitchFamily="50" charset="-128"/>
+                  <a:ea typeface="メイリオ" panose="020B0604030504040204" pitchFamily="50" charset="-128"/>
+                </a:rPr>
+                <a:t>を</a:t>
+              </a:r>
+              <a:r>
+                <a:rPr kumimoji="1" lang="ja-JP" altLang="en-US" sz="1400" dirty="0">
+                  <a:solidFill>
+                    <a:schemeClr val="tx1"/>
+                  </a:solidFill>
+                  <a:latin typeface="メイリオ" panose="020B0604030504040204" pitchFamily="50" charset="-128"/>
+                  <a:ea typeface="メイリオ" panose="020B0604030504040204" pitchFamily="50" charset="-128"/>
+                </a:rPr>
+                <a:t>数える</a:t>
+              </a:r>
+            </a:p>
+          </p:txBody>
+        </p:sp>
+        <p:cxnSp>
+          <p:nvCxnSpPr>
+            <p:cNvPr id="250" name="直線矢印コネクタ 249">
+              <a:extLst>
+                <a:ext uri="{FF2B5EF4-FFF2-40B4-BE49-F238E27FC236}">
+                  <a16:creationId xmlns:a16="http://schemas.microsoft.com/office/drawing/2014/main" id="{6BA574A5-0AAB-260E-B0F4-9CE887558600}"/>
+                </a:ext>
+              </a:extLst>
+            </p:cNvPr>
+            <p:cNvCxnSpPr>
+              <a:cxnSpLocks/>
+            </p:cNvCxnSpPr>
+            <p:nvPr/>
+          </p:nvCxnSpPr>
+          <p:spPr>
+            <a:xfrm>
+              <a:off x="7258310" y="2666522"/>
+              <a:ext cx="0" cy="905027"/>
+            </a:xfrm>
+            <a:prstGeom prst="straightConnector1">
+              <a:avLst/>
+            </a:prstGeom>
+            <a:ln w="57150">
+              <a:solidFill>
+                <a:schemeClr val="accent4">
+                  <a:lumMod val="75000"/>
+                </a:schemeClr>
+              </a:solidFill>
+              <a:tailEnd type="triangle"/>
+            </a:ln>
+          </p:spPr>
+          <p:style>
+            <a:lnRef idx="1">
+              <a:schemeClr val="accent1"/>
+            </a:lnRef>
+            <a:fillRef idx="0">
+              <a:schemeClr val="accent1"/>
+            </a:fillRef>
+            <a:effectRef idx="0">
+              <a:schemeClr val="accent1"/>
+            </a:effectRef>
+            <a:fontRef idx="minor">
+              <a:schemeClr val="tx1"/>
+            </a:fontRef>
+          </p:style>
+        </p:cxnSp>
+        <p:cxnSp>
+          <p:nvCxnSpPr>
+            <p:cNvPr id="251" name="直線矢印コネクタ 250">
+              <a:extLst>
+                <a:ext uri="{FF2B5EF4-FFF2-40B4-BE49-F238E27FC236}">
+                  <a16:creationId xmlns:a16="http://schemas.microsoft.com/office/drawing/2014/main" id="{9F184168-4536-7EAA-DF01-C0C37F260B77}"/>
+                </a:ext>
+              </a:extLst>
+            </p:cNvPr>
+            <p:cNvCxnSpPr>
+              <a:cxnSpLocks/>
+            </p:cNvCxnSpPr>
+            <p:nvPr/>
+          </p:nvCxnSpPr>
+          <p:spPr>
+            <a:xfrm>
+              <a:off x="7255606" y="1823363"/>
+              <a:ext cx="2704" cy="380517"/>
+            </a:xfrm>
+            <a:prstGeom prst="straightConnector1">
+              <a:avLst/>
+            </a:prstGeom>
+            <a:ln w="57150">
+              <a:solidFill>
+                <a:schemeClr val="accent4">
+                  <a:lumMod val="75000"/>
+                </a:schemeClr>
+              </a:solidFill>
+              <a:tailEnd type="triangle"/>
+            </a:ln>
+          </p:spPr>
+          <p:style>
+            <a:lnRef idx="1">
+              <a:schemeClr val="accent1"/>
+            </a:lnRef>
+            <a:fillRef idx="0">
+              <a:schemeClr val="accent1"/>
+            </a:fillRef>
+            <a:effectRef idx="0">
+              <a:schemeClr val="accent1"/>
+            </a:effectRef>
+            <a:fontRef idx="minor">
+              <a:schemeClr val="tx1"/>
+            </a:fontRef>
+          </p:style>
+        </p:cxnSp>
+        <p:cxnSp>
+          <p:nvCxnSpPr>
+            <p:cNvPr id="252" name="直線矢印コネクタ 251">
+              <a:extLst>
+                <a:ext uri="{FF2B5EF4-FFF2-40B4-BE49-F238E27FC236}">
+                  <a16:creationId xmlns:a16="http://schemas.microsoft.com/office/drawing/2014/main" id="{5CE10198-74D8-0434-4C84-93AEA91062EC}"/>
+                </a:ext>
+              </a:extLst>
+            </p:cNvPr>
+            <p:cNvCxnSpPr>
+              <a:cxnSpLocks/>
+            </p:cNvCxnSpPr>
+            <p:nvPr/>
+          </p:nvCxnSpPr>
+          <p:spPr>
+            <a:xfrm flipV="1">
+              <a:off x="9777007" y="1632237"/>
+              <a:ext cx="547249" cy="2596"/>
+            </a:xfrm>
+            <a:prstGeom prst="straightConnector1">
+              <a:avLst/>
+            </a:prstGeom>
+            <a:ln w="57150">
+              <a:solidFill>
+                <a:schemeClr val="accent4">
+                  <a:lumMod val="75000"/>
+                </a:schemeClr>
+              </a:solidFill>
+              <a:tailEnd type="triangle"/>
+            </a:ln>
+          </p:spPr>
+          <p:style>
+            <a:lnRef idx="1">
+              <a:schemeClr val="accent1"/>
+            </a:lnRef>
+            <a:fillRef idx="0">
+              <a:schemeClr val="accent1"/>
+            </a:fillRef>
+            <a:effectRef idx="0">
+              <a:schemeClr val="accent1"/>
+            </a:effectRef>
+            <a:fontRef idx="minor">
+              <a:schemeClr val="tx1"/>
+            </a:fontRef>
+          </p:style>
+        </p:cxnSp>
+        <p:cxnSp>
+          <p:nvCxnSpPr>
+            <p:cNvPr id="253" name="直線矢印コネクタ 252">
+              <a:extLst>
+                <a:ext uri="{FF2B5EF4-FFF2-40B4-BE49-F238E27FC236}">
+                  <a16:creationId xmlns:a16="http://schemas.microsoft.com/office/drawing/2014/main" id="{91640AD6-3BA4-02FD-3182-330387259BCF}"/>
+                </a:ext>
+              </a:extLst>
+            </p:cNvPr>
+            <p:cNvCxnSpPr>
+              <a:cxnSpLocks/>
+            </p:cNvCxnSpPr>
+            <p:nvPr/>
+          </p:nvCxnSpPr>
+          <p:spPr>
+            <a:xfrm flipV="1">
+              <a:off x="9784046" y="2460401"/>
+              <a:ext cx="547249" cy="2596"/>
+            </a:xfrm>
+            <a:prstGeom prst="straightConnector1">
+              <a:avLst/>
+            </a:prstGeom>
+            <a:ln w="57150">
+              <a:solidFill>
+                <a:schemeClr val="accent4">
+                  <a:lumMod val="75000"/>
+                </a:schemeClr>
+              </a:solidFill>
+              <a:tailEnd type="triangle"/>
+            </a:ln>
+          </p:spPr>
+          <p:style>
+            <a:lnRef idx="1">
+              <a:schemeClr val="accent1"/>
+            </a:lnRef>
+            <a:fillRef idx="0">
+              <a:schemeClr val="accent1"/>
+            </a:fillRef>
+            <a:effectRef idx="0">
+              <a:schemeClr val="accent1"/>
+            </a:effectRef>
+            <a:fontRef idx="minor">
+              <a:schemeClr val="tx1"/>
+            </a:fontRef>
+          </p:style>
+        </p:cxnSp>
+        <p:cxnSp>
+          <p:nvCxnSpPr>
+            <p:cNvPr id="254" name="直線矢印コネクタ 253">
+              <a:extLst>
+                <a:ext uri="{FF2B5EF4-FFF2-40B4-BE49-F238E27FC236}">
+                  <a16:creationId xmlns:a16="http://schemas.microsoft.com/office/drawing/2014/main" id="{7C2272AD-03B8-E004-A8D4-3A4574FC8B46}"/>
+                </a:ext>
+              </a:extLst>
+            </p:cNvPr>
+            <p:cNvCxnSpPr>
+              <a:cxnSpLocks/>
+            </p:cNvCxnSpPr>
+            <p:nvPr/>
+          </p:nvCxnSpPr>
+          <p:spPr>
+            <a:xfrm flipV="1">
+              <a:off x="9755678" y="3880486"/>
+              <a:ext cx="547249" cy="2596"/>
+            </a:xfrm>
+            <a:prstGeom prst="straightConnector1">
+              <a:avLst/>
+            </a:prstGeom>
+            <a:ln w="57150">
+              <a:solidFill>
+                <a:schemeClr val="accent4">
+                  <a:lumMod val="75000"/>
+                </a:schemeClr>
+              </a:solidFill>
+              <a:tailEnd type="triangle"/>
+            </a:ln>
+          </p:spPr>
+          <p:style>
+            <a:lnRef idx="1">
+              <a:schemeClr val="accent1"/>
+            </a:lnRef>
+            <a:fillRef idx="0">
+              <a:schemeClr val="accent1"/>
+            </a:fillRef>
+            <a:effectRef idx="0">
+              <a:schemeClr val="accent1"/>
+            </a:effectRef>
+            <a:fontRef idx="minor">
+              <a:schemeClr val="tx1"/>
+            </a:fontRef>
+          </p:style>
+        </p:cxnSp>
+        <p:sp>
+          <p:nvSpPr>
+            <p:cNvPr id="255" name="テキスト ボックス 254">
+              <a:extLst>
+                <a:ext uri="{FF2B5EF4-FFF2-40B4-BE49-F238E27FC236}">
+                  <a16:creationId xmlns:a16="http://schemas.microsoft.com/office/drawing/2014/main" id="{F76611DE-91F4-2921-18E7-D5EFCDD6E5A1}"/>
+                </a:ext>
+              </a:extLst>
+            </p:cNvPr>
+            <p:cNvSpPr txBox="1"/>
+            <p:nvPr/>
+          </p:nvSpPr>
+          <p:spPr>
+            <a:xfrm>
+              <a:off x="9614571" y="1257555"/>
+              <a:ext cx="886201" cy="374683"/>
+            </a:xfrm>
+            <a:prstGeom prst="rect">
+              <a:avLst/>
+            </a:prstGeom>
+            <a:noFill/>
+          </p:spPr>
+          <p:txBody>
+            <a:bodyPr wrap="square" rtlCol="0">
+              <a:spAutoFit/>
+            </a:bodyPr>
+            <a:lstStyle/>
+            <a:p>
+              <a:r>
+                <a:rPr kumimoji="1" lang="en-US" altLang="ja-JP" dirty="0">
+                  <a:solidFill>
+                    <a:schemeClr val="accent4">
+                      <a:lumMod val="75000"/>
+                    </a:schemeClr>
+                  </a:solidFill>
+                  <a:latin typeface="メイリオ" panose="020B0604030504040204" pitchFamily="50" charset="-128"/>
+                  <a:ea typeface="メイリオ" panose="020B0604030504040204" pitchFamily="50" charset="-128"/>
+                </a:rPr>
+                <a:t>TRUE</a:t>
+              </a:r>
+              <a:endParaRPr kumimoji="1" lang="ja-JP" altLang="en-US" dirty="0">
+                <a:solidFill>
+                  <a:schemeClr val="accent4">
+                    <a:lumMod val="75000"/>
+                  </a:schemeClr>
+                </a:solidFill>
+                <a:latin typeface="メイリオ" panose="020B0604030504040204" pitchFamily="50" charset="-128"/>
+                <a:ea typeface="メイリオ" panose="020B0604030504040204" pitchFamily="50" charset="-128"/>
+              </a:endParaRPr>
+            </a:p>
+          </p:txBody>
+        </p:sp>
+        <p:sp>
+          <p:nvSpPr>
+            <p:cNvPr id="256" name="テキスト ボックス 255">
+              <a:extLst>
+                <a:ext uri="{FF2B5EF4-FFF2-40B4-BE49-F238E27FC236}">
+                  <a16:creationId xmlns:a16="http://schemas.microsoft.com/office/drawing/2014/main" id="{4EBEE22E-72D5-D684-89FC-BECCE180EAD8}"/>
+                </a:ext>
+              </a:extLst>
+            </p:cNvPr>
+            <p:cNvSpPr txBox="1"/>
+            <p:nvPr/>
+          </p:nvSpPr>
+          <p:spPr>
+            <a:xfrm>
+              <a:off x="7410817" y="5002753"/>
+              <a:ext cx="1102977" cy="374683"/>
+            </a:xfrm>
+            <a:prstGeom prst="rect">
+              <a:avLst/>
+            </a:prstGeom>
+            <a:noFill/>
+          </p:spPr>
+          <p:txBody>
+            <a:bodyPr wrap="square" rtlCol="0">
+              <a:spAutoFit/>
+            </a:bodyPr>
+            <a:lstStyle/>
+            <a:p>
+              <a:r>
+                <a:rPr kumimoji="1" lang="en-US" altLang="ja-JP" dirty="0">
+                  <a:solidFill>
+                    <a:schemeClr val="accent4">
+                      <a:lumMod val="75000"/>
+                    </a:schemeClr>
+                  </a:solidFill>
+                  <a:latin typeface="メイリオ" panose="020B0604030504040204" pitchFamily="50" charset="-128"/>
+                  <a:ea typeface="メイリオ" panose="020B0604030504040204" pitchFamily="50" charset="-128"/>
+                </a:rPr>
+                <a:t>FALSE</a:t>
+              </a:r>
+              <a:endParaRPr kumimoji="1" lang="ja-JP" altLang="en-US" dirty="0">
+                <a:solidFill>
+                  <a:schemeClr val="accent4">
+                    <a:lumMod val="75000"/>
+                  </a:schemeClr>
+                </a:solidFill>
+                <a:latin typeface="メイリオ" panose="020B0604030504040204" pitchFamily="50" charset="-128"/>
+                <a:ea typeface="メイリオ" panose="020B0604030504040204" pitchFamily="50" charset="-128"/>
+              </a:endParaRPr>
+            </a:p>
+          </p:txBody>
+        </p:sp>
+        <p:sp>
+          <p:nvSpPr>
+            <p:cNvPr id="257" name="テキスト ボックス 256">
+              <a:extLst>
+                <a:ext uri="{FF2B5EF4-FFF2-40B4-BE49-F238E27FC236}">
+                  <a16:creationId xmlns:a16="http://schemas.microsoft.com/office/drawing/2014/main" id="{34E8BE3B-DA56-FADE-2BEE-4DDD233C8CA6}"/>
+                </a:ext>
+              </a:extLst>
+            </p:cNvPr>
+            <p:cNvSpPr txBox="1"/>
+            <p:nvPr/>
+          </p:nvSpPr>
+          <p:spPr>
+            <a:xfrm>
+              <a:off x="9607530" y="3550858"/>
+              <a:ext cx="886201" cy="374683"/>
+            </a:xfrm>
+            <a:prstGeom prst="rect">
+              <a:avLst/>
+            </a:prstGeom>
+            <a:noFill/>
+          </p:spPr>
+          <p:txBody>
+            <a:bodyPr wrap="square" rtlCol="0">
+              <a:spAutoFit/>
+            </a:bodyPr>
+            <a:lstStyle/>
+            <a:p>
+              <a:r>
+                <a:rPr kumimoji="1" lang="en-US" altLang="ja-JP" dirty="0">
+                  <a:solidFill>
+                    <a:schemeClr val="accent4">
+                      <a:lumMod val="75000"/>
+                    </a:schemeClr>
+                  </a:solidFill>
+                  <a:latin typeface="メイリオ" panose="020B0604030504040204" pitchFamily="50" charset="-128"/>
+                  <a:ea typeface="メイリオ" panose="020B0604030504040204" pitchFamily="50" charset="-128"/>
+                </a:rPr>
+                <a:t>TRUE</a:t>
+              </a:r>
+              <a:endParaRPr kumimoji="1" lang="ja-JP" altLang="en-US" dirty="0">
+                <a:solidFill>
+                  <a:schemeClr val="accent4">
+                    <a:lumMod val="75000"/>
+                  </a:schemeClr>
+                </a:solidFill>
+                <a:latin typeface="メイリオ" panose="020B0604030504040204" pitchFamily="50" charset="-128"/>
+                <a:ea typeface="メイリオ" panose="020B0604030504040204" pitchFamily="50" charset="-128"/>
+              </a:endParaRPr>
+            </a:p>
+          </p:txBody>
+        </p:sp>
+        <p:sp>
+          <p:nvSpPr>
+            <p:cNvPr id="258" name="テキスト ボックス 257">
+              <a:extLst>
+                <a:ext uri="{FF2B5EF4-FFF2-40B4-BE49-F238E27FC236}">
+                  <a16:creationId xmlns:a16="http://schemas.microsoft.com/office/drawing/2014/main" id="{6864349D-F8A2-1396-257E-25AFF08368EF}"/>
+                </a:ext>
+              </a:extLst>
+            </p:cNvPr>
+            <p:cNvSpPr txBox="1"/>
+            <p:nvPr/>
+          </p:nvSpPr>
+          <p:spPr>
+            <a:xfrm>
+              <a:off x="7358855" y="1880432"/>
+              <a:ext cx="1154939" cy="374683"/>
+            </a:xfrm>
+            <a:prstGeom prst="rect">
+              <a:avLst/>
+            </a:prstGeom>
+            <a:noFill/>
+          </p:spPr>
+          <p:txBody>
+            <a:bodyPr wrap="square" rtlCol="0">
+              <a:spAutoFit/>
+            </a:bodyPr>
+            <a:lstStyle/>
+            <a:p>
+              <a:r>
+                <a:rPr kumimoji="1" lang="en-US" altLang="ja-JP" dirty="0">
+                  <a:solidFill>
+                    <a:schemeClr val="accent4">
+                      <a:lumMod val="75000"/>
+                    </a:schemeClr>
+                  </a:solidFill>
+                  <a:latin typeface="メイリオ" panose="020B0604030504040204" pitchFamily="50" charset="-128"/>
+                  <a:ea typeface="メイリオ" panose="020B0604030504040204" pitchFamily="50" charset="-128"/>
+                </a:rPr>
+                <a:t>FALSE</a:t>
+              </a:r>
+              <a:endParaRPr kumimoji="1" lang="ja-JP" altLang="en-US" dirty="0">
+                <a:solidFill>
+                  <a:schemeClr val="accent4">
+                    <a:lumMod val="75000"/>
+                  </a:schemeClr>
+                </a:solidFill>
+                <a:latin typeface="メイリオ" panose="020B0604030504040204" pitchFamily="50" charset="-128"/>
+                <a:ea typeface="メイリオ" panose="020B0604030504040204" pitchFamily="50" charset="-128"/>
+              </a:endParaRPr>
+            </a:p>
+          </p:txBody>
+        </p:sp>
+        <p:sp>
+          <p:nvSpPr>
+            <p:cNvPr id="259" name="テキスト ボックス 258">
+              <a:extLst>
+                <a:ext uri="{FF2B5EF4-FFF2-40B4-BE49-F238E27FC236}">
+                  <a16:creationId xmlns:a16="http://schemas.microsoft.com/office/drawing/2014/main" id="{6763C126-3C7B-FF36-59C1-155CDF3FA05E}"/>
+                </a:ext>
+              </a:extLst>
+            </p:cNvPr>
+            <p:cNvSpPr txBox="1"/>
+            <p:nvPr/>
+          </p:nvSpPr>
+          <p:spPr>
+            <a:xfrm>
+              <a:off x="7358855" y="4142876"/>
+              <a:ext cx="1154939" cy="374683"/>
+            </a:xfrm>
+            <a:prstGeom prst="rect">
+              <a:avLst/>
+            </a:prstGeom>
+            <a:noFill/>
+          </p:spPr>
+          <p:txBody>
+            <a:bodyPr wrap="square" rtlCol="0">
+              <a:spAutoFit/>
+            </a:bodyPr>
+            <a:lstStyle/>
+            <a:p>
+              <a:r>
+                <a:rPr kumimoji="1" lang="en-US" altLang="ja-JP" dirty="0">
+                  <a:solidFill>
+                    <a:schemeClr val="accent4">
+                      <a:lumMod val="75000"/>
+                    </a:schemeClr>
+                  </a:solidFill>
+                  <a:latin typeface="メイリオ" panose="020B0604030504040204" pitchFamily="50" charset="-128"/>
+                  <a:ea typeface="メイリオ" panose="020B0604030504040204" pitchFamily="50" charset="-128"/>
+                </a:rPr>
+                <a:t>FALSE</a:t>
+              </a:r>
+              <a:endParaRPr kumimoji="1" lang="ja-JP" altLang="en-US" dirty="0">
+                <a:solidFill>
+                  <a:schemeClr val="accent4">
+                    <a:lumMod val="75000"/>
+                  </a:schemeClr>
+                </a:solidFill>
+                <a:latin typeface="メイリオ" panose="020B0604030504040204" pitchFamily="50" charset="-128"/>
+                <a:ea typeface="メイリオ" panose="020B0604030504040204" pitchFamily="50" charset="-128"/>
+              </a:endParaRPr>
+            </a:p>
+          </p:txBody>
+        </p:sp>
+        <p:cxnSp>
+          <p:nvCxnSpPr>
+            <p:cNvPr id="260" name="直線矢印コネクタ 259">
+              <a:extLst>
+                <a:ext uri="{FF2B5EF4-FFF2-40B4-BE49-F238E27FC236}">
+                  <a16:creationId xmlns:a16="http://schemas.microsoft.com/office/drawing/2014/main" id="{A758BA7D-AC66-7387-59B2-8D6831A8F804}"/>
+                </a:ext>
+              </a:extLst>
+            </p:cNvPr>
+            <p:cNvCxnSpPr>
+              <a:cxnSpLocks/>
+            </p:cNvCxnSpPr>
+            <p:nvPr/>
+          </p:nvCxnSpPr>
+          <p:spPr>
+            <a:xfrm>
+              <a:off x="11099765" y="2445176"/>
+              <a:ext cx="185932" cy="0"/>
+            </a:xfrm>
+            <a:prstGeom prst="straightConnector1">
+              <a:avLst/>
+            </a:prstGeom>
+            <a:ln w="28575">
+              <a:solidFill>
+                <a:schemeClr val="accent4">
+                  <a:lumMod val="75000"/>
+                </a:schemeClr>
+              </a:solidFill>
+              <a:tailEnd type="triangle"/>
+            </a:ln>
+          </p:spPr>
+          <p:style>
+            <a:lnRef idx="1">
+              <a:schemeClr val="accent1"/>
+            </a:lnRef>
+            <a:fillRef idx="0">
+              <a:schemeClr val="accent1"/>
+            </a:fillRef>
+            <a:effectRef idx="0">
+              <a:schemeClr val="accent1"/>
+            </a:effectRef>
+            <a:fontRef idx="minor">
+              <a:schemeClr val="tx1"/>
+            </a:fontRef>
+          </p:style>
+        </p:cxnSp>
+        <p:cxnSp>
+          <p:nvCxnSpPr>
+            <p:cNvPr id="261" name="直線矢印コネクタ 260">
+              <a:extLst>
+                <a:ext uri="{FF2B5EF4-FFF2-40B4-BE49-F238E27FC236}">
+                  <a16:creationId xmlns:a16="http://schemas.microsoft.com/office/drawing/2014/main" id="{94C14F58-EEE7-593B-BC47-9B3D3648073A}"/>
+                </a:ext>
+              </a:extLst>
+            </p:cNvPr>
+            <p:cNvCxnSpPr>
+              <a:cxnSpLocks/>
+            </p:cNvCxnSpPr>
+            <p:nvPr/>
+          </p:nvCxnSpPr>
+          <p:spPr>
+            <a:xfrm>
+              <a:off x="11099765" y="2643813"/>
+              <a:ext cx="185932" cy="0"/>
+            </a:xfrm>
+            <a:prstGeom prst="straightConnector1">
+              <a:avLst/>
+            </a:prstGeom>
+            <a:ln w="28575">
+              <a:solidFill>
+                <a:schemeClr val="accent4">
+                  <a:lumMod val="75000"/>
+                </a:schemeClr>
+              </a:solidFill>
+              <a:tailEnd type="triangle"/>
+            </a:ln>
+          </p:spPr>
+          <p:style>
+            <a:lnRef idx="1">
+              <a:schemeClr val="accent1"/>
+            </a:lnRef>
+            <a:fillRef idx="0">
+              <a:schemeClr val="accent1"/>
+            </a:fillRef>
+            <a:effectRef idx="0">
+              <a:schemeClr val="accent1"/>
+            </a:effectRef>
+            <a:fontRef idx="minor">
+              <a:schemeClr val="tx1"/>
+            </a:fontRef>
+          </p:style>
+        </p:cxnSp>
+        <p:cxnSp>
+          <p:nvCxnSpPr>
+            <p:cNvPr id="262" name="直線矢印コネクタ 261">
+              <a:extLst>
+                <a:ext uri="{FF2B5EF4-FFF2-40B4-BE49-F238E27FC236}">
+                  <a16:creationId xmlns:a16="http://schemas.microsoft.com/office/drawing/2014/main" id="{F90D8038-085A-261C-219D-C81B837E0E00}"/>
+                </a:ext>
+              </a:extLst>
+            </p:cNvPr>
+            <p:cNvCxnSpPr>
+              <a:cxnSpLocks/>
+            </p:cNvCxnSpPr>
+            <p:nvPr/>
+          </p:nvCxnSpPr>
+          <p:spPr>
+            <a:xfrm>
+              <a:off x="11099765" y="2843935"/>
+              <a:ext cx="185932" cy="0"/>
+            </a:xfrm>
+            <a:prstGeom prst="straightConnector1">
+              <a:avLst/>
+            </a:prstGeom>
+            <a:ln w="28575">
+              <a:solidFill>
+                <a:schemeClr val="accent4">
+                  <a:lumMod val="75000"/>
+                </a:schemeClr>
+              </a:solidFill>
+              <a:tailEnd type="triangle"/>
+            </a:ln>
+          </p:spPr>
+          <p:style>
+            <a:lnRef idx="1">
+              <a:schemeClr val="accent1"/>
+            </a:lnRef>
+            <a:fillRef idx="0">
+              <a:schemeClr val="accent1"/>
+            </a:fillRef>
+            <a:effectRef idx="0">
+              <a:schemeClr val="accent1"/>
+            </a:effectRef>
+            <a:fontRef idx="minor">
+              <a:schemeClr val="tx1"/>
+            </a:fontRef>
+          </p:style>
+        </p:cxnSp>
+        <p:cxnSp>
+          <p:nvCxnSpPr>
+            <p:cNvPr id="263" name="直線矢印コネクタ 262">
+              <a:extLst>
+                <a:ext uri="{FF2B5EF4-FFF2-40B4-BE49-F238E27FC236}">
+                  <a16:creationId xmlns:a16="http://schemas.microsoft.com/office/drawing/2014/main" id="{09F48F07-DB6C-7C20-F633-A6D63D58768F}"/>
+                </a:ext>
+              </a:extLst>
+            </p:cNvPr>
+            <p:cNvCxnSpPr>
+              <a:cxnSpLocks/>
+            </p:cNvCxnSpPr>
+            <p:nvPr/>
+          </p:nvCxnSpPr>
+          <p:spPr>
+            <a:xfrm>
+              <a:off x="11102617" y="3057245"/>
+              <a:ext cx="185932" cy="0"/>
+            </a:xfrm>
+            <a:prstGeom prst="straightConnector1">
+              <a:avLst/>
+            </a:prstGeom>
+            <a:ln w="28575">
+              <a:solidFill>
+                <a:schemeClr val="accent4">
+                  <a:lumMod val="75000"/>
+                </a:schemeClr>
+              </a:solidFill>
+              <a:tailEnd type="triangle"/>
+            </a:ln>
+          </p:spPr>
+          <p:style>
+            <a:lnRef idx="1">
+              <a:schemeClr val="accent1"/>
+            </a:lnRef>
+            <a:fillRef idx="0">
+              <a:schemeClr val="accent1"/>
+            </a:fillRef>
+            <a:effectRef idx="0">
+              <a:schemeClr val="accent1"/>
+            </a:effectRef>
+            <a:fontRef idx="minor">
+              <a:schemeClr val="tx1"/>
+            </a:fontRef>
+          </p:style>
+        </p:cxnSp>
+        <p:cxnSp>
+          <p:nvCxnSpPr>
+            <p:cNvPr id="264" name="直線矢印コネクタ 263">
+              <a:extLst>
+                <a:ext uri="{FF2B5EF4-FFF2-40B4-BE49-F238E27FC236}">
+                  <a16:creationId xmlns:a16="http://schemas.microsoft.com/office/drawing/2014/main" id="{90323B72-2A18-171E-E5C0-C525A6172AFB}"/>
+                </a:ext>
+              </a:extLst>
+            </p:cNvPr>
+            <p:cNvCxnSpPr>
+              <a:cxnSpLocks/>
+            </p:cNvCxnSpPr>
+            <p:nvPr/>
+          </p:nvCxnSpPr>
+          <p:spPr>
+            <a:xfrm>
+              <a:off x="11099765" y="3237362"/>
+              <a:ext cx="185932" cy="0"/>
+            </a:xfrm>
+            <a:prstGeom prst="straightConnector1">
+              <a:avLst/>
+            </a:prstGeom>
+            <a:ln w="28575">
+              <a:solidFill>
+                <a:schemeClr val="accent4">
+                  <a:lumMod val="75000"/>
+                </a:schemeClr>
+              </a:solidFill>
+              <a:tailEnd type="triangle"/>
+            </a:ln>
+          </p:spPr>
+          <p:style>
+            <a:lnRef idx="1">
+              <a:schemeClr val="accent1"/>
+            </a:lnRef>
+            <a:fillRef idx="0">
+              <a:schemeClr val="accent1"/>
+            </a:fillRef>
+            <a:effectRef idx="0">
+              <a:schemeClr val="accent1"/>
+            </a:effectRef>
+            <a:fontRef idx="minor">
+              <a:schemeClr val="tx1"/>
+            </a:fontRef>
+          </p:style>
+        </p:cxnSp>
+        <p:cxnSp>
+          <p:nvCxnSpPr>
+            <p:cNvPr id="265" name="直線矢印コネクタ 264">
+              <a:extLst>
+                <a:ext uri="{FF2B5EF4-FFF2-40B4-BE49-F238E27FC236}">
+                  <a16:creationId xmlns:a16="http://schemas.microsoft.com/office/drawing/2014/main" id="{6DB688C0-42D6-52DB-FE2B-582907C2E2B6}"/>
+                </a:ext>
+              </a:extLst>
+            </p:cNvPr>
+            <p:cNvCxnSpPr>
+              <a:cxnSpLocks/>
+            </p:cNvCxnSpPr>
+            <p:nvPr/>
+          </p:nvCxnSpPr>
+          <p:spPr>
+            <a:xfrm>
+              <a:off x="11099765" y="3422317"/>
+              <a:ext cx="185932" cy="0"/>
+            </a:xfrm>
+            <a:prstGeom prst="straightConnector1">
+              <a:avLst/>
+            </a:prstGeom>
+            <a:ln w="28575">
+              <a:solidFill>
+                <a:schemeClr val="accent4">
+                  <a:lumMod val="75000"/>
+                </a:schemeClr>
+              </a:solidFill>
+              <a:tailEnd type="triangle"/>
+            </a:ln>
+          </p:spPr>
+          <p:style>
+            <a:lnRef idx="1">
+              <a:schemeClr val="accent1"/>
+            </a:lnRef>
+            <a:fillRef idx="0">
+              <a:schemeClr val="accent1"/>
+            </a:fillRef>
+            <a:effectRef idx="0">
+              <a:schemeClr val="accent1"/>
+            </a:effectRef>
+            <a:fontRef idx="minor">
+              <a:schemeClr val="tx1"/>
+            </a:fontRef>
+          </p:style>
+        </p:cxnSp>
+        <p:cxnSp>
+          <p:nvCxnSpPr>
+            <p:cNvPr id="266" name="直線矢印コネクタ 265">
+              <a:extLst>
+                <a:ext uri="{FF2B5EF4-FFF2-40B4-BE49-F238E27FC236}">
+                  <a16:creationId xmlns:a16="http://schemas.microsoft.com/office/drawing/2014/main" id="{B569A0D5-70D1-1D08-3DD1-0FBC0414784E}"/>
+                </a:ext>
+              </a:extLst>
+            </p:cNvPr>
+            <p:cNvCxnSpPr>
+              <a:cxnSpLocks/>
+            </p:cNvCxnSpPr>
+            <p:nvPr/>
+          </p:nvCxnSpPr>
+          <p:spPr>
+            <a:xfrm>
+              <a:off x="11025746" y="5115135"/>
+              <a:ext cx="185932" cy="0"/>
+            </a:xfrm>
+            <a:prstGeom prst="straightConnector1">
+              <a:avLst/>
+            </a:prstGeom>
+            <a:ln w="28575">
+              <a:solidFill>
+                <a:schemeClr val="accent4">
+                  <a:lumMod val="75000"/>
+                </a:schemeClr>
+              </a:solidFill>
+              <a:tailEnd type="triangle"/>
+            </a:ln>
+          </p:spPr>
+          <p:style>
+            <a:lnRef idx="1">
+              <a:schemeClr val="accent1"/>
+            </a:lnRef>
+            <a:fillRef idx="0">
+              <a:schemeClr val="accent1"/>
+            </a:fillRef>
+            <a:effectRef idx="0">
+              <a:schemeClr val="accent1"/>
+            </a:effectRef>
+            <a:fontRef idx="minor">
+              <a:schemeClr val="tx1"/>
+            </a:fontRef>
+          </p:style>
+        </p:cxnSp>
+        <p:cxnSp>
+          <p:nvCxnSpPr>
+            <p:cNvPr id="267" name="直線矢印コネクタ 266">
+              <a:extLst>
+                <a:ext uri="{FF2B5EF4-FFF2-40B4-BE49-F238E27FC236}">
+                  <a16:creationId xmlns:a16="http://schemas.microsoft.com/office/drawing/2014/main" id="{E67F6781-D0A2-61B1-E6CB-EF14484DB4AC}"/>
+                </a:ext>
+              </a:extLst>
+            </p:cNvPr>
+            <p:cNvCxnSpPr>
+              <a:cxnSpLocks/>
+            </p:cNvCxnSpPr>
+            <p:nvPr/>
+          </p:nvCxnSpPr>
+          <p:spPr>
+            <a:xfrm>
+              <a:off x="11025746" y="5334162"/>
+              <a:ext cx="185932" cy="0"/>
+            </a:xfrm>
+            <a:prstGeom prst="straightConnector1">
+              <a:avLst/>
+            </a:prstGeom>
+            <a:ln w="28575">
+              <a:solidFill>
+                <a:schemeClr val="accent4">
+                  <a:lumMod val="75000"/>
+                </a:schemeClr>
+              </a:solidFill>
+              <a:tailEnd type="triangle"/>
+            </a:ln>
+          </p:spPr>
+          <p:style>
+            <a:lnRef idx="1">
+              <a:schemeClr val="accent1"/>
+            </a:lnRef>
+            <a:fillRef idx="0">
+              <a:schemeClr val="accent1"/>
+            </a:fillRef>
+            <a:effectRef idx="0">
+              <a:schemeClr val="accent1"/>
+            </a:effectRef>
+            <a:fontRef idx="minor">
+              <a:schemeClr val="tx1"/>
+            </a:fontRef>
+          </p:style>
+        </p:cxnSp>
+        <p:cxnSp>
+          <p:nvCxnSpPr>
+            <p:cNvPr id="268" name="直線矢印コネクタ 267">
+              <a:extLst>
+                <a:ext uri="{FF2B5EF4-FFF2-40B4-BE49-F238E27FC236}">
+                  <a16:creationId xmlns:a16="http://schemas.microsoft.com/office/drawing/2014/main" id="{71F7B7D6-5746-0004-0721-FE62B3B5C84D}"/>
+                </a:ext>
+              </a:extLst>
+            </p:cNvPr>
+            <p:cNvCxnSpPr>
+              <a:cxnSpLocks/>
+            </p:cNvCxnSpPr>
+            <p:nvPr/>
+          </p:nvCxnSpPr>
+          <p:spPr>
+            <a:xfrm>
+              <a:off x="11025746" y="5553189"/>
+              <a:ext cx="185932" cy="0"/>
+            </a:xfrm>
+            <a:prstGeom prst="straightConnector1">
+              <a:avLst/>
+            </a:prstGeom>
+            <a:ln w="28575">
+              <a:solidFill>
+                <a:schemeClr val="accent4">
+                  <a:lumMod val="75000"/>
+                </a:schemeClr>
+              </a:solidFill>
+              <a:tailEnd type="triangle"/>
+            </a:ln>
+          </p:spPr>
+          <p:style>
+            <a:lnRef idx="1">
+              <a:schemeClr val="accent1"/>
+            </a:lnRef>
+            <a:fillRef idx="0">
+              <a:schemeClr val="accent1"/>
+            </a:fillRef>
+            <a:effectRef idx="0">
+              <a:schemeClr val="accent1"/>
+            </a:effectRef>
+            <a:fontRef idx="minor">
+              <a:schemeClr val="tx1"/>
+            </a:fontRef>
+          </p:style>
+        </p:cxnSp>
+        <p:cxnSp>
+          <p:nvCxnSpPr>
+            <p:cNvPr id="269" name="直線コネクタ 268">
+              <a:extLst>
+                <a:ext uri="{FF2B5EF4-FFF2-40B4-BE49-F238E27FC236}">
+                  <a16:creationId xmlns:a16="http://schemas.microsoft.com/office/drawing/2014/main" id="{73D5FCC9-2DB2-BAE6-6439-8C06AD6BEE63}"/>
+                </a:ext>
+              </a:extLst>
+            </p:cNvPr>
+            <p:cNvCxnSpPr>
+              <a:cxnSpLocks/>
+            </p:cNvCxnSpPr>
+            <p:nvPr/>
+          </p:nvCxnSpPr>
+          <p:spPr>
+            <a:xfrm>
+              <a:off x="6911636" y="6077949"/>
+              <a:ext cx="4682967" cy="0"/>
+            </a:xfrm>
+            <a:prstGeom prst="line">
+              <a:avLst/>
+            </a:prstGeom>
+            <a:ln>
+              <a:solidFill>
+                <a:schemeClr val="accent4">
+                  <a:lumMod val="75000"/>
+                </a:schemeClr>
+              </a:solidFill>
+            </a:ln>
+          </p:spPr>
+          <p:style>
+            <a:lnRef idx="1">
+              <a:schemeClr val="accent1"/>
+            </a:lnRef>
+            <a:fillRef idx="0">
+              <a:schemeClr val="accent1"/>
+            </a:fillRef>
+            <a:effectRef idx="0">
+              <a:schemeClr val="accent1"/>
+            </a:effectRef>
+            <a:fontRef idx="minor">
+              <a:schemeClr val="tx1"/>
+            </a:fontRef>
+          </p:style>
+        </p:cxnSp>
+        <p:sp>
+          <p:nvSpPr>
+            <p:cNvPr id="270" name="四角形: 1 つの角を切り取る 269">
+              <a:extLst>
+                <a:ext uri="{FF2B5EF4-FFF2-40B4-BE49-F238E27FC236}">
+                  <a16:creationId xmlns:a16="http://schemas.microsoft.com/office/drawing/2014/main" id="{EECB0EE7-CC12-3F31-667A-4708D7AEA894}"/>
+                </a:ext>
+              </a:extLst>
+            </p:cNvPr>
+            <p:cNvSpPr/>
+            <p:nvPr/>
+          </p:nvSpPr>
+          <p:spPr>
+            <a:xfrm>
+              <a:off x="7092188" y="6180131"/>
+              <a:ext cx="3080225" cy="264781"/>
+            </a:xfrm>
+            <a:prstGeom prst="snip1Rect">
+              <a:avLst>
+                <a:gd name="adj" fmla="val 0"/>
+              </a:avLst>
+            </a:prstGeom>
+            <a:solidFill>
+              <a:srgbClr val="FFFFFF"/>
+            </a:solidFill>
+            <a:ln>
+              <a:solidFill>
+                <a:schemeClr val="bg2">
+                  <a:lumMod val="75000"/>
+                </a:schemeClr>
+              </a:solidFill>
+            </a:ln>
+          </p:spPr>
+          <p:style>
+            <a:lnRef idx="2">
+              <a:schemeClr val="accent1">
+                <a:shade val="15000"/>
+              </a:schemeClr>
+            </a:lnRef>
+            <a:fillRef idx="1">
+              <a:schemeClr val="accent1"/>
+            </a:fillRef>
+            <a:effectRef idx="0">
+              <a:schemeClr val="accent1"/>
+            </a:effectRef>
+            <a:fontRef idx="minor">
+              <a:schemeClr val="lt1"/>
+            </a:fontRef>
+          </p:style>
+          <p:txBody>
+            <a:bodyPr rtlCol="0" anchor="ctr"/>
+            <a:lstStyle/>
+            <a:p>
+              <a:pPr algn="ctr"/>
+              <a:r>
+                <a:rPr lang="en-US" altLang="ja-JP" sz="1400" dirty="0">
+                  <a:solidFill>
+                    <a:schemeClr val="tx1"/>
+                  </a:solidFill>
+                  <a:latin typeface="メイリオ" panose="020B0604030504040204" pitchFamily="50" charset="-128"/>
+                  <a:ea typeface="メイリオ" panose="020B0604030504040204" pitchFamily="50" charset="-128"/>
+                </a:rPr>
+                <a:t>DD</a:t>
+              </a:r>
+              <a:r>
+                <a:rPr lang="ja-JP" altLang="en-US" sz="1400" dirty="0">
+                  <a:solidFill>
+                    <a:schemeClr val="tx1"/>
+                  </a:solidFill>
+                  <a:latin typeface="メイリオ" panose="020B0604030504040204" pitchFamily="50" charset="-128"/>
+                  <a:ea typeface="メイリオ" panose="020B0604030504040204" pitchFamily="50" charset="-128"/>
+                </a:rPr>
+                <a:t>の個数分だけ点数を２倍する</a:t>
+              </a:r>
+              <a:endParaRPr kumimoji="1" lang="ja-JP" altLang="en-US" sz="1400" dirty="0">
+                <a:solidFill>
+                  <a:schemeClr val="tx1"/>
+                </a:solidFill>
+                <a:latin typeface="メイリオ" panose="020B0604030504040204" pitchFamily="50" charset="-128"/>
+                <a:ea typeface="メイリオ" panose="020B0604030504040204" pitchFamily="50" charset="-128"/>
+              </a:endParaRPr>
+            </a:p>
+          </p:txBody>
+        </p:sp>
+        <p:sp>
+          <p:nvSpPr>
+            <p:cNvPr id="271" name="楕円 270">
+              <a:extLst>
+                <a:ext uri="{FF2B5EF4-FFF2-40B4-BE49-F238E27FC236}">
+                  <a16:creationId xmlns:a16="http://schemas.microsoft.com/office/drawing/2014/main" id="{E58DCA30-A60B-E1DE-4C57-E62FAFAF3FFC}"/>
+                </a:ext>
+              </a:extLst>
+            </p:cNvPr>
+            <p:cNvSpPr/>
+            <p:nvPr/>
+          </p:nvSpPr>
+          <p:spPr>
+            <a:xfrm>
+              <a:off x="6785489" y="1499949"/>
+              <a:ext cx="252293" cy="235472"/>
+            </a:xfrm>
+            <a:prstGeom prst="ellipse">
+              <a:avLst/>
+            </a:prstGeom>
+            <a:solidFill>
+              <a:schemeClr val="accent4">
+                <a:lumMod val="75000"/>
+              </a:schemeClr>
+            </a:solidFill>
+            <a:ln>
+              <a:noFill/>
+            </a:ln>
+          </p:spPr>
+          <p:style>
+            <a:lnRef idx="2">
+              <a:schemeClr val="accent1">
+                <a:shade val="15000"/>
+              </a:schemeClr>
+            </a:lnRef>
+            <a:fillRef idx="1">
+              <a:schemeClr val="accent1"/>
+            </a:fillRef>
+            <a:effectRef idx="0">
+              <a:schemeClr val="accent1"/>
+            </a:effectRef>
+            <a:fontRef idx="minor">
+              <a:schemeClr val="lt1"/>
+            </a:fontRef>
+          </p:style>
+          <p:txBody>
+            <a:bodyPr tIns="90000" rtlCol="0" anchor="ctr"/>
+            <a:lstStyle/>
+            <a:p>
+              <a:pPr algn="ctr"/>
+              <a:endParaRPr kumimoji="1" lang="ja-JP" altLang="en-US" dirty="0">
+                <a:latin typeface="メイリオ" panose="020B0604030504040204" pitchFamily="50" charset="-128"/>
+                <a:ea typeface="メイリオ" panose="020B0604030504040204" pitchFamily="50" charset="-128"/>
+              </a:endParaRPr>
+            </a:p>
+          </p:txBody>
+        </p:sp>
+        <p:sp>
+          <p:nvSpPr>
+            <p:cNvPr id="272" name="楕円 271">
+              <a:extLst>
+                <a:ext uri="{FF2B5EF4-FFF2-40B4-BE49-F238E27FC236}">
+                  <a16:creationId xmlns:a16="http://schemas.microsoft.com/office/drawing/2014/main" id="{60872A26-BA03-CAA9-A0D3-F75B6445F77A}"/>
+                </a:ext>
+              </a:extLst>
+            </p:cNvPr>
+            <p:cNvSpPr/>
+            <p:nvPr/>
+          </p:nvSpPr>
+          <p:spPr>
+            <a:xfrm>
+              <a:off x="6759054" y="3734664"/>
+              <a:ext cx="252293" cy="235472"/>
+            </a:xfrm>
+            <a:prstGeom prst="ellipse">
+              <a:avLst/>
+            </a:prstGeom>
+            <a:solidFill>
+              <a:schemeClr val="accent4">
+                <a:lumMod val="75000"/>
+              </a:schemeClr>
+            </a:solidFill>
+            <a:ln>
+              <a:noFill/>
+            </a:ln>
+          </p:spPr>
+          <p:style>
+            <a:lnRef idx="2">
+              <a:schemeClr val="accent1">
+                <a:shade val="15000"/>
+              </a:schemeClr>
+            </a:lnRef>
+            <a:fillRef idx="1">
+              <a:schemeClr val="accent1"/>
+            </a:fillRef>
+            <a:effectRef idx="0">
+              <a:schemeClr val="accent1"/>
+            </a:effectRef>
+            <a:fontRef idx="minor">
+              <a:schemeClr val="lt1"/>
+            </a:fontRef>
+          </p:style>
+          <p:txBody>
+            <a:bodyPr tIns="90000" rtlCol="0" anchor="ctr"/>
+            <a:lstStyle/>
+            <a:p>
+              <a:pPr algn="ctr"/>
+              <a:endParaRPr kumimoji="1" lang="ja-JP" altLang="en-US" dirty="0">
+                <a:latin typeface="メイリオ" panose="020B0604030504040204" pitchFamily="50" charset="-128"/>
+                <a:ea typeface="メイリオ" panose="020B0604030504040204" pitchFamily="50" charset="-128"/>
+              </a:endParaRPr>
+            </a:p>
+          </p:txBody>
+        </p:sp>
+        <p:sp>
+          <p:nvSpPr>
+            <p:cNvPr id="273" name="楕円 272">
+              <a:extLst>
+                <a:ext uri="{FF2B5EF4-FFF2-40B4-BE49-F238E27FC236}">
+                  <a16:creationId xmlns:a16="http://schemas.microsoft.com/office/drawing/2014/main" id="{5EB1CBEF-ED74-D41F-A0FA-6BAA4EAB4869}"/>
+                </a:ext>
+              </a:extLst>
+            </p:cNvPr>
+            <p:cNvSpPr/>
+            <p:nvPr/>
+          </p:nvSpPr>
+          <p:spPr>
+            <a:xfrm>
+              <a:off x="6765252" y="2308754"/>
+              <a:ext cx="252293" cy="235472"/>
+            </a:xfrm>
+            <a:prstGeom prst="ellipse">
+              <a:avLst/>
+            </a:prstGeom>
+            <a:solidFill>
+              <a:schemeClr val="accent4">
+                <a:lumMod val="75000"/>
+              </a:schemeClr>
+            </a:solidFill>
+            <a:ln>
+              <a:noFill/>
+            </a:ln>
+          </p:spPr>
+          <p:style>
+            <a:lnRef idx="2">
+              <a:schemeClr val="accent1">
+                <a:shade val="15000"/>
+              </a:schemeClr>
+            </a:lnRef>
+            <a:fillRef idx="1">
+              <a:schemeClr val="accent1"/>
+            </a:fillRef>
+            <a:effectRef idx="0">
+              <a:schemeClr val="accent1"/>
+            </a:effectRef>
+            <a:fontRef idx="minor">
+              <a:schemeClr val="lt1"/>
+            </a:fontRef>
+          </p:style>
+          <p:txBody>
+            <a:bodyPr tIns="90000" rtlCol="0" anchor="ctr"/>
+            <a:lstStyle/>
+            <a:p>
+              <a:pPr algn="ctr"/>
+              <a:endParaRPr kumimoji="1" lang="ja-JP" altLang="en-US" dirty="0">
+                <a:latin typeface="メイリオ" panose="020B0604030504040204" pitchFamily="50" charset="-128"/>
+                <a:ea typeface="メイリオ" panose="020B0604030504040204" pitchFamily="50" charset="-128"/>
+              </a:endParaRPr>
+            </a:p>
+          </p:txBody>
+        </p:sp>
+        <p:sp>
+          <p:nvSpPr>
+            <p:cNvPr id="274" name="楕円 273">
+              <a:extLst>
+                <a:ext uri="{FF2B5EF4-FFF2-40B4-BE49-F238E27FC236}">
+                  <a16:creationId xmlns:a16="http://schemas.microsoft.com/office/drawing/2014/main" id="{F846AC82-34A9-8E55-0B05-77CE288667C9}"/>
+                </a:ext>
+              </a:extLst>
+            </p:cNvPr>
+            <p:cNvSpPr/>
+            <p:nvPr/>
+          </p:nvSpPr>
+          <p:spPr>
+            <a:xfrm>
+              <a:off x="6769077" y="4608727"/>
+              <a:ext cx="252293" cy="235472"/>
+            </a:xfrm>
+            <a:prstGeom prst="ellipse">
+              <a:avLst/>
+            </a:prstGeom>
+            <a:solidFill>
+              <a:schemeClr val="accent4">
+                <a:lumMod val="75000"/>
+              </a:schemeClr>
+            </a:solidFill>
+            <a:ln>
+              <a:noFill/>
+            </a:ln>
+          </p:spPr>
+          <p:style>
+            <a:lnRef idx="2">
+              <a:schemeClr val="accent1">
+                <a:shade val="15000"/>
+              </a:schemeClr>
+            </a:lnRef>
+            <a:fillRef idx="1">
+              <a:schemeClr val="accent1"/>
+            </a:fillRef>
+            <a:effectRef idx="0">
+              <a:schemeClr val="accent1"/>
+            </a:effectRef>
+            <a:fontRef idx="minor">
+              <a:schemeClr val="lt1"/>
+            </a:fontRef>
+          </p:style>
+          <p:txBody>
+            <a:bodyPr tIns="90000" rtlCol="0" anchor="ctr"/>
+            <a:lstStyle/>
+            <a:p>
+              <a:pPr algn="ctr"/>
+              <a:endParaRPr kumimoji="1" lang="ja-JP" altLang="en-US" dirty="0">
+                <a:latin typeface="メイリオ" panose="020B0604030504040204" pitchFamily="50" charset="-128"/>
+                <a:ea typeface="メイリオ" panose="020B0604030504040204" pitchFamily="50" charset="-128"/>
+              </a:endParaRPr>
+            </a:p>
+          </p:txBody>
+        </p:sp>
+        <p:sp>
+          <p:nvSpPr>
+            <p:cNvPr id="275" name="楕円 274">
+              <a:extLst>
+                <a:ext uri="{FF2B5EF4-FFF2-40B4-BE49-F238E27FC236}">
+                  <a16:creationId xmlns:a16="http://schemas.microsoft.com/office/drawing/2014/main" id="{81663D9B-C97D-08B5-7D19-7FAA4F2B7799}"/>
+                </a:ext>
+              </a:extLst>
+            </p:cNvPr>
+            <p:cNvSpPr/>
+            <p:nvPr/>
+          </p:nvSpPr>
+          <p:spPr>
+            <a:xfrm>
+              <a:off x="6785489" y="6169311"/>
+              <a:ext cx="252293" cy="235472"/>
+            </a:xfrm>
+            <a:prstGeom prst="ellipse">
+              <a:avLst/>
+            </a:prstGeom>
+            <a:solidFill>
+              <a:schemeClr val="accent4">
+                <a:lumMod val="75000"/>
+              </a:schemeClr>
+            </a:solidFill>
+            <a:ln>
+              <a:noFill/>
+            </a:ln>
+          </p:spPr>
+          <p:style>
+            <a:lnRef idx="2">
+              <a:schemeClr val="accent1">
+                <a:shade val="15000"/>
+              </a:schemeClr>
+            </a:lnRef>
+            <a:fillRef idx="1">
+              <a:schemeClr val="accent1"/>
+            </a:fillRef>
+            <a:effectRef idx="0">
+              <a:schemeClr val="accent1"/>
+            </a:effectRef>
+            <a:fontRef idx="minor">
+              <a:schemeClr val="lt1"/>
+            </a:fontRef>
+          </p:style>
+          <p:txBody>
+            <a:bodyPr tIns="90000" rtlCol="0" anchor="ctr"/>
+            <a:lstStyle/>
+            <a:p>
+              <a:pPr algn="ctr"/>
+              <a:endParaRPr kumimoji="1" lang="ja-JP" altLang="en-US" dirty="0">
+                <a:latin typeface="メイリオ" panose="020B0604030504040204" pitchFamily="50" charset="-128"/>
+                <a:ea typeface="メイリオ" panose="020B0604030504040204" pitchFamily="50" charset="-128"/>
+              </a:endParaRPr>
+            </a:p>
+          </p:txBody>
+        </p:sp>
+        <p:sp>
+          <p:nvSpPr>
+            <p:cNvPr id="276" name="楕円 275">
+              <a:extLst>
+                <a:ext uri="{FF2B5EF4-FFF2-40B4-BE49-F238E27FC236}">
+                  <a16:creationId xmlns:a16="http://schemas.microsoft.com/office/drawing/2014/main" id="{0526E107-0840-5AAB-B630-E9BB2B4CE3AF}"/>
+                </a:ext>
+              </a:extLst>
+            </p:cNvPr>
+            <p:cNvSpPr/>
+            <p:nvPr/>
+          </p:nvSpPr>
+          <p:spPr>
+            <a:xfrm>
+              <a:off x="6785489" y="5644552"/>
+              <a:ext cx="252293" cy="235472"/>
+            </a:xfrm>
+            <a:prstGeom prst="ellipse">
+              <a:avLst/>
+            </a:prstGeom>
+            <a:solidFill>
+              <a:schemeClr val="accent4">
+                <a:lumMod val="75000"/>
+              </a:schemeClr>
+            </a:solidFill>
+            <a:ln>
+              <a:noFill/>
+            </a:ln>
+          </p:spPr>
+          <p:style>
+            <a:lnRef idx="2">
+              <a:schemeClr val="accent1">
+                <a:shade val="15000"/>
+              </a:schemeClr>
+            </a:lnRef>
+            <a:fillRef idx="1">
+              <a:schemeClr val="accent1"/>
+            </a:fillRef>
+            <a:effectRef idx="0">
+              <a:schemeClr val="accent1"/>
+            </a:effectRef>
+            <a:fontRef idx="minor">
+              <a:schemeClr val="lt1"/>
+            </a:fontRef>
+          </p:style>
+          <p:txBody>
+            <a:bodyPr tIns="90000" rtlCol="0" anchor="ctr"/>
+            <a:lstStyle/>
+            <a:p>
+              <a:pPr algn="ctr"/>
+              <a:endParaRPr kumimoji="1" lang="ja-JP" altLang="en-US" dirty="0">
+                <a:latin typeface="メイリオ" panose="020B0604030504040204" pitchFamily="50" charset="-128"/>
+                <a:ea typeface="メイリオ" panose="020B0604030504040204" pitchFamily="50" charset="-128"/>
+              </a:endParaRPr>
+            </a:p>
+          </p:txBody>
+        </p:sp>
+        <p:sp>
+          <p:nvSpPr>
+            <p:cNvPr id="277" name="四角形: 1 つの角を切り取る 276">
+              <a:extLst>
+                <a:ext uri="{FF2B5EF4-FFF2-40B4-BE49-F238E27FC236}">
+                  <a16:creationId xmlns:a16="http://schemas.microsoft.com/office/drawing/2014/main" id="{A7EA79AE-D471-D7EC-E860-8D12DDE6A6DA}"/>
+                </a:ext>
+              </a:extLst>
+            </p:cNvPr>
+            <p:cNvSpPr/>
+            <p:nvPr/>
+          </p:nvSpPr>
+          <p:spPr>
+            <a:xfrm>
+              <a:off x="7085238" y="1443202"/>
+              <a:ext cx="2425761" cy="264781"/>
+            </a:xfrm>
+            <a:prstGeom prst="snip1Rect">
+              <a:avLst>
+                <a:gd name="adj" fmla="val 50000"/>
+              </a:avLst>
+            </a:prstGeom>
+            <a:solidFill>
+              <a:srgbClr val="FFFFFF"/>
+            </a:solidFill>
+            <a:ln>
+              <a:solidFill>
+                <a:schemeClr val="bg2">
+                  <a:lumMod val="75000"/>
+                </a:schemeClr>
+              </a:solidFill>
+            </a:ln>
+          </p:spPr>
+          <p:style>
+            <a:lnRef idx="2">
+              <a:schemeClr val="accent1">
+                <a:shade val="15000"/>
+              </a:schemeClr>
+            </a:lnRef>
+            <a:fillRef idx="1">
+              <a:schemeClr val="accent1"/>
+            </a:fillRef>
+            <a:effectRef idx="0">
+              <a:schemeClr val="accent1"/>
+            </a:effectRef>
+            <a:fontRef idx="minor">
+              <a:schemeClr val="lt1"/>
+            </a:fontRef>
+          </p:style>
+          <p:txBody>
+            <a:bodyPr rtlCol="0" anchor="ctr"/>
+            <a:lstStyle/>
+            <a:p>
+              <a:pPr algn="ctr"/>
+              <a:r>
+                <a:rPr lang="ja-JP" altLang="en-US" sz="1400" dirty="0">
+                  <a:solidFill>
+                    <a:schemeClr val="tx1"/>
+                  </a:solidFill>
+                  <a:latin typeface="メイリオ" panose="020B0604030504040204" pitchFamily="50" charset="-128"/>
+                  <a:ea typeface="メイリオ" panose="020B0604030504040204" pitchFamily="50" charset="-128"/>
+                </a:rPr>
+                <a:t>３要素すべてが</a:t>
+              </a:r>
+              <a:r>
+                <a:rPr lang="en-US" altLang="ja-JP" sz="1400" dirty="0">
+                  <a:solidFill>
+                    <a:schemeClr val="tx1"/>
+                  </a:solidFill>
+                  <a:latin typeface="メイリオ" panose="020B0604030504040204" pitchFamily="50" charset="-128"/>
+                  <a:ea typeface="メイリオ" panose="020B0604030504040204" pitchFamily="50" charset="-128"/>
+                </a:rPr>
+                <a:t>DD</a:t>
+              </a:r>
+              <a:endParaRPr kumimoji="1" lang="ja-JP" altLang="en-US" sz="1400" dirty="0">
+                <a:solidFill>
+                  <a:schemeClr val="tx1"/>
+                </a:solidFill>
+                <a:latin typeface="メイリオ" panose="020B0604030504040204" pitchFamily="50" charset="-128"/>
+                <a:ea typeface="メイリオ" panose="020B0604030504040204" pitchFamily="50" charset="-128"/>
+              </a:endParaRPr>
+            </a:p>
+          </p:txBody>
+        </p:sp>
+        <p:sp>
+          <p:nvSpPr>
+            <p:cNvPr id="278" name="テキスト ボックス 277">
+              <a:extLst>
+                <a:ext uri="{FF2B5EF4-FFF2-40B4-BE49-F238E27FC236}">
+                  <a16:creationId xmlns:a16="http://schemas.microsoft.com/office/drawing/2014/main" id="{F9D0B3D6-2A89-8703-FD7A-BCB1EE7BC6B3}"/>
+                </a:ext>
+              </a:extLst>
+            </p:cNvPr>
+            <p:cNvSpPr txBox="1"/>
+            <p:nvPr/>
+          </p:nvSpPr>
+          <p:spPr>
+            <a:xfrm>
+              <a:off x="9614571" y="2097868"/>
+              <a:ext cx="886201" cy="374683"/>
+            </a:xfrm>
+            <a:prstGeom prst="rect">
+              <a:avLst/>
+            </a:prstGeom>
+            <a:noFill/>
+          </p:spPr>
+          <p:txBody>
+            <a:bodyPr wrap="square" rtlCol="0">
+              <a:spAutoFit/>
+            </a:bodyPr>
+            <a:lstStyle/>
+            <a:p>
+              <a:r>
+                <a:rPr kumimoji="1" lang="en-US" altLang="ja-JP" dirty="0">
+                  <a:solidFill>
+                    <a:schemeClr val="accent4">
+                      <a:lumMod val="75000"/>
+                    </a:schemeClr>
+                  </a:solidFill>
+                  <a:latin typeface="メイリオ" panose="020B0604030504040204" pitchFamily="50" charset="-128"/>
+                  <a:ea typeface="メイリオ" panose="020B0604030504040204" pitchFamily="50" charset="-128"/>
+                </a:rPr>
+                <a:t>TRUE</a:t>
+              </a:r>
+              <a:endParaRPr kumimoji="1" lang="ja-JP" altLang="en-US" dirty="0">
+                <a:solidFill>
+                  <a:schemeClr val="accent4">
+                    <a:lumMod val="75000"/>
+                  </a:schemeClr>
+                </a:solidFill>
+                <a:latin typeface="メイリオ" panose="020B0604030504040204" pitchFamily="50" charset="-128"/>
+                <a:ea typeface="メイリオ" panose="020B0604030504040204" pitchFamily="50" charset="-128"/>
+              </a:endParaRPr>
+            </a:p>
+          </p:txBody>
+        </p:sp>
+        <p:sp>
+          <p:nvSpPr>
+            <p:cNvPr id="279" name="テキスト ボックス 278">
+              <a:extLst>
+                <a:ext uri="{FF2B5EF4-FFF2-40B4-BE49-F238E27FC236}">
+                  <a16:creationId xmlns:a16="http://schemas.microsoft.com/office/drawing/2014/main" id="{10A877AA-210A-3798-BC46-D352114F1BF5}"/>
+                </a:ext>
+              </a:extLst>
+            </p:cNvPr>
+            <p:cNvSpPr txBox="1"/>
+            <p:nvPr/>
+          </p:nvSpPr>
+          <p:spPr>
+            <a:xfrm>
+              <a:off x="7358855" y="2936560"/>
+              <a:ext cx="1154939" cy="374683"/>
+            </a:xfrm>
+            <a:prstGeom prst="rect">
+              <a:avLst/>
+            </a:prstGeom>
+            <a:noFill/>
+          </p:spPr>
+          <p:txBody>
+            <a:bodyPr wrap="square" rtlCol="0">
+              <a:spAutoFit/>
+            </a:bodyPr>
+            <a:lstStyle/>
+            <a:p>
+              <a:r>
+                <a:rPr kumimoji="1" lang="en-US" altLang="ja-JP" dirty="0">
+                  <a:solidFill>
+                    <a:schemeClr val="accent4">
+                      <a:lumMod val="75000"/>
+                    </a:schemeClr>
+                  </a:solidFill>
+                  <a:latin typeface="メイリオ" panose="020B0604030504040204" pitchFamily="50" charset="-128"/>
+                  <a:ea typeface="メイリオ" panose="020B0604030504040204" pitchFamily="50" charset="-128"/>
+                </a:rPr>
+                <a:t>FALSE</a:t>
+              </a:r>
+              <a:endParaRPr kumimoji="1" lang="ja-JP" altLang="en-US" dirty="0">
+                <a:solidFill>
+                  <a:schemeClr val="accent4">
+                    <a:lumMod val="75000"/>
+                  </a:schemeClr>
+                </a:solidFill>
+                <a:latin typeface="メイリオ" panose="020B0604030504040204" pitchFamily="50" charset="-128"/>
+                <a:ea typeface="メイリオ" panose="020B0604030504040204" pitchFamily="50" charset="-128"/>
+              </a:endParaRPr>
+            </a:p>
+          </p:txBody>
+        </p:sp>
+        <p:sp>
+          <p:nvSpPr>
+            <p:cNvPr id="280" name="四角形: 1 つの角を切り取る 279">
+              <a:extLst>
+                <a:ext uri="{FF2B5EF4-FFF2-40B4-BE49-F238E27FC236}">
+                  <a16:creationId xmlns:a16="http://schemas.microsoft.com/office/drawing/2014/main" id="{FDC2E3F8-97D3-6808-9FBB-9A3753839E9B}"/>
+                </a:ext>
+              </a:extLst>
+            </p:cNvPr>
+            <p:cNvSpPr/>
+            <p:nvPr/>
+          </p:nvSpPr>
+          <p:spPr>
+            <a:xfrm>
+              <a:off x="7088066" y="3705355"/>
+              <a:ext cx="2422934" cy="264781"/>
+            </a:xfrm>
+            <a:prstGeom prst="snip1Rect">
+              <a:avLst>
+                <a:gd name="adj" fmla="val 50000"/>
+              </a:avLst>
+            </a:prstGeom>
+            <a:solidFill>
+              <a:srgbClr val="FFFFFF"/>
+            </a:solidFill>
+            <a:ln>
+              <a:solidFill>
+                <a:schemeClr val="bg2">
+                  <a:lumMod val="75000"/>
+                </a:schemeClr>
+              </a:solidFill>
+            </a:ln>
+          </p:spPr>
+          <p:style>
+            <a:lnRef idx="2">
+              <a:schemeClr val="accent1">
+                <a:shade val="15000"/>
+              </a:schemeClr>
+            </a:lnRef>
+            <a:fillRef idx="1">
+              <a:schemeClr val="accent1"/>
+            </a:fillRef>
+            <a:effectRef idx="0">
+              <a:schemeClr val="accent1"/>
+            </a:effectRef>
+            <a:fontRef idx="minor">
+              <a:schemeClr val="lt1"/>
+            </a:fontRef>
+          </p:style>
+          <p:txBody>
+            <a:bodyPr rtlCol="0" anchor="ctr"/>
+            <a:lstStyle/>
+            <a:p>
+              <a:pPr algn="ctr"/>
+              <a:r>
+                <a:rPr kumimoji="1" lang="ja-JP" altLang="en-US" sz="1400" dirty="0">
+                  <a:solidFill>
+                    <a:schemeClr val="tx1"/>
+                  </a:solidFill>
+                  <a:latin typeface="メイリオ" panose="020B0604030504040204" pitchFamily="50" charset="-128"/>
+                  <a:ea typeface="メイリオ" panose="020B0604030504040204" pitchFamily="50" charset="-128"/>
+                </a:rPr>
+                <a:t>すべての</a:t>
+              </a:r>
+              <a:r>
+                <a:rPr kumimoji="1" lang="en-US" altLang="ja-JP" sz="1400" dirty="0">
+                  <a:solidFill>
+                    <a:schemeClr val="tx1"/>
+                  </a:solidFill>
+                  <a:latin typeface="メイリオ" panose="020B0604030504040204" pitchFamily="50" charset="-128"/>
+                  <a:ea typeface="メイリオ" panose="020B0604030504040204" pitchFamily="50" charset="-128"/>
+                </a:rPr>
+                <a:t>slots</a:t>
+              </a:r>
+              <a:r>
+                <a:rPr kumimoji="1" lang="ja-JP" altLang="en-US" sz="1400" dirty="0">
+                  <a:solidFill>
+                    <a:schemeClr val="tx1"/>
+                  </a:solidFill>
+                  <a:latin typeface="メイリオ" panose="020B0604030504040204" pitchFamily="50" charset="-128"/>
+                  <a:ea typeface="メイリオ" panose="020B0604030504040204" pitchFamily="50" charset="-128"/>
+                </a:rPr>
+                <a:t>がバー</a:t>
+              </a:r>
+            </a:p>
+          </p:txBody>
+        </p:sp>
+        <p:cxnSp>
+          <p:nvCxnSpPr>
+            <p:cNvPr id="281" name="直線矢印コネクタ 280">
+              <a:extLst>
+                <a:ext uri="{FF2B5EF4-FFF2-40B4-BE49-F238E27FC236}">
+                  <a16:creationId xmlns:a16="http://schemas.microsoft.com/office/drawing/2014/main" id="{696D8DA7-1821-C192-FFCF-58EC89DE98FC}"/>
+                </a:ext>
+              </a:extLst>
+            </p:cNvPr>
+            <p:cNvCxnSpPr>
+              <a:cxnSpLocks/>
+            </p:cNvCxnSpPr>
+            <p:nvPr/>
+          </p:nvCxnSpPr>
+          <p:spPr>
+            <a:xfrm>
+              <a:off x="7255606" y="4080375"/>
+              <a:ext cx="0" cy="404396"/>
+            </a:xfrm>
+            <a:prstGeom prst="straightConnector1">
+              <a:avLst/>
+            </a:prstGeom>
+            <a:ln w="57150">
+              <a:solidFill>
+                <a:schemeClr val="accent4">
+                  <a:lumMod val="75000"/>
+                </a:schemeClr>
+              </a:solidFill>
+              <a:tailEnd type="triangle"/>
+            </a:ln>
+          </p:spPr>
+          <p:style>
+            <a:lnRef idx="1">
+              <a:schemeClr val="accent1"/>
+            </a:lnRef>
+            <a:fillRef idx="0">
+              <a:schemeClr val="accent1"/>
+            </a:fillRef>
+            <a:effectRef idx="0">
+              <a:schemeClr val="accent1"/>
+            </a:effectRef>
+            <a:fontRef idx="minor">
+              <a:schemeClr val="tx1"/>
+            </a:fontRef>
+          </p:style>
+        </p:cxnSp>
+        <p:sp>
+          <p:nvSpPr>
+            <p:cNvPr id="282" name="テキスト ボックス 281">
+              <a:extLst>
+                <a:ext uri="{FF2B5EF4-FFF2-40B4-BE49-F238E27FC236}">
+                  <a16:creationId xmlns:a16="http://schemas.microsoft.com/office/drawing/2014/main" id="{4D0941F1-07CE-CC64-2046-2AAF78578A64}"/>
+                </a:ext>
+              </a:extLst>
+            </p:cNvPr>
+            <p:cNvSpPr txBox="1"/>
+            <p:nvPr/>
+          </p:nvSpPr>
+          <p:spPr>
+            <a:xfrm>
+              <a:off x="8457278" y="4424365"/>
+              <a:ext cx="886201" cy="374683"/>
+            </a:xfrm>
+            <a:prstGeom prst="rect">
+              <a:avLst/>
+            </a:prstGeom>
+            <a:noFill/>
+          </p:spPr>
+          <p:txBody>
+            <a:bodyPr wrap="square" rtlCol="0">
+              <a:spAutoFit/>
+            </a:bodyPr>
+            <a:lstStyle/>
+            <a:p>
+              <a:r>
+                <a:rPr kumimoji="1" lang="en-US" altLang="ja-JP" dirty="0">
+                  <a:solidFill>
+                    <a:schemeClr val="accent4">
+                      <a:lumMod val="75000"/>
+                    </a:schemeClr>
+                  </a:solidFill>
+                  <a:latin typeface="メイリオ" panose="020B0604030504040204" pitchFamily="50" charset="-128"/>
+                  <a:ea typeface="メイリオ" panose="020B0604030504040204" pitchFamily="50" charset="-128"/>
+                </a:rPr>
+                <a:t>TRUE</a:t>
+              </a:r>
+              <a:endParaRPr kumimoji="1" lang="ja-JP" altLang="en-US" dirty="0">
+                <a:solidFill>
+                  <a:schemeClr val="accent4">
+                    <a:lumMod val="75000"/>
+                  </a:schemeClr>
+                </a:solidFill>
+                <a:latin typeface="メイリオ" panose="020B0604030504040204" pitchFamily="50" charset="-128"/>
+                <a:ea typeface="メイリオ" panose="020B0604030504040204" pitchFamily="50" charset="-128"/>
+              </a:endParaRPr>
+            </a:p>
+          </p:txBody>
+        </p:sp>
+        <p:cxnSp>
+          <p:nvCxnSpPr>
+            <p:cNvPr id="283" name="直線矢印コネクタ 282">
+              <a:extLst>
+                <a:ext uri="{FF2B5EF4-FFF2-40B4-BE49-F238E27FC236}">
+                  <a16:creationId xmlns:a16="http://schemas.microsoft.com/office/drawing/2014/main" id="{22227177-F212-CE0B-F990-312ABAB33EC3}"/>
+                </a:ext>
+              </a:extLst>
+            </p:cNvPr>
+            <p:cNvCxnSpPr>
+              <a:cxnSpLocks/>
+            </p:cNvCxnSpPr>
+            <p:nvPr/>
+          </p:nvCxnSpPr>
+          <p:spPr>
+            <a:xfrm flipV="1">
+              <a:off x="8613791" y="4777326"/>
+              <a:ext cx="547249" cy="2596"/>
+            </a:xfrm>
+            <a:prstGeom prst="straightConnector1">
+              <a:avLst/>
+            </a:prstGeom>
+            <a:ln w="57150">
+              <a:solidFill>
+                <a:schemeClr val="accent4">
+                  <a:lumMod val="75000"/>
+                </a:schemeClr>
+              </a:solidFill>
+              <a:tailEnd type="triangle"/>
+            </a:ln>
+          </p:spPr>
+          <p:style>
+            <a:lnRef idx="1">
+              <a:schemeClr val="accent1"/>
+            </a:lnRef>
+            <a:fillRef idx="0">
+              <a:schemeClr val="accent1"/>
+            </a:fillRef>
+            <a:effectRef idx="0">
+              <a:schemeClr val="accent1"/>
+            </a:effectRef>
+            <a:fontRef idx="minor">
+              <a:schemeClr val="tx1"/>
+            </a:fontRef>
+          </p:style>
+        </p:cxnSp>
+        <p:cxnSp>
+          <p:nvCxnSpPr>
+            <p:cNvPr id="284" name="直線矢印コネクタ 283">
+              <a:extLst>
+                <a:ext uri="{FF2B5EF4-FFF2-40B4-BE49-F238E27FC236}">
+                  <a16:creationId xmlns:a16="http://schemas.microsoft.com/office/drawing/2014/main" id="{CA1F9777-B118-88FE-19F8-0CCD4EBA8B2B}"/>
+                </a:ext>
+              </a:extLst>
+            </p:cNvPr>
+            <p:cNvCxnSpPr>
+              <a:cxnSpLocks/>
+            </p:cNvCxnSpPr>
+            <p:nvPr/>
+          </p:nvCxnSpPr>
+          <p:spPr>
+            <a:xfrm>
+              <a:off x="9784046" y="5111538"/>
+              <a:ext cx="540210" cy="0"/>
+            </a:xfrm>
+            <a:prstGeom prst="straightConnector1">
+              <a:avLst/>
+            </a:prstGeom>
+            <a:ln w="57150">
+              <a:solidFill>
+                <a:schemeClr val="accent4">
+                  <a:lumMod val="75000"/>
+                </a:schemeClr>
+              </a:solidFill>
+              <a:tailEnd type="triangle"/>
+            </a:ln>
+          </p:spPr>
+          <p:style>
+            <a:lnRef idx="1">
+              <a:schemeClr val="accent1"/>
+            </a:lnRef>
+            <a:fillRef idx="0">
+              <a:schemeClr val="accent1"/>
+            </a:fillRef>
+            <a:effectRef idx="0">
+              <a:schemeClr val="accent1"/>
+            </a:effectRef>
+            <a:fontRef idx="minor">
+              <a:schemeClr val="tx1"/>
+            </a:fontRef>
+          </p:style>
+        </p:cxnSp>
+        <p:cxnSp>
+          <p:nvCxnSpPr>
+            <p:cNvPr id="285" name="直線コネクタ 284">
+              <a:extLst>
+                <a:ext uri="{FF2B5EF4-FFF2-40B4-BE49-F238E27FC236}">
+                  <a16:creationId xmlns:a16="http://schemas.microsoft.com/office/drawing/2014/main" id="{FD1FA41E-6F20-91CB-39DC-055580D105D5}"/>
+                </a:ext>
+              </a:extLst>
+            </p:cNvPr>
+            <p:cNvCxnSpPr>
+              <a:cxnSpLocks/>
+            </p:cNvCxnSpPr>
+            <p:nvPr/>
+          </p:nvCxnSpPr>
+          <p:spPr>
+            <a:xfrm flipV="1">
+              <a:off x="9808499" y="4953762"/>
+              <a:ext cx="0" cy="184325"/>
+            </a:xfrm>
+            <a:prstGeom prst="line">
+              <a:avLst/>
+            </a:prstGeom>
+            <a:ln w="57150">
+              <a:solidFill>
+                <a:schemeClr val="accent4">
+                  <a:lumMod val="75000"/>
+                </a:schemeClr>
+              </a:solidFill>
+            </a:ln>
+          </p:spPr>
+          <p:style>
+            <a:lnRef idx="1">
+              <a:schemeClr val="accent1"/>
+            </a:lnRef>
+            <a:fillRef idx="0">
+              <a:schemeClr val="accent1"/>
+            </a:fillRef>
+            <a:effectRef idx="0">
+              <a:schemeClr val="accent1"/>
+            </a:effectRef>
+            <a:fontRef idx="minor">
+              <a:schemeClr val="tx1"/>
+            </a:fontRef>
+          </p:style>
+        </p:cxnSp>
+        <p:cxnSp>
+          <p:nvCxnSpPr>
+            <p:cNvPr id="286" name="直線矢印コネクタ 285">
+              <a:extLst>
+                <a:ext uri="{FF2B5EF4-FFF2-40B4-BE49-F238E27FC236}">
+                  <a16:creationId xmlns:a16="http://schemas.microsoft.com/office/drawing/2014/main" id="{DCDA55BD-A0B7-A590-8553-EAA4B43F5778}"/>
+                </a:ext>
+              </a:extLst>
+            </p:cNvPr>
+            <p:cNvCxnSpPr>
+              <a:cxnSpLocks/>
+            </p:cNvCxnSpPr>
+            <p:nvPr/>
+          </p:nvCxnSpPr>
+          <p:spPr>
+            <a:xfrm>
+              <a:off x="7255606" y="4987400"/>
+              <a:ext cx="17013" cy="505025"/>
+            </a:xfrm>
+            <a:prstGeom prst="straightConnector1">
+              <a:avLst/>
+            </a:prstGeom>
+            <a:ln w="57150">
+              <a:solidFill>
+                <a:schemeClr val="accent4">
+                  <a:lumMod val="75000"/>
+                </a:schemeClr>
+              </a:solidFill>
+              <a:tailEnd type="triangle"/>
+            </a:ln>
+          </p:spPr>
+          <p:style>
+            <a:lnRef idx="1">
+              <a:schemeClr val="accent1"/>
+            </a:lnRef>
+            <a:fillRef idx="0">
+              <a:schemeClr val="accent1"/>
+            </a:fillRef>
+            <a:effectRef idx="0">
+              <a:schemeClr val="accent1"/>
+            </a:effectRef>
+            <a:fontRef idx="minor">
+              <a:schemeClr val="tx1"/>
+            </a:fontRef>
+          </p:style>
+        </p:cxnSp>
+        <p:sp>
+          <p:nvSpPr>
+            <p:cNvPr id="287" name="楕円 286">
+              <a:extLst>
+                <a:ext uri="{FF2B5EF4-FFF2-40B4-BE49-F238E27FC236}">
+                  <a16:creationId xmlns:a16="http://schemas.microsoft.com/office/drawing/2014/main" id="{F939CF2D-3752-41CE-E918-5088A4BC3281}"/>
+                </a:ext>
+              </a:extLst>
+            </p:cNvPr>
+            <p:cNvSpPr/>
+            <p:nvPr/>
+          </p:nvSpPr>
+          <p:spPr>
+            <a:xfrm>
+              <a:off x="7094939" y="5575527"/>
+              <a:ext cx="377279" cy="374687"/>
+            </a:xfrm>
+            <a:prstGeom prst="ellipse">
+              <a:avLst/>
+            </a:prstGeom>
+            <a:solidFill>
+              <a:schemeClr val="bg1"/>
+            </a:solidFill>
+            <a:ln>
+              <a:solidFill>
+                <a:schemeClr val="bg2">
+                  <a:lumMod val="75000"/>
+                </a:schemeClr>
+              </a:solidFill>
+            </a:ln>
+          </p:spPr>
+          <p:style>
+            <a:lnRef idx="2">
+              <a:schemeClr val="accent1">
+                <a:shade val="15000"/>
+              </a:schemeClr>
+            </a:lnRef>
+            <a:fillRef idx="1">
+              <a:schemeClr val="accent1"/>
+            </a:fillRef>
+            <a:effectRef idx="0">
+              <a:schemeClr val="accent1"/>
+            </a:effectRef>
+            <a:fontRef idx="minor">
+              <a:schemeClr val="lt1"/>
+            </a:fontRef>
+          </p:style>
+          <p:txBody>
+            <a:bodyPr rtlCol="0" anchor="ctr"/>
+            <a:lstStyle/>
+            <a:p>
+              <a:pPr algn="ctr"/>
+              <a:endParaRPr kumimoji="1" lang="ja-JP" altLang="en-US" sz="500" dirty="0">
+                <a:solidFill>
+                  <a:schemeClr val="tx1"/>
+                </a:solidFill>
+              </a:endParaRPr>
+            </a:p>
+          </p:txBody>
+        </p:sp>
+        <p:sp>
+          <p:nvSpPr>
+            <p:cNvPr id="288" name="テキスト ボックス 287">
+              <a:extLst>
+                <a:ext uri="{FF2B5EF4-FFF2-40B4-BE49-F238E27FC236}">
+                  <a16:creationId xmlns:a16="http://schemas.microsoft.com/office/drawing/2014/main" id="{7558C3D3-51B1-BBC9-E919-8E7D94FE1058}"/>
+                </a:ext>
+              </a:extLst>
+            </p:cNvPr>
+            <p:cNvSpPr txBox="1"/>
+            <p:nvPr/>
+          </p:nvSpPr>
+          <p:spPr>
+            <a:xfrm>
+              <a:off x="7092188" y="5622675"/>
+              <a:ext cx="698422" cy="296624"/>
+            </a:xfrm>
+            <a:prstGeom prst="rect">
+              <a:avLst/>
+            </a:prstGeom>
+            <a:noFill/>
+          </p:spPr>
+          <p:txBody>
+            <a:bodyPr wrap="square" rtlCol="0">
+              <a:spAutoFit/>
+            </a:bodyPr>
+            <a:lstStyle/>
+            <a:p>
+              <a:r>
+                <a:rPr kumimoji="1" lang="ja-JP" altLang="en-US" sz="1300" dirty="0"/>
+                <a:t>０</a:t>
+              </a:r>
+            </a:p>
+          </p:txBody>
+        </p:sp>
+      </p:grpSp>
     </p:spTree>
     <p:extLst>
       <p:ext uri="{BB962C8B-B14F-4D97-AF65-F5344CB8AC3E}">
@@ -5526,6 +10416,216 @@
 </file>
 
 <file path=ppt/slides/slide12.xml><?xml version="1.0" encoding="utf-8"?>
+<p:sld xmlns:a="http://schemas.openxmlformats.org/drawingml/2006/main" xmlns:r="http://schemas.openxmlformats.org/officeDocument/2006/relationships" xmlns:p="http://schemas.openxmlformats.org/presentationml/2006/main">
+  <p:cSld>
+    <p:spTree>
+      <p:nvGrpSpPr>
+        <p:cNvPr id="1" name="">
+          <a:extLst>
+            <a:ext uri="{FF2B5EF4-FFF2-40B4-BE49-F238E27FC236}">
+              <a16:creationId xmlns:a16="http://schemas.microsoft.com/office/drawing/2014/main" id="{6A6885EE-318D-C562-AD10-BF7D883A4B5E}"/>
+            </a:ext>
+          </a:extLst>
+        </p:cNvPr>
+        <p:cNvGrpSpPr/>
+        <p:nvPr/>
+      </p:nvGrpSpPr>
+      <p:grpSpPr>
+        <a:xfrm>
+          <a:off x="0" y="0"/>
+          <a:ext cx="0" cy="0"/>
+          <a:chOff x="0" y="0"/>
+          <a:chExt cx="0" cy="0"/>
+        </a:xfrm>
+      </p:grpSpPr>
+      <p:sp>
+        <p:nvSpPr>
+          <p:cNvPr id="2" name="タイトル 1">
+            <a:extLst>
+              <a:ext uri="{FF2B5EF4-FFF2-40B4-BE49-F238E27FC236}">
+                <a16:creationId xmlns:a16="http://schemas.microsoft.com/office/drawing/2014/main" id="{50EF5FE3-62A1-90E6-8FB0-943D62D80549}"/>
+              </a:ext>
+            </a:extLst>
+          </p:cNvPr>
+          <p:cNvSpPr>
+            <a:spLocks noGrp="1"/>
+          </p:cNvSpPr>
+          <p:nvPr>
+            <p:ph type="ctrTitle"/>
+          </p:nvPr>
+        </p:nvSpPr>
+        <p:spPr>
+          <a:xfrm>
+            <a:off x="528181" y="314435"/>
+            <a:ext cx="5891408" cy="700173"/>
+          </a:xfrm>
+        </p:spPr>
+        <p:txBody>
+          <a:bodyPr>
+            <a:normAutofit/>
+          </a:bodyPr>
+          <a:lstStyle/>
+          <a:p>
+            <a:pPr algn="l"/>
+            <a:r>
+              <a:rPr kumimoji="1" lang="en-US" altLang="ja-JP" sz="3000" b="1" dirty="0">
+                <a:solidFill>
+                  <a:schemeClr val="tx1">
+                    <a:lumMod val="65000"/>
+                    <a:lumOff val="35000"/>
+                  </a:schemeClr>
+                </a:solidFill>
+                <a:latin typeface="メイリオ" panose="020B0604030504040204" pitchFamily="50" charset="-128"/>
+                <a:ea typeface="メイリオ" panose="020B0604030504040204" pitchFamily="50" charset="-128"/>
+              </a:rPr>
+              <a:t>9</a:t>
+            </a:r>
+            <a:r>
+              <a:rPr kumimoji="1" lang="ja-JP" altLang="en-US" sz="3000" b="1" dirty="0">
+                <a:solidFill>
+                  <a:schemeClr val="tx1">
+                    <a:lumMod val="65000"/>
+                    <a:lumOff val="35000"/>
+                  </a:schemeClr>
+                </a:solidFill>
+                <a:latin typeface="メイリオ" panose="020B0604030504040204" pitchFamily="50" charset="-128"/>
+                <a:ea typeface="メイリオ" panose="020B0604030504040204" pitchFamily="50" charset="-128"/>
+              </a:rPr>
+              <a:t>章　</a:t>
+            </a:r>
+            <a:r>
+              <a:rPr lang="ja-JP" altLang="en-US" sz="3000" b="1" dirty="0">
+                <a:solidFill>
+                  <a:schemeClr val="tx1">
+                    <a:lumMod val="65000"/>
+                    <a:lumOff val="35000"/>
+                  </a:schemeClr>
+                </a:solidFill>
+                <a:latin typeface="メイリオ" panose="020B0604030504040204" pitchFamily="50" charset="-128"/>
+                <a:ea typeface="メイリオ" panose="020B0604030504040204" pitchFamily="50" charset="-128"/>
+              </a:rPr>
+              <a:t>ループ　フローチャート</a:t>
+            </a:r>
+            <a:endParaRPr kumimoji="1" lang="ja-JP" altLang="en-US" sz="3000" b="1" dirty="0">
+              <a:solidFill>
+                <a:schemeClr val="tx1">
+                  <a:lumMod val="65000"/>
+                  <a:lumOff val="35000"/>
+                </a:schemeClr>
+              </a:solidFill>
+              <a:latin typeface="メイリオ" panose="020B0604030504040204" pitchFamily="50" charset="-128"/>
+              <a:ea typeface="メイリオ" panose="020B0604030504040204" pitchFamily="50" charset="-128"/>
+            </a:endParaRPr>
+          </a:p>
+        </p:txBody>
+      </p:sp>
+      <p:sp>
+        <p:nvSpPr>
+          <p:cNvPr id="27" name="正方形/長方形 26">
+            <a:extLst>
+              <a:ext uri="{FF2B5EF4-FFF2-40B4-BE49-F238E27FC236}">
+                <a16:creationId xmlns:a16="http://schemas.microsoft.com/office/drawing/2014/main" id="{7C27FC1C-F107-CDBD-DF4F-71FE4E5B4657}"/>
+              </a:ext>
+            </a:extLst>
+          </p:cNvPr>
+          <p:cNvSpPr/>
+          <p:nvPr/>
+        </p:nvSpPr>
+        <p:spPr>
+          <a:xfrm>
+            <a:off x="1831357" y="1531592"/>
+            <a:ext cx="2030681" cy="576694"/>
+          </a:xfrm>
+          <a:prstGeom prst="rect">
+            <a:avLst/>
+          </a:prstGeom>
+          <a:solidFill>
+            <a:srgbClr val="FFFFFF"/>
+          </a:solidFill>
+          <a:ln>
+            <a:solidFill>
+              <a:schemeClr val="bg2">
+                <a:lumMod val="90000"/>
+              </a:schemeClr>
+            </a:solidFill>
+          </a:ln>
+        </p:spPr>
+        <p:style>
+          <a:lnRef idx="2">
+            <a:schemeClr val="accent1">
+              <a:shade val="15000"/>
+            </a:schemeClr>
+          </a:lnRef>
+          <a:fillRef idx="1">
+            <a:schemeClr val="accent1"/>
+          </a:fillRef>
+          <a:effectRef idx="0">
+            <a:schemeClr val="accent1"/>
+          </a:effectRef>
+          <a:fontRef idx="minor">
+            <a:schemeClr val="lt1"/>
+          </a:fontRef>
+        </p:style>
+        <p:txBody>
+          <a:bodyPr rtlCol="0" anchor="t"/>
+          <a:lstStyle/>
+          <a:p>
+            <a:r>
+              <a:rPr lang="en-US" altLang="ja-JP" sz="1500" dirty="0">
+                <a:solidFill>
+                  <a:schemeClr val="tx1"/>
+                </a:solidFill>
+                <a:latin typeface="メイリオ" panose="020B0604030504040204" pitchFamily="50" charset="-128"/>
+                <a:ea typeface="メイリオ" panose="020B0604030504040204" pitchFamily="50" charset="-128"/>
+              </a:rPr>
+              <a:t>slots</a:t>
+            </a:r>
+          </a:p>
+          <a:p>
+            <a:r>
+              <a:rPr lang="en-US" altLang="ja-JP" sz="1500" dirty="0">
+                <a:solidFill>
+                  <a:schemeClr val="tx1"/>
+                </a:solidFill>
+                <a:latin typeface="メイリオ" panose="020B0604030504040204" pitchFamily="50" charset="-128"/>
+                <a:ea typeface="メイリオ" panose="020B0604030504040204" pitchFamily="50" charset="-128"/>
+              </a:rPr>
+              <a:t>DD</a:t>
+            </a:r>
+            <a:r>
+              <a:rPr lang="ja-JP" altLang="en-US" sz="1500" dirty="0">
+                <a:solidFill>
+                  <a:schemeClr val="tx1"/>
+                </a:solidFill>
+                <a:latin typeface="メイリオ" panose="020B0604030504040204" pitchFamily="50" charset="-128"/>
+                <a:ea typeface="メイリオ" panose="020B0604030504040204" pitchFamily="50" charset="-128"/>
+              </a:rPr>
+              <a:t>以外の文字の種類</a:t>
+            </a:r>
+            <a:endParaRPr lang="en-US" altLang="ja-JP" sz="1500" dirty="0">
+              <a:solidFill>
+                <a:schemeClr val="tx1"/>
+              </a:solidFill>
+              <a:latin typeface="メイリオ" panose="020B0604030504040204" pitchFamily="50" charset="-128"/>
+              <a:ea typeface="メイリオ" panose="020B0604030504040204" pitchFamily="50" charset="-128"/>
+            </a:endParaRPr>
+          </a:p>
+        </p:txBody>
+      </p:sp>
+    </p:spTree>
+    <p:extLst>
+      <p:ext uri="{BB962C8B-B14F-4D97-AF65-F5344CB8AC3E}">
+        <p14:creationId xmlns:p14="http://schemas.microsoft.com/office/powerpoint/2010/main" val="184432637"/>
+      </p:ext>
+    </p:extLst>
+  </p:cSld>
+  <p:clrMapOvr>
+    <a:masterClrMapping/>
+  </p:clrMapOvr>
+</p:sld>
+</file>
+
+<file path=ppt/slides/slide13.xml><?xml version="1.0" encoding="utf-8"?>
 <p:sld xmlns:a="http://schemas.openxmlformats.org/drawingml/2006/main" xmlns:r="http://schemas.openxmlformats.org/officeDocument/2006/relationships" xmlns:p="http://schemas.openxmlformats.org/presentationml/2006/main">
   <p:cSld>
     <p:spTree>
@@ -6312,7 +11412,7 @@
 </p:sld>
 </file>
 
-<file path=ppt/slides/slide13.xml><?xml version="1.0" encoding="utf-8"?>
+<file path=ppt/slides/slide14.xml><?xml version="1.0" encoding="utf-8"?>
 <p:sld xmlns:a="http://schemas.openxmlformats.org/drawingml/2006/main" xmlns:r="http://schemas.openxmlformats.org/officeDocument/2006/relationships" xmlns:p="http://schemas.openxmlformats.org/presentationml/2006/main">
   <p:cSld>
     <p:spTree>
@@ -7190,7 +12290,7 @@
 </p:sld>
 </file>
 
-<file path=ppt/slides/slide14.xml><?xml version="1.0" encoding="utf-8"?>
+<file path=ppt/slides/slide15.xml><?xml version="1.0" encoding="utf-8"?>
 <p:sld xmlns:a="http://schemas.openxmlformats.org/drawingml/2006/main" xmlns:r="http://schemas.openxmlformats.org/officeDocument/2006/relationships" xmlns:p="http://schemas.openxmlformats.org/presentationml/2006/main">
   <p:cSld>
     <p:spTree>
@@ -7505,7 +12605,7 @@
 </p:sld>
 </file>
 
-<file path=ppt/slides/slide15.xml><?xml version="1.0" encoding="utf-8"?>
+<file path=ppt/slides/slide16.xml><?xml version="1.0" encoding="utf-8"?>
 <p:sld xmlns:a="http://schemas.openxmlformats.org/drawingml/2006/main" xmlns:r="http://schemas.openxmlformats.org/officeDocument/2006/relationships" xmlns:p="http://schemas.openxmlformats.org/presentationml/2006/main">
   <p:cSld>
     <p:spTree>
@@ -8525,7 +13625,7 @@
 </p:sld>
 </file>
 
-<file path=ppt/slides/slide16.xml><?xml version="1.0" encoding="utf-8"?>
+<file path=ppt/slides/slide17.xml><?xml version="1.0" encoding="utf-8"?>
 <p:sld xmlns:a="http://schemas.openxmlformats.org/drawingml/2006/main" xmlns:r="http://schemas.openxmlformats.org/officeDocument/2006/relationships" xmlns:p="http://schemas.openxmlformats.org/presentationml/2006/main">
   <p:cSld>
     <p:spTree>
@@ -8654,7 +13754,7 @@
 </p:sld>
 </file>
 
-<file path=ppt/slides/slide17.xml><?xml version="1.0" encoding="utf-8"?>
+<file path=ppt/slides/slide18.xml><?xml version="1.0" encoding="utf-8"?>
 <p:sld xmlns:a="http://schemas.openxmlformats.org/drawingml/2006/main" xmlns:r="http://schemas.openxmlformats.org/officeDocument/2006/relationships" xmlns:p="http://schemas.openxmlformats.org/presentationml/2006/main">
   <p:cSld>
     <p:spTree>
@@ -8816,354 +13916,6 @@
     <p:extLst>
       <p:ext uri="{BB962C8B-B14F-4D97-AF65-F5344CB8AC3E}">
         <p14:creationId xmlns:p14="http://schemas.microsoft.com/office/powerpoint/2010/main" val="1975395573"/>
-      </p:ext>
-    </p:extLst>
-  </p:cSld>
-  <p:clrMapOvr>
-    <a:masterClrMapping/>
-  </p:clrMapOvr>
-</p:sld>
-</file>
-
-<file path=ppt/slides/slide18.xml><?xml version="1.0" encoding="utf-8"?>
-<p:sld xmlns:a="http://schemas.openxmlformats.org/drawingml/2006/main" xmlns:r="http://schemas.openxmlformats.org/officeDocument/2006/relationships" xmlns:p="http://schemas.openxmlformats.org/presentationml/2006/main">
-  <p:cSld>
-    <p:spTree>
-      <p:nvGrpSpPr>
-        <p:cNvPr id="1" name=""/>
-        <p:cNvGrpSpPr/>
-        <p:nvPr/>
-      </p:nvGrpSpPr>
-      <p:grpSpPr>
-        <a:xfrm>
-          <a:off x="0" y="0"/>
-          <a:ext cx="0" cy="0"/>
-          <a:chOff x="0" y="0"/>
-          <a:chExt cx="0" cy="0"/>
-        </a:xfrm>
-      </p:grpSpPr>
-      <p:sp>
-        <p:nvSpPr>
-          <p:cNvPr id="2" name="タイトル 1">
-            <a:extLst>
-              <a:ext uri="{FF2B5EF4-FFF2-40B4-BE49-F238E27FC236}">
-                <a16:creationId xmlns:a16="http://schemas.microsoft.com/office/drawing/2014/main" id="{8F92D15D-6ED6-F1E2-415D-C5D0D0CAAC83}"/>
-              </a:ext>
-            </a:extLst>
-          </p:cNvPr>
-          <p:cNvSpPr>
-            <a:spLocks noGrp="1"/>
-          </p:cNvSpPr>
-          <p:nvPr>
-            <p:ph type="ctrTitle"/>
-          </p:nvPr>
-        </p:nvSpPr>
-        <p:spPr>
-          <a:xfrm>
-            <a:off x="528181" y="314435"/>
-            <a:ext cx="5891408" cy="700173"/>
-          </a:xfrm>
-        </p:spPr>
-        <p:txBody>
-          <a:bodyPr>
-            <a:normAutofit/>
-          </a:bodyPr>
-          <a:lstStyle/>
-          <a:p>
-            <a:pPr algn="l"/>
-            <a:r>
-              <a:rPr lang="ja-JP" altLang="en-US" sz="3000" b="1" dirty="0">
-                <a:solidFill>
-                  <a:schemeClr val="tx1">
-                    <a:lumMod val="65000"/>
-                    <a:lumOff val="35000"/>
-                  </a:schemeClr>
-                </a:solidFill>
-                <a:latin typeface="メイリオ" panose="020B0604030504040204" pitchFamily="50" charset="-128"/>
-                <a:ea typeface="メイリオ" panose="020B0604030504040204" pitchFamily="50" charset="-128"/>
-              </a:rPr>
-              <a:t>１０</a:t>
-            </a:r>
-            <a:r>
-              <a:rPr kumimoji="1" lang="ja-JP" altLang="en-US" sz="3000" b="1" dirty="0">
-                <a:solidFill>
-                  <a:schemeClr val="tx1">
-                    <a:lumMod val="65000"/>
-                    <a:lumOff val="35000"/>
-                  </a:schemeClr>
-                </a:solidFill>
-                <a:latin typeface="メイリオ" panose="020B0604030504040204" pitchFamily="50" charset="-128"/>
-                <a:ea typeface="メイリオ" panose="020B0604030504040204" pitchFamily="50" charset="-128"/>
-              </a:rPr>
-              <a:t>章　</a:t>
-            </a:r>
-            <a:r>
-              <a:rPr lang="ja-JP" altLang="en-US" sz="3000" b="1" dirty="0">
-                <a:solidFill>
-                  <a:schemeClr val="tx1">
-                    <a:lumMod val="65000"/>
-                    <a:lumOff val="35000"/>
-                  </a:schemeClr>
-                </a:solidFill>
-                <a:latin typeface="メイリオ" panose="020B0604030504040204" pitchFamily="50" charset="-128"/>
-                <a:ea typeface="メイリオ" panose="020B0604030504040204" pitchFamily="50" charset="-128"/>
-              </a:rPr>
-              <a:t>スピード</a:t>
-            </a:r>
-            <a:endParaRPr kumimoji="1" lang="ja-JP" altLang="en-US" sz="3000" b="1" dirty="0">
-              <a:solidFill>
-                <a:schemeClr val="tx1">
-                  <a:lumMod val="65000"/>
-                  <a:lumOff val="35000"/>
-                </a:schemeClr>
-              </a:solidFill>
-              <a:latin typeface="メイリオ" panose="020B0604030504040204" pitchFamily="50" charset="-128"/>
-              <a:ea typeface="メイリオ" panose="020B0604030504040204" pitchFamily="50" charset="-128"/>
-            </a:endParaRPr>
-          </a:p>
-        </p:txBody>
-      </p:sp>
-      <p:sp>
-        <p:nvSpPr>
-          <p:cNvPr id="4" name="正方形/長方形 3">
-            <a:extLst>
-              <a:ext uri="{FF2B5EF4-FFF2-40B4-BE49-F238E27FC236}">
-                <a16:creationId xmlns:a16="http://schemas.microsoft.com/office/drawing/2014/main" id="{578782C7-6070-7C3A-DAB7-3101F4C6ED5C}"/>
-              </a:ext>
-            </a:extLst>
-          </p:cNvPr>
-          <p:cNvSpPr/>
-          <p:nvPr/>
-        </p:nvSpPr>
-        <p:spPr>
-          <a:xfrm>
-            <a:off x="658169" y="1098587"/>
-            <a:ext cx="10540261" cy="5528957"/>
-          </a:xfrm>
-          <a:prstGeom prst="rect">
-            <a:avLst/>
-          </a:prstGeom>
-          <a:solidFill>
-            <a:schemeClr val="accent4">
-              <a:lumMod val="20000"/>
-              <a:lumOff val="80000"/>
-            </a:schemeClr>
-          </a:solidFill>
-          <a:ln>
-            <a:noFill/>
-          </a:ln>
-        </p:spPr>
-        <p:style>
-          <a:lnRef idx="2">
-            <a:schemeClr val="accent1">
-              <a:shade val="15000"/>
-            </a:schemeClr>
-          </a:lnRef>
-          <a:fillRef idx="1">
-            <a:schemeClr val="accent1"/>
-          </a:fillRef>
-          <a:effectRef idx="0">
-            <a:schemeClr val="accent1"/>
-          </a:effectRef>
-          <a:fontRef idx="minor">
-            <a:schemeClr val="lt1"/>
-          </a:fontRef>
-        </p:style>
-        <p:txBody>
-          <a:bodyPr rtlCol="0" anchor="t"/>
-          <a:lstStyle/>
-          <a:p>
-            <a:endParaRPr kumimoji="1" lang="ja-JP" altLang="en-US" dirty="0"/>
-          </a:p>
-        </p:txBody>
-      </p:sp>
-      <p:sp>
-        <p:nvSpPr>
-          <p:cNvPr id="6" name="正方形/長方形 5">
-            <a:extLst>
-              <a:ext uri="{FF2B5EF4-FFF2-40B4-BE49-F238E27FC236}">
-                <a16:creationId xmlns:a16="http://schemas.microsoft.com/office/drawing/2014/main" id="{75CE81D2-C5EE-4E63-DA6F-4D50A6E33162}"/>
-              </a:ext>
-            </a:extLst>
-          </p:cNvPr>
-          <p:cNvSpPr/>
-          <p:nvPr/>
-        </p:nvSpPr>
-        <p:spPr>
-          <a:xfrm>
-            <a:off x="8561647" y="1263081"/>
-            <a:ext cx="2391170" cy="1183629"/>
-          </a:xfrm>
-          <a:prstGeom prst="rect">
-            <a:avLst/>
-          </a:prstGeom>
-          <a:solidFill>
-            <a:schemeClr val="accent2">
-              <a:lumMod val="40000"/>
-              <a:lumOff val="60000"/>
-            </a:schemeClr>
-          </a:solidFill>
-          <a:ln>
-            <a:noFill/>
-          </a:ln>
-        </p:spPr>
-        <p:style>
-          <a:lnRef idx="2">
-            <a:schemeClr val="accent1">
-              <a:shade val="15000"/>
-            </a:schemeClr>
-          </a:lnRef>
-          <a:fillRef idx="1">
-            <a:schemeClr val="accent1"/>
-          </a:fillRef>
-          <a:effectRef idx="0">
-            <a:schemeClr val="accent1"/>
-          </a:effectRef>
-          <a:fontRef idx="minor">
-            <a:schemeClr val="lt1"/>
-          </a:fontRef>
-        </p:style>
-        <p:txBody>
-          <a:bodyPr rtlCol="0" anchor="t"/>
-          <a:lstStyle/>
-          <a:p>
-            <a:endParaRPr lang="en-US" altLang="ja-JP" sz="1000" dirty="0">
-              <a:solidFill>
-                <a:schemeClr val="tx1"/>
-              </a:solidFill>
-            </a:endParaRPr>
-          </a:p>
-        </p:txBody>
-      </p:sp>
-      <p:sp>
-        <p:nvSpPr>
-          <p:cNvPr id="3" name="字幕 2">
-            <a:extLst>
-              <a:ext uri="{FF2B5EF4-FFF2-40B4-BE49-F238E27FC236}">
-                <a16:creationId xmlns:a16="http://schemas.microsoft.com/office/drawing/2014/main" id="{EF422FEA-2F34-70ED-56A9-01A65A2AD142}"/>
-              </a:ext>
-            </a:extLst>
-          </p:cNvPr>
-          <p:cNvSpPr>
-            <a:spLocks noGrp="1"/>
-          </p:cNvSpPr>
-          <p:nvPr>
-            <p:ph type="subTitle" idx="1"/>
-          </p:nvPr>
-        </p:nvSpPr>
-        <p:spPr>
-          <a:xfrm>
-            <a:off x="682560" y="1143635"/>
-            <a:ext cx="9391483" cy="5446283"/>
-          </a:xfrm>
-        </p:spPr>
-        <p:txBody>
-          <a:bodyPr>
-            <a:normAutofit/>
-          </a:bodyPr>
-          <a:lstStyle/>
-          <a:p>
-            <a:pPr algn="l"/>
-            <a:r>
-              <a:rPr kumimoji="1" lang="ja-JP" altLang="en-US" sz="2000" dirty="0">
-                <a:solidFill>
-                  <a:schemeClr val="accent4">
-                    <a:lumMod val="75000"/>
-                  </a:schemeClr>
-                </a:solidFill>
-                <a:latin typeface="メイリオ" panose="020B0604030504040204" pitchFamily="50" charset="-128"/>
-                <a:ea typeface="メイリオ" panose="020B0604030504040204" pitchFamily="50" charset="-128"/>
-              </a:rPr>
-              <a:t>＃</a:t>
-            </a:r>
-            <a:r>
-              <a:rPr lang="en-US" altLang="ja-JP" sz="2000" dirty="0">
-                <a:solidFill>
-                  <a:schemeClr val="accent4">
-                    <a:lumMod val="75000"/>
-                  </a:schemeClr>
-                </a:solidFill>
-                <a:latin typeface="メイリオ" panose="020B0604030504040204" pitchFamily="50" charset="-128"/>
-                <a:ea typeface="メイリオ" panose="020B0604030504040204" pitchFamily="50" charset="-128"/>
-              </a:rPr>
-              <a:t>#</a:t>
-            </a:r>
-            <a:endParaRPr kumimoji="1" lang="en-US" altLang="ja-JP" sz="2000" dirty="0">
-              <a:solidFill>
-                <a:schemeClr val="accent4">
-                  <a:lumMod val="75000"/>
-                </a:schemeClr>
-              </a:solidFill>
-              <a:latin typeface="メイリオ" panose="020B0604030504040204" pitchFamily="50" charset="-128"/>
-              <a:ea typeface="メイリオ" panose="020B0604030504040204" pitchFamily="50" charset="-128"/>
-            </a:endParaRPr>
-          </a:p>
-          <a:p>
-            <a:pPr algn="l"/>
-            <a:r>
-              <a:rPr lang="ja-JP" altLang="en-US" sz="1200" dirty="0">
-                <a:latin typeface="メイリオ" panose="020B0604030504040204" pitchFamily="50" charset="-128"/>
-                <a:ea typeface="メイリオ" panose="020B0604030504040204" pitchFamily="50" charset="-128"/>
-              </a:rPr>
-              <a:t>変数名：</a:t>
-            </a:r>
-            <a:endParaRPr lang="en-US" altLang="ja-JP" sz="1200" dirty="0">
-              <a:latin typeface="メイリオ" panose="020B0604030504040204" pitchFamily="50" charset="-128"/>
-              <a:ea typeface="メイリオ" panose="020B0604030504040204" pitchFamily="50" charset="-128"/>
-            </a:endParaRPr>
-          </a:p>
-        </p:txBody>
-      </p:sp>
-      <p:cxnSp>
-        <p:nvCxnSpPr>
-          <p:cNvPr id="13" name="直線矢印コネクタ 12">
-            <a:extLst>
-              <a:ext uri="{FF2B5EF4-FFF2-40B4-BE49-F238E27FC236}">
-                <a16:creationId xmlns:a16="http://schemas.microsoft.com/office/drawing/2014/main" id="{74FF8975-518B-E7D8-023D-CCCCAEBC6F95}"/>
-              </a:ext>
-            </a:extLst>
-          </p:cNvPr>
-          <p:cNvCxnSpPr>
-            <a:cxnSpLocks/>
-          </p:cNvCxnSpPr>
-          <p:nvPr/>
-        </p:nvCxnSpPr>
-        <p:spPr>
-          <a:xfrm>
-            <a:off x="4548393" y="1472982"/>
-            <a:ext cx="581891" cy="0"/>
-          </a:xfrm>
-          <a:prstGeom prst="straightConnector1">
-            <a:avLst/>
-          </a:prstGeom>
-          <a:ln w="57150">
-            <a:solidFill>
-              <a:schemeClr val="accent4">
-                <a:lumMod val="75000"/>
-              </a:schemeClr>
-            </a:solidFill>
-            <a:tailEnd type="triangle"/>
-          </a:ln>
-        </p:spPr>
-        <p:style>
-          <a:lnRef idx="1">
-            <a:schemeClr val="accent1"/>
-          </a:lnRef>
-          <a:fillRef idx="0">
-            <a:schemeClr val="accent1"/>
-          </a:fillRef>
-          <a:effectRef idx="0">
-            <a:schemeClr val="accent1"/>
-          </a:effectRef>
-          <a:fontRef idx="minor">
-            <a:schemeClr val="tx1"/>
-          </a:fontRef>
-        </p:style>
-      </p:cxnSp>
-    </p:spTree>
-    <p:extLst>
-      <p:ext uri="{BB962C8B-B14F-4D97-AF65-F5344CB8AC3E}">
-        <p14:creationId xmlns:p14="http://schemas.microsoft.com/office/powerpoint/2010/main" val="1088393112"/>
       </p:ext>
     </p:extLst>
   </p:cSld>
@@ -9243,17 +13995,40 @@
                 <a:latin typeface="メイリオ" panose="020B0604030504040204" pitchFamily="50" charset="-128"/>
                 <a:ea typeface="メイリオ" panose="020B0604030504040204" pitchFamily="50" charset="-128"/>
               </a:rPr>
-              <a:t>章　スピード　最終コード</a:t>
-            </a:r>
+              <a:t>章　</a:t>
+            </a:r>
+            <a:r>
+              <a:rPr lang="ja-JP" altLang="en-US" sz="3000" b="1" dirty="0">
+                <a:solidFill>
+                  <a:schemeClr val="tx1">
+                    <a:lumMod val="65000"/>
+                    <a:lumOff val="35000"/>
+                  </a:schemeClr>
+                </a:solidFill>
+                <a:latin typeface="メイリオ" panose="020B0604030504040204" pitchFamily="50" charset="-128"/>
+                <a:ea typeface="メイリオ" panose="020B0604030504040204" pitchFamily="50" charset="-128"/>
+              </a:rPr>
+              <a:t>スピード</a:t>
+            </a:r>
+            <a:endParaRPr kumimoji="1" lang="ja-JP" altLang="en-US" sz="3000" b="1" dirty="0">
+              <a:solidFill>
+                <a:schemeClr val="tx1">
+                  <a:lumMod val="65000"/>
+                  <a:lumOff val="35000"/>
+                </a:schemeClr>
+              </a:solidFill>
+              <a:latin typeface="メイリオ" panose="020B0604030504040204" pitchFamily="50" charset="-128"/>
+              <a:ea typeface="メイリオ" panose="020B0604030504040204" pitchFamily="50" charset="-128"/>
+            </a:endParaRPr>
           </a:p>
         </p:txBody>
       </p:sp>
       <p:sp>
         <p:nvSpPr>
-          <p:cNvPr id="11" name="正方形/長方形 10">
+          <p:cNvPr id="4" name="正方形/長方形 3">
             <a:extLst>
               <a:ext uri="{FF2B5EF4-FFF2-40B4-BE49-F238E27FC236}">
-                <a16:creationId xmlns:a16="http://schemas.microsoft.com/office/drawing/2014/main" id="{661A3A95-316A-208D-1006-9B4CAF8277CA}"/>
+                <a16:creationId xmlns:a16="http://schemas.microsoft.com/office/drawing/2014/main" id="{578782C7-6070-7C3A-DAB7-3101F4C6ED5C}"/>
               </a:ext>
             </a:extLst>
           </p:cNvPr>
@@ -9262,8 +14037,8 @@
         </p:nvSpPr>
         <p:spPr>
           <a:xfrm>
-            <a:off x="528181" y="892099"/>
-            <a:ext cx="11135638" cy="5965902"/>
+            <a:off x="658169" y="1098587"/>
+            <a:ext cx="10540261" cy="5528957"/>
           </a:xfrm>
           <a:prstGeom prst="rect">
             <a:avLst/>
@@ -9302,10 +14077,193 @@
           </a:p>
         </p:txBody>
       </p:sp>
+      <p:sp>
+        <p:nvSpPr>
+          <p:cNvPr id="6" name="正方形/長方形 5">
+            <a:extLst>
+              <a:ext uri="{FF2B5EF4-FFF2-40B4-BE49-F238E27FC236}">
+                <a16:creationId xmlns:a16="http://schemas.microsoft.com/office/drawing/2014/main" id="{75CE81D2-C5EE-4E63-DA6F-4D50A6E33162}"/>
+              </a:ext>
+            </a:extLst>
+          </p:cNvPr>
+          <p:cNvSpPr/>
+          <p:nvPr/>
+        </p:nvSpPr>
+        <p:spPr>
+          <a:xfrm>
+            <a:off x="8561647" y="1263081"/>
+            <a:ext cx="2391170" cy="1183629"/>
+          </a:xfrm>
+          <a:prstGeom prst="rect">
+            <a:avLst/>
+          </a:prstGeom>
+          <a:solidFill>
+            <a:schemeClr val="accent2">
+              <a:lumMod val="40000"/>
+              <a:lumOff val="60000"/>
+            </a:schemeClr>
+          </a:solidFill>
+          <a:ln>
+            <a:noFill/>
+          </a:ln>
+        </p:spPr>
+        <p:style>
+          <a:lnRef idx="2">
+            <a:schemeClr val="accent1">
+              <a:shade val="15000"/>
+            </a:schemeClr>
+          </a:lnRef>
+          <a:fillRef idx="1">
+            <a:schemeClr val="accent1"/>
+          </a:fillRef>
+          <a:effectRef idx="0">
+            <a:schemeClr val="accent1"/>
+          </a:effectRef>
+          <a:fontRef idx="minor">
+            <a:schemeClr val="lt1"/>
+          </a:fontRef>
+        </p:style>
+        <p:txBody>
+          <a:bodyPr rtlCol="0" anchor="t"/>
+          <a:lstStyle/>
+          <a:p>
+            <a:endParaRPr lang="en-US" altLang="ja-JP" sz="1000" dirty="0">
+              <a:solidFill>
+                <a:schemeClr val="tx1"/>
+              </a:solidFill>
+            </a:endParaRPr>
+          </a:p>
+        </p:txBody>
+      </p:sp>
+      <p:sp>
+        <p:nvSpPr>
+          <p:cNvPr id="3" name="字幕 2">
+            <a:extLst>
+              <a:ext uri="{FF2B5EF4-FFF2-40B4-BE49-F238E27FC236}">
+                <a16:creationId xmlns:a16="http://schemas.microsoft.com/office/drawing/2014/main" id="{EF422FEA-2F34-70ED-56A9-01A65A2AD142}"/>
+              </a:ext>
+            </a:extLst>
+          </p:cNvPr>
+          <p:cNvSpPr>
+            <a:spLocks noGrp="1"/>
+          </p:cNvSpPr>
+          <p:nvPr>
+            <p:ph type="subTitle" idx="1"/>
+          </p:nvPr>
+        </p:nvSpPr>
+        <p:spPr>
+          <a:xfrm>
+            <a:off x="682560" y="1143635"/>
+            <a:ext cx="9391483" cy="5446283"/>
+          </a:xfrm>
+        </p:spPr>
+        <p:txBody>
+          <a:bodyPr>
+            <a:normAutofit/>
+          </a:bodyPr>
+          <a:lstStyle/>
+          <a:p>
+            <a:pPr algn="l"/>
+            <a:r>
+              <a:rPr kumimoji="1" lang="ja-JP" altLang="en-US" sz="2000" dirty="0">
+                <a:solidFill>
+                  <a:schemeClr val="accent4">
+                    <a:lumMod val="75000"/>
+                  </a:schemeClr>
+                </a:solidFill>
+                <a:latin typeface="メイリオ" panose="020B0604030504040204" pitchFamily="50" charset="-128"/>
+                <a:ea typeface="メイリオ" panose="020B0604030504040204" pitchFamily="50" charset="-128"/>
+              </a:rPr>
+              <a:t>＃</a:t>
+            </a:r>
+            <a:r>
+              <a:rPr lang="en-US" altLang="ja-JP" sz="2000" dirty="0">
+                <a:solidFill>
+                  <a:schemeClr val="accent4">
+                    <a:lumMod val="75000"/>
+                  </a:schemeClr>
+                </a:solidFill>
+                <a:latin typeface="メイリオ" panose="020B0604030504040204" pitchFamily="50" charset="-128"/>
+                <a:ea typeface="メイリオ" panose="020B0604030504040204" pitchFamily="50" charset="-128"/>
+              </a:rPr>
+              <a:t>#</a:t>
+            </a:r>
+            <a:endParaRPr kumimoji="1" lang="en-US" altLang="ja-JP" sz="2000" dirty="0">
+              <a:solidFill>
+                <a:schemeClr val="accent4">
+                  <a:lumMod val="75000"/>
+                </a:schemeClr>
+              </a:solidFill>
+              <a:latin typeface="メイリオ" panose="020B0604030504040204" pitchFamily="50" charset="-128"/>
+              <a:ea typeface="メイリオ" panose="020B0604030504040204" pitchFamily="50" charset="-128"/>
+            </a:endParaRPr>
+          </a:p>
+          <a:p>
+            <a:pPr algn="l"/>
+            <a:r>
+              <a:rPr lang="ja-JP" altLang="en-US" sz="1200" dirty="0">
+                <a:latin typeface="メイリオ" panose="020B0604030504040204" pitchFamily="50" charset="-128"/>
+                <a:ea typeface="メイリオ" panose="020B0604030504040204" pitchFamily="50" charset="-128"/>
+              </a:rPr>
+              <a:t>変数名：</a:t>
+            </a:r>
+            <a:endParaRPr lang="en-US" altLang="ja-JP" sz="1200" dirty="0">
+              <a:latin typeface="メイリオ" panose="020B0604030504040204" pitchFamily="50" charset="-128"/>
+              <a:ea typeface="メイリオ" panose="020B0604030504040204" pitchFamily="50" charset="-128"/>
+            </a:endParaRPr>
+          </a:p>
+        </p:txBody>
+      </p:sp>
+      <p:cxnSp>
+        <p:nvCxnSpPr>
+          <p:cNvPr id="13" name="直線矢印コネクタ 12">
+            <a:extLst>
+              <a:ext uri="{FF2B5EF4-FFF2-40B4-BE49-F238E27FC236}">
+                <a16:creationId xmlns:a16="http://schemas.microsoft.com/office/drawing/2014/main" id="{74FF8975-518B-E7D8-023D-CCCCAEBC6F95}"/>
+              </a:ext>
+            </a:extLst>
+          </p:cNvPr>
+          <p:cNvCxnSpPr>
+            <a:cxnSpLocks/>
+          </p:cNvCxnSpPr>
+          <p:nvPr/>
+        </p:nvCxnSpPr>
+        <p:spPr>
+          <a:xfrm>
+            <a:off x="4548393" y="1472982"/>
+            <a:ext cx="581891" cy="0"/>
+          </a:xfrm>
+          <a:prstGeom prst="straightConnector1">
+            <a:avLst/>
+          </a:prstGeom>
+          <a:ln w="57150">
+            <a:solidFill>
+              <a:schemeClr val="accent4">
+                <a:lumMod val="75000"/>
+              </a:schemeClr>
+            </a:solidFill>
+            <a:tailEnd type="triangle"/>
+          </a:ln>
+        </p:spPr>
+        <p:style>
+          <a:lnRef idx="1">
+            <a:schemeClr val="accent1"/>
+          </a:lnRef>
+          <a:fillRef idx="0">
+            <a:schemeClr val="accent1"/>
+          </a:fillRef>
+          <a:effectRef idx="0">
+            <a:schemeClr val="accent1"/>
+          </a:effectRef>
+          <a:fontRef idx="minor">
+            <a:schemeClr val="tx1"/>
+          </a:fontRef>
+        </p:style>
+      </p:cxnSp>
     </p:spTree>
     <p:extLst>
       <p:ext uri="{BB962C8B-B14F-4D97-AF65-F5344CB8AC3E}">
-        <p14:creationId xmlns:p14="http://schemas.microsoft.com/office/powerpoint/2010/main" val="1134685979"/>
+        <p14:creationId xmlns:p14="http://schemas.microsoft.com/office/powerpoint/2010/main" val="1088393112"/>
       </p:ext>
     </p:extLst>
   </p:cSld>
@@ -13886,7 +18844,7 @@
           <a:p>
             <a:pPr algn="l"/>
             <a:r>
-              <a:rPr kumimoji="1" lang="ja-JP" altLang="en-US" sz="3000" b="1" dirty="0">
+              <a:rPr lang="ja-JP" altLang="en-US" sz="3000" b="1" dirty="0">
                 <a:solidFill>
                   <a:schemeClr val="tx1">
                     <a:lumMod val="65000"/>
@@ -13896,17 +18854,30 @@
                 <a:latin typeface="メイリオ" panose="020B0604030504040204" pitchFamily="50" charset="-128"/>
                 <a:ea typeface="メイリオ" panose="020B0604030504040204" pitchFamily="50" charset="-128"/>
               </a:rPr>
-              <a:t>疑問点</a:t>
+              <a:t>１０</a:t>
+            </a:r>
+            <a:r>
+              <a:rPr kumimoji="1" lang="ja-JP" altLang="en-US" sz="3000" b="1" dirty="0">
+                <a:solidFill>
+                  <a:schemeClr val="tx1">
+                    <a:lumMod val="65000"/>
+                    <a:lumOff val="35000"/>
+                  </a:schemeClr>
+                </a:solidFill>
+                <a:latin typeface="メイリオ" panose="020B0604030504040204" pitchFamily="50" charset="-128"/>
+                <a:ea typeface="メイリオ" panose="020B0604030504040204" pitchFamily="50" charset="-128"/>
+              </a:rPr>
+              <a:t>章　スピード　最終コード</a:t>
             </a:r>
           </a:p>
         </p:txBody>
       </p:sp>
       <p:sp>
         <p:nvSpPr>
-          <p:cNvPr id="4" name="正方形/長方形 3">
+          <p:cNvPr id="11" name="正方形/長方形 10">
             <a:extLst>
               <a:ext uri="{FF2B5EF4-FFF2-40B4-BE49-F238E27FC236}">
-                <a16:creationId xmlns:a16="http://schemas.microsoft.com/office/drawing/2014/main" id="{578782C7-6070-7C3A-DAB7-3101F4C6ED5C}"/>
+                <a16:creationId xmlns:a16="http://schemas.microsoft.com/office/drawing/2014/main" id="{661A3A95-316A-208D-1006-9B4CAF8277CA}"/>
               </a:ext>
             </a:extLst>
           </p:cNvPr>
@@ -13915,16 +18886,16 @@
         </p:nvSpPr>
         <p:spPr>
           <a:xfrm>
-            <a:off x="884439" y="1109610"/>
-            <a:ext cx="9440262" cy="5528957"/>
+            <a:off x="528181" y="892099"/>
+            <a:ext cx="11135638" cy="5965902"/>
           </a:xfrm>
           <a:prstGeom prst="rect">
             <a:avLst/>
           </a:prstGeom>
           <a:solidFill>
             <a:schemeClr val="accent4">
-              <a:lumMod val="40000"/>
-              <a:lumOff val="60000"/>
+              <a:lumMod val="20000"/>
+              <a:lumOff val="80000"/>
             </a:schemeClr>
           </a:solidFill>
           <a:ln>
@@ -13955,259 +18926,10 @@
           </a:p>
         </p:txBody>
       </p:sp>
-      <p:sp>
-        <p:nvSpPr>
-          <p:cNvPr id="3" name="字幕 2">
-            <a:extLst>
-              <a:ext uri="{FF2B5EF4-FFF2-40B4-BE49-F238E27FC236}">
-                <a16:creationId xmlns:a16="http://schemas.microsoft.com/office/drawing/2014/main" id="{EF422FEA-2F34-70ED-56A9-01A65A2AD142}"/>
-              </a:ext>
-            </a:extLst>
-          </p:cNvPr>
-          <p:cNvSpPr>
-            <a:spLocks noGrp="1"/>
-          </p:cNvSpPr>
-          <p:nvPr>
-            <p:ph type="subTitle" idx="1"/>
-          </p:nvPr>
-        </p:nvSpPr>
-        <p:spPr>
-          <a:xfrm>
-            <a:off x="884439" y="1097282"/>
-            <a:ext cx="9391483" cy="5446283"/>
-          </a:xfrm>
-        </p:spPr>
-        <p:txBody>
-          <a:bodyPr>
-            <a:normAutofit/>
-          </a:bodyPr>
-          <a:lstStyle/>
-          <a:p>
-            <a:pPr algn="l"/>
-            <a:r>
-              <a:rPr kumimoji="1" lang="ja-JP" altLang="en-US" sz="2000" dirty="0">
-                <a:solidFill>
-                  <a:schemeClr val="accent4">
-                    <a:lumMod val="75000"/>
-                  </a:schemeClr>
-                </a:solidFill>
-                <a:latin typeface="メイリオ" panose="020B0604030504040204" pitchFamily="50" charset="-128"/>
-                <a:ea typeface="メイリオ" panose="020B0604030504040204" pitchFamily="50" charset="-128"/>
-              </a:rPr>
-              <a:t>配列の順番が０からではない理由</a:t>
-            </a:r>
-            <a:endParaRPr kumimoji="1" lang="en-US" altLang="ja-JP" sz="2000" dirty="0">
-              <a:solidFill>
-                <a:schemeClr val="accent4">
-                  <a:lumMod val="75000"/>
-                </a:schemeClr>
-              </a:solidFill>
-              <a:latin typeface="メイリオ" panose="020B0604030504040204" pitchFamily="50" charset="-128"/>
-              <a:ea typeface="メイリオ" panose="020B0604030504040204" pitchFamily="50" charset="-128"/>
-            </a:endParaRPr>
-          </a:p>
-          <a:p>
-            <a:pPr algn="l"/>
-            <a:endParaRPr lang="en-US" altLang="ja-JP" sz="2000" dirty="0">
-              <a:solidFill>
-                <a:schemeClr val="accent4">
-                  <a:lumMod val="75000"/>
-                </a:schemeClr>
-              </a:solidFill>
-              <a:latin typeface="メイリオ" panose="020B0604030504040204" pitchFamily="50" charset="-128"/>
-              <a:ea typeface="メイリオ" panose="020B0604030504040204" pitchFamily="50" charset="-128"/>
-            </a:endParaRPr>
-          </a:p>
-          <a:p>
-            <a:pPr algn="l"/>
-            <a:r>
-              <a:rPr kumimoji="1" lang="en-US" altLang="ja-JP" sz="2000" dirty="0" err="1">
-                <a:solidFill>
-                  <a:schemeClr val="accent4">
-                    <a:lumMod val="75000"/>
-                  </a:schemeClr>
-                </a:solidFill>
-                <a:latin typeface="メイリオ" panose="020B0604030504040204" pitchFamily="50" charset="-128"/>
-                <a:ea typeface="メイリオ" panose="020B0604030504040204" pitchFamily="50" charset="-128"/>
-              </a:rPr>
-              <a:t>R,Python</a:t>
-            </a:r>
-            <a:r>
-              <a:rPr kumimoji="1" lang="ja-JP" altLang="en-US" sz="2000" dirty="0">
-                <a:solidFill>
-                  <a:schemeClr val="accent4">
-                    <a:lumMod val="75000"/>
-                  </a:schemeClr>
-                </a:solidFill>
-                <a:latin typeface="メイリオ" panose="020B0604030504040204" pitchFamily="50" charset="-128"/>
-                <a:ea typeface="メイリオ" panose="020B0604030504040204" pitchFamily="50" charset="-128"/>
-              </a:rPr>
-              <a:t>が肩を宣言する必要がない共通点に関して</a:t>
-            </a:r>
-            <a:endParaRPr kumimoji="1" lang="en-US" altLang="ja-JP" sz="2000" dirty="0">
-              <a:solidFill>
-                <a:schemeClr val="accent4">
-                  <a:lumMod val="75000"/>
-                </a:schemeClr>
-              </a:solidFill>
-              <a:latin typeface="メイリオ" panose="020B0604030504040204" pitchFamily="50" charset="-128"/>
-              <a:ea typeface="メイリオ" panose="020B0604030504040204" pitchFamily="50" charset="-128"/>
-            </a:endParaRPr>
-          </a:p>
-          <a:p>
-            <a:pPr algn="l"/>
-            <a:endParaRPr lang="en-US" altLang="ja-JP" sz="2000" dirty="0">
-              <a:solidFill>
-                <a:schemeClr val="accent4">
-                  <a:lumMod val="75000"/>
-                </a:schemeClr>
-              </a:solidFill>
-              <a:latin typeface="メイリオ" panose="020B0604030504040204" pitchFamily="50" charset="-128"/>
-              <a:ea typeface="メイリオ" panose="020B0604030504040204" pitchFamily="50" charset="-128"/>
-            </a:endParaRPr>
-          </a:p>
-          <a:p>
-            <a:pPr algn="l"/>
-            <a:r>
-              <a:rPr kumimoji="1" lang="en-US" altLang="ja-JP" sz="2000" dirty="0">
-                <a:solidFill>
-                  <a:schemeClr val="accent4">
-                    <a:lumMod val="75000"/>
-                  </a:schemeClr>
-                </a:solidFill>
-                <a:latin typeface="メイリオ" panose="020B0604030504040204" pitchFamily="50" charset="-128"/>
-                <a:ea typeface="メイリオ" panose="020B0604030504040204" pitchFamily="50" charset="-128"/>
-              </a:rPr>
-              <a:t>A,B,C </a:t>
-            </a:r>
-            <a:r>
-              <a:rPr kumimoji="1" lang="ja-JP" altLang="en-US" sz="2000" dirty="0">
-                <a:solidFill>
-                  <a:schemeClr val="accent4">
-                    <a:lumMod val="75000"/>
-                  </a:schemeClr>
-                </a:solidFill>
-                <a:latin typeface="メイリオ" panose="020B0604030504040204" pitchFamily="50" charset="-128"/>
-                <a:ea typeface="メイリオ" panose="020B0604030504040204" pitchFamily="50" charset="-128"/>
-              </a:rPr>
-              <a:t>と</a:t>
-            </a:r>
-            <a:r>
-              <a:rPr kumimoji="1" lang="en-US" altLang="ja-JP" sz="2000" dirty="0">
-                <a:solidFill>
-                  <a:schemeClr val="accent4">
-                    <a:lumMod val="75000"/>
-                  </a:schemeClr>
-                </a:solidFill>
-                <a:latin typeface="メイリオ" panose="020B0604030504040204" pitchFamily="50" charset="-128"/>
-                <a:ea typeface="メイリオ" panose="020B0604030504040204" pitchFamily="50" charset="-128"/>
-              </a:rPr>
-              <a:t>B,A</a:t>
-            </a:r>
-            <a:r>
-              <a:rPr lang="en-US" altLang="ja-JP" sz="2000" dirty="0">
-                <a:solidFill>
-                  <a:schemeClr val="accent4">
-                    <a:lumMod val="75000"/>
-                  </a:schemeClr>
-                </a:solidFill>
-                <a:latin typeface="メイリオ" panose="020B0604030504040204" pitchFamily="50" charset="-128"/>
-                <a:ea typeface="メイリオ" panose="020B0604030504040204" pitchFamily="50" charset="-128"/>
-              </a:rPr>
-              <a:t>,C</a:t>
-            </a:r>
-            <a:r>
-              <a:rPr lang="ja-JP" altLang="en-US" sz="2000" dirty="0">
-                <a:solidFill>
-                  <a:schemeClr val="accent4">
-                    <a:lumMod val="75000"/>
-                  </a:schemeClr>
-                </a:solidFill>
-                <a:latin typeface="メイリオ" panose="020B0604030504040204" pitchFamily="50" charset="-128"/>
-                <a:ea typeface="メイリオ" panose="020B0604030504040204" pitchFamily="50" charset="-128"/>
-              </a:rPr>
-              <a:t>が出てくるが、これを一つにまとめる方法はないのか。（後で考える）</a:t>
-            </a:r>
-            <a:endParaRPr lang="en-US" altLang="ja-JP" sz="2000" dirty="0">
-              <a:solidFill>
-                <a:schemeClr val="accent4">
-                  <a:lumMod val="75000"/>
-                </a:schemeClr>
-              </a:solidFill>
-              <a:latin typeface="メイリオ" panose="020B0604030504040204" pitchFamily="50" charset="-128"/>
-              <a:ea typeface="メイリオ" panose="020B0604030504040204" pitchFamily="50" charset="-128"/>
-            </a:endParaRPr>
-          </a:p>
-          <a:p>
-            <a:pPr algn="l"/>
-            <a:endParaRPr kumimoji="1" lang="en-US" altLang="ja-JP" sz="2000" dirty="0">
-              <a:solidFill>
-                <a:schemeClr val="accent4">
-                  <a:lumMod val="75000"/>
-                </a:schemeClr>
-              </a:solidFill>
-              <a:latin typeface="メイリオ" panose="020B0604030504040204" pitchFamily="50" charset="-128"/>
-              <a:ea typeface="メイリオ" panose="020B0604030504040204" pitchFamily="50" charset="-128"/>
-            </a:endParaRPr>
-          </a:p>
-          <a:p>
-            <a:pPr algn="l"/>
-            <a:endParaRPr lang="en-US" altLang="ja-JP" sz="2000" dirty="0">
-              <a:solidFill>
-                <a:schemeClr val="accent4">
-                  <a:lumMod val="75000"/>
-                </a:schemeClr>
-              </a:solidFill>
-              <a:latin typeface="メイリオ" panose="020B0604030504040204" pitchFamily="50" charset="-128"/>
-              <a:ea typeface="メイリオ" panose="020B0604030504040204" pitchFamily="50" charset="-128"/>
-            </a:endParaRPr>
-          </a:p>
-          <a:p>
-            <a:pPr algn="l"/>
-            <a:r>
-              <a:rPr kumimoji="1" lang="ja-JP" altLang="en-US" sz="2000" dirty="0">
-                <a:solidFill>
-                  <a:srgbClr val="C00000"/>
-                </a:solidFill>
-                <a:latin typeface="メイリオ" panose="020B0604030504040204" pitchFamily="50" charset="-128"/>
-                <a:ea typeface="メイリオ" panose="020B0604030504040204" pitchFamily="50" charset="-128"/>
-              </a:rPr>
-              <a:t>あとで！！！</a:t>
-            </a:r>
-            <a:r>
-              <a:rPr kumimoji="1" lang="en-US" altLang="ja-JP" sz="2000" dirty="0">
-                <a:solidFill>
-                  <a:srgbClr val="C00000"/>
-                </a:solidFill>
-                <a:latin typeface="メイリオ" panose="020B0604030504040204" pitchFamily="50" charset="-128"/>
-                <a:ea typeface="メイリオ" panose="020B0604030504040204" pitchFamily="50" charset="-128"/>
-              </a:rPr>
-              <a:t>Factor</a:t>
-            </a:r>
-            <a:r>
-              <a:rPr kumimoji="1" lang="ja-JP" altLang="en-US" sz="2000" dirty="0">
-                <a:solidFill>
-                  <a:srgbClr val="C00000"/>
-                </a:solidFill>
-                <a:latin typeface="メイリオ" panose="020B0604030504040204" pitchFamily="50" charset="-128"/>
-                <a:ea typeface="メイリオ" panose="020B0604030504040204" pitchFamily="50" charset="-128"/>
-              </a:rPr>
-              <a:t>！！！絶対調べる！！！！</a:t>
-            </a:r>
-            <a:endParaRPr kumimoji="1" lang="en-US" altLang="ja-JP" sz="2000" dirty="0">
-              <a:solidFill>
-                <a:srgbClr val="C00000"/>
-              </a:solidFill>
-              <a:latin typeface="メイリオ" panose="020B0604030504040204" pitchFamily="50" charset="-128"/>
-              <a:ea typeface="メイリオ" panose="020B0604030504040204" pitchFamily="50" charset="-128"/>
-            </a:endParaRPr>
-          </a:p>
-        </p:txBody>
-      </p:sp>
     </p:spTree>
     <p:extLst>
       <p:ext uri="{BB962C8B-B14F-4D97-AF65-F5344CB8AC3E}">
-        <p14:creationId xmlns:p14="http://schemas.microsoft.com/office/powerpoint/2010/main" val="2135243812"/>
+        <p14:creationId xmlns:p14="http://schemas.microsoft.com/office/powerpoint/2010/main" val="1134685979"/>
       </p:ext>
     </p:extLst>
   </p:cSld>
@@ -14274,7 +18996,7 @@
                 <a:latin typeface="メイリオ" panose="020B0604030504040204" pitchFamily="50" charset="-128"/>
                 <a:ea typeface="メイリオ" panose="020B0604030504040204" pitchFamily="50" charset="-128"/>
               </a:rPr>
-              <a:t>感想</a:t>
+              <a:t>疑問点</a:t>
             </a:r>
           </a:p>
         </p:txBody>
@@ -14363,6 +19085,384 @@
           <a:p>
             <a:pPr algn="l"/>
             <a:r>
+              <a:rPr kumimoji="1" lang="ja-JP" altLang="en-US" sz="2000" dirty="0">
+                <a:solidFill>
+                  <a:schemeClr val="accent4">
+                    <a:lumMod val="75000"/>
+                  </a:schemeClr>
+                </a:solidFill>
+                <a:latin typeface="メイリオ" panose="020B0604030504040204" pitchFamily="50" charset="-128"/>
+                <a:ea typeface="メイリオ" panose="020B0604030504040204" pitchFamily="50" charset="-128"/>
+              </a:rPr>
+              <a:t>配列の順番が０からではない理由</a:t>
+            </a:r>
+            <a:endParaRPr kumimoji="1" lang="en-US" altLang="ja-JP" sz="2000" dirty="0">
+              <a:solidFill>
+                <a:schemeClr val="accent4">
+                  <a:lumMod val="75000"/>
+                </a:schemeClr>
+              </a:solidFill>
+              <a:latin typeface="メイリオ" panose="020B0604030504040204" pitchFamily="50" charset="-128"/>
+              <a:ea typeface="メイリオ" panose="020B0604030504040204" pitchFamily="50" charset="-128"/>
+            </a:endParaRPr>
+          </a:p>
+          <a:p>
+            <a:pPr algn="l"/>
+            <a:endParaRPr lang="en-US" altLang="ja-JP" sz="2000" dirty="0">
+              <a:solidFill>
+                <a:schemeClr val="accent4">
+                  <a:lumMod val="75000"/>
+                </a:schemeClr>
+              </a:solidFill>
+              <a:latin typeface="メイリオ" panose="020B0604030504040204" pitchFamily="50" charset="-128"/>
+              <a:ea typeface="メイリオ" panose="020B0604030504040204" pitchFamily="50" charset="-128"/>
+            </a:endParaRPr>
+          </a:p>
+          <a:p>
+            <a:pPr algn="l"/>
+            <a:r>
+              <a:rPr kumimoji="1" lang="en-US" altLang="ja-JP" sz="2000" dirty="0" err="1">
+                <a:solidFill>
+                  <a:schemeClr val="accent4">
+                    <a:lumMod val="75000"/>
+                  </a:schemeClr>
+                </a:solidFill>
+                <a:latin typeface="メイリオ" panose="020B0604030504040204" pitchFamily="50" charset="-128"/>
+                <a:ea typeface="メイリオ" panose="020B0604030504040204" pitchFamily="50" charset="-128"/>
+              </a:rPr>
+              <a:t>R,Python</a:t>
+            </a:r>
+            <a:r>
+              <a:rPr kumimoji="1" lang="ja-JP" altLang="en-US" sz="2000" dirty="0">
+                <a:solidFill>
+                  <a:schemeClr val="accent4">
+                    <a:lumMod val="75000"/>
+                  </a:schemeClr>
+                </a:solidFill>
+                <a:latin typeface="メイリオ" panose="020B0604030504040204" pitchFamily="50" charset="-128"/>
+                <a:ea typeface="メイリオ" panose="020B0604030504040204" pitchFamily="50" charset="-128"/>
+              </a:rPr>
+              <a:t>が肩を宣言する必要がない共通点に関して</a:t>
+            </a:r>
+            <a:endParaRPr kumimoji="1" lang="en-US" altLang="ja-JP" sz="2000" dirty="0">
+              <a:solidFill>
+                <a:schemeClr val="accent4">
+                  <a:lumMod val="75000"/>
+                </a:schemeClr>
+              </a:solidFill>
+              <a:latin typeface="メイリオ" panose="020B0604030504040204" pitchFamily="50" charset="-128"/>
+              <a:ea typeface="メイリオ" panose="020B0604030504040204" pitchFamily="50" charset="-128"/>
+            </a:endParaRPr>
+          </a:p>
+          <a:p>
+            <a:pPr algn="l"/>
+            <a:endParaRPr lang="en-US" altLang="ja-JP" sz="2000" dirty="0">
+              <a:solidFill>
+                <a:schemeClr val="accent4">
+                  <a:lumMod val="75000"/>
+                </a:schemeClr>
+              </a:solidFill>
+              <a:latin typeface="メイリオ" panose="020B0604030504040204" pitchFamily="50" charset="-128"/>
+              <a:ea typeface="メイリオ" panose="020B0604030504040204" pitchFamily="50" charset="-128"/>
+            </a:endParaRPr>
+          </a:p>
+          <a:p>
+            <a:pPr algn="l"/>
+            <a:r>
+              <a:rPr kumimoji="1" lang="en-US" altLang="ja-JP" sz="2000" dirty="0">
+                <a:solidFill>
+                  <a:schemeClr val="accent4">
+                    <a:lumMod val="75000"/>
+                  </a:schemeClr>
+                </a:solidFill>
+                <a:latin typeface="メイリオ" panose="020B0604030504040204" pitchFamily="50" charset="-128"/>
+                <a:ea typeface="メイリオ" panose="020B0604030504040204" pitchFamily="50" charset="-128"/>
+              </a:rPr>
+              <a:t>A,B,C </a:t>
+            </a:r>
+            <a:r>
+              <a:rPr kumimoji="1" lang="ja-JP" altLang="en-US" sz="2000" dirty="0">
+                <a:solidFill>
+                  <a:schemeClr val="accent4">
+                    <a:lumMod val="75000"/>
+                  </a:schemeClr>
+                </a:solidFill>
+                <a:latin typeface="メイリオ" panose="020B0604030504040204" pitchFamily="50" charset="-128"/>
+                <a:ea typeface="メイリオ" panose="020B0604030504040204" pitchFamily="50" charset="-128"/>
+              </a:rPr>
+              <a:t>と</a:t>
+            </a:r>
+            <a:r>
+              <a:rPr kumimoji="1" lang="en-US" altLang="ja-JP" sz="2000" dirty="0">
+                <a:solidFill>
+                  <a:schemeClr val="accent4">
+                    <a:lumMod val="75000"/>
+                  </a:schemeClr>
+                </a:solidFill>
+                <a:latin typeface="メイリオ" panose="020B0604030504040204" pitchFamily="50" charset="-128"/>
+                <a:ea typeface="メイリオ" panose="020B0604030504040204" pitchFamily="50" charset="-128"/>
+              </a:rPr>
+              <a:t>B,A</a:t>
+            </a:r>
+            <a:r>
+              <a:rPr lang="en-US" altLang="ja-JP" sz="2000" dirty="0">
+                <a:solidFill>
+                  <a:schemeClr val="accent4">
+                    <a:lumMod val="75000"/>
+                  </a:schemeClr>
+                </a:solidFill>
+                <a:latin typeface="メイリオ" panose="020B0604030504040204" pitchFamily="50" charset="-128"/>
+                <a:ea typeface="メイリオ" panose="020B0604030504040204" pitchFamily="50" charset="-128"/>
+              </a:rPr>
+              <a:t>,C</a:t>
+            </a:r>
+            <a:r>
+              <a:rPr lang="ja-JP" altLang="en-US" sz="2000" dirty="0">
+                <a:solidFill>
+                  <a:schemeClr val="accent4">
+                    <a:lumMod val="75000"/>
+                  </a:schemeClr>
+                </a:solidFill>
+                <a:latin typeface="メイリオ" panose="020B0604030504040204" pitchFamily="50" charset="-128"/>
+                <a:ea typeface="メイリオ" panose="020B0604030504040204" pitchFamily="50" charset="-128"/>
+              </a:rPr>
+              <a:t>が出てくるが、これを一つにまとめる方法はないのか。（後で考える）</a:t>
+            </a:r>
+            <a:endParaRPr lang="en-US" altLang="ja-JP" sz="2000" dirty="0">
+              <a:solidFill>
+                <a:schemeClr val="accent4">
+                  <a:lumMod val="75000"/>
+                </a:schemeClr>
+              </a:solidFill>
+              <a:latin typeface="メイリオ" panose="020B0604030504040204" pitchFamily="50" charset="-128"/>
+              <a:ea typeface="メイリオ" panose="020B0604030504040204" pitchFamily="50" charset="-128"/>
+            </a:endParaRPr>
+          </a:p>
+          <a:p>
+            <a:pPr algn="l"/>
+            <a:endParaRPr kumimoji="1" lang="en-US" altLang="ja-JP" sz="2000" dirty="0">
+              <a:solidFill>
+                <a:schemeClr val="accent4">
+                  <a:lumMod val="75000"/>
+                </a:schemeClr>
+              </a:solidFill>
+              <a:latin typeface="メイリオ" panose="020B0604030504040204" pitchFamily="50" charset="-128"/>
+              <a:ea typeface="メイリオ" panose="020B0604030504040204" pitchFamily="50" charset="-128"/>
+            </a:endParaRPr>
+          </a:p>
+          <a:p>
+            <a:pPr algn="l"/>
+            <a:endParaRPr lang="en-US" altLang="ja-JP" sz="2000" dirty="0">
+              <a:solidFill>
+                <a:schemeClr val="accent4">
+                  <a:lumMod val="75000"/>
+                </a:schemeClr>
+              </a:solidFill>
+              <a:latin typeface="メイリオ" panose="020B0604030504040204" pitchFamily="50" charset="-128"/>
+              <a:ea typeface="メイリオ" panose="020B0604030504040204" pitchFamily="50" charset="-128"/>
+            </a:endParaRPr>
+          </a:p>
+          <a:p>
+            <a:pPr algn="l"/>
+            <a:r>
+              <a:rPr kumimoji="1" lang="ja-JP" altLang="en-US" sz="2000" dirty="0">
+                <a:solidFill>
+                  <a:srgbClr val="C00000"/>
+                </a:solidFill>
+                <a:latin typeface="メイリオ" panose="020B0604030504040204" pitchFamily="50" charset="-128"/>
+                <a:ea typeface="メイリオ" panose="020B0604030504040204" pitchFamily="50" charset="-128"/>
+              </a:rPr>
+              <a:t>あとで！！！</a:t>
+            </a:r>
+            <a:r>
+              <a:rPr kumimoji="1" lang="en-US" altLang="ja-JP" sz="2000" dirty="0">
+                <a:solidFill>
+                  <a:srgbClr val="C00000"/>
+                </a:solidFill>
+                <a:latin typeface="メイリオ" panose="020B0604030504040204" pitchFamily="50" charset="-128"/>
+                <a:ea typeface="メイリオ" panose="020B0604030504040204" pitchFamily="50" charset="-128"/>
+              </a:rPr>
+              <a:t>Factor</a:t>
+            </a:r>
+            <a:r>
+              <a:rPr kumimoji="1" lang="ja-JP" altLang="en-US" sz="2000" dirty="0">
+                <a:solidFill>
+                  <a:srgbClr val="C00000"/>
+                </a:solidFill>
+                <a:latin typeface="メイリオ" panose="020B0604030504040204" pitchFamily="50" charset="-128"/>
+                <a:ea typeface="メイリオ" panose="020B0604030504040204" pitchFamily="50" charset="-128"/>
+              </a:rPr>
+              <a:t>！！！絶対調べる！！！！</a:t>
+            </a:r>
+            <a:endParaRPr kumimoji="1" lang="en-US" altLang="ja-JP" sz="2000" dirty="0">
+              <a:solidFill>
+                <a:srgbClr val="C00000"/>
+              </a:solidFill>
+              <a:latin typeface="メイリオ" panose="020B0604030504040204" pitchFamily="50" charset="-128"/>
+              <a:ea typeface="メイリオ" panose="020B0604030504040204" pitchFamily="50" charset="-128"/>
+            </a:endParaRPr>
+          </a:p>
+        </p:txBody>
+      </p:sp>
+    </p:spTree>
+    <p:extLst>
+      <p:ext uri="{BB962C8B-B14F-4D97-AF65-F5344CB8AC3E}">
+        <p14:creationId xmlns:p14="http://schemas.microsoft.com/office/powerpoint/2010/main" val="2135243812"/>
+      </p:ext>
+    </p:extLst>
+  </p:cSld>
+  <p:clrMapOvr>
+    <a:masterClrMapping/>
+  </p:clrMapOvr>
+</p:sld>
+</file>
+
+<file path=ppt/slides/slide22.xml><?xml version="1.0" encoding="utf-8"?>
+<p:sld xmlns:a="http://schemas.openxmlformats.org/drawingml/2006/main" xmlns:r="http://schemas.openxmlformats.org/officeDocument/2006/relationships" xmlns:p="http://schemas.openxmlformats.org/presentationml/2006/main">
+  <p:cSld>
+    <p:spTree>
+      <p:nvGrpSpPr>
+        <p:cNvPr id="1" name=""/>
+        <p:cNvGrpSpPr/>
+        <p:nvPr/>
+      </p:nvGrpSpPr>
+      <p:grpSpPr>
+        <a:xfrm>
+          <a:off x="0" y="0"/>
+          <a:ext cx="0" cy="0"/>
+          <a:chOff x="0" y="0"/>
+          <a:chExt cx="0" cy="0"/>
+        </a:xfrm>
+      </p:grpSpPr>
+      <p:sp>
+        <p:nvSpPr>
+          <p:cNvPr id="2" name="タイトル 1">
+            <a:extLst>
+              <a:ext uri="{FF2B5EF4-FFF2-40B4-BE49-F238E27FC236}">
+                <a16:creationId xmlns:a16="http://schemas.microsoft.com/office/drawing/2014/main" id="{8F92D15D-6ED6-F1E2-415D-C5D0D0CAAC83}"/>
+              </a:ext>
+            </a:extLst>
+          </p:cNvPr>
+          <p:cNvSpPr>
+            <a:spLocks noGrp="1"/>
+          </p:cNvSpPr>
+          <p:nvPr>
+            <p:ph type="ctrTitle"/>
+          </p:nvPr>
+        </p:nvSpPr>
+        <p:spPr>
+          <a:xfrm>
+            <a:off x="528181" y="314435"/>
+            <a:ext cx="5891408" cy="700173"/>
+          </a:xfrm>
+        </p:spPr>
+        <p:txBody>
+          <a:bodyPr>
+            <a:normAutofit/>
+          </a:bodyPr>
+          <a:lstStyle/>
+          <a:p>
+            <a:pPr algn="l"/>
+            <a:r>
+              <a:rPr kumimoji="1" lang="ja-JP" altLang="en-US" sz="3000" b="1" dirty="0">
+                <a:solidFill>
+                  <a:schemeClr val="tx1">
+                    <a:lumMod val="65000"/>
+                    <a:lumOff val="35000"/>
+                  </a:schemeClr>
+                </a:solidFill>
+                <a:latin typeface="メイリオ" panose="020B0604030504040204" pitchFamily="50" charset="-128"/>
+                <a:ea typeface="メイリオ" panose="020B0604030504040204" pitchFamily="50" charset="-128"/>
+              </a:rPr>
+              <a:t>感想</a:t>
+            </a:r>
+          </a:p>
+        </p:txBody>
+      </p:sp>
+      <p:sp>
+        <p:nvSpPr>
+          <p:cNvPr id="4" name="正方形/長方形 3">
+            <a:extLst>
+              <a:ext uri="{FF2B5EF4-FFF2-40B4-BE49-F238E27FC236}">
+                <a16:creationId xmlns:a16="http://schemas.microsoft.com/office/drawing/2014/main" id="{578782C7-6070-7C3A-DAB7-3101F4C6ED5C}"/>
+              </a:ext>
+            </a:extLst>
+          </p:cNvPr>
+          <p:cNvSpPr/>
+          <p:nvPr/>
+        </p:nvSpPr>
+        <p:spPr>
+          <a:xfrm>
+            <a:off x="884439" y="1109610"/>
+            <a:ext cx="9440262" cy="5528957"/>
+          </a:xfrm>
+          <a:prstGeom prst="rect">
+            <a:avLst/>
+          </a:prstGeom>
+          <a:solidFill>
+            <a:schemeClr val="accent4">
+              <a:lumMod val="40000"/>
+              <a:lumOff val="60000"/>
+            </a:schemeClr>
+          </a:solidFill>
+          <a:ln>
+            <a:noFill/>
+          </a:ln>
+        </p:spPr>
+        <p:style>
+          <a:lnRef idx="2">
+            <a:schemeClr val="accent1">
+              <a:shade val="15000"/>
+            </a:schemeClr>
+          </a:lnRef>
+          <a:fillRef idx="1">
+            <a:schemeClr val="accent1"/>
+          </a:fillRef>
+          <a:effectRef idx="0">
+            <a:schemeClr val="accent1"/>
+          </a:effectRef>
+          <a:fontRef idx="minor">
+            <a:schemeClr val="lt1"/>
+          </a:fontRef>
+        </p:style>
+        <p:txBody>
+          <a:bodyPr rtlCol="0" anchor="t"/>
+          <a:lstStyle/>
+          <a:p>
+            <a:endParaRPr kumimoji="1" lang="ja-JP" altLang="en-US" dirty="0"/>
+          </a:p>
+        </p:txBody>
+      </p:sp>
+      <p:sp>
+        <p:nvSpPr>
+          <p:cNvPr id="3" name="字幕 2">
+            <a:extLst>
+              <a:ext uri="{FF2B5EF4-FFF2-40B4-BE49-F238E27FC236}">
+                <a16:creationId xmlns:a16="http://schemas.microsoft.com/office/drawing/2014/main" id="{EF422FEA-2F34-70ED-56A9-01A65A2AD142}"/>
+              </a:ext>
+            </a:extLst>
+          </p:cNvPr>
+          <p:cNvSpPr>
+            <a:spLocks noGrp="1"/>
+          </p:cNvSpPr>
+          <p:nvPr>
+            <p:ph type="subTitle" idx="1"/>
+          </p:nvPr>
+        </p:nvSpPr>
+        <p:spPr>
+          <a:xfrm>
+            <a:off x="884439" y="1097282"/>
+            <a:ext cx="9391483" cy="5446283"/>
+          </a:xfrm>
+        </p:spPr>
+        <p:txBody>
+          <a:bodyPr>
+            <a:normAutofit/>
+          </a:bodyPr>
+          <a:lstStyle/>
+          <a:p>
+            <a:pPr algn="l"/>
+            <a:r>
               <a:rPr kumimoji="1" lang="en-US" altLang="ja-JP" sz="2000" dirty="0">
                 <a:solidFill>
                   <a:schemeClr val="accent4">
@@ -14606,7 +19706,7 @@
 </p:sld>
 </file>
 
-<file path=ppt/slides/slide22.xml><?xml version="1.0" encoding="utf-8"?>
+<file path=ppt/slides/slide23.xml><?xml version="1.0" encoding="utf-8"?>
 <p:sld xmlns:a="http://schemas.openxmlformats.org/drawingml/2006/main" xmlns:r="http://schemas.openxmlformats.org/officeDocument/2006/relationships" xmlns:p="http://schemas.openxmlformats.org/presentationml/2006/main">
   <p:cSld>
     <p:spTree>
@@ -22101,4 +27201,299 @@
     </a:ext>
   </a:extLst>
 </a:theme>
+</file>
+
+<file path=ppt/theme/theme2.xml><?xml version="1.0" encoding="utf-8"?>
+<a:theme xmlns:a="http://schemas.openxmlformats.org/drawingml/2006/main" name="Office テーマ">
+  <a:themeElements>
+    <a:clrScheme name="Office">
+      <a:dk1>
+        <a:sysClr val="windowText" lastClr="000000"/>
+      </a:dk1>
+      <a:lt1>
+        <a:sysClr val="window" lastClr="FFFFFF"/>
+      </a:lt1>
+      <a:dk2>
+        <a:srgbClr val="44546A"/>
+      </a:dk2>
+      <a:lt2>
+        <a:srgbClr val="E7E6E6"/>
+      </a:lt2>
+      <a:accent1>
+        <a:srgbClr val="4472C4"/>
+      </a:accent1>
+      <a:accent2>
+        <a:srgbClr val="ED7D31"/>
+      </a:accent2>
+      <a:accent3>
+        <a:srgbClr val="A5A5A5"/>
+      </a:accent3>
+      <a:accent4>
+        <a:srgbClr val="FFC000"/>
+      </a:accent4>
+      <a:accent5>
+        <a:srgbClr val="5B9BD5"/>
+      </a:accent5>
+      <a:accent6>
+        <a:srgbClr val="70AD47"/>
+      </a:accent6>
+      <a:hlink>
+        <a:srgbClr val="0563C1"/>
+      </a:hlink>
+      <a:folHlink>
+        <a:srgbClr val="954F72"/>
+      </a:folHlink>
+    </a:clrScheme>
+    <a:fontScheme name="Office">
+      <a:majorFont>
+        <a:latin typeface="游ゴシック Light" panose="020F0302020204030204"/>
+        <a:ea typeface=""/>
+        <a:cs typeface=""/>
+        <a:font script="Jpan" typeface="游ゴシック Light"/>
+        <a:font script="Hang" typeface="맑은 고딕"/>
+        <a:font script="Hans" typeface="等线 Light"/>
+        <a:font script="Hant" typeface="新細明體"/>
+        <a:font script="Arab" typeface="Times New Roman"/>
+        <a:font script="Hebr" typeface="Times New Roman"/>
+        <a:font script="Thai" typeface="Angsana New"/>
+        <a:font script="Ethi" typeface="Nyala"/>
+        <a:font script="Beng" typeface="Vrinda"/>
+        <a:font script="Gujr" typeface="Shruti"/>
+        <a:font script="Khmr" typeface="MoolBoran"/>
+        <a:font script="Knda" typeface="Tunga"/>
+        <a:font script="Guru" typeface="Raavi"/>
+        <a:font script="Cans" typeface="Euphemia"/>
+        <a:font script="Cher" typeface="Plantagenet Cherokee"/>
+        <a:font script="Yiii" typeface="Microsoft Yi Baiti"/>
+        <a:font script="Tibt" typeface="Microsoft Himalaya"/>
+        <a:font script="Thaa" typeface="MV Boli"/>
+        <a:font script="Deva" typeface="Mangal"/>
+        <a:font script="Telu" typeface="Gautami"/>
+        <a:font script="Taml" typeface="Latha"/>
+        <a:font script="Syrc" typeface="Estrangelo Edessa"/>
+        <a:font script="Orya" typeface="Kalinga"/>
+        <a:font script="Mlym" typeface="Kartika"/>
+        <a:font script="Laoo" typeface="DokChampa"/>
+        <a:font script="Sinh" typeface="Iskoola Pota"/>
+        <a:font script="Mong" typeface="Mongolian Baiti"/>
+        <a:font script="Viet" typeface="Times New Roman"/>
+        <a:font script="Uigh" typeface="Microsoft Uighur"/>
+        <a:font script="Geor" typeface="Sylfaen"/>
+        <a:font script="Armn" typeface="Arial"/>
+        <a:font script="Bugi" typeface="Leelawadee UI"/>
+        <a:font script="Bopo" typeface="Microsoft JhengHei"/>
+        <a:font script="Java" typeface="Javanese Text"/>
+        <a:font script="Lisu" typeface="Segoe UI"/>
+        <a:font script="Mymr" typeface="Myanmar Text"/>
+        <a:font script="Nkoo" typeface="Ebrima"/>
+        <a:font script="Olck" typeface="Nirmala UI"/>
+        <a:font script="Osma" typeface="Ebrima"/>
+        <a:font script="Phag" typeface="Phagspa"/>
+        <a:font script="Syrn" typeface="Estrangelo Edessa"/>
+        <a:font script="Syrj" typeface="Estrangelo Edessa"/>
+        <a:font script="Syre" typeface="Estrangelo Edessa"/>
+        <a:font script="Sora" typeface="Nirmala UI"/>
+        <a:font script="Tale" typeface="Microsoft Tai Le"/>
+        <a:font script="Talu" typeface="Microsoft New Tai Lue"/>
+        <a:font script="Tfng" typeface="Ebrima"/>
+      </a:majorFont>
+      <a:minorFont>
+        <a:latin typeface="游ゴシック" panose="020F0502020204030204"/>
+        <a:ea typeface=""/>
+        <a:cs typeface=""/>
+        <a:font script="Jpan" typeface="游ゴシック"/>
+        <a:font script="Hang" typeface="맑은 고딕"/>
+        <a:font script="Hans" typeface="等线"/>
+        <a:font script="Hant" typeface="新細明體"/>
+        <a:font script="Arab" typeface="Arial"/>
+        <a:font script="Hebr" typeface="Arial"/>
+        <a:font script="Thai" typeface="Cordia New"/>
+        <a:font script="Ethi" typeface="Nyala"/>
+        <a:font script="Beng" typeface="Vrinda"/>
+        <a:font script="Gujr" typeface="Shruti"/>
+        <a:font script="Khmr" typeface="DaunPenh"/>
+        <a:font script="Knda" typeface="Tunga"/>
+        <a:font script="Guru" typeface="Raavi"/>
+        <a:font script="Cans" typeface="Euphemia"/>
+        <a:font script="Cher" typeface="Plantagenet Cherokee"/>
+        <a:font script="Yiii" typeface="Microsoft Yi Baiti"/>
+        <a:font script="Tibt" typeface="Microsoft Himalaya"/>
+        <a:font script="Thaa" typeface="MV Boli"/>
+        <a:font script="Deva" typeface="Mangal"/>
+        <a:font script="Telu" typeface="Gautami"/>
+        <a:font script="Taml" typeface="Latha"/>
+        <a:font script="Syrc" typeface="Estrangelo Edessa"/>
+        <a:font script="Orya" typeface="Kalinga"/>
+        <a:font script="Mlym" typeface="Kartika"/>
+        <a:font script="Laoo" typeface="DokChampa"/>
+        <a:font script="Sinh" typeface="Iskoola Pota"/>
+        <a:font script="Mong" typeface="Mongolian Baiti"/>
+        <a:font script="Viet" typeface="Arial"/>
+        <a:font script="Uigh" typeface="Microsoft Uighur"/>
+        <a:font script="Geor" typeface="Sylfaen"/>
+        <a:font script="Armn" typeface="Arial"/>
+        <a:font script="Bugi" typeface="Leelawadee UI"/>
+        <a:font script="Bopo" typeface="Microsoft JhengHei"/>
+        <a:font script="Java" typeface="Javanese Text"/>
+        <a:font script="Lisu" typeface="Segoe UI"/>
+        <a:font script="Mymr" typeface="Myanmar Text"/>
+        <a:font script="Nkoo" typeface="Ebrima"/>
+        <a:font script="Olck" typeface="Nirmala UI"/>
+        <a:font script="Osma" typeface="Ebrima"/>
+        <a:font script="Phag" typeface="Phagspa"/>
+        <a:font script="Syrn" typeface="Estrangelo Edessa"/>
+        <a:font script="Syrj" typeface="Estrangelo Edessa"/>
+        <a:font script="Syre" typeface="Estrangelo Edessa"/>
+        <a:font script="Sora" typeface="Nirmala UI"/>
+        <a:font script="Tale" typeface="Microsoft Tai Le"/>
+        <a:font script="Talu" typeface="Microsoft New Tai Lue"/>
+        <a:font script="Tfng" typeface="Ebrima"/>
+      </a:minorFont>
+    </a:fontScheme>
+    <a:fmtScheme name="Office">
+      <a:fillStyleLst>
+        <a:solidFill>
+          <a:schemeClr val="phClr"/>
+        </a:solidFill>
+        <a:gradFill rotWithShape="1">
+          <a:gsLst>
+            <a:gs pos="0">
+              <a:schemeClr val="phClr">
+                <a:lumMod val="110000"/>
+                <a:satMod val="105000"/>
+                <a:tint val="67000"/>
+              </a:schemeClr>
+            </a:gs>
+            <a:gs pos="50000">
+              <a:schemeClr val="phClr">
+                <a:lumMod val="105000"/>
+                <a:satMod val="103000"/>
+                <a:tint val="73000"/>
+              </a:schemeClr>
+            </a:gs>
+            <a:gs pos="100000">
+              <a:schemeClr val="phClr">
+                <a:lumMod val="105000"/>
+                <a:satMod val="109000"/>
+                <a:tint val="81000"/>
+              </a:schemeClr>
+            </a:gs>
+          </a:gsLst>
+          <a:lin ang="5400000" scaled="0"/>
+        </a:gradFill>
+        <a:gradFill rotWithShape="1">
+          <a:gsLst>
+            <a:gs pos="0">
+              <a:schemeClr val="phClr">
+                <a:satMod val="103000"/>
+                <a:lumMod val="102000"/>
+                <a:tint val="94000"/>
+              </a:schemeClr>
+            </a:gs>
+            <a:gs pos="50000">
+              <a:schemeClr val="phClr">
+                <a:satMod val="110000"/>
+                <a:lumMod val="100000"/>
+                <a:shade val="100000"/>
+              </a:schemeClr>
+            </a:gs>
+            <a:gs pos="100000">
+              <a:schemeClr val="phClr">
+                <a:lumMod val="99000"/>
+                <a:satMod val="120000"/>
+                <a:shade val="78000"/>
+              </a:schemeClr>
+            </a:gs>
+          </a:gsLst>
+          <a:lin ang="5400000" scaled="0"/>
+        </a:gradFill>
+      </a:fillStyleLst>
+      <a:lnStyleLst>
+        <a:ln w="6350" cap="flat" cmpd="sng" algn="ctr">
+          <a:solidFill>
+            <a:schemeClr val="phClr"/>
+          </a:solidFill>
+          <a:prstDash val="solid"/>
+          <a:miter lim="800000"/>
+        </a:ln>
+        <a:ln w="12700" cap="flat" cmpd="sng" algn="ctr">
+          <a:solidFill>
+            <a:schemeClr val="phClr"/>
+          </a:solidFill>
+          <a:prstDash val="solid"/>
+          <a:miter lim="800000"/>
+        </a:ln>
+        <a:ln w="19050" cap="flat" cmpd="sng" algn="ctr">
+          <a:solidFill>
+            <a:schemeClr val="phClr"/>
+          </a:solidFill>
+          <a:prstDash val="solid"/>
+          <a:miter lim="800000"/>
+        </a:ln>
+      </a:lnStyleLst>
+      <a:effectStyleLst>
+        <a:effectStyle>
+          <a:effectLst/>
+        </a:effectStyle>
+        <a:effectStyle>
+          <a:effectLst/>
+        </a:effectStyle>
+        <a:effectStyle>
+          <a:effectLst>
+            <a:outerShdw blurRad="57150" dist="19050" dir="5400000" algn="ctr" rotWithShape="0">
+              <a:srgbClr val="000000">
+                <a:alpha val="63000"/>
+              </a:srgbClr>
+            </a:outerShdw>
+          </a:effectLst>
+        </a:effectStyle>
+      </a:effectStyleLst>
+      <a:bgFillStyleLst>
+        <a:solidFill>
+          <a:schemeClr val="phClr"/>
+        </a:solidFill>
+        <a:solidFill>
+          <a:schemeClr val="phClr">
+            <a:tint val="95000"/>
+            <a:satMod val="170000"/>
+          </a:schemeClr>
+        </a:solidFill>
+        <a:gradFill rotWithShape="1">
+          <a:gsLst>
+            <a:gs pos="0">
+              <a:schemeClr val="phClr">
+                <a:tint val="93000"/>
+                <a:satMod val="150000"/>
+                <a:shade val="98000"/>
+                <a:lumMod val="102000"/>
+              </a:schemeClr>
+            </a:gs>
+            <a:gs pos="50000">
+              <a:schemeClr val="phClr">
+                <a:tint val="98000"/>
+                <a:satMod val="130000"/>
+                <a:shade val="90000"/>
+                <a:lumMod val="103000"/>
+              </a:schemeClr>
+            </a:gs>
+            <a:gs pos="100000">
+              <a:schemeClr val="phClr">
+                <a:shade val="63000"/>
+                <a:satMod val="120000"/>
+              </a:schemeClr>
+            </a:gs>
+          </a:gsLst>
+          <a:lin ang="5400000" scaled="0"/>
+        </a:gradFill>
+      </a:bgFillStyleLst>
+    </a:fmtScheme>
+  </a:themeElements>
+  <a:objectDefaults/>
+  <a:extraClrSchemeLst/>
+  <a:extLst>
+    <a:ext uri="{05A4C25C-085E-4340-85A3-A5531E510DB2}">
+      <thm15:themeFamily xmlns:thm15="http://schemas.microsoft.com/office/thememl/2012/main" name="Office Theme" id="{62F939B6-93AF-4DB8-9C6B-D6C7DFDC589F}" vid="{4A3C46E8-61CC-4603-A589-7422A47A8E4A}"/>
+    </a:ext>
+  </a:extLst>
+</a:theme>
 </file>
--- a/永井芽衣_Rpart3.pptx
+++ b/永井芽衣_Rpart3.pptx
@@ -5,7 +5,7 @@
     <p:sldMasterId id="2147483648" r:id="rId1"/>
   </p:sldMasterIdLst>
   <p:notesMasterIdLst>
-    <p:notesMasterId r:id="rId25"/>
+    <p:notesMasterId r:id="rId27"/>
   </p:notesMasterIdLst>
   <p:sldIdLst>
     <p:sldId id="256" r:id="rId2"/>
@@ -17,20 +17,22 @@
     <p:sldId id="265" r:id="rId8"/>
     <p:sldId id="266" r:id="rId9"/>
     <p:sldId id="268" r:id="rId10"/>
-    <p:sldId id="267" r:id="rId11"/>
-    <p:sldId id="269" r:id="rId12"/>
-    <p:sldId id="270" r:id="rId13"/>
-    <p:sldId id="275" r:id="rId14"/>
-    <p:sldId id="276" r:id="rId15"/>
-    <p:sldId id="277" r:id="rId16"/>
-    <p:sldId id="278" r:id="rId17"/>
-    <p:sldId id="271" r:id="rId18"/>
-    <p:sldId id="272" r:id="rId19"/>
-    <p:sldId id="273" r:id="rId20"/>
-    <p:sldId id="274" r:id="rId21"/>
-    <p:sldId id="261" r:id="rId22"/>
-    <p:sldId id="264" r:id="rId23"/>
-    <p:sldId id="262" r:id="rId24"/>
+    <p:sldId id="279" r:id="rId11"/>
+    <p:sldId id="280" r:id="rId12"/>
+    <p:sldId id="267" r:id="rId13"/>
+    <p:sldId id="269" r:id="rId14"/>
+    <p:sldId id="270" r:id="rId15"/>
+    <p:sldId id="275" r:id="rId16"/>
+    <p:sldId id="276" r:id="rId17"/>
+    <p:sldId id="277" r:id="rId18"/>
+    <p:sldId id="278" r:id="rId19"/>
+    <p:sldId id="271" r:id="rId20"/>
+    <p:sldId id="272" r:id="rId21"/>
+    <p:sldId id="273" r:id="rId22"/>
+    <p:sldId id="274" r:id="rId23"/>
+    <p:sldId id="261" r:id="rId24"/>
+    <p:sldId id="264" r:id="rId25"/>
+    <p:sldId id="262" r:id="rId26"/>
   </p:sldIdLst>
   <p:sldSz cx="12192000" cy="6858000"/>
   <p:notesSz cx="6858000" cy="9144000"/>
@@ -151,6 +153,8 @@
           <p14:sldIdLst>
             <p14:sldId id="266"/>
             <p14:sldId id="268"/>
+            <p14:sldId id="279"/>
+            <p14:sldId id="280"/>
             <p14:sldId id="267"/>
           </p14:sldIdLst>
         </p14:section>
@@ -718,7 +722,7 @@
           <a:p>
             <a:fld id="{C6FFF96F-E18D-48CF-A9C6-76063F48C151}" type="slidenum">
               <a:rPr kumimoji="1" lang="ja-JP" altLang="en-US" smtClean="0"/>
-              <a:t>15</a:t>
+              <a:t>9</a:t>
             </a:fld>
             <a:endParaRPr kumimoji="1" lang="ja-JP" altLang="en-US"/>
           </a:p>
@@ -727,7 +731,7 @@
     </p:spTree>
     <p:extLst>
       <p:ext uri="{BB962C8B-B14F-4D97-AF65-F5344CB8AC3E}">
-        <p14:creationId xmlns:p14="http://schemas.microsoft.com/office/powerpoint/2010/main" val="1178268848"/>
+        <p14:creationId xmlns:p14="http://schemas.microsoft.com/office/powerpoint/2010/main" val="1480277198"/>
       </p:ext>
     </p:extLst>
   </p:cSld>
@@ -802,7 +806,259 @@
           <a:p>
             <a:fld id="{C6FFF96F-E18D-48CF-A9C6-76063F48C151}" type="slidenum">
               <a:rPr kumimoji="1" lang="ja-JP" altLang="en-US" smtClean="0"/>
-              <a:t>16</a:t>
+              <a:t>10</a:t>
+            </a:fld>
+            <a:endParaRPr kumimoji="1" lang="ja-JP" altLang="en-US"/>
+          </a:p>
+        </p:txBody>
+      </p:sp>
+    </p:spTree>
+    <p:extLst>
+      <p:ext uri="{BB962C8B-B14F-4D97-AF65-F5344CB8AC3E}">
+        <p14:creationId xmlns:p14="http://schemas.microsoft.com/office/powerpoint/2010/main" val="2668016524"/>
+      </p:ext>
+    </p:extLst>
+  </p:cSld>
+  <p:clrMapOvr>
+    <a:masterClrMapping/>
+  </p:clrMapOvr>
+</p:notes>
+</file>
+
+<file path=ppt/notesSlides/notesSlide4.xml><?xml version="1.0" encoding="utf-8"?>
+<p:notes xmlns:a="http://schemas.openxmlformats.org/drawingml/2006/main" xmlns:r="http://schemas.openxmlformats.org/officeDocument/2006/relationships" xmlns:p="http://schemas.openxmlformats.org/presentationml/2006/main">
+  <p:cSld>
+    <p:spTree>
+      <p:nvGrpSpPr>
+        <p:cNvPr id="1" name=""/>
+        <p:cNvGrpSpPr/>
+        <p:nvPr/>
+      </p:nvGrpSpPr>
+      <p:grpSpPr>
+        <a:xfrm>
+          <a:off x="0" y="0"/>
+          <a:ext cx="0" cy="0"/>
+          <a:chOff x="0" y="0"/>
+          <a:chExt cx="0" cy="0"/>
+        </a:xfrm>
+      </p:grpSpPr>
+      <p:sp>
+        <p:nvSpPr>
+          <p:cNvPr id="2" name="スライド イメージ プレースホルダー 1"/>
+          <p:cNvSpPr>
+            <a:spLocks noGrp="1" noRot="1" noChangeAspect="1"/>
+          </p:cNvSpPr>
+          <p:nvPr>
+            <p:ph type="sldImg"/>
+          </p:nvPr>
+        </p:nvSpPr>
+        <p:spPr/>
+      </p:sp>
+      <p:sp>
+        <p:nvSpPr>
+          <p:cNvPr id="3" name="ノート プレースホルダー 2"/>
+          <p:cNvSpPr>
+            <a:spLocks noGrp="1"/>
+          </p:cNvSpPr>
+          <p:nvPr>
+            <p:ph type="body" idx="1"/>
+          </p:nvPr>
+        </p:nvSpPr>
+        <p:spPr/>
+        <p:txBody>
+          <a:bodyPr/>
+          <a:lstStyle/>
+          <a:p>
+            <a:endParaRPr kumimoji="1" lang="ja-JP" altLang="en-US" dirty="0"/>
+          </a:p>
+        </p:txBody>
+      </p:sp>
+      <p:sp>
+        <p:nvSpPr>
+          <p:cNvPr id="4" name="スライド番号プレースホルダー 3"/>
+          <p:cNvSpPr>
+            <a:spLocks noGrp="1"/>
+          </p:cNvSpPr>
+          <p:nvPr>
+            <p:ph type="sldNum" sz="quarter" idx="5"/>
+          </p:nvPr>
+        </p:nvSpPr>
+        <p:spPr/>
+        <p:txBody>
+          <a:bodyPr/>
+          <a:lstStyle/>
+          <a:p>
+            <a:fld id="{C6FFF96F-E18D-48CF-A9C6-76063F48C151}" type="slidenum">
+              <a:rPr kumimoji="1" lang="ja-JP" altLang="en-US" smtClean="0"/>
+              <a:t>11</a:t>
+            </a:fld>
+            <a:endParaRPr kumimoji="1" lang="ja-JP" altLang="en-US"/>
+          </a:p>
+        </p:txBody>
+      </p:sp>
+    </p:spTree>
+    <p:extLst>
+      <p:ext uri="{BB962C8B-B14F-4D97-AF65-F5344CB8AC3E}">
+        <p14:creationId xmlns:p14="http://schemas.microsoft.com/office/powerpoint/2010/main" val="1691391018"/>
+      </p:ext>
+    </p:extLst>
+  </p:cSld>
+  <p:clrMapOvr>
+    <a:masterClrMapping/>
+  </p:clrMapOvr>
+</p:notes>
+</file>
+
+<file path=ppt/notesSlides/notesSlide5.xml><?xml version="1.0" encoding="utf-8"?>
+<p:notes xmlns:a="http://schemas.openxmlformats.org/drawingml/2006/main" xmlns:r="http://schemas.openxmlformats.org/officeDocument/2006/relationships" xmlns:p="http://schemas.openxmlformats.org/presentationml/2006/main">
+  <p:cSld>
+    <p:spTree>
+      <p:nvGrpSpPr>
+        <p:cNvPr id="1" name=""/>
+        <p:cNvGrpSpPr/>
+        <p:nvPr/>
+      </p:nvGrpSpPr>
+      <p:grpSpPr>
+        <a:xfrm>
+          <a:off x="0" y="0"/>
+          <a:ext cx="0" cy="0"/>
+          <a:chOff x="0" y="0"/>
+          <a:chExt cx="0" cy="0"/>
+        </a:xfrm>
+      </p:grpSpPr>
+      <p:sp>
+        <p:nvSpPr>
+          <p:cNvPr id="2" name="スライド イメージ プレースホルダー 1"/>
+          <p:cNvSpPr>
+            <a:spLocks noGrp="1" noRot="1" noChangeAspect="1"/>
+          </p:cNvSpPr>
+          <p:nvPr>
+            <p:ph type="sldImg"/>
+          </p:nvPr>
+        </p:nvSpPr>
+        <p:spPr/>
+      </p:sp>
+      <p:sp>
+        <p:nvSpPr>
+          <p:cNvPr id="3" name="ノート プレースホルダー 2"/>
+          <p:cNvSpPr>
+            <a:spLocks noGrp="1"/>
+          </p:cNvSpPr>
+          <p:nvPr>
+            <p:ph type="body" idx="1"/>
+          </p:nvPr>
+        </p:nvSpPr>
+        <p:spPr/>
+        <p:txBody>
+          <a:bodyPr/>
+          <a:lstStyle/>
+          <a:p>
+            <a:endParaRPr kumimoji="1" lang="ja-JP" altLang="en-US" dirty="0"/>
+          </a:p>
+        </p:txBody>
+      </p:sp>
+      <p:sp>
+        <p:nvSpPr>
+          <p:cNvPr id="4" name="スライド番号プレースホルダー 3"/>
+          <p:cNvSpPr>
+            <a:spLocks noGrp="1"/>
+          </p:cNvSpPr>
+          <p:nvPr>
+            <p:ph type="sldNum" sz="quarter" idx="5"/>
+          </p:nvPr>
+        </p:nvSpPr>
+        <p:spPr/>
+        <p:txBody>
+          <a:bodyPr/>
+          <a:lstStyle/>
+          <a:p>
+            <a:fld id="{C6FFF96F-E18D-48CF-A9C6-76063F48C151}" type="slidenum">
+              <a:rPr kumimoji="1" lang="ja-JP" altLang="en-US" smtClean="0"/>
+              <a:t>17</a:t>
+            </a:fld>
+            <a:endParaRPr kumimoji="1" lang="ja-JP" altLang="en-US"/>
+          </a:p>
+        </p:txBody>
+      </p:sp>
+    </p:spTree>
+    <p:extLst>
+      <p:ext uri="{BB962C8B-B14F-4D97-AF65-F5344CB8AC3E}">
+        <p14:creationId xmlns:p14="http://schemas.microsoft.com/office/powerpoint/2010/main" val="1178268848"/>
+      </p:ext>
+    </p:extLst>
+  </p:cSld>
+  <p:clrMapOvr>
+    <a:masterClrMapping/>
+  </p:clrMapOvr>
+</p:notes>
+</file>
+
+<file path=ppt/notesSlides/notesSlide6.xml><?xml version="1.0" encoding="utf-8"?>
+<p:notes xmlns:a="http://schemas.openxmlformats.org/drawingml/2006/main" xmlns:r="http://schemas.openxmlformats.org/officeDocument/2006/relationships" xmlns:p="http://schemas.openxmlformats.org/presentationml/2006/main">
+  <p:cSld>
+    <p:spTree>
+      <p:nvGrpSpPr>
+        <p:cNvPr id="1" name=""/>
+        <p:cNvGrpSpPr/>
+        <p:nvPr/>
+      </p:nvGrpSpPr>
+      <p:grpSpPr>
+        <a:xfrm>
+          <a:off x="0" y="0"/>
+          <a:ext cx="0" cy="0"/>
+          <a:chOff x="0" y="0"/>
+          <a:chExt cx="0" cy="0"/>
+        </a:xfrm>
+      </p:grpSpPr>
+      <p:sp>
+        <p:nvSpPr>
+          <p:cNvPr id="2" name="スライド イメージ プレースホルダー 1"/>
+          <p:cNvSpPr>
+            <a:spLocks noGrp="1" noRot="1" noChangeAspect="1"/>
+          </p:cNvSpPr>
+          <p:nvPr>
+            <p:ph type="sldImg"/>
+          </p:nvPr>
+        </p:nvSpPr>
+        <p:spPr/>
+      </p:sp>
+      <p:sp>
+        <p:nvSpPr>
+          <p:cNvPr id="3" name="ノート プレースホルダー 2"/>
+          <p:cNvSpPr>
+            <a:spLocks noGrp="1"/>
+          </p:cNvSpPr>
+          <p:nvPr>
+            <p:ph type="body" idx="1"/>
+          </p:nvPr>
+        </p:nvSpPr>
+        <p:spPr/>
+        <p:txBody>
+          <a:bodyPr/>
+          <a:lstStyle/>
+          <a:p>
+            <a:endParaRPr kumimoji="1" lang="ja-JP" altLang="en-US" dirty="0"/>
+          </a:p>
+        </p:txBody>
+      </p:sp>
+      <p:sp>
+        <p:nvSpPr>
+          <p:cNvPr id="4" name="スライド番号プレースホルダー 3"/>
+          <p:cNvSpPr>
+            <a:spLocks noGrp="1"/>
+          </p:cNvSpPr>
+          <p:nvPr>
+            <p:ph type="sldNum" sz="quarter" idx="5"/>
+          </p:nvPr>
+        </p:nvSpPr>
+        <p:spPr/>
+        <p:txBody>
+          <a:bodyPr/>
+          <a:lstStyle/>
+          <a:p>
+            <a:fld id="{C6FFF96F-E18D-48CF-A9C6-76063F48C151}" type="slidenum">
+              <a:rPr kumimoji="1" lang="ja-JP" altLang="en-US" smtClean="0"/>
+              <a:t>18</a:t>
             </a:fld>
             <a:endParaRPr kumimoji="1" lang="ja-JP" altLang="en-US"/>
           </a:p>
@@ -4592,7 +4848,7 @@
           <a:p>
             <a:pPr algn="l"/>
             <a:r>
-              <a:rPr kumimoji="1" lang="ja-JP" altLang="en-US" sz="3000" b="1" dirty="0">
+              <a:rPr lang="ja-JP" altLang="en-US" sz="3000" b="1" dirty="0">
                 <a:solidFill>
                   <a:schemeClr val="tx1">
                     <a:lumMod val="65000"/>
@@ -4602,10 +4858,10 @@
                 <a:latin typeface="メイリオ" panose="020B0604030504040204" pitchFamily="50" charset="-128"/>
                 <a:ea typeface="メイリオ" panose="020B0604030504040204" pitchFamily="50" charset="-128"/>
               </a:rPr>
-              <a:t>８章　</a:t>
-            </a:r>
-            <a:r>
-              <a:rPr kumimoji="1" lang="en-US" altLang="ja-JP" sz="3000" b="1" dirty="0">
+              <a:t>８</a:t>
+            </a:r>
+            <a:r>
+              <a:rPr kumimoji="1" lang="ja-JP" altLang="en-US" sz="3000" b="1" dirty="0">
                 <a:solidFill>
                   <a:schemeClr val="tx1">
                     <a:lumMod val="65000"/>
@@ -4615,10 +4871,10 @@
                 <a:latin typeface="メイリオ" panose="020B0604030504040204" pitchFamily="50" charset="-128"/>
                 <a:ea typeface="メイリオ" panose="020B0604030504040204" pitchFamily="50" charset="-128"/>
               </a:rPr>
-              <a:t>S</a:t>
-            </a:r>
-            <a:r>
-              <a:rPr kumimoji="1" lang="ja-JP" altLang="en-US" sz="3000" b="1" dirty="0">
+              <a:t>章　</a:t>
+            </a:r>
+            <a:r>
+              <a:rPr kumimoji="1" lang="en-US" altLang="ja-JP" sz="3000" b="1" dirty="0">
                 <a:solidFill>
                   <a:schemeClr val="tx1">
                     <a:lumMod val="65000"/>
@@ -4628,20 +4884,7 @@
                 <a:latin typeface="メイリオ" panose="020B0604030504040204" pitchFamily="50" charset="-128"/>
                 <a:ea typeface="メイリオ" panose="020B0604030504040204" pitchFamily="50" charset="-128"/>
               </a:rPr>
-              <a:t>３　</a:t>
-            </a:r>
-            <a:r>
-              <a:rPr lang="ja-JP" altLang="en-US" sz="3000" b="1" dirty="0">
-                <a:solidFill>
-                  <a:schemeClr val="tx1">
-                    <a:lumMod val="65000"/>
-                    <a:lumOff val="35000"/>
-                  </a:schemeClr>
-                </a:solidFill>
-                <a:latin typeface="メイリオ" panose="020B0604030504040204" pitchFamily="50" charset="-128"/>
-                <a:ea typeface="メイリオ" panose="020B0604030504040204" pitchFamily="50" charset="-128"/>
-              </a:rPr>
-              <a:t>最終コード</a:t>
+              <a:t>S3</a:t>
             </a:r>
             <a:endParaRPr kumimoji="1" lang="ja-JP" altLang="en-US" sz="3000" b="1" dirty="0">
               <a:solidFill>
@@ -4658,10 +4901,10 @@
       </p:sp>
       <p:sp>
         <p:nvSpPr>
-          <p:cNvPr id="11" name="正方形/長方形 10">
-            <a:extLst>
-              <a:ext uri="{FF2B5EF4-FFF2-40B4-BE49-F238E27FC236}">
-                <a16:creationId xmlns:a16="http://schemas.microsoft.com/office/drawing/2014/main" id="{661A3A95-316A-208D-1006-9B4CAF8277CA}"/>
+          <p:cNvPr id="4" name="正方形/長方形 3">
+            <a:extLst>
+              <a:ext uri="{FF2B5EF4-FFF2-40B4-BE49-F238E27FC236}">
+                <a16:creationId xmlns:a16="http://schemas.microsoft.com/office/drawing/2014/main" id="{578782C7-6070-7C3A-DAB7-3101F4C6ED5C}"/>
               </a:ext>
             </a:extLst>
           </p:cNvPr>
@@ -4670,8 +4913,8 @@
         </p:nvSpPr>
         <p:spPr>
           <a:xfrm>
-            <a:off x="528181" y="892099"/>
-            <a:ext cx="11135638" cy="5965902"/>
+            <a:off x="698353" y="1019123"/>
+            <a:ext cx="10540261" cy="5528957"/>
           </a:xfrm>
           <a:prstGeom prst="rect">
             <a:avLst/>
@@ -4710,10 +4953,963 @@
           </a:p>
         </p:txBody>
       </p:sp>
+      <p:sp>
+        <p:nvSpPr>
+          <p:cNvPr id="6" name="正方形/長方形 5">
+            <a:extLst>
+              <a:ext uri="{FF2B5EF4-FFF2-40B4-BE49-F238E27FC236}">
+                <a16:creationId xmlns:a16="http://schemas.microsoft.com/office/drawing/2014/main" id="{75CE81D2-C5EE-4E63-DA6F-4D50A6E33162}"/>
+              </a:ext>
+            </a:extLst>
+          </p:cNvPr>
+          <p:cNvSpPr/>
+          <p:nvPr/>
+        </p:nvSpPr>
+        <p:spPr>
+          <a:xfrm>
+            <a:off x="5881765" y="2947087"/>
+            <a:ext cx="2784606" cy="1895097"/>
+          </a:xfrm>
+          <a:prstGeom prst="rect">
+            <a:avLst/>
+          </a:prstGeom>
+          <a:solidFill>
+            <a:schemeClr val="accent4">
+              <a:lumMod val="40000"/>
+              <a:lumOff val="60000"/>
+            </a:schemeClr>
+          </a:solidFill>
+          <a:ln>
+            <a:noFill/>
+          </a:ln>
+        </p:spPr>
+        <p:style>
+          <a:lnRef idx="2">
+            <a:schemeClr val="accent1">
+              <a:shade val="15000"/>
+            </a:schemeClr>
+          </a:lnRef>
+          <a:fillRef idx="1">
+            <a:schemeClr val="accent1"/>
+          </a:fillRef>
+          <a:effectRef idx="0">
+            <a:schemeClr val="accent1"/>
+          </a:effectRef>
+          <a:fontRef idx="minor">
+            <a:schemeClr val="lt1"/>
+          </a:fontRef>
+        </p:style>
+        <p:txBody>
+          <a:bodyPr rtlCol="0" anchor="t"/>
+          <a:lstStyle/>
+          <a:p>
+            <a:endParaRPr lang="en-US" altLang="ja-JP" sz="1200" dirty="0">
+              <a:solidFill>
+                <a:schemeClr val="tx1"/>
+              </a:solidFill>
+            </a:endParaRPr>
+          </a:p>
+        </p:txBody>
+      </p:sp>
+      <p:sp>
+        <p:nvSpPr>
+          <p:cNvPr id="3" name="字幕 2">
+            <a:extLst>
+              <a:ext uri="{FF2B5EF4-FFF2-40B4-BE49-F238E27FC236}">
+                <a16:creationId xmlns:a16="http://schemas.microsoft.com/office/drawing/2014/main" id="{EF422FEA-2F34-70ED-56A9-01A65A2AD142}"/>
+              </a:ext>
+            </a:extLst>
+          </p:cNvPr>
+          <p:cNvSpPr>
+            <a:spLocks noGrp="1"/>
+          </p:cNvSpPr>
+          <p:nvPr>
+            <p:ph type="subTitle" idx="1"/>
+          </p:nvPr>
+        </p:nvSpPr>
+        <p:spPr>
+          <a:xfrm>
+            <a:off x="682560" y="1143635"/>
+            <a:ext cx="10540261" cy="5446283"/>
+          </a:xfrm>
+        </p:spPr>
+        <p:txBody>
+          <a:bodyPr>
+            <a:normAutofit/>
+          </a:bodyPr>
+          <a:lstStyle/>
+          <a:p>
+            <a:pPr algn="l"/>
+            <a:r>
+              <a:rPr kumimoji="1" lang="ja-JP" altLang="en-US" sz="2000" dirty="0">
+                <a:solidFill>
+                  <a:schemeClr val="accent4">
+                    <a:lumMod val="75000"/>
+                  </a:schemeClr>
+                </a:solidFill>
+                <a:latin typeface="メイリオ" panose="020B0604030504040204" pitchFamily="50" charset="-128"/>
+                <a:ea typeface="メイリオ" panose="020B0604030504040204" pitchFamily="50" charset="-128"/>
+              </a:rPr>
+              <a:t>＃</a:t>
+            </a:r>
+            <a:r>
+              <a:rPr lang="en-US" altLang="ja-JP" sz="2000" dirty="0">
+                <a:solidFill>
+                  <a:schemeClr val="accent4">
+                    <a:lumMod val="75000"/>
+                  </a:schemeClr>
+                </a:solidFill>
+                <a:latin typeface="メイリオ" panose="020B0604030504040204" pitchFamily="50" charset="-128"/>
+                <a:ea typeface="メイリオ" panose="020B0604030504040204" pitchFamily="50" charset="-128"/>
+              </a:rPr>
+              <a:t>#</a:t>
+            </a:r>
+            <a:r>
+              <a:rPr lang="ja-JP" altLang="en-US" sz="2000" dirty="0">
+                <a:solidFill>
+                  <a:schemeClr val="accent4">
+                    <a:lumMod val="75000"/>
+                  </a:schemeClr>
+                </a:solidFill>
+                <a:latin typeface="メイリオ" panose="020B0604030504040204" pitchFamily="50" charset="-128"/>
+                <a:ea typeface="メイリオ" panose="020B0604030504040204" pitchFamily="50" charset="-128"/>
+              </a:rPr>
+              <a:t>出力をきれいにする</a:t>
+            </a:r>
+            <a:endParaRPr kumimoji="1" lang="en-US" altLang="ja-JP" sz="2000" dirty="0">
+              <a:solidFill>
+                <a:schemeClr val="accent4">
+                  <a:lumMod val="75000"/>
+                </a:schemeClr>
+              </a:solidFill>
+              <a:latin typeface="メイリオ" panose="020B0604030504040204" pitchFamily="50" charset="-128"/>
+              <a:ea typeface="メイリオ" panose="020B0604030504040204" pitchFamily="50" charset="-128"/>
+            </a:endParaRPr>
+          </a:p>
+          <a:p>
+            <a:pPr algn="l"/>
+            <a:r>
+              <a:rPr lang="ja-JP" altLang="en-US" sz="1200" dirty="0">
+                <a:latin typeface="メイリオ" panose="020B0604030504040204" pitchFamily="50" charset="-128"/>
+                <a:ea typeface="メイリオ" panose="020B0604030504040204" pitchFamily="50" charset="-128"/>
+              </a:rPr>
+              <a:t>関数名：</a:t>
+            </a:r>
+            <a:r>
+              <a:rPr lang="en-US" altLang="ja-JP" sz="1200" dirty="0" err="1">
+                <a:latin typeface="メイリオ" panose="020B0604030504040204" pitchFamily="50" charset="-128"/>
+                <a:ea typeface="メイリオ" panose="020B0604030504040204" pitchFamily="50" charset="-128"/>
+              </a:rPr>
+              <a:t>slot_display</a:t>
+            </a:r>
+            <a:r>
+              <a:rPr lang="en-US" altLang="ja-JP" sz="1200" dirty="0">
+                <a:latin typeface="メイリオ" panose="020B0604030504040204" pitchFamily="50" charset="-128"/>
+                <a:ea typeface="メイリオ" panose="020B0604030504040204" pitchFamily="50" charset="-128"/>
+              </a:rPr>
+              <a:t>  </a:t>
+            </a:r>
+            <a:r>
+              <a:rPr lang="ja-JP" altLang="en-US" sz="1200" dirty="0">
+                <a:latin typeface="メイリオ" panose="020B0604030504040204" pitchFamily="50" charset="-128"/>
+                <a:ea typeface="メイリオ" panose="020B0604030504040204" pitchFamily="50" charset="-128"/>
+              </a:rPr>
+              <a:t>引数：</a:t>
+            </a:r>
+            <a:r>
+              <a:rPr lang="en-US" altLang="ja-JP" sz="1200" dirty="0">
+                <a:latin typeface="メイリオ" panose="020B0604030504040204" pitchFamily="50" charset="-128"/>
+                <a:ea typeface="メイリオ" panose="020B0604030504040204" pitchFamily="50" charset="-128"/>
+              </a:rPr>
+              <a:t>prize</a:t>
+            </a:r>
+          </a:p>
+          <a:p>
+            <a:pPr algn="l"/>
+            <a:r>
+              <a:rPr lang="ja-JP" altLang="en-US" sz="1200" dirty="0">
+                <a:latin typeface="メイリオ" panose="020B0604030504040204" pitchFamily="50" charset="-128"/>
+                <a:ea typeface="メイリオ" panose="020B0604030504040204" pitchFamily="50" charset="-128"/>
+              </a:rPr>
+              <a:t>　　　　・シンボルの抽出：</a:t>
+            </a:r>
+            <a:r>
+              <a:rPr lang="en-US" altLang="ja-JP" sz="1200" dirty="0">
+                <a:latin typeface="メイリオ" panose="020B0604030504040204" pitchFamily="50" charset="-128"/>
+                <a:ea typeface="メイリオ" panose="020B0604030504040204" pitchFamily="50" charset="-128"/>
+              </a:rPr>
+              <a:t>prize </a:t>
+            </a:r>
+            <a:r>
+              <a:rPr lang="ja-JP" altLang="en-US" sz="1200" dirty="0">
+                <a:latin typeface="メイリオ" panose="020B0604030504040204" pitchFamily="50" charset="-128"/>
+                <a:ea typeface="メイリオ" panose="020B0604030504040204" pitchFamily="50" charset="-128"/>
+              </a:rPr>
+              <a:t>から </a:t>
+            </a:r>
+            <a:r>
+              <a:rPr lang="en-US" altLang="ja-JP" sz="1200" dirty="0">
+                <a:latin typeface="メイリオ" panose="020B0604030504040204" pitchFamily="50" charset="-128"/>
+                <a:ea typeface="メイリオ" panose="020B0604030504040204" pitchFamily="50" charset="-128"/>
+              </a:rPr>
+              <a:t>symbols </a:t>
+            </a:r>
+            <a:r>
+              <a:rPr lang="ja-JP" altLang="en-US" sz="1200" dirty="0">
+                <a:latin typeface="メイリオ" panose="020B0604030504040204" pitchFamily="50" charset="-128"/>
+                <a:ea typeface="メイリオ" panose="020B0604030504040204" pitchFamily="50" charset="-128"/>
+              </a:rPr>
+              <a:t>のみを抽出する。</a:t>
+            </a:r>
+            <a:endParaRPr lang="en-US" altLang="ja-JP" sz="1200" dirty="0">
+              <a:latin typeface="メイリオ" panose="020B0604030504040204" pitchFamily="50" charset="-128"/>
+              <a:ea typeface="メイリオ" panose="020B0604030504040204" pitchFamily="50" charset="-128"/>
+            </a:endParaRPr>
+          </a:p>
+          <a:p>
+            <a:pPr algn="l"/>
+            <a:r>
+              <a:rPr lang="ja-JP" altLang="en-US" sz="1200" dirty="0">
+                <a:latin typeface="メイリオ" panose="020B0604030504040204" pitchFamily="50" charset="-128"/>
+                <a:ea typeface="メイリオ" panose="020B0604030504040204" pitchFamily="50" charset="-128"/>
+              </a:rPr>
+              <a:t>　　　　・</a:t>
+            </a:r>
+            <a:r>
+              <a:rPr lang="en-US" altLang="ja-JP" sz="1200" dirty="0">
+                <a:latin typeface="メイリオ" panose="020B0604030504040204" pitchFamily="50" charset="-128"/>
+                <a:ea typeface="メイリオ" panose="020B0604030504040204" pitchFamily="50" charset="-128"/>
+              </a:rPr>
+              <a:t>symbols</a:t>
+            </a:r>
+            <a:r>
+              <a:rPr lang="ja-JP" altLang="en-US" sz="1200" dirty="0">
+                <a:latin typeface="メイリオ" panose="020B0604030504040204" pitchFamily="50" charset="-128"/>
+                <a:ea typeface="メイリオ" panose="020B0604030504040204" pitchFamily="50" charset="-128"/>
+              </a:rPr>
+              <a:t>を１つの文字列に変換：</a:t>
+            </a:r>
+            <a:r>
+              <a:rPr lang="en-US" altLang="ja-JP" sz="1200" dirty="0">
+                <a:latin typeface="メイリオ" panose="020B0604030504040204" pitchFamily="50" charset="-128"/>
+                <a:ea typeface="メイリオ" panose="020B0604030504040204" pitchFamily="50" charset="-128"/>
+              </a:rPr>
+              <a:t>”0” “0” “0” </a:t>
+            </a:r>
+            <a:r>
+              <a:rPr lang="ja-JP" altLang="en-US" sz="1200" dirty="0">
+                <a:latin typeface="メイリオ" panose="020B0604030504040204" pitchFamily="50" charset="-128"/>
+                <a:ea typeface="メイリオ" panose="020B0604030504040204" pitchFamily="50" charset="-128"/>
+              </a:rPr>
+              <a:t>→ </a:t>
+            </a:r>
+            <a:r>
+              <a:rPr lang="en-US" altLang="ja-JP" sz="1200" dirty="0">
+                <a:latin typeface="メイリオ" panose="020B0604030504040204" pitchFamily="50" charset="-128"/>
+                <a:ea typeface="メイリオ" panose="020B0604030504040204" pitchFamily="50" charset="-128"/>
+              </a:rPr>
+              <a:t>“0 0 0”</a:t>
+            </a:r>
+          </a:p>
+          <a:p>
+            <a:pPr algn="l"/>
+            <a:r>
+              <a:rPr lang="ja-JP" altLang="en-US" sz="1200" dirty="0">
+                <a:latin typeface="メイリオ" panose="020B0604030504040204" pitchFamily="50" charset="-128"/>
+                <a:ea typeface="メイリオ" panose="020B0604030504040204" pitchFamily="50" charset="-128"/>
+              </a:rPr>
+              <a:t>　　　　・シンボルと賞金額を正規表現として結合：文字列に変換した</a:t>
+            </a:r>
+            <a:r>
+              <a:rPr lang="en-US" altLang="ja-JP" sz="1200" dirty="0">
+                <a:latin typeface="メイリオ" panose="020B0604030504040204" pitchFamily="50" charset="-128"/>
+                <a:ea typeface="メイリオ" panose="020B0604030504040204" pitchFamily="50" charset="-128"/>
+              </a:rPr>
+              <a:t> symbols </a:t>
+            </a:r>
+            <a:r>
+              <a:rPr lang="ja-JP" altLang="en-US" sz="1200" dirty="0">
+                <a:latin typeface="メイリオ" panose="020B0604030504040204" pitchFamily="50" charset="-128"/>
+                <a:ea typeface="メイリオ" panose="020B0604030504040204" pitchFamily="50" charset="-128"/>
+              </a:rPr>
+              <a:t>と </a:t>
+            </a:r>
+            <a:r>
+              <a:rPr lang="en-US" altLang="ja-JP" sz="1200" dirty="0">
+                <a:latin typeface="メイリオ" panose="020B0604030504040204" pitchFamily="50" charset="-128"/>
+                <a:ea typeface="メイリオ" panose="020B0604030504040204" pitchFamily="50" charset="-128"/>
+              </a:rPr>
+              <a:t>prize</a:t>
+            </a:r>
+            <a:r>
+              <a:rPr lang="ja-JP" altLang="en-US" sz="1200" dirty="0">
+                <a:latin typeface="メイリオ" panose="020B0604030504040204" pitchFamily="50" charset="-128"/>
+                <a:ea typeface="メイリオ" panose="020B0604030504040204" pitchFamily="50" charset="-128"/>
+              </a:rPr>
+              <a:t> を結合する。その間では改行をし、</a:t>
+            </a:r>
+            <a:r>
+              <a:rPr lang="en-US" altLang="ja-JP" sz="1200" dirty="0">
+                <a:latin typeface="メイリオ" panose="020B0604030504040204" pitchFamily="50" charset="-128"/>
+                <a:ea typeface="メイリオ" panose="020B0604030504040204" pitchFamily="50" charset="-128"/>
+              </a:rPr>
+              <a:t>prize</a:t>
+            </a:r>
+            <a:r>
+              <a:rPr lang="ja-JP" altLang="en-US" sz="1200" dirty="0">
+                <a:latin typeface="メイリオ" panose="020B0604030504040204" pitchFamily="50" charset="-128"/>
+                <a:ea typeface="メイリオ" panose="020B0604030504040204" pitchFamily="50" charset="-128"/>
+              </a:rPr>
+              <a:t>には</a:t>
+            </a:r>
+            <a:r>
+              <a:rPr lang="en-US" altLang="ja-JP" sz="1200" dirty="0">
+                <a:latin typeface="メイリオ" panose="020B0604030504040204" pitchFamily="50" charset="-128"/>
+                <a:ea typeface="メイリオ" panose="020B0604030504040204" pitchFamily="50" charset="-128"/>
+              </a:rPr>
+              <a:t>$</a:t>
+            </a:r>
+            <a:r>
+              <a:rPr lang="ja-JP" altLang="en-US" sz="1200" dirty="0">
+                <a:latin typeface="メイリオ" panose="020B0604030504040204" pitchFamily="50" charset="-128"/>
+                <a:ea typeface="メイリオ" panose="020B0604030504040204" pitchFamily="50" charset="-128"/>
+              </a:rPr>
+              <a:t>をつける。</a:t>
+            </a:r>
+            <a:endParaRPr lang="en-US" altLang="ja-JP" sz="1200" dirty="0">
+              <a:latin typeface="メイリオ" panose="020B0604030504040204" pitchFamily="50" charset="-128"/>
+              <a:ea typeface="メイリオ" panose="020B0604030504040204" pitchFamily="50" charset="-128"/>
+            </a:endParaRPr>
+          </a:p>
+          <a:p>
+            <a:pPr algn="l"/>
+            <a:endParaRPr lang="en-US" altLang="ja-JP" sz="1200" dirty="0">
+              <a:latin typeface="メイリオ" panose="020B0604030504040204" pitchFamily="50" charset="-128"/>
+              <a:ea typeface="メイリオ" panose="020B0604030504040204" pitchFamily="50" charset="-128"/>
+            </a:endParaRPr>
+          </a:p>
+          <a:p>
+            <a:pPr algn="l"/>
+            <a:r>
+              <a:rPr lang="en-US" altLang="ja-JP" sz="1200" dirty="0">
+                <a:latin typeface="メイリオ" panose="020B0604030504040204" pitchFamily="50" charset="-128"/>
+                <a:ea typeface="メイリオ" panose="020B0604030504040204" pitchFamily="50" charset="-128"/>
+              </a:rPr>
+              <a:t>					</a:t>
+            </a:r>
+            <a:r>
+              <a:rPr lang="ja-JP" altLang="en-US" sz="1200" dirty="0">
+                <a:latin typeface="メイリオ" panose="020B0604030504040204" pitchFamily="50" charset="-128"/>
+                <a:ea typeface="メイリオ" panose="020B0604030504040204" pitchFamily="50" charset="-128"/>
+              </a:rPr>
+              <a:t>　　　　変更前</a:t>
+            </a:r>
+            <a:endParaRPr lang="en-US" altLang="ja-JP" sz="1200" dirty="0">
+              <a:latin typeface="メイリオ" panose="020B0604030504040204" pitchFamily="50" charset="-128"/>
+              <a:ea typeface="メイリオ" panose="020B0604030504040204" pitchFamily="50" charset="-128"/>
+            </a:endParaRPr>
+          </a:p>
+          <a:p>
+            <a:pPr algn="l"/>
+            <a:endParaRPr lang="en-US" altLang="ja-JP" sz="1200" dirty="0">
+              <a:latin typeface="メイリオ" panose="020B0604030504040204" pitchFamily="50" charset="-128"/>
+              <a:ea typeface="メイリオ" panose="020B0604030504040204" pitchFamily="50" charset="-128"/>
+            </a:endParaRPr>
+          </a:p>
+          <a:p>
+            <a:pPr algn="l"/>
+            <a:endParaRPr lang="en-US" altLang="ja-JP" sz="1200" dirty="0">
+              <a:latin typeface="メイリオ" panose="020B0604030504040204" pitchFamily="50" charset="-128"/>
+              <a:ea typeface="メイリオ" panose="020B0604030504040204" pitchFamily="50" charset="-128"/>
+            </a:endParaRPr>
+          </a:p>
+          <a:p>
+            <a:pPr algn="l"/>
+            <a:endParaRPr lang="en-US" altLang="ja-JP" sz="1200" dirty="0">
+              <a:latin typeface="メイリオ" panose="020B0604030504040204" pitchFamily="50" charset="-128"/>
+              <a:ea typeface="メイリオ" panose="020B0604030504040204" pitchFamily="50" charset="-128"/>
+            </a:endParaRPr>
+          </a:p>
+          <a:p>
+            <a:pPr algn="l"/>
+            <a:r>
+              <a:rPr lang="en-US" altLang="ja-JP" sz="1200" dirty="0">
+                <a:latin typeface="メイリオ" panose="020B0604030504040204" pitchFamily="50" charset="-128"/>
+                <a:ea typeface="メイリオ" panose="020B0604030504040204" pitchFamily="50" charset="-128"/>
+              </a:rPr>
+              <a:t>					</a:t>
+            </a:r>
+            <a:r>
+              <a:rPr lang="ja-JP" altLang="en-US" sz="1200" dirty="0">
+                <a:latin typeface="メイリオ" panose="020B0604030504040204" pitchFamily="50" charset="-128"/>
+                <a:ea typeface="メイリオ" panose="020B0604030504040204" pitchFamily="50" charset="-128"/>
+              </a:rPr>
+              <a:t>　　　　変更後</a:t>
+            </a:r>
+            <a:endParaRPr lang="en-US" altLang="ja-JP" sz="1200" dirty="0">
+              <a:latin typeface="メイリオ" panose="020B0604030504040204" pitchFamily="50" charset="-128"/>
+              <a:ea typeface="メイリオ" panose="020B0604030504040204" pitchFamily="50" charset="-128"/>
+            </a:endParaRPr>
+          </a:p>
+        </p:txBody>
+      </p:sp>
+      <p:cxnSp>
+        <p:nvCxnSpPr>
+          <p:cNvPr id="13" name="直線矢印コネクタ 12">
+            <a:extLst>
+              <a:ext uri="{FF2B5EF4-FFF2-40B4-BE49-F238E27FC236}">
+                <a16:creationId xmlns:a16="http://schemas.microsoft.com/office/drawing/2014/main" id="{74FF8975-518B-E7D8-023D-CCCCAEBC6F95}"/>
+              </a:ext>
+            </a:extLst>
+          </p:cNvPr>
+          <p:cNvCxnSpPr>
+            <a:cxnSpLocks/>
+          </p:cNvCxnSpPr>
+          <p:nvPr/>
+        </p:nvCxnSpPr>
+        <p:spPr>
+          <a:xfrm>
+            <a:off x="5066610" y="3800527"/>
+            <a:ext cx="579279" cy="0"/>
+          </a:xfrm>
+          <a:prstGeom prst="straightConnector1">
+            <a:avLst/>
+          </a:prstGeom>
+          <a:ln w="57150">
+            <a:solidFill>
+              <a:schemeClr val="accent4">
+                <a:lumMod val="75000"/>
+              </a:schemeClr>
+            </a:solidFill>
+            <a:tailEnd type="triangle"/>
+          </a:ln>
+        </p:spPr>
+        <p:style>
+          <a:lnRef idx="1">
+            <a:schemeClr val="accent1"/>
+          </a:lnRef>
+          <a:fillRef idx="0">
+            <a:schemeClr val="accent1"/>
+          </a:fillRef>
+          <a:effectRef idx="0">
+            <a:schemeClr val="accent1"/>
+          </a:effectRef>
+          <a:fontRef idx="minor">
+            <a:schemeClr val="tx1"/>
+          </a:fontRef>
+        </p:style>
+      </p:cxnSp>
+      <p:pic>
+        <p:nvPicPr>
+          <p:cNvPr id="9" name="図 8">
+            <a:extLst>
+              <a:ext uri="{FF2B5EF4-FFF2-40B4-BE49-F238E27FC236}">
+                <a16:creationId xmlns:a16="http://schemas.microsoft.com/office/drawing/2014/main" id="{7F335295-C7CC-72E3-994D-0E98EB37CA10}"/>
+              </a:ext>
+            </a:extLst>
+          </p:cNvPr>
+          <p:cNvPicPr>
+            <a:picLocks noChangeAspect="1"/>
+          </p:cNvPicPr>
+          <p:nvPr/>
+        </p:nvPicPr>
+        <p:blipFill>
+          <a:blip r:embed="rId3"/>
+          <a:stretch>
+            <a:fillRect/>
+          </a:stretch>
+        </p:blipFill>
+        <p:spPr>
+          <a:xfrm>
+            <a:off x="6561414" y="3057473"/>
+            <a:ext cx="1657581" cy="743054"/>
+          </a:xfrm>
+          <a:prstGeom prst="rect">
+            <a:avLst/>
+          </a:prstGeom>
+          <a:ln>
+            <a:solidFill>
+              <a:schemeClr val="bg2">
+                <a:lumMod val="90000"/>
+              </a:schemeClr>
+            </a:solidFill>
+          </a:ln>
+        </p:spPr>
+      </p:pic>
+      <p:pic>
+        <p:nvPicPr>
+          <p:cNvPr id="11" name="図 10">
+            <a:extLst>
+              <a:ext uri="{FF2B5EF4-FFF2-40B4-BE49-F238E27FC236}">
+                <a16:creationId xmlns:a16="http://schemas.microsoft.com/office/drawing/2014/main" id="{2EA25C3C-3DD1-992A-DEF3-EB8346BF7E48}"/>
+              </a:ext>
+            </a:extLst>
+          </p:cNvPr>
+          <p:cNvPicPr>
+            <a:picLocks noChangeAspect="1"/>
+          </p:cNvPicPr>
+          <p:nvPr/>
+        </p:nvPicPr>
+        <p:blipFill>
+          <a:blip r:embed="rId4"/>
+          <a:stretch>
+            <a:fillRect/>
+          </a:stretch>
+        </p:blipFill>
+        <p:spPr>
+          <a:xfrm>
+            <a:off x="6557193" y="4118220"/>
+            <a:ext cx="2000529" cy="495369"/>
+          </a:xfrm>
+          <a:prstGeom prst="rect">
+            <a:avLst/>
+          </a:prstGeom>
+          <a:ln>
+            <a:solidFill>
+              <a:schemeClr val="bg2">
+                <a:lumMod val="90000"/>
+              </a:schemeClr>
+            </a:solidFill>
+          </a:ln>
+        </p:spPr>
+      </p:pic>
+      <p:cxnSp>
+        <p:nvCxnSpPr>
+          <p:cNvPr id="14" name="直線矢印コネクタ 13">
+            <a:extLst>
+              <a:ext uri="{FF2B5EF4-FFF2-40B4-BE49-F238E27FC236}">
+                <a16:creationId xmlns:a16="http://schemas.microsoft.com/office/drawing/2014/main" id="{A4E5A545-F232-4F9F-B17C-03B4E0B25176}"/>
+              </a:ext>
+            </a:extLst>
+          </p:cNvPr>
+          <p:cNvCxnSpPr>
+            <a:cxnSpLocks/>
+          </p:cNvCxnSpPr>
+          <p:nvPr/>
+        </p:nvCxnSpPr>
+        <p:spPr>
+          <a:xfrm>
+            <a:off x="6125361" y="3327583"/>
+            <a:ext cx="0" cy="790637"/>
+          </a:xfrm>
+          <a:prstGeom prst="straightConnector1">
+            <a:avLst/>
+          </a:prstGeom>
+          <a:ln w="57150">
+            <a:solidFill>
+              <a:schemeClr val="accent4">
+                <a:lumMod val="75000"/>
+              </a:schemeClr>
+            </a:solidFill>
+            <a:tailEnd type="triangle"/>
+          </a:ln>
+        </p:spPr>
+        <p:style>
+          <a:lnRef idx="1">
+            <a:schemeClr val="accent1"/>
+          </a:lnRef>
+          <a:fillRef idx="0">
+            <a:schemeClr val="accent1"/>
+          </a:fillRef>
+          <a:effectRef idx="0">
+            <a:schemeClr val="accent1"/>
+          </a:effectRef>
+          <a:fontRef idx="minor">
+            <a:schemeClr val="tx1"/>
+          </a:fontRef>
+        </p:style>
+      </p:cxnSp>
+      <p:sp>
+        <p:nvSpPr>
+          <p:cNvPr id="20" name="正方形/長方形 19">
+            <a:extLst>
+              <a:ext uri="{FF2B5EF4-FFF2-40B4-BE49-F238E27FC236}">
+                <a16:creationId xmlns:a16="http://schemas.microsoft.com/office/drawing/2014/main" id="{5283B15D-C396-0481-9999-32D9694D8941}"/>
+              </a:ext>
+            </a:extLst>
+          </p:cNvPr>
+          <p:cNvSpPr/>
+          <p:nvPr/>
+        </p:nvSpPr>
+        <p:spPr>
+          <a:xfrm>
+            <a:off x="8870046" y="2853897"/>
+            <a:ext cx="2784606" cy="2256610"/>
+          </a:xfrm>
+          <a:prstGeom prst="rect">
+            <a:avLst/>
+          </a:prstGeom>
+          <a:solidFill>
+            <a:schemeClr val="accent2">
+              <a:lumMod val="40000"/>
+              <a:lumOff val="60000"/>
+            </a:schemeClr>
+          </a:solidFill>
+          <a:ln>
+            <a:noFill/>
+          </a:ln>
+        </p:spPr>
+        <p:style>
+          <a:lnRef idx="2">
+            <a:schemeClr val="accent1">
+              <a:shade val="15000"/>
+            </a:schemeClr>
+          </a:lnRef>
+          <a:fillRef idx="1">
+            <a:schemeClr val="accent1"/>
+          </a:fillRef>
+          <a:effectRef idx="0">
+            <a:schemeClr val="accent1"/>
+          </a:effectRef>
+          <a:fontRef idx="minor">
+            <a:schemeClr val="lt1"/>
+          </a:fontRef>
+        </p:style>
+        <p:txBody>
+          <a:bodyPr rtlCol="0" anchor="t"/>
+          <a:lstStyle/>
+          <a:p>
+            <a:r>
+              <a:rPr lang="en-US" altLang="ja-JP" sz="1200" dirty="0">
+                <a:solidFill>
+                  <a:schemeClr val="tx1"/>
+                </a:solidFill>
+              </a:rPr>
+              <a:t>paste()</a:t>
+            </a:r>
+          </a:p>
+          <a:p>
+            <a:r>
+              <a:rPr lang="en-US" altLang="ja-JP" sz="1200" dirty="0">
+                <a:solidFill>
+                  <a:schemeClr val="tx1"/>
+                </a:solidFill>
+              </a:rPr>
+              <a:t>()</a:t>
+            </a:r>
+            <a:r>
+              <a:rPr lang="ja-JP" altLang="en-US" sz="1200" dirty="0">
+                <a:solidFill>
+                  <a:schemeClr val="tx1"/>
+                </a:solidFill>
+              </a:rPr>
+              <a:t>の中の要素を文字型に変えて、つなげて出力する関数</a:t>
+            </a:r>
+            <a:endParaRPr lang="en-US" altLang="ja-JP" sz="1200" dirty="0">
+              <a:solidFill>
+                <a:schemeClr val="tx1"/>
+              </a:solidFill>
+            </a:endParaRPr>
+          </a:p>
+          <a:p>
+            <a:endParaRPr lang="en-US" altLang="ja-JP" sz="1200" dirty="0">
+              <a:solidFill>
+                <a:schemeClr val="tx1"/>
+              </a:solidFill>
+            </a:endParaRPr>
+          </a:p>
+          <a:p>
+            <a:r>
+              <a:rPr lang="en-US" altLang="ja-JP" sz="1200" dirty="0">
+                <a:solidFill>
+                  <a:schemeClr val="tx1"/>
+                </a:solidFill>
+              </a:rPr>
+              <a:t>collapse = “ “</a:t>
+            </a:r>
+          </a:p>
+          <a:p>
+            <a:r>
+              <a:rPr lang="ja-JP" altLang="en-US" sz="1200" dirty="0">
+                <a:solidFill>
+                  <a:schemeClr val="tx1"/>
+                </a:solidFill>
+              </a:rPr>
+              <a:t>要素間をスペースで区切る</a:t>
+            </a:r>
+            <a:endParaRPr lang="en-US" altLang="ja-JP" sz="1200" dirty="0">
+              <a:solidFill>
+                <a:schemeClr val="tx1"/>
+              </a:solidFill>
+            </a:endParaRPr>
+          </a:p>
+          <a:p>
+            <a:r>
+              <a:rPr lang="ja-JP" altLang="en-US" sz="1200" dirty="0">
+                <a:solidFill>
+                  <a:schemeClr val="tx1"/>
+                </a:solidFill>
+              </a:rPr>
+              <a:t>単一ベクトルの全要素をまとめる際</a:t>
+            </a:r>
+            <a:endParaRPr lang="en-US" altLang="ja-JP" sz="1200" dirty="0">
+              <a:solidFill>
+                <a:schemeClr val="tx1"/>
+              </a:solidFill>
+            </a:endParaRPr>
+          </a:p>
+          <a:p>
+            <a:endParaRPr lang="en-US" altLang="ja-JP" sz="1200" dirty="0">
+              <a:solidFill>
+                <a:schemeClr val="tx1"/>
+              </a:solidFill>
+            </a:endParaRPr>
+          </a:p>
+          <a:p>
+            <a:r>
+              <a:rPr lang="en-US" altLang="ja-JP" sz="1200" dirty="0" err="1">
+                <a:solidFill>
+                  <a:schemeClr val="tx1"/>
+                </a:solidFill>
+              </a:rPr>
+              <a:t>sep</a:t>
+            </a:r>
+            <a:r>
+              <a:rPr lang="en-US" altLang="ja-JP" sz="1200" dirty="0">
+                <a:solidFill>
+                  <a:schemeClr val="tx1"/>
+                </a:solidFill>
+              </a:rPr>
+              <a:t> = “ “</a:t>
+            </a:r>
+          </a:p>
+          <a:p>
+            <a:r>
+              <a:rPr lang="ja-JP" altLang="en-US" sz="1200" dirty="0">
+                <a:solidFill>
+                  <a:schemeClr val="tx1"/>
+                </a:solidFill>
+              </a:rPr>
+              <a:t>要素間をスペースで区切る</a:t>
+            </a:r>
+            <a:endParaRPr lang="en-US" altLang="ja-JP" sz="1200" dirty="0">
+              <a:solidFill>
+                <a:schemeClr val="tx1"/>
+              </a:solidFill>
+            </a:endParaRPr>
+          </a:p>
+          <a:p>
+            <a:r>
+              <a:rPr lang="ja-JP" altLang="en-US" sz="1200" dirty="0">
+                <a:solidFill>
+                  <a:schemeClr val="tx1"/>
+                </a:solidFill>
+              </a:rPr>
+              <a:t>複数ベクトルの要素同士を結合する際</a:t>
+            </a:r>
+            <a:endParaRPr lang="en-US" altLang="ja-JP" sz="1200" dirty="0">
+              <a:solidFill>
+                <a:schemeClr val="tx1"/>
+              </a:solidFill>
+            </a:endParaRPr>
+          </a:p>
+        </p:txBody>
+      </p:sp>
+      <p:sp>
+        <p:nvSpPr>
+          <p:cNvPr id="27" name="正方形/長方形 26">
+            <a:extLst>
+              <a:ext uri="{FF2B5EF4-FFF2-40B4-BE49-F238E27FC236}">
+                <a16:creationId xmlns:a16="http://schemas.microsoft.com/office/drawing/2014/main" id="{F70BE05E-CCBE-3495-A303-4F3D5787529E}"/>
+              </a:ext>
+            </a:extLst>
+          </p:cNvPr>
+          <p:cNvSpPr/>
+          <p:nvPr/>
+        </p:nvSpPr>
+        <p:spPr>
+          <a:xfrm>
+            <a:off x="8870046" y="5303283"/>
+            <a:ext cx="1059529" cy="302473"/>
+          </a:xfrm>
+          <a:prstGeom prst="rect">
+            <a:avLst/>
+          </a:prstGeom>
+          <a:solidFill>
+            <a:schemeClr val="accent2">
+              <a:lumMod val="40000"/>
+              <a:lumOff val="60000"/>
+            </a:schemeClr>
+          </a:solidFill>
+          <a:ln>
+            <a:noFill/>
+          </a:ln>
+        </p:spPr>
+        <p:style>
+          <a:lnRef idx="2">
+            <a:schemeClr val="accent1">
+              <a:shade val="15000"/>
+            </a:schemeClr>
+          </a:lnRef>
+          <a:fillRef idx="1">
+            <a:schemeClr val="accent1"/>
+          </a:fillRef>
+          <a:effectRef idx="0">
+            <a:schemeClr val="accent1"/>
+          </a:effectRef>
+          <a:fontRef idx="minor">
+            <a:schemeClr val="lt1"/>
+          </a:fontRef>
+        </p:style>
+        <p:txBody>
+          <a:bodyPr rtlCol="0" anchor="t"/>
+          <a:lstStyle/>
+          <a:p>
+            <a:r>
+              <a:rPr lang="en-US" altLang="ja-JP" sz="1200" dirty="0">
+                <a:solidFill>
+                  <a:schemeClr val="tx1"/>
+                </a:solidFill>
+              </a:rPr>
+              <a:t>\n</a:t>
+            </a:r>
+            <a:r>
+              <a:rPr lang="ja-JP" altLang="en-US" sz="1200" dirty="0">
+                <a:solidFill>
+                  <a:schemeClr val="tx1"/>
+                </a:solidFill>
+              </a:rPr>
+              <a:t> ： 改行</a:t>
+            </a:r>
+            <a:endParaRPr lang="en-US" altLang="ja-JP" sz="1200" dirty="0">
+              <a:solidFill>
+                <a:schemeClr val="tx1"/>
+              </a:solidFill>
+            </a:endParaRPr>
+          </a:p>
+        </p:txBody>
+      </p:sp>
+      <p:pic>
+        <p:nvPicPr>
+          <p:cNvPr id="30" name="図 29">
+            <a:extLst>
+              <a:ext uri="{FF2B5EF4-FFF2-40B4-BE49-F238E27FC236}">
+                <a16:creationId xmlns:a16="http://schemas.microsoft.com/office/drawing/2014/main" id="{CF6FD371-28C1-D400-AA1B-5E6561E47744}"/>
+              </a:ext>
+            </a:extLst>
+          </p:cNvPr>
+          <p:cNvPicPr>
+            <a:picLocks noChangeAspect="1"/>
+          </p:cNvPicPr>
+          <p:nvPr/>
+        </p:nvPicPr>
+        <p:blipFill>
+          <a:blip r:embed="rId5"/>
+          <a:stretch>
+            <a:fillRect/>
+          </a:stretch>
+        </p:blipFill>
+        <p:spPr>
+          <a:xfrm>
+            <a:off x="1173163" y="2890802"/>
+            <a:ext cx="3610479" cy="2333951"/>
+          </a:xfrm>
+          <a:prstGeom prst="rect">
+            <a:avLst/>
+          </a:prstGeom>
+          <a:ln>
+            <a:solidFill>
+              <a:schemeClr val="bg2">
+                <a:lumMod val="90000"/>
+              </a:schemeClr>
+            </a:solidFill>
+          </a:ln>
+        </p:spPr>
+      </p:pic>
+      <p:sp>
+        <p:nvSpPr>
+          <p:cNvPr id="31" name="正方形/長方形 30">
+            <a:extLst>
+              <a:ext uri="{FF2B5EF4-FFF2-40B4-BE49-F238E27FC236}">
+                <a16:creationId xmlns:a16="http://schemas.microsoft.com/office/drawing/2014/main" id="{BE449088-C6B6-95B9-330D-75FBE046A0A8}"/>
+              </a:ext>
+            </a:extLst>
+          </p:cNvPr>
+          <p:cNvSpPr/>
+          <p:nvPr/>
+        </p:nvSpPr>
+        <p:spPr>
+          <a:xfrm>
+            <a:off x="8870046" y="5798532"/>
+            <a:ext cx="2337230" cy="302472"/>
+          </a:xfrm>
+          <a:prstGeom prst="rect">
+            <a:avLst/>
+          </a:prstGeom>
+          <a:solidFill>
+            <a:schemeClr val="accent2">
+              <a:lumMod val="40000"/>
+              <a:lumOff val="60000"/>
+            </a:schemeClr>
+          </a:solidFill>
+          <a:ln>
+            <a:noFill/>
+          </a:ln>
+        </p:spPr>
+        <p:style>
+          <a:lnRef idx="2">
+            <a:schemeClr val="accent1">
+              <a:shade val="15000"/>
+            </a:schemeClr>
+          </a:lnRef>
+          <a:fillRef idx="1">
+            <a:schemeClr val="accent1"/>
+          </a:fillRef>
+          <a:effectRef idx="0">
+            <a:schemeClr val="accent1"/>
+          </a:effectRef>
+          <a:fontRef idx="minor">
+            <a:schemeClr val="lt1"/>
+          </a:fontRef>
+        </p:style>
+        <p:txBody>
+          <a:bodyPr rtlCol="0" anchor="t"/>
+          <a:lstStyle/>
+          <a:p>
+            <a:r>
+              <a:rPr lang="en-US" altLang="ja-JP" sz="1200" dirty="0">
+                <a:solidFill>
+                  <a:schemeClr val="tx1"/>
+                </a:solidFill>
+              </a:rPr>
+              <a:t>cat()</a:t>
+            </a:r>
+            <a:r>
+              <a:rPr lang="ja-JP" altLang="en-US" sz="1200" dirty="0">
+                <a:solidFill>
+                  <a:schemeClr val="tx1"/>
+                </a:solidFill>
+              </a:rPr>
+              <a:t> </a:t>
+            </a:r>
+            <a:r>
+              <a:rPr lang="en-US" altLang="ja-JP" sz="1200" dirty="0">
+                <a:solidFill>
+                  <a:schemeClr val="tx1"/>
+                </a:solidFill>
+              </a:rPr>
+              <a:t>:</a:t>
+            </a:r>
+            <a:r>
+              <a:rPr lang="ja-JP" altLang="en-US" sz="1200" dirty="0">
+                <a:solidFill>
+                  <a:schemeClr val="tx1"/>
+                </a:solidFill>
+              </a:rPr>
+              <a:t> できた文字列を表示する</a:t>
+            </a:r>
+            <a:endParaRPr lang="en-US" altLang="ja-JP" sz="1200" dirty="0">
+              <a:solidFill>
+                <a:schemeClr val="tx1"/>
+              </a:solidFill>
+            </a:endParaRPr>
+          </a:p>
+        </p:txBody>
+      </p:sp>
     </p:spTree>
     <p:extLst>
       <p:ext uri="{BB962C8B-B14F-4D97-AF65-F5344CB8AC3E}">
-        <p14:creationId xmlns:p14="http://schemas.microsoft.com/office/powerpoint/2010/main" val="178053947"/>
+        <p14:creationId xmlns:p14="http://schemas.microsoft.com/office/powerpoint/2010/main" val="2806002260"/>
       </p:ext>
     </p:extLst>
   </p:cSld>
@@ -4770,6 +5966,567 @@
           <a:p>
             <a:pPr algn="l"/>
             <a:r>
+              <a:rPr lang="ja-JP" altLang="en-US" sz="3000" b="1" dirty="0">
+                <a:solidFill>
+                  <a:schemeClr val="tx1">
+                    <a:lumMod val="65000"/>
+                    <a:lumOff val="35000"/>
+                  </a:schemeClr>
+                </a:solidFill>
+                <a:latin typeface="メイリオ" panose="020B0604030504040204" pitchFamily="50" charset="-128"/>
+                <a:ea typeface="メイリオ" panose="020B0604030504040204" pitchFamily="50" charset="-128"/>
+              </a:rPr>
+              <a:t>８</a:t>
+            </a:r>
+            <a:r>
+              <a:rPr kumimoji="1" lang="ja-JP" altLang="en-US" sz="3000" b="1" dirty="0">
+                <a:solidFill>
+                  <a:schemeClr val="tx1">
+                    <a:lumMod val="65000"/>
+                    <a:lumOff val="35000"/>
+                  </a:schemeClr>
+                </a:solidFill>
+                <a:latin typeface="メイリオ" panose="020B0604030504040204" pitchFamily="50" charset="-128"/>
+                <a:ea typeface="メイリオ" panose="020B0604030504040204" pitchFamily="50" charset="-128"/>
+              </a:rPr>
+              <a:t>章　</a:t>
+            </a:r>
+            <a:r>
+              <a:rPr kumimoji="1" lang="en-US" altLang="ja-JP" sz="3000" b="1" dirty="0">
+                <a:solidFill>
+                  <a:schemeClr val="tx1">
+                    <a:lumMod val="65000"/>
+                    <a:lumOff val="35000"/>
+                  </a:schemeClr>
+                </a:solidFill>
+                <a:latin typeface="メイリオ" panose="020B0604030504040204" pitchFamily="50" charset="-128"/>
+                <a:ea typeface="メイリオ" panose="020B0604030504040204" pitchFamily="50" charset="-128"/>
+              </a:rPr>
+              <a:t>S3</a:t>
+            </a:r>
+            <a:endParaRPr kumimoji="1" lang="ja-JP" altLang="en-US" sz="3000" b="1" dirty="0">
+              <a:solidFill>
+                <a:schemeClr val="tx1">
+                  <a:lumMod val="65000"/>
+                  <a:lumOff val="35000"/>
+                </a:schemeClr>
+              </a:solidFill>
+              <a:latin typeface="メイリオ" panose="020B0604030504040204" pitchFamily="50" charset="-128"/>
+              <a:ea typeface="メイリオ" panose="020B0604030504040204" pitchFamily="50" charset="-128"/>
+            </a:endParaRPr>
+          </a:p>
+        </p:txBody>
+      </p:sp>
+      <p:sp>
+        <p:nvSpPr>
+          <p:cNvPr id="4" name="正方形/長方形 3">
+            <a:extLst>
+              <a:ext uri="{FF2B5EF4-FFF2-40B4-BE49-F238E27FC236}">
+                <a16:creationId xmlns:a16="http://schemas.microsoft.com/office/drawing/2014/main" id="{578782C7-6070-7C3A-DAB7-3101F4C6ED5C}"/>
+              </a:ext>
+            </a:extLst>
+          </p:cNvPr>
+          <p:cNvSpPr/>
+          <p:nvPr/>
+        </p:nvSpPr>
+        <p:spPr>
+          <a:xfrm>
+            <a:off x="698353" y="1019123"/>
+            <a:ext cx="10540261" cy="5528957"/>
+          </a:xfrm>
+          <a:prstGeom prst="rect">
+            <a:avLst/>
+          </a:prstGeom>
+          <a:solidFill>
+            <a:schemeClr val="accent4">
+              <a:lumMod val="20000"/>
+              <a:lumOff val="80000"/>
+            </a:schemeClr>
+          </a:solidFill>
+          <a:ln>
+            <a:noFill/>
+          </a:ln>
+        </p:spPr>
+        <p:style>
+          <a:lnRef idx="2">
+            <a:schemeClr val="accent1">
+              <a:shade val="15000"/>
+            </a:schemeClr>
+          </a:lnRef>
+          <a:fillRef idx="1">
+            <a:schemeClr val="accent1"/>
+          </a:fillRef>
+          <a:effectRef idx="0">
+            <a:schemeClr val="accent1"/>
+          </a:effectRef>
+          <a:fontRef idx="minor">
+            <a:schemeClr val="lt1"/>
+          </a:fontRef>
+        </p:style>
+        <p:txBody>
+          <a:bodyPr rtlCol="0" anchor="t"/>
+          <a:lstStyle/>
+          <a:p>
+            <a:endParaRPr kumimoji="1" lang="ja-JP" altLang="en-US" dirty="0"/>
+          </a:p>
+        </p:txBody>
+      </p:sp>
+      <p:sp>
+        <p:nvSpPr>
+          <p:cNvPr id="3" name="字幕 2">
+            <a:extLst>
+              <a:ext uri="{FF2B5EF4-FFF2-40B4-BE49-F238E27FC236}">
+                <a16:creationId xmlns:a16="http://schemas.microsoft.com/office/drawing/2014/main" id="{EF422FEA-2F34-70ED-56A9-01A65A2AD142}"/>
+              </a:ext>
+            </a:extLst>
+          </p:cNvPr>
+          <p:cNvSpPr>
+            <a:spLocks noGrp="1"/>
+          </p:cNvSpPr>
+          <p:nvPr>
+            <p:ph type="subTitle" idx="1"/>
+          </p:nvPr>
+        </p:nvSpPr>
+        <p:spPr>
+          <a:xfrm>
+            <a:off x="682560" y="1143635"/>
+            <a:ext cx="10540261" cy="5446283"/>
+          </a:xfrm>
+        </p:spPr>
+        <p:txBody>
+          <a:bodyPr>
+            <a:normAutofit/>
+          </a:bodyPr>
+          <a:lstStyle/>
+          <a:p>
+            <a:pPr algn="l"/>
+            <a:r>
+              <a:rPr kumimoji="1" lang="ja-JP" altLang="en-US" sz="2000" dirty="0">
+                <a:solidFill>
+                  <a:schemeClr val="accent4">
+                    <a:lumMod val="75000"/>
+                  </a:schemeClr>
+                </a:solidFill>
+                <a:latin typeface="メイリオ" panose="020B0604030504040204" pitchFamily="50" charset="-128"/>
+                <a:ea typeface="メイリオ" panose="020B0604030504040204" pitchFamily="50" charset="-128"/>
+              </a:rPr>
+              <a:t>＃</a:t>
+            </a:r>
+            <a:r>
+              <a:rPr lang="en-US" altLang="ja-JP" sz="2000" dirty="0">
+                <a:solidFill>
+                  <a:schemeClr val="accent4">
+                    <a:lumMod val="75000"/>
+                  </a:schemeClr>
+                </a:solidFill>
+                <a:latin typeface="メイリオ" panose="020B0604030504040204" pitchFamily="50" charset="-128"/>
+                <a:ea typeface="メイリオ" panose="020B0604030504040204" pitchFamily="50" charset="-128"/>
+              </a:rPr>
+              <a:t>#</a:t>
+            </a:r>
+            <a:r>
+              <a:rPr lang="ja-JP" altLang="en-US" sz="2000" dirty="0">
+                <a:solidFill>
+                  <a:schemeClr val="accent4">
+                    <a:lumMod val="75000"/>
+                  </a:schemeClr>
+                </a:solidFill>
+                <a:latin typeface="メイリオ" panose="020B0604030504040204" pitchFamily="50" charset="-128"/>
+                <a:ea typeface="メイリオ" panose="020B0604030504040204" pitchFamily="50" charset="-128"/>
+              </a:rPr>
+              <a:t>ジェネリック関数</a:t>
+            </a:r>
+            <a:endParaRPr kumimoji="1" lang="en-US" altLang="ja-JP" sz="2000" dirty="0">
+              <a:solidFill>
+                <a:schemeClr val="accent4">
+                  <a:lumMod val="75000"/>
+                </a:schemeClr>
+              </a:solidFill>
+              <a:latin typeface="メイリオ" panose="020B0604030504040204" pitchFamily="50" charset="-128"/>
+              <a:ea typeface="メイリオ" panose="020B0604030504040204" pitchFamily="50" charset="-128"/>
+            </a:endParaRPr>
+          </a:p>
+          <a:p>
+            <a:pPr algn="l"/>
+            <a:r>
+              <a:rPr lang="ja-JP" altLang="en-US" sz="1200" dirty="0">
+                <a:latin typeface="メイリオ" panose="020B0604030504040204" pitchFamily="50" charset="-128"/>
+                <a:ea typeface="メイリオ" panose="020B0604030504040204" pitchFamily="50" charset="-128"/>
+              </a:rPr>
+              <a:t>関</a:t>
+            </a:r>
+            <a:endParaRPr lang="en-US" altLang="ja-JP" sz="1200" dirty="0">
+              <a:latin typeface="メイリオ" panose="020B0604030504040204" pitchFamily="50" charset="-128"/>
+              <a:ea typeface="メイリオ" panose="020B0604030504040204" pitchFamily="50" charset="-128"/>
+            </a:endParaRPr>
+          </a:p>
+        </p:txBody>
+      </p:sp>
+      <p:cxnSp>
+        <p:nvCxnSpPr>
+          <p:cNvPr id="13" name="直線矢印コネクタ 12">
+            <a:extLst>
+              <a:ext uri="{FF2B5EF4-FFF2-40B4-BE49-F238E27FC236}">
+                <a16:creationId xmlns:a16="http://schemas.microsoft.com/office/drawing/2014/main" id="{74FF8975-518B-E7D8-023D-CCCCAEBC6F95}"/>
+              </a:ext>
+            </a:extLst>
+          </p:cNvPr>
+          <p:cNvCxnSpPr>
+            <a:cxnSpLocks/>
+          </p:cNvCxnSpPr>
+          <p:nvPr/>
+        </p:nvCxnSpPr>
+        <p:spPr>
+          <a:xfrm>
+            <a:off x="4885857" y="483169"/>
+            <a:ext cx="579279" cy="0"/>
+          </a:xfrm>
+          <a:prstGeom prst="straightConnector1">
+            <a:avLst/>
+          </a:prstGeom>
+          <a:ln w="57150">
+            <a:solidFill>
+              <a:schemeClr val="accent4">
+                <a:lumMod val="75000"/>
+              </a:schemeClr>
+            </a:solidFill>
+            <a:tailEnd type="triangle"/>
+          </a:ln>
+        </p:spPr>
+        <p:style>
+          <a:lnRef idx="1">
+            <a:schemeClr val="accent1"/>
+          </a:lnRef>
+          <a:fillRef idx="0">
+            <a:schemeClr val="accent1"/>
+          </a:fillRef>
+          <a:effectRef idx="0">
+            <a:schemeClr val="accent1"/>
+          </a:effectRef>
+          <a:fontRef idx="minor">
+            <a:schemeClr val="tx1"/>
+          </a:fontRef>
+        </p:style>
+      </p:cxnSp>
+      <p:sp>
+        <p:nvSpPr>
+          <p:cNvPr id="31" name="正方形/長方形 30">
+            <a:extLst>
+              <a:ext uri="{FF2B5EF4-FFF2-40B4-BE49-F238E27FC236}">
+                <a16:creationId xmlns:a16="http://schemas.microsoft.com/office/drawing/2014/main" id="{BE449088-C6B6-95B9-330D-75FBE046A0A8}"/>
+              </a:ext>
+            </a:extLst>
+          </p:cNvPr>
+          <p:cNvSpPr/>
+          <p:nvPr/>
+        </p:nvSpPr>
+        <p:spPr>
+          <a:xfrm>
+            <a:off x="8470921" y="1566190"/>
+            <a:ext cx="2783486" cy="953725"/>
+          </a:xfrm>
+          <a:prstGeom prst="rect">
+            <a:avLst/>
+          </a:prstGeom>
+          <a:solidFill>
+            <a:schemeClr val="accent2">
+              <a:lumMod val="40000"/>
+              <a:lumOff val="60000"/>
+            </a:schemeClr>
+          </a:solidFill>
+          <a:ln>
+            <a:noFill/>
+          </a:ln>
+        </p:spPr>
+        <p:style>
+          <a:lnRef idx="2">
+            <a:schemeClr val="accent1">
+              <a:shade val="15000"/>
+            </a:schemeClr>
+          </a:lnRef>
+          <a:fillRef idx="1">
+            <a:schemeClr val="accent1"/>
+          </a:fillRef>
+          <a:effectRef idx="0">
+            <a:schemeClr val="accent1"/>
+          </a:effectRef>
+          <a:fontRef idx="minor">
+            <a:schemeClr val="lt1"/>
+          </a:fontRef>
+        </p:style>
+        <p:txBody>
+          <a:bodyPr rtlCol="0" anchor="t"/>
+          <a:lstStyle/>
+          <a:p>
+            <a:r>
+              <a:rPr lang="ja-JP" altLang="en-US" sz="1200" dirty="0">
+                <a:solidFill>
+                  <a:schemeClr val="tx1"/>
+                </a:solidFill>
+              </a:rPr>
+              <a:t>ジェネリック関数</a:t>
+            </a:r>
+            <a:endParaRPr lang="en-US" altLang="ja-JP" sz="1200" dirty="0">
+              <a:solidFill>
+                <a:schemeClr val="tx1"/>
+              </a:solidFill>
+            </a:endParaRPr>
+          </a:p>
+          <a:p>
+            <a:r>
+              <a:rPr lang="ja-JP" altLang="en-US" sz="1200" dirty="0">
+                <a:solidFill>
+                  <a:schemeClr val="tx1"/>
+                </a:solidFill>
+              </a:rPr>
+              <a:t>入力されたオブジェクトの型によって処理を変える関数</a:t>
+            </a:r>
+            <a:endParaRPr lang="en-US" altLang="ja-JP" sz="1200" dirty="0">
+              <a:solidFill>
+                <a:schemeClr val="tx1"/>
+              </a:solidFill>
+            </a:endParaRPr>
+          </a:p>
+        </p:txBody>
+      </p:sp>
+    </p:spTree>
+    <p:extLst>
+      <p:ext uri="{BB962C8B-B14F-4D97-AF65-F5344CB8AC3E}">
+        <p14:creationId xmlns:p14="http://schemas.microsoft.com/office/powerpoint/2010/main" val="1372951181"/>
+      </p:ext>
+    </p:extLst>
+  </p:cSld>
+  <p:clrMapOvr>
+    <a:masterClrMapping/>
+  </p:clrMapOvr>
+</p:sld>
+</file>
+
+<file path=ppt/slides/slide12.xml><?xml version="1.0" encoding="utf-8"?>
+<p:sld xmlns:a="http://schemas.openxmlformats.org/drawingml/2006/main" xmlns:r="http://schemas.openxmlformats.org/officeDocument/2006/relationships" xmlns:p="http://schemas.openxmlformats.org/presentationml/2006/main">
+  <p:cSld>
+    <p:spTree>
+      <p:nvGrpSpPr>
+        <p:cNvPr id="1" name=""/>
+        <p:cNvGrpSpPr/>
+        <p:nvPr/>
+      </p:nvGrpSpPr>
+      <p:grpSpPr>
+        <a:xfrm>
+          <a:off x="0" y="0"/>
+          <a:ext cx="0" cy="0"/>
+          <a:chOff x="0" y="0"/>
+          <a:chExt cx="0" cy="0"/>
+        </a:xfrm>
+      </p:grpSpPr>
+      <p:sp>
+        <p:nvSpPr>
+          <p:cNvPr id="2" name="タイトル 1">
+            <a:extLst>
+              <a:ext uri="{FF2B5EF4-FFF2-40B4-BE49-F238E27FC236}">
+                <a16:creationId xmlns:a16="http://schemas.microsoft.com/office/drawing/2014/main" id="{8F92D15D-6ED6-F1E2-415D-C5D0D0CAAC83}"/>
+              </a:ext>
+            </a:extLst>
+          </p:cNvPr>
+          <p:cNvSpPr>
+            <a:spLocks noGrp="1"/>
+          </p:cNvSpPr>
+          <p:nvPr>
+            <p:ph type="ctrTitle"/>
+          </p:nvPr>
+        </p:nvSpPr>
+        <p:spPr>
+          <a:xfrm>
+            <a:off x="528181" y="314435"/>
+            <a:ext cx="5891408" cy="700173"/>
+          </a:xfrm>
+        </p:spPr>
+        <p:txBody>
+          <a:bodyPr>
+            <a:normAutofit/>
+          </a:bodyPr>
+          <a:lstStyle/>
+          <a:p>
+            <a:pPr algn="l"/>
+            <a:r>
+              <a:rPr kumimoji="1" lang="ja-JP" altLang="en-US" sz="3000" b="1" dirty="0">
+                <a:solidFill>
+                  <a:schemeClr val="tx1">
+                    <a:lumMod val="65000"/>
+                    <a:lumOff val="35000"/>
+                  </a:schemeClr>
+                </a:solidFill>
+                <a:latin typeface="メイリオ" panose="020B0604030504040204" pitchFamily="50" charset="-128"/>
+                <a:ea typeface="メイリオ" panose="020B0604030504040204" pitchFamily="50" charset="-128"/>
+              </a:rPr>
+              <a:t>８章　</a:t>
+            </a:r>
+            <a:r>
+              <a:rPr kumimoji="1" lang="en-US" altLang="ja-JP" sz="3000" b="1" dirty="0">
+                <a:solidFill>
+                  <a:schemeClr val="tx1">
+                    <a:lumMod val="65000"/>
+                    <a:lumOff val="35000"/>
+                  </a:schemeClr>
+                </a:solidFill>
+                <a:latin typeface="メイリオ" panose="020B0604030504040204" pitchFamily="50" charset="-128"/>
+                <a:ea typeface="メイリオ" panose="020B0604030504040204" pitchFamily="50" charset="-128"/>
+              </a:rPr>
+              <a:t>S</a:t>
+            </a:r>
+            <a:r>
+              <a:rPr kumimoji="1" lang="ja-JP" altLang="en-US" sz="3000" b="1" dirty="0">
+                <a:solidFill>
+                  <a:schemeClr val="tx1">
+                    <a:lumMod val="65000"/>
+                    <a:lumOff val="35000"/>
+                  </a:schemeClr>
+                </a:solidFill>
+                <a:latin typeface="メイリオ" panose="020B0604030504040204" pitchFamily="50" charset="-128"/>
+                <a:ea typeface="メイリオ" panose="020B0604030504040204" pitchFamily="50" charset="-128"/>
+              </a:rPr>
+              <a:t>３　</a:t>
+            </a:r>
+            <a:r>
+              <a:rPr lang="ja-JP" altLang="en-US" sz="3000" b="1" dirty="0">
+                <a:solidFill>
+                  <a:schemeClr val="tx1">
+                    <a:lumMod val="65000"/>
+                    <a:lumOff val="35000"/>
+                  </a:schemeClr>
+                </a:solidFill>
+                <a:latin typeface="メイリオ" panose="020B0604030504040204" pitchFamily="50" charset="-128"/>
+                <a:ea typeface="メイリオ" panose="020B0604030504040204" pitchFamily="50" charset="-128"/>
+              </a:rPr>
+              <a:t>最終コード</a:t>
+            </a:r>
+            <a:endParaRPr kumimoji="1" lang="ja-JP" altLang="en-US" sz="3000" b="1" dirty="0">
+              <a:solidFill>
+                <a:schemeClr val="tx1">
+                  <a:lumMod val="65000"/>
+                  <a:lumOff val="35000"/>
+                </a:schemeClr>
+              </a:solidFill>
+              <a:latin typeface="メイリオ" panose="020B0604030504040204" pitchFamily="50" charset="-128"/>
+              <a:ea typeface="メイリオ" panose="020B0604030504040204" pitchFamily="50" charset="-128"/>
+            </a:endParaRPr>
+          </a:p>
+        </p:txBody>
+      </p:sp>
+      <p:sp>
+        <p:nvSpPr>
+          <p:cNvPr id="11" name="正方形/長方形 10">
+            <a:extLst>
+              <a:ext uri="{FF2B5EF4-FFF2-40B4-BE49-F238E27FC236}">
+                <a16:creationId xmlns:a16="http://schemas.microsoft.com/office/drawing/2014/main" id="{661A3A95-316A-208D-1006-9B4CAF8277CA}"/>
+              </a:ext>
+            </a:extLst>
+          </p:cNvPr>
+          <p:cNvSpPr/>
+          <p:nvPr/>
+        </p:nvSpPr>
+        <p:spPr>
+          <a:xfrm>
+            <a:off x="528181" y="892099"/>
+            <a:ext cx="11135638" cy="5965902"/>
+          </a:xfrm>
+          <a:prstGeom prst="rect">
+            <a:avLst/>
+          </a:prstGeom>
+          <a:solidFill>
+            <a:schemeClr val="accent4">
+              <a:lumMod val="20000"/>
+              <a:lumOff val="80000"/>
+            </a:schemeClr>
+          </a:solidFill>
+          <a:ln>
+            <a:noFill/>
+          </a:ln>
+        </p:spPr>
+        <p:style>
+          <a:lnRef idx="2">
+            <a:schemeClr val="accent1">
+              <a:shade val="15000"/>
+            </a:schemeClr>
+          </a:lnRef>
+          <a:fillRef idx="1">
+            <a:schemeClr val="accent1"/>
+          </a:fillRef>
+          <a:effectRef idx="0">
+            <a:schemeClr val="accent1"/>
+          </a:effectRef>
+          <a:fontRef idx="minor">
+            <a:schemeClr val="lt1"/>
+          </a:fontRef>
+        </p:style>
+        <p:txBody>
+          <a:bodyPr rtlCol="0" anchor="t"/>
+          <a:lstStyle/>
+          <a:p>
+            <a:endParaRPr kumimoji="1" lang="ja-JP" altLang="en-US" dirty="0"/>
+          </a:p>
+        </p:txBody>
+      </p:sp>
+    </p:spTree>
+    <p:extLst>
+      <p:ext uri="{BB962C8B-B14F-4D97-AF65-F5344CB8AC3E}">
+        <p14:creationId xmlns:p14="http://schemas.microsoft.com/office/powerpoint/2010/main" val="178053947"/>
+      </p:ext>
+    </p:extLst>
+  </p:cSld>
+  <p:clrMapOvr>
+    <a:masterClrMapping/>
+  </p:clrMapOvr>
+</p:sld>
+</file>
+
+<file path=ppt/slides/slide13.xml><?xml version="1.0" encoding="utf-8"?>
+<p:sld xmlns:a="http://schemas.openxmlformats.org/drawingml/2006/main" xmlns:r="http://schemas.openxmlformats.org/officeDocument/2006/relationships" xmlns:p="http://schemas.openxmlformats.org/presentationml/2006/main">
+  <p:cSld>
+    <p:spTree>
+      <p:nvGrpSpPr>
+        <p:cNvPr id="1" name=""/>
+        <p:cNvGrpSpPr/>
+        <p:nvPr/>
+      </p:nvGrpSpPr>
+      <p:grpSpPr>
+        <a:xfrm>
+          <a:off x="0" y="0"/>
+          <a:ext cx="0" cy="0"/>
+          <a:chOff x="0" y="0"/>
+          <a:chExt cx="0" cy="0"/>
+        </a:xfrm>
+      </p:grpSpPr>
+      <p:sp>
+        <p:nvSpPr>
+          <p:cNvPr id="2" name="タイトル 1">
+            <a:extLst>
+              <a:ext uri="{FF2B5EF4-FFF2-40B4-BE49-F238E27FC236}">
+                <a16:creationId xmlns:a16="http://schemas.microsoft.com/office/drawing/2014/main" id="{8F92D15D-6ED6-F1E2-415D-C5D0D0CAAC83}"/>
+              </a:ext>
+            </a:extLst>
+          </p:cNvPr>
+          <p:cNvSpPr>
+            <a:spLocks noGrp="1"/>
+          </p:cNvSpPr>
+          <p:nvPr>
+            <p:ph type="ctrTitle"/>
+          </p:nvPr>
+        </p:nvSpPr>
+        <p:spPr>
+          <a:xfrm>
+            <a:off x="528181" y="314435"/>
+            <a:ext cx="5891408" cy="700173"/>
+          </a:xfrm>
+        </p:spPr>
+        <p:txBody>
+          <a:bodyPr>
+            <a:normAutofit/>
+          </a:bodyPr>
+          <a:lstStyle/>
+          <a:p>
+            <a:pPr algn="l"/>
+            <a:r>
               <a:rPr kumimoji="1" lang="en-US" altLang="ja-JP" sz="3000" b="1" dirty="0">
                 <a:solidFill>
                   <a:schemeClr val="tx1">
@@ -4957,7 +6714,7 @@
         </p:nvGrpSpPr>
         <p:grpSpPr>
           <a:xfrm>
-            <a:off x="1396317" y="3608861"/>
+            <a:off x="1428696" y="3320195"/>
             <a:ext cx="3917578" cy="2481371"/>
             <a:chOff x="1396317" y="3608861"/>
             <a:chExt cx="3917578" cy="2481371"/>
@@ -10357,7 +12114,7 @@
 </p:sld>
 </file>
 
-<file path=ppt/slides/slide12.xml><?xml version="1.0" encoding="utf-8"?>
+<file path=ppt/slides/slide14.xml><?xml version="1.0" encoding="utf-8"?>
 <p:sld xmlns:a="http://schemas.openxmlformats.org/drawingml/2006/main" xmlns:r="http://schemas.openxmlformats.org/officeDocument/2006/relationships" xmlns:p="http://schemas.openxmlformats.org/presentationml/2006/main">
   <p:cSld>
     <p:spTree>
@@ -11144,7 +12901,7 @@
 </p:sld>
 </file>
 
-<file path=ppt/slides/slide13.xml><?xml version="1.0" encoding="utf-8"?>
+<file path=ppt/slides/slide15.xml><?xml version="1.0" encoding="utf-8"?>
 <p:sld xmlns:a="http://schemas.openxmlformats.org/drawingml/2006/main" xmlns:r="http://schemas.openxmlformats.org/officeDocument/2006/relationships" xmlns:p="http://schemas.openxmlformats.org/presentationml/2006/main">
   <p:cSld>
     <p:spTree>
@@ -12068,7 +13825,7 @@
 </p:sld>
 </file>
 
-<file path=ppt/slides/slide14.xml><?xml version="1.0" encoding="utf-8"?>
+<file path=ppt/slides/slide16.xml><?xml version="1.0" encoding="utf-8"?>
 <p:sld xmlns:a="http://schemas.openxmlformats.org/drawingml/2006/main" xmlns:r="http://schemas.openxmlformats.org/officeDocument/2006/relationships" xmlns:p="http://schemas.openxmlformats.org/presentationml/2006/main">
   <p:cSld>
     <p:spTree>
@@ -13449,7 +15206,7 @@
 </p:sld>
 </file>
 
-<file path=ppt/slides/slide15.xml><?xml version="1.0" encoding="utf-8"?>
+<file path=ppt/slides/slide17.xml><?xml version="1.0" encoding="utf-8"?>
 <p:sld xmlns:a="http://schemas.openxmlformats.org/drawingml/2006/main" xmlns:r="http://schemas.openxmlformats.org/officeDocument/2006/relationships" xmlns:p="http://schemas.openxmlformats.org/presentationml/2006/main">
   <p:cSld>
     <p:spTree>
@@ -14720,7 +16477,7 @@
 </p:sld>
 </file>
 
-<file path=ppt/slides/slide16.xml><?xml version="1.0" encoding="utf-8"?>
+<file path=ppt/slides/slide18.xml><?xml version="1.0" encoding="utf-8"?>
 <p:sld xmlns:a="http://schemas.openxmlformats.org/drawingml/2006/main" xmlns:r="http://schemas.openxmlformats.org/officeDocument/2006/relationships" xmlns:p="http://schemas.openxmlformats.org/presentationml/2006/main">
   <p:cSld>
     <p:spTree>
@@ -15747,7 +17504,7 @@
 </p:sld>
 </file>
 
-<file path=ppt/slides/slide17.xml><?xml version="1.0" encoding="utf-8"?>
+<file path=ppt/slides/slide19.xml><?xml version="1.0" encoding="utf-8"?>
 <p:sld xmlns:a="http://schemas.openxmlformats.org/drawingml/2006/main" xmlns:r="http://schemas.openxmlformats.org/officeDocument/2006/relationships" xmlns:p="http://schemas.openxmlformats.org/presentationml/2006/main">
   <p:cSld>
     <p:spTree>
@@ -15995,525 +17752,6 @@
     <p:extLst>
       <p:ext uri="{BB962C8B-B14F-4D97-AF65-F5344CB8AC3E}">
         <p14:creationId xmlns:p14="http://schemas.microsoft.com/office/powerpoint/2010/main" val="510323477"/>
-      </p:ext>
-    </p:extLst>
-  </p:cSld>
-  <p:clrMapOvr>
-    <a:masterClrMapping/>
-  </p:clrMapOvr>
-</p:sld>
-</file>
-
-<file path=ppt/slides/slide18.xml><?xml version="1.0" encoding="utf-8"?>
-<p:sld xmlns:a="http://schemas.openxmlformats.org/drawingml/2006/main" xmlns:r="http://schemas.openxmlformats.org/officeDocument/2006/relationships" xmlns:p="http://schemas.openxmlformats.org/presentationml/2006/main">
-  <p:cSld>
-    <p:spTree>
-      <p:nvGrpSpPr>
-        <p:cNvPr id="1" name=""/>
-        <p:cNvGrpSpPr/>
-        <p:nvPr/>
-      </p:nvGrpSpPr>
-      <p:grpSpPr>
-        <a:xfrm>
-          <a:off x="0" y="0"/>
-          <a:ext cx="0" cy="0"/>
-          <a:chOff x="0" y="0"/>
-          <a:chExt cx="0" cy="0"/>
-        </a:xfrm>
-      </p:grpSpPr>
-      <p:sp>
-        <p:nvSpPr>
-          <p:cNvPr id="2" name="タイトル 1">
-            <a:extLst>
-              <a:ext uri="{FF2B5EF4-FFF2-40B4-BE49-F238E27FC236}">
-                <a16:creationId xmlns:a16="http://schemas.microsoft.com/office/drawing/2014/main" id="{8F92D15D-6ED6-F1E2-415D-C5D0D0CAAC83}"/>
-              </a:ext>
-            </a:extLst>
-          </p:cNvPr>
-          <p:cNvSpPr>
-            <a:spLocks noGrp="1"/>
-          </p:cNvSpPr>
-          <p:nvPr>
-            <p:ph type="ctrTitle"/>
-          </p:nvPr>
-        </p:nvSpPr>
-        <p:spPr>
-          <a:xfrm>
-            <a:off x="528181" y="314435"/>
-            <a:ext cx="5891408" cy="700173"/>
-          </a:xfrm>
-        </p:spPr>
-        <p:txBody>
-          <a:bodyPr>
-            <a:normAutofit fontScale="90000"/>
-          </a:bodyPr>
-          <a:lstStyle/>
-          <a:p>
-            <a:pPr algn="l"/>
-            <a:r>
-              <a:rPr lang="ja-JP" altLang="en-US" sz="3000" b="1" dirty="0">
-                <a:solidFill>
-                  <a:schemeClr val="tx1">
-                    <a:lumMod val="65000"/>
-                    <a:lumOff val="35000"/>
-                  </a:schemeClr>
-                </a:solidFill>
-                <a:latin typeface="メイリオ" panose="020B0604030504040204" pitchFamily="50" charset="-128"/>
-                <a:ea typeface="メイリオ" panose="020B0604030504040204" pitchFamily="50" charset="-128"/>
-              </a:rPr>
-              <a:t>１０</a:t>
-            </a:r>
-            <a:r>
-              <a:rPr kumimoji="1" lang="ja-JP" altLang="en-US" sz="3000" b="1" dirty="0">
-                <a:solidFill>
-                  <a:schemeClr val="tx1">
-                    <a:lumMod val="65000"/>
-                    <a:lumOff val="35000"/>
-                  </a:schemeClr>
-                </a:solidFill>
-                <a:latin typeface="メイリオ" panose="020B0604030504040204" pitchFamily="50" charset="-128"/>
-                <a:ea typeface="メイリオ" panose="020B0604030504040204" pitchFamily="50" charset="-128"/>
-              </a:rPr>
-              <a:t>章　スピード</a:t>
-            </a:r>
-            <a:r>
-              <a:rPr lang="ja-JP" altLang="en-US" sz="3000" b="1" dirty="0">
-                <a:solidFill>
-                  <a:schemeClr val="tx1">
-                    <a:lumMod val="65000"/>
-                    <a:lumOff val="35000"/>
-                  </a:schemeClr>
-                </a:solidFill>
-                <a:latin typeface="メイリオ" panose="020B0604030504040204" pitchFamily="50" charset="-128"/>
-                <a:ea typeface="メイリオ" panose="020B0604030504040204" pitchFamily="50" charset="-128"/>
-              </a:rPr>
-              <a:t>　フローチャート</a:t>
-            </a:r>
-            <a:endParaRPr kumimoji="1" lang="ja-JP" altLang="en-US" sz="3000" b="1" dirty="0">
-              <a:solidFill>
-                <a:schemeClr val="tx1">
-                  <a:lumMod val="65000"/>
-                  <a:lumOff val="35000"/>
-                </a:schemeClr>
-              </a:solidFill>
-              <a:latin typeface="メイリオ" panose="020B0604030504040204" pitchFamily="50" charset="-128"/>
-              <a:ea typeface="メイリオ" panose="020B0604030504040204" pitchFamily="50" charset="-128"/>
-            </a:endParaRPr>
-          </a:p>
-        </p:txBody>
-      </p:sp>
-      <p:sp>
-        <p:nvSpPr>
-          <p:cNvPr id="4" name="正方形/長方形 3">
-            <a:extLst>
-              <a:ext uri="{FF2B5EF4-FFF2-40B4-BE49-F238E27FC236}">
-                <a16:creationId xmlns:a16="http://schemas.microsoft.com/office/drawing/2014/main" id="{578782C7-6070-7C3A-DAB7-3101F4C6ED5C}"/>
-              </a:ext>
-            </a:extLst>
-          </p:cNvPr>
-          <p:cNvSpPr/>
-          <p:nvPr/>
-        </p:nvSpPr>
-        <p:spPr>
-          <a:xfrm>
-            <a:off x="884439" y="1097282"/>
-            <a:ext cx="10613447" cy="5528957"/>
-          </a:xfrm>
-          <a:prstGeom prst="rect">
-            <a:avLst/>
-          </a:prstGeom>
-          <a:solidFill>
-            <a:schemeClr val="accent4">
-              <a:lumMod val="40000"/>
-              <a:lumOff val="60000"/>
-            </a:schemeClr>
-          </a:solidFill>
-          <a:ln>
-            <a:noFill/>
-          </a:ln>
-        </p:spPr>
-        <p:style>
-          <a:lnRef idx="2">
-            <a:schemeClr val="accent1">
-              <a:shade val="15000"/>
-            </a:schemeClr>
-          </a:lnRef>
-          <a:fillRef idx="1">
-            <a:schemeClr val="accent1"/>
-          </a:fillRef>
-          <a:effectRef idx="0">
-            <a:schemeClr val="accent1"/>
-          </a:effectRef>
-          <a:fontRef idx="minor">
-            <a:schemeClr val="lt1"/>
-          </a:fontRef>
-        </p:style>
-        <p:txBody>
-          <a:bodyPr rtlCol="0" anchor="t"/>
-          <a:lstStyle/>
-          <a:p>
-            <a:endParaRPr kumimoji="1" lang="ja-JP" altLang="en-US" dirty="0">
-              <a:solidFill>
-                <a:schemeClr val="tx1"/>
-              </a:solidFill>
-              <a:latin typeface="メイリオ" panose="020B0604030504040204" pitchFamily="50" charset="-128"/>
-              <a:ea typeface="メイリオ" panose="020B0604030504040204" pitchFamily="50" charset="-128"/>
-            </a:endParaRPr>
-          </a:p>
-        </p:txBody>
-      </p:sp>
-    </p:spTree>
-    <p:extLst>
-      <p:ext uri="{BB962C8B-B14F-4D97-AF65-F5344CB8AC3E}">
-        <p14:creationId xmlns:p14="http://schemas.microsoft.com/office/powerpoint/2010/main" val="1975395573"/>
-      </p:ext>
-    </p:extLst>
-  </p:cSld>
-  <p:clrMapOvr>
-    <a:masterClrMapping/>
-  </p:clrMapOvr>
-</p:sld>
-</file>
-
-<file path=ppt/slides/slide19.xml><?xml version="1.0" encoding="utf-8"?>
-<p:sld xmlns:a="http://schemas.openxmlformats.org/drawingml/2006/main" xmlns:r="http://schemas.openxmlformats.org/officeDocument/2006/relationships" xmlns:p="http://schemas.openxmlformats.org/presentationml/2006/main">
-  <p:cSld>
-    <p:spTree>
-      <p:nvGrpSpPr>
-        <p:cNvPr id="1" name=""/>
-        <p:cNvGrpSpPr/>
-        <p:nvPr/>
-      </p:nvGrpSpPr>
-      <p:grpSpPr>
-        <a:xfrm>
-          <a:off x="0" y="0"/>
-          <a:ext cx="0" cy="0"/>
-          <a:chOff x="0" y="0"/>
-          <a:chExt cx="0" cy="0"/>
-        </a:xfrm>
-      </p:grpSpPr>
-      <p:sp>
-        <p:nvSpPr>
-          <p:cNvPr id="2" name="タイトル 1">
-            <a:extLst>
-              <a:ext uri="{FF2B5EF4-FFF2-40B4-BE49-F238E27FC236}">
-                <a16:creationId xmlns:a16="http://schemas.microsoft.com/office/drawing/2014/main" id="{8F92D15D-6ED6-F1E2-415D-C5D0D0CAAC83}"/>
-              </a:ext>
-            </a:extLst>
-          </p:cNvPr>
-          <p:cNvSpPr>
-            <a:spLocks noGrp="1"/>
-          </p:cNvSpPr>
-          <p:nvPr>
-            <p:ph type="ctrTitle"/>
-          </p:nvPr>
-        </p:nvSpPr>
-        <p:spPr>
-          <a:xfrm>
-            <a:off x="528181" y="314435"/>
-            <a:ext cx="5891408" cy="700173"/>
-          </a:xfrm>
-        </p:spPr>
-        <p:txBody>
-          <a:bodyPr>
-            <a:normAutofit/>
-          </a:bodyPr>
-          <a:lstStyle/>
-          <a:p>
-            <a:pPr algn="l"/>
-            <a:r>
-              <a:rPr lang="ja-JP" altLang="en-US" sz="3000" b="1" dirty="0">
-                <a:solidFill>
-                  <a:schemeClr val="tx1">
-                    <a:lumMod val="65000"/>
-                    <a:lumOff val="35000"/>
-                  </a:schemeClr>
-                </a:solidFill>
-                <a:latin typeface="メイリオ" panose="020B0604030504040204" pitchFamily="50" charset="-128"/>
-                <a:ea typeface="メイリオ" panose="020B0604030504040204" pitchFamily="50" charset="-128"/>
-              </a:rPr>
-              <a:t>１０</a:t>
-            </a:r>
-            <a:r>
-              <a:rPr kumimoji="1" lang="ja-JP" altLang="en-US" sz="3000" b="1" dirty="0">
-                <a:solidFill>
-                  <a:schemeClr val="tx1">
-                    <a:lumMod val="65000"/>
-                    <a:lumOff val="35000"/>
-                  </a:schemeClr>
-                </a:solidFill>
-                <a:latin typeface="メイリオ" panose="020B0604030504040204" pitchFamily="50" charset="-128"/>
-                <a:ea typeface="メイリオ" panose="020B0604030504040204" pitchFamily="50" charset="-128"/>
-              </a:rPr>
-              <a:t>章　</a:t>
-            </a:r>
-            <a:r>
-              <a:rPr lang="ja-JP" altLang="en-US" sz="3000" b="1" dirty="0">
-                <a:solidFill>
-                  <a:schemeClr val="tx1">
-                    <a:lumMod val="65000"/>
-                    <a:lumOff val="35000"/>
-                  </a:schemeClr>
-                </a:solidFill>
-                <a:latin typeface="メイリオ" panose="020B0604030504040204" pitchFamily="50" charset="-128"/>
-                <a:ea typeface="メイリオ" panose="020B0604030504040204" pitchFamily="50" charset="-128"/>
-              </a:rPr>
-              <a:t>スピード</a:t>
-            </a:r>
-            <a:endParaRPr kumimoji="1" lang="ja-JP" altLang="en-US" sz="3000" b="1" dirty="0">
-              <a:solidFill>
-                <a:schemeClr val="tx1">
-                  <a:lumMod val="65000"/>
-                  <a:lumOff val="35000"/>
-                </a:schemeClr>
-              </a:solidFill>
-              <a:latin typeface="メイリオ" panose="020B0604030504040204" pitchFamily="50" charset="-128"/>
-              <a:ea typeface="メイリオ" panose="020B0604030504040204" pitchFamily="50" charset="-128"/>
-            </a:endParaRPr>
-          </a:p>
-        </p:txBody>
-      </p:sp>
-      <p:sp>
-        <p:nvSpPr>
-          <p:cNvPr id="4" name="正方形/長方形 3">
-            <a:extLst>
-              <a:ext uri="{FF2B5EF4-FFF2-40B4-BE49-F238E27FC236}">
-                <a16:creationId xmlns:a16="http://schemas.microsoft.com/office/drawing/2014/main" id="{578782C7-6070-7C3A-DAB7-3101F4C6ED5C}"/>
-              </a:ext>
-            </a:extLst>
-          </p:cNvPr>
-          <p:cNvSpPr/>
-          <p:nvPr/>
-        </p:nvSpPr>
-        <p:spPr>
-          <a:xfrm>
-            <a:off x="658169" y="1098587"/>
-            <a:ext cx="10540261" cy="5528957"/>
-          </a:xfrm>
-          <a:prstGeom prst="rect">
-            <a:avLst/>
-          </a:prstGeom>
-          <a:solidFill>
-            <a:schemeClr val="accent4">
-              <a:lumMod val="20000"/>
-              <a:lumOff val="80000"/>
-            </a:schemeClr>
-          </a:solidFill>
-          <a:ln>
-            <a:noFill/>
-          </a:ln>
-        </p:spPr>
-        <p:style>
-          <a:lnRef idx="2">
-            <a:schemeClr val="accent1">
-              <a:shade val="15000"/>
-            </a:schemeClr>
-          </a:lnRef>
-          <a:fillRef idx="1">
-            <a:schemeClr val="accent1"/>
-          </a:fillRef>
-          <a:effectRef idx="0">
-            <a:schemeClr val="accent1"/>
-          </a:effectRef>
-          <a:fontRef idx="minor">
-            <a:schemeClr val="lt1"/>
-          </a:fontRef>
-        </p:style>
-        <p:txBody>
-          <a:bodyPr rtlCol="0" anchor="t"/>
-          <a:lstStyle/>
-          <a:p>
-            <a:endParaRPr kumimoji="1" lang="ja-JP" altLang="en-US" dirty="0"/>
-          </a:p>
-        </p:txBody>
-      </p:sp>
-      <p:sp>
-        <p:nvSpPr>
-          <p:cNvPr id="6" name="正方形/長方形 5">
-            <a:extLst>
-              <a:ext uri="{FF2B5EF4-FFF2-40B4-BE49-F238E27FC236}">
-                <a16:creationId xmlns:a16="http://schemas.microsoft.com/office/drawing/2014/main" id="{75CE81D2-C5EE-4E63-DA6F-4D50A6E33162}"/>
-              </a:ext>
-            </a:extLst>
-          </p:cNvPr>
-          <p:cNvSpPr/>
-          <p:nvPr/>
-        </p:nvSpPr>
-        <p:spPr>
-          <a:xfrm>
-            <a:off x="8561647" y="1263081"/>
-            <a:ext cx="2391170" cy="1183629"/>
-          </a:xfrm>
-          <a:prstGeom prst="rect">
-            <a:avLst/>
-          </a:prstGeom>
-          <a:solidFill>
-            <a:schemeClr val="accent2">
-              <a:lumMod val="40000"/>
-              <a:lumOff val="60000"/>
-            </a:schemeClr>
-          </a:solidFill>
-          <a:ln>
-            <a:noFill/>
-          </a:ln>
-        </p:spPr>
-        <p:style>
-          <a:lnRef idx="2">
-            <a:schemeClr val="accent1">
-              <a:shade val="15000"/>
-            </a:schemeClr>
-          </a:lnRef>
-          <a:fillRef idx="1">
-            <a:schemeClr val="accent1"/>
-          </a:fillRef>
-          <a:effectRef idx="0">
-            <a:schemeClr val="accent1"/>
-          </a:effectRef>
-          <a:fontRef idx="minor">
-            <a:schemeClr val="lt1"/>
-          </a:fontRef>
-        </p:style>
-        <p:txBody>
-          <a:bodyPr rtlCol="0" anchor="t"/>
-          <a:lstStyle/>
-          <a:p>
-            <a:endParaRPr lang="en-US" altLang="ja-JP" sz="1000" dirty="0">
-              <a:solidFill>
-                <a:schemeClr val="tx1"/>
-              </a:solidFill>
-            </a:endParaRPr>
-          </a:p>
-        </p:txBody>
-      </p:sp>
-      <p:sp>
-        <p:nvSpPr>
-          <p:cNvPr id="3" name="字幕 2">
-            <a:extLst>
-              <a:ext uri="{FF2B5EF4-FFF2-40B4-BE49-F238E27FC236}">
-                <a16:creationId xmlns:a16="http://schemas.microsoft.com/office/drawing/2014/main" id="{EF422FEA-2F34-70ED-56A9-01A65A2AD142}"/>
-              </a:ext>
-            </a:extLst>
-          </p:cNvPr>
-          <p:cNvSpPr>
-            <a:spLocks noGrp="1"/>
-          </p:cNvSpPr>
-          <p:nvPr>
-            <p:ph type="subTitle" idx="1"/>
-          </p:nvPr>
-        </p:nvSpPr>
-        <p:spPr>
-          <a:xfrm>
-            <a:off x="682560" y="1143635"/>
-            <a:ext cx="9391483" cy="5446283"/>
-          </a:xfrm>
-        </p:spPr>
-        <p:txBody>
-          <a:bodyPr>
-            <a:normAutofit/>
-          </a:bodyPr>
-          <a:lstStyle/>
-          <a:p>
-            <a:pPr algn="l"/>
-            <a:r>
-              <a:rPr kumimoji="1" lang="ja-JP" altLang="en-US" sz="2000" dirty="0">
-                <a:solidFill>
-                  <a:schemeClr val="accent4">
-                    <a:lumMod val="75000"/>
-                  </a:schemeClr>
-                </a:solidFill>
-                <a:latin typeface="メイリオ" panose="020B0604030504040204" pitchFamily="50" charset="-128"/>
-                <a:ea typeface="メイリオ" panose="020B0604030504040204" pitchFamily="50" charset="-128"/>
-              </a:rPr>
-              <a:t>＃</a:t>
-            </a:r>
-            <a:r>
-              <a:rPr lang="en-US" altLang="ja-JP" sz="2000" dirty="0">
-                <a:solidFill>
-                  <a:schemeClr val="accent4">
-                    <a:lumMod val="75000"/>
-                  </a:schemeClr>
-                </a:solidFill>
-                <a:latin typeface="メイリオ" panose="020B0604030504040204" pitchFamily="50" charset="-128"/>
-                <a:ea typeface="メイリオ" panose="020B0604030504040204" pitchFamily="50" charset="-128"/>
-              </a:rPr>
-              <a:t>#</a:t>
-            </a:r>
-            <a:endParaRPr kumimoji="1" lang="en-US" altLang="ja-JP" sz="2000" dirty="0">
-              <a:solidFill>
-                <a:schemeClr val="accent4">
-                  <a:lumMod val="75000"/>
-                </a:schemeClr>
-              </a:solidFill>
-              <a:latin typeface="メイリオ" panose="020B0604030504040204" pitchFamily="50" charset="-128"/>
-              <a:ea typeface="メイリオ" panose="020B0604030504040204" pitchFamily="50" charset="-128"/>
-            </a:endParaRPr>
-          </a:p>
-          <a:p>
-            <a:pPr algn="l"/>
-            <a:r>
-              <a:rPr lang="ja-JP" altLang="en-US" sz="1200" dirty="0">
-                <a:latin typeface="メイリオ" panose="020B0604030504040204" pitchFamily="50" charset="-128"/>
-                <a:ea typeface="メイリオ" panose="020B0604030504040204" pitchFamily="50" charset="-128"/>
-              </a:rPr>
-              <a:t>変数名：</a:t>
-            </a:r>
-            <a:endParaRPr lang="en-US" altLang="ja-JP" sz="1200" dirty="0">
-              <a:latin typeface="メイリオ" panose="020B0604030504040204" pitchFamily="50" charset="-128"/>
-              <a:ea typeface="メイリオ" panose="020B0604030504040204" pitchFamily="50" charset="-128"/>
-            </a:endParaRPr>
-          </a:p>
-        </p:txBody>
-      </p:sp>
-      <p:cxnSp>
-        <p:nvCxnSpPr>
-          <p:cNvPr id="13" name="直線矢印コネクタ 12">
-            <a:extLst>
-              <a:ext uri="{FF2B5EF4-FFF2-40B4-BE49-F238E27FC236}">
-                <a16:creationId xmlns:a16="http://schemas.microsoft.com/office/drawing/2014/main" id="{74FF8975-518B-E7D8-023D-CCCCAEBC6F95}"/>
-              </a:ext>
-            </a:extLst>
-          </p:cNvPr>
-          <p:cNvCxnSpPr>
-            <a:cxnSpLocks/>
-          </p:cNvCxnSpPr>
-          <p:nvPr/>
-        </p:nvCxnSpPr>
-        <p:spPr>
-          <a:xfrm>
-            <a:off x="4548393" y="1472982"/>
-            <a:ext cx="581891" cy="0"/>
-          </a:xfrm>
-          <a:prstGeom prst="straightConnector1">
-            <a:avLst/>
-          </a:prstGeom>
-          <a:ln w="57150">
-            <a:solidFill>
-              <a:schemeClr val="accent4">
-                <a:lumMod val="75000"/>
-              </a:schemeClr>
-            </a:solidFill>
-            <a:tailEnd type="triangle"/>
-          </a:ln>
-        </p:spPr>
-        <p:style>
-          <a:lnRef idx="1">
-            <a:schemeClr val="accent1"/>
-          </a:lnRef>
-          <a:fillRef idx="0">
-            <a:schemeClr val="accent1"/>
-          </a:fillRef>
-          <a:effectRef idx="0">
-            <a:schemeClr val="accent1"/>
-          </a:effectRef>
-          <a:fontRef idx="minor">
-            <a:schemeClr val="tx1"/>
-          </a:fontRef>
-        </p:style>
-      </p:cxnSp>
-    </p:spTree>
-    <p:extLst>
-      <p:ext uri="{BB962C8B-B14F-4D97-AF65-F5344CB8AC3E}">
-        <p14:creationId xmlns:p14="http://schemas.microsoft.com/office/powerpoint/2010/main" val="1088393112"/>
       </p:ext>
     </p:extLst>
   </p:cSld>
@@ -21088,7 +22326,7 @@
         </p:spPr>
         <p:txBody>
           <a:bodyPr>
-            <a:normAutofit/>
+            <a:normAutofit fontScale="90000"/>
           </a:bodyPr>
           <a:lstStyle/>
           <a:p>
@@ -21117,17 +22355,40 @@
                 <a:latin typeface="メイリオ" panose="020B0604030504040204" pitchFamily="50" charset="-128"/>
                 <a:ea typeface="メイリオ" panose="020B0604030504040204" pitchFamily="50" charset="-128"/>
               </a:rPr>
-              <a:t>章　スピード　最終コード</a:t>
-            </a:r>
+              <a:t>章　スピード</a:t>
+            </a:r>
+            <a:r>
+              <a:rPr lang="ja-JP" altLang="en-US" sz="3000" b="1" dirty="0">
+                <a:solidFill>
+                  <a:schemeClr val="tx1">
+                    <a:lumMod val="65000"/>
+                    <a:lumOff val="35000"/>
+                  </a:schemeClr>
+                </a:solidFill>
+                <a:latin typeface="メイリオ" panose="020B0604030504040204" pitchFamily="50" charset="-128"/>
+                <a:ea typeface="メイリオ" panose="020B0604030504040204" pitchFamily="50" charset="-128"/>
+              </a:rPr>
+              <a:t>　フローチャート</a:t>
+            </a:r>
+            <a:endParaRPr kumimoji="1" lang="ja-JP" altLang="en-US" sz="3000" b="1" dirty="0">
+              <a:solidFill>
+                <a:schemeClr val="tx1">
+                  <a:lumMod val="65000"/>
+                  <a:lumOff val="35000"/>
+                </a:schemeClr>
+              </a:solidFill>
+              <a:latin typeface="メイリオ" panose="020B0604030504040204" pitchFamily="50" charset="-128"/>
+              <a:ea typeface="メイリオ" panose="020B0604030504040204" pitchFamily="50" charset="-128"/>
+            </a:endParaRPr>
           </a:p>
         </p:txBody>
       </p:sp>
       <p:sp>
         <p:nvSpPr>
-          <p:cNvPr id="11" name="正方形/長方形 10">
-            <a:extLst>
-              <a:ext uri="{FF2B5EF4-FFF2-40B4-BE49-F238E27FC236}">
-                <a16:creationId xmlns:a16="http://schemas.microsoft.com/office/drawing/2014/main" id="{661A3A95-316A-208D-1006-9B4CAF8277CA}"/>
+          <p:cNvPr id="4" name="正方形/長方形 3">
+            <a:extLst>
+              <a:ext uri="{FF2B5EF4-FFF2-40B4-BE49-F238E27FC236}">
+                <a16:creationId xmlns:a16="http://schemas.microsoft.com/office/drawing/2014/main" id="{578782C7-6070-7C3A-DAB7-3101F4C6ED5C}"/>
               </a:ext>
             </a:extLst>
           </p:cNvPr>
@@ -21136,16 +22397,16 @@
         </p:nvSpPr>
         <p:spPr>
           <a:xfrm>
-            <a:off x="528181" y="892099"/>
-            <a:ext cx="11135638" cy="5965902"/>
+            <a:off x="884439" y="1097282"/>
+            <a:ext cx="10613447" cy="5528957"/>
           </a:xfrm>
           <a:prstGeom prst="rect">
             <a:avLst/>
           </a:prstGeom>
           <a:solidFill>
             <a:schemeClr val="accent4">
-              <a:lumMod val="20000"/>
-              <a:lumOff val="80000"/>
+              <a:lumMod val="40000"/>
+              <a:lumOff val="60000"/>
             </a:schemeClr>
           </a:solidFill>
           <a:ln>
@@ -21172,14 +22433,20 @@
           <a:bodyPr rtlCol="0" anchor="t"/>
           <a:lstStyle/>
           <a:p>
-            <a:endParaRPr kumimoji="1" lang="ja-JP" altLang="en-US" dirty="0"/>
+            <a:endParaRPr kumimoji="1" lang="ja-JP" altLang="en-US" dirty="0">
+              <a:solidFill>
+                <a:schemeClr val="tx1"/>
+              </a:solidFill>
+              <a:latin typeface="メイリオ" panose="020B0604030504040204" pitchFamily="50" charset="-128"/>
+              <a:ea typeface="メイリオ" panose="020B0604030504040204" pitchFamily="50" charset="-128"/>
+            </a:endParaRPr>
           </a:p>
         </p:txBody>
       </p:sp>
     </p:spTree>
     <p:extLst>
       <p:ext uri="{BB962C8B-B14F-4D97-AF65-F5344CB8AC3E}">
-        <p14:creationId xmlns:p14="http://schemas.microsoft.com/office/powerpoint/2010/main" val="1134685979"/>
+        <p14:creationId xmlns:p14="http://schemas.microsoft.com/office/powerpoint/2010/main" val="1975395573"/>
       </p:ext>
     </p:extLst>
   </p:cSld>
@@ -21236,7 +22503,7 @@
           <a:p>
             <a:pPr algn="l"/>
             <a:r>
-              <a:rPr kumimoji="1" lang="ja-JP" altLang="en-US" sz="3000" b="1" dirty="0">
+              <a:rPr lang="ja-JP" altLang="en-US" sz="3000" b="1" dirty="0">
                 <a:solidFill>
                   <a:schemeClr val="tx1">
                     <a:lumMod val="65000"/>
@@ -21246,8 +22513,44 @@
                 <a:latin typeface="メイリオ" panose="020B0604030504040204" pitchFamily="50" charset="-128"/>
                 <a:ea typeface="メイリオ" panose="020B0604030504040204" pitchFamily="50" charset="-128"/>
               </a:rPr>
-              <a:t>疑問点</a:t>
-            </a:r>
+              <a:t>１０</a:t>
+            </a:r>
+            <a:r>
+              <a:rPr kumimoji="1" lang="ja-JP" altLang="en-US" sz="3000" b="1" dirty="0">
+                <a:solidFill>
+                  <a:schemeClr val="tx1">
+                    <a:lumMod val="65000"/>
+                    <a:lumOff val="35000"/>
+                  </a:schemeClr>
+                </a:solidFill>
+                <a:latin typeface="メイリオ" panose="020B0604030504040204" pitchFamily="50" charset="-128"/>
+                <a:ea typeface="メイリオ" panose="020B0604030504040204" pitchFamily="50" charset="-128"/>
+              </a:rPr>
+              <a:t>章　</a:t>
+            </a:r>
+            <a:r>
+              <a:rPr lang="ja-JP" altLang="en-US" sz="3000" b="1" dirty="0">
+                <a:solidFill>
+                  <a:schemeClr val="tx1">
+                    <a:lumMod val="65000"/>
+                    <a:lumOff val="35000"/>
+                  </a:schemeClr>
+                </a:solidFill>
+                <a:latin typeface="メイリオ" panose="020B0604030504040204" pitchFamily="50" charset="-128"/>
+                <a:ea typeface="メイリオ" panose="020B0604030504040204" pitchFamily="50" charset="-128"/>
+              </a:rPr>
+              <a:t>スピード</a:t>
+            </a:r>
+            <a:endParaRPr kumimoji="1" lang="ja-JP" altLang="en-US" sz="3000" b="1" dirty="0">
+              <a:solidFill>
+                <a:schemeClr val="tx1">
+                  <a:lumMod val="65000"/>
+                  <a:lumOff val="35000"/>
+                </a:schemeClr>
+              </a:solidFill>
+              <a:latin typeface="メイリオ" panose="020B0604030504040204" pitchFamily="50" charset="-128"/>
+              <a:ea typeface="メイリオ" panose="020B0604030504040204" pitchFamily="50" charset="-128"/>
+            </a:endParaRPr>
           </a:p>
         </p:txBody>
       </p:sp>
@@ -21265,14 +22568,68 @@
         </p:nvSpPr>
         <p:spPr>
           <a:xfrm>
-            <a:off x="884439" y="1109610"/>
-            <a:ext cx="9440262" cy="5528957"/>
+            <a:off x="658169" y="1098587"/>
+            <a:ext cx="10540261" cy="5528957"/>
           </a:xfrm>
           <a:prstGeom prst="rect">
             <a:avLst/>
           </a:prstGeom>
           <a:solidFill>
             <a:schemeClr val="accent4">
+              <a:lumMod val="20000"/>
+              <a:lumOff val="80000"/>
+            </a:schemeClr>
+          </a:solidFill>
+          <a:ln>
+            <a:noFill/>
+          </a:ln>
+        </p:spPr>
+        <p:style>
+          <a:lnRef idx="2">
+            <a:schemeClr val="accent1">
+              <a:shade val="15000"/>
+            </a:schemeClr>
+          </a:lnRef>
+          <a:fillRef idx="1">
+            <a:schemeClr val="accent1"/>
+          </a:fillRef>
+          <a:effectRef idx="0">
+            <a:schemeClr val="accent1"/>
+          </a:effectRef>
+          <a:fontRef idx="minor">
+            <a:schemeClr val="lt1"/>
+          </a:fontRef>
+        </p:style>
+        <p:txBody>
+          <a:bodyPr rtlCol="0" anchor="t"/>
+          <a:lstStyle/>
+          <a:p>
+            <a:endParaRPr kumimoji="1" lang="ja-JP" altLang="en-US" dirty="0"/>
+          </a:p>
+        </p:txBody>
+      </p:sp>
+      <p:sp>
+        <p:nvSpPr>
+          <p:cNvPr id="6" name="正方形/長方形 5">
+            <a:extLst>
+              <a:ext uri="{FF2B5EF4-FFF2-40B4-BE49-F238E27FC236}">
+                <a16:creationId xmlns:a16="http://schemas.microsoft.com/office/drawing/2014/main" id="{75CE81D2-C5EE-4E63-DA6F-4D50A6E33162}"/>
+              </a:ext>
+            </a:extLst>
+          </p:cNvPr>
+          <p:cNvSpPr/>
+          <p:nvPr/>
+        </p:nvSpPr>
+        <p:spPr>
+          <a:xfrm>
+            <a:off x="8561647" y="1263081"/>
+            <a:ext cx="2391170" cy="1183629"/>
+          </a:xfrm>
+          <a:prstGeom prst="rect">
+            <a:avLst/>
+          </a:prstGeom>
+          <a:solidFill>
+            <a:schemeClr val="accent2">
               <a:lumMod val="40000"/>
               <a:lumOff val="60000"/>
             </a:schemeClr>
@@ -21301,7 +22658,11 @@
           <a:bodyPr rtlCol="0" anchor="t"/>
           <a:lstStyle/>
           <a:p>
-            <a:endParaRPr kumimoji="1" lang="ja-JP" altLang="en-US" dirty="0"/>
+            <a:endParaRPr lang="en-US" altLang="ja-JP" sz="1000" dirty="0">
+              <a:solidFill>
+                <a:schemeClr val="tx1"/>
+              </a:solidFill>
+            </a:endParaRPr>
           </a:p>
         </p:txBody>
       </p:sp>
@@ -21323,7 +22684,7 @@
         </p:nvSpPr>
         <p:spPr>
           <a:xfrm>
-            <a:off x="884439" y="1097282"/>
+            <a:off x="682560" y="1143635"/>
             <a:ext cx="9391483" cy="5446283"/>
           </a:xfrm>
         </p:spPr>
@@ -21344,7 +22705,19 @@
                 <a:latin typeface="メイリオ" panose="020B0604030504040204" pitchFamily="50" charset="-128"/>
                 <a:ea typeface="メイリオ" panose="020B0604030504040204" pitchFamily="50" charset="-128"/>
               </a:rPr>
-              <a:t>配列の順番が０からではない理由</a:t>
+              <a:t>＃</a:t>
+            </a:r>
+            <a:r>
+              <a:rPr lang="en-US" altLang="ja-JP" sz="2000" dirty="0">
+                <a:solidFill>
+                  <a:schemeClr val="accent4">
+                    <a:lumMod val="75000"/>
+                  </a:schemeClr>
+                </a:solidFill>
+                <a:latin typeface="メイリオ" panose="020B0604030504040204" pitchFamily="50" charset="-128"/>
+                <a:ea typeface="メイリオ" panose="020B0604030504040204" pitchFamily="50" charset="-128"/>
+              </a:rPr>
+              <a:t>#</a:t>
             </a:r>
             <a:endParaRPr kumimoji="1" lang="en-US" altLang="ja-JP" sz="2000" dirty="0">
               <a:solidFill>
@@ -21358,206 +22731,70 @@
           </a:p>
           <a:p>
             <a:pPr algn="l"/>
-            <a:endParaRPr lang="en-US" altLang="ja-JP" sz="2000" dirty="0">
-              <a:solidFill>
-                <a:schemeClr val="accent4">
-                  <a:lumMod val="75000"/>
-                </a:schemeClr>
-              </a:solidFill>
+            <a:r>
+              <a:rPr lang="ja-JP" altLang="en-US" sz="1200" dirty="0">
+                <a:latin typeface="メイリオ" panose="020B0604030504040204" pitchFamily="50" charset="-128"/>
+                <a:ea typeface="メイリオ" panose="020B0604030504040204" pitchFamily="50" charset="-128"/>
+              </a:rPr>
+              <a:t>変数名：</a:t>
+            </a:r>
+            <a:endParaRPr lang="en-US" altLang="ja-JP" sz="1200" dirty="0">
               <a:latin typeface="メイリオ" panose="020B0604030504040204" pitchFamily="50" charset="-128"/>
               <a:ea typeface="メイリオ" panose="020B0604030504040204" pitchFamily="50" charset="-128"/>
             </a:endParaRPr>
           </a:p>
-          <a:p>
-            <a:pPr algn="l"/>
-            <a:r>
-              <a:rPr kumimoji="1" lang="en-US" altLang="ja-JP" sz="2000" dirty="0" err="1">
-                <a:solidFill>
-                  <a:schemeClr val="accent4">
-                    <a:lumMod val="75000"/>
-                  </a:schemeClr>
-                </a:solidFill>
-                <a:latin typeface="メイリオ" panose="020B0604030504040204" pitchFamily="50" charset="-128"/>
-                <a:ea typeface="メイリオ" panose="020B0604030504040204" pitchFamily="50" charset="-128"/>
-              </a:rPr>
-              <a:t>R,Python</a:t>
-            </a:r>
-            <a:r>
-              <a:rPr kumimoji="1" lang="ja-JP" altLang="en-US" sz="2000" dirty="0">
-                <a:solidFill>
-                  <a:schemeClr val="accent4">
-                    <a:lumMod val="75000"/>
-                  </a:schemeClr>
-                </a:solidFill>
-                <a:latin typeface="メイリオ" panose="020B0604030504040204" pitchFamily="50" charset="-128"/>
-                <a:ea typeface="メイリオ" panose="020B0604030504040204" pitchFamily="50" charset="-128"/>
-              </a:rPr>
-              <a:t>が肩を宣言する必要がない共通点に関して</a:t>
-            </a:r>
-            <a:endParaRPr kumimoji="1" lang="en-US" altLang="ja-JP" sz="2000" dirty="0">
-              <a:solidFill>
-                <a:schemeClr val="accent4">
-                  <a:lumMod val="75000"/>
-                </a:schemeClr>
-              </a:solidFill>
-              <a:latin typeface="メイリオ" panose="020B0604030504040204" pitchFamily="50" charset="-128"/>
-              <a:ea typeface="メイリオ" panose="020B0604030504040204" pitchFamily="50" charset="-128"/>
-            </a:endParaRPr>
-          </a:p>
-          <a:p>
-            <a:pPr algn="l"/>
-            <a:endParaRPr lang="en-US" altLang="ja-JP" sz="2000" dirty="0">
-              <a:solidFill>
-                <a:schemeClr val="accent4">
-                  <a:lumMod val="75000"/>
-                </a:schemeClr>
-              </a:solidFill>
-              <a:latin typeface="メイリオ" panose="020B0604030504040204" pitchFamily="50" charset="-128"/>
-              <a:ea typeface="メイリオ" panose="020B0604030504040204" pitchFamily="50" charset="-128"/>
-            </a:endParaRPr>
-          </a:p>
-          <a:p>
-            <a:pPr algn="l"/>
-            <a:r>
-              <a:rPr kumimoji="1" lang="en-US" altLang="ja-JP" sz="2000" dirty="0">
-                <a:solidFill>
-                  <a:schemeClr val="accent4">
-                    <a:lumMod val="75000"/>
-                  </a:schemeClr>
-                </a:solidFill>
-                <a:latin typeface="メイリオ" panose="020B0604030504040204" pitchFamily="50" charset="-128"/>
-                <a:ea typeface="メイリオ" panose="020B0604030504040204" pitchFamily="50" charset="-128"/>
-              </a:rPr>
-              <a:t>A,B,C </a:t>
-            </a:r>
-            <a:r>
-              <a:rPr kumimoji="1" lang="ja-JP" altLang="en-US" sz="2000" dirty="0">
-                <a:solidFill>
-                  <a:schemeClr val="accent4">
-                    <a:lumMod val="75000"/>
-                  </a:schemeClr>
-                </a:solidFill>
-                <a:latin typeface="メイリオ" panose="020B0604030504040204" pitchFamily="50" charset="-128"/>
-                <a:ea typeface="メイリオ" panose="020B0604030504040204" pitchFamily="50" charset="-128"/>
-              </a:rPr>
-              <a:t>と</a:t>
-            </a:r>
-            <a:r>
-              <a:rPr kumimoji="1" lang="en-US" altLang="ja-JP" sz="2000" dirty="0">
-                <a:solidFill>
-                  <a:schemeClr val="accent4">
-                    <a:lumMod val="75000"/>
-                  </a:schemeClr>
-                </a:solidFill>
-                <a:latin typeface="メイリオ" panose="020B0604030504040204" pitchFamily="50" charset="-128"/>
-                <a:ea typeface="メイリオ" panose="020B0604030504040204" pitchFamily="50" charset="-128"/>
-              </a:rPr>
-              <a:t>B,A</a:t>
-            </a:r>
-            <a:r>
-              <a:rPr lang="en-US" altLang="ja-JP" sz="2000" dirty="0">
-                <a:solidFill>
-                  <a:schemeClr val="accent4">
-                    <a:lumMod val="75000"/>
-                  </a:schemeClr>
-                </a:solidFill>
-                <a:latin typeface="メイリオ" panose="020B0604030504040204" pitchFamily="50" charset="-128"/>
-                <a:ea typeface="メイリオ" panose="020B0604030504040204" pitchFamily="50" charset="-128"/>
-              </a:rPr>
-              <a:t>,C</a:t>
-            </a:r>
-            <a:r>
-              <a:rPr lang="ja-JP" altLang="en-US" sz="2000" dirty="0">
-                <a:solidFill>
-                  <a:schemeClr val="accent4">
-                    <a:lumMod val="75000"/>
-                  </a:schemeClr>
-                </a:solidFill>
-                <a:latin typeface="メイリオ" panose="020B0604030504040204" pitchFamily="50" charset="-128"/>
-                <a:ea typeface="メイリオ" panose="020B0604030504040204" pitchFamily="50" charset="-128"/>
-              </a:rPr>
-              <a:t>が出てくるが、これを一つにまとめる方法はないのか。（後で考える）</a:t>
-            </a:r>
-            <a:endParaRPr lang="en-US" altLang="ja-JP" sz="2000" dirty="0">
-              <a:solidFill>
-                <a:schemeClr val="accent4">
-                  <a:lumMod val="75000"/>
-                </a:schemeClr>
-              </a:solidFill>
-              <a:latin typeface="メイリオ" panose="020B0604030504040204" pitchFamily="50" charset="-128"/>
-              <a:ea typeface="メイリオ" panose="020B0604030504040204" pitchFamily="50" charset="-128"/>
-            </a:endParaRPr>
-          </a:p>
-          <a:p>
-            <a:pPr algn="l"/>
-            <a:endParaRPr kumimoji="1" lang="en-US" altLang="ja-JP" sz="2000" dirty="0">
-              <a:solidFill>
-                <a:schemeClr val="accent4">
-                  <a:lumMod val="75000"/>
-                </a:schemeClr>
-              </a:solidFill>
-              <a:latin typeface="メイリオ" panose="020B0604030504040204" pitchFamily="50" charset="-128"/>
-              <a:ea typeface="メイリオ" panose="020B0604030504040204" pitchFamily="50" charset="-128"/>
-            </a:endParaRPr>
-          </a:p>
-          <a:p>
-            <a:pPr algn="l"/>
-            <a:endParaRPr lang="en-US" altLang="ja-JP" sz="2000" dirty="0">
-              <a:solidFill>
-                <a:schemeClr val="accent4">
-                  <a:lumMod val="75000"/>
-                </a:schemeClr>
-              </a:solidFill>
-              <a:latin typeface="メイリオ" panose="020B0604030504040204" pitchFamily="50" charset="-128"/>
-              <a:ea typeface="メイリオ" panose="020B0604030504040204" pitchFamily="50" charset="-128"/>
-            </a:endParaRPr>
-          </a:p>
-          <a:p>
-            <a:pPr algn="l"/>
-            <a:r>
-              <a:rPr kumimoji="1" lang="ja-JP" altLang="en-US" sz="2000" dirty="0">
-                <a:solidFill>
-                  <a:srgbClr val="C00000"/>
-                </a:solidFill>
-                <a:latin typeface="メイリオ" panose="020B0604030504040204" pitchFamily="50" charset="-128"/>
-                <a:ea typeface="メイリオ" panose="020B0604030504040204" pitchFamily="50" charset="-128"/>
-              </a:rPr>
-              <a:t>あとで！！！</a:t>
-            </a:r>
-            <a:r>
-              <a:rPr kumimoji="1" lang="en-US" altLang="ja-JP" sz="2000" dirty="0">
-                <a:solidFill>
-                  <a:srgbClr val="C00000"/>
-                </a:solidFill>
-                <a:latin typeface="メイリオ" panose="020B0604030504040204" pitchFamily="50" charset="-128"/>
-                <a:ea typeface="メイリオ" panose="020B0604030504040204" pitchFamily="50" charset="-128"/>
-              </a:rPr>
-              <a:t>Factor</a:t>
-            </a:r>
-            <a:r>
-              <a:rPr kumimoji="1" lang="ja-JP" altLang="en-US" sz="2000" dirty="0">
-                <a:solidFill>
-                  <a:srgbClr val="C00000"/>
-                </a:solidFill>
-                <a:latin typeface="メイリオ" panose="020B0604030504040204" pitchFamily="50" charset="-128"/>
-                <a:ea typeface="メイリオ" panose="020B0604030504040204" pitchFamily="50" charset="-128"/>
-              </a:rPr>
-              <a:t>！！！絶対調べる！！！！</a:t>
-            </a:r>
-            <a:endParaRPr kumimoji="1" lang="en-US" altLang="ja-JP" sz="2000" dirty="0">
-              <a:solidFill>
-                <a:srgbClr val="C00000"/>
-              </a:solidFill>
-              <a:latin typeface="メイリオ" panose="020B0604030504040204" pitchFamily="50" charset="-128"/>
-              <a:ea typeface="メイリオ" panose="020B0604030504040204" pitchFamily="50" charset="-128"/>
-            </a:endParaRPr>
-          </a:p>
         </p:txBody>
       </p:sp>
+      <p:cxnSp>
+        <p:nvCxnSpPr>
+          <p:cNvPr id="13" name="直線矢印コネクタ 12">
+            <a:extLst>
+              <a:ext uri="{FF2B5EF4-FFF2-40B4-BE49-F238E27FC236}">
+                <a16:creationId xmlns:a16="http://schemas.microsoft.com/office/drawing/2014/main" id="{74FF8975-518B-E7D8-023D-CCCCAEBC6F95}"/>
+              </a:ext>
+            </a:extLst>
+          </p:cNvPr>
+          <p:cNvCxnSpPr>
+            <a:cxnSpLocks/>
+          </p:cNvCxnSpPr>
+          <p:nvPr/>
+        </p:nvCxnSpPr>
+        <p:spPr>
+          <a:xfrm>
+            <a:off x="4548393" y="1472982"/>
+            <a:ext cx="581891" cy="0"/>
+          </a:xfrm>
+          <a:prstGeom prst="straightConnector1">
+            <a:avLst/>
+          </a:prstGeom>
+          <a:ln w="57150">
+            <a:solidFill>
+              <a:schemeClr val="accent4">
+                <a:lumMod val="75000"/>
+              </a:schemeClr>
+            </a:solidFill>
+            <a:tailEnd type="triangle"/>
+          </a:ln>
+        </p:spPr>
+        <p:style>
+          <a:lnRef idx="1">
+            <a:schemeClr val="accent1"/>
+          </a:lnRef>
+          <a:fillRef idx="0">
+            <a:schemeClr val="accent1"/>
+          </a:fillRef>
+          <a:effectRef idx="0">
+            <a:schemeClr val="accent1"/>
+          </a:effectRef>
+          <a:fontRef idx="minor">
+            <a:schemeClr val="tx1"/>
+          </a:fontRef>
+        </p:style>
+      </p:cxnSp>
     </p:spTree>
     <p:extLst>
       <p:ext uri="{BB962C8B-B14F-4D97-AF65-F5344CB8AC3E}">
-        <p14:creationId xmlns:p14="http://schemas.microsoft.com/office/powerpoint/2010/main" val="2135243812"/>
+        <p14:creationId xmlns:p14="http://schemas.microsoft.com/office/powerpoint/2010/main" val="1088393112"/>
       </p:ext>
     </p:extLst>
   </p:cSld>
@@ -21614,7 +22851,7 @@
           <a:p>
             <a:pPr algn="l"/>
             <a:r>
-              <a:rPr kumimoji="1" lang="ja-JP" altLang="en-US" sz="3000" b="1" dirty="0">
+              <a:rPr lang="ja-JP" altLang="en-US" sz="3000" b="1" dirty="0">
                 <a:solidFill>
                   <a:schemeClr val="tx1">
                     <a:lumMod val="65000"/>
@@ -21624,17 +22861,30 @@
                 <a:latin typeface="メイリオ" panose="020B0604030504040204" pitchFamily="50" charset="-128"/>
                 <a:ea typeface="メイリオ" panose="020B0604030504040204" pitchFamily="50" charset="-128"/>
               </a:rPr>
-              <a:t>感想</a:t>
+              <a:t>１０</a:t>
+            </a:r>
+            <a:r>
+              <a:rPr kumimoji="1" lang="ja-JP" altLang="en-US" sz="3000" b="1" dirty="0">
+                <a:solidFill>
+                  <a:schemeClr val="tx1">
+                    <a:lumMod val="65000"/>
+                    <a:lumOff val="35000"/>
+                  </a:schemeClr>
+                </a:solidFill>
+                <a:latin typeface="メイリオ" panose="020B0604030504040204" pitchFamily="50" charset="-128"/>
+                <a:ea typeface="メイリオ" panose="020B0604030504040204" pitchFamily="50" charset="-128"/>
+              </a:rPr>
+              <a:t>章　スピード　最終コード</a:t>
             </a:r>
           </a:p>
         </p:txBody>
       </p:sp>
       <p:sp>
         <p:nvSpPr>
-          <p:cNvPr id="4" name="正方形/長方形 3">
-            <a:extLst>
-              <a:ext uri="{FF2B5EF4-FFF2-40B4-BE49-F238E27FC236}">
-                <a16:creationId xmlns:a16="http://schemas.microsoft.com/office/drawing/2014/main" id="{578782C7-6070-7C3A-DAB7-3101F4C6ED5C}"/>
+          <p:cNvPr id="11" name="正方形/長方形 10">
+            <a:extLst>
+              <a:ext uri="{FF2B5EF4-FFF2-40B4-BE49-F238E27FC236}">
+                <a16:creationId xmlns:a16="http://schemas.microsoft.com/office/drawing/2014/main" id="{661A3A95-316A-208D-1006-9B4CAF8277CA}"/>
               </a:ext>
             </a:extLst>
           </p:cNvPr>
@@ -21643,16 +22893,16 @@
         </p:nvSpPr>
         <p:spPr>
           <a:xfrm>
-            <a:off x="884439" y="1109610"/>
-            <a:ext cx="9440262" cy="5528957"/>
+            <a:off x="528181" y="892099"/>
+            <a:ext cx="11135638" cy="5965902"/>
           </a:xfrm>
           <a:prstGeom prst="rect">
             <a:avLst/>
           </a:prstGeom>
           <a:solidFill>
             <a:schemeClr val="accent4">
-              <a:lumMod val="40000"/>
-              <a:lumOff val="60000"/>
+              <a:lumMod val="20000"/>
+              <a:lumOff val="80000"/>
             </a:schemeClr>
           </a:solidFill>
           <a:ln>
@@ -21683,270 +22933,10 @@
           </a:p>
         </p:txBody>
       </p:sp>
-      <p:sp>
-        <p:nvSpPr>
-          <p:cNvPr id="3" name="字幕 2">
-            <a:extLst>
-              <a:ext uri="{FF2B5EF4-FFF2-40B4-BE49-F238E27FC236}">
-                <a16:creationId xmlns:a16="http://schemas.microsoft.com/office/drawing/2014/main" id="{EF422FEA-2F34-70ED-56A9-01A65A2AD142}"/>
-              </a:ext>
-            </a:extLst>
-          </p:cNvPr>
-          <p:cNvSpPr>
-            <a:spLocks noGrp="1"/>
-          </p:cNvSpPr>
-          <p:nvPr>
-            <p:ph type="subTitle" idx="1"/>
-          </p:nvPr>
-        </p:nvSpPr>
-        <p:spPr>
-          <a:xfrm>
-            <a:off x="884439" y="1097282"/>
-            <a:ext cx="9391483" cy="5446283"/>
-          </a:xfrm>
-        </p:spPr>
-        <p:txBody>
-          <a:bodyPr>
-            <a:normAutofit/>
-          </a:bodyPr>
-          <a:lstStyle/>
-          <a:p>
-            <a:pPr algn="l"/>
-            <a:r>
-              <a:rPr kumimoji="1" lang="en-US" altLang="ja-JP" sz="2000" dirty="0">
-                <a:solidFill>
-                  <a:schemeClr val="accent4">
-                    <a:lumMod val="75000"/>
-                  </a:schemeClr>
-                </a:solidFill>
-                <a:latin typeface="メイリオ" panose="020B0604030504040204" pitchFamily="50" charset="-128"/>
-                <a:ea typeface="メイリオ" panose="020B0604030504040204" pitchFamily="50" charset="-128"/>
-              </a:rPr>
-              <a:t>Cherries</a:t>
-            </a:r>
-            <a:r>
-              <a:rPr kumimoji="1" lang="ja-JP" altLang="en-US" sz="2000" dirty="0">
-                <a:solidFill>
-                  <a:schemeClr val="accent4">
-                    <a:lumMod val="75000"/>
-                  </a:schemeClr>
-                </a:solidFill>
-                <a:latin typeface="メイリオ" panose="020B0604030504040204" pitchFamily="50" charset="-128"/>
-                <a:ea typeface="メイリオ" panose="020B0604030504040204" pitchFamily="50" charset="-128"/>
-              </a:rPr>
-              <a:t>の点数を場合分けする際、</a:t>
-            </a:r>
-            <a:r>
-              <a:rPr lang="ja-JP" altLang="en-US" sz="2000" dirty="0">
-                <a:solidFill>
-                  <a:schemeClr val="accent4">
-                    <a:lumMod val="75000"/>
-                  </a:schemeClr>
-                </a:solidFill>
-                <a:latin typeface="メイリオ" panose="020B0604030504040204" pitchFamily="50" charset="-128"/>
-                <a:ea typeface="メイリオ" panose="020B0604030504040204" pitchFamily="50" charset="-128"/>
-              </a:rPr>
-              <a:t>添字操作を利用して、７行の</a:t>
-            </a:r>
-            <a:r>
-              <a:rPr lang="en-US" altLang="ja-JP" sz="2000" dirty="0">
-                <a:solidFill>
-                  <a:schemeClr val="accent4">
-                    <a:lumMod val="75000"/>
-                  </a:schemeClr>
-                </a:solidFill>
-                <a:latin typeface="メイリオ" panose="020B0604030504040204" pitchFamily="50" charset="-128"/>
-                <a:ea typeface="メイリオ" panose="020B0604030504040204" pitchFamily="50" charset="-128"/>
-              </a:rPr>
-              <a:t>if</a:t>
-            </a:r>
-            <a:r>
-              <a:rPr lang="ja-JP" altLang="en-US" sz="2000" dirty="0">
-                <a:solidFill>
-                  <a:schemeClr val="accent4">
-                    <a:lumMod val="75000"/>
-                  </a:schemeClr>
-                </a:solidFill>
-                <a:latin typeface="メイリオ" panose="020B0604030504040204" pitchFamily="50" charset="-128"/>
-                <a:ea typeface="メイリオ" panose="020B0604030504040204" pitchFamily="50" charset="-128"/>
-              </a:rPr>
-              <a:t>文を１行に短縮できたことに感動した。</a:t>
-            </a:r>
-            <a:endParaRPr lang="en-US" altLang="ja-JP" sz="2000" dirty="0">
-              <a:solidFill>
-                <a:schemeClr val="accent4">
-                  <a:lumMod val="75000"/>
-                </a:schemeClr>
-              </a:solidFill>
-              <a:latin typeface="メイリオ" panose="020B0604030504040204" pitchFamily="50" charset="-128"/>
-              <a:ea typeface="メイリオ" panose="020B0604030504040204" pitchFamily="50" charset="-128"/>
-            </a:endParaRPr>
-          </a:p>
-          <a:p>
-            <a:pPr algn="l"/>
-            <a:endParaRPr lang="en-US" altLang="ja-JP" sz="2000" dirty="0">
-              <a:solidFill>
-                <a:schemeClr val="accent4">
-                  <a:lumMod val="75000"/>
-                </a:schemeClr>
-              </a:solidFill>
-              <a:latin typeface="メイリオ" panose="020B0604030504040204" pitchFamily="50" charset="-128"/>
-              <a:ea typeface="メイリオ" panose="020B0604030504040204" pitchFamily="50" charset="-128"/>
-            </a:endParaRPr>
-          </a:p>
-          <a:p>
-            <a:pPr algn="l"/>
-            <a:r>
-              <a:rPr lang="en-US" altLang="ja-JP" sz="2000" dirty="0">
-                <a:solidFill>
-                  <a:schemeClr val="accent4">
-                    <a:lumMod val="75000"/>
-                  </a:schemeClr>
-                </a:solidFill>
-                <a:latin typeface="メイリオ" panose="020B0604030504040204" pitchFamily="50" charset="-128"/>
-                <a:ea typeface="メイリオ" panose="020B0604030504040204" pitchFamily="50" charset="-128"/>
-              </a:rPr>
-              <a:t>218</a:t>
-            </a:r>
-            <a:r>
-              <a:rPr lang="ja-JP" altLang="en-US" sz="2000" dirty="0">
-                <a:solidFill>
-                  <a:schemeClr val="accent4">
-                    <a:lumMod val="75000"/>
-                  </a:schemeClr>
-                </a:solidFill>
-                <a:latin typeface="メイリオ" panose="020B0604030504040204" pitchFamily="50" charset="-128"/>
-                <a:ea typeface="メイリオ" panose="020B0604030504040204" pitchFamily="50" charset="-128"/>
-              </a:rPr>
-              <a:t>行目 確率が起こるときの項目</a:t>
-            </a:r>
-            <a:r>
-              <a:rPr lang="en-US" altLang="ja-JP" sz="2000" dirty="0">
-                <a:solidFill>
-                  <a:schemeClr val="accent4">
-                    <a:lumMod val="75000"/>
-                  </a:schemeClr>
-                </a:solidFill>
-                <a:latin typeface="メイリオ" panose="020B0604030504040204" pitchFamily="50" charset="-128"/>
-                <a:ea typeface="メイリオ" panose="020B0604030504040204" pitchFamily="50" charset="-128"/>
-              </a:rPr>
-              <a:t>DD,BB</a:t>
-            </a:r>
-            <a:r>
-              <a:rPr lang="ja-JP" altLang="en-US" sz="2000" dirty="0">
-                <a:solidFill>
-                  <a:schemeClr val="accent4">
-                    <a:lumMod val="75000"/>
-                  </a:schemeClr>
-                </a:solidFill>
-                <a:latin typeface="メイリオ" panose="020B0604030504040204" pitchFamily="50" charset="-128"/>
-                <a:ea typeface="メイリオ" panose="020B0604030504040204" pitchFamily="50" charset="-128"/>
-              </a:rPr>
-              <a:t>などを指定しておくと、あとから</a:t>
-            </a:r>
-            <a:r>
-              <a:rPr lang="en-US" altLang="ja-JP" sz="2000" dirty="0">
-                <a:solidFill>
-                  <a:schemeClr val="accent4">
-                    <a:lumMod val="75000"/>
-                  </a:schemeClr>
-                </a:solidFill>
-                <a:latin typeface="メイリオ" panose="020B0604030504040204" pitchFamily="50" charset="-128"/>
-                <a:ea typeface="メイリオ" panose="020B0604030504040204" pitchFamily="50" charset="-128"/>
-              </a:rPr>
-              <a:t>combos$prob1</a:t>
-            </a:r>
-            <a:r>
-              <a:rPr lang="ja-JP" altLang="en-US" sz="2000" dirty="0">
-                <a:solidFill>
-                  <a:schemeClr val="accent4">
-                    <a:lumMod val="75000"/>
-                  </a:schemeClr>
-                </a:solidFill>
-                <a:latin typeface="メイリオ" panose="020B0604030504040204" pitchFamily="50" charset="-128"/>
-                <a:ea typeface="メイリオ" panose="020B0604030504040204" pitchFamily="50" charset="-128"/>
-              </a:rPr>
-              <a:t>に代入するときに、</a:t>
-            </a:r>
-            <a:r>
-              <a:rPr lang="en-US" altLang="ja-JP" sz="2000" dirty="0">
-                <a:solidFill>
-                  <a:schemeClr val="accent4">
-                    <a:lumMod val="75000"/>
-                  </a:schemeClr>
-                </a:solidFill>
-                <a:latin typeface="メイリオ" panose="020B0604030504040204" pitchFamily="50" charset="-128"/>
-                <a:ea typeface="メイリオ" panose="020B0604030504040204" pitchFamily="50" charset="-128"/>
-              </a:rPr>
-              <a:t>prob[combos$Var1]</a:t>
-            </a:r>
-            <a:r>
-              <a:rPr lang="ja-JP" altLang="en-US" sz="2000" dirty="0">
-                <a:solidFill>
-                  <a:schemeClr val="accent4">
-                    <a:lumMod val="75000"/>
-                  </a:schemeClr>
-                </a:solidFill>
-                <a:latin typeface="メイリオ" panose="020B0604030504040204" pitchFamily="50" charset="-128"/>
-                <a:ea typeface="メイリオ" panose="020B0604030504040204" pitchFamily="50" charset="-128"/>
-              </a:rPr>
-              <a:t>のように取り出せるのはすごいと思った。配列の</a:t>
-            </a:r>
-            <a:r>
-              <a:rPr lang="en-US" altLang="ja-JP" sz="2000" dirty="0">
-                <a:solidFill>
-                  <a:schemeClr val="accent4">
-                    <a:lumMod val="75000"/>
-                  </a:schemeClr>
-                </a:solidFill>
-                <a:latin typeface="メイリオ" panose="020B0604030504040204" pitchFamily="50" charset="-128"/>
-                <a:ea typeface="メイリオ" panose="020B0604030504040204" pitchFamily="50" charset="-128"/>
-              </a:rPr>
-              <a:t>0,1,2,…</a:t>
-            </a:r>
-            <a:r>
-              <a:rPr lang="ja-JP" altLang="en-US" sz="2000" dirty="0">
-                <a:solidFill>
-                  <a:schemeClr val="accent4">
-                    <a:lumMod val="75000"/>
-                  </a:schemeClr>
-                </a:solidFill>
-                <a:latin typeface="メイリオ" panose="020B0604030504040204" pitchFamily="50" charset="-128"/>
-                <a:ea typeface="メイリオ" panose="020B0604030504040204" pitchFamily="50" charset="-128"/>
-              </a:rPr>
-              <a:t>が</a:t>
-            </a:r>
-            <a:r>
-              <a:rPr lang="en-US" altLang="ja-JP" sz="2000" dirty="0">
-                <a:solidFill>
-                  <a:schemeClr val="accent4">
-                    <a:lumMod val="75000"/>
-                  </a:schemeClr>
-                </a:solidFill>
-                <a:latin typeface="メイリオ" panose="020B0604030504040204" pitchFamily="50" charset="-128"/>
-                <a:ea typeface="メイリオ" panose="020B0604030504040204" pitchFamily="50" charset="-128"/>
-              </a:rPr>
-              <a:t>DD,7,BBB</a:t>
-            </a:r>
-          </a:p>
-          <a:p>
-            <a:pPr algn="l"/>
-            <a:endParaRPr kumimoji="1" lang="ja-JP" altLang="en-US" sz="2000" dirty="0">
-              <a:solidFill>
-                <a:schemeClr val="accent4">
-                  <a:lumMod val="75000"/>
-                </a:schemeClr>
-              </a:solidFill>
-              <a:latin typeface="メイリオ" panose="020B0604030504040204" pitchFamily="50" charset="-128"/>
-              <a:ea typeface="メイリオ" panose="020B0604030504040204" pitchFamily="50" charset="-128"/>
-            </a:endParaRPr>
-          </a:p>
-        </p:txBody>
-      </p:sp>
     </p:spTree>
     <p:extLst>
       <p:ext uri="{BB962C8B-B14F-4D97-AF65-F5344CB8AC3E}">
-        <p14:creationId xmlns:p14="http://schemas.microsoft.com/office/powerpoint/2010/main" val="878594590"/>
+        <p14:creationId xmlns:p14="http://schemas.microsoft.com/office/powerpoint/2010/main" val="1134685979"/>
       </p:ext>
     </p:extLst>
   </p:cSld>
@@ -22013,7 +23003,7 @@
                 <a:latin typeface="メイリオ" panose="020B0604030504040204" pitchFamily="50" charset="-128"/>
                 <a:ea typeface="メイリオ" panose="020B0604030504040204" pitchFamily="50" charset="-128"/>
               </a:rPr>
-              <a:t>参考文献</a:t>
+              <a:t>疑問点</a:t>
             </a:r>
           </a:p>
         </p:txBody>
@@ -22101,7 +23091,19 @@
           <a:lstStyle/>
           <a:p>
             <a:pPr algn="l"/>
-            <a:endParaRPr kumimoji="1" lang="ja-JP" altLang="en-US" sz="2000" dirty="0">
+            <a:r>
+              <a:rPr kumimoji="1" lang="ja-JP" altLang="en-US" sz="2000" dirty="0">
+                <a:solidFill>
+                  <a:schemeClr val="accent4">
+                    <a:lumMod val="75000"/>
+                  </a:schemeClr>
+                </a:solidFill>
+                <a:latin typeface="メイリオ" panose="020B0604030504040204" pitchFamily="50" charset="-128"/>
+                <a:ea typeface="メイリオ" panose="020B0604030504040204" pitchFamily="50" charset="-128"/>
+              </a:rPr>
+              <a:t>配列の順番が０からではない理由</a:t>
+            </a:r>
+            <a:endParaRPr kumimoji="1" lang="en-US" altLang="ja-JP" sz="2000" dirty="0">
               <a:solidFill>
                 <a:schemeClr val="accent4">
                   <a:lumMod val="75000"/>
@@ -22111,6 +23113,1035 @@
               <a:ea typeface="メイリオ" panose="020B0604030504040204" pitchFamily="50" charset="-128"/>
             </a:endParaRPr>
           </a:p>
+          <a:p>
+            <a:pPr algn="l"/>
+            <a:endParaRPr lang="en-US" altLang="ja-JP" sz="2000" dirty="0">
+              <a:solidFill>
+                <a:schemeClr val="accent4">
+                  <a:lumMod val="75000"/>
+                </a:schemeClr>
+              </a:solidFill>
+              <a:latin typeface="メイリオ" panose="020B0604030504040204" pitchFamily="50" charset="-128"/>
+              <a:ea typeface="メイリオ" panose="020B0604030504040204" pitchFamily="50" charset="-128"/>
+            </a:endParaRPr>
+          </a:p>
+          <a:p>
+            <a:pPr algn="l"/>
+            <a:r>
+              <a:rPr kumimoji="1" lang="en-US" altLang="ja-JP" sz="2000" dirty="0" err="1">
+                <a:solidFill>
+                  <a:schemeClr val="accent4">
+                    <a:lumMod val="75000"/>
+                  </a:schemeClr>
+                </a:solidFill>
+                <a:latin typeface="メイリオ" panose="020B0604030504040204" pitchFamily="50" charset="-128"/>
+                <a:ea typeface="メイリオ" panose="020B0604030504040204" pitchFamily="50" charset="-128"/>
+              </a:rPr>
+              <a:t>R,Python</a:t>
+            </a:r>
+            <a:r>
+              <a:rPr kumimoji="1" lang="ja-JP" altLang="en-US" sz="2000" dirty="0">
+                <a:solidFill>
+                  <a:schemeClr val="accent4">
+                    <a:lumMod val="75000"/>
+                  </a:schemeClr>
+                </a:solidFill>
+                <a:latin typeface="メイリオ" panose="020B0604030504040204" pitchFamily="50" charset="-128"/>
+                <a:ea typeface="メイリオ" panose="020B0604030504040204" pitchFamily="50" charset="-128"/>
+              </a:rPr>
+              <a:t>が肩を宣言する必要がない共通点に関して</a:t>
+            </a:r>
+            <a:endParaRPr kumimoji="1" lang="en-US" altLang="ja-JP" sz="2000" dirty="0">
+              <a:solidFill>
+                <a:schemeClr val="accent4">
+                  <a:lumMod val="75000"/>
+                </a:schemeClr>
+              </a:solidFill>
+              <a:latin typeface="メイリオ" panose="020B0604030504040204" pitchFamily="50" charset="-128"/>
+              <a:ea typeface="メイリオ" panose="020B0604030504040204" pitchFamily="50" charset="-128"/>
+            </a:endParaRPr>
+          </a:p>
+          <a:p>
+            <a:pPr algn="l"/>
+            <a:endParaRPr lang="en-US" altLang="ja-JP" sz="2000" dirty="0">
+              <a:solidFill>
+                <a:schemeClr val="accent4">
+                  <a:lumMod val="75000"/>
+                </a:schemeClr>
+              </a:solidFill>
+              <a:latin typeface="メイリオ" panose="020B0604030504040204" pitchFamily="50" charset="-128"/>
+              <a:ea typeface="メイリオ" panose="020B0604030504040204" pitchFamily="50" charset="-128"/>
+            </a:endParaRPr>
+          </a:p>
+          <a:p>
+            <a:pPr algn="l"/>
+            <a:r>
+              <a:rPr kumimoji="1" lang="en-US" altLang="ja-JP" sz="2000" dirty="0">
+                <a:solidFill>
+                  <a:schemeClr val="accent4">
+                    <a:lumMod val="75000"/>
+                  </a:schemeClr>
+                </a:solidFill>
+                <a:latin typeface="メイリオ" panose="020B0604030504040204" pitchFamily="50" charset="-128"/>
+                <a:ea typeface="メイリオ" panose="020B0604030504040204" pitchFamily="50" charset="-128"/>
+              </a:rPr>
+              <a:t>A,B,C </a:t>
+            </a:r>
+            <a:r>
+              <a:rPr kumimoji="1" lang="ja-JP" altLang="en-US" sz="2000" dirty="0">
+                <a:solidFill>
+                  <a:schemeClr val="accent4">
+                    <a:lumMod val="75000"/>
+                  </a:schemeClr>
+                </a:solidFill>
+                <a:latin typeface="メイリオ" panose="020B0604030504040204" pitchFamily="50" charset="-128"/>
+                <a:ea typeface="メイリオ" panose="020B0604030504040204" pitchFamily="50" charset="-128"/>
+              </a:rPr>
+              <a:t>と</a:t>
+            </a:r>
+            <a:r>
+              <a:rPr kumimoji="1" lang="en-US" altLang="ja-JP" sz="2000" dirty="0">
+                <a:solidFill>
+                  <a:schemeClr val="accent4">
+                    <a:lumMod val="75000"/>
+                  </a:schemeClr>
+                </a:solidFill>
+                <a:latin typeface="メイリオ" panose="020B0604030504040204" pitchFamily="50" charset="-128"/>
+                <a:ea typeface="メイリオ" panose="020B0604030504040204" pitchFamily="50" charset="-128"/>
+              </a:rPr>
+              <a:t>B,A</a:t>
+            </a:r>
+            <a:r>
+              <a:rPr lang="en-US" altLang="ja-JP" sz="2000" dirty="0">
+                <a:solidFill>
+                  <a:schemeClr val="accent4">
+                    <a:lumMod val="75000"/>
+                  </a:schemeClr>
+                </a:solidFill>
+                <a:latin typeface="メイリオ" panose="020B0604030504040204" pitchFamily="50" charset="-128"/>
+                <a:ea typeface="メイリオ" panose="020B0604030504040204" pitchFamily="50" charset="-128"/>
+              </a:rPr>
+              <a:t>,C</a:t>
+            </a:r>
+            <a:r>
+              <a:rPr lang="ja-JP" altLang="en-US" sz="2000" dirty="0">
+                <a:solidFill>
+                  <a:schemeClr val="accent4">
+                    <a:lumMod val="75000"/>
+                  </a:schemeClr>
+                </a:solidFill>
+                <a:latin typeface="メイリオ" panose="020B0604030504040204" pitchFamily="50" charset="-128"/>
+                <a:ea typeface="メイリオ" panose="020B0604030504040204" pitchFamily="50" charset="-128"/>
+              </a:rPr>
+              <a:t>が出てくるが、これを一つにまとめる方法はないのか。（後で考える）</a:t>
+            </a:r>
+            <a:endParaRPr lang="en-US" altLang="ja-JP" sz="2000" dirty="0">
+              <a:solidFill>
+                <a:schemeClr val="accent4">
+                  <a:lumMod val="75000"/>
+                </a:schemeClr>
+              </a:solidFill>
+              <a:latin typeface="メイリオ" panose="020B0604030504040204" pitchFamily="50" charset="-128"/>
+              <a:ea typeface="メイリオ" panose="020B0604030504040204" pitchFamily="50" charset="-128"/>
+            </a:endParaRPr>
+          </a:p>
+          <a:p>
+            <a:pPr algn="l"/>
+            <a:endParaRPr kumimoji="1" lang="en-US" altLang="ja-JP" sz="2000" dirty="0">
+              <a:solidFill>
+                <a:schemeClr val="accent4">
+                  <a:lumMod val="75000"/>
+                </a:schemeClr>
+              </a:solidFill>
+              <a:latin typeface="メイリオ" panose="020B0604030504040204" pitchFamily="50" charset="-128"/>
+              <a:ea typeface="メイリオ" panose="020B0604030504040204" pitchFamily="50" charset="-128"/>
+            </a:endParaRPr>
+          </a:p>
+          <a:p>
+            <a:pPr algn="l"/>
+            <a:endParaRPr lang="en-US" altLang="ja-JP" sz="2000" dirty="0">
+              <a:solidFill>
+                <a:schemeClr val="accent4">
+                  <a:lumMod val="75000"/>
+                </a:schemeClr>
+              </a:solidFill>
+              <a:latin typeface="メイリオ" panose="020B0604030504040204" pitchFamily="50" charset="-128"/>
+              <a:ea typeface="メイリオ" panose="020B0604030504040204" pitchFamily="50" charset="-128"/>
+            </a:endParaRPr>
+          </a:p>
+          <a:p>
+            <a:pPr algn="l"/>
+            <a:r>
+              <a:rPr kumimoji="1" lang="ja-JP" altLang="en-US" sz="2000" dirty="0">
+                <a:solidFill>
+                  <a:srgbClr val="C00000"/>
+                </a:solidFill>
+                <a:latin typeface="メイリオ" panose="020B0604030504040204" pitchFamily="50" charset="-128"/>
+                <a:ea typeface="メイリオ" panose="020B0604030504040204" pitchFamily="50" charset="-128"/>
+              </a:rPr>
+              <a:t>あとで！！！</a:t>
+            </a:r>
+            <a:r>
+              <a:rPr kumimoji="1" lang="en-US" altLang="ja-JP" sz="2000" dirty="0">
+                <a:solidFill>
+                  <a:srgbClr val="C00000"/>
+                </a:solidFill>
+                <a:latin typeface="メイリオ" panose="020B0604030504040204" pitchFamily="50" charset="-128"/>
+                <a:ea typeface="メイリオ" panose="020B0604030504040204" pitchFamily="50" charset="-128"/>
+              </a:rPr>
+              <a:t>Factor</a:t>
+            </a:r>
+            <a:r>
+              <a:rPr kumimoji="1" lang="ja-JP" altLang="en-US" sz="2000" dirty="0">
+                <a:solidFill>
+                  <a:srgbClr val="C00000"/>
+                </a:solidFill>
+                <a:latin typeface="メイリオ" panose="020B0604030504040204" pitchFamily="50" charset="-128"/>
+                <a:ea typeface="メイリオ" panose="020B0604030504040204" pitchFamily="50" charset="-128"/>
+              </a:rPr>
+              <a:t>！！！絶対調べる！！！！</a:t>
+            </a:r>
+            <a:endParaRPr kumimoji="1" lang="en-US" altLang="ja-JP" sz="2000" dirty="0">
+              <a:solidFill>
+                <a:srgbClr val="C00000"/>
+              </a:solidFill>
+              <a:latin typeface="メイリオ" panose="020B0604030504040204" pitchFamily="50" charset="-128"/>
+              <a:ea typeface="メイリオ" panose="020B0604030504040204" pitchFamily="50" charset="-128"/>
+            </a:endParaRPr>
+          </a:p>
+        </p:txBody>
+      </p:sp>
+    </p:spTree>
+    <p:extLst>
+      <p:ext uri="{BB962C8B-B14F-4D97-AF65-F5344CB8AC3E}">
+        <p14:creationId xmlns:p14="http://schemas.microsoft.com/office/powerpoint/2010/main" val="2135243812"/>
+      </p:ext>
+    </p:extLst>
+  </p:cSld>
+  <p:clrMapOvr>
+    <a:masterClrMapping/>
+  </p:clrMapOvr>
+</p:sld>
+</file>
+
+<file path=ppt/slides/slide24.xml><?xml version="1.0" encoding="utf-8"?>
+<p:sld xmlns:a="http://schemas.openxmlformats.org/drawingml/2006/main" xmlns:r="http://schemas.openxmlformats.org/officeDocument/2006/relationships" xmlns:p="http://schemas.openxmlformats.org/presentationml/2006/main">
+  <p:cSld>
+    <p:spTree>
+      <p:nvGrpSpPr>
+        <p:cNvPr id="1" name=""/>
+        <p:cNvGrpSpPr/>
+        <p:nvPr/>
+      </p:nvGrpSpPr>
+      <p:grpSpPr>
+        <a:xfrm>
+          <a:off x="0" y="0"/>
+          <a:ext cx="0" cy="0"/>
+          <a:chOff x="0" y="0"/>
+          <a:chExt cx="0" cy="0"/>
+        </a:xfrm>
+      </p:grpSpPr>
+      <p:sp>
+        <p:nvSpPr>
+          <p:cNvPr id="2" name="タイトル 1">
+            <a:extLst>
+              <a:ext uri="{FF2B5EF4-FFF2-40B4-BE49-F238E27FC236}">
+                <a16:creationId xmlns:a16="http://schemas.microsoft.com/office/drawing/2014/main" id="{8F92D15D-6ED6-F1E2-415D-C5D0D0CAAC83}"/>
+              </a:ext>
+            </a:extLst>
+          </p:cNvPr>
+          <p:cNvSpPr>
+            <a:spLocks noGrp="1"/>
+          </p:cNvSpPr>
+          <p:nvPr>
+            <p:ph type="ctrTitle"/>
+          </p:nvPr>
+        </p:nvSpPr>
+        <p:spPr>
+          <a:xfrm>
+            <a:off x="528181" y="314435"/>
+            <a:ext cx="5891408" cy="700173"/>
+          </a:xfrm>
+        </p:spPr>
+        <p:txBody>
+          <a:bodyPr>
+            <a:normAutofit/>
+          </a:bodyPr>
+          <a:lstStyle/>
+          <a:p>
+            <a:pPr algn="l"/>
+            <a:r>
+              <a:rPr kumimoji="1" lang="ja-JP" altLang="en-US" sz="3000" b="1" dirty="0">
+                <a:solidFill>
+                  <a:schemeClr val="tx1">
+                    <a:lumMod val="65000"/>
+                    <a:lumOff val="35000"/>
+                  </a:schemeClr>
+                </a:solidFill>
+                <a:latin typeface="メイリオ" panose="020B0604030504040204" pitchFamily="50" charset="-128"/>
+                <a:ea typeface="メイリオ" panose="020B0604030504040204" pitchFamily="50" charset="-128"/>
+              </a:rPr>
+              <a:t>感想</a:t>
+            </a:r>
+          </a:p>
+        </p:txBody>
+      </p:sp>
+      <p:sp>
+        <p:nvSpPr>
+          <p:cNvPr id="4" name="正方形/長方形 3">
+            <a:extLst>
+              <a:ext uri="{FF2B5EF4-FFF2-40B4-BE49-F238E27FC236}">
+                <a16:creationId xmlns:a16="http://schemas.microsoft.com/office/drawing/2014/main" id="{578782C7-6070-7C3A-DAB7-3101F4C6ED5C}"/>
+              </a:ext>
+            </a:extLst>
+          </p:cNvPr>
+          <p:cNvSpPr/>
+          <p:nvPr/>
+        </p:nvSpPr>
+        <p:spPr>
+          <a:xfrm>
+            <a:off x="884439" y="1109610"/>
+            <a:ext cx="9440262" cy="5528957"/>
+          </a:xfrm>
+          <a:prstGeom prst="rect">
+            <a:avLst/>
+          </a:prstGeom>
+          <a:solidFill>
+            <a:schemeClr val="accent4">
+              <a:lumMod val="40000"/>
+              <a:lumOff val="60000"/>
+            </a:schemeClr>
+          </a:solidFill>
+          <a:ln>
+            <a:noFill/>
+          </a:ln>
+        </p:spPr>
+        <p:style>
+          <a:lnRef idx="2">
+            <a:schemeClr val="accent1">
+              <a:shade val="15000"/>
+            </a:schemeClr>
+          </a:lnRef>
+          <a:fillRef idx="1">
+            <a:schemeClr val="accent1"/>
+          </a:fillRef>
+          <a:effectRef idx="0">
+            <a:schemeClr val="accent1"/>
+          </a:effectRef>
+          <a:fontRef idx="minor">
+            <a:schemeClr val="lt1"/>
+          </a:fontRef>
+        </p:style>
+        <p:txBody>
+          <a:bodyPr rtlCol="0" anchor="t"/>
+          <a:lstStyle/>
+          <a:p>
+            <a:endParaRPr kumimoji="1" lang="ja-JP" altLang="en-US" dirty="0"/>
+          </a:p>
+        </p:txBody>
+      </p:sp>
+      <p:sp>
+        <p:nvSpPr>
+          <p:cNvPr id="3" name="字幕 2">
+            <a:extLst>
+              <a:ext uri="{FF2B5EF4-FFF2-40B4-BE49-F238E27FC236}">
+                <a16:creationId xmlns:a16="http://schemas.microsoft.com/office/drawing/2014/main" id="{EF422FEA-2F34-70ED-56A9-01A65A2AD142}"/>
+              </a:ext>
+            </a:extLst>
+          </p:cNvPr>
+          <p:cNvSpPr>
+            <a:spLocks noGrp="1"/>
+          </p:cNvSpPr>
+          <p:nvPr>
+            <p:ph type="subTitle" idx="1"/>
+          </p:nvPr>
+        </p:nvSpPr>
+        <p:spPr>
+          <a:xfrm>
+            <a:off x="884439" y="1097282"/>
+            <a:ext cx="9391483" cy="5446283"/>
+          </a:xfrm>
+        </p:spPr>
+        <p:txBody>
+          <a:bodyPr>
+            <a:normAutofit/>
+          </a:bodyPr>
+          <a:lstStyle/>
+          <a:p>
+            <a:pPr algn="l"/>
+            <a:r>
+              <a:rPr kumimoji="1" lang="en-US" altLang="ja-JP" sz="2000" dirty="0">
+                <a:solidFill>
+                  <a:schemeClr val="accent4">
+                    <a:lumMod val="75000"/>
+                  </a:schemeClr>
+                </a:solidFill>
+                <a:latin typeface="メイリオ" panose="020B0604030504040204" pitchFamily="50" charset="-128"/>
+                <a:ea typeface="メイリオ" panose="020B0604030504040204" pitchFamily="50" charset="-128"/>
+              </a:rPr>
+              <a:t>Cherries</a:t>
+            </a:r>
+            <a:r>
+              <a:rPr kumimoji="1" lang="ja-JP" altLang="en-US" sz="2000" dirty="0">
+                <a:solidFill>
+                  <a:schemeClr val="accent4">
+                    <a:lumMod val="75000"/>
+                  </a:schemeClr>
+                </a:solidFill>
+                <a:latin typeface="メイリオ" panose="020B0604030504040204" pitchFamily="50" charset="-128"/>
+                <a:ea typeface="メイリオ" panose="020B0604030504040204" pitchFamily="50" charset="-128"/>
+              </a:rPr>
+              <a:t>の点数を場合分けする際、</a:t>
+            </a:r>
+            <a:r>
+              <a:rPr lang="ja-JP" altLang="en-US" sz="2000" dirty="0">
+                <a:solidFill>
+                  <a:schemeClr val="accent4">
+                    <a:lumMod val="75000"/>
+                  </a:schemeClr>
+                </a:solidFill>
+                <a:latin typeface="メイリオ" panose="020B0604030504040204" pitchFamily="50" charset="-128"/>
+                <a:ea typeface="メイリオ" panose="020B0604030504040204" pitchFamily="50" charset="-128"/>
+              </a:rPr>
+              <a:t>添字操作を利用して、７行の</a:t>
+            </a:r>
+            <a:r>
+              <a:rPr lang="en-US" altLang="ja-JP" sz="2000" dirty="0">
+                <a:solidFill>
+                  <a:schemeClr val="accent4">
+                    <a:lumMod val="75000"/>
+                  </a:schemeClr>
+                </a:solidFill>
+                <a:latin typeface="メイリオ" panose="020B0604030504040204" pitchFamily="50" charset="-128"/>
+                <a:ea typeface="メイリオ" panose="020B0604030504040204" pitchFamily="50" charset="-128"/>
+              </a:rPr>
+              <a:t>if</a:t>
+            </a:r>
+            <a:r>
+              <a:rPr lang="ja-JP" altLang="en-US" sz="2000" dirty="0">
+                <a:solidFill>
+                  <a:schemeClr val="accent4">
+                    <a:lumMod val="75000"/>
+                  </a:schemeClr>
+                </a:solidFill>
+                <a:latin typeface="メイリオ" panose="020B0604030504040204" pitchFamily="50" charset="-128"/>
+                <a:ea typeface="メイリオ" panose="020B0604030504040204" pitchFamily="50" charset="-128"/>
+              </a:rPr>
+              <a:t>文を１行に短縮できたことに感動した。</a:t>
+            </a:r>
+            <a:endParaRPr lang="en-US" altLang="ja-JP" sz="2000" dirty="0">
+              <a:solidFill>
+                <a:schemeClr val="accent4">
+                  <a:lumMod val="75000"/>
+                </a:schemeClr>
+              </a:solidFill>
+              <a:latin typeface="メイリオ" panose="020B0604030504040204" pitchFamily="50" charset="-128"/>
+              <a:ea typeface="メイリオ" panose="020B0604030504040204" pitchFamily="50" charset="-128"/>
+            </a:endParaRPr>
+          </a:p>
+          <a:p>
+            <a:pPr algn="l"/>
+            <a:endParaRPr lang="en-US" altLang="ja-JP" sz="2000" dirty="0">
+              <a:solidFill>
+                <a:schemeClr val="accent4">
+                  <a:lumMod val="75000"/>
+                </a:schemeClr>
+              </a:solidFill>
+              <a:latin typeface="メイリオ" panose="020B0604030504040204" pitchFamily="50" charset="-128"/>
+              <a:ea typeface="メイリオ" panose="020B0604030504040204" pitchFamily="50" charset="-128"/>
+            </a:endParaRPr>
+          </a:p>
+          <a:p>
+            <a:pPr algn="l"/>
+            <a:r>
+              <a:rPr lang="en-US" altLang="ja-JP" sz="2000" dirty="0">
+                <a:solidFill>
+                  <a:schemeClr val="accent4">
+                    <a:lumMod val="75000"/>
+                  </a:schemeClr>
+                </a:solidFill>
+                <a:latin typeface="メイリオ" panose="020B0604030504040204" pitchFamily="50" charset="-128"/>
+                <a:ea typeface="メイリオ" panose="020B0604030504040204" pitchFamily="50" charset="-128"/>
+              </a:rPr>
+              <a:t>218</a:t>
+            </a:r>
+            <a:r>
+              <a:rPr lang="ja-JP" altLang="en-US" sz="2000" dirty="0">
+                <a:solidFill>
+                  <a:schemeClr val="accent4">
+                    <a:lumMod val="75000"/>
+                  </a:schemeClr>
+                </a:solidFill>
+                <a:latin typeface="メイリオ" panose="020B0604030504040204" pitchFamily="50" charset="-128"/>
+                <a:ea typeface="メイリオ" panose="020B0604030504040204" pitchFamily="50" charset="-128"/>
+              </a:rPr>
+              <a:t>行目 確率が起こるときの項目</a:t>
+            </a:r>
+            <a:r>
+              <a:rPr lang="en-US" altLang="ja-JP" sz="2000" dirty="0">
+                <a:solidFill>
+                  <a:schemeClr val="accent4">
+                    <a:lumMod val="75000"/>
+                  </a:schemeClr>
+                </a:solidFill>
+                <a:latin typeface="メイリオ" panose="020B0604030504040204" pitchFamily="50" charset="-128"/>
+                <a:ea typeface="メイリオ" panose="020B0604030504040204" pitchFamily="50" charset="-128"/>
+              </a:rPr>
+              <a:t>DD,BB</a:t>
+            </a:r>
+            <a:r>
+              <a:rPr lang="ja-JP" altLang="en-US" sz="2000" dirty="0">
+                <a:solidFill>
+                  <a:schemeClr val="accent4">
+                    <a:lumMod val="75000"/>
+                  </a:schemeClr>
+                </a:solidFill>
+                <a:latin typeface="メイリオ" panose="020B0604030504040204" pitchFamily="50" charset="-128"/>
+                <a:ea typeface="メイリオ" panose="020B0604030504040204" pitchFamily="50" charset="-128"/>
+              </a:rPr>
+              <a:t>などを指定しておくと、あとから</a:t>
+            </a:r>
+            <a:r>
+              <a:rPr lang="en-US" altLang="ja-JP" sz="2000" dirty="0">
+                <a:solidFill>
+                  <a:schemeClr val="accent4">
+                    <a:lumMod val="75000"/>
+                  </a:schemeClr>
+                </a:solidFill>
+                <a:latin typeface="メイリオ" panose="020B0604030504040204" pitchFamily="50" charset="-128"/>
+                <a:ea typeface="メイリオ" panose="020B0604030504040204" pitchFamily="50" charset="-128"/>
+              </a:rPr>
+              <a:t>combos$prob1</a:t>
+            </a:r>
+            <a:r>
+              <a:rPr lang="ja-JP" altLang="en-US" sz="2000" dirty="0">
+                <a:solidFill>
+                  <a:schemeClr val="accent4">
+                    <a:lumMod val="75000"/>
+                  </a:schemeClr>
+                </a:solidFill>
+                <a:latin typeface="メイリオ" panose="020B0604030504040204" pitchFamily="50" charset="-128"/>
+                <a:ea typeface="メイリオ" panose="020B0604030504040204" pitchFamily="50" charset="-128"/>
+              </a:rPr>
+              <a:t>に代入するときに、</a:t>
+            </a:r>
+            <a:r>
+              <a:rPr lang="en-US" altLang="ja-JP" sz="2000" dirty="0">
+                <a:solidFill>
+                  <a:schemeClr val="accent4">
+                    <a:lumMod val="75000"/>
+                  </a:schemeClr>
+                </a:solidFill>
+                <a:latin typeface="メイリオ" panose="020B0604030504040204" pitchFamily="50" charset="-128"/>
+                <a:ea typeface="メイリオ" panose="020B0604030504040204" pitchFamily="50" charset="-128"/>
+              </a:rPr>
+              <a:t>prob[combos$Var1]</a:t>
+            </a:r>
+            <a:r>
+              <a:rPr lang="ja-JP" altLang="en-US" sz="2000" dirty="0">
+                <a:solidFill>
+                  <a:schemeClr val="accent4">
+                    <a:lumMod val="75000"/>
+                  </a:schemeClr>
+                </a:solidFill>
+                <a:latin typeface="メイリオ" panose="020B0604030504040204" pitchFamily="50" charset="-128"/>
+                <a:ea typeface="メイリオ" panose="020B0604030504040204" pitchFamily="50" charset="-128"/>
+              </a:rPr>
+              <a:t>のように取り出せるのはすごいと思った。配列の</a:t>
+            </a:r>
+            <a:r>
+              <a:rPr lang="en-US" altLang="ja-JP" sz="2000" dirty="0">
+                <a:solidFill>
+                  <a:schemeClr val="accent4">
+                    <a:lumMod val="75000"/>
+                  </a:schemeClr>
+                </a:solidFill>
+                <a:latin typeface="メイリオ" panose="020B0604030504040204" pitchFamily="50" charset="-128"/>
+                <a:ea typeface="メイリオ" panose="020B0604030504040204" pitchFamily="50" charset="-128"/>
+              </a:rPr>
+              <a:t>0,1,2,…</a:t>
+            </a:r>
+            <a:r>
+              <a:rPr lang="ja-JP" altLang="en-US" sz="2000" dirty="0">
+                <a:solidFill>
+                  <a:schemeClr val="accent4">
+                    <a:lumMod val="75000"/>
+                  </a:schemeClr>
+                </a:solidFill>
+                <a:latin typeface="メイリオ" panose="020B0604030504040204" pitchFamily="50" charset="-128"/>
+                <a:ea typeface="メイリオ" panose="020B0604030504040204" pitchFamily="50" charset="-128"/>
+              </a:rPr>
+              <a:t>が</a:t>
+            </a:r>
+            <a:r>
+              <a:rPr lang="en-US" altLang="ja-JP" sz="2000" dirty="0">
+                <a:solidFill>
+                  <a:schemeClr val="accent4">
+                    <a:lumMod val="75000"/>
+                  </a:schemeClr>
+                </a:solidFill>
+                <a:latin typeface="メイリオ" panose="020B0604030504040204" pitchFamily="50" charset="-128"/>
+                <a:ea typeface="メイリオ" panose="020B0604030504040204" pitchFamily="50" charset="-128"/>
+              </a:rPr>
+              <a:t>DD,7,BBB</a:t>
+            </a:r>
+          </a:p>
+          <a:p>
+            <a:pPr algn="l"/>
+            <a:endParaRPr kumimoji="1" lang="en-US" altLang="ja-JP" sz="2000" dirty="0">
+              <a:solidFill>
+                <a:schemeClr val="accent4">
+                  <a:lumMod val="75000"/>
+                </a:schemeClr>
+              </a:solidFill>
+              <a:latin typeface="メイリオ" panose="020B0604030504040204" pitchFamily="50" charset="-128"/>
+              <a:ea typeface="メイリオ" panose="020B0604030504040204" pitchFamily="50" charset="-128"/>
+            </a:endParaRPr>
+          </a:p>
+          <a:p>
+            <a:pPr algn="l"/>
+            <a:r>
+              <a:rPr kumimoji="1" lang="en-US" altLang="ja-JP" sz="2000" dirty="0">
+                <a:solidFill>
+                  <a:schemeClr val="accent4">
+                    <a:lumMod val="75000"/>
+                  </a:schemeClr>
+                </a:solidFill>
+                <a:latin typeface="メイリオ" panose="020B0604030504040204" pitchFamily="50" charset="-128"/>
+                <a:ea typeface="メイリオ" panose="020B0604030504040204" pitchFamily="50" charset="-128"/>
+              </a:rPr>
+              <a:t>cat() print()</a:t>
+            </a:r>
+            <a:r>
+              <a:rPr kumimoji="1" lang="ja-JP" altLang="en-US" sz="2000" dirty="0">
+                <a:solidFill>
+                  <a:schemeClr val="accent4">
+                    <a:lumMod val="75000"/>
+                  </a:schemeClr>
+                </a:solidFill>
+                <a:latin typeface="メイリオ" panose="020B0604030504040204" pitchFamily="50" charset="-128"/>
+                <a:ea typeface="メイリオ" panose="020B0604030504040204" pitchFamily="50" charset="-128"/>
+              </a:rPr>
+              <a:t>でどちらも表示するが、表示の目的やコードの扱い方が違うのが面白いと感じた</a:t>
+            </a:r>
+          </a:p>
+        </p:txBody>
+      </p:sp>
+    </p:spTree>
+    <p:extLst>
+      <p:ext uri="{BB962C8B-B14F-4D97-AF65-F5344CB8AC3E}">
+        <p14:creationId xmlns:p14="http://schemas.microsoft.com/office/powerpoint/2010/main" val="878594590"/>
+      </p:ext>
+    </p:extLst>
+  </p:cSld>
+  <p:clrMapOvr>
+    <a:masterClrMapping/>
+  </p:clrMapOvr>
+</p:sld>
+</file>
+
+<file path=ppt/slides/slide25.xml><?xml version="1.0" encoding="utf-8"?>
+<p:sld xmlns:a="http://schemas.openxmlformats.org/drawingml/2006/main" xmlns:r="http://schemas.openxmlformats.org/officeDocument/2006/relationships" xmlns:p="http://schemas.openxmlformats.org/presentationml/2006/main">
+  <p:cSld>
+    <p:spTree>
+      <p:nvGrpSpPr>
+        <p:cNvPr id="1" name=""/>
+        <p:cNvGrpSpPr/>
+        <p:nvPr/>
+      </p:nvGrpSpPr>
+      <p:grpSpPr>
+        <a:xfrm>
+          <a:off x="0" y="0"/>
+          <a:ext cx="0" cy="0"/>
+          <a:chOff x="0" y="0"/>
+          <a:chExt cx="0" cy="0"/>
+        </a:xfrm>
+      </p:grpSpPr>
+      <p:sp>
+        <p:nvSpPr>
+          <p:cNvPr id="2" name="タイトル 1">
+            <a:extLst>
+              <a:ext uri="{FF2B5EF4-FFF2-40B4-BE49-F238E27FC236}">
+                <a16:creationId xmlns:a16="http://schemas.microsoft.com/office/drawing/2014/main" id="{8F92D15D-6ED6-F1E2-415D-C5D0D0CAAC83}"/>
+              </a:ext>
+            </a:extLst>
+          </p:cNvPr>
+          <p:cNvSpPr>
+            <a:spLocks noGrp="1"/>
+          </p:cNvSpPr>
+          <p:nvPr>
+            <p:ph type="ctrTitle"/>
+          </p:nvPr>
+        </p:nvSpPr>
+        <p:spPr>
+          <a:xfrm>
+            <a:off x="528181" y="314435"/>
+            <a:ext cx="5891408" cy="700173"/>
+          </a:xfrm>
+        </p:spPr>
+        <p:txBody>
+          <a:bodyPr>
+            <a:normAutofit/>
+          </a:bodyPr>
+          <a:lstStyle/>
+          <a:p>
+            <a:pPr algn="l"/>
+            <a:r>
+              <a:rPr kumimoji="1" lang="ja-JP" altLang="en-US" sz="3000" b="1" dirty="0">
+                <a:solidFill>
+                  <a:schemeClr val="tx1">
+                    <a:lumMod val="65000"/>
+                    <a:lumOff val="35000"/>
+                  </a:schemeClr>
+                </a:solidFill>
+                <a:latin typeface="メイリオ" panose="020B0604030504040204" pitchFamily="50" charset="-128"/>
+                <a:ea typeface="メイリオ" panose="020B0604030504040204" pitchFamily="50" charset="-128"/>
+              </a:rPr>
+              <a:t>参考文献</a:t>
+            </a:r>
+          </a:p>
+        </p:txBody>
+      </p:sp>
+      <p:sp>
+        <p:nvSpPr>
+          <p:cNvPr id="4" name="正方形/長方形 3">
+            <a:extLst>
+              <a:ext uri="{FF2B5EF4-FFF2-40B4-BE49-F238E27FC236}">
+                <a16:creationId xmlns:a16="http://schemas.microsoft.com/office/drawing/2014/main" id="{578782C7-6070-7C3A-DAB7-3101F4C6ED5C}"/>
+              </a:ext>
+            </a:extLst>
+          </p:cNvPr>
+          <p:cNvSpPr/>
+          <p:nvPr/>
+        </p:nvSpPr>
+        <p:spPr>
+          <a:xfrm>
+            <a:off x="695629" y="1055944"/>
+            <a:ext cx="10800742" cy="5528957"/>
+          </a:xfrm>
+          <a:prstGeom prst="rect">
+            <a:avLst/>
+          </a:prstGeom>
+          <a:solidFill>
+            <a:schemeClr val="accent4">
+              <a:lumMod val="40000"/>
+              <a:lumOff val="60000"/>
+            </a:schemeClr>
+          </a:solidFill>
+          <a:ln>
+            <a:noFill/>
+          </a:ln>
+        </p:spPr>
+        <p:style>
+          <a:lnRef idx="2">
+            <a:schemeClr val="accent1">
+              <a:shade val="15000"/>
+            </a:schemeClr>
+          </a:lnRef>
+          <a:fillRef idx="1">
+            <a:schemeClr val="accent1"/>
+          </a:fillRef>
+          <a:effectRef idx="0">
+            <a:schemeClr val="accent1"/>
+          </a:effectRef>
+          <a:fontRef idx="minor">
+            <a:schemeClr val="lt1"/>
+          </a:fontRef>
+        </p:style>
+        <p:txBody>
+          <a:bodyPr rtlCol="0" anchor="t"/>
+          <a:lstStyle/>
+          <a:p>
+            <a:endParaRPr kumimoji="1" lang="ja-JP" altLang="en-US" dirty="0"/>
+          </a:p>
+        </p:txBody>
+      </p:sp>
+      <p:sp>
+        <p:nvSpPr>
+          <p:cNvPr id="3" name="字幕 2">
+            <a:extLst>
+              <a:ext uri="{FF2B5EF4-FFF2-40B4-BE49-F238E27FC236}">
+                <a16:creationId xmlns:a16="http://schemas.microsoft.com/office/drawing/2014/main" id="{EF422FEA-2F34-70ED-56A9-01A65A2AD142}"/>
+              </a:ext>
+            </a:extLst>
+          </p:cNvPr>
+          <p:cNvSpPr>
+            <a:spLocks noGrp="1"/>
+          </p:cNvSpPr>
+          <p:nvPr>
+            <p:ph type="subTitle" idx="1"/>
+          </p:nvPr>
+        </p:nvSpPr>
+        <p:spPr>
+          <a:xfrm>
+            <a:off x="599936" y="1120674"/>
+            <a:ext cx="10992128" cy="5446283"/>
+          </a:xfrm>
+        </p:spPr>
+        <p:txBody>
+          <a:bodyPr>
+            <a:normAutofit/>
+          </a:bodyPr>
+          <a:lstStyle/>
+          <a:p>
+            <a:pPr algn="l"/>
+            <a:r>
+              <a:rPr kumimoji="1" lang="ja-JP" altLang="en-US" sz="2000" dirty="0">
+                <a:solidFill>
+                  <a:schemeClr val="accent4">
+                    <a:lumMod val="75000"/>
+                  </a:schemeClr>
+                </a:solidFill>
+                <a:latin typeface="メイリオ" panose="020B0604030504040204" pitchFamily="50" charset="-128"/>
+                <a:ea typeface="メイリオ" panose="020B0604030504040204" pitchFamily="50" charset="-128"/>
+              </a:rPr>
+              <a:t>「</a:t>
+            </a:r>
+            <a:r>
+              <a:rPr kumimoji="1" lang="en-US" altLang="ja-JP" sz="2000" dirty="0" err="1">
+                <a:solidFill>
+                  <a:schemeClr val="accent4">
+                    <a:lumMod val="75000"/>
+                  </a:schemeClr>
+                </a:solidFill>
+                <a:latin typeface="メイリオ" panose="020B0604030504040204" pitchFamily="50" charset="-128"/>
+                <a:ea typeface="メイリオ" panose="020B0604030504040204" pitchFamily="50" charset="-128"/>
+              </a:rPr>
+              <a:t>Qiita</a:t>
+            </a:r>
+            <a:r>
+              <a:rPr kumimoji="1" lang="ja-JP" altLang="en-US" sz="2000" dirty="0">
+                <a:solidFill>
+                  <a:schemeClr val="accent4">
+                    <a:lumMod val="75000"/>
+                  </a:schemeClr>
+                </a:solidFill>
+                <a:latin typeface="メイリオ" panose="020B0604030504040204" pitchFamily="50" charset="-128"/>
+                <a:ea typeface="メイリオ" panose="020B0604030504040204" pitchFamily="50" charset="-128"/>
+              </a:rPr>
+              <a:t>」</a:t>
+            </a:r>
+            <a:r>
+              <a:rPr kumimoji="1" lang="en-US" altLang="ja-JP" sz="2000" dirty="0">
+                <a:solidFill>
+                  <a:schemeClr val="accent4">
+                    <a:lumMod val="75000"/>
+                  </a:schemeClr>
+                </a:solidFill>
+                <a:latin typeface="メイリオ" panose="020B0604030504040204" pitchFamily="50" charset="-128"/>
+                <a:ea typeface="メイリオ" panose="020B0604030504040204" pitchFamily="50" charset="-128"/>
+                <a:hlinkClick r:id="rId2"/>
+              </a:rPr>
+              <a:t>https://qiita.com/</a:t>
+            </a:r>
+            <a:endParaRPr kumimoji="1" lang="en-US" altLang="ja-JP" sz="2000" dirty="0">
+              <a:solidFill>
+                <a:schemeClr val="accent4">
+                  <a:lumMod val="75000"/>
+                </a:schemeClr>
+              </a:solidFill>
+              <a:latin typeface="メイリオ" panose="020B0604030504040204" pitchFamily="50" charset="-128"/>
+              <a:ea typeface="メイリオ" panose="020B0604030504040204" pitchFamily="50" charset="-128"/>
+            </a:endParaRPr>
+          </a:p>
+          <a:p>
+            <a:pPr algn="l"/>
+            <a:r>
+              <a:rPr lang="ja-JP" altLang="en-US" sz="2000" dirty="0">
+                <a:solidFill>
+                  <a:schemeClr val="accent4">
+                    <a:lumMod val="75000"/>
+                  </a:schemeClr>
+                </a:solidFill>
+                <a:latin typeface="メイリオ" panose="020B0604030504040204" pitchFamily="50" charset="-128"/>
+                <a:ea typeface="メイリオ" panose="020B0604030504040204" pitchFamily="50" charset="-128"/>
+              </a:rPr>
+              <a:t>「</a:t>
+            </a:r>
+            <a:r>
+              <a:rPr lang="en-US" altLang="ja-JP" sz="2000" dirty="0">
+                <a:solidFill>
+                  <a:schemeClr val="accent4">
+                    <a:lumMod val="75000"/>
+                  </a:schemeClr>
+                </a:solidFill>
+                <a:latin typeface="メイリオ" panose="020B0604030504040204" pitchFamily="50" charset="-128"/>
+                <a:ea typeface="メイリオ" panose="020B0604030504040204" pitchFamily="50" charset="-128"/>
+              </a:rPr>
+              <a:t>GitHub</a:t>
+            </a:r>
+            <a:r>
+              <a:rPr lang="ja-JP" altLang="en-US" sz="2000" dirty="0">
+                <a:solidFill>
+                  <a:schemeClr val="accent4">
+                    <a:lumMod val="75000"/>
+                  </a:schemeClr>
+                </a:solidFill>
+                <a:latin typeface="メイリオ" panose="020B0604030504040204" pitchFamily="50" charset="-128"/>
+                <a:ea typeface="メイリオ" panose="020B0604030504040204" pitchFamily="50" charset="-128"/>
+              </a:rPr>
+              <a:t> </a:t>
+            </a:r>
+            <a:r>
+              <a:rPr lang="en-US" altLang="ja-JP" sz="2000" dirty="0">
+                <a:solidFill>
+                  <a:schemeClr val="accent4">
+                    <a:lumMod val="75000"/>
+                  </a:schemeClr>
+                </a:solidFill>
+                <a:latin typeface="メイリオ" panose="020B0604030504040204" pitchFamily="50" charset="-128"/>
+                <a:ea typeface="メイリオ" panose="020B0604030504040204" pitchFamily="50" charset="-128"/>
+              </a:rPr>
+              <a:t>Gist</a:t>
+            </a:r>
+            <a:r>
+              <a:rPr lang="ja-JP" altLang="en-US" sz="2000" dirty="0">
+                <a:solidFill>
+                  <a:schemeClr val="accent4">
+                    <a:lumMod val="75000"/>
+                  </a:schemeClr>
+                </a:solidFill>
+                <a:latin typeface="メイリオ" panose="020B0604030504040204" pitchFamily="50" charset="-128"/>
+                <a:ea typeface="メイリオ" panose="020B0604030504040204" pitchFamily="50" charset="-128"/>
+              </a:rPr>
+              <a:t>」</a:t>
+            </a:r>
+            <a:r>
+              <a:rPr lang="en-US" altLang="ja-JP" sz="2000" dirty="0">
+                <a:solidFill>
+                  <a:schemeClr val="accent4">
+                    <a:lumMod val="75000"/>
+                  </a:schemeClr>
+                </a:solidFill>
+                <a:latin typeface="メイリオ" panose="020B0604030504040204" pitchFamily="50" charset="-128"/>
+                <a:ea typeface="メイリオ" panose="020B0604030504040204" pitchFamily="50" charset="-128"/>
+                <a:hlinkClick r:id="rId3"/>
+              </a:rPr>
+              <a:t>https://gist.github.com/</a:t>
+            </a:r>
+            <a:endParaRPr lang="en-US" altLang="ja-JP" sz="2000" dirty="0">
+              <a:solidFill>
+                <a:schemeClr val="accent4">
+                  <a:lumMod val="75000"/>
+                </a:schemeClr>
+              </a:solidFill>
+              <a:latin typeface="メイリオ" panose="020B0604030504040204" pitchFamily="50" charset="-128"/>
+              <a:ea typeface="メイリオ" panose="020B0604030504040204" pitchFamily="50" charset="-128"/>
+            </a:endParaRPr>
+          </a:p>
+          <a:p>
+            <a:pPr algn="l"/>
+            <a:r>
+              <a:rPr kumimoji="1" lang="ja-JP" altLang="en-US" sz="2000" dirty="0">
+                <a:solidFill>
+                  <a:schemeClr val="accent4">
+                    <a:lumMod val="75000"/>
+                  </a:schemeClr>
+                </a:solidFill>
+                <a:latin typeface="メイリオ" panose="020B0604030504040204" pitchFamily="50" charset="-128"/>
+                <a:ea typeface="メイリオ" panose="020B0604030504040204" pitchFamily="50" charset="-128"/>
+              </a:rPr>
+              <a:t>「</a:t>
+            </a:r>
+            <a:r>
+              <a:rPr kumimoji="1" lang="en-US" altLang="ja-JP" sz="2000" dirty="0">
+                <a:solidFill>
+                  <a:schemeClr val="accent4">
+                    <a:lumMod val="75000"/>
+                  </a:schemeClr>
+                </a:solidFill>
+                <a:latin typeface="メイリオ" panose="020B0604030504040204" pitchFamily="50" charset="-128"/>
+                <a:ea typeface="メイリオ" panose="020B0604030504040204" pitchFamily="50" charset="-128"/>
+              </a:rPr>
+              <a:t>R</a:t>
+            </a:r>
+            <a:r>
+              <a:rPr kumimoji="1" lang="ja-JP" altLang="en-US" sz="2000" dirty="0">
+                <a:solidFill>
+                  <a:schemeClr val="accent4">
+                    <a:lumMod val="75000"/>
+                  </a:schemeClr>
+                </a:solidFill>
+                <a:latin typeface="メイリオ" panose="020B0604030504040204" pitchFamily="50" charset="-128"/>
+                <a:ea typeface="メイリオ" panose="020B0604030504040204" pitchFamily="50" charset="-128"/>
+              </a:rPr>
+              <a:t>のオブジェクト」</a:t>
+            </a:r>
+            <a:r>
+              <a:rPr kumimoji="1" lang="en-US" altLang="ja-JP" sz="2000" dirty="0">
+                <a:solidFill>
+                  <a:schemeClr val="accent4">
+                    <a:lumMod val="75000"/>
+                  </a:schemeClr>
+                </a:solidFill>
+                <a:latin typeface="メイリオ" panose="020B0604030504040204" pitchFamily="50" charset="-128"/>
+                <a:ea typeface="メイリオ" panose="020B0604030504040204" pitchFamily="50" charset="-128"/>
+                <a:hlinkClick r:id="rId4"/>
+              </a:rPr>
+              <a:t>https://www.slideshare.net/slideshow/r-14844056/14844056</a:t>
+            </a:r>
+            <a:endParaRPr kumimoji="1" lang="en-US" altLang="ja-JP" sz="2000" dirty="0">
+              <a:solidFill>
+                <a:schemeClr val="accent4">
+                  <a:lumMod val="75000"/>
+                </a:schemeClr>
+              </a:solidFill>
+              <a:latin typeface="メイリオ" panose="020B0604030504040204" pitchFamily="50" charset="-128"/>
+              <a:ea typeface="メイリオ" panose="020B0604030504040204" pitchFamily="50" charset="-128"/>
+            </a:endParaRPr>
+          </a:p>
+          <a:p>
+            <a:pPr algn="l"/>
+            <a:r>
+              <a:rPr kumimoji="1" lang="ja-JP" altLang="en-US" sz="2000" dirty="0">
+                <a:solidFill>
+                  <a:schemeClr val="accent4">
+                    <a:lumMod val="75000"/>
+                  </a:schemeClr>
+                </a:solidFill>
+                <a:latin typeface="メイリオ" panose="020B0604030504040204" pitchFamily="50" charset="-128"/>
+                <a:ea typeface="メイリオ" panose="020B0604030504040204" pitchFamily="50" charset="-128"/>
+              </a:rPr>
+              <a:t>「生物統計学」</a:t>
+            </a:r>
+            <a:r>
+              <a:rPr kumimoji="1" lang="en-US" altLang="ja-JP" sz="2000" dirty="0">
+                <a:solidFill>
+                  <a:schemeClr val="accent4">
+                    <a:lumMod val="75000"/>
+                  </a:schemeClr>
+                </a:solidFill>
+                <a:latin typeface="メイリオ" panose="020B0604030504040204" pitchFamily="50" charset="-128"/>
+                <a:ea typeface="メイリオ" panose="020B0604030504040204" pitchFamily="50" charset="-128"/>
+                <a:hlinkClick r:id="rId5"/>
+              </a:rPr>
+              <a:t>https://stats.biopapyrus.jp/</a:t>
+            </a:r>
+            <a:endParaRPr kumimoji="1" lang="en-US" altLang="ja-JP" sz="2000" dirty="0">
+              <a:solidFill>
+                <a:schemeClr val="accent4">
+                  <a:lumMod val="75000"/>
+                </a:schemeClr>
+              </a:solidFill>
+              <a:latin typeface="メイリオ" panose="020B0604030504040204" pitchFamily="50" charset="-128"/>
+              <a:ea typeface="メイリオ" panose="020B0604030504040204" pitchFamily="50" charset="-128"/>
+            </a:endParaRPr>
+          </a:p>
+          <a:p>
+            <a:pPr algn="l"/>
+            <a:r>
+              <a:rPr kumimoji="1" lang="ja-JP" altLang="en-US" sz="2000" dirty="0">
+                <a:solidFill>
+                  <a:schemeClr val="accent4">
+                    <a:lumMod val="75000"/>
+                  </a:schemeClr>
+                </a:solidFill>
+                <a:latin typeface="メイリオ" panose="020B0604030504040204" pitchFamily="50" charset="-128"/>
+                <a:ea typeface="メイリオ" panose="020B0604030504040204" pitchFamily="50" charset="-128"/>
+              </a:rPr>
+              <a:t>「」</a:t>
+            </a:r>
+          </a:p>
         </p:txBody>
       </p:sp>
       <p:sp>
@@ -22127,7 +24158,7 @@
         </p:nvSpPr>
         <p:spPr>
           <a:xfrm>
-            <a:off x="3048000" y="2828836"/>
+            <a:off x="2792818" y="4498147"/>
             <a:ext cx="6096000" cy="1477328"/>
           </a:xfrm>
           <a:prstGeom prst="rect">
@@ -22143,7 +24174,7 @@
           <a:p>
             <a:r>
               <a:rPr lang="en-US" altLang="ja-JP" dirty="0">
-                <a:hlinkClick r:id="rId2"/>
+                <a:hlinkClick r:id="rId6"/>
               </a:rPr>
               <a:t>https://nakazakimasahito.wordpress.com/2020/06/01/r-stringsasfactors-false%E3%81%AB%E3%81%A4%E3%81%84%E3%81%A6%E3%80%80/</a:t>
             </a:r>
@@ -28595,6 +30626,36 @@
             </a:endParaRPr>
           </a:p>
           <a:p>
+            <a:r>
+              <a:rPr lang="ja-JP" altLang="en-US" dirty="0">
+                <a:solidFill>
+                  <a:schemeClr val="tx1"/>
+                </a:solidFill>
+                <a:latin typeface="メイリオ" panose="020B0604030504040204" pitchFamily="50" charset="-128"/>
+                <a:ea typeface="メイリオ" panose="020B0604030504040204" pitchFamily="50" charset="-128"/>
+              </a:rPr>
+              <a:t>　・</a:t>
+            </a:r>
+            <a:r>
+              <a:rPr lang="en-US" altLang="ja-JP" dirty="0">
+                <a:solidFill>
+                  <a:schemeClr val="tx1"/>
+                </a:solidFill>
+                <a:latin typeface="メイリオ" panose="020B0604030504040204" pitchFamily="50" charset="-128"/>
+                <a:ea typeface="メイリオ" panose="020B0604030504040204" pitchFamily="50" charset="-128"/>
+              </a:rPr>
+              <a:t>symbol</a:t>
+            </a:r>
+            <a:r>
+              <a:rPr lang="ja-JP" altLang="en-US" dirty="0">
+                <a:solidFill>
+                  <a:schemeClr val="tx1"/>
+                </a:solidFill>
+                <a:latin typeface="メイリオ" panose="020B0604030504040204" pitchFamily="50" charset="-128"/>
+                <a:ea typeface="メイリオ" panose="020B0604030504040204" pitchFamily="50" charset="-128"/>
+              </a:rPr>
+              <a:t>の出力が文字列のままになっている</a:t>
+            </a:r>
             <a:endParaRPr lang="en-US" altLang="ja-JP" dirty="0">
               <a:solidFill>
                 <a:schemeClr val="tx1"/>
@@ -28604,36 +30665,6 @@
             </a:endParaRPr>
           </a:p>
           <a:p>
-            <a:r>
-              <a:rPr lang="ja-JP" altLang="en-US" dirty="0">
-                <a:solidFill>
-                  <a:schemeClr val="tx1"/>
-                </a:solidFill>
-                <a:latin typeface="メイリオ" panose="020B0604030504040204" pitchFamily="50" charset="-128"/>
-                <a:ea typeface="メイリオ" panose="020B0604030504040204" pitchFamily="50" charset="-128"/>
-              </a:rPr>
-              <a:t>　・</a:t>
-            </a:r>
-            <a:r>
-              <a:rPr lang="en-US" altLang="ja-JP" dirty="0">
-                <a:solidFill>
-                  <a:schemeClr val="tx1"/>
-                </a:solidFill>
-                <a:latin typeface="メイリオ" panose="020B0604030504040204" pitchFamily="50" charset="-128"/>
-                <a:ea typeface="メイリオ" panose="020B0604030504040204" pitchFamily="50" charset="-128"/>
-              </a:rPr>
-              <a:t>symbol</a:t>
-            </a:r>
-            <a:r>
-              <a:rPr lang="ja-JP" altLang="en-US" dirty="0">
-                <a:solidFill>
-                  <a:schemeClr val="tx1"/>
-                </a:solidFill>
-                <a:latin typeface="メイリオ" panose="020B0604030504040204" pitchFamily="50" charset="-128"/>
-                <a:ea typeface="メイリオ" panose="020B0604030504040204" pitchFamily="50" charset="-128"/>
-              </a:rPr>
-              <a:t>の出力が文字列のままになっている</a:t>
-            </a:r>
             <a:endParaRPr lang="en-US" altLang="ja-JP" dirty="0">
               <a:solidFill>
                 <a:schemeClr val="tx1"/>
@@ -28643,6 +30674,56 @@
             </a:endParaRPr>
           </a:p>
           <a:p>
+            <a:r>
+              <a:rPr kumimoji="1" lang="ja-JP" altLang="en-US" dirty="0">
+                <a:solidFill>
+                  <a:schemeClr val="tx1"/>
+                </a:solidFill>
+                <a:latin typeface="メイリオ" panose="020B0604030504040204" pitchFamily="50" charset="-128"/>
+                <a:ea typeface="メイリオ" panose="020B0604030504040204" pitchFamily="50" charset="-128"/>
+              </a:rPr>
+              <a:t>　・</a:t>
+            </a:r>
+            <a:r>
+              <a:rPr kumimoji="1" lang="en-US" altLang="ja-JP" dirty="0">
+                <a:solidFill>
+                  <a:schemeClr val="tx1"/>
+                </a:solidFill>
+                <a:latin typeface="メイリオ" panose="020B0604030504040204" pitchFamily="50" charset="-128"/>
+                <a:ea typeface="メイリオ" panose="020B0604030504040204" pitchFamily="50" charset="-128"/>
+              </a:rPr>
+              <a:t>play()</a:t>
+            </a:r>
+            <a:r>
+              <a:rPr kumimoji="1" lang="ja-JP" altLang="en-US" dirty="0">
+                <a:solidFill>
+                  <a:schemeClr val="tx1"/>
+                </a:solidFill>
+                <a:latin typeface="メイリオ" panose="020B0604030504040204" pitchFamily="50" charset="-128"/>
+                <a:ea typeface="メイリオ" panose="020B0604030504040204" pitchFamily="50" charset="-128"/>
+              </a:rPr>
+              <a:t>の中で</a:t>
+            </a:r>
+            <a:r>
+              <a:rPr kumimoji="1" lang="en-US" altLang="ja-JP" dirty="0">
+                <a:solidFill>
+                  <a:schemeClr val="tx1"/>
+                </a:solidFill>
+                <a:latin typeface="メイリオ" panose="020B0604030504040204" pitchFamily="50" charset="-128"/>
+                <a:ea typeface="メイリオ" panose="020B0604030504040204" pitchFamily="50" charset="-128"/>
+              </a:rPr>
+              <a:t>print</a:t>
+            </a:r>
+            <a:r>
+              <a:rPr kumimoji="1" lang="ja-JP" altLang="en-US" dirty="0">
+                <a:solidFill>
+                  <a:schemeClr val="tx1"/>
+                </a:solidFill>
+                <a:latin typeface="メイリオ" panose="020B0604030504040204" pitchFamily="50" charset="-128"/>
+                <a:ea typeface="メイリオ" panose="020B0604030504040204" pitchFamily="50" charset="-128"/>
+              </a:rPr>
+              <a:t>を呼び出しているため賞金しか保存されない</a:t>
+            </a:r>
             <a:endParaRPr kumimoji="1" lang="en-US" altLang="ja-JP" dirty="0">
               <a:solidFill>
                 <a:schemeClr val="tx1"/>
@@ -28661,65 +30742,59 @@
             </a:endParaRPr>
           </a:p>
           <a:p>
-            <a:endParaRPr lang="en-US" altLang="ja-JP" dirty="0">
+            <a:r>
+              <a:rPr kumimoji="1" lang="en-US" altLang="ja-JP" sz="1800" dirty="0">
+                <a:solidFill>
+                  <a:schemeClr val="accent4">
+                    <a:lumMod val="75000"/>
+                  </a:schemeClr>
+                </a:solidFill>
+                <a:latin typeface="メイリオ" panose="020B0604030504040204" pitchFamily="50" charset="-128"/>
+                <a:ea typeface="メイリオ" panose="020B0604030504040204" pitchFamily="50" charset="-128"/>
+              </a:rPr>
+              <a:t>## </a:t>
+            </a:r>
+            <a:r>
+              <a:rPr kumimoji="1" lang="ja-JP" altLang="en-US" sz="1800" dirty="0">
+                <a:solidFill>
+                  <a:schemeClr val="accent4">
+                    <a:lumMod val="75000"/>
+                  </a:schemeClr>
+                </a:solidFill>
+                <a:latin typeface="メイリオ" panose="020B0604030504040204" pitchFamily="50" charset="-128"/>
+                <a:ea typeface="メイリオ" panose="020B0604030504040204" pitchFamily="50" charset="-128"/>
+              </a:rPr>
+              <a:t>ジェネリック関数</a:t>
+            </a:r>
+            <a:endParaRPr kumimoji="1" lang="en-US" altLang="ja-JP" sz="1800" dirty="0">
+              <a:solidFill>
+                <a:schemeClr val="accent4">
+                  <a:lumMod val="75000"/>
+                </a:schemeClr>
+              </a:solidFill>
+              <a:latin typeface="メイリオ" panose="020B0604030504040204" pitchFamily="50" charset="-128"/>
+              <a:ea typeface="メイリオ" panose="020B0604030504040204" pitchFamily="50" charset="-128"/>
+            </a:endParaRPr>
+          </a:p>
+          <a:p>
+            <a:endParaRPr kumimoji="1" lang="en-US" altLang="ja-JP" sz="1800" dirty="0">
+              <a:solidFill>
+                <a:schemeClr val="accent4">
+                  <a:lumMod val="75000"/>
+                </a:schemeClr>
+              </a:solidFill>
+              <a:latin typeface="メイリオ" panose="020B0604030504040204" pitchFamily="50" charset="-128"/>
+              <a:ea typeface="メイリオ" panose="020B0604030504040204" pitchFamily="50" charset="-128"/>
+            </a:endParaRPr>
+          </a:p>
+          <a:p>
+            <a:endParaRPr kumimoji="1" lang="ja-JP" altLang="en-US" dirty="0">
               <a:solidFill>
                 <a:schemeClr val="tx1"/>
               </a:solidFill>
               <a:latin typeface="メイリオ" panose="020B0604030504040204" pitchFamily="50" charset="-128"/>
               <a:ea typeface="メイリオ" panose="020B0604030504040204" pitchFamily="50" charset="-128"/>
             </a:endParaRPr>
-          </a:p>
-          <a:p>
-            <a:r>
-              <a:rPr kumimoji="1" lang="ja-JP" altLang="en-US" dirty="0">
-                <a:solidFill>
-                  <a:schemeClr val="tx1"/>
-                </a:solidFill>
-                <a:latin typeface="メイリオ" panose="020B0604030504040204" pitchFamily="50" charset="-128"/>
-                <a:ea typeface="メイリオ" panose="020B0604030504040204" pitchFamily="50" charset="-128"/>
-              </a:rPr>
-              <a:t>　・</a:t>
-            </a:r>
-            <a:r>
-              <a:rPr kumimoji="1" lang="en-US" altLang="ja-JP" dirty="0">
-                <a:solidFill>
-                  <a:schemeClr val="tx1"/>
-                </a:solidFill>
-                <a:latin typeface="メイリオ" panose="020B0604030504040204" pitchFamily="50" charset="-128"/>
-                <a:ea typeface="メイリオ" panose="020B0604030504040204" pitchFamily="50" charset="-128"/>
-              </a:rPr>
-              <a:t>play()</a:t>
-            </a:r>
-            <a:r>
-              <a:rPr kumimoji="1" lang="ja-JP" altLang="en-US" dirty="0">
-                <a:solidFill>
-                  <a:schemeClr val="tx1"/>
-                </a:solidFill>
-                <a:latin typeface="メイリオ" panose="020B0604030504040204" pitchFamily="50" charset="-128"/>
-                <a:ea typeface="メイリオ" panose="020B0604030504040204" pitchFamily="50" charset="-128"/>
-              </a:rPr>
-              <a:t>の中で</a:t>
-            </a:r>
-            <a:r>
-              <a:rPr kumimoji="1" lang="en-US" altLang="ja-JP" dirty="0">
-                <a:solidFill>
-                  <a:schemeClr val="tx1"/>
-                </a:solidFill>
-                <a:latin typeface="メイリオ" panose="020B0604030504040204" pitchFamily="50" charset="-128"/>
-                <a:ea typeface="メイリオ" panose="020B0604030504040204" pitchFamily="50" charset="-128"/>
-              </a:rPr>
-              <a:t>print</a:t>
-            </a:r>
-            <a:r>
-              <a:rPr kumimoji="1" lang="ja-JP" altLang="en-US" dirty="0">
-                <a:solidFill>
-                  <a:schemeClr val="tx1"/>
-                </a:solidFill>
-                <a:latin typeface="メイリオ" panose="020B0604030504040204" pitchFamily="50" charset="-128"/>
-                <a:ea typeface="メイリオ" panose="020B0604030504040204" pitchFamily="50" charset="-128"/>
-              </a:rPr>
-              <a:t>を呼び出しているため賞金しか保存されない</a:t>
-            </a:r>
           </a:p>
         </p:txBody>
       </p:sp>
@@ -28745,7 +30820,7 @@
         </p:blipFill>
         <p:spPr>
           <a:xfrm>
-            <a:off x="1701988" y="1991463"/>
+            <a:off x="6008174" y="1438570"/>
             <a:ext cx="1228896" cy="466790"/>
           </a:xfrm>
           <a:prstGeom prst="rect">
@@ -28782,7 +30857,7 @@
         </p:blipFill>
         <p:spPr>
           <a:xfrm>
-            <a:off x="1701988" y="3252075"/>
+            <a:off x="8102788" y="1905360"/>
             <a:ext cx="1771897" cy="609685"/>
           </a:xfrm>
           <a:prstGeom prst="rect">
@@ -28797,6 +30872,1169 @@
           </a:ln>
         </p:spPr>
       </p:pic>
+      <p:sp>
+        <p:nvSpPr>
+          <p:cNvPr id="3" name="正方形/長方形 2">
+            <a:extLst>
+              <a:ext uri="{FF2B5EF4-FFF2-40B4-BE49-F238E27FC236}">
+                <a16:creationId xmlns:a16="http://schemas.microsoft.com/office/drawing/2014/main" id="{0A35426C-87A9-67ED-50E9-B3BF71DBAEC2}"/>
+              </a:ext>
+            </a:extLst>
+          </p:cNvPr>
+          <p:cNvSpPr/>
+          <p:nvPr/>
+        </p:nvSpPr>
+        <p:spPr>
+          <a:xfrm>
+            <a:off x="1310909" y="3495216"/>
+            <a:ext cx="826201" cy="324203"/>
+          </a:xfrm>
+          <a:prstGeom prst="rect">
+            <a:avLst/>
+          </a:prstGeom>
+          <a:solidFill>
+            <a:srgbClr val="FFFFFF"/>
+          </a:solidFill>
+          <a:ln>
+            <a:solidFill>
+              <a:schemeClr val="bg2">
+                <a:lumMod val="90000"/>
+              </a:schemeClr>
+            </a:solidFill>
+          </a:ln>
+        </p:spPr>
+        <p:style>
+          <a:lnRef idx="2">
+            <a:schemeClr val="accent1">
+              <a:shade val="15000"/>
+            </a:schemeClr>
+          </a:lnRef>
+          <a:fillRef idx="1">
+            <a:schemeClr val="accent1"/>
+          </a:fillRef>
+          <a:effectRef idx="0">
+            <a:schemeClr val="accent1"/>
+          </a:effectRef>
+          <a:fontRef idx="minor">
+            <a:schemeClr val="lt1"/>
+          </a:fontRef>
+        </p:style>
+        <p:txBody>
+          <a:bodyPr rtlCol="0" anchor="t"/>
+          <a:lstStyle/>
+          <a:p>
+            <a:r>
+              <a:rPr lang="en-US" altLang="ja-JP" sz="1500" dirty="0">
+                <a:solidFill>
+                  <a:schemeClr val="tx1"/>
+                </a:solidFill>
+                <a:latin typeface="メイリオ" panose="020B0604030504040204" pitchFamily="50" charset="-128"/>
+                <a:ea typeface="メイリオ" panose="020B0604030504040204" pitchFamily="50" charset="-128"/>
+              </a:rPr>
+              <a:t>p</a:t>
+            </a:r>
+            <a:r>
+              <a:rPr kumimoji="1" lang="en-US" altLang="ja-JP" sz="1500" dirty="0">
+                <a:solidFill>
+                  <a:schemeClr val="tx1"/>
+                </a:solidFill>
+                <a:latin typeface="メイリオ" panose="020B0604030504040204" pitchFamily="50" charset="-128"/>
+                <a:ea typeface="メイリオ" panose="020B0604030504040204" pitchFamily="50" charset="-128"/>
+              </a:rPr>
+              <a:t>rint()</a:t>
+            </a:r>
+            <a:endParaRPr lang="en-US" altLang="ja-JP" sz="1500" dirty="0">
+              <a:solidFill>
+                <a:schemeClr val="tx1"/>
+              </a:solidFill>
+              <a:latin typeface="メイリオ" panose="020B0604030504040204" pitchFamily="50" charset="-128"/>
+              <a:ea typeface="メイリオ" panose="020B0604030504040204" pitchFamily="50" charset="-128"/>
+            </a:endParaRPr>
+          </a:p>
+        </p:txBody>
+      </p:sp>
+      <p:sp>
+        <p:nvSpPr>
+          <p:cNvPr id="5" name="正方形/長方形 4">
+            <a:extLst>
+              <a:ext uri="{FF2B5EF4-FFF2-40B4-BE49-F238E27FC236}">
+                <a16:creationId xmlns:a16="http://schemas.microsoft.com/office/drawing/2014/main" id="{C1384A9D-520A-8BAB-9404-7BC395B769AA}"/>
+              </a:ext>
+            </a:extLst>
+          </p:cNvPr>
+          <p:cNvSpPr/>
+          <p:nvPr/>
+        </p:nvSpPr>
+        <p:spPr>
+          <a:xfrm>
+            <a:off x="6283566" y="2841980"/>
+            <a:ext cx="1907007" cy="324203"/>
+          </a:xfrm>
+          <a:prstGeom prst="rect">
+            <a:avLst/>
+          </a:prstGeom>
+          <a:solidFill>
+            <a:srgbClr val="FFFFFF"/>
+          </a:solidFill>
+          <a:ln>
+            <a:solidFill>
+              <a:schemeClr val="bg2">
+                <a:lumMod val="90000"/>
+              </a:schemeClr>
+            </a:solidFill>
+          </a:ln>
+        </p:spPr>
+        <p:style>
+          <a:lnRef idx="2">
+            <a:schemeClr val="accent1">
+              <a:shade val="15000"/>
+            </a:schemeClr>
+          </a:lnRef>
+          <a:fillRef idx="1">
+            <a:schemeClr val="accent1"/>
+          </a:fillRef>
+          <a:effectRef idx="0">
+            <a:schemeClr val="accent1"/>
+          </a:effectRef>
+          <a:fontRef idx="minor">
+            <a:schemeClr val="lt1"/>
+          </a:fontRef>
+        </p:style>
+        <p:txBody>
+          <a:bodyPr rtlCol="0" anchor="t"/>
+          <a:lstStyle/>
+          <a:p>
+            <a:r>
+              <a:rPr lang="en-US" altLang="ja-JP" sz="1500" dirty="0" err="1">
+                <a:solidFill>
+                  <a:schemeClr val="tx1"/>
+                </a:solidFill>
+                <a:latin typeface="メイリオ" panose="020B0604030504040204" pitchFamily="50" charset="-128"/>
+                <a:ea typeface="メイリオ" panose="020B0604030504040204" pitchFamily="50" charset="-128"/>
+              </a:rPr>
+              <a:t>p</a:t>
+            </a:r>
+            <a:r>
+              <a:rPr kumimoji="1" lang="en-US" altLang="ja-JP" sz="1500" dirty="0" err="1">
+                <a:solidFill>
+                  <a:schemeClr val="tx1"/>
+                </a:solidFill>
+                <a:latin typeface="メイリオ" panose="020B0604030504040204" pitchFamily="50" charset="-128"/>
+                <a:ea typeface="メイリオ" panose="020B0604030504040204" pitchFamily="50" charset="-128"/>
+              </a:rPr>
+              <a:t>rint</a:t>
+            </a:r>
+            <a:r>
+              <a:rPr lang="en-US" altLang="ja-JP" sz="1500" dirty="0" err="1">
+                <a:solidFill>
+                  <a:schemeClr val="tx1"/>
+                </a:solidFill>
+                <a:latin typeface="メイリオ" panose="020B0604030504040204" pitchFamily="50" charset="-128"/>
+                <a:ea typeface="メイリオ" panose="020B0604030504040204" pitchFamily="50" charset="-128"/>
+              </a:rPr>
+              <a:t>.numetric</a:t>
+            </a:r>
+            <a:r>
+              <a:rPr lang="en-US" altLang="ja-JP" sz="1500" dirty="0">
+                <a:solidFill>
+                  <a:schemeClr val="tx1"/>
+                </a:solidFill>
+                <a:latin typeface="メイリオ" panose="020B0604030504040204" pitchFamily="50" charset="-128"/>
+                <a:ea typeface="メイリオ" panose="020B0604030504040204" pitchFamily="50" charset="-128"/>
+              </a:rPr>
+              <a:t>()</a:t>
+            </a:r>
+          </a:p>
+        </p:txBody>
+      </p:sp>
+      <p:sp>
+        <p:nvSpPr>
+          <p:cNvPr id="6" name="正方形/長方形 5">
+            <a:extLst>
+              <a:ext uri="{FF2B5EF4-FFF2-40B4-BE49-F238E27FC236}">
+                <a16:creationId xmlns:a16="http://schemas.microsoft.com/office/drawing/2014/main" id="{07245A8C-7980-89F7-5D95-10BFAA501AC0}"/>
+              </a:ext>
+            </a:extLst>
+          </p:cNvPr>
+          <p:cNvSpPr/>
+          <p:nvPr/>
+        </p:nvSpPr>
+        <p:spPr>
+          <a:xfrm>
+            <a:off x="6283566" y="3266898"/>
+            <a:ext cx="1907007" cy="324203"/>
+          </a:xfrm>
+          <a:prstGeom prst="rect">
+            <a:avLst/>
+          </a:prstGeom>
+          <a:solidFill>
+            <a:srgbClr val="FFFFFF"/>
+          </a:solidFill>
+          <a:ln>
+            <a:solidFill>
+              <a:schemeClr val="bg2">
+                <a:lumMod val="90000"/>
+              </a:schemeClr>
+            </a:solidFill>
+          </a:ln>
+        </p:spPr>
+        <p:style>
+          <a:lnRef idx="2">
+            <a:schemeClr val="accent1">
+              <a:shade val="15000"/>
+            </a:schemeClr>
+          </a:lnRef>
+          <a:fillRef idx="1">
+            <a:schemeClr val="accent1"/>
+          </a:fillRef>
+          <a:effectRef idx="0">
+            <a:schemeClr val="accent1"/>
+          </a:effectRef>
+          <a:fontRef idx="minor">
+            <a:schemeClr val="lt1"/>
+          </a:fontRef>
+        </p:style>
+        <p:txBody>
+          <a:bodyPr rtlCol="0" anchor="t"/>
+          <a:lstStyle/>
+          <a:p>
+            <a:r>
+              <a:rPr lang="en-US" altLang="ja-JP" sz="1500" dirty="0" err="1">
+                <a:solidFill>
+                  <a:schemeClr val="tx1"/>
+                </a:solidFill>
+                <a:latin typeface="メイリオ" panose="020B0604030504040204" pitchFamily="50" charset="-128"/>
+                <a:ea typeface="メイリオ" panose="020B0604030504040204" pitchFamily="50" charset="-128"/>
+              </a:rPr>
+              <a:t>p</a:t>
+            </a:r>
+            <a:r>
+              <a:rPr kumimoji="1" lang="en-US" altLang="ja-JP" sz="1500" dirty="0" err="1">
+                <a:solidFill>
+                  <a:schemeClr val="tx1"/>
+                </a:solidFill>
+                <a:latin typeface="メイリオ" panose="020B0604030504040204" pitchFamily="50" charset="-128"/>
+                <a:ea typeface="メイリオ" panose="020B0604030504040204" pitchFamily="50" charset="-128"/>
+              </a:rPr>
+              <a:t>rint</a:t>
+            </a:r>
+            <a:r>
+              <a:rPr lang="en-US" altLang="ja-JP" sz="1500" dirty="0" err="1">
+                <a:solidFill>
+                  <a:schemeClr val="tx1"/>
+                </a:solidFill>
+                <a:latin typeface="メイリオ" panose="020B0604030504040204" pitchFamily="50" charset="-128"/>
+                <a:ea typeface="メイリオ" panose="020B0604030504040204" pitchFamily="50" charset="-128"/>
+              </a:rPr>
+              <a:t>.POSIXct</a:t>
+            </a:r>
+            <a:r>
+              <a:rPr lang="en-US" altLang="ja-JP" sz="1500" dirty="0">
+                <a:solidFill>
+                  <a:schemeClr val="tx1"/>
+                </a:solidFill>
+                <a:latin typeface="メイリオ" panose="020B0604030504040204" pitchFamily="50" charset="-128"/>
+                <a:ea typeface="メイリオ" panose="020B0604030504040204" pitchFamily="50" charset="-128"/>
+              </a:rPr>
+              <a:t>()</a:t>
+            </a:r>
+          </a:p>
+        </p:txBody>
+      </p:sp>
+      <p:cxnSp>
+        <p:nvCxnSpPr>
+          <p:cNvPr id="10" name="コネクタ: カギ線 9">
+            <a:extLst>
+              <a:ext uri="{FF2B5EF4-FFF2-40B4-BE49-F238E27FC236}">
+                <a16:creationId xmlns:a16="http://schemas.microsoft.com/office/drawing/2014/main" id="{C629AF9A-7568-17AF-A907-874899916B9A}"/>
+              </a:ext>
+            </a:extLst>
+          </p:cNvPr>
+          <p:cNvCxnSpPr>
+            <a:cxnSpLocks/>
+          </p:cNvCxnSpPr>
+          <p:nvPr/>
+        </p:nvCxnSpPr>
+        <p:spPr>
+          <a:xfrm flipV="1">
+            <a:off x="2261740" y="3020116"/>
+            <a:ext cx="3930830" cy="637202"/>
+          </a:xfrm>
+          <a:prstGeom prst="bentConnector3">
+            <a:avLst>
+              <a:gd name="adj1" fmla="val 8542"/>
+            </a:avLst>
+          </a:prstGeom>
+          <a:ln w="19050">
+            <a:solidFill>
+              <a:schemeClr val="accent4">
+                <a:lumMod val="75000"/>
+              </a:schemeClr>
+            </a:solidFill>
+            <a:tailEnd type="triangle"/>
+          </a:ln>
+        </p:spPr>
+        <p:style>
+          <a:lnRef idx="1">
+            <a:schemeClr val="accent1"/>
+          </a:lnRef>
+          <a:fillRef idx="0">
+            <a:schemeClr val="accent1"/>
+          </a:fillRef>
+          <a:effectRef idx="0">
+            <a:schemeClr val="accent1"/>
+          </a:effectRef>
+          <a:fontRef idx="minor">
+            <a:schemeClr val="tx1"/>
+          </a:fontRef>
+        </p:style>
+      </p:cxnSp>
+      <p:cxnSp>
+        <p:nvCxnSpPr>
+          <p:cNvPr id="21" name="コネクタ: カギ線 20">
+            <a:extLst>
+              <a:ext uri="{FF2B5EF4-FFF2-40B4-BE49-F238E27FC236}">
+                <a16:creationId xmlns:a16="http://schemas.microsoft.com/office/drawing/2014/main" id="{292FFA02-A682-DC20-DFD1-343E9D590E40}"/>
+              </a:ext>
+            </a:extLst>
+          </p:cNvPr>
+          <p:cNvCxnSpPr>
+            <a:cxnSpLocks/>
+          </p:cNvCxnSpPr>
+          <p:nvPr/>
+        </p:nvCxnSpPr>
+        <p:spPr>
+          <a:xfrm flipV="1">
+            <a:off x="2219595" y="3429000"/>
+            <a:ext cx="3972975" cy="228318"/>
+          </a:xfrm>
+          <a:prstGeom prst="bentConnector3">
+            <a:avLst>
+              <a:gd name="adj1" fmla="val 9666"/>
+            </a:avLst>
+          </a:prstGeom>
+          <a:ln w="19050">
+            <a:solidFill>
+              <a:schemeClr val="accent4">
+                <a:lumMod val="75000"/>
+              </a:schemeClr>
+            </a:solidFill>
+            <a:tailEnd type="triangle"/>
+          </a:ln>
+        </p:spPr>
+        <p:style>
+          <a:lnRef idx="1">
+            <a:schemeClr val="accent1"/>
+          </a:lnRef>
+          <a:fillRef idx="0">
+            <a:schemeClr val="accent1"/>
+          </a:fillRef>
+          <a:effectRef idx="0">
+            <a:schemeClr val="accent1"/>
+          </a:effectRef>
+          <a:fontRef idx="minor">
+            <a:schemeClr val="tx1"/>
+          </a:fontRef>
+        </p:style>
+      </p:cxnSp>
+      <p:cxnSp>
+        <p:nvCxnSpPr>
+          <p:cNvPr id="25" name="コネクタ: カギ線 24">
+            <a:extLst>
+              <a:ext uri="{FF2B5EF4-FFF2-40B4-BE49-F238E27FC236}">
+                <a16:creationId xmlns:a16="http://schemas.microsoft.com/office/drawing/2014/main" id="{F4627D21-2531-97C5-8CF1-E8F0F14F8FC4}"/>
+              </a:ext>
+            </a:extLst>
+          </p:cNvPr>
+          <p:cNvCxnSpPr>
+            <a:cxnSpLocks/>
+          </p:cNvCxnSpPr>
+          <p:nvPr/>
+        </p:nvCxnSpPr>
+        <p:spPr>
+          <a:xfrm>
+            <a:off x="2272892" y="3657317"/>
+            <a:ext cx="3955418" cy="225817"/>
+          </a:xfrm>
+          <a:prstGeom prst="bentConnector3">
+            <a:avLst>
+              <a:gd name="adj1" fmla="val 8342"/>
+            </a:avLst>
+          </a:prstGeom>
+          <a:ln w="19050">
+            <a:solidFill>
+              <a:schemeClr val="accent4">
+                <a:lumMod val="75000"/>
+              </a:schemeClr>
+            </a:solidFill>
+            <a:tailEnd type="triangle"/>
+          </a:ln>
+        </p:spPr>
+        <p:style>
+          <a:lnRef idx="1">
+            <a:schemeClr val="accent1"/>
+          </a:lnRef>
+          <a:fillRef idx="0">
+            <a:schemeClr val="accent1"/>
+          </a:fillRef>
+          <a:effectRef idx="0">
+            <a:schemeClr val="accent1"/>
+          </a:effectRef>
+          <a:fontRef idx="minor">
+            <a:schemeClr val="tx1"/>
+          </a:fontRef>
+        </p:style>
+      </p:cxnSp>
+      <p:sp>
+        <p:nvSpPr>
+          <p:cNvPr id="61" name="正方形/長方形 60">
+            <a:extLst>
+              <a:ext uri="{FF2B5EF4-FFF2-40B4-BE49-F238E27FC236}">
+                <a16:creationId xmlns:a16="http://schemas.microsoft.com/office/drawing/2014/main" id="{8A63EF12-1747-017D-A713-5090FFAD1F3A}"/>
+              </a:ext>
+            </a:extLst>
+          </p:cNvPr>
+          <p:cNvSpPr/>
+          <p:nvPr/>
+        </p:nvSpPr>
+        <p:spPr>
+          <a:xfrm>
+            <a:off x="2507811" y="4110249"/>
+            <a:ext cx="5893806" cy="466790"/>
+          </a:xfrm>
+          <a:prstGeom prst="rect">
+            <a:avLst/>
+          </a:prstGeom>
+          <a:solidFill>
+            <a:schemeClr val="accent2">
+              <a:lumMod val="40000"/>
+              <a:lumOff val="60000"/>
+            </a:schemeClr>
+          </a:solidFill>
+          <a:ln>
+            <a:noFill/>
+          </a:ln>
+        </p:spPr>
+        <p:style>
+          <a:lnRef idx="2">
+            <a:schemeClr val="accent1">
+              <a:shade val="15000"/>
+            </a:schemeClr>
+          </a:lnRef>
+          <a:fillRef idx="1">
+            <a:schemeClr val="accent1"/>
+          </a:fillRef>
+          <a:effectRef idx="0">
+            <a:schemeClr val="accent1"/>
+          </a:effectRef>
+          <a:fontRef idx="minor">
+            <a:schemeClr val="lt1"/>
+          </a:fontRef>
+        </p:style>
+        <p:txBody>
+          <a:bodyPr rtlCol="0" anchor="t"/>
+          <a:lstStyle/>
+          <a:p>
+            <a:endParaRPr lang="en-US" altLang="ja-JP" sz="1200" dirty="0">
+              <a:solidFill>
+                <a:schemeClr val="tx1"/>
+              </a:solidFill>
+            </a:endParaRPr>
+          </a:p>
+        </p:txBody>
+      </p:sp>
+      <p:cxnSp>
+        <p:nvCxnSpPr>
+          <p:cNvPr id="30" name="コネクタ: カギ線 29">
+            <a:extLst>
+              <a:ext uri="{FF2B5EF4-FFF2-40B4-BE49-F238E27FC236}">
+                <a16:creationId xmlns:a16="http://schemas.microsoft.com/office/drawing/2014/main" id="{97ED67F3-7696-12FF-59A6-4E39C20DEEF8}"/>
+              </a:ext>
+            </a:extLst>
+          </p:cNvPr>
+          <p:cNvCxnSpPr>
+            <a:cxnSpLocks/>
+          </p:cNvCxnSpPr>
+          <p:nvPr/>
+        </p:nvCxnSpPr>
+        <p:spPr>
+          <a:xfrm>
+            <a:off x="2217636" y="3657316"/>
+            <a:ext cx="3973526" cy="672850"/>
+          </a:xfrm>
+          <a:prstGeom prst="bentConnector3">
+            <a:avLst>
+              <a:gd name="adj1" fmla="val 9444"/>
+            </a:avLst>
+          </a:prstGeom>
+          <a:ln w="19050">
+            <a:solidFill>
+              <a:schemeClr val="bg2">
+                <a:lumMod val="10000"/>
+              </a:schemeClr>
+            </a:solidFill>
+            <a:tailEnd type="triangle"/>
+          </a:ln>
+        </p:spPr>
+        <p:style>
+          <a:lnRef idx="1">
+            <a:schemeClr val="accent1"/>
+          </a:lnRef>
+          <a:fillRef idx="0">
+            <a:schemeClr val="accent1"/>
+          </a:fillRef>
+          <a:effectRef idx="0">
+            <a:schemeClr val="accent1"/>
+          </a:effectRef>
+          <a:fontRef idx="minor">
+            <a:schemeClr val="tx1"/>
+          </a:fontRef>
+        </p:style>
+      </p:cxnSp>
+      <p:sp>
+        <p:nvSpPr>
+          <p:cNvPr id="33" name="正方形/長方形 32">
+            <a:extLst>
+              <a:ext uri="{FF2B5EF4-FFF2-40B4-BE49-F238E27FC236}">
+                <a16:creationId xmlns:a16="http://schemas.microsoft.com/office/drawing/2014/main" id="{8A9552AA-50D2-8D0D-54E9-940A849FF8D7}"/>
+              </a:ext>
+            </a:extLst>
+          </p:cNvPr>
+          <p:cNvSpPr/>
+          <p:nvPr/>
+        </p:nvSpPr>
+        <p:spPr>
+          <a:xfrm>
+            <a:off x="6283566" y="3691816"/>
+            <a:ext cx="1907007" cy="324203"/>
+          </a:xfrm>
+          <a:prstGeom prst="rect">
+            <a:avLst/>
+          </a:prstGeom>
+          <a:solidFill>
+            <a:srgbClr val="FFFFFF"/>
+          </a:solidFill>
+          <a:ln>
+            <a:solidFill>
+              <a:schemeClr val="bg2">
+                <a:lumMod val="90000"/>
+              </a:schemeClr>
+            </a:solidFill>
+          </a:ln>
+        </p:spPr>
+        <p:style>
+          <a:lnRef idx="2">
+            <a:schemeClr val="accent1">
+              <a:shade val="15000"/>
+            </a:schemeClr>
+          </a:lnRef>
+          <a:fillRef idx="1">
+            <a:schemeClr val="accent1"/>
+          </a:fillRef>
+          <a:effectRef idx="0">
+            <a:schemeClr val="accent1"/>
+          </a:effectRef>
+          <a:fontRef idx="minor">
+            <a:schemeClr val="lt1"/>
+          </a:fontRef>
+        </p:style>
+        <p:txBody>
+          <a:bodyPr rtlCol="0" anchor="t"/>
+          <a:lstStyle/>
+          <a:p>
+            <a:r>
+              <a:rPr lang="en-US" altLang="ja-JP" sz="1500" dirty="0" err="1">
+                <a:solidFill>
+                  <a:schemeClr val="tx1"/>
+                </a:solidFill>
+                <a:latin typeface="メイリオ" panose="020B0604030504040204" pitchFamily="50" charset="-128"/>
+                <a:ea typeface="メイリオ" panose="020B0604030504040204" pitchFamily="50" charset="-128"/>
+              </a:rPr>
+              <a:t>p</a:t>
+            </a:r>
+            <a:r>
+              <a:rPr kumimoji="1" lang="en-US" altLang="ja-JP" sz="1500" dirty="0" err="1">
+                <a:solidFill>
+                  <a:schemeClr val="tx1"/>
+                </a:solidFill>
+                <a:latin typeface="メイリオ" panose="020B0604030504040204" pitchFamily="50" charset="-128"/>
+                <a:ea typeface="メイリオ" panose="020B0604030504040204" pitchFamily="50" charset="-128"/>
+              </a:rPr>
+              <a:t>rint</a:t>
+            </a:r>
+            <a:r>
+              <a:rPr lang="en-US" altLang="ja-JP" sz="1500" dirty="0" err="1">
+                <a:solidFill>
+                  <a:schemeClr val="tx1"/>
+                </a:solidFill>
+                <a:latin typeface="メイリオ" panose="020B0604030504040204" pitchFamily="50" charset="-128"/>
+                <a:ea typeface="メイリオ" panose="020B0604030504040204" pitchFamily="50" charset="-128"/>
+              </a:rPr>
+              <a:t>.data.frame</a:t>
+            </a:r>
+            <a:r>
+              <a:rPr lang="en-US" altLang="ja-JP" sz="1500" dirty="0">
+                <a:solidFill>
+                  <a:schemeClr val="tx1"/>
+                </a:solidFill>
+                <a:latin typeface="メイリオ" panose="020B0604030504040204" pitchFamily="50" charset="-128"/>
+                <a:ea typeface="メイリオ" panose="020B0604030504040204" pitchFamily="50" charset="-128"/>
+              </a:rPr>
+              <a:t>()</a:t>
+            </a:r>
+          </a:p>
+        </p:txBody>
+      </p:sp>
+      <p:sp>
+        <p:nvSpPr>
+          <p:cNvPr id="40" name="正方形/長方形 39">
+            <a:extLst>
+              <a:ext uri="{FF2B5EF4-FFF2-40B4-BE49-F238E27FC236}">
+                <a16:creationId xmlns:a16="http://schemas.microsoft.com/office/drawing/2014/main" id="{82106DCC-67E8-0DFB-368A-932231B04A3D}"/>
+              </a:ext>
+            </a:extLst>
+          </p:cNvPr>
+          <p:cNvSpPr/>
+          <p:nvPr/>
+        </p:nvSpPr>
+        <p:spPr>
+          <a:xfrm>
+            <a:off x="6283565" y="4191086"/>
+            <a:ext cx="1907007" cy="324203"/>
+          </a:xfrm>
+          <a:prstGeom prst="rect">
+            <a:avLst/>
+          </a:prstGeom>
+          <a:solidFill>
+            <a:srgbClr val="FFFFFF"/>
+          </a:solidFill>
+          <a:ln>
+            <a:solidFill>
+              <a:schemeClr val="bg2">
+                <a:lumMod val="90000"/>
+              </a:schemeClr>
+            </a:solidFill>
+          </a:ln>
+        </p:spPr>
+        <p:style>
+          <a:lnRef idx="2">
+            <a:schemeClr val="accent1">
+              <a:shade val="15000"/>
+            </a:schemeClr>
+          </a:lnRef>
+          <a:fillRef idx="1">
+            <a:schemeClr val="accent1"/>
+          </a:fillRef>
+          <a:effectRef idx="0">
+            <a:schemeClr val="accent1"/>
+          </a:effectRef>
+          <a:fontRef idx="minor">
+            <a:schemeClr val="lt1"/>
+          </a:fontRef>
+        </p:style>
+        <p:txBody>
+          <a:bodyPr rtlCol="0" anchor="t"/>
+          <a:lstStyle/>
+          <a:p>
+            <a:r>
+              <a:rPr lang="en-US" altLang="ja-JP" sz="1500" dirty="0" err="1">
+                <a:solidFill>
+                  <a:schemeClr val="tx1"/>
+                </a:solidFill>
+                <a:latin typeface="メイリオ" panose="020B0604030504040204" pitchFamily="50" charset="-128"/>
+                <a:ea typeface="メイリオ" panose="020B0604030504040204" pitchFamily="50" charset="-128"/>
+              </a:rPr>
+              <a:t>p</a:t>
+            </a:r>
+            <a:r>
+              <a:rPr kumimoji="1" lang="en-US" altLang="ja-JP" sz="1500" dirty="0" err="1">
+                <a:solidFill>
+                  <a:schemeClr val="tx1"/>
+                </a:solidFill>
+                <a:latin typeface="メイリオ" panose="020B0604030504040204" pitchFamily="50" charset="-128"/>
+                <a:ea typeface="メイリオ" panose="020B0604030504040204" pitchFamily="50" charset="-128"/>
+              </a:rPr>
+              <a:t>rint</a:t>
+            </a:r>
+            <a:r>
+              <a:rPr lang="en-US" altLang="ja-JP" sz="1500" dirty="0" err="1">
+                <a:solidFill>
+                  <a:schemeClr val="tx1"/>
+                </a:solidFill>
+                <a:latin typeface="メイリオ" panose="020B0604030504040204" pitchFamily="50" charset="-128"/>
+                <a:ea typeface="メイリオ" panose="020B0604030504040204" pitchFamily="50" charset="-128"/>
+              </a:rPr>
+              <a:t>.slots</a:t>
+            </a:r>
+            <a:r>
+              <a:rPr lang="en-US" altLang="ja-JP" sz="1500" dirty="0">
+                <a:solidFill>
+                  <a:schemeClr val="tx1"/>
+                </a:solidFill>
+                <a:latin typeface="メイリオ" panose="020B0604030504040204" pitchFamily="50" charset="-128"/>
+                <a:ea typeface="メイリオ" panose="020B0604030504040204" pitchFamily="50" charset="-128"/>
+              </a:rPr>
+              <a:t>()</a:t>
+            </a:r>
+          </a:p>
+        </p:txBody>
+      </p:sp>
+      <p:sp>
+        <p:nvSpPr>
+          <p:cNvPr id="48" name="四角形: 1 つの角を切り取る 47">
+            <a:extLst>
+              <a:ext uri="{FF2B5EF4-FFF2-40B4-BE49-F238E27FC236}">
+                <a16:creationId xmlns:a16="http://schemas.microsoft.com/office/drawing/2014/main" id="{38278498-D5CD-B3A9-8754-2DD256E03A54}"/>
+              </a:ext>
+            </a:extLst>
+          </p:cNvPr>
+          <p:cNvSpPr/>
+          <p:nvPr/>
+        </p:nvSpPr>
+        <p:spPr>
+          <a:xfrm>
+            <a:off x="2730285" y="2937442"/>
+            <a:ext cx="2710848" cy="249851"/>
+          </a:xfrm>
+          <a:prstGeom prst="snip1Rect">
+            <a:avLst>
+              <a:gd name="adj" fmla="val 50000"/>
+            </a:avLst>
+          </a:prstGeom>
+          <a:solidFill>
+            <a:srgbClr val="FFFFFF"/>
+          </a:solidFill>
+          <a:ln>
+            <a:solidFill>
+              <a:schemeClr val="bg2">
+                <a:lumMod val="90000"/>
+              </a:schemeClr>
+            </a:solidFill>
+          </a:ln>
+        </p:spPr>
+        <p:style>
+          <a:lnRef idx="2">
+            <a:schemeClr val="accent1">
+              <a:shade val="15000"/>
+            </a:schemeClr>
+          </a:lnRef>
+          <a:fillRef idx="1">
+            <a:schemeClr val="accent1"/>
+          </a:fillRef>
+          <a:effectRef idx="0">
+            <a:schemeClr val="accent1"/>
+          </a:effectRef>
+          <a:fontRef idx="minor">
+            <a:schemeClr val="lt1"/>
+          </a:fontRef>
+        </p:style>
+        <p:txBody>
+          <a:bodyPr rtlCol="0" anchor="ctr"/>
+          <a:lstStyle/>
+          <a:p>
+            <a:pPr algn="ctr"/>
+            <a:r>
+              <a:rPr lang="ja-JP" altLang="en-US" sz="1300" dirty="0">
+                <a:solidFill>
+                  <a:schemeClr val="tx1"/>
+                </a:solidFill>
+                <a:latin typeface="メイリオ" panose="020B0604030504040204" pitchFamily="50" charset="-128"/>
+                <a:ea typeface="メイリオ" panose="020B0604030504040204" pitchFamily="50" charset="-128"/>
+              </a:rPr>
+              <a:t>引数の</a:t>
+            </a:r>
+            <a:r>
+              <a:rPr lang="en-US" altLang="ja-JP" sz="1300" dirty="0">
+                <a:solidFill>
+                  <a:schemeClr val="tx1"/>
+                </a:solidFill>
+                <a:latin typeface="メイリオ" panose="020B0604030504040204" pitchFamily="50" charset="-128"/>
+                <a:ea typeface="メイリオ" panose="020B0604030504040204" pitchFamily="50" charset="-128"/>
+              </a:rPr>
+              <a:t>class</a:t>
+            </a:r>
+            <a:r>
+              <a:rPr lang="ja-JP" altLang="en-US" sz="1300" dirty="0">
+                <a:solidFill>
+                  <a:schemeClr val="tx1"/>
+                </a:solidFill>
+                <a:latin typeface="メイリオ" panose="020B0604030504040204" pitchFamily="50" charset="-128"/>
+                <a:ea typeface="メイリオ" panose="020B0604030504040204" pitchFamily="50" charset="-128"/>
+              </a:rPr>
+              <a:t>が</a:t>
+            </a:r>
+            <a:r>
+              <a:rPr lang="en-US" altLang="ja-JP" sz="1300" dirty="0" err="1">
+                <a:solidFill>
+                  <a:schemeClr val="tx1"/>
+                </a:solidFill>
+                <a:latin typeface="メイリオ" panose="020B0604030504040204" pitchFamily="50" charset="-128"/>
+                <a:ea typeface="メイリオ" panose="020B0604030504040204" pitchFamily="50" charset="-128"/>
+              </a:rPr>
+              <a:t>numetric</a:t>
+            </a:r>
+            <a:r>
+              <a:rPr lang="ja-JP" altLang="en-US" sz="1300" dirty="0">
+                <a:solidFill>
+                  <a:schemeClr val="tx1"/>
+                </a:solidFill>
+                <a:latin typeface="メイリオ" panose="020B0604030504040204" pitchFamily="50" charset="-128"/>
+                <a:ea typeface="メイリオ" panose="020B0604030504040204" pitchFamily="50" charset="-128"/>
+              </a:rPr>
+              <a:t>のとき</a:t>
+            </a:r>
+            <a:endParaRPr lang="en-US" altLang="ja-JP" sz="1300" dirty="0">
+              <a:solidFill>
+                <a:schemeClr val="tx1"/>
+              </a:solidFill>
+              <a:latin typeface="メイリオ" panose="020B0604030504040204" pitchFamily="50" charset="-128"/>
+              <a:ea typeface="メイリオ" panose="020B0604030504040204" pitchFamily="50" charset="-128"/>
+            </a:endParaRPr>
+          </a:p>
+        </p:txBody>
+      </p:sp>
+      <p:sp>
+        <p:nvSpPr>
+          <p:cNvPr id="57" name="四角形: 1 つの角を切り取る 56">
+            <a:extLst>
+              <a:ext uri="{FF2B5EF4-FFF2-40B4-BE49-F238E27FC236}">
+                <a16:creationId xmlns:a16="http://schemas.microsoft.com/office/drawing/2014/main" id="{14E66688-89D9-CE74-DC35-FE5CF75F44B2}"/>
+              </a:ext>
+            </a:extLst>
+          </p:cNvPr>
+          <p:cNvSpPr/>
+          <p:nvPr/>
+        </p:nvSpPr>
+        <p:spPr>
+          <a:xfrm>
+            <a:off x="2730283" y="3360350"/>
+            <a:ext cx="2710850" cy="249851"/>
+          </a:xfrm>
+          <a:prstGeom prst="snip1Rect">
+            <a:avLst>
+              <a:gd name="adj" fmla="val 50000"/>
+            </a:avLst>
+          </a:prstGeom>
+          <a:solidFill>
+            <a:srgbClr val="FFFFFF"/>
+          </a:solidFill>
+          <a:ln>
+            <a:solidFill>
+              <a:schemeClr val="bg2">
+                <a:lumMod val="90000"/>
+              </a:schemeClr>
+            </a:solidFill>
+          </a:ln>
+        </p:spPr>
+        <p:style>
+          <a:lnRef idx="2">
+            <a:schemeClr val="accent1">
+              <a:shade val="15000"/>
+            </a:schemeClr>
+          </a:lnRef>
+          <a:fillRef idx="1">
+            <a:schemeClr val="accent1"/>
+          </a:fillRef>
+          <a:effectRef idx="0">
+            <a:schemeClr val="accent1"/>
+          </a:effectRef>
+          <a:fontRef idx="minor">
+            <a:schemeClr val="lt1"/>
+          </a:fontRef>
+        </p:style>
+        <p:txBody>
+          <a:bodyPr rtlCol="0" anchor="ctr"/>
+          <a:lstStyle/>
+          <a:p>
+            <a:pPr algn="ctr"/>
+            <a:r>
+              <a:rPr lang="ja-JP" altLang="en-US" sz="1300" dirty="0">
+                <a:solidFill>
+                  <a:schemeClr val="tx1"/>
+                </a:solidFill>
+                <a:latin typeface="メイリオ" panose="020B0604030504040204" pitchFamily="50" charset="-128"/>
+                <a:ea typeface="メイリオ" panose="020B0604030504040204" pitchFamily="50" charset="-128"/>
+              </a:rPr>
+              <a:t>引数の</a:t>
+            </a:r>
+            <a:r>
+              <a:rPr lang="en-US" altLang="ja-JP" sz="1300" dirty="0">
+                <a:solidFill>
+                  <a:schemeClr val="tx1"/>
+                </a:solidFill>
+                <a:latin typeface="メイリオ" panose="020B0604030504040204" pitchFamily="50" charset="-128"/>
+                <a:ea typeface="メイリオ" panose="020B0604030504040204" pitchFamily="50" charset="-128"/>
+              </a:rPr>
+              <a:t>class</a:t>
+            </a:r>
+            <a:r>
+              <a:rPr lang="ja-JP" altLang="en-US" sz="1300" dirty="0">
+                <a:solidFill>
+                  <a:schemeClr val="tx1"/>
+                </a:solidFill>
+                <a:latin typeface="メイリオ" panose="020B0604030504040204" pitchFamily="50" charset="-128"/>
+                <a:ea typeface="メイリオ" panose="020B0604030504040204" pitchFamily="50" charset="-128"/>
+              </a:rPr>
+              <a:t>が</a:t>
+            </a:r>
+            <a:r>
+              <a:rPr lang="en-US" altLang="ja-JP" sz="1300" dirty="0" err="1">
+                <a:solidFill>
+                  <a:schemeClr val="tx1"/>
+                </a:solidFill>
+                <a:latin typeface="メイリオ" panose="020B0604030504040204" pitchFamily="50" charset="-128"/>
+                <a:ea typeface="メイリオ" panose="020B0604030504040204" pitchFamily="50" charset="-128"/>
+              </a:rPr>
+              <a:t>POSIXct</a:t>
+            </a:r>
+            <a:r>
+              <a:rPr lang="ja-JP" altLang="en-US" sz="1300" dirty="0">
+                <a:solidFill>
+                  <a:schemeClr val="tx1"/>
+                </a:solidFill>
+                <a:latin typeface="メイリオ" panose="020B0604030504040204" pitchFamily="50" charset="-128"/>
+                <a:ea typeface="メイリオ" panose="020B0604030504040204" pitchFamily="50" charset="-128"/>
+              </a:rPr>
+              <a:t>のとき</a:t>
+            </a:r>
+            <a:endParaRPr lang="en-US" altLang="ja-JP" sz="1300" dirty="0">
+              <a:solidFill>
+                <a:schemeClr val="tx1"/>
+              </a:solidFill>
+              <a:latin typeface="メイリオ" panose="020B0604030504040204" pitchFamily="50" charset="-128"/>
+              <a:ea typeface="メイリオ" panose="020B0604030504040204" pitchFamily="50" charset="-128"/>
+            </a:endParaRPr>
+          </a:p>
+        </p:txBody>
+      </p:sp>
+      <p:sp>
+        <p:nvSpPr>
+          <p:cNvPr id="58" name="四角形: 1 つの角を切り取る 57">
+            <a:extLst>
+              <a:ext uri="{FF2B5EF4-FFF2-40B4-BE49-F238E27FC236}">
+                <a16:creationId xmlns:a16="http://schemas.microsoft.com/office/drawing/2014/main" id="{749C9DD8-F706-1D94-F3B5-11E3108A4EC3}"/>
+              </a:ext>
+            </a:extLst>
+          </p:cNvPr>
+          <p:cNvSpPr/>
+          <p:nvPr/>
+        </p:nvSpPr>
+        <p:spPr>
+          <a:xfrm>
+            <a:off x="2730283" y="3751547"/>
+            <a:ext cx="2710850" cy="249851"/>
+          </a:xfrm>
+          <a:prstGeom prst="snip1Rect">
+            <a:avLst>
+              <a:gd name="adj" fmla="val 50000"/>
+            </a:avLst>
+          </a:prstGeom>
+          <a:solidFill>
+            <a:srgbClr val="FFFFFF"/>
+          </a:solidFill>
+          <a:ln>
+            <a:solidFill>
+              <a:schemeClr val="bg2">
+                <a:lumMod val="90000"/>
+              </a:schemeClr>
+            </a:solidFill>
+          </a:ln>
+        </p:spPr>
+        <p:style>
+          <a:lnRef idx="2">
+            <a:schemeClr val="accent1">
+              <a:shade val="15000"/>
+            </a:schemeClr>
+          </a:lnRef>
+          <a:fillRef idx="1">
+            <a:schemeClr val="accent1"/>
+          </a:fillRef>
+          <a:effectRef idx="0">
+            <a:schemeClr val="accent1"/>
+          </a:effectRef>
+          <a:fontRef idx="minor">
+            <a:schemeClr val="lt1"/>
+          </a:fontRef>
+        </p:style>
+        <p:txBody>
+          <a:bodyPr rtlCol="0" anchor="ctr"/>
+          <a:lstStyle/>
+          <a:p>
+            <a:pPr algn="ctr"/>
+            <a:r>
+              <a:rPr lang="ja-JP" altLang="en-US" sz="1300" dirty="0">
+                <a:solidFill>
+                  <a:schemeClr val="tx1"/>
+                </a:solidFill>
+                <a:latin typeface="メイリオ" panose="020B0604030504040204" pitchFamily="50" charset="-128"/>
+                <a:ea typeface="メイリオ" panose="020B0604030504040204" pitchFamily="50" charset="-128"/>
+              </a:rPr>
+              <a:t>引数の</a:t>
+            </a:r>
+            <a:r>
+              <a:rPr lang="en-US" altLang="ja-JP" sz="1300" dirty="0">
+                <a:solidFill>
+                  <a:schemeClr val="tx1"/>
+                </a:solidFill>
+                <a:latin typeface="メイリオ" panose="020B0604030504040204" pitchFamily="50" charset="-128"/>
+                <a:ea typeface="メイリオ" panose="020B0604030504040204" pitchFamily="50" charset="-128"/>
+              </a:rPr>
+              <a:t>class</a:t>
+            </a:r>
+            <a:r>
+              <a:rPr lang="ja-JP" altLang="en-US" sz="1300" dirty="0">
+                <a:solidFill>
+                  <a:schemeClr val="tx1"/>
+                </a:solidFill>
+                <a:latin typeface="メイリオ" panose="020B0604030504040204" pitchFamily="50" charset="-128"/>
+                <a:ea typeface="メイリオ" panose="020B0604030504040204" pitchFamily="50" charset="-128"/>
+              </a:rPr>
+              <a:t>が</a:t>
+            </a:r>
+            <a:r>
+              <a:rPr lang="en-US" altLang="ja-JP" sz="1300" dirty="0" err="1">
+                <a:solidFill>
+                  <a:schemeClr val="tx1"/>
+                </a:solidFill>
+                <a:latin typeface="メイリオ" panose="020B0604030504040204" pitchFamily="50" charset="-128"/>
+                <a:ea typeface="メイリオ" panose="020B0604030504040204" pitchFamily="50" charset="-128"/>
+              </a:rPr>
+              <a:t>data.frame</a:t>
+            </a:r>
+            <a:r>
+              <a:rPr lang="ja-JP" altLang="en-US" sz="1300" dirty="0">
+                <a:solidFill>
+                  <a:schemeClr val="tx1"/>
+                </a:solidFill>
+                <a:latin typeface="メイリオ" panose="020B0604030504040204" pitchFamily="50" charset="-128"/>
+                <a:ea typeface="メイリオ" panose="020B0604030504040204" pitchFamily="50" charset="-128"/>
+              </a:rPr>
+              <a:t>のとき</a:t>
+            </a:r>
+            <a:endParaRPr lang="en-US" altLang="ja-JP" sz="1300" dirty="0">
+              <a:solidFill>
+                <a:schemeClr val="tx1"/>
+              </a:solidFill>
+              <a:latin typeface="メイリオ" panose="020B0604030504040204" pitchFamily="50" charset="-128"/>
+              <a:ea typeface="メイリオ" panose="020B0604030504040204" pitchFamily="50" charset="-128"/>
+            </a:endParaRPr>
+          </a:p>
+        </p:txBody>
+      </p:sp>
+      <p:sp>
+        <p:nvSpPr>
+          <p:cNvPr id="59" name="四角形: 1 つの角を切り取る 58">
+            <a:extLst>
+              <a:ext uri="{FF2B5EF4-FFF2-40B4-BE49-F238E27FC236}">
+                <a16:creationId xmlns:a16="http://schemas.microsoft.com/office/drawing/2014/main" id="{832DE27B-47C1-FFB8-D747-900CF9B01E34}"/>
+              </a:ext>
+            </a:extLst>
+          </p:cNvPr>
+          <p:cNvSpPr/>
+          <p:nvPr/>
+        </p:nvSpPr>
+        <p:spPr>
+          <a:xfrm>
+            <a:off x="2730283" y="4191086"/>
+            <a:ext cx="2710850" cy="249851"/>
+          </a:xfrm>
+          <a:prstGeom prst="snip1Rect">
+            <a:avLst>
+              <a:gd name="adj" fmla="val 50000"/>
+            </a:avLst>
+          </a:prstGeom>
+          <a:solidFill>
+            <a:srgbClr val="FFFFFF"/>
+          </a:solidFill>
+          <a:ln>
+            <a:solidFill>
+              <a:schemeClr val="bg2">
+                <a:lumMod val="90000"/>
+              </a:schemeClr>
+            </a:solidFill>
+          </a:ln>
+        </p:spPr>
+        <p:style>
+          <a:lnRef idx="2">
+            <a:schemeClr val="accent1">
+              <a:shade val="15000"/>
+            </a:schemeClr>
+          </a:lnRef>
+          <a:fillRef idx="1">
+            <a:schemeClr val="accent1"/>
+          </a:fillRef>
+          <a:effectRef idx="0">
+            <a:schemeClr val="accent1"/>
+          </a:effectRef>
+          <a:fontRef idx="minor">
+            <a:schemeClr val="lt1"/>
+          </a:fontRef>
+        </p:style>
+        <p:txBody>
+          <a:bodyPr rtlCol="0" anchor="ctr"/>
+          <a:lstStyle/>
+          <a:p>
+            <a:pPr algn="ctr"/>
+            <a:r>
+              <a:rPr lang="ja-JP" altLang="en-US" sz="1300" dirty="0">
+                <a:solidFill>
+                  <a:schemeClr val="tx1"/>
+                </a:solidFill>
+                <a:latin typeface="メイリオ" panose="020B0604030504040204" pitchFamily="50" charset="-128"/>
+                <a:ea typeface="メイリオ" panose="020B0604030504040204" pitchFamily="50" charset="-128"/>
+              </a:rPr>
+              <a:t>引数の</a:t>
+            </a:r>
+            <a:r>
+              <a:rPr lang="en-US" altLang="ja-JP" sz="1300" dirty="0">
+                <a:solidFill>
+                  <a:schemeClr val="tx1"/>
+                </a:solidFill>
+                <a:latin typeface="メイリオ" panose="020B0604030504040204" pitchFamily="50" charset="-128"/>
+                <a:ea typeface="メイリオ" panose="020B0604030504040204" pitchFamily="50" charset="-128"/>
+              </a:rPr>
+              <a:t>class</a:t>
+            </a:r>
+            <a:r>
+              <a:rPr lang="ja-JP" altLang="en-US" sz="1300" dirty="0">
+                <a:solidFill>
+                  <a:schemeClr val="tx1"/>
+                </a:solidFill>
+                <a:latin typeface="メイリオ" panose="020B0604030504040204" pitchFamily="50" charset="-128"/>
+                <a:ea typeface="メイリオ" panose="020B0604030504040204" pitchFamily="50" charset="-128"/>
+              </a:rPr>
+              <a:t>が</a:t>
+            </a:r>
+            <a:r>
+              <a:rPr lang="en-US" altLang="ja-JP" sz="1300" dirty="0">
+                <a:solidFill>
+                  <a:schemeClr val="tx1"/>
+                </a:solidFill>
+                <a:latin typeface="メイリオ" panose="020B0604030504040204" pitchFamily="50" charset="-128"/>
+                <a:ea typeface="メイリオ" panose="020B0604030504040204" pitchFamily="50" charset="-128"/>
+              </a:rPr>
+              <a:t>slots</a:t>
+            </a:r>
+            <a:r>
+              <a:rPr lang="ja-JP" altLang="en-US" sz="1300" dirty="0">
+                <a:solidFill>
+                  <a:schemeClr val="tx1"/>
+                </a:solidFill>
+                <a:latin typeface="メイリオ" panose="020B0604030504040204" pitchFamily="50" charset="-128"/>
+                <a:ea typeface="メイリオ" panose="020B0604030504040204" pitchFamily="50" charset="-128"/>
+              </a:rPr>
+              <a:t>のとき</a:t>
+            </a:r>
+            <a:endParaRPr lang="en-US" altLang="ja-JP" sz="1300" dirty="0">
+              <a:solidFill>
+                <a:schemeClr val="tx1"/>
+              </a:solidFill>
+              <a:latin typeface="メイリオ" panose="020B0604030504040204" pitchFamily="50" charset="-128"/>
+              <a:ea typeface="メイリオ" panose="020B0604030504040204" pitchFamily="50" charset="-128"/>
+            </a:endParaRPr>
+          </a:p>
+        </p:txBody>
+      </p:sp>
     </p:spTree>
     <p:extLst>
       <p:ext uri="{BB962C8B-B14F-4D97-AF65-F5344CB8AC3E}">
@@ -28922,7 +32160,7 @@
         </p:nvSpPr>
         <p:spPr>
           <a:xfrm>
-            <a:off x="658169" y="1098587"/>
+            <a:off x="698353" y="1019123"/>
             <a:ext cx="10540261" cy="5528957"/>
           </a:xfrm>
           <a:prstGeom prst="rect">
@@ -28976,8 +32214,8 @@
         </p:nvSpPr>
         <p:spPr>
           <a:xfrm>
-            <a:off x="8561647" y="1263081"/>
-            <a:ext cx="2391170" cy="1183629"/>
+            <a:off x="7475472" y="1878117"/>
+            <a:ext cx="3353937" cy="1012286"/>
           </a:xfrm>
           <a:prstGeom prst="rect">
             <a:avLst/>
@@ -29012,7 +32250,179 @@
           <a:bodyPr rtlCol="0" anchor="t"/>
           <a:lstStyle/>
           <a:p>
-            <a:endParaRPr lang="en-US" altLang="ja-JP" sz="1000" dirty="0">
+            <a:r>
+              <a:rPr lang="en-US" altLang="ja-JP" sz="1200" dirty="0">
+                <a:solidFill>
+                  <a:schemeClr val="tx1"/>
+                </a:solidFill>
+              </a:rPr>
+              <a:t>play()</a:t>
+            </a:r>
+            <a:r>
+              <a:rPr lang="ja-JP" altLang="en-US" sz="1200" dirty="0">
+                <a:solidFill>
+                  <a:schemeClr val="tx1"/>
+                </a:solidFill>
+              </a:rPr>
+              <a:t>の返り値 </a:t>
+            </a:r>
+            <a:r>
+              <a:rPr lang="en-US" altLang="ja-JP" sz="1200" dirty="0">
+                <a:solidFill>
+                  <a:schemeClr val="tx1"/>
+                </a:solidFill>
+              </a:rPr>
+              <a:t>prize</a:t>
+            </a:r>
+          </a:p>
+          <a:p>
+            <a:endParaRPr lang="en-US" altLang="ja-JP" sz="1200" dirty="0">
+              <a:solidFill>
+                <a:schemeClr val="tx1"/>
+              </a:solidFill>
+            </a:endParaRPr>
+          </a:p>
+          <a:p>
+            <a:r>
+              <a:rPr lang="ja-JP" altLang="en-US" sz="1200" dirty="0">
+                <a:solidFill>
+                  <a:schemeClr val="tx1"/>
+                </a:solidFill>
+              </a:rPr>
+              <a:t>元々：数値０のみ</a:t>
+            </a:r>
+            <a:endParaRPr lang="en-US" altLang="ja-JP" sz="1200" dirty="0">
+              <a:solidFill>
+                <a:schemeClr val="tx1"/>
+              </a:solidFill>
+            </a:endParaRPr>
+          </a:p>
+          <a:p>
+            <a:endParaRPr lang="en-US" altLang="ja-JP" sz="1200" dirty="0">
+              <a:solidFill>
+                <a:schemeClr val="tx1"/>
+              </a:solidFill>
+            </a:endParaRPr>
+          </a:p>
+          <a:p>
+            <a:r>
+              <a:rPr lang="ja-JP" altLang="en-US" sz="1200" dirty="0">
+                <a:solidFill>
+                  <a:schemeClr val="tx1"/>
+                </a:solidFill>
+              </a:rPr>
+              <a:t>変更後：数値</a:t>
+            </a:r>
+            <a:r>
+              <a:rPr lang="en-US" altLang="ja-JP" sz="1200" dirty="0">
+                <a:solidFill>
+                  <a:schemeClr val="tx1"/>
+                </a:solidFill>
+              </a:rPr>
+              <a:t>0</a:t>
+            </a:r>
+            <a:r>
+              <a:rPr lang="ja-JP" altLang="en-US" sz="1200" dirty="0">
+                <a:solidFill>
+                  <a:schemeClr val="tx1"/>
+                </a:solidFill>
+              </a:rPr>
+              <a:t> </a:t>
+            </a:r>
+            <a:r>
+              <a:rPr lang="en-US" altLang="ja-JP" sz="1200" dirty="0">
+                <a:solidFill>
+                  <a:schemeClr val="tx1"/>
+                </a:solidFill>
+              </a:rPr>
+              <a:t>+</a:t>
+            </a:r>
+            <a:r>
+              <a:rPr lang="ja-JP" altLang="en-US" sz="1200" dirty="0">
+                <a:solidFill>
+                  <a:schemeClr val="tx1"/>
+                </a:solidFill>
+              </a:rPr>
+              <a:t> 属性 </a:t>
+            </a:r>
+            <a:r>
+              <a:rPr lang="en-US" altLang="ja-JP" sz="1200" dirty="0">
+                <a:solidFill>
+                  <a:schemeClr val="tx1"/>
+                </a:solidFill>
+              </a:rPr>
+              <a:t>symbols(“</a:t>
+            </a:r>
+            <a:r>
+              <a:rPr lang="ja-JP" altLang="en-US" sz="1200" dirty="0">
+                <a:solidFill>
+                  <a:schemeClr val="tx1"/>
+                </a:solidFill>
+              </a:rPr>
+              <a:t>０</a:t>
+            </a:r>
+            <a:r>
+              <a:rPr lang="en-US" altLang="ja-JP" sz="1200" dirty="0">
+                <a:solidFill>
+                  <a:schemeClr val="tx1"/>
+                </a:solidFill>
+              </a:rPr>
+              <a:t>”, ”7”, “0”)</a:t>
+            </a:r>
+          </a:p>
+        </p:txBody>
+      </p:sp>
+      <p:sp>
+        <p:nvSpPr>
+          <p:cNvPr id="29" name="正方形/長方形 28">
+            <a:extLst>
+              <a:ext uri="{FF2B5EF4-FFF2-40B4-BE49-F238E27FC236}">
+                <a16:creationId xmlns:a16="http://schemas.microsoft.com/office/drawing/2014/main" id="{8E431E00-8AE2-6915-AB24-8C9D81B6E91E}"/>
+              </a:ext>
+            </a:extLst>
+          </p:cNvPr>
+          <p:cNvSpPr/>
+          <p:nvPr/>
+        </p:nvSpPr>
+        <p:spPr>
+          <a:xfrm>
+            <a:off x="4814665" y="1787719"/>
+            <a:ext cx="2578465" cy="1895097"/>
+          </a:xfrm>
+          <a:prstGeom prst="rect">
+            <a:avLst/>
+          </a:prstGeom>
+          <a:solidFill>
+            <a:schemeClr val="accent4">
+              <a:lumMod val="40000"/>
+              <a:lumOff val="60000"/>
+            </a:schemeClr>
+          </a:solidFill>
+          <a:ln>
+            <a:noFill/>
+          </a:ln>
+        </p:spPr>
+        <p:style>
+          <a:lnRef idx="2">
+            <a:schemeClr val="accent1">
+              <a:shade val="15000"/>
+            </a:schemeClr>
+          </a:lnRef>
+          <a:fillRef idx="1">
+            <a:schemeClr val="accent1"/>
+          </a:fillRef>
+          <a:effectRef idx="0">
+            <a:schemeClr val="accent1"/>
+          </a:effectRef>
+          <a:fontRef idx="minor">
+            <a:schemeClr val="lt1"/>
+          </a:fontRef>
+        </p:style>
+        <p:txBody>
+          <a:bodyPr rtlCol="0" anchor="t"/>
+          <a:lstStyle/>
+          <a:p>
+            <a:endParaRPr lang="en-US" altLang="ja-JP" sz="1200" dirty="0">
               <a:solidFill>
                 <a:schemeClr val="tx1"/>
               </a:solidFill>
@@ -29073,6 +32483,18 @@
               </a:rPr>
               <a:t>#</a:t>
             </a:r>
+            <a:r>
+              <a:rPr lang="ja-JP" altLang="en-US" sz="2000" dirty="0">
+                <a:solidFill>
+                  <a:schemeClr val="accent4">
+                    <a:lumMod val="75000"/>
+                  </a:schemeClr>
+                </a:solidFill>
+                <a:latin typeface="メイリオ" panose="020B0604030504040204" pitchFamily="50" charset="-128"/>
+                <a:ea typeface="メイリオ" panose="020B0604030504040204" pitchFamily="50" charset="-128"/>
+              </a:rPr>
+              <a:t>戻り値に属性を追加する</a:t>
+            </a:r>
             <a:endParaRPr kumimoji="1" lang="en-US" altLang="ja-JP" sz="2000" dirty="0">
               <a:solidFill>
                 <a:schemeClr val="accent4">
@@ -29090,7 +32512,203 @@
                 <a:latin typeface="メイリオ" panose="020B0604030504040204" pitchFamily="50" charset="-128"/>
                 <a:ea typeface="メイリオ" panose="020B0604030504040204" pitchFamily="50" charset="-128"/>
               </a:rPr>
-              <a:t>変数名：</a:t>
+              <a:t>実行内容：</a:t>
+            </a:r>
+            <a:r>
+              <a:rPr lang="en-US" altLang="ja-JP" sz="1200" dirty="0" err="1">
+                <a:latin typeface="メイリオ" panose="020B0604030504040204" pitchFamily="50" charset="-128"/>
+                <a:ea typeface="メイリオ" panose="020B0604030504040204" pitchFamily="50" charset="-128"/>
+              </a:rPr>
+              <a:t>attr</a:t>
+            </a:r>
+            <a:r>
+              <a:rPr lang="en-US" altLang="ja-JP" sz="1200" dirty="0">
+                <a:latin typeface="メイリオ" panose="020B0604030504040204" pitchFamily="50" charset="-128"/>
+                <a:ea typeface="メイリオ" panose="020B0604030504040204" pitchFamily="50" charset="-128"/>
+              </a:rPr>
+              <a:t>(</a:t>
+            </a:r>
+            <a:r>
+              <a:rPr lang="en-US" altLang="ja-JP" sz="1200" dirty="0" err="1">
+                <a:latin typeface="メイリオ" panose="020B0604030504040204" pitchFamily="50" charset="-128"/>
+                <a:ea typeface="メイリオ" panose="020B0604030504040204" pitchFamily="50" charset="-128"/>
+              </a:rPr>
+              <a:t>prize,”symbols</a:t>
+            </a:r>
+            <a:r>
+              <a:rPr lang="en-US" altLang="ja-JP" sz="1200" dirty="0">
+                <a:latin typeface="メイリオ" panose="020B0604030504040204" pitchFamily="50" charset="-128"/>
+                <a:ea typeface="メイリオ" panose="020B0604030504040204" pitchFamily="50" charset="-128"/>
+              </a:rPr>
+              <a:t>”) &lt;- symbols</a:t>
+            </a:r>
+            <a:r>
+              <a:rPr lang="ja-JP" altLang="en-US" sz="1200" dirty="0">
+                <a:latin typeface="メイリオ" panose="020B0604030504040204" pitchFamily="50" charset="-128"/>
+                <a:ea typeface="メイリオ" panose="020B0604030504040204" pitchFamily="50" charset="-128"/>
+              </a:rPr>
+              <a:t>　で、</a:t>
+            </a:r>
+            <a:r>
+              <a:rPr lang="en-US" altLang="ja-JP" sz="1200" dirty="0">
+                <a:latin typeface="メイリオ" panose="020B0604030504040204" pitchFamily="50" charset="-128"/>
+                <a:ea typeface="メイリオ" panose="020B0604030504040204" pitchFamily="50" charset="-128"/>
+              </a:rPr>
+              <a:t>prize</a:t>
+            </a:r>
+            <a:r>
+              <a:rPr lang="ja-JP" altLang="en-US" sz="1200" dirty="0">
+                <a:latin typeface="メイリオ" panose="020B0604030504040204" pitchFamily="50" charset="-128"/>
+                <a:ea typeface="メイリオ" panose="020B0604030504040204" pitchFamily="50" charset="-128"/>
+              </a:rPr>
+              <a:t>に</a:t>
+            </a:r>
+            <a:r>
+              <a:rPr lang="en-US" altLang="ja-JP" sz="1200" dirty="0">
+                <a:latin typeface="メイリオ" panose="020B0604030504040204" pitchFamily="50" charset="-128"/>
+                <a:ea typeface="メイリオ" panose="020B0604030504040204" pitchFamily="50" charset="-128"/>
+              </a:rPr>
+              <a:t>symbols</a:t>
+            </a:r>
+            <a:r>
+              <a:rPr lang="ja-JP" altLang="en-US" sz="1200" dirty="0">
+                <a:latin typeface="メイリオ" panose="020B0604030504040204" pitchFamily="50" charset="-128"/>
+                <a:ea typeface="メイリオ" panose="020B0604030504040204" pitchFamily="50" charset="-128"/>
+              </a:rPr>
+              <a:t>を属性として追加する</a:t>
+            </a:r>
+            <a:endParaRPr lang="en-US" altLang="ja-JP" sz="1200" dirty="0">
+              <a:latin typeface="メイリオ" panose="020B0604030504040204" pitchFamily="50" charset="-128"/>
+              <a:ea typeface="メイリオ" panose="020B0604030504040204" pitchFamily="50" charset="-128"/>
+            </a:endParaRPr>
+          </a:p>
+          <a:p>
+            <a:pPr algn="l"/>
+            <a:r>
+              <a:rPr lang="en-US" altLang="ja-JP" sz="1200" dirty="0">
+                <a:latin typeface="メイリオ" panose="020B0604030504040204" pitchFamily="50" charset="-128"/>
+                <a:ea typeface="メイリオ" panose="020B0604030504040204" pitchFamily="50" charset="-128"/>
+              </a:rPr>
+              <a:t>				</a:t>
+            </a:r>
+            <a:r>
+              <a:rPr lang="ja-JP" altLang="en-US" sz="1200" dirty="0">
+                <a:latin typeface="メイリオ" panose="020B0604030504040204" pitchFamily="50" charset="-128"/>
+                <a:ea typeface="メイリオ" panose="020B0604030504040204" pitchFamily="50" charset="-128"/>
+              </a:rPr>
+              <a:t>　　　変更前</a:t>
+            </a:r>
+            <a:endParaRPr lang="en-US" altLang="ja-JP" sz="1200" dirty="0">
+              <a:latin typeface="メイリオ" panose="020B0604030504040204" pitchFamily="50" charset="-128"/>
+              <a:ea typeface="メイリオ" panose="020B0604030504040204" pitchFamily="50" charset="-128"/>
+            </a:endParaRPr>
+          </a:p>
+          <a:p>
+            <a:pPr algn="l"/>
+            <a:endParaRPr lang="en-US" altLang="ja-JP" sz="1200" dirty="0">
+              <a:latin typeface="メイリオ" panose="020B0604030504040204" pitchFamily="50" charset="-128"/>
+              <a:ea typeface="メイリオ" panose="020B0604030504040204" pitchFamily="50" charset="-128"/>
+            </a:endParaRPr>
+          </a:p>
+          <a:p>
+            <a:pPr algn="l"/>
+            <a:endParaRPr lang="en-US" altLang="ja-JP" sz="1200" dirty="0">
+              <a:latin typeface="メイリオ" panose="020B0604030504040204" pitchFamily="50" charset="-128"/>
+              <a:ea typeface="メイリオ" panose="020B0604030504040204" pitchFamily="50" charset="-128"/>
+            </a:endParaRPr>
+          </a:p>
+          <a:p>
+            <a:pPr algn="l"/>
+            <a:r>
+              <a:rPr lang="en-US" altLang="ja-JP" sz="1200" dirty="0">
+                <a:latin typeface="メイリオ" panose="020B0604030504040204" pitchFamily="50" charset="-128"/>
+                <a:ea typeface="メイリオ" panose="020B0604030504040204" pitchFamily="50" charset="-128"/>
+              </a:rPr>
+              <a:t>				</a:t>
+            </a:r>
+            <a:r>
+              <a:rPr lang="ja-JP" altLang="en-US" sz="1200" dirty="0">
+                <a:latin typeface="メイリオ" panose="020B0604030504040204" pitchFamily="50" charset="-128"/>
+                <a:ea typeface="メイリオ" panose="020B0604030504040204" pitchFamily="50" charset="-128"/>
+              </a:rPr>
+              <a:t>　　　変更後</a:t>
+            </a:r>
+            <a:endParaRPr lang="en-US" altLang="ja-JP" sz="1200" dirty="0">
+              <a:latin typeface="メイリオ" panose="020B0604030504040204" pitchFamily="50" charset="-128"/>
+              <a:ea typeface="メイリオ" panose="020B0604030504040204" pitchFamily="50" charset="-128"/>
+            </a:endParaRPr>
+          </a:p>
+          <a:p>
+            <a:pPr algn="l"/>
+            <a:endParaRPr lang="en-US" altLang="ja-JP" sz="1200" dirty="0">
+              <a:latin typeface="メイリオ" panose="020B0604030504040204" pitchFamily="50" charset="-128"/>
+              <a:ea typeface="メイリオ" panose="020B0604030504040204" pitchFamily="50" charset="-128"/>
+            </a:endParaRPr>
+          </a:p>
+          <a:p>
+            <a:pPr algn="l"/>
+            <a:endParaRPr lang="en-US" altLang="ja-JP" sz="1200" dirty="0">
+              <a:latin typeface="メイリオ" panose="020B0604030504040204" pitchFamily="50" charset="-128"/>
+              <a:ea typeface="メイリオ" panose="020B0604030504040204" pitchFamily="50" charset="-128"/>
+            </a:endParaRPr>
+          </a:p>
+          <a:p>
+            <a:pPr algn="l"/>
+            <a:endParaRPr lang="en-US" altLang="ja-JP" sz="1200" dirty="0">
+              <a:latin typeface="メイリオ" panose="020B0604030504040204" pitchFamily="50" charset="-128"/>
+              <a:ea typeface="メイリオ" panose="020B0604030504040204" pitchFamily="50" charset="-128"/>
+            </a:endParaRPr>
+          </a:p>
+          <a:p>
+            <a:pPr algn="l"/>
+            <a:r>
+              <a:rPr lang="ja-JP" altLang="en-US" sz="1200" dirty="0">
+                <a:latin typeface="メイリオ" panose="020B0604030504040204" pitchFamily="50" charset="-128"/>
+                <a:ea typeface="メイリオ" panose="020B0604030504040204" pitchFamily="50" charset="-128"/>
+              </a:rPr>
+              <a:t>実行内容：</a:t>
+            </a:r>
+            <a:r>
+              <a:rPr lang="en-US" altLang="ja-JP" sz="1200" dirty="0">
+                <a:latin typeface="メイリオ" panose="020B0604030504040204" pitchFamily="50" charset="-128"/>
+                <a:ea typeface="メイリオ" panose="020B0604030504040204" pitchFamily="50" charset="-128"/>
+              </a:rPr>
+              <a:t>structure(score(symbols),symbols = symbols)</a:t>
+            </a:r>
+            <a:r>
+              <a:rPr lang="ja-JP" altLang="en-US" sz="1200" dirty="0">
+                <a:latin typeface="メイリオ" panose="020B0604030504040204" pitchFamily="50" charset="-128"/>
+                <a:ea typeface="メイリオ" panose="020B0604030504040204" pitchFamily="50" charset="-128"/>
+              </a:rPr>
+              <a:t>　で、</a:t>
+            </a:r>
+            <a:r>
+              <a:rPr lang="en-US" altLang="ja-JP" sz="1200" dirty="0">
+                <a:latin typeface="メイリオ" panose="020B0604030504040204" pitchFamily="50" charset="-128"/>
+                <a:ea typeface="メイリオ" panose="020B0604030504040204" pitchFamily="50" charset="-128"/>
+              </a:rPr>
+              <a:t> prize</a:t>
+            </a:r>
+            <a:r>
+              <a:rPr lang="ja-JP" altLang="en-US" sz="1200" dirty="0">
+                <a:latin typeface="メイリオ" panose="020B0604030504040204" pitchFamily="50" charset="-128"/>
+                <a:ea typeface="メイリオ" panose="020B0604030504040204" pitchFamily="50" charset="-128"/>
+              </a:rPr>
+              <a:t>に</a:t>
+            </a:r>
+            <a:r>
+              <a:rPr lang="en-US" altLang="ja-JP" sz="1200" dirty="0">
+                <a:latin typeface="メイリオ" panose="020B0604030504040204" pitchFamily="50" charset="-128"/>
+                <a:ea typeface="メイリオ" panose="020B0604030504040204" pitchFamily="50" charset="-128"/>
+              </a:rPr>
+              <a:t>symbols</a:t>
+            </a:r>
+            <a:r>
+              <a:rPr lang="ja-JP" altLang="en-US" sz="1200" dirty="0">
+                <a:latin typeface="メイリオ" panose="020B0604030504040204" pitchFamily="50" charset="-128"/>
+                <a:ea typeface="メイリオ" panose="020B0604030504040204" pitchFamily="50" charset="-128"/>
+              </a:rPr>
+              <a:t>を属性として追加する</a:t>
             </a:r>
             <a:endParaRPr lang="en-US" altLang="ja-JP" sz="1200" dirty="0">
               <a:latin typeface="メイリオ" panose="020B0604030504040204" pitchFamily="50" charset="-128"/>
@@ -29115,8 +32733,422 @@
         </p:nvCxnSpPr>
         <p:spPr>
           <a:xfrm>
-            <a:off x="4548393" y="1472982"/>
+            <a:off x="4232774" y="2435710"/>
             <a:ext cx="581891" cy="0"/>
+          </a:xfrm>
+          <a:prstGeom prst="straightConnector1">
+            <a:avLst/>
+          </a:prstGeom>
+          <a:ln w="57150">
+            <a:solidFill>
+              <a:schemeClr val="accent4">
+                <a:lumMod val="75000"/>
+              </a:schemeClr>
+            </a:solidFill>
+            <a:tailEnd type="triangle"/>
+          </a:ln>
+        </p:spPr>
+        <p:style>
+          <a:lnRef idx="1">
+            <a:schemeClr val="accent1"/>
+          </a:lnRef>
+          <a:fillRef idx="0">
+            <a:schemeClr val="accent1"/>
+          </a:fillRef>
+          <a:effectRef idx="0">
+            <a:schemeClr val="accent1"/>
+          </a:effectRef>
+          <a:fontRef idx="minor">
+            <a:schemeClr val="tx1"/>
+          </a:fontRef>
+        </p:style>
+      </p:cxnSp>
+      <p:pic>
+        <p:nvPicPr>
+          <p:cNvPr id="17" name="図 16">
+            <a:extLst>
+              <a:ext uri="{FF2B5EF4-FFF2-40B4-BE49-F238E27FC236}">
+                <a16:creationId xmlns:a16="http://schemas.microsoft.com/office/drawing/2014/main" id="{A8D0E8B1-681A-ADC3-82BE-ACEA70982A43}"/>
+              </a:ext>
+            </a:extLst>
+          </p:cNvPr>
+          <p:cNvPicPr>
+            <a:picLocks noChangeAspect="1"/>
+          </p:cNvPicPr>
+          <p:nvPr/>
+        </p:nvPicPr>
+        <p:blipFill>
+          <a:blip r:embed="rId3"/>
+          <a:stretch>
+            <a:fillRect/>
+          </a:stretch>
+        </p:blipFill>
+        <p:spPr>
+          <a:xfrm>
+            <a:off x="5584053" y="1878117"/>
+            <a:ext cx="1629002" cy="600159"/>
+          </a:xfrm>
+          <a:prstGeom prst="rect">
+            <a:avLst/>
+          </a:prstGeom>
+          <a:ln>
+            <a:solidFill>
+              <a:schemeClr val="bg2">
+                <a:lumMod val="90000"/>
+              </a:schemeClr>
+            </a:solidFill>
+          </a:ln>
+        </p:spPr>
+      </p:pic>
+      <p:pic>
+        <p:nvPicPr>
+          <p:cNvPr id="19" name="図 18">
+            <a:extLst>
+              <a:ext uri="{FF2B5EF4-FFF2-40B4-BE49-F238E27FC236}">
+                <a16:creationId xmlns:a16="http://schemas.microsoft.com/office/drawing/2014/main" id="{DAA0D1C2-51F9-DA11-DA75-E18227D8701D}"/>
+              </a:ext>
+            </a:extLst>
+          </p:cNvPr>
+          <p:cNvPicPr>
+            <a:picLocks noChangeAspect="1"/>
+          </p:cNvPicPr>
+          <p:nvPr/>
+        </p:nvPicPr>
+        <p:blipFill>
+          <a:blip r:embed="rId4"/>
+          <a:stretch>
+            <a:fillRect/>
+          </a:stretch>
+        </p:blipFill>
+        <p:spPr>
+          <a:xfrm>
+            <a:off x="5584053" y="2684340"/>
+            <a:ext cx="1590897" cy="752580"/>
+          </a:xfrm>
+          <a:prstGeom prst="rect">
+            <a:avLst/>
+          </a:prstGeom>
+          <a:ln>
+            <a:solidFill>
+              <a:schemeClr val="bg2">
+                <a:lumMod val="90000"/>
+              </a:schemeClr>
+            </a:solidFill>
+          </a:ln>
+        </p:spPr>
+      </p:pic>
+      <p:pic>
+        <p:nvPicPr>
+          <p:cNvPr id="21" name="図 20">
+            <a:extLst>
+              <a:ext uri="{FF2B5EF4-FFF2-40B4-BE49-F238E27FC236}">
+                <a16:creationId xmlns:a16="http://schemas.microsoft.com/office/drawing/2014/main" id="{6ADA160F-357A-6F9B-D53F-792423DD23A8}"/>
+              </a:ext>
+            </a:extLst>
+          </p:cNvPr>
+          <p:cNvPicPr>
+            <a:picLocks noChangeAspect="1"/>
+          </p:cNvPicPr>
+          <p:nvPr/>
+        </p:nvPicPr>
+        <p:blipFill>
+          <a:blip r:embed="rId5"/>
+          <a:stretch>
+            <a:fillRect/>
+          </a:stretch>
+        </p:blipFill>
+        <p:spPr>
+          <a:xfrm>
+            <a:off x="1362591" y="1914223"/>
+            <a:ext cx="2724530" cy="1133633"/>
+          </a:xfrm>
+          <a:prstGeom prst="rect">
+            <a:avLst/>
+          </a:prstGeom>
+          <a:ln>
+            <a:solidFill>
+              <a:schemeClr val="bg2">
+                <a:lumMod val="90000"/>
+              </a:schemeClr>
+            </a:solidFill>
+          </a:ln>
+        </p:spPr>
+      </p:pic>
+      <p:pic>
+        <p:nvPicPr>
+          <p:cNvPr id="23" name="図 22">
+            <a:extLst>
+              <a:ext uri="{FF2B5EF4-FFF2-40B4-BE49-F238E27FC236}">
+                <a16:creationId xmlns:a16="http://schemas.microsoft.com/office/drawing/2014/main" id="{980B561A-DADC-161F-09B7-89EBCE8C84AF}"/>
+              </a:ext>
+            </a:extLst>
+          </p:cNvPr>
+          <p:cNvPicPr>
+            <a:picLocks noChangeAspect="1"/>
+          </p:cNvPicPr>
+          <p:nvPr/>
+        </p:nvPicPr>
+        <p:blipFill>
+          <a:blip r:embed="rId6"/>
+          <a:stretch>
+            <a:fillRect/>
+          </a:stretch>
+        </p:blipFill>
+        <p:spPr>
+          <a:xfrm>
+            <a:off x="1362591" y="4317776"/>
+            <a:ext cx="3591426" cy="771633"/>
+          </a:xfrm>
+          <a:prstGeom prst="rect">
+            <a:avLst/>
+          </a:prstGeom>
+          <a:ln>
+            <a:solidFill>
+              <a:schemeClr val="bg2">
+                <a:lumMod val="90000"/>
+              </a:schemeClr>
+            </a:solidFill>
+          </a:ln>
+        </p:spPr>
+      </p:pic>
+      <p:pic>
+        <p:nvPicPr>
+          <p:cNvPr id="25" name="図 24">
+            <a:extLst>
+              <a:ext uri="{FF2B5EF4-FFF2-40B4-BE49-F238E27FC236}">
+                <a16:creationId xmlns:a16="http://schemas.microsoft.com/office/drawing/2014/main" id="{398D2A48-47F7-8039-6634-6C1BEC2070A1}"/>
+              </a:ext>
+            </a:extLst>
+          </p:cNvPr>
+          <p:cNvPicPr>
+            <a:picLocks noChangeAspect="1"/>
+          </p:cNvPicPr>
+          <p:nvPr/>
+        </p:nvPicPr>
+        <p:blipFill>
+          <a:blip r:embed="rId7"/>
+          <a:stretch>
+            <a:fillRect/>
+          </a:stretch>
+        </p:blipFill>
+        <p:spPr>
+          <a:xfrm>
+            <a:off x="5573282" y="4322884"/>
+            <a:ext cx="1790950" cy="781159"/>
+          </a:xfrm>
+          <a:prstGeom prst="rect">
+            <a:avLst/>
+          </a:prstGeom>
+          <a:ln>
+            <a:solidFill>
+              <a:schemeClr val="bg2">
+                <a:lumMod val="90000"/>
+              </a:schemeClr>
+            </a:solidFill>
+          </a:ln>
+        </p:spPr>
+      </p:pic>
+      <p:cxnSp>
+        <p:nvCxnSpPr>
+          <p:cNvPr id="26" name="直線矢印コネクタ 25">
+            <a:extLst>
+              <a:ext uri="{FF2B5EF4-FFF2-40B4-BE49-F238E27FC236}">
+                <a16:creationId xmlns:a16="http://schemas.microsoft.com/office/drawing/2014/main" id="{9E725804-674B-8583-A2D0-B18CB170B5F6}"/>
+              </a:ext>
+            </a:extLst>
+          </p:cNvPr>
+          <p:cNvCxnSpPr>
+            <a:cxnSpLocks/>
+          </p:cNvCxnSpPr>
+          <p:nvPr/>
+        </p:nvCxnSpPr>
+        <p:spPr>
+          <a:xfrm>
+            <a:off x="5005561" y="4607406"/>
+            <a:ext cx="372740" cy="0"/>
+          </a:xfrm>
+          <a:prstGeom prst="straightConnector1">
+            <a:avLst/>
+          </a:prstGeom>
+          <a:ln w="57150">
+            <a:solidFill>
+              <a:schemeClr val="accent4">
+                <a:lumMod val="75000"/>
+              </a:schemeClr>
+            </a:solidFill>
+            <a:tailEnd type="triangle"/>
+          </a:ln>
+        </p:spPr>
+        <p:style>
+          <a:lnRef idx="1">
+            <a:schemeClr val="accent1"/>
+          </a:lnRef>
+          <a:fillRef idx="0">
+            <a:schemeClr val="accent1"/>
+          </a:fillRef>
+          <a:effectRef idx="0">
+            <a:schemeClr val="accent1"/>
+          </a:effectRef>
+          <a:fontRef idx="minor">
+            <a:schemeClr val="tx1"/>
+          </a:fontRef>
+        </p:style>
+      </p:cxnSp>
+      <p:sp>
+        <p:nvSpPr>
+          <p:cNvPr id="28" name="正方形/長方形 27">
+            <a:extLst>
+              <a:ext uri="{FF2B5EF4-FFF2-40B4-BE49-F238E27FC236}">
+                <a16:creationId xmlns:a16="http://schemas.microsoft.com/office/drawing/2014/main" id="{46B8BAB7-7787-0444-B662-BAC025D7468F}"/>
+              </a:ext>
+            </a:extLst>
+          </p:cNvPr>
+          <p:cNvSpPr/>
+          <p:nvPr/>
+        </p:nvSpPr>
+        <p:spPr>
+          <a:xfrm>
+            <a:off x="7705446" y="4317776"/>
+            <a:ext cx="2802859" cy="1012286"/>
+          </a:xfrm>
+          <a:prstGeom prst="rect">
+            <a:avLst/>
+          </a:prstGeom>
+          <a:solidFill>
+            <a:schemeClr val="accent2">
+              <a:lumMod val="40000"/>
+              <a:lumOff val="60000"/>
+            </a:schemeClr>
+          </a:solidFill>
+          <a:ln>
+            <a:noFill/>
+          </a:ln>
+        </p:spPr>
+        <p:style>
+          <a:lnRef idx="2">
+            <a:schemeClr val="accent1">
+              <a:shade val="15000"/>
+            </a:schemeClr>
+          </a:lnRef>
+          <a:fillRef idx="1">
+            <a:schemeClr val="accent1"/>
+          </a:fillRef>
+          <a:effectRef idx="0">
+            <a:schemeClr val="accent1"/>
+          </a:effectRef>
+          <a:fontRef idx="minor">
+            <a:schemeClr val="lt1"/>
+          </a:fontRef>
+        </p:style>
+        <p:txBody>
+          <a:bodyPr rtlCol="0" anchor="t"/>
+          <a:lstStyle/>
+          <a:p>
+            <a:r>
+              <a:rPr lang="en-US" altLang="ja-JP" sz="1200" dirty="0">
+                <a:solidFill>
+                  <a:schemeClr val="tx1"/>
+                </a:solidFill>
+              </a:rPr>
+              <a:t>structure</a:t>
+            </a:r>
+            <a:r>
+              <a:rPr lang="ja-JP" altLang="en-US" sz="1200" dirty="0">
+                <a:solidFill>
+                  <a:schemeClr val="tx1"/>
+                </a:solidFill>
+              </a:rPr>
+              <a:t>関数</a:t>
+            </a:r>
+            <a:endParaRPr lang="en-US" altLang="ja-JP" sz="1200" dirty="0">
+              <a:solidFill>
+                <a:schemeClr val="tx1"/>
+              </a:solidFill>
+            </a:endParaRPr>
+          </a:p>
+          <a:p>
+            <a:endParaRPr lang="en-US" altLang="ja-JP" sz="1200" dirty="0">
+              <a:solidFill>
+                <a:schemeClr val="tx1"/>
+              </a:solidFill>
+            </a:endParaRPr>
+          </a:p>
+          <a:p>
+            <a:r>
+              <a:rPr lang="en-US" altLang="ja-JP" sz="1200" dirty="0">
+                <a:solidFill>
+                  <a:schemeClr val="tx1"/>
+                </a:solidFill>
+              </a:rPr>
+              <a:t>structure(data, tag = value)</a:t>
+            </a:r>
+          </a:p>
+          <a:p>
+            <a:r>
+              <a:rPr lang="en-US" altLang="ja-JP" sz="1200" dirty="0">
+                <a:solidFill>
+                  <a:schemeClr val="tx1"/>
+                </a:solidFill>
+              </a:rPr>
+              <a:t>data : </a:t>
+            </a:r>
+            <a:r>
+              <a:rPr lang="ja-JP" altLang="en-US" sz="1200" dirty="0">
+                <a:solidFill>
+                  <a:schemeClr val="tx1"/>
+                </a:solidFill>
+              </a:rPr>
+              <a:t>オブジェクト</a:t>
+            </a:r>
+            <a:endParaRPr lang="en-US" altLang="ja-JP" sz="1200" dirty="0">
+              <a:solidFill>
+                <a:schemeClr val="tx1"/>
+              </a:solidFill>
+            </a:endParaRPr>
+          </a:p>
+          <a:p>
+            <a:r>
+              <a:rPr lang="en-US" altLang="ja-JP" sz="1200" dirty="0">
+                <a:solidFill>
+                  <a:schemeClr val="tx1"/>
+                </a:solidFill>
+              </a:rPr>
+              <a:t>tag = value  : data</a:t>
+            </a:r>
+            <a:r>
+              <a:rPr lang="ja-JP" altLang="en-US" sz="1200" dirty="0">
+                <a:solidFill>
+                  <a:schemeClr val="tx1"/>
+                </a:solidFill>
+              </a:rPr>
+              <a:t>に付与する属性</a:t>
+            </a:r>
+            <a:endParaRPr lang="en-US" altLang="ja-JP" sz="1200" dirty="0">
+              <a:solidFill>
+                <a:schemeClr val="tx1"/>
+              </a:solidFill>
+            </a:endParaRPr>
+          </a:p>
+        </p:txBody>
+      </p:sp>
+      <p:cxnSp>
+        <p:nvCxnSpPr>
+          <p:cNvPr id="30" name="直線矢印コネクタ 29">
+            <a:extLst>
+              <a:ext uri="{FF2B5EF4-FFF2-40B4-BE49-F238E27FC236}">
+                <a16:creationId xmlns:a16="http://schemas.microsoft.com/office/drawing/2014/main" id="{B3D6F570-977E-EB1E-266D-214AEA31F9E2}"/>
+              </a:ext>
+            </a:extLst>
+          </p:cNvPr>
+          <p:cNvCxnSpPr>
+            <a:cxnSpLocks/>
+          </p:cNvCxnSpPr>
+          <p:nvPr/>
+        </p:nvCxnSpPr>
+        <p:spPr>
+          <a:xfrm>
+            <a:off x="5158239" y="2078465"/>
+            <a:ext cx="0" cy="605875"/>
           </a:xfrm>
           <a:prstGeom prst="straightConnector1">
             <a:avLst/>

--- a/永井芽衣_Rpart3.pptx
+++ b/永井芽衣_Rpart3.pptx
@@ -274,7 +274,7 @@
           <a:p>
             <a:fld id="{A4812308-7085-464E-BFE5-814F883FC684}" type="datetimeFigureOut">
               <a:rPr kumimoji="1" lang="ja-JP" altLang="en-US" smtClean="0"/>
-              <a:t>2026/8/14</a:t>
+              <a:t>2026/8/15</a:t>
             </a:fld>
             <a:endParaRPr kumimoji="1" lang="ja-JP" altLang="en-US"/>
           </a:p>
@@ -1224,7 +1224,7 @@
           <a:p>
             <a:fld id="{41BDD009-2AE7-4B3F-8458-2328013CE102}" type="datetimeFigureOut">
               <a:rPr kumimoji="1" lang="ja-JP" altLang="en-US" smtClean="0"/>
-              <a:t>2026/8/14</a:t>
+              <a:t>2026/8/15</a:t>
             </a:fld>
             <a:endParaRPr kumimoji="1" lang="ja-JP" altLang="en-US"/>
           </a:p>
@@ -1454,7 +1454,7 @@
           <a:p>
             <a:fld id="{41BDD009-2AE7-4B3F-8458-2328013CE102}" type="datetimeFigureOut">
               <a:rPr kumimoji="1" lang="ja-JP" altLang="en-US" smtClean="0"/>
-              <a:t>2026/8/14</a:t>
+              <a:t>2026/8/15</a:t>
             </a:fld>
             <a:endParaRPr kumimoji="1" lang="ja-JP" altLang="en-US"/>
           </a:p>
@@ -1694,7 +1694,7 @@
           <a:p>
             <a:fld id="{41BDD009-2AE7-4B3F-8458-2328013CE102}" type="datetimeFigureOut">
               <a:rPr kumimoji="1" lang="ja-JP" altLang="en-US" smtClean="0"/>
-              <a:t>2026/8/14</a:t>
+              <a:t>2026/8/15</a:t>
             </a:fld>
             <a:endParaRPr kumimoji="1" lang="ja-JP" altLang="en-US"/>
           </a:p>
@@ -1924,7 +1924,7 @@
           <a:p>
             <a:fld id="{41BDD009-2AE7-4B3F-8458-2328013CE102}" type="datetimeFigureOut">
               <a:rPr kumimoji="1" lang="ja-JP" altLang="en-US" smtClean="0"/>
-              <a:t>2026/8/14</a:t>
+              <a:t>2026/8/15</a:t>
             </a:fld>
             <a:endParaRPr kumimoji="1" lang="ja-JP" altLang="en-US"/>
           </a:p>
@@ -2199,7 +2199,7 @@
           <a:p>
             <a:fld id="{41BDD009-2AE7-4B3F-8458-2328013CE102}" type="datetimeFigureOut">
               <a:rPr kumimoji="1" lang="ja-JP" altLang="en-US" smtClean="0"/>
-              <a:t>2026/8/14</a:t>
+              <a:t>2026/8/15</a:t>
             </a:fld>
             <a:endParaRPr kumimoji="1" lang="ja-JP" altLang="en-US"/>
           </a:p>
@@ -2528,7 +2528,7 @@
           <a:p>
             <a:fld id="{41BDD009-2AE7-4B3F-8458-2328013CE102}" type="datetimeFigureOut">
               <a:rPr kumimoji="1" lang="ja-JP" altLang="en-US" smtClean="0"/>
-              <a:t>2026/8/14</a:t>
+              <a:t>2026/8/15</a:t>
             </a:fld>
             <a:endParaRPr kumimoji="1" lang="ja-JP" altLang="en-US"/>
           </a:p>
@@ -3004,7 +3004,7 @@
           <a:p>
             <a:fld id="{41BDD009-2AE7-4B3F-8458-2328013CE102}" type="datetimeFigureOut">
               <a:rPr kumimoji="1" lang="ja-JP" altLang="en-US" smtClean="0"/>
-              <a:t>2026/8/14</a:t>
+              <a:t>2026/8/15</a:t>
             </a:fld>
             <a:endParaRPr kumimoji="1" lang="ja-JP" altLang="en-US"/>
           </a:p>
@@ -3145,7 +3145,7 @@
           <a:p>
             <a:fld id="{41BDD009-2AE7-4B3F-8458-2328013CE102}" type="datetimeFigureOut">
               <a:rPr kumimoji="1" lang="ja-JP" altLang="en-US" smtClean="0"/>
-              <a:t>2026/8/14</a:t>
+              <a:t>2026/8/15</a:t>
             </a:fld>
             <a:endParaRPr kumimoji="1" lang="ja-JP" altLang="en-US"/>
           </a:p>
@@ -3258,7 +3258,7 @@
           <a:p>
             <a:fld id="{41BDD009-2AE7-4B3F-8458-2328013CE102}" type="datetimeFigureOut">
               <a:rPr kumimoji="1" lang="ja-JP" altLang="en-US" smtClean="0"/>
-              <a:t>2026/8/14</a:t>
+              <a:t>2026/8/15</a:t>
             </a:fld>
             <a:endParaRPr kumimoji="1" lang="ja-JP" altLang="en-US"/>
           </a:p>
@@ -3601,7 +3601,7 @@
           <a:p>
             <a:fld id="{41BDD009-2AE7-4B3F-8458-2328013CE102}" type="datetimeFigureOut">
               <a:rPr kumimoji="1" lang="ja-JP" altLang="en-US" smtClean="0"/>
-              <a:t>2026/8/14</a:t>
+              <a:t>2026/8/15</a:t>
             </a:fld>
             <a:endParaRPr kumimoji="1" lang="ja-JP" altLang="en-US"/>
           </a:p>
@@ -3889,7 +3889,7 @@
           <a:p>
             <a:fld id="{41BDD009-2AE7-4B3F-8458-2328013CE102}" type="datetimeFigureOut">
               <a:rPr kumimoji="1" lang="ja-JP" altLang="en-US" smtClean="0"/>
-              <a:t>2026/8/14</a:t>
+              <a:t>2026/8/15</a:t>
             </a:fld>
             <a:endParaRPr kumimoji="1" lang="ja-JP" altLang="en-US"/>
           </a:p>
@@ -4162,7 +4162,7 @@
           <a:p>
             <a:fld id="{41BDD009-2AE7-4B3F-8458-2328013CE102}" type="datetimeFigureOut">
               <a:rPr kumimoji="1" lang="ja-JP" altLang="en-US" smtClean="0"/>
-              <a:t>2026/8/14</a:t>
+              <a:t>2026/8/15</a:t>
             </a:fld>
             <a:endParaRPr kumimoji="1" lang="ja-JP" altLang="en-US"/>
           </a:p>
@@ -5906,6 +5906,70 @@
           </a:p>
         </p:txBody>
       </p:sp>
+      <p:sp>
+        <p:nvSpPr>
+          <p:cNvPr id="5" name="楕円 4">
+            <a:extLst>
+              <a:ext uri="{FF2B5EF4-FFF2-40B4-BE49-F238E27FC236}">
+                <a16:creationId xmlns:a16="http://schemas.microsoft.com/office/drawing/2014/main" id="{0A8634E9-3496-6346-ECD1-5C0140FF4587}"/>
+              </a:ext>
+            </a:extLst>
+          </p:cNvPr>
+          <p:cNvSpPr/>
+          <p:nvPr/>
+        </p:nvSpPr>
+        <p:spPr>
+          <a:xfrm>
+            <a:off x="3581273" y="1181587"/>
+            <a:ext cx="206220" cy="232109"/>
+          </a:xfrm>
+          <a:prstGeom prst="ellipse">
+            <a:avLst/>
+          </a:prstGeom>
+          <a:solidFill>
+            <a:schemeClr val="accent4">
+              <a:lumMod val="75000"/>
+            </a:schemeClr>
+          </a:solidFill>
+          <a:ln>
+            <a:noFill/>
+          </a:ln>
+        </p:spPr>
+        <p:style>
+          <a:lnRef idx="2">
+            <a:schemeClr val="accent1">
+              <a:shade val="15000"/>
+            </a:schemeClr>
+          </a:lnRef>
+          <a:fillRef idx="1">
+            <a:schemeClr val="accent1"/>
+          </a:fillRef>
+          <a:effectRef idx="0">
+            <a:schemeClr val="accent1"/>
+          </a:effectRef>
+          <a:fontRef idx="minor">
+            <a:schemeClr val="lt1"/>
+          </a:fontRef>
+        </p:style>
+        <p:txBody>
+          <a:bodyPr tIns="90000" rtlCol="0" anchor="ctr"/>
+          <a:lstStyle/>
+          <a:p>
+            <a:pPr algn="ctr"/>
+            <a:r>
+              <a:rPr lang="ja-JP" altLang="en-US" dirty="0">
+                <a:latin typeface="メイリオ" panose="020B0604030504040204" pitchFamily="50" charset="-128"/>
+                <a:ea typeface="メイリオ" panose="020B0604030504040204" pitchFamily="50" charset="-128"/>
+              </a:rPr>
+              <a:t>２</a:t>
+            </a:r>
+            <a:endParaRPr kumimoji="1" lang="ja-JP" altLang="en-US" dirty="0">
+              <a:latin typeface="メイリオ" panose="020B0604030504040204" pitchFamily="50" charset="-128"/>
+              <a:ea typeface="メイリオ" panose="020B0604030504040204" pitchFamily="50" charset="-128"/>
+            </a:endParaRPr>
+          </a:p>
+        </p:txBody>
+      </p:sp>
     </p:spTree>
     <p:extLst>
       <p:ext uri="{BB962C8B-B14F-4D97-AF65-F5344CB8AC3E}">
@@ -6031,7 +6095,7 @@
         </p:nvSpPr>
         <p:spPr>
           <a:xfrm>
-            <a:off x="698353" y="1019123"/>
+            <a:off x="825868" y="1028514"/>
             <a:ext cx="10540261" cy="5528957"/>
           </a:xfrm>
           <a:prstGeom prst="rect">
@@ -6089,7 +6153,7 @@
         </p:nvSpPr>
         <p:spPr>
           <a:xfrm>
-            <a:off x="682560" y="1143635"/>
+            <a:off x="825869" y="1111188"/>
             <a:ext cx="10540261" cy="5446283"/>
           </a:xfrm>
         </p:spPr>
@@ -6153,7 +6217,225 @@
                 <a:latin typeface="メイリオ" panose="020B0604030504040204" pitchFamily="50" charset="-128"/>
                 <a:ea typeface="メイリオ" panose="020B0604030504040204" pitchFamily="50" charset="-128"/>
               </a:rPr>
-              <a:t>関</a:t>
+              <a:t>ジェネリック関数である </a:t>
+            </a:r>
+            <a:r>
+              <a:rPr lang="en-US" altLang="ja-JP" sz="1200" dirty="0">
+                <a:latin typeface="メイリオ" panose="020B0604030504040204" pitchFamily="50" charset="-128"/>
+                <a:ea typeface="メイリオ" panose="020B0604030504040204" pitchFamily="50" charset="-128"/>
+              </a:rPr>
+              <a:t>print()</a:t>
+            </a:r>
+            <a:r>
+              <a:rPr lang="ja-JP" altLang="en-US" sz="1200" dirty="0">
+                <a:latin typeface="メイリオ" panose="020B0604030504040204" pitchFamily="50" charset="-128"/>
+                <a:ea typeface="メイリオ" panose="020B0604030504040204" pitchFamily="50" charset="-128"/>
+              </a:rPr>
+              <a:t> は、引数の </a:t>
+            </a:r>
+            <a:r>
+              <a:rPr lang="en-US" altLang="ja-JP" sz="1200" dirty="0">
+                <a:latin typeface="メイリオ" panose="020B0604030504040204" pitchFamily="50" charset="-128"/>
+                <a:ea typeface="メイリオ" panose="020B0604030504040204" pitchFamily="50" charset="-128"/>
+              </a:rPr>
+              <a:t>class </a:t>
+            </a:r>
+            <a:r>
+              <a:rPr lang="ja-JP" altLang="en-US" sz="1200" dirty="0">
+                <a:latin typeface="メイリオ" panose="020B0604030504040204" pitchFamily="50" charset="-128"/>
+                <a:ea typeface="メイリオ" panose="020B0604030504040204" pitchFamily="50" charset="-128"/>
+              </a:rPr>
+              <a:t>によって実行内容が変わる。</a:t>
+            </a:r>
+            <a:endParaRPr lang="en-US" altLang="ja-JP" sz="1200" dirty="0">
+              <a:latin typeface="メイリオ" panose="020B0604030504040204" pitchFamily="50" charset="-128"/>
+              <a:ea typeface="メイリオ" panose="020B0604030504040204" pitchFamily="50" charset="-128"/>
+            </a:endParaRPr>
+          </a:p>
+          <a:p>
+            <a:pPr algn="l"/>
+            <a:r>
+              <a:rPr lang="en-US" altLang="ja-JP" sz="1200" dirty="0" err="1">
+                <a:latin typeface="メイリオ" panose="020B0604030504040204" pitchFamily="50" charset="-128"/>
+                <a:ea typeface="メイリオ" panose="020B0604030504040204" pitchFamily="50" charset="-128"/>
+              </a:rPr>
+              <a:t>one_play</a:t>
+            </a:r>
+            <a:r>
+              <a:rPr lang="ja-JP" altLang="en-US" sz="1200" dirty="0">
+                <a:latin typeface="メイリオ" panose="020B0604030504040204" pitchFamily="50" charset="-128"/>
+                <a:ea typeface="メイリオ" panose="020B0604030504040204" pitchFamily="50" charset="-128"/>
+              </a:rPr>
+              <a:t> に新しい</a:t>
+            </a:r>
+            <a:r>
+              <a:rPr lang="en-US" altLang="ja-JP" sz="1200" dirty="0">
+                <a:latin typeface="メイリオ" panose="020B0604030504040204" pitchFamily="50" charset="-128"/>
+                <a:ea typeface="メイリオ" panose="020B0604030504040204" pitchFamily="50" charset="-128"/>
+              </a:rPr>
+              <a:t>class</a:t>
+            </a:r>
+            <a:r>
+              <a:rPr lang="ja-JP" altLang="en-US" sz="1200" dirty="0">
+                <a:latin typeface="メイリオ" panose="020B0604030504040204" pitchFamily="50" charset="-128"/>
+                <a:ea typeface="メイリオ" panose="020B0604030504040204" pitchFamily="50" charset="-128"/>
+              </a:rPr>
+              <a:t> </a:t>
+            </a:r>
+            <a:r>
+              <a:rPr lang="en-US" altLang="ja-JP" sz="1200" dirty="0">
+                <a:latin typeface="メイリオ" panose="020B0604030504040204" pitchFamily="50" charset="-128"/>
+                <a:ea typeface="メイリオ" panose="020B0604030504040204" pitchFamily="50" charset="-128"/>
+              </a:rPr>
+              <a:t>“slots”</a:t>
+            </a:r>
+            <a:r>
+              <a:rPr lang="ja-JP" altLang="en-US" sz="1200" dirty="0">
+                <a:latin typeface="メイリオ" panose="020B0604030504040204" pitchFamily="50" charset="-128"/>
+                <a:ea typeface="メイリオ" panose="020B0604030504040204" pitchFamily="50" charset="-128"/>
+              </a:rPr>
+              <a:t> を与え、</a:t>
+            </a:r>
+            <a:r>
+              <a:rPr lang="en-US" altLang="ja-JP" sz="1200" dirty="0" err="1">
+                <a:latin typeface="メイリオ" panose="020B0604030504040204" pitchFamily="50" charset="-128"/>
+                <a:ea typeface="メイリオ" panose="020B0604030504040204" pitchFamily="50" charset="-128"/>
+              </a:rPr>
+              <a:t>print.slots</a:t>
+            </a:r>
+            <a:r>
+              <a:rPr lang="en-US" altLang="ja-JP" sz="1200" dirty="0">
+                <a:latin typeface="メイリオ" panose="020B0604030504040204" pitchFamily="50" charset="-128"/>
+                <a:ea typeface="メイリオ" panose="020B0604030504040204" pitchFamily="50" charset="-128"/>
+              </a:rPr>
+              <a:t>() </a:t>
+            </a:r>
+            <a:r>
+              <a:rPr lang="ja-JP" altLang="en-US" sz="1200" dirty="0">
+                <a:latin typeface="メイリオ" panose="020B0604030504040204" pitchFamily="50" charset="-128"/>
+                <a:ea typeface="メイリオ" panose="020B0604030504040204" pitchFamily="50" charset="-128"/>
+              </a:rPr>
+              <a:t>を用意する。まずはこれが可能かを確かめる。</a:t>
+            </a:r>
+            <a:endParaRPr lang="en-US" altLang="ja-JP" sz="1200" dirty="0">
+              <a:latin typeface="メイリオ" panose="020B0604030504040204" pitchFamily="50" charset="-128"/>
+              <a:ea typeface="メイリオ" panose="020B0604030504040204" pitchFamily="50" charset="-128"/>
+            </a:endParaRPr>
+          </a:p>
+          <a:p>
+            <a:pPr algn="l"/>
+            <a:endParaRPr lang="en-US" altLang="ja-JP" sz="1200" dirty="0">
+              <a:latin typeface="メイリオ" panose="020B0604030504040204" pitchFamily="50" charset="-128"/>
+              <a:ea typeface="メイリオ" panose="020B0604030504040204" pitchFamily="50" charset="-128"/>
+            </a:endParaRPr>
+          </a:p>
+          <a:p>
+            <a:pPr algn="l"/>
+            <a:endParaRPr lang="en-US" altLang="ja-JP" sz="1200" dirty="0">
+              <a:latin typeface="メイリオ" panose="020B0604030504040204" pitchFamily="50" charset="-128"/>
+              <a:ea typeface="メイリオ" panose="020B0604030504040204" pitchFamily="50" charset="-128"/>
+            </a:endParaRPr>
+          </a:p>
+          <a:p>
+            <a:pPr algn="l"/>
+            <a:endParaRPr lang="en-US" altLang="ja-JP" sz="1200" dirty="0">
+              <a:latin typeface="メイリオ" panose="020B0604030504040204" pitchFamily="50" charset="-128"/>
+              <a:ea typeface="メイリオ" panose="020B0604030504040204" pitchFamily="50" charset="-128"/>
+            </a:endParaRPr>
+          </a:p>
+          <a:p>
+            <a:pPr algn="l"/>
+            <a:endParaRPr lang="en-US" altLang="ja-JP" sz="1200" dirty="0">
+              <a:latin typeface="メイリオ" panose="020B0604030504040204" pitchFamily="50" charset="-128"/>
+              <a:ea typeface="メイリオ" panose="020B0604030504040204" pitchFamily="50" charset="-128"/>
+            </a:endParaRPr>
+          </a:p>
+          <a:p>
+            <a:pPr algn="l"/>
+            <a:endParaRPr lang="en-US" altLang="ja-JP" sz="1200" dirty="0">
+              <a:latin typeface="メイリオ" panose="020B0604030504040204" pitchFamily="50" charset="-128"/>
+              <a:ea typeface="メイリオ" panose="020B0604030504040204" pitchFamily="50" charset="-128"/>
+            </a:endParaRPr>
+          </a:p>
+          <a:p>
+            <a:pPr algn="l"/>
+            <a:r>
+              <a:rPr lang="en-US" altLang="ja-JP" sz="2000" dirty="0">
+                <a:solidFill>
+                  <a:schemeClr val="accent4">
+                    <a:lumMod val="75000"/>
+                  </a:schemeClr>
+                </a:solidFill>
+                <a:latin typeface="メイリオ" panose="020B0604030504040204" pitchFamily="50" charset="-128"/>
+                <a:ea typeface="メイリオ" panose="020B0604030504040204" pitchFamily="50" charset="-128"/>
+              </a:rPr>
+              <a:t>##</a:t>
+            </a:r>
+            <a:r>
+              <a:rPr lang="ja-JP" altLang="en-US" sz="2000" dirty="0">
+                <a:solidFill>
+                  <a:schemeClr val="accent4">
+                    <a:lumMod val="75000"/>
+                  </a:schemeClr>
+                </a:solidFill>
+                <a:latin typeface="メイリオ" panose="020B0604030504040204" pitchFamily="50" charset="-128"/>
+                <a:ea typeface="メイリオ" panose="020B0604030504040204" pitchFamily="50" charset="-128"/>
+              </a:rPr>
+              <a:t>問題点</a:t>
+            </a:r>
+            <a:endParaRPr lang="en-US" altLang="ja-JP" sz="2000" dirty="0">
+              <a:solidFill>
+                <a:schemeClr val="accent4">
+                  <a:lumMod val="75000"/>
+                </a:schemeClr>
+              </a:solidFill>
+              <a:latin typeface="メイリオ" panose="020B0604030504040204" pitchFamily="50" charset="-128"/>
+              <a:ea typeface="メイリオ" panose="020B0604030504040204" pitchFamily="50" charset="-128"/>
+            </a:endParaRPr>
+          </a:p>
+          <a:p>
+            <a:pPr algn="l"/>
+            <a:r>
+              <a:rPr lang="en-US" altLang="ja-JP" sz="1200" dirty="0">
+                <a:latin typeface="メイリオ" panose="020B0604030504040204" pitchFamily="50" charset="-128"/>
+                <a:ea typeface="メイリオ" panose="020B0604030504040204" pitchFamily="50" charset="-128"/>
+              </a:rPr>
+              <a:t>slots</a:t>
+            </a:r>
+            <a:r>
+              <a:rPr lang="ja-JP" altLang="en-US" sz="1200" dirty="0">
+                <a:latin typeface="メイリオ" panose="020B0604030504040204" pitchFamily="50" charset="-128"/>
+                <a:ea typeface="メイリオ" panose="020B0604030504040204" pitchFamily="50" charset="-128"/>
+              </a:rPr>
+              <a:t> </a:t>
+            </a:r>
+            <a:r>
+              <a:rPr lang="en-US" altLang="ja-JP" sz="1200" dirty="0">
+                <a:latin typeface="メイリオ" panose="020B0604030504040204" pitchFamily="50" charset="-128"/>
+                <a:ea typeface="メイリオ" panose="020B0604030504040204" pitchFamily="50" charset="-128"/>
+              </a:rPr>
+              <a:t>class</a:t>
+            </a:r>
+            <a:r>
+              <a:rPr lang="ja-JP" altLang="en-US" sz="1200" dirty="0">
+                <a:latin typeface="メイリオ" panose="020B0604030504040204" pitchFamily="50" charset="-128"/>
+                <a:ea typeface="メイリオ" panose="020B0604030504040204" pitchFamily="50" charset="-128"/>
+              </a:rPr>
+              <a:t>にしても、</a:t>
+            </a:r>
+            <a:r>
+              <a:rPr lang="en-US" altLang="ja-JP" sz="1200" dirty="0">
+                <a:latin typeface="メイリオ" panose="020B0604030504040204" pitchFamily="50" charset="-128"/>
+                <a:ea typeface="メイリオ" panose="020B0604030504040204" pitchFamily="50" charset="-128"/>
+              </a:rPr>
+              <a:t>c(play1,play2)</a:t>
+            </a:r>
+            <a:r>
+              <a:rPr lang="ja-JP" altLang="en-US" sz="1200" dirty="0">
+                <a:latin typeface="メイリオ" panose="020B0604030504040204" pitchFamily="50" charset="-128"/>
+                <a:ea typeface="メイリオ" panose="020B0604030504040204" pitchFamily="50" charset="-128"/>
+              </a:rPr>
+              <a:t>のようにベクトルにして表示すると属性であるシンボルを表示しなくなってしまう。</a:t>
             </a:r>
             <a:endParaRPr lang="en-US" altLang="ja-JP" sz="1200" dirty="0">
               <a:latin typeface="メイリオ" panose="020B0604030504040204" pitchFamily="50" charset="-128"/>
@@ -6178,7 +6460,7 @@
         </p:nvCxnSpPr>
         <p:spPr>
           <a:xfrm>
-            <a:off x="4885857" y="483169"/>
+            <a:off x="4472497" y="2424379"/>
             <a:ext cx="579279" cy="0"/>
           </a:xfrm>
           <a:prstGeom prst="straightConnector1">
@@ -6222,8 +6504,8 @@
         </p:nvSpPr>
         <p:spPr>
           <a:xfrm>
-            <a:off x="8470921" y="1566190"/>
-            <a:ext cx="2783486" cy="953725"/>
+            <a:off x="8283413" y="1069413"/>
+            <a:ext cx="2824853" cy="603631"/>
           </a:xfrm>
           <a:prstGeom prst="rect">
             <a:avLst/>
@@ -6289,6 +6571,574 @@
           </a:p>
         </p:txBody>
       </p:sp>
+      <p:sp>
+        <p:nvSpPr>
+          <p:cNvPr id="5" name="楕円 4">
+            <a:extLst>
+              <a:ext uri="{FF2B5EF4-FFF2-40B4-BE49-F238E27FC236}">
+                <a16:creationId xmlns:a16="http://schemas.microsoft.com/office/drawing/2014/main" id="{92339252-4D33-E5CB-2597-AA9C15D95997}"/>
+              </a:ext>
+            </a:extLst>
+          </p:cNvPr>
+          <p:cNvSpPr/>
+          <p:nvPr/>
+        </p:nvSpPr>
+        <p:spPr>
+          <a:xfrm>
+            <a:off x="3370775" y="1139120"/>
+            <a:ext cx="206220" cy="232109"/>
+          </a:xfrm>
+          <a:prstGeom prst="ellipse">
+            <a:avLst/>
+          </a:prstGeom>
+          <a:solidFill>
+            <a:schemeClr val="accent4">
+              <a:lumMod val="75000"/>
+            </a:schemeClr>
+          </a:solidFill>
+          <a:ln>
+            <a:noFill/>
+          </a:ln>
+        </p:spPr>
+        <p:style>
+          <a:lnRef idx="2">
+            <a:schemeClr val="accent1">
+              <a:shade val="15000"/>
+            </a:schemeClr>
+          </a:lnRef>
+          <a:fillRef idx="1">
+            <a:schemeClr val="accent1"/>
+          </a:fillRef>
+          <a:effectRef idx="0">
+            <a:schemeClr val="accent1"/>
+          </a:effectRef>
+          <a:fontRef idx="minor">
+            <a:schemeClr val="lt1"/>
+          </a:fontRef>
+        </p:style>
+        <p:txBody>
+          <a:bodyPr tIns="90000" rtlCol="0" anchor="ctr"/>
+          <a:lstStyle/>
+          <a:p>
+            <a:pPr algn="ctr"/>
+            <a:r>
+              <a:rPr kumimoji="1" lang="ja-JP" altLang="en-US" dirty="0">
+                <a:latin typeface="メイリオ" panose="020B0604030504040204" pitchFamily="50" charset="-128"/>
+                <a:ea typeface="メイリオ" panose="020B0604030504040204" pitchFamily="50" charset="-128"/>
+              </a:rPr>
+              <a:t>３</a:t>
+            </a:r>
+          </a:p>
+        </p:txBody>
+      </p:sp>
+      <p:sp>
+        <p:nvSpPr>
+          <p:cNvPr id="12" name="正方形/長方形 11">
+            <a:extLst>
+              <a:ext uri="{FF2B5EF4-FFF2-40B4-BE49-F238E27FC236}">
+                <a16:creationId xmlns:a16="http://schemas.microsoft.com/office/drawing/2014/main" id="{AA3AEFBC-C240-13BD-5F27-B8CCEA16DBBB}"/>
+              </a:ext>
+            </a:extLst>
+          </p:cNvPr>
+          <p:cNvSpPr/>
+          <p:nvPr/>
+        </p:nvSpPr>
+        <p:spPr>
+          <a:xfrm>
+            <a:off x="5177037" y="2148954"/>
+            <a:ext cx="3430832" cy="1086002"/>
+          </a:xfrm>
+          <a:prstGeom prst="rect">
+            <a:avLst/>
+          </a:prstGeom>
+          <a:solidFill>
+            <a:schemeClr val="accent4">
+              <a:lumMod val="40000"/>
+              <a:lumOff val="60000"/>
+            </a:schemeClr>
+          </a:solidFill>
+          <a:ln>
+            <a:noFill/>
+          </a:ln>
+        </p:spPr>
+        <p:style>
+          <a:lnRef idx="2">
+            <a:schemeClr val="accent1">
+              <a:shade val="15000"/>
+            </a:schemeClr>
+          </a:lnRef>
+          <a:fillRef idx="1">
+            <a:schemeClr val="accent1"/>
+          </a:fillRef>
+          <a:effectRef idx="0">
+            <a:schemeClr val="accent1"/>
+          </a:effectRef>
+          <a:fontRef idx="minor">
+            <a:schemeClr val="lt1"/>
+          </a:fontRef>
+        </p:style>
+        <p:txBody>
+          <a:bodyPr rtlCol="0" anchor="t"/>
+          <a:lstStyle/>
+          <a:p>
+            <a:endParaRPr lang="en-US" altLang="ja-JP" sz="1200" dirty="0">
+              <a:solidFill>
+                <a:schemeClr val="tx1"/>
+              </a:solidFill>
+            </a:endParaRPr>
+          </a:p>
+          <a:p>
+            <a:endParaRPr lang="en-US" altLang="ja-JP" sz="1200" dirty="0">
+              <a:solidFill>
+                <a:schemeClr val="tx1"/>
+              </a:solidFill>
+            </a:endParaRPr>
+          </a:p>
+          <a:p>
+            <a:endParaRPr lang="en-US" altLang="ja-JP" sz="1200" dirty="0">
+              <a:solidFill>
+                <a:schemeClr val="tx1"/>
+              </a:solidFill>
+            </a:endParaRPr>
+          </a:p>
+          <a:p>
+            <a:r>
+              <a:rPr lang="en-US" altLang="ja-JP" sz="1200" dirty="0">
+                <a:solidFill>
+                  <a:schemeClr val="tx1"/>
+                </a:solidFill>
+              </a:rPr>
+              <a:t>print()</a:t>
+            </a:r>
+            <a:r>
+              <a:rPr lang="ja-JP" altLang="en-US" sz="1200" dirty="0">
+                <a:solidFill>
+                  <a:schemeClr val="tx1"/>
+                </a:solidFill>
+              </a:rPr>
+              <a:t>に</a:t>
+            </a:r>
+            <a:r>
+              <a:rPr lang="en-US" altLang="ja-JP" sz="1200" dirty="0">
+                <a:solidFill>
+                  <a:schemeClr val="tx1"/>
+                </a:solidFill>
+              </a:rPr>
+              <a:t>class</a:t>
+            </a:r>
+            <a:r>
+              <a:rPr lang="ja-JP" altLang="en-US" sz="1200" dirty="0">
+                <a:solidFill>
+                  <a:schemeClr val="tx1"/>
+                </a:solidFill>
+              </a:rPr>
+              <a:t>が</a:t>
+            </a:r>
+            <a:r>
+              <a:rPr lang="en-US" altLang="ja-JP" sz="1200" dirty="0">
+                <a:solidFill>
+                  <a:schemeClr val="tx1"/>
+                </a:solidFill>
+              </a:rPr>
+              <a:t>slots</a:t>
+            </a:r>
+            <a:r>
+              <a:rPr lang="ja-JP" altLang="en-US" sz="1200" dirty="0">
+                <a:solidFill>
+                  <a:schemeClr val="tx1"/>
+                </a:solidFill>
+              </a:rPr>
+              <a:t>である引数を入れたとき、</a:t>
+            </a:r>
+            <a:endParaRPr lang="en-US" altLang="ja-JP" sz="1200" dirty="0">
+              <a:solidFill>
+                <a:schemeClr val="tx1"/>
+              </a:solidFill>
+            </a:endParaRPr>
+          </a:p>
+          <a:p>
+            <a:r>
+              <a:rPr lang="en-US" altLang="ja-JP" sz="1200" dirty="0" err="1">
+                <a:solidFill>
+                  <a:schemeClr val="tx1"/>
+                </a:solidFill>
+              </a:rPr>
+              <a:t>print.slots</a:t>
+            </a:r>
+            <a:r>
+              <a:rPr lang="en-US" altLang="ja-JP" sz="1200" dirty="0">
+                <a:solidFill>
+                  <a:schemeClr val="tx1"/>
+                </a:solidFill>
+              </a:rPr>
+              <a:t>()</a:t>
+            </a:r>
+            <a:r>
+              <a:rPr lang="ja-JP" altLang="en-US" sz="1200" dirty="0">
+                <a:solidFill>
+                  <a:schemeClr val="tx1"/>
+                </a:solidFill>
+              </a:rPr>
+              <a:t>が呼び出された。</a:t>
+            </a:r>
+            <a:endParaRPr lang="en-US" altLang="ja-JP" sz="1200" dirty="0">
+              <a:solidFill>
+                <a:schemeClr val="tx1"/>
+              </a:solidFill>
+            </a:endParaRPr>
+          </a:p>
+        </p:txBody>
+      </p:sp>
+      <p:pic>
+        <p:nvPicPr>
+          <p:cNvPr id="9" name="図 8">
+            <a:extLst>
+              <a:ext uri="{FF2B5EF4-FFF2-40B4-BE49-F238E27FC236}">
+                <a16:creationId xmlns:a16="http://schemas.microsoft.com/office/drawing/2014/main" id="{C8A97BA1-1570-22B1-B67C-69EACAF8AA5D}"/>
+              </a:ext>
+            </a:extLst>
+          </p:cNvPr>
+          <p:cNvPicPr>
+            <a:picLocks noChangeAspect="1"/>
+          </p:cNvPicPr>
+          <p:nvPr/>
+        </p:nvPicPr>
+        <p:blipFill>
+          <a:blip r:embed="rId3"/>
+          <a:stretch>
+            <a:fillRect/>
+          </a:stretch>
+        </p:blipFill>
+        <p:spPr>
+          <a:xfrm>
+            <a:off x="1083734" y="2148954"/>
+            <a:ext cx="3210373" cy="1086002"/>
+          </a:xfrm>
+          <a:prstGeom prst="rect">
+            <a:avLst/>
+          </a:prstGeom>
+          <a:ln>
+            <a:solidFill>
+              <a:schemeClr val="bg2">
+                <a:lumMod val="90000"/>
+              </a:schemeClr>
+            </a:solidFill>
+          </a:ln>
+        </p:spPr>
+      </p:pic>
+      <p:pic>
+        <p:nvPicPr>
+          <p:cNvPr id="11" name="図 10">
+            <a:extLst>
+              <a:ext uri="{FF2B5EF4-FFF2-40B4-BE49-F238E27FC236}">
+                <a16:creationId xmlns:a16="http://schemas.microsoft.com/office/drawing/2014/main" id="{1857291D-E3CB-3D7E-C6A0-DD5567E06C35}"/>
+              </a:ext>
+            </a:extLst>
+          </p:cNvPr>
+          <p:cNvPicPr>
+            <a:picLocks noChangeAspect="1"/>
+          </p:cNvPicPr>
+          <p:nvPr/>
+        </p:nvPicPr>
+        <p:blipFill rotWithShape="1">
+          <a:blip r:embed="rId4"/>
+          <a:srcRect b="9695"/>
+          <a:stretch/>
+        </p:blipFill>
+        <p:spPr>
+          <a:xfrm>
+            <a:off x="5324693" y="2230818"/>
+            <a:ext cx="2505425" cy="387122"/>
+          </a:xfrm>
+          <a:prstGeom prst="rect">
+            <a:avLst/>
+          </a:prstGeom>
+          <a:ln>
+            <a:solidFill>
+              <a:schemeClr val="bg2">
+                <a:lumMod val="90000"/>
+              </a:schemeClr>
+            </a:solidFill>
+          </a:ln>
+        </p:spPr>
+      </p:pic>
+      <p:sp>
+        <p:nvSpPr>
+          <p:cNvPr id="14" name="正方形/長方形 13">
+            <a:extLst>
+              <a:ext uri="{FF2B5EF4-FFF2-40B4-BE49-F238E27FC236}">
+                <a16:creationId xmlns:a16="http://schemas.microsoft.com/office/drawing/2014/main" id="{4C31F5E4-C0E1-61F8-6BBA-D4C892A6F1F0}"/>
+              </a:ext>
+            </a:extLst>
+          </p:cNvPr>
+          <p:cNvSpPr/>
+          <p:nvPr/>
+        </p:nvSpPr>
+        <p:spPr>
+          <a:xfrm>
+            <a:off x="9316876" y="2631325"/>
+            <a:ext cx="1791390" cy="603631"/>
+          </a:xfrm>
+          <a:prstGeom prst="rect">
+            <a:avLst/>
+          </a:prstGeom>
+          <a:solidFill>
+            <a:schemeClr val="accent2">
+              <a:lumMod val="40000"/>
+              <a:lumOff val="60000"/>
+            </a:schemeClr>
+          </a:solidFill>
+          <a:ln>
+            <a:noFill/>
+          </a:ln>
+        </p:spPr>
+        <p:style>
+          <a:lnRef idx="2">
+            <a:schemeClr val="accent1">
+              <a:shade val="15000"/>
+            </a:schemeClr>
+          </a:lnRef>
+          <a:fillRef idx="1">
+            <a:schemeClr val="accent1"/>
+          </a:fillRef>
+          <a:effectRef idx="0">
+            <a:schemeClr val="accent1"/>
+          </a:effectRef>
+          <a:fontRef idx="minor">
+            <a:schemeClr val="lt1"/>
+          </a:fontRef>
+        </p:style>
+        <p:txBody>
+          <a:bodyPr rtlCol="0" anchor="t"/>
+          <a:lstStyle/>
+          <a:p>
+            <a:r>
+              <a:rPr lang="en-US" altLang="ja-JP" sz="1200" dirty="0">
+                <a:solidFill>
+                  <a:schemeClr val="tx1"/>
+                </a:solidFill>
+              </a:rPr>
+              <a:t>rm() : </a:t>
+            </a:r>
+            <a:r>
+              <a:rPr lang="ja-JP" altLang="en-US" sz="1200" dirty="0">
+                <a:solidFill>
+                  <a:schemeClr val="tx1"/>
+                </a:solidFill>
+              </a:rPr>
+              <a:t>変数を削除する</a:t>
+            </a:r>
+            <a:endParaRPr lang="en-US" altLang="ja-JP" sz="1200" dirty="0">
+              <a:solidFill>
+                <a:schemeClr val="tx1"/>
+              </a:solidFill>
+            </a:endParaRPr>
+          </a:p>
+        </p:txBody>
+      </p:sp>
+      <p:pic>
+        <p:nvPicPr>
+          <p:cNvPr id="16" name="図 15">
+            <a:extLst>
+              <a:ext uri="{FF2B5EF4-FFF2-40B4-BE49-F238E27FC236}">
+                <a16:creationId xmlns:a16="http://schemas.microsoft.com/office/drawing/2014/main" id="{3D6D86BC-CA19-3B3E-5029-14D4953D9A6E}"/>
+              </a:ext>
+            </a:extLst>
+          </p:cNvPr>
+          <p:cNvPicPr>
+            <a:picLocks noChangeAspect="1"/>
+          </p:cNvPicPr>
+          <p:nvPr/>
+        </p:nvPicPr>
+        <p:blipFill>
+          <a:blip r:embed="rId5"/>
+          <a:stretch>
+            <a:fillRect/>
+          </a:stretch>
+        </p:blipFill>
+        <p:spPr>
+          <a:xfrm>
+            <a:off x="9747443" y="2957248"/>
+            <a:ext cx="1190791" cy="190527"/>
+          </a:xfrm>
+          <a:prstGeom prst="rect">
+            <a:avLst/>
+          </a:prstGeom>
+          <a:ln>
+            <a:solidFill>
+              <a:schemeClr val="bg2">
+                <a:lumMod val="90000"/>
+              </a:schemeClr>
+            </a:solidFill>
+          </a:ln>
+        </p:spPr>
+      </p:pic>
+      <p:cxnSp>
+        <p:nvCxnSpPr>
+          <p:cNvPr id="17" name="直線矢印コネクタ 16">
+            <a:extLst>
+              <a:ext uri="{FF2B5EF4-FFF2-40B4-BE49-F238E27FC236}">
+                <a16:creationId xmlns:a16="http://schemas.microsoft.com/office/drawing/2014/main" id="{6D541F75-913D-7474-6BFF-6E96B16628EF}"/>
+              </a:ext>
+            </a:extLst>
+          </p:cNvPr>
+          <p:cNvCxnSpPr>
+            <a:cxnSpLocks/>
+          </p:cNvCxnSpPr>
+          <p:nvPr/>
+        </p:nvCxnSpPr>
+        <p:spPr>
+          <a:xfrm>
+            <a:off x="8737597" y="3052511"/>
+            <a:ext cx="469033" cy="0"/>
+          </a:xfrm>
+          <a:prstGeom prst="straightConnector1">
+            <a:avLst/>
+          </a:prstGeom>
+          <a:ln w="57150">
+            <a:solidFill>
+              <a:schemeClr val="accent4">
+                <a:lumMod val="75000"/>
+              </a:schemeClr>
+            </a:solidFill>
+            <a:tailEnd type="triangle"/>
+          </a:ln>
+        </p:spPr>
+        <p:style>
+          <a:lnRef idx="1">
+            <a:schemeClr val="accent1"/>
+          </a:lnRef>
+          <a:fillRef idx="0">
+            <a:schemeClr val="accent1"/>
+          </a:fillRef>
+          <a:effectRef idx="0">
+            <a:schemeClr val="accent1"/>
+          </a:effectRef>
+          <a:fontRef idx="minor">
+            <a:schemeClr val="tx1"/>
+          </a:fontRef>
+        </p:style>
+      </p:cxnSp>
+      <p:pic>
+        <p:nvPicPr>
+          <p:cNvPr id="20" name="図 19">
+            <a:extLst>
+              <a:ext uri="{FF2B5EF4-FFF2-40B4-BE49-F238E27FC236}">
+                <a16:creationId xmlns:a16="http://schemas.microsoft.com/office/drawing/2014/main" id="{A391D351-E79E-894F-62A7-3343A4C158ED}"/>
+              </a:ext>
+            </a:extLst>
+          </p:cNvPr>
+          <p:cNvPicPr>
+            <a:picLocks noChangeAspect="1"/>
+          </p:cNvPicPr>
+          <p:nvPr/>
+        </p:nvPicPr>
+        <p:blipFill>
+          <a:blip r:embed="rId6"/>
+          <a:stretch>
+            <a:fillRect/>
+          </a:stretch>
+        </p:blipFill>
+        <p:spPr>
+          <a:xfrm>
+            <a:off x="1454217" y="4498863"/>
+            <a:ext cx="1686160" cy="1247949"/>
+          </a:xfrm>
+          <a:prstGeom prst="rect">
+            <a:avLst/>
+          </a:prstGeom>
+          <a:ln>
+            <a:solidFill>
+              <a:schemeClr val="bg2">
+                <a:lumMod val="90000"/>
+              </a:schemeClr>
+            </a:solidFill>
+          </a:ln>
+        </p:spPr>
+      </p:pic>
+      <p:pic>
+        <p:nvPicPr>
+          <p:cNvPr id="22" name="図 21">
+            <a:extLst>
+              <a:ext uri="{FF2B5EF4-FFF2-40B4-BE49-F238E27FC236}">
+                <a16:creationId xmlns:a16="http://schemas.microsoft.com/office/drawing/2014/main" id="{8D081772-AAD7-8661-1B22-0C00862546E0}"/>
+              </a:ext>
+            </a:extLst>
+          </p:cNvPr>
+          <p:cNvPicPr>
+            <a:picLocks noChangeAspect="1"/>
+          </p:cNvPicPr>
+          <p:nvPr/>
+        </p:nvPicPr>
+        <p:blipFill>
+          <a:blip r:embed="rId7"/>
+          <a:stretch>
+            <a:fillRect/>
+          </a:stretch>
+        </p:blipFill>
+        <p:spPr>
+          <a:xfrm>
+            <a:off x="4294107" y="4896695"/>
+            <a:ext cx="1286054" cy="304843"/>
+          </a:xfrm>
+          <a:prstGeom prst="rect">
+            <a:avLst/>
+          </a:prstGeom>
+          <a:ln>
+            <a:solidFill>
+              <a:schemeClr val="bg2">
+                <a:lumMod val="90000"/>
+              </a:schemeClr>
+            </a:solidFill>
+          </a:ln>
+        </p:spPr>
+      </p:pic>
+      <p:cxnSp>
+        <p:nvCxnSpPr>
+          <p:cNvPr id="23" name="直線矢印コネクタ 22">
+            <a:extLst>
+              <a:ext uri="{FF2B5EF4-FFF2-40B4-BE49-F238E27FC236}">
+                <a16:creationId xmlns:a16="http://schemas.microsoft.com/office/drawing/2014/main" id="{BFBEE486-0B79-C8D2-29ED-A3E15F050972}"/>
+              </a:ext>
+            </a:extLst>
+          </p:cNvPr>
+          <p:cNvCxnSpPr>
+            <a:cxnSpLocks/>
+          </p:cNvCxnSpPr>
+          <p:nvPr/>
+        </p:nvCxnSpPr>
+        <p:spPr>
+          <a:xfrm>
+            <a:off x="3370775" y="5049117"/>
+            <a:ext cx="579279" cy="0"/>
+          </a:xfrm>
+          <a:prstGeom prst="straightConnector1">
+            <a:avLst/>
+          </a:prstGeom>
+          <a:ln w="57150">
+            <a:solidFill>
+              <a:schemeClr val="accent4">
+                <a:lumMod val="75000"/>
+              </a:schemeClr>
+            </a:solidFill>
+            <a:tailEnd type="triangle"/>
+          </a:ln>
+        </p:spPr>
+        <p:style>
+          <a:lnRef idx="1">
+            <a:schemeClr val="accent1"/>
+          </a:lnRef>
+          <a:fillRef idx="0">
+            <a:schemeClr val="accent1"/>
+          </a:fillRef>
+          <a:effectRef idx="0">
+            <a:schemeClr val="accent1"/>
+          </a:effectRef>
+          <a:fontRef idx="minor">
+            <a:schemeClr val="tx1"/>
+          </a:fontRef>
+        </p:style>
+      </p:cxnSp>
     </p:spTree>
     <p:extLst>
       <p:ext uri="{BB962C8B-B14F-4D97-AF65-F5344CB8AC3E}">
@@ -30613,7 +31463,7 @@
                 <a:latin typeface="メイリオ" panose="020B0604030504040204" pitchFamily="50" charset="-128"/>
                 <a:ea typeface="メイリオ" panose="020B0604030504040204" pitchFamily="50" charset="-128"/>
               </a:rPr>
-              <a:t>７章の問題点</a:t>
+              <a:t>７章の改善点</a:t>
             </a:r>
             <a:endParaRPr kumimoji="1" lang="en-US" altLang="ja-JP" sz="2000" dirty="0">
               <a:solidFill>
@@ -30634,17 +31484,97 @@
                 <a:latin typeface="メイリオ" panose="020B0604030504040204" pitchFamily="50" charset="-128"/>
                 <a:ea typeface="メイリオ" panose="020B0604030504040204" pitchFamily="50" charset="-128"/>
               </a:rPr>
-              <a:t>　・</a:t>
-            </a:r>
-            <a:r>
-              <a:rPr lang="en-US" altLang="ja-JP" dirty="0">
-                <a:solidFill>
-                  <a:schemeClr val="tx1"/>
-                </a:solidFill>
-                <a:latin typeface="メイリオ" panose="020B0604030504040204" pitchFamily="50" charset="-128"/>
-                <a:ea typeface="メイリオ" panose="020B0604030504040204" pitchFamily="50" charset="-128"/>
-              </a:rPr>
-              <a:t>symbol</a:t>
+              <a:t>　</a:t>
+            </a:r>
+            <a:r>
+              <a:rPr kumimoji="1" lang="ja-JP" altLang="en-US" dirty="0">
+                <a:solidFill>
+                  <a:schemeClr val="tx1"/>
+                </a:solidFill>
+                <a:latin typeface="メイリオ" panose="020B0604030504040204" pitchFamily="50" charset="-128"/>
+                <a:ea typeface="メイリオ" panose="020B0604030504040204" pitchFamily="50" charset="-128"/>
+              </a:rPr>
+              <a:t>・</a:t>
+            </a:r>
+            <a:r>
+              <a:rPr kumimoji="1" lang="en-US" altLang="ja-JP" dirty="0">
+                <a:solidFill>
+                  <a:schemeClr val="tx1"/>
+                </a:solidFill>
+                <a:latin typeface="メイリオ" panose="020B0604030504040204" pitchFamily="50" charset="-128"/>
+                <a:ea typeface="メイリオ" panose="020B0604030504040204" pitchFamily="50" charset="-128"/>
+              </a:rPr>
+              <a:t>prize</a:t>
+            </a:r>
+            <a:r>
+              <a:rPr kumimoji="1" lang="ja-JP" altLang="en-US" dirty="0">
+                <a:solidFill>
+                  <a:schemeClr val="tx1"/>
+                </a:solidFill>
+                <a:latin typeface="メイリオ" panose="020B0604030504040204" pitchFamily="50" charset="-128"/>
+                <a:ea typeface="メイリオ" panose="020B0604030504040204" pitchFamily="50" charset="-128"/>
+              </a:rPr>
+              <a:t>に</a:t>
+            </a:r>
+            <a:r>
+              <a:rPr kumimoji="1" lang="en-US" altLang="ja-JP" dirty="0">
+                <a:solidFill>
+                  <a:schemeClr val="tx1"/>
+                </a:solidFill>
+                <a:latin typeface="メイリオ" panose="020B0604030504040204" pitchFamily="50" charset="-128"/>
+                <a:ea typeface="メイリオ" panose="020B0604030504040204" pitchFamily="50" charset="-128"/>
+              </a:rPr>
+              <a:t>symbols</a:t>
+            </a:r>
+            <a:r>
+              <a:rPr kumimoji="1" lang="ja-JP" altLang="en-US" dirty="0">
+                <a:solidFill>
+                  <a:schemeClr val="tx1"/>
+                </a:solidFill>
+                <a:latin typeface="メイリオ" panose="020B0604030504040204" pitchFamily="50" charset="-128"/>
+                <a:ea typeface="メイリオ" panose="020B0604030504040204" pitchFamily="50" charset="-128"/>
+              </a:rPr>
+              <a:t>を属性として追加して、</a:t>
+            </a:r>
+            <a:r>
+              <a:rPr kumimoji="1" lang="en-US" altLang="ja-JP" dirty="0">
+                <a:solidFill>
+                  <a:schemeClr val="tx1"/>
+                </a:solidFill>
+                <a:latin typeface="メイリオ" panose="020B0604030504040204" pitchFamily="50" charset="-128"/>
+                <a:ea typeface="メイリオ" panose="020B0604030504040204" pitchFamily="50" charset="-128"/>
+              </a:rPr>
+              <a:t>symbols</a:t>
+            </a:r>
+            <a:r>
+              <a:rPr kumimoji="1" lang="ja-JP" altLang="en-US" dirty="0">
+                <a:solidFill>
+                  <a:schemeClr val="tx1"/>
+                </a:solidFill>
+                <a:latin typeface="メイリオ" panose="020B0604030504040204" pitchFamily="50" charset="-128"/>
+                <a:ea typeface="メイリオ" panose="020B0604030504040204" pitchFamily="50" charset="-128"/>
+              </a:rPr>
+              <a:t>も</a:t>
+            </a:r>
+            <a:r>
+              <a:rPr kumimoji="1" lang="en-US" altLang="ja-JP" dirty="0">
+                <a:solidFill>
+                  <a:schemeClr val="tx1"/>
+                </a:solidFill>
+                <a:latin typeface="メイリオ" panose="020B0604030504040204" pitchFamily="50" charset="-128"/>
+                <a:ea typeface="メイリオ" panose="020B0604030504040204" pitchFamily="50" charset="-128"/>
+              </a:rPr>
+              <a:t>prize</a:t>
+            </a:r>
+            <a:r>
+              <a:rPr kumimoji="1" lang="ja-JP" altLang="en-US" dirty="0">
+                <a:solidFill>
+                  <a:schemeClr val="tx1"/>
+                </a:solidFill>
+                <a:latin typeface="メイリオ" panose="020B0604030504040204" pitchFamily="50" charset="-128"/>
+                <a:ea typeface="メイリオ" panose="020B0604030504040204" pitchFamily="50" charset="-128"/>
+              </a:rPr>
+              <a:t>も保存できるようにする</a:t>
             </a:r>
             <a:r>
               <a:rPr lang="ja-JP" altLang="en-US" dirty="0">
@@ -30654,7 +31584,7 @@
                 <a:latin typeface="メイリオ" panose="020B0604030504040204" pitchFamily="50" charset="-128"/>
                 <a:ea typeface="メイリオ" panose="020B0604030504040204" pitchFamily="50" charset="-128"/>
               </a:rPr>
-              <a:t>の出力が文字列のままになっている</a:t>
+              <a:t>　</a:t>
             </a:r>
             <a:endParaRPr lang="en-US" altLang="ja-JP" dirty="0">
               <a:solidFill>
@@ -30674,8 +31604,17 @@
             </a:endParaRPr>
           </a:p>
           <a:p>
-            <a:r>
-              <a:rPr kumimoji="1" lang="ja-JP" altLang="en-US" dirty="0">
+            <a:endParaRPr lang="en-US" altLang="ja-JP" dirty="0">
+              <a:solidFill>
+                <a:schemeClr val="tx1"/>
+              </a:solidFill>
+              <a:latin typeface="メイリオ" panose="020B0604030504040204" pitchFamily="50" charset="-128"/>
+              <a:ea typeface="メイリオ" panose="020B0604030504040204" pitchFamily="50" charset="-128"/>
+            </a:endParaRPr>
+          </a:p>
+          <a:p>
+            <a:r>
+              <a:rPr lang="ja-JP" altLang="en-US" dirty="0">
                 <a:solidFill>
                   <a:schemeClr val="tx1"/>
                 </a:solidFill>
@@ -30685,46 +31624,62 @@
               <a:t>　・</a:t>
             </a:r>
             <a:r>
-              <a:rPr kumimoji="1" lang="en-US" altLang="ja-JP" dirty="0">
-                <a:solidFill>
-                  <a:schemeClr val="tx1"/>
-                </a:solidFill>
-                <a:latin typeface="メイリオ" panose="020B0604030504040204" pitchFamily="50" charset="-128"/>
-                <a:ea typeface="メイリオ" panose="020B0604030504040204" pitchFamily="50" charset="-128"/>
-              </a:rPr>
-              <a:t>play()</a:t>
-            </a:r>
-            <a:r>
-              <a:rPr kumimoji="1" lang="ja-JP" altLang="en-US" dirty="0">
-                <a:solidFill>
-                  <a:schemeClr val="tx1"/>
-                </a:solidFill>
-                <a:latin typeface="メイリオ" panose="020B0604030504040204" pitchFamily="50" charset="-128"/>
-                <a:ea typeface="メイリオ" panose="020B0604030504040204" pitchFamily="50" charset="-128"/>
-              </a:rPr>
-              <a:t>の中で</a:t>
-            </a:r>
-            <a:r>
-              <a:rPr kumimoji="1" lang="en-US" altLang="ja-JP" dirty="0">
-                <a:solidFill>
-                  <a:schemeClr val="tx1"/>
-                </a:solidFill>
-                <a:latin typeface="メイリオ" panose="020B0604030504040204" pitchFamily="50" charset="-128"/>
-                <a:ea typeface="メイリオ" panose="020B0604030504040204" pitchFamily="50" charset="-128"/>
-              </a:rPr>
-              <a:t>print</a:t>
-            </a:r>
-            <a:r>
-              <a:rPr kumimoji="1" lang="ja-JP" altLang="en-US" dirty="0">
-                <a:solidFill>
-                  <a:schemeClr val="tx1"/>
-                </a:solidFill>
-                <a:latin typeface="メイリオ" panose="020B0604030504040204" pitchFamily="50" charset="-128"/>
-                <a:ea typeface="メイリオ" panose="020B0604030504040204" pitchFamily="50" charset="-128"/>
-              </a:rPr>
-              <a:t>を呼び出しているため賞金しか保存されない</a:t>
-            </a:r>
-            <a:endParaRPr kumimoji="1" lang="en-US" altLang="ja-JP" dirty="0">
+              <a:rPr lang="en-US" altLang="ja-JP" dirty="0">
+                <a:solidFill>
+                  <a:schemeClr val="tx1"/>
+                </a:solidFill>
+                <a:latin typeface="メイリオ" panose="020B0604030504040204" pitchFamily="50" charset="-128"/>
+                <a:ea typeface="メイリオ" panose="020B0604030504040204" pitchFamily="50" charset="-128"/>
+              </a:rPr>
+              <a:t>symbol</a:t>
+            </a:r>
+            <a:r>
+              <a:rPr lang="ja-JP" altLang="en-US" dirty="0">
+                <a:solidFill>
+                  <a:schemeClr val="tx1"/>
+                </a:solidFill>
+                <a:latin typeface="メイリオ" panose="020B0604030504040204" pitchFamily="50" charset="-128"/>
+                <a:ea typeface="メイリオ" panose="020B0604030504040204" pitchFamily="50" charset="-128"/>
+              </a:rPr>
+              <a:t>の出力をきれいにする</a:t>
+            </a:r>
+            <a:endParaRPr lang="en-US" altLang="ja-JP" dirty="0">
+              <a:solidFill>
+                <a:schemeClr val="tx1"/>
+              </a:solidFill>
+              <a:latin typeface="メイリオ" panose="020B0604030504040204" pitchFamily="50" charset="-128"/>
+              <a:ea typeface="メイリオ" panose="020B0604030504040204" pitchFamily="50" charset="-128"/>
+            </a:endParaRPr>
+          </a:p>
+          <a:p>
+            <a:endParaRPr lang="en-US" altLang="ja-JP" dirty="0">
+              <a:solidFill>
+                <a:schemeClr val="tx1"/>
+              </a:solidFill>
+              <a:latin typeface="メイリオ" panose="020B0604030504040204" pitchFamily="50" charset="-128"/>
+              <a:ea typeface="メイリオ" panose="020B0604030504040204" pitchFamily="50" charset="-128"/>
+            </a:endParaRPr>
+          </a:p>
+          <a:p>
+            <a:endParaRPr lang="en-US" altLang="ja-JP" dirty="0">
+              <a:solidFill>
+                <a:schemeClr val="tx1"/>
+              </a:solidFill>
+              <a:latin typeface="メイリオ" panose="020B0604030504040204" pitchFamily="50" charset="-128"/>
+              <a:ea typeface="メイリオ" panose="020B0604030504040204" pitchFamily="50" charset="-128"/>
+            </a:endParaRPr>
+          </a:p>
+          <a:p>
+            <a:endParaRPr lang="en-US" altLang="ja-JP" dirty="0">
+              <a:solidFill>
+                <a:schemeClr val="tx1"/>
+              </a:solidFill>
+              <a:latin typeface="メイリオ" panose="020B0604030504040204" pitchFamily="50" charset="-128"/>
+              <a:ea typeface="メイリオ" panose="020B0604030504040204" pitchFamily="50" charset="-128"/>
+            </a:endParaRPr>
+          </a:p>
+          <a:p>
+            <a:endParaRPr lang="en-US" altLang="ja-JP" dirty="0">
               <a:solidFill>
                 <a:schemeClr val="tx1"/>
               </a:solidFill>
@@ -30777,11 +31732,58 @@
             </a:endParaRPr>
           </a:p>
           <a:p>
-            <a:endParaRPr kumimoji="1" lang="en-US" altLang="ja-JP" sz="1800" dirty="0">
+            <a:r>
+              <a:rPr lang="ja-JP" altLang="en-US" dirty="0">
+                <a:solidFill>
+                  <a:schemeClr val="tx1"/>
+                </a:solidFill>
+                <a:latin typeface="メイリオ" panose="020B0604030504040204" pitchFamily="50" charset="-128"/>
+                <a:ea typeface="メイリオ" panose="020B0604030504040204" pitchFamily="50" charset="-128"/>
+              </a:rPr>
+              <a:t>　・きれいに出力するための関数を毎回呼び出すのは手間なので、</a:t>
+            </a:r>
+            <a:r>
+              <a:rPr lang="en-US" altLang="ja-JP" dirty="0">
+                <a:solidFill>
+                  <a:schemeClr val="tx1"/>
+                </a:solidFill>
+                <a:latin typeface="メイリオ" panose="020B0604030504040204" pitchFamily="50" charset="-128"/>
+                <a:ea typeface="メイリオ" panose="020B0604030504040204" pitchFamily="50" charset="-128"/>
+              </a:rPr>
+              <a:t>print()</a:t>
+            </a:r>
+            <a:r>
+              <a:rPr lang="ja-JP" altLang="en-US" dirty="0">
+                <a:solidFill>
+                  <a:schemeClr val="tx1"/>
+                </a:solidFill>
+                <a:latin typeface="メイリオ" panose="020B0604030504040204" pitchFamily="50" charset="-128"/>
+                <a:ea typeface="メイリオ" panose="020B0604030504040204" pitchFamily="50" charset="-128"/>
+              </a:rPr>
+              <a:t>をしたときに毎回きれいに</a:t>
+            </a:r>
+            <a:endParaRPr lang="en-US" altLang="ja-JP" dirty="0">
               <a:solidFill>
-                <a:schemeClr val="accent4">
-                  <a:lumMod val="75000"/>
-                </a:schemeClr>
+                <a:schemeClr val="tx1"/>
+              </a:solidFill>
+              <a:latin typeface="メイリオ" panose="020B0604030504040204" pitchFamily="50" charset="-128"/>
+              <a:ea typeface="メイリオ" panose="020B0604030504040204" pitchFamily="50" charset="-128"/>
+            </a:endParaRPr>
+          </a:p>
+          <a:p>
+            <a:r>
+              <a:rPr lang="ja-JP" altLang="en-US" dirty="0">
+                <a:solidFill>
+                  <a:schemeClr val="tx1"/>
+                </a:solidFill>
+                <a:latin typeface="メイリオ" panose="020B0604030504040204" pitchFamily="50" charset="-128"/>
+                <a:ea typeface="メイリオ" panose="020B0604030504040204" pitchFamily="50" charset="-128"/>
+              </a:rPr>
+              <a:t>　　表示できるようにしたい</a:t>
+            </a:r>
+            <a:endParaRPr kumimoji="1" lang="en-US" altLang="ja-JP" dirty="0">
+              <a:solidFill>
+                <a:schemeClr val="tx1"/>
               </a:solidFill>
               <a:latin typeface="メイリオ" panose="020B0604030504040204" pitchFamily="50" charset="-128"/>
               <a:ea typeface="メイリオ" panose="020B0604030504040204" pitchFamily="50" charset="-128"/>
@@ -30798,80 +31800,6 @@
           </a:p>
         </p:txBody>
       </p:sp>
-      <p:pic>
-        <p:nvPicPr>
-          <p:cNvPr id="11" name="図 10">
-            <a:extLst>
-              <a:ext uri="{FF2B5EF4-FFF2-40B4-BE49-F238E27FC236}">
-                <a16:creationId xmlns:a16="http://schemas.microsoft.com/office/drawing/2014/main" id="{CA97A842-D302-F886-A16D-C10AA16B1B5A}"/>
-              </a:ext>
-            </a:extLst>
-          </p:cNvPr>
-          <p:cNvPicPr>
-            <a:picLocks noChangeAspect="1"/>
-          </p:cNvPicPr>
-          <p:nvPr/>
-        </p:nvPicPr>
-        <p:blipFill>
-          <a:blip r:embed="rId2"/>
-          <a:stretch>
-            <a:fillRect/>
-          </a:stretch>
-        </p:blipFill>
-        <p:spPr>
-          <a:xfrm>
-            <a:off x="6008174" y="1438570"/>
-            <a:ext cx="1228896" cy="466790"/>
-          </a:xfrm>
-          <a:prstGeom prst="rect">
-            <a:avLst/>
-          </a:prstGeom>
-          <a:ln>
-            <a:solidFill>
-              <a:schemeClr val="bg2">
-                <a:lumMod val="90000"/>
-              </a:schemeClr>
-            </a:solidFill>
-          </a:ln>
-        </p:spPr>
-      </p:pic>
-      <p:pic>
-        <p:nvPicPr>
-          <p:cNvPr id="14" name="図 13">
-            <a:extLst>
-              <a:ext uri="{FF2B5EF4-FFF2-40B4-BE49-F238E27FC236}">
-                <a16:creationId xmlns:a16="http://schemas.microsoft.com/office/drawing/2014/main" id="{342DD4E0-15BD-13B2-F9AB-331C495C3C4A}"/>
-              </a:ext>
-            </a:extLst>
-          </p:cNvPr>
-          <p:cNvPicPr>
-            <a:picLocks noChangeAspect="1"/>
-          </p:cNvPicPr>
-          <p:nvPr/>
-        </p:nvPicPr>
-        <p:blipFill>
-          <a:blip r:embed="rId3"/>
-          <a:stretch>
-            <a:fillRect/>
-          </a:stretch>
-        </p:blipFill>
-        <p:spPr>
-          <a:xfrm>
-            <a:off x="8102788" y="1905360"/>
-            <a:ext cx="1771897" cy="609685"/>
-          </a:xfrm>
-          <a:prstGeom prst="rect">
-            <a:avLst/>
-          </a:prstGeom>
-          <a:ln>
-            <a:solidFill>
-              <a:schemeClr val="bg2">
-                <a:lumMod val="90000"/>
-              </a:schemeClr>
-            </a:solidFill>
-          </a:ln>
-        </p:spPr>
-      </p:pic>
       <p:sp>
         <p:nvSpPr>
           <p:cNvPr id="3" name="正方形/長方形 2">
@@ -30886,7 +31814,7 @@
         </p:nvSpPr>
         <p:spPr>
           <a:xfrm>
-            <a:off x="1310909" y="3495216"/>
+            <a:off x="1354785" y="5362959"/>
             <a:ext cx="826201" cy="324203"/>
           </a:xfrm>
           <a:prstGeom prst="rect">
@@ -30967,7 +31895,7 @@
         </p:nvSpPr>
         <p:spPr>
           <a:xfrm>
-            <a:off x="6283566" y="2841980"/>
+            <a:off x="6327442" y="4709723"/>
             <a:ext cx="1907007" cy="324203"/>
           </a:xfrm>
           <a:prstGeom prst="rect">
@@ -31061,7 +31989,7 @@
         </p:nvSpPr>
         <p:spPr>
           <a:xfrm>
-            <a:off x="6283566" y="3266898"/>
+            <a:off x="6327442" y="5134641"/>
             <a:ext cx="1907007" cy="324203"/>
           </a:xfrm>
           <a:prstGeom prst="rect">
@@ -31157,7 +32085,7 @@
         </p:nvCxnSpPr>
         <p:spPr>
           <a:xfrm flipV="1">
-            <a:off x="2261740" y="3020116"/>
+            <a:off x="2305616" y="4887859"/>
             <a:ext cx="3930830" cy="637202"/>
           </a:xfrm>
           <a:prstGeom prst="bentConnector3">
@@ -31205,7 +32133,7 @@
         </p:nvCxnSpPr>
         <p:spPr>
           <a:xfrm flipV="1">
-            <a:off x="2219595" y="3429000"/>
+            <a:off x="2263471" y="5296743"/>
             <a:ext cx="3972975" cy="228318"/>
           </a:xfrm>
           <a:prstGeom prst="bentConnector3">
@@ -31253,7 +32181,7 @@
         </p:nvCxnSpPr>
         <p:spPr>
           <a:xfrm>
-            <a:off x="2272892" y="3657317"/>
+            <a:off x="2316768" y="5525060"/>
             <a:ext cx="3955418" cy="225817"/>
           </a:xfrm>
           <a:prstGeom prst="bentConnector3">
@@ -31299,7 +32227,7 @@
         </p:nvSpPr>
         <p:spPr>
           <a:xfrm>
-            <a:off x="2507811" y="4110249"/>
+            <a:off x="2551687" y="5977992"/>
             <a:ext cx="5893806" cy="466790"/>
           </a:xfrm>
           <a:prstGeom prst="rect">
@@ -31359,7 +32287,7 @@
         </p:nvCxnSpPr>
         <p:spPr>
           <a:xfrm>
-            <a:off x="2217636" y="3657316"/>
+            <a:off x="2261512" y="5525059"/>
             <a:ext cx="3973526" cy="672850"/>
           </a:xfrm>
           <a:prstGeom prst="bentConnector3">
@@ -31405,7 +32333,7 @@
         </p:nvSpPr>
         <p:spPr>
           <a:xfrm>
-            <a:off x="6283566" y="3691816"/>
+            <a:off x="6327442" y="5559559"/>
             <a:ext cx="1907007" cy="324203"/>
           </a:xfrm>
           <a:prstGeom prst="rect">
@@ -31499,7 +32427,7 @@
         </p:nvSpPr>
         <p:spPr>
           <a:xfrm>
-            <a:off x="6283565" y="4191086"/>
+            <a:off x="6327441" y="6058829"/>
             <a:ext cx="1907007" cy="324203"/>
           </a:xfrm>
           <a:prstGeom prst="rect">
@@ -31593,7 +32521,7 @@
         </p:nvSpPr>
         <p:spPr>
           <a:xfrm>
-            <a:off x="2730285" y="2937442"/>
+            <a:off x="2774161" y="4805185"/>
             <a:ext cx="2710848" cy="249851"/>
           </a:xfrm>
           <a:prstGeom prst="snip1Rect">
@@ -31707,7 +32635,7 @@
         </p:nvSpPr>
         <p:spPr>
           <a:xfrm>
-            <a:off x="2730283" y="3360350"/>
+            <a:off x="2774159" y="5228093"/>
             <a:ext cx="2710850" cy="249851"/>
           </a:xfrm>
           <a:prstGeom prst="snip1Rect">
@@ -31821,7 +32749,7 @@
         </p:nvSpPr>
         <p:spPr>
           <a:xfrm>
-            <a:off x="2730283" y="3751547"/>
+            <a:off x="2774159" y="5619290"/>
             <a:ext cx="2710850" cy="249851"/>
           </a:xfrm>
           <a:prstGeom prst="snip1Rect">
@@ -31935,7 +32863,7 @@
         </p:nvSpPr>
         <p:spPr>
           <a:xfrm>
-            <a:off x="2730283" y="4191086"/>
+            <a:off x="2774159" y="6058829"/>
             <a:ext cx="2710850" cy="249851"/>
           </a:xfrm>
           <a:prstGeom prst="snip1Rect">
@@ -32035,6 +32963,688 @@
           </a:p>
         </p:txBody>
       </p:sp>
+      <p:cxnSp>
+        <p:nvCxnSpPr>
+          <p:cNvPr id="9" name="直線矢印コネクタ 8">
+            <a:extLst>
+              <a:ext uri="{FF2B5EF4-FFF2-40B4-BE49-F238E27FC236}">
+                <a16:creationId xmlns:a16="http://schemas.microsoft.com/office/drawing/2014/main" id="{B48C651A-D08F-D1A2-D203-28C27758DA49}"/>
+              </a:ext>
+            </a:extLst>
+          </p:cNvPr>
+          <p:cNvCxnSpPr>
+            <a:cxnSpLocks/>
+          </p:cNvCxnSpPr>
+          <p:nvPr/>
+        </p:nvCxnSpPr>
+        <p:spPr>
+          <a:xfrm flipH="1">
+            <a:off x="7681869" y="6197909"/>
+            <a:ext cx="896407" cy="0"/>
+          </a:xfrm>
+          <a:prstGeom prst="straightConnector1">
+            <a:avLst/>
+          </a:prstGeom>
+          <a:ln w="76200">
+            <a:solidFill>
+              <a:schemeClr val="accent4">
+                <a:lumMod val="75000"/>
+              </a:schemeClr>
+            </a:solidFill>
+            <a:tailEnd type="triangle"/>
+          </a:ln>
+        </p:spPr>
+        <p:style>
+          <a:lnRef idx="1">
+            <a:schemeClr val="accent1"/>
+          </a:lnRef>
+          <a:fillRef idx="0">
+            <a:schemeClr val="accent1"/>
+          </a:fillRef>
+          <a:effectRef idx="0">
+            <a:schemeClr val="accent1"/>
+          </a:effectRef>
+          <a:fontRef idx="minor">
+            <a:schemeClr val="tx1"/>
+          </a:fontRef>
+        </p:style>
+      </p:cxnSp>
+      <p:sp>
+        <p:nvSpPr>
+          <p:cNvPr id="16" name="正方形/長方形 15">
+            <a:extLst>
+              <a:ext uri="{FF2B5EF4-FFF2-40B4-BE49-F238E27FC236}">
+                <a16:creationId xmlns:a16="http://schemas.microsoft.com/office/drawing/2014/main" id="{232BA9EA-EF42-29F0-07D8-F3F5D641C47E}"/>
+              </a:ext>
+            </a:extLst>
+          </p:cNvPr>
+          <p:cNvSpPr/>
+          <p:nvPr/>
+        </p:nvSpPr>
+        <p:spPr>
+          <a:xfrm>
+            <a:off x="8608195" y="6183754"/>
+            <a:ext cx="1107996" cy="124917"/>
+          </a:xfrm>
+          <a:prstGeom prst="rect">
+            <a:avLst/>
+          </a:prstGeom>
+          <a:solidFill>
+            <a:schemeClr val="accent4">
+              <a:lumMod val="60000"/>
+              <a:lumOff val="40000"/>
+            </a:schemeClr>
+          </a:solidFill>
+          <a:ln>
+            <a:noFill/>
+          </a:ln>
+        </p:spPr>
+        <p:style>
+          <a:lnRef idx="2">
+            <a:schemeClr val="accent1">
+              <a:shade val="15000"/>
+            </a:schemeClr>
+          </a:lnRef>
+          <a:fillRef idx="1">
+            <a:schemeClr val="accent1"/>
+          </a:fillRef>
+          <a:effectRef idx="0">
+            <a:schemeClr val="accent1"/>
+          </a:effectRef>
+          <a:fontRef idx="minor">
+            <a:schemeClr val="lt1"/>
+          </a:fontRef>
+        </p:style>
+        <p:txBody>
+          <a:bodyPr rtlCol="0" anchor="ctr"/>
+          <a:lstStyle/>
+          <a:p>
+            <a:pPr algn="ctr"/>
+            <a:endParaRPr kumimoji="1" lang="ja-JP" altLang="en-US"/>
+          </a:p>
+        </p:txBody>
+      </p:sp>
+      <p:sp>
+        <p:nvSpPr>
+          <p:cNvPr id="15" name="テキスト ボックス 14">
+            <a:extLst>
+              <a:ext uri="{FF2B5EF4-FFF2-40B4-BE49-F238E27FC236}">
+                <a16:creationId xmlns:a16="http://schemas.microsoft.com/office/drawing/2014/main" id="{1CD162DD-84AC-1130-C80B-426132637F0D}"/>
+              </a:ext>
+            </a:extLst>
+          </p:cNvPr>
+          <p:cNvSpPr txBox="1"/>
+          <p:nvPr/>
+        </p:nvSpPr>
+        <p:spPr>
+          <a:xfrm>
+            <a:off x="8618585" y="5992666"/>
+            <a:ext cx="1107996" cy="369332"/>
+          </a:xfrm>
+          <a:prstGeom prst="rect">
+            <a:avLst/>
+          </a:prstGeom>
+          <a:noFill/>
+        </p:spPr>
+        <p:txBody>
+          <a:bodyPr wrap="none" rtlCol="0">
+            <a:spAutoFit/>
+          </a:bodyPr>
+          <a:lstStyle/>
+          <a:p>
+            <a:r>
+              <a:rPr kumimoji="1" lang="ja-JP" altLang="en-US" b="1" dirty="0">
+                <a:solidFill>
+                  <a:schemeClr val="accent4">
+                    <a:lumMod val="75000"/>
+                  </a:schemeClr>
+                </a:solidFill>
+              </a:rPr>
+              <a:t>追加する</a:t>
+            </a:r>
+          </a:p>
+        </p:txBody>
+      </p:sp>
+      <p:sp>
+        <p:nvSpPr>
+          <p:cNvPr id="17" name="楕円 16">
+            <a:extLst>
+              <a:ext uri="{FF2B5EF4-FFF2-40B4-BE49-F238E27FC236}">
+                <a16:creationId xmlns:a16="http://schemas.microsoft.com/office/drawing/2014/main" id="{0DC0FCE4-F2DD-3488-04C0-734537323047}"/>
+              </a:ext>
+            </a:extLst>
+          </p:cNvPr>
+          <p:cNvSpPr/>
+          <p:nvPr/>
+        </p:nvSpPr>
+        <p:spPr>
+          <a:xfrm>
+            <a:off x="1024756" y="1439856"/>
+            <a:ext cx="206220" cy="232109"/>
+          </a:xfrm>
+          <a:prstGeom prst="ellipse">
+            <a:avLst/>
+          </a:prstGeom>
+          <a:solidFill>
+            <a:schemeClr val="accent4">
+              <a:lumMod val="75000"/>
+            </a:schemeClr>
+          </a:solidFill>
+          <a:ln>
+            <a:noFill/>
+          </a:ln>
+        </p:spPr>
+        <p:style>
+          <a:lnRef idx="2">
+            <a:schemeClr val="accent1">
+              <a:shade val="15000"/>
+            </a:schemeClr>
+          </a:lnRef>
+          <a:fillRef idx="1">
+            <a:schemeClr val="accent1"/>
+          </a:fillRef>
+          <a:effectRef idx="0">
+            <a:schemeClr val="accent1"/>
+          </a:effectRef>
+          <a:fontRef idx="minor">
+            <a:schemeClr val="lt1"/>
+          </a:fontRef>
+        </p:style>
+        <p:txBody>
+          <a:bodyPr tIns="90000" rtlCol="0" anchor="ctr"/>
+          <a:lstStyle/>
+          <a:p>
+            <a:pPr algn="ctr"/>
+            <a:r>
+              <a:rPr kumimoji="1" lang="ja-JP" altLang="en-US" dirty="0">
+                <a:latin typeface="メイリオ" panose="020B0604030504040204" pitchFamily="50" charset="-128"/>
+                <a:ea typeface="メイリオ" panose="020B0604030504040204" pitchFamily="50" charset="-128"/>
+              </a:rPr>
+              <a:t>１</a:t>
+            </a:r>
+          </a:p>
+        </p:txBody>
+      </p:sp>
+      <p:sp>
+        <p:nvSpPr>
+          <p:cNvPr id="18" name="楕円 17">
+            <a:extLst>
+              <a:ext uri="{FF2B5EF4-FFF2-40B4-BE49-F238E27FC236}">
+                <a16:creationId xmlns:a16="http://schemas.microsoft.com/office/drawing/2014/main" id="{09EFB69E-C273-6784-D975-4CC65C4371DA}"/>
+              </a:ext>
+            </a:extLst>
+          </p:cNvPr>
+          <p:cNvSpPr/>
+          <p:nvPr/>
+        </p:nvSpPr>
+        <p:spPr>
+          <a:xfrm>
+            <a:off x="1060883" y="2329787"/>
+            <a:ext cx="206220" cy="232109"/>
+          </a:xfrm>
+          <a:prstGeom prst="ellipse">
+            <a:avLst/>
+          </a:prstGeom>
+          <a:solidFill>
+            <a:schemeClr val="accent4">
+              <a:lumMod val="75000"/>
+            </a:schemeClr>
+          </a:solidFill>
+          <a:ln>
+            <a:noFill/>
+          </a:ln>
+        </p:spPr>
+        <p:style>
+          <a:lnRef idx="2">
+            <a:schemeClr val="accent1">
+              <a:shade val="15000"/>
+            </a:schemeClr>
+          </a:lnRef>
+          <a:fillRef idx="1">
+            <a:schemeClr val="accent1"/>
+          </a:fillRef>
+          <a:effectRef idx="0">
+            <a:schemeClr val="accent1"/>
+          </a:effectRef>
+          <a:fontRef idx="minor">
+            <a:schemeClr val="lt1"/>
+          </a:fontRef>
+        </p:style>
+        <p:txBody>
+          <a:bodyPr tIns="90000" rtlCol="0" anchor="ctr"/>
+          <a:lstStyle/>
+          <a:p>
+            <a:pPr algn="ctr"/>
+            <a:r>
+              <a:rPr lang="en-US" altLang="ja-JP" dirty="0">
+                <a:latin typeface="メイリオ" panose="020B0604030504040204" pitchFamily="50" charset="-128"/>
+                <a:ea typeface="メイリオ" panose="020B0604030504040204" pitchFamily="50" charset="-128"/>
+              </a:rPr>
+              <a:t>2</a:t>
+            </a:r>
+            <a:endParaRPr kumimoji="1" lang="ja-JP" altLang="en-US" dirty="0">
+              <a:latin typeface="メイリオ" panose="020B0604030504040204" pitchFamily="50" charset="-128"/>
+              <a:ea typeface="メイリオ" panose="020B0604030504040204" pitchFamily="50" charset="-128"/>
+            </a:endParaRPr>
+          </a:p>
+        </p:txBody>
+      </p:sp>
+      <p:sp>
+        <p:nvSpPr>
+          <p:cNvPr id="19" name="楕円 18">
+            <a:extLst>
+              <a:ext uri="{FF2B5EF4-FFF2-40B4-BE49-F238E27FC236}">
+                <a16:creationId xmlns:a16="http://schemas.microsoft.com/office/drawing/2014/main" id="{FD8AFE17-8B86-7CFF-3757-3B4A48AF4143}"/>
+              </a:ext>
+            </a:extLst>
+          </p:cNvPr>
+          <p:cNvSpPr/>
+          <p:nvPr/>
+        </p:nvSpPr>
+        <p:spPr>
+          <a:xfrm>
+            <a:off x="9746110" y="6067699"/>
+            <a:ext cx="206220" cy="232109"/>
+          </a:xfrm>
+          <a:prstGeom prst="ellipse">
+            <a:avLst/>
+          </a:prstGeom>
+          <a:solidFill>
+            <a:schemeClr val="accent4">
+              <a:lumMod val="75000"/>
+            </a:schemeClr>
+          </a:solidFill>
+          <a:ln>
+            <a:noFill/>
+          </a:ln>
+        </p:spPr>
+        <p:style>
+          <a:lnRef idx="2">
+            <a:schemeClr val="accent1">
+              <a:shade val="15000"/>
+            </a:schemeClr>
+          </a:lnRef>
+          <a:fillRef idx="1">
+            <a:schemeClr val="accent1"/>
+          </a:fillRef>
+          <a:effectRef idx="0">
+            <a:schemeClr val="accent1"/>
+          </a:effectRef>
+          <a:fontRef idx="minor">
+            <a:schemeClr val="lt1"/>
+          </a:fontRef>
+        </p:style>
+        <p:txBody>
+          <a:bodyPr tIns="90000" rtlCol="0" anchor="ctr"/>
+          <a:lstStyle/>
+          <a:p>
+            <a:pPr algn="ctr"/>
+            <a:r>
+              <a:rPr kumimoji="1" lang="ja-JP" altLang="en-US" dirty="0">
+                <a:latin typeface="メイリオ" panose="020B0604030504040204" pitchFamily="50" charset="-128"/>
+                <a:ea typeface="メイリオ" panose="020B0604030504040204" pitchFamily="50" charset="-128"/>
+              </a:rPr>
+              <a:t>３</a:t>
+            </a:r>
+          </a:p>
+        </p:txBody>
+      </p:sp>
+      <p:sp>
+        <p:nvSpPr>
+          <p:cNvPr id="29" name="正方形/長方形 28">
+            <a:extLst>
+              <a:ext uri="{FF2B5EF4-FFF2-40B4-BE49-F238E27FC236}">
+                <a16:creationId xmlns:a16="http://schemas.microsoft.com/office/drawing/2014/main" id="{991463B4-0289-5C06-FAF1-92E89EC07275}"/>
+              </a:ext>
+            </a:extLst>
+          </p:cNvPr>
+          <p:cNvSpPr/>
+          <p:nvPr/>
+        </p:nvSpPr>
+        <p:spPr>
+          <a:xfrm>
+            <a:off x="6716393" y="1796885"/>
+            <a:ext cx="4030940" cy="1021470"/>
+          </a:xfrm>
+          <a:prstGeom prst="rect">
+            <a:avLst/>
+          </a:prstGeom>
+          <a:solidFill>
+            <a:schemeClr val="accent4">
+              <a:lumMod val="20000"/>
+              <a:lumOff val="80000"/>
+            </a:schemeClr>
+          </a:solidFill>
+          <a:ln>
+            <a:noFill/>
+          </a:ln>
+        </p:spPr>
+        <p:style>
+          <a:lnRef idx="2">
+            <a:schemeClr val="accent1">
+              <a:shade val="15000"/>
+            </a:schemeClr>
+          </a:lnRef>
+          <a:fillRef idx="1">
+            <a:schemeClr val="accent1"/>
+          </a:fillRef>
+          <a:effectRef idx="0">
+            <a:schemeClr val="accent1"/>
+          </a:effectRef>
+          <a:fontRef idx="minor">
+            <a:schemeClr val="lt1"/>
+          </a:fontRef>
+        </p:style>
+        <p:txBody>
+          <a:bodyPr rtlCol="0" anchor="t"/>
+          <a:lstStyle/>
+          <a:p>
+            <a:endParaRPr lang="en-US" altLang="ja-JP" sz="1200" dirty="0">
+              <a:solidFill>
+                <a:schemeClr val="tx1"/>
+              </a:solidFill>
+            </a:endParaRPr>
+          </a:p>
+        </p:txBody>
+      </p:sp>
+      <p:pic>
+        <p:nvPicPr>
+          <p:cNvPr id="22" name="図 21">
+            <a:extLst>
+              <a:ext uri="{FF2B5EF4-FFF2-40B4-BE49-F238E27FC236}">
+                <a16:creationId xmlns:a16="http://schemas.microsoft.com/office/drawing/2014/main" id="{37A768CB-6A81-71DB-479A-65242BF8D651}"/>
+              </a:ext>
+            </a:extLst>
+          </p:cNvPr>
+          <p:cNvPicPr>
+            <a:picLocks noChangeAspect="1"/>
+          </p:cNvPicPr>
+          <p:nvPr/>
+        </p:nvPicPr>
+        <p:blipFill>
+          <a:blip r:embed="rId2"/>
+          <a:stretch>
+            <a:fillRect/>
+          </a:stretch>
+        </p:blipFill>
+        <p:spPr>
+          <a:xfrm>
+            <a:off x="6901901" y="1980557"/>
+            <a:ext cx="1629002" cy="600159"/>
+          </a:xfrm>
+          <a:prstGeom prst="rect">
+            <a:avLst/>
+          </a:prstGeom>
+          <a:ln>
+            <a:solidFill>
+              <a:schemeClr val="bg2">
+                <a:lumMod val="90000"/>
+              </a:schemeClr>
+            </a:solidFill>
+          </a:ln>
+        </p:spPr>
+      </p:pic>
+      <p:pic>
+        <p:nvPicPr>
+          <p:cNvPr id="23" name="図 22">
+            <a:extLst>
+              <a:ext uri="{FF2B5EF4-FFF2-40B4-BE49-F238E27FC236}">
+                <a16:creationId xmlns:a16="http://schemas.microsoft.com/office/drawing/2014/main" id="{90A4F5A3-F1D1-3A9A-0785-6EA2F510BBD5}"/>
+              </a:ext>
+            </a:extLst>
+          </p:cNvPr>
+          <p:cNvPicPr>
+            <a:picLocks noChangeAspect="1"/>
+          </p:cNvPicPr>
+          <p:nvPr/>
+        </p:nvPicPr>
+        <p:blipFill>
+          <a:blip r:embed="rId3"/>
+          <a:stretch>
+            <a:fillRect/>
+          </a:stretch>
+        </p:blipFill>
+        <p:spPr>
+          <a:xfrm>
+            <a:off x="8966089" y="1904346"/>
+            <a:ext cx="1590897" cy="752580"/>
+          </a:xfrm>
+          <a:prstGeom prst="rect">
+            <a:avLst/>
+          </a:prstGeom>
+          <a:ln>
+            <a:solidFill>
+              <a:schemeClr val="bg2">
+                <a:lumMod val="90000"/>
+              </a:schemeClr>
+            </a:solidFill>
+          </a:ln>
+        </p:spPr>
+      </p:pic>
+      <p:sp>
+        <p:nvSpPr>
+          <p:cNvPr id="31" name="正方形/長方形 30">
+            <a:extLst>
+              <a:ext uri="{FF2B5EF4-FFF2-40B4-BE49-F238E27FC236}">
+                <a16:creationId xmlns:a16="http://schemas.microsoft.com/office/drawing/2014/main" id="{CC6A8057-71B1-8BBA-7CB8-AFA2479741BB}"/>
+              </a:ext>
+            </a:extLst>
+          </p:cNvPr>
+          <p:cNvSpPr/>
+          <p:nvPr/>
+        </p:nvSpPr>
+        <p:spPr>
+          <a:xfrm>
+            <a:off x="2173830" y="2603244"/>
+            <a:ext cx="4364269" cy="1173275"/>
+          </a:xfrm>
+          <a:prstGeom prst="rect">
+            <a:avLst/>
+          </a:prstGeom>
+          <a:solidFill>
+            <a:schemeClr val="accent4">
+              <a:lumMod val="20000"/>
+              <a:lumOff val="80000"/>
+            </a:schemeClr>
+          </a:solidFill>
+          <a:ln>
+            <a:noFill/>
+          </a:ln>
+        </p:spPr>
+        <p:style>
+          <a:lnRef idx="2">
+            <a:schemeClr val="accent1">
+              <a:shade val="15000"/>
+            </a:schemeClr>
+          </a:lnRef>
+          <a:fillRef idx="1">
+            <a:schemeClr val="accent1"/>
+          </a:fillRef>
+          <a:effectRef idx="0">
+            <a:schemeClr val="accent1"/>
+          </a:effectRef>
+          <a:fontRef idx="minor">
+            <a:schemeClr val="lt1"/>
+          </a:fontRef>
+        </p:style>
+        <p:txBody>
+          <a:bodyPr rtlCol="0" anchor="t"/>
+          <a:lstStyle/>
+          <a:p>
+            <a:endParaRPr lang="en-US" altLang="ja-JP" sz="1200" dirty="0">
+              <a:solidFill>
+                <a:schemeClr val="tx1"/>
+              </a:solidFill>
+            </a:endParaRPr>
+          </a:p>
+        </p:txBody>
+      </p:sp>
+      <p:pic>
+        <p:nvPicPr>
+          <p:cNvPr id="24" name="図 23">
+            <a:extLst>
+              <a:ext uri="{FF2B5EF4-FFF2-40B4-BE49-F238E27FC236}">
+                <a16:creationId xmlns:a16="http://schemas.microsoft.com/office/drawing/2014/main" id="{D93ADC11-5118-8D45-6C6B-556E6B4F2E69}"/>
+              </a:ext>
+            </a:extLst>
+          </p:cNvPr>
+          <p:cNvPicPr>
+            <a:picLocks noChangeAspect="1"/>
+          </p:cNvPicPr>
+          <p:nvPr/>
+        </p:nvPicPr>
+        <p:blipFill>
+          <a:blip r:embed="rId4"/>
+          <a:stretch>
+            <a:fillRect/>
+          </a:stretch>
+        </p:blipFill>
+        <p:spPr>
+          <a:xfrm>
+            <a:off x="2447474" y="2818355"/>
+            <a:ext cx="1657581" cy="743054"/>
+          </a:xfrm>
+          <a:prstGeom prst="rect">
+            <a:avLst/>
+          </a:prstGeom>
+          <a:ln>
+            <a:solidFill>
+              <a:schemeClr val="bg2">
+                <a:lumMod val="90000"/>
+              </a:schemeClr>
+            </a:solidFill>
+          </a:ln>
+        </p:spPr>
+      </p:pic>
+      <p:pic>
+        <p:nvPicPr>
+          <p:cNvPr id="26" name="図 25">
+            <a:extLst>
+              <a:ext uri="{FF2B5EF4-FFF2-40B4-BE49-F238E27FC236}">
+                <a16:creationId xmlns:a16="http://schemas.microsoft.com/office/drawing/2014/main" id="{B7F6324F-03DD-A90C-7A4D-6D7983B5AE41}"/>
+              </a:ext>
+            </a:extLst>
+          </p:cNvPr>
+          <p:cNvPicPr>
+            <a:picLocks noChangeAspect="1"/>
+          </p:cNvPicPr>
+          <p:nvPr/>
+        </p:nvPicPr>
+        <p:blipFill>
+          <a:blip r:embed="rId5"/>
+          <a:stretch>
+            <a:fillRect/>
+          </a:stretch>
+        </p:blipFill>
+        <p:spPr>
+          <a:xfrm>
+            <a:off x="4419060" y="2915726"/>
+            <a:ext cx="2000529" cy="495369"/>
+          </a:xfrm>
+          <a:prstGeom prst="rect">
+            <a:avLst/>
+          </a:prstGeom>
+          <a:ln>
+            <a:solidFill>
+              <a:schemeClr val="bg2">
+                <a:lumMod val="90000"/>
+              </a:schemeClr>
+            </a:solidFill>
+          </a:ln>
+        </p:spPr>
+      </p:pic>
+      <p:cxnSp>
+        <p:nvCxnSpPr>
+          <p:cNvPr id="32" name="直線矢印コネクタ 31">
+            <a:extLst>
+              <a:ext uri="{FF2B5EF4-FFF2-40B4-BE49-F238E27FC236}">
+                <a16:creationId xmlns:a16="http://schemas.microsoft.com/office/drawing/2014/main" id="{02955551-19D7-3FDC-1CF9-6F10FA286C7C}"/>
+              </a:ext>
+            </a:extLst>
+          </p:cNvPr>
+          <p:cNvCxnSpPr>
+            <a:cxnSpLocks/>
+          </p:cNvCxnSpPr>
+          <p:nvPr/>
+        </p:nvCxnSpPr>
+        <p:spPr>
+          <a:xfrm>
+            <a:off x="8357811" y="2317153"/>
+            <a:ext cx="581891" cy="0"/>
+          </a:xfrm>
+          <a:prstGeom prst="straightConnector1">
+            <a:avLst/>
+          </a:prstGeom>
+          <a:ln w="57150">
+            <a:solidFill>
+              <a:schemeClr val="accent4">
+                <a:lumMod val="75000"/>
+              </a:schemeClr>
+            </a:solidFill>
+            <a:tailEnd type="triangle"/>
+          </a:ln>
+        </p:spPr>
+        <p:style>
+          <a:lnRef idx="1">
+            <a:schemeClr val="accent1"/>
+          </a:lnRef>
+          <a:fillRef idx="0">
+            <a:schemeClr val="accent1"/>
+          </a:fillRef>
+          <a:effectRef idx="0">
+            <a:schemeClr val="accent1"/>
+          </a:effectRef>
+          <a:fontRef idx="minor">
+            <a:schemeClr val="tx1"/>
+          </a:fontRef>
+        </p:style>
+      </p:cxnSp>
+      <p:cxnSp>
+        <p:nvCxnSpPr>
+          <p:cNvPr id="34" name="直線矢印コネクタ 33">
+            <a:extLst>
+              <a:ext uri="{FF2B5EF4-FFF2-40B4-BE49-F238E27FC236}">
+                <a16:creationId xmlns:a16="http://schemas.microsoft.com/office/drawing/2014/main" id="{3B96D947-F719-0E0C-7C34-737F65042B40}"/>
+              </a:ext>
+            </a:extLst>
+          </p:cNvPr>
+          <p:cNvCxnSpPr>
+            <a:cxnSpLocks/>
+          </p:cNvCxnSpPr>
+          <p:nvPr/>
+        </p:nvCxnSpPr>
+        <p:spPr>
+          <a:xfrm>
+            <a:off x="3814109" y="3158539"/>
+            <a:ext cx="581891" cy="0"/>
+          </a:xfrm>
+          <a:prstGeom prst="straightConnector1">
+            <a:avLst/>
+          </a:prstGeom>
+          <a:ln w="57150">
+            <a:solidFill>
+              <a:schemeClr val="accent4">
+                <a:lumMod val="75000"/>
+              </a:schemeClr>
+            </a:solidFill>
+            <a:tailEnd type="triangle"/>
+          </a:ln>
+        </p:spPr>
+        <p:style>
+          <a:lnRef idx="1">
+            <a:schemeClr val="accent1"/>
+          </a:lnRef>
+          <a:fillRef idx="0">
+            <a:schemeClr val="accent1"/>
+          </a:fillRef>
+          <a:effectRef idx="0">
+            <a:schemeClr val="accent1"/>
+          </a:effectRef>
+          <a:fontRef idx="minor">
+            <a:schemeClr val="tx1"/>
+          </a:fontRef>
+        </p:style>
+      </p:cxnSp>
     </p:spTree>
     <p:extLst>
       <p:ext uri="{BB962C8B-B14F-4D97-AF65-F5344CB8AC3E}">
@@ -33177,6 +34787,66 @@
           </a:fontRef>
         </p:style>
       </p:cxnSp>
+      <p:sp>
+        <p:nvSpPr>
+          <p:cNvPr id="8" name="楕円 7">
+            <a:extLst>
+              <a:ext uri="{FF2B5EF4-FFF2-40B4-BE49-F238E27FC236}">
+                <a16:creationId xmlns:a16="http://schemas.microsoft.com/office/drawing/2014/main" id="{7C88862C-DC1D-159D-02CB-60BFB2588B62}"/>
+              </a:ext>
+            </a:extLst>
+          </p:cNvPr>
+          <p:cNvSpPr/>
+          <p:nvPr/>
+        </p:nvSpPr>
+        <p:spPr>
+          <a:xfrm>
+            <a:off x="4129664" y="1188605"/>
+            <a:ext cx="206220" cy="232109"/>
+          </a:xfrm>
+          <a:prstGeom prst="ellipse">
+            <a:avLst/>
+          </a:prstGeom>
+          <a:solidFill>
+            <a:schemeClr val="accent4">
+              <a:lumMod val="75000"/>
+            </a:schemeClr>
+          </a:solidFill>
+          <a:ln>
+            <a:noFill/>
+          </a:ln>
+        </p:spPr>
+        <p:style>
+          <a:lnRef idx="2">
+            <a:schemeClr val="accent1">
+              <a:shade val="15000"/>
+            </a:schemeClr>
+          </a:lnRef>
+          <a:fillRef idx="1">
+            <a:schemeClr val="accent1"/>
+          </a:fillRef>
+          <a:effectRef idx="0">
+            <a:schemeClr val="accent1"/>
+          </a:effectRef>
+          <a:fontRef idx="minor">
+            <a:schemeClr val="lt1"/>
+          </a:fontRef>
+        </p:style>
+        <p:txBody>
+          <a:bodyPr tIns="90000" rtlCol="0" anchor="ctr"/>
+          <a:lstStyle/>
+          <a:p>
+            <a:pPr algn="ctr"/>
+            <a:r>
+              <a:rPr kumimoji="1" lang="ja-JP" altLang="en-US" dirty="0">
+                <a:latin typeface="メイリオ" panose="020B0604030504040204" pitchFamily="50" charset="-128"/>
+                <a:ea typeface="メイリオ" panose="020B0604030504040204" pitchFamily="50" charset="-128"/>
+              </a:rPr>
+              <a:t>１</a:t>
+            </a:r>
+          </a:p>
+        </p:txBody>
+      </p:sp>
     </p:spTree>
     <p:extLst>
       <p:ext uri="{BB962C8B-B14F-4D97-AF65-F5344CB8AC3E}">
